--- a/plugins/gradient-cio/assets/examples/gradient-odd-report.pptx
+++ b/plugins/gradient-cio/assets/examples/gradient-odd-report.pptx
@@ -1,31 +1,30 @@
 
 <file path=ppt/presentation.xml><?xml version="1.0" encoding="utf-8"?>
-<p:presentation xmlns:a="http://schemas.openxmlformats.org/drawingml/2006/main" xmlns:r="http://schemas.openxmlformats.org/officeDocument/2006/relationships" xmlns:p="http://schemas.openxmlformats.org/presentationml/2006/main" saveSubsetFonts="1" autoCompressPictures="0">
-  <p:sldMasterIdLst>
-    <p:sldMasterId id="2147483648" r:id="rId1"/>
-  </p:sldMasterIdLst>
-  <p:sldIdLst>
-    <p:sldId id="256" r:id="rId7"/>
-    <p:sldId id="257" r:id="rId8"/>
-    <p:sldId id="258" r:id="rId9"/>
-    <p:sldId id="259" r:id="rId10"/>
-    <p:sldId id="260" r:id="rId11"/>
-    <p:sldId id="261" r:id="rId12"/>
-    <p:sldId id="262" r:id="rId13"/>
-    <p:sldId id="263" r:id="rId14"/>
-    <p:sldId id="264" r:id="rId15"/>
-    <p:sldId id="265" r:id="rId16"/>
-    <p:sldId id="266" r:id="rId17"/>
-    <p:sldId id="267" r:id="rId18"/>
-    <p:sldId id="268" r:id="rId19"/>
-    <p:sldId id="269" r:id="rId20"/>
-    <p:sldId id="270" r:id="rId21"/>
-    <p:sldId id="271" r:id="rId22"/>
-    <p:sldId id="272" r:id="rId23"/>
-  </p:sldIdLst>
-  <p:sldSz cx="12191695" cy="6858000" type="screen4x3"/>
-  <p:notesSz cx="6858000" cy="9144000"/>
-  <p:defaultTextStyle>
+<ns0:presentation xmlns:a="http://schemas.openxmlformats.org/drawingml/2006/main" xmlns:ns0="http://schemas.openxmlformats.org/presentationml/2006/main" xmlns:ns1="http://schemas.openxmlformats.org/officeDocument/2006/relationships" saveSubsetFonts="1" autoCompressPictures="0">
+  <ns0:sldMasterIdLst>
+    <ns0:sldMasterId id="2147483648" ns1:id="rId1"/>
+  </ns0:sldMasterIdLst>
+  <ns0:sldIdLst>
+    <ns0:sldId id="256" ns1:id="rId7"/>
+    <ns0:sldId id="257" ns1:id="rId8"/>
+    <ns0:sldId id="258" ns1:id="rId9"/>
+    <ns0:sldId id="259" ns1:id="rId10"/>
+    <ns0:sldId id="260" ns1:id="rId11"/>
+    <ns0:sldId id="261" ns1:id="rId12"/>
+    <ns0:sldId id="262" ns1:id="rId13"/>
+    <ns0:sldId id="263" ns1:id="rId14"/>
+    <ns0:sldId id="264" ns1:id="rId15"/>
+    <ns0:sldId id="265" ns1:id="rId16"/>
+    <ns0:sldId id="266" ns1:id="rId17"/>
+    <ns0:sldId id="267" ns1:id="rId18"/>
+    <ns0:sldId id="268" ns1:id="rId19"/>
+    <ns0:sldId id="269" ns1:id="rId20"/>
+    <ns0:sldId id="270" ns1:id="rId21"/>
+    <ns0:sldId id="271" ns1:id="rId22"/>
+  </ns0:sldIdLst>
+  <ns0:sldSz cx="12191695" cy="6858000" type="screen16x9"/>
+  <ns0:notesSz cx="6858000" cy="9144000"/>
+  <ns0:defaultTextStyle>
     <a:defPPr>
       <a:defRPr lang="en-US"/>
     </a:defPPr>
@@ -119,8 +118,8 @@
         <a:cs typeface="+mn-cs"/>
       </a:defRPr>
     </a:lvl9pPr>
-  </p:defaultTextStyle>
-</p:presentation>
+  </ns0:defaultTextStyle>
+</ns0:presentation>
 </file>
 
 <file path=ppt/charts/chart1.xml><?xml version="1.0" encoding="utf-8"?>
@@ -131,7 +130,7 @@
     <c:plotArea>
       <c:barChart>
         <c:barDir val="bar"/>
-        <c:grouping val="clustered"/>
+        <c:grouping val="stacked"/>
         <c:ser>
           <c:idx val="0"/>
           <c:order val="0"/>
@@ -141,7 +140,7 @@
               <c:strCache>
                 <c:ptCount val="1"/>
                 <c:pt idx="0">
-                  <c:v>Value</c:v>
+                  <c:v>Pooled vehicles</c:v>
                 </c:pt>
               </c:strCache>
             </c:strRef>
@@ -151,114 +150,203 @@
               <a:srgbClr val="0D1117"/>
             </a:solidFill>
           </c:spPr>
-          <c:dPt>
-            <c:idx val="0"/>
-            <c:spPr>
-              <a:solidFill>
-                <a:srgbClr val="C6F432"/>
-              </a:solidFill>
-            </c:spPr>
-          </c:dPt>
-          <c:dPt>
-            <c:idx val="1"/>
-            <c:spPr>
-              <a:solidFill>
-                <a:srgbClr val="C6F432"/>
-              </a:solidFill>
-            </c:spPr>
-          </c:dPt>
-          <c:dPt>
-            <c:idx val="2"/>
-            <c:spPr>
-              <a:solidFill>
-                <a:srgbClr val="C6F432"/>
-              </a:solidFill>
-            </c:spPr>
-          </c:dPt>
-          <c:dPt>
-            <c:idx val="3"/>
-            <c:spPr>
-              <a:solidFill>
-                <a:srgbClr val="C6F432"/>
-              </a:solidFill>
-            </c:spPr>
-          </c:dPt>
-          <c:dPt>
-            <c:idx val="4"/>
-            <c:spPr>
-              <a:solidFill>
-                <a:srgbClr val="C6F432"/>
-              </a:solidFill>
-            </c:spPr>
-          </c:dPt>
           <c:cat>
             <c:strRef>
-              <c:f>Sheet1!$A$2:$A$6</c:f>
+              <c:f>Sheet1!$A$2:$A$2</c:f>
               <c:strCache>
-                <c:ptCount val="5"/>
+                <c:ptCount val="1"/>
                 <c:pt idx="0">
-                  <c:v>Pooled vehicles</c:v>
-                </c:pt>
-                <c:pt idx="1">
-                  <c:v>Other</c:v>
-                </c:pt>
-                <c:pt idx="2">
-                  <c:v>Sovereign</c:v>
-                </c:pt>
-                <c:pt idx="3">
-                  <c:v>State &amp; municipal</c:v>
-                </c:pt>
-                <c:pt idx="4">
-                  <c:v>Pension plans</c:v>
+                  <c:v>Client assets</c:v>
                 </c:pt>
               </c:strCache>
             </c:strRef>
           </c:cat>
           <c:val>
             <c:numRef>
-              <c:f>Sheet1!$B$2:$B$6</c:f>
+              <c:f>Sheet1!$B$2:$B$2</c:f>
               <c:numCache>
                 <c:formatCode>General</c:formatCode>
-                <c:ptCount val="5"/>
+                <c:ptCount val="1"/>
                 <c:pt idx="0">
                   <c:v>114.73</c:v>
                 </c:pt>
-                <c:pt idx="1">
+              </c:numCache>
+            </c:numRef>
+          </c:val>
+        </c:ser>
+        <c:ser>
+          <c:idx val="1"/>
+          <c:order val="1"/>
+          <c:tx>
+            <c:strRef>
+              <c:f>Sheet1!$C$1</c:f>
+              <c:strCache>
+                <c:ptCount val="1"/>
+                <c:pt idx="0">
+                  <c:v>Other</c:v>
+                </c:pt>
+              </c:strCache>
+            </c:strRef>
+          </c:tx>
+          <c:spPr>
+            <a:solidFill>
+              <a:srgbClr val="7FA600"/>
+            </a:solidFill>
+          </c:spPr>
+          <c:cat>
+            <c:strRef>
+              <c:f>Sheet1!$A$2:$A$2</c:f>
+              <c:strCache>
+                <c:ptCount val="1"/>
+                <c:pt idx="0">
+                  <c:v>Client assets</c:v>
+                </c:pt>
+              </c:strCache>
+            </c:strRef>
+          </c:cat>
+          <c:val>
+            <c:numRef>
+              <c:f>Sheet1!$C$2:$C$2</c:f>
+              <c:numCache>
+                <c:formatCode>General</c:formatCode>
+                <c:ptCount val="1"/>
+                <c:pt idx="0">
                   <c:v>12.6</c:v>
                 </c:pt>
-                <c:pt idx="2">
+              </c:numCache>
+            </c:numRef>
+          </c:val>
+        </c:ser>
+        <c:ser>
+          <c:idx val="2"/>
+          <c:order val="2"/>
+          <c:tx>
+            <c:strRef>
+              <c:f>Sheet1!$D$1</c:f>
+              <c:strCache>
+                <c:ptCount val="1"/>
+                <c:pt idx="0">
+                  <c:v>Sovereign</c:v>
+                </c:pt>
+              </c:strCache>
+            </c:strRef>
+          </c:tx>
+          <c:spPr>
+            <a:solidFill>
+              <a:srgbClr val="F2A93B"/>
+            </a:solidFill>
+          </c:spPr>
+          <c:cat>
+            <c:strRef>
+              <c:f>Sheet1!$A$2:$A$2</c:f>
+              <c:strCache>
+                <c:ptCount val="1"/>
+                <c:pt idx="0">
+                  <c:v>Client assets</c:v>
+                </c:pt>
+              </c:strCache>
+            </c:strRef>
+          </c:cat>
+          <c:val>
+            <c:numRef>
+              <c:f>Sheet1!$D$2:$D$2</c:f>
+              <c:numCache>
+                <c:formatCode>General</c:formatCode>
+                <c:ptCount val="1"/>
+                <c:pt idx="0">
                   <c:v>8.85</c:v>
                 </c:pt>
-                <c:pt idx="3">
+              </c:numCache>
+            </c:numRef>
+          </c:val>
+        </c:ser>
+        <c:ser>
+          <c:idx val="3"/>
+          <c:order val="3"/>
+          <c:tx>
+            <c:strRef>
+              <c:f>Sheet1!$E$1</c:f>
+              <c:strCache>
+                <c:ptCount val="1"/>
+                <c:pt idx="0">
+                  <c:v>State &amp; municipal</c:v>
+                </c:pt>
+              </c:strCache>
+            </c:strRef>
+          </c:tx>
+          <c:spPr>
+            <a:solidFill>
+              <a:srgbClr val="5B8DEF"/>
+            </a:solidFill>
+          </c:spPr>
+          <c:cat>
+            <c:strRef>
+              <c:f>Sheet1!$A$2:$A$2</c:f>
+              <c:strCache>
+                <c:ptCount val="1"/>
+                <c:pt idx="0">
+                  <c:v>Client assets</c:v>
+                </c:pt>
+              </c:strCache>
+            </c:strRef>
+          </c:cat>
+          <c:val>
+            <c:numRef>
+              <c:f>Sheet1!$E$2:$E$2</c:f>
+              <c:numCache>
+                <c:formatCode>General</c:formatCode>
+                <c:ptCount val="1"/>
+                <c:pt idx="0">
                   <c:v>7.96</c:v>
                 </c:pt>
-                <c:pt idx="4">
+              </c:numCache>
+            </c:numRef>
+          </c:val>
+        </c:ser>
+        <c:ser>
+          <c:idx val="4"/>
+          <c:order val="4"/>
+          <c:tx>
+            <c:strRef>
+              <c:f>Sheet1!$F$1</c:f>
+              <c:strCache>
+                <c:ptCount val="1"/>
+                <c:pt idx="0">
+                  <c:v>Pension plans</c:v>
+                </c:pt>
+              </c:strCache>
+            </c:strRef>
+          </c:tx>
+          <c:spPr>
+            <a:solidFill>
+              <a:srgbClr val="FF6B5E"/>
+            </a:solidFill>
+          </c:spPr>
+          <c:cat>
+            <c:strRef>
+              <c:f>Sheet1!$A$2:$A$2</c:f>
+              <c:strCache>
+                <c:ptCount val="1"/>
+                <c:pt idx="0">
+                  <c:v>Client assets</c:v>
+                </c:pt>
+              </c:strCache>
+            </c:strRef>
+          </c:cat>
+          <c:val>
+            <c:numRef>
+              <c:f>Sheet1!$F$2:$F$2</c:f>
+              <c:numCache>
+                <c:formatCode>General</c:formatCode>
+                <c:ptCount val="1"/>
+                <c:pt idx="0">
                   <c:v>5.32</c:v>
                 </c:pt>
               </c:numCache>
             </c:numRef>
           </c:val>
         </c:ser>
-        <c:dLbls>
-          <c:txPr>
-            <a:bodyPr/>
-            <a:lstStyle/>
-            <a:p>
-              <a:pPr>
-                <a:defRPr sz="800"/>
-              </a:pPr>
-            </a:p>
-          </c:txPr>
-          <c:dLblPos val="outEnd"/>
-          <c:showLegendKey val="0"/>
-          <c:showVal val="1"/>
-          <c:showCatName val="0"/>
-          <c:showSerName val="0"/>
-          <c:showPercent val="0"/>
-          <c:showBubbleSize val="0"/>
-          <c:showLeaderLines val="1"/>
-        </c:dLbls>
-        <c:gapWidth val="55"/>
+        <c:overlap val="100"/>
         <c:axId val="-2068027336"/>
         <c:axId val="-2113994440"/>
       </c:barChart>
@@ -297,19 +385,13 @@
         <c:majorTickMark val="out"/>
         <c:minorTickMark val="none"/>
         <c:tickLblPos val="nextTo"/>
-        <c:txPr>
-          <a:bodyPr/>
-          <a:lstStyle/>
-          <a:p>
-            <a:pPr>
-              <a:defRPr sz="800"/>
-            </a:pPr>
-          </a:p>
-        </c:txPr>
         <c:crossAx val="-2068027336"/>
         <c:crosses val="autoZero"/>
       </c:valAx>
     </c:plotArea>
+    <c:legend>
+      <c:legendPos val="b"/>
+    </c:legend>
     <c:dispBlanksAs val="gap"/>
   </c:chart>
   <c:txPr>
@@ -961,7 +1043,7 @@
           </a:p>
           <a:p>
             <a:r>
-              <a:t>Observation: The TEST adviser reports $12.4B of RAUM and 38 private funds [S1]. Why it matters: Scale raises the importance of ownership and service-provider controls. Uncertainty: The compact fixture omits owner detail. What would change the view: Corroborated ownership evidence that changes the control assessment.</a:t>
+              <a:t>Observation: The TEST adviser reports $12.4B of RAUM and 38 private funds [S1]. Why it matters: Scale raises the importance of ownership and provider controls. Uncertainty: The compact fixture omits detailed owner records. What would change the view: Corroborated ownership records changing the control assessment.</a:t>
             </a:r>
           </a:p>
         </p:txBody>
@@ -1036,7 +1118,7 @@
           </a:p>
           <a:p>
             <a:r>
-              <a:t>Observation: Detailed conflict and custody rows are unavailable in this compact TEST record [S1]. Why it matters: The signal cannot be read as a clean bill of health. Uncertainty: Missing detail may contain neutral or adverse items. What would change the view: A validated complete ADV response set.</a:t>
+              <a:t>Observation: Zero detailed conflict or custody rows are available in this compact TEST record [S1]. Why it matters: The signal cannot be read as a clean bill of health. Uncertainty: Missing rows may contain neutral or adverse items. What would change the view: A complete validated ADV response set.</a:t>
             </a:r>
           </a:p>
         </p:txBody>
@@ -1111,7 +1193,7 @@
           </a:p>
           <a:p>
             <a:r>
-              <a:t>Observation: No pillar reaches the 75th percentile, while events remain unavailable [S1]. Why it matters: Moderate peer positioning does not override unresolved findings or gaps in the composite signal. Uncertainty: The cohort is Gradient-selected. What would change the view: New findings or materially different validated pillar percentiles.</a:t>
+              <a:t>Observation: No pillar reaches the 75th percentile, while events remain unavailable [S1]. Why it matters: Moderate peer positioning does not override unresolved findings. Uncertainty: Gradient-selected cohort coverage may not represent every comparable adviser. What would change the view: Refreshed results above the 75th percentile or new findings.</a:t>
             </a:r>
           </a:p>
         </p:txBody>
@@ -1186,7 +1268,7 @@
           </a:p>
           <a:p>
             <a:r>
-              <a:t>Observation: Fund-level service-provider evidence is absent from the compact TEST record [S1]. Why it matters: Operating-party independence cannot be assessed. Uncertainty: Absence is not adverse evidence. What would change the view: Validated fund records naming the administrator, auditor and custodian.</a:t>
+              <a:t>Observation: Zero fund-level provider records appear in the compact TEST fixture [S1]. Why it matters: Independence among operating parties cannot yet be assessed. Uncertainty: Missing provider coverage is not affirmative adverse evidence. What would change the view: Validated records naming the administrator, auditor and custodian.</a:t>
             </a:r>
           </a:p>
         </p:txBody>
@@ -1261,7 +1343,7 @@
           </a:p>
           <a:p>
             <a:r>
-              <a:t>Observation: A Form 13F snapshot exists, but holding rows are omitted from this TEST fixture [S3]. Why it matters: Concentration cannot be interpreted from the summary alone. Uncertainty: Form 13F is lagged and partial. What would change the view: Complete validated holding rows and identity reconciliation.</a:t>
+              <a:t>Observation: One Form 13F snapshot exists, but holding rows are omitted from this TEST fixture [S3]. Why it matters: Concentration cannot be interpreted from the summary alone. Uncertainty: Form 13F coverage is lagged and partial. What would change the view: Complete holding records plus successful identity reconciliation.</a:t>
             </a:r>
           </a:p>
         </p:txBody>
@@ -1336,7 +1418,7 @@
           </a:p>
           <a:p>
             <a:r>
-              <a:t>Observation: Filing dates are known, but firm and fund events are unavailable [S1] [S2] [S3]. Why it matters: A quiet timeline cannot be inferred from missing publication. Uncertainty: Unpublished events may be immaterial or significant. What would change the view: Complete event coverage with validated open findings.</a:t>
+              <a:t>Observation: Three filing dates are known, but firm and fund events are unavailable [S1] [S2] [S3]. Why it matters: A quiet timeline cannot be inferred from missing publication. Uncertainty: Unpublished event coverage may conceal immaterial or significant changes. What would change the view: Complete event records plus validated open findings.</a:t>
             </a:r>
           </a:p>
         </p:txBody>
@@ -3499,7 +3581,11 @@
           <a:bodyPr rtlCol="0" anchor="ctr"/>
           <a:lstStyle/>
           <a:p>
-            <a:pPr algn="ctr"/>
+            <a:pPr algn="ctr">
+              <a:defRPr>
+                <a:latin typeface="Inter"/>
+              </a:defRPr>
+            </a:pPr>
           </a:p>
         </p:txBody>
       </p:sp>
@@ -3544,7 +3630,11 @@
           <a:bodyPr rtlCol="0" anchor="ctr"/>
           <a:lstStyle/>
           <a:p>
-            <a:pPr algn="ctr"/>
+            <a:pPr algn="ctr">
+              <a:defRPr>
+                <a:latin typeface="Inter"/>
+              </a:defRPr>
+            </a:pPr>
           </a:p>
         </p:txBody>
       </p:sp>
@@ -3557,7 +3647,7 @@
         <p:spPr>
           <a:xfrm>
             <a:off x="685800" y="457200"/>
-            <a:ext cx="2743200" cy="320040"/>
+            <a:ext cx="4754880" cy="320040"/>
           </a:xfrm>
           <a:prstGeom prst="rect">
             <a:avLst/>
@@ -3582,6 +3672,9 @@
               </a:defRPr>
             </a:pPr>
             <a:r>
+              <a:rPr>
+                <a:latin typeface="Inter"/>
+              </a:rPr>
               <a:t>GradientCIO</a:t>
             </a:r>
           </a:p>
@@ -3621,6 +3714,9 @@
               </a:defRPr>
             </a:pPr>
             <a:r>
+              <a:rPr>
+                <a:latin typeface="Inter"/>
+              </a:rPr>
               <a:t>OPERATIONAL DUE DILIGENCE REPORT</a:t>
             </a:r>
           </a:p>
@@ -3660,6 +3756,9 @@
               </a:defRPr>
             </a:pPr>
             <a:r>
+              <a:rPr>
+                <a:latin typeface="Inter"/>
+              </a:rPr>
               <a:t>Ridgeview Example Advisors, LP (TEST)</a:t>
             </a:r>
           </a:p>
@@ -3699,6 +3798,9 @@
               </a:defRPr>
             </a:pPr>
             <a:r>
+              <a:rPr>
+                <a:latin typeface="Inter"/>
+              </a:rPr>
               <a:t>Example City, ST · SEC-registered adviser · RENDER TEST</a:t>
             </a:r>
           </a:p>
@@ -3745,7 +3847,11 @@
           <a:bodyPr rtlCol="0" anchor="ctr"/>
           <a:lstStyle/>
           <a:p>
-            <a:pPr algn="ctr"/>
+            <a:pPr algn="ctr">
+              <a:defRPr>
+                <a:latin typeface="Inter"/>
+              </a:defRPr>
+            </a:pPr>
           </a:p>
         </p:txBody>
       </p:sp>
@@ -3783,6 +3889,9 @@
               </a:defRPr>
             </a:pPr>
             <a:r>
+              <a:rPr>
+                <a:latin typeface="Inter"/>
+              </a:rPr>
               <a:t>ADVISER CRD</a:t>
             </a:r>
           </a:p>
@@ -3822,6 +3931,9 @@
               </a:defRPr>
             </a:pPr>
             <a:r>
+              <a:rPr>
+                <a:latin typeface="Inter"/>
+              </a:rPr>
               <a:t>999901</a:t>
             </a:r>
           </a:p>
@@ -3861,6 +3973,9 @@
               </a:defRPr>
             </a:pPr>
             <a:r>
+              <a:rPr>
+                <a:latin typeface="Inter"/>
+              </a:rPr>
               <a:t>SEC FILE NO.</a:t>
             </a:r>
           </a:p>
@@ -3900,6 +4015,9 @@
               </a:defRPr>
             </a:pPr>
             <a:r>
+              <a:rPr>
+                <a:latin typeface="Inter"/>
+              </a:rPr>
               <a:t>801-00000</a:t>
             </a:r>
           </a:p>
@@ -3939,6 +4057,9 @@
               </a:defRPr>
             </a:pPr>
             <a:r>
+              <a:rPr>
+                <a:latin typeface="Inter"/>
+              </a:rPr>
               <a:t>REGULATORY AUM</a:t>
             </a:r>
           </a:p>
@@ -3978,6 +4099,9 @@
               </a:defRPr>
             </a:pPr>
             <a:r>
+              <a:rPr>
+                <a:latin typeface="Inter"/>
+              </a:rPr>
               <a:t>$12.40B</a:t>
             </a:r>
           </a:p>
@@ -4017,6 +4141,9 @@
               </a:defRPr>
             </a:pPr>
             <a:r>
+              <a:rPr>
+                <a:latin typeface="Inter"/>
+              </a:rPr>
               <a:t>FORM ADV REPORT DATE</a:t>
             </a:r>
           </a:p>
@@ -4056,6 +4183,9 @@
               </a:defRPr>
             </a:pPr>
             <a:r>
+              <a:rPr>
+                <a:latin typeface="Inter"/>
+              </a:rPr>
               <a:t>2026-10-01</a:t>
             </a:r>
           </a:p>
@@ -4095,6 +4225,9 @@
               </a:defRPr>
             </a:pPr>
             <a:r>
+              <a:rPr>
+                <a:latin typeface="Inter"/>
+              </a:rPr>
               <a:t>PREPARED FOR</a:t>
             </a:r>
           </a:p>
@@ -4134,6 +4267,9 @@
               </a:defRPr>
             </a:pPr>
             <a:r>
+              <a:rPr>
+                <a:latin typeface="Inter"/>
+              </a:rPr>
               <a:t>Gradient</a:t>
             </a:r>
           </a:p>
@@ -4173,6 +4309,9 @@
               </a:defRPr>
             </a:pPr>
             <a:r>
+              <a:rPr>
+                <a:latin typeface="Inter"/>
+              </a:rPr>
               <a:t>REPORT DATE</a:t>
             </a:r>
           </a:p>
@@ -4212,6 +4351,9 @@
               </a:defRPr>
             </a:pPr>
             <a:r>
+              <a:rPr>
+                <a:latin typeface="Inter"/>
+              </a:rPr>
               <a:t>2026-10-04</a:t>
             </a:r>
           </a:p>
@@ -4219,7 +4361,182 @@
       </p:sp>
       <p:sp>
         <p:nvSpPr>
-          <p:cNvPr id="21" name="TextBox 20"/>
+          <p:cNvPr id="21" name="Rectangle 20"/>
+          <p:cNvSpPr/>
+          <p:nvPr/>
+        </p:nvSpPr>
+        <p:spPr>
+          <a:xfrm>
+            <a:off x="685800" y="5833872"/>
+            <a:ext cx="3063240" cy="384048"/>
+          </a:xfrm>
+          <a:prstGeom prst="rect">
+            <a:avLst/>
+          </a:prstGeom>
+          <a:solidFill>
+            <a:srgbClr val="C6F432"/>
+          </a:solidFill>
+          <a:ln>
+            <a:solidFill>
+              <a:srgbClr val="C6F432"/>
+            </a:solidFill>
+          </a:ln>
+        </p:spPr>
+        <p:style>
+          <a:lnRef idx="1">
+            <a:schemeClr val="accent1"/>
+          </a:lnRef>
+          <a:fillRef idx="3">
+            <a:schemeClr val="accent1"/>
+          </a:fillRef>
+          <a:effectRef idx="2">
+            <a:schemeClr val="accent1"/>
+          </a:effectRef>
+          <a:fontRef idx="minor">
+            <a:schemeClr val="lt1"/>
+          </a:fontRef>
+        </p:style>
+        <p:txBody>
+          <a:bodyPr rtlCol="0" anchor="ctr"/>
+          <a:lstStyle/>
+          <a:p>
+            <a:pPr algn="ctr">
+              <a:defRPr>
+                <a:latin typeface="Inter"/>
+              </a:defRPr>
+            </a:pPr>
+          </a:p>
+        </p:txBody>
+      </p:sp>
+      <p:sp>
+        <p:nvSpPr>
+          <p:cNvPr id="22" name="TextBox 21"/>
+          <p:cNvSpPr txBox="1"/>
+          <p:nvPr/>
+        </p:nvSpPr>
+        <p:spPr>
+          <a:xfrm>
+            <a:off x="822960" y="5934456"/>
+            <a:ext cx="2788920" cy="164592"/>
+          </a:xfrm>
+          <a:prstGeom prst="rect">
+            <a:avLst/>
+          </a:prstGeom>
+          <a:noFill/>
+        </p:spPr>
+        <p:txBody>
+          <a:bodyPr wrap="none" lIns="9144" rIns="9144" tIns="9144" bIns="9144" anchor="t">
+            <a:spAutoFit/>
+          </a:bodyPr>
+          <a:lstStyle/>
+          <a:p>
+            <a:pPr algn="l">
+              <a:spcAft>
+                <a:spcPts val="0"/>
+              </a:spcAft>
+              <a:defRPr sz="800" b="1">
+                <a:solidFill>
+                  <a:srgbClr val="0D1117"/>
+                </a:solidFill>
+                <a:latin typeface="Inter"/>
+              </a:defRPr>
+            </a:pPr>
+            <a:r>
+              <a:rPr>
+                <a:latin typeface="Inter"/>
+              </a:rPr>
+              <a:t>No flags identified</a:t>
+            </a:r>
+          </a:p>
+        </p:txBody>
+      </p:sp>
+      <p:sp>
+        <p:nvSpPr>
+          <p:cNvPr id="23" name="TextBox 22"/>
+          <p:cNvSpPr txBox="1"/>
+          <p:nvPr/>
+        </p:nvSpPr>
+        <p:spPr>
+          <a:xfrm>
+            <a:off x="3977639" y="5824728"/>
+            <a:ext cx="3108960" cy="164592"/>
+          </a:xfrm>
+          <a:prstGeom prst="rect">
+            <a:avLst/>
+          </a:prstGeom>
+          <a:noFill/>
+        </p:spPr>
+        <p:txBody>
+          <a:bodyPr wrap="none" lIns="9144" rIns="9144" tIns="9144" bIns="9144" anchor="t">
+            <a:spAutoFit/>
+          </a:bodyPr>
+          <a:lstStyle/>
+          <a:p>
+            <a:pPr algn="l">
+              <a:spcAft>
+                <a:spcPts val="0"/>
+              </a:spcAft>
+              <a:defRPr sz="650" b="1">
+                <a:solidFill>
+                  <a:srgbClr val="8A94A1"/>
+                </a:solidFill>
+                <a:latin typeface="Inter"/>
+              </a:defRPr>
+            </a:pPr>
+            <a:r>
+              <a:rPr>
+                <a:latin typeface="Inter"/>
+              </a:rPr>
+              <a:t>EVIDENCE COMPLETENESS</a:t>
+            </a:r>
+          </a:p>
+        </p:txBody>
+      </p:sp>
+      <p:sp>
+        <p:nvSpPr>
+          <p:cNvPr id="24" name="TextBox 23"/>
+          <p:cNvSpPr txBox="1"/>
+          <p:nvPr/>
+        </p:nvSpPr>
+        <p:spPr>
+          <a:xfrm>
+            <a:off x="3977639" y="5998464"/>
+            <a:ext cx="3108960" cy="201168"/>
+          </a:xfrm>
+          <a:prstGeom prst="rect">
+            <a:avLst/>
+          </a:prstGeom>
+          <a:noFill/>
+        </p:spPr>
+        <p:txBody>
+          <a:bodyPr wrap="none" lIns="9144" rIns="9144" tIns="9144" bIns="9144" anchor="t">
+            <a:spAutoFit/>
+          </a:bodyPr>
+          <a:lstStyle/>
+          <a:p>
+            <a:pPr algn="l">
+              <a:spcAft>
+                <a:spcPts val="0"/>
+              </a:spcAft>
+              <a:defRPr sz="800" b="1">
+                <a:solidFill>
+                  <a:srgbClr val="FFFFFF"/>
+                </a:solidFill>
+                <a:latin typeface="Inter"/>
+              </a:defRPr>
+            </a:pPr>
+            <a:r>
+              <a:rPr>
+                <a:latin typeface="Inter"/>
+              </a:rPr>
+              <a:t>5 of 7 · Degraded</a:t>
+            </a:r>
+          </a:p>
+        </p:txBody>
+      </p:sp>
+      <p:sp>
+        <p:nvSpPr>
+          <p:cNvPr id="25" name="TextBox 24"/>
           <p:cNvSpPr txBox="1"/>
           <p:nvPr/>
         </p:nvSpPr>
@@ -4251,6 +4568,9 @@
               </a:defRPr>
             </a:pPr>
             <a:r>
+              <a:rPr>
+                <a:latin typeface="Inter"/>
+              </a:rPr>
               <a:t>RENDER TEST — partial sample, not a full ODD report</a:t>
             </a:r>
           </a:p>
@@ -4258,14 +4578,14 @@
       </p:sp>
       <p:sp>
         <p:nvSpPr>
-          <p:cNvPr id="22" name="TextBox 21"/>
+          <p:cNvPr id="26" name="TextBox 25"/>
           <p:cNvSpPr txBox="1"/>
           <p:nvPr/>
         </p:nvSpPr>
         <p:spPr>
           <a:xfrm>
-            <a:off x="9875520" y="6473952"/>
-            <a:ext cx="1645920" cy="182880"/>
+            <a:off x="8778240" y="6473952"/>
+            <a:ext cx="2743200" cy="182880"/>
           </a:xfrm>
           <a:prstGeom prst="rect">
             <a:avLst/>
@@ -4290,6 +4610,9 @@
               </a:defRPr>
             </a:pPr>
             <a:r>
+              <a:rPr>
+                <a:latin typeface="Inter"/>
+              </a:rPr>
               <a:t>GradientCIO.com</a:t>
             </a:r>
           </a:p>
@@ -4354,7 +4677,11 @@
           <a:bodyPr rtlCol="0" anchor="ctr"/>
           <a:lstStyle/>
           <a:p>
-            <a:pPr algn="ctr"/>
+            <a:pPr algn="ctr">
+              <a:defRPr>
+                <a:latin typeface="Inter"/>
+              </a:defRPr>
+            </a:pPr>
           </a:p>
         </p:txBody>
       </p:sp>
@@ -4392,6 +4719,9 @@
               </a:defRPr>
             </a:pPr>
             <a:r>
+              <a:rPr>
+                <a:latin typeface="Inter"/>
+              </a:rPr>
               <a:t>GRADIENT COHORT ANALYTICS · 587 ADVISERS</a:t>
             </a:r>
           </a:p>
@@ -4431,6 +4761,9 @@
               </a:defRPr>
             </a:pPr>
             <a:r>
+              <a:rPr>
+                <a:latin typeface="Inter"/>
+              </a:rPr>
               <a:t>Peer positioning — continued</a:t>
             </a:r>
           </a:p>
@@ -4477,7 +4810,11 @@
           <a:bodyPr rtlCol="0" anchor="ctr"/>
           <a:lstStyle/>
           <a:p>
-            <a:pPr algn="ctr"/>
+            <a:pPr algn="ctr">
+              <a:defRPr>
+                <a:latin typeface="Inter"/>
+              </a:defRPr>
+            </a:pPr>
           </a:p>
         </p:txBody>
       </p:sp>
@@ -4522,7 +4859,11 @@
           <a:bodyPr rtlCol="0" anchor="ctr"/>
           <a:lstStyle/>
           <a:p>
-            <a:pPr algn="ctr"/>
+            <a:pPr algn="ctr">
+              <a:defRPr>
+                <a:latin typeface="Inter"/>
+              </a:defRPr>
+            </a:pPr>
           </a:p>
         </p:txBody>
       </p:sp>
@@ -4560,6 +4901,9 @@
               </a:defRPr>
             </a:pPr>
             <a:r>
+              <a:rPr>
+                <a:latin typeface="Inter"/>
+              </a:rPr>
               <a:t>04</a:t>
             </a:r>
           </a:p>
@@ -4606,7 +4950,11 @@
           <a:bodyPr rtlCol="0" anchor="ctr"/>
           <a:lstStyle/>
           <a:p>
-            <a:pPr algn="ctr"/>
+            <a:pPr algn="ctr">
+              <a:defRPr>
+                <a:latin typeface="Inter"/>
+              </a:defRPr>
+            </a:pPr>
           </a:p>
         </p:txBody>
       </p:sp>
@@ -4651,7 +4999,11 @@
           <a:bodyPr rtlCol="0" anchor="ctr"/>
           <a:lstStyle/>
           <a:p>
-            <a:pPr algn="ctr"/>
+            <a:pPr algn="ctr">
+              <a:defRPr>
+                <a:latin typeface="Inter"/>
+              </a:defRPr>
+            </a:pPr>
           </a:p>
         </p:txBody>
       </p:sp>
@@ -4689,6 +5041,9 @@
               </a:defRPr>
             </a:pPr>
             <a:r>
+              <a:rPr>
+                <a:latin typeface="Inter"/>
+              </a:rPr>
               <a:t>Analysis — Percentiles do not close gaps</a:t>
             </a:r>
           </a:p>
@@ -4728,7 +5083,10 @@
               </a:defRPr>
             </a:pPr>
             <a:r>
-              <a:t>Observation: No pillar reaches the 75th percentile, while events remain unavailable [S1]. Why it matters: Moderate peer positioning does not override unresolved findings or gaps in the composite…</a:t>
+              <a:rPr>
+                <a:latin typeface="Inter"/>
+              </a:rPr>
+              <a:t>Observation: No pillar reaches the 75th percentile, while events remain unavailable [S1]. Why it matters: Moderate peer positioning does not override unresolved findings. Uncertainty: Gradient-selected cohort coverage may…</a:t>
             </a:r>
           </a:p>
         </p:txBody>
@@ -4774,7 +5132,11 @@
           <a:bodyPr rtlCol="0" anchor="ctr"/>
           <a:lstStyle/>
           <a:p>
-            <a:pPr algn="ctr"/>
+            <a:pPr algn="ctr">
+              <a:defRPr>
+                <a:latin typeface="Inter"/>
+              </a:defRPr>
+            </a:pPr>
           </a:p>
         </p:txBody>
       </p:sp>
@@ -4812,6 +5174,9 @@
               </a:defRPr>
             </a:pPr>
             <a:r>
+              <a:rPr>
+                <a:latin typeface="Inter"/>
+              </a:rPr>
               <a:t>Sources: S1</a:t>
             </a:r>
           </a:p>
@@ -4851,7 +5216,10 @@
               </a:defRPr>
             </a:pPr>
             <a:r>
-              <a:t>RENDER TEST — partial sample, not a full ODD report</a:t>
+              <a:rPr>
+                <a:latin typeface="Inter"/>
+              </a:rPr>
+              <a:t>RENDER TEST — partial sample, not a full ODD report · Data as of 2026-10-01 (Form ADV); 2026-08-14 (Form 13F)</a:t>
             </a:r>
           </a:p>
         </p:txBody>
@@ -4890,6 +5258,9 @@
               </a:defRPr>
             </a:pPr>
             <a:r>
+              <a:rPr>
+                <a:latin typeface="Inter"/>
+              </a:rPr>
               <a:t>10</a:t>
             </a:r>
           </a:p>
@@ -4954,7 +5325,11 @@
           <a:bodyPr rtlCol="0" anchor="ctr"/>
           <a:lstStyle/>
           <a:p>
-            <a:pPr algn="ctr"/>
+            <a:pPr algn="ctr">
+              <a:defRPr>
+                <a:latin typeface="Inter"/>
+              </a:defRPr>
+            </a:pPr>
           </a:p>
         </p:txBody>
       </p:sp>
@@ -4992,6 +5367,9 @@
               </a:defRPr>
             </a:pPr>
             <a:r>
+              <a:rPr>
+                <a:latin typeface="Inter"/>
+              </a:rPr>
               <a:t>SERVICE-PROVIDER EVIDENCE REMAINS INCOMPLETE IN THE COMPACT TEST RECORD</a:t>
             </a:r>
           </a:p>
@@ -5031,6 +5409,9 @@
               </a:defRPr>
             </a:pPr>
             <a:r>
+              <a:rPr>
+                <a:latin typeface="Inter"/>
+              </a:rPr>
               <a:t>Fund operations &amp; service providers</a:t>
             </a:r>
           </a:p>
@@ -5077,7 +5458,11 @@
           <a:bodyPr rtlCol="0" anchor="ctr"/>
           <a:lstStyle/>
           <a:p>
-            <a:pPr algn="ctr"/>
+            <a:pPr algn="ctr">
+              <a:defRPr>
+                <a:latin typeface="Inter"/>
+              </a:defRPr>
+            </a:pPr>
           </a:p>
         </p:txBody>
       </p:sp>
@@ -5122,7 +5507,11 @@
           <a:bodyPr rtlCol="0" anchor="ctr"/>
           <a:lstStyle/>
           <a:p>
-            <a:pPr algn="ctr"/>
+            <a:pPr algn="ctr">
+              <a:defRPr>
+                <a:latin typeface="Inter"/>
+              </a:defRPr>
+            </a:pPr>
           </a:p>
         </p:txBody>
       </p:sp>
@@ -5160,6 +5549,9 @@
               </a:defRPr>
             </a:pPr>
             <a:r>
+              <a:rPr>
+                <a:latin typeface="Inter"/>
+              </a:rPr>
               <a:t>05</a:t>
             </a:r>
           </a:p>
@@ -5174,7 +5566,7 @@
         <p:spPr>
           <a:xfrm>
             <a:off x="640080" y="1325880"/>
-            <a:ext cx="10908792" cy="1347985"/>
+            <a:ext cx="10908792" cy="1295863"/>
           </a:xfrm>
           <a:prstGeom prst="rect">
             <a:avLst/>
@@ -5206,7 +5598,11 @@
           <a:bodyPr rtlCol="0" anchor="ctr"/>
           <a:lstStyle/>
           <a:p>
-            <a:pPr algn="ctr"/>
+            <a:pPr algn="ctr">
+              <a:defRPr>
+                <a:latin typeface="Inter"/>
+              </a:defRPr>
+            </a:pPr>
           </a:p>
         </p:txBody>
       </p:sp>
@@ -5219,7 +5615,189 @@
         <p:spPr>
           <a:xfrm>
             <a:off x="640080" y="1325880"/>
-            <a:ext cx="54864" cy="1347985"/>
+            <a:ext cx="54864" cy="1295863"/>
+          </a:xfrm>
+          <a:prstGeom prst="rect">
+            <a:avLst/>
+          </a:prstGeom>
+          <a:solidFill>
+            <a:srgbClr val="F2A93B"/>
+          </a:solidFill>
+          <a:ln>
+            <a:solidFill>
+              <a:srgbClr val="F2A93B"/>
+            </a:solidFill>
+          </a:ln>
+        </p:spPr>
+        <p:style>
+          <a:lnRef idx="1">
+            <a:schemeClr val="accent1"/>
+          </a:lnRef>
+          <a:fillRef idx="3">
+            <a:schemeClr val="accent1"/>
+          </a:fillRef>
+          <a:effectRef idx="2">
+            <a:schemeClr val="accent1"/>
+          </a:effectRef>
+          <a:fontRef idx="minor">
+            <a:schemeClr val="lt1"/>
+          </a:fontRef>
+        </p:style>
+        <p:txBody>
+          <a:bodyPr rtlCol="0" anchor="ctr"/>
+          <a:lstStyle/>
+          <a:p>
+            <a:pPr algn="ctr">
+              <a:defRPr>
+                <a:latin typeface="Inter"/>
+              </a:defRPr>
+            </a:pPr>
+          </a:p>
+        </p:txBody>
+      </p:sp>
+      <p:sp>
+        <p:nvSpPr>
+          <p:cNvPr id="10" name="TextBox 9"/>
+          <p:cNvSpPr txBox="1"/>
+          <p:nvPr/>
+        </p:nvSpPr>
+        <p:spPr>
+          <a:xfrm>
+            <a:off x="804671" y="1435607"/>
+            <a:ext cx="10616184" cy="228600"/>
+          </a:xfrm>
+          <a:prstGeom prst="rect">
+            <a:avLst/>
+          </a:prstGeom>
+          <a:noFill/>
+        </p:spPr>
+        <p:txBody>
+          <a:bodyPr wrap="none" lIns="9144" rIns="9144" tIns="9144" bIns="9144" anchor="t">
+            <a:spAutoFit/>
+          </a:bodyPr>
+          <a:lstStyle/>
+          <a:p>
+            <a:pPr algn="l">
+              <a:spcAft>
+                <a:spcPts val="0"/>
+              </a:spcAft>
+              <a:defRPr sz="1000" b="1">
+                <a:solidFill>
+                  <a:srgbClr val="0D1117"/>
+                </a:solidFill>
+                <a:latin typeface="Inter"/>
+              </a:defRPr>
+            </a:pPr>
+            <a:r>
+              <a:rPr>
+                <a:latin typeface="Inter"/>
+              </a:rPr>
+              <a:t>Service-provider evidence unavailable</a:t>
+            </a:r>
+          </a:p>
+        </p:txBody>
+      </p:sp>
+      <p:sp>
+        <p:nvSpPr>
+          <p:cNvPr id="11" name="TextBox 10"/>
+          <p:cNvSpPr txBox="1"/>
+          <p:nvPr/>
+        </p:nvSpPr>
+        <p:spPr>
+          <a:xfrm>
+            <a:off x="804671" y="1719072"/>
+            <a:ext cx="10616184" cy="811231"/>
+          </a:xfrm>
+          <a:prstGeom prst="rect">
+            <a:avLst/>
+          </a:prstGeom>
+          <a:noFill/>
+        </p:spPr>
+        <p:txBody>
+          <a:bodyPr wrap="none" lIns="9144" rIns="9144" tIns="9144" bIns="9144" anchor="t">
+            <a:spAutoFit/>
+          </a:bodyPr>
+          <a:lstStyle/>
+          <a:p>
+            <a:pPr algn="l">
+              <a:spcAft>
+                <a:spcPts val="0"/>
+              </a:spcAft>
+              <a:defRPr sz="950" b="0">
+                <a:solidFill>
+                  <a:srgbClr val="4A5563"/>
+                </a:solidFill>
+                <a:latin typeface="Inter"/>
+              </a:defRPr>
+            </a:pPr>
+            <a:r>
+              <a:rPr>
+                <a:latin typeface="Inter"/>
+              </a:rPr>
+              <a:t>Not available — this compact TEST fixture does not return governed administrator, auditor or custodian rows [S1].</a:t>
+            </a:r>
+          </a:p>
+        </p:txBody>
+      </p:sp>
+      <p:sp>
+        <p:nvSpPr>
+          <p:cNvPr id="12" name="Rectangle 11"/>
+          <p:cNvSpPr/>
+          <p:nvPr/>
+        </p:nvSpPr>
+        <p:spPr>
+          <a:xfrm>
+            <a:off x="640080" y="2731471"/>
+            <a:ext cx="10908792" cy="1295863"/>
+          </a:xfrm>
+          <a:prstGeom prst="rect">
+            <a:avLst/>
+          </a:prstGeom>
+          <a:solidFill>
+            <a:srgbClr val="F5F7F9"/>
+          </a:solidFill>
+          <a:ln>
+            <a:solidFill>
+              <a:srgbClr val="E3E7EC"/>
+            </a:solidFill>
+          </a:ln>
+        </p:spPr>
+        <p:style>
+          <a:lnRef idx="1">
+            <a:schemeClr val="accent1"/>
+          </a:lnRef>
+          <a:fillRef idx="3">
+            <a:schemeClr val="accent1"/>
+          </a:fillRef>
+          <a:effectRef idx="2">
+            <a:schemeClr val="accent1"/>
+          </a:effectRef>
+          <a:fontRef idx="minor">
+            <a:schemeClr val="lt1"/>
+          </a:fontRef>
+        </p:style>
+        <p:txBody>
+          <a:bodyPr rtlCol="0" anchor="ctr"/>
+          <a:lstStyle/>
+          <a:p>
+            <a:pPr algn="ctr">
+              <a:defRPr>
+                <a:latin typeface="Inter"/>
+              </a:defRPr>
+            </a:pPr>
+          </a:p>
+        </p:txBody>
+      </p:sp>
+      <p:sp>
+        <p:nvSpPr>
+          <p:cNvPr id="13" name="Rectangle 12"/>
+          <p:cNvSpPr/>
+          <p:nvPr/>
+        </p:nvSpPr>
+        <p:spPr>
+          <a:xfrm>
+            <a:off x="640080" y="2731471"/>
+            <a:ext cx="54864" cy="1295863"/>
           </a:xfrm>
           <a:prstGeom prst="rect">
             <a:avLst/>
@@ -5251,19 +5829,23 @@
           <a:bodyPr rtlCol="0" anchor="ctr"/>
           <a:lstStyle/>
           <a:p>
-            <a:pPr algn="ctr"/>
-          </a:p>
-        </p:txBody>
-      </p:sp>
-      <p:sp>
-        <p:nvSpPr>
-          <p:cNvPr id="10" name="TextBox 9"/>
+            <a:pPr algn="ctr">
+              <a:defRPr>
+                <a:latin typeface="Inter"/>
+              </a:defRPr>
+            </a:pPr>
+          </a:p>
+        </p:txBody>
+      </p:sp>
+      <p:sp>
+        <p:nvSpPr>
+          <p:cNvPr id="14" name="TextBox 13"/>
           <p:cNvSpPr txBox="1"/>
           <p:nvPr/>
         </p:nvSpPr>
         <p:spPr>
           <a:xfrm>
-            <a:off x="804671" y="1435607"/>
+            <a:off x="804671" y="2841199"/>
             <a:ext cx="10616184" cy="228600"/>
           </a:xfrm>
           <a:prstGeom prst="rect">
@@ -5289,21 +5871,24 @@
               </a:defRPr>
             </a:pPr>
             <a:r>
-              <a:t>Visual evidence</a:t>
-            </a:r>
-          </a:p>
-        </p:txBody>
-      </p:sp>
-      <p:sp>
-        <p:nvSpPr>
-          <p:cNvPr id="11" name="TextBox 10"/>
+              <a:rPr>
+                <a:latin typeface="Inter"/>
+              </a:rPr>
+              <a:t>Not available</a:t>
+            </a:r>
+          </a:p>
+        </p:txBody>
+      </p:sp>
+      <p:sp>
+        <p:nvSpPr>
+          <p:cNvPr id="15" name="TextBox 14"/>
           <p:cNvSpPr txBox="1"/>
           <p:nvPr/>
         </p:nvSpPr>
         <p:spPr>
           <a:xfrm>
-            <a:off x="804671" y="1719072"/>
-            <a:ext cx="10616184" cy="863353"/>
+            <a:off x="804671" y="3124663"/>
+            <a:ext cx="10616184" cy="811231"/>
           </a:xfrm>
           <a:prstGeom prst="rect">
             <a:avLst/>
@@ -5328,21 +5913,24 @@
               </a:defRPr>
             </a:pPr>
             <a:r>
-              <a:t>Not available — No governed visual was returned for this fictional TEST fixture.</a:t>
-            </a:r>
-          </a:p>
-        </p:txBody>
-      </p:sp>
-      <p:sp>
-        <p:nvSpPr>
-          <p:cNvPr id="12" name="Rectangle 11"/>
+              <a:rPr>
+                <a:latin typeface="Inter"/>
+              </a:rPr>
+              <a:t>Not available — this compact render fixture omits fund operations [S1].</a:t>
+            </a:r>
+          </a:p>
+        </p:txBody>
+      </p:sp>
+      <p:sp>
+        <p:nvSpPr>
+          <p:cNvPr id="16" name="Rectangle 15"/>
           <p:cNvSpPr/>
           <p:nvPr/>
         </p:nvSpPr>
         <p:spPr>
           <a:xfrm>
-            <a:off x="640080" y="2783593"/>
-            <a:ext cx="10908792" cy="1347985"/>
+            <a:off x="640080" y="4137062"/>
+            <a:ext cx="10908792" cy="2080857"/>
           </a:xfrm>
           <a:prstGeom prst="rect">
             <a:avLst/>
@@ -5374,175 +5962,11 @@
           <a:bodyPr rtlCol="0" anchor="ctr"/>
           <a:lstStyle/>
           <a:p>
-            <a:pPr algn="ctr"/>
-          </a:p>
-        </p:txBody>
-      </p:sp>
-      <p:sp>
-        <p:nvSpPr>
-          <p:cNvPr id="13" name="Rectangle 12"/>
-          <p:cNvSpPr/>
-          <p:nvPr/>
-        </p:nvSpPr>
-        <p:spPr>
-          <a:xfrm>
-            <a:off x="640080" y="2783593"/>
-            <a:ext cx="54864" cy="1347985"/>
-          </a:xfrm>
-          <a:prstGeom prst="rect">
-            <a:avLst/>
-          </a:prstGeom>
-          <a:solidFill>
-            <a:srgbClr val="0D1117"/>
-          </a:solidFill>
-          <a:ln>
-            <a:solidFill>
-              <a:srgbClr val="0D1117"/>
-            </a:solidFill>
-          </a:ln>
-        </p:spPr>
-        <p:style>
-          <a:lnRef idx="1">
-            <a:schemeClr val="accent1"/>
-          </a:lnRef>
-          <a:fillRef idx="3">
-            <a:schemeClr val="accent1"/>
-          </a:fillRef>
-          <a:effectRef idx="2">
-            <a:schemeClr val="accent1"/>
-          </a:effectRef>
-          <a:fontRef idx="minor">
-            <a:schemeClr val="lt1"/>
-          </a:fontRef>
-        </p:style>
-        <p:txBody>
-          <a:bodyPr rtlCol="0" anchor="ctr"/>
-          <a:lstStyle/>
-          <a:p>
-            <a:pPr algn="ctr"/>
-          </a:p>
-        </p:txBody>
-      </p:sp>
-      <p:sp>
-        <p:nvSpPr>
-          <p:cNvPr id="14" name="TextBox 13"/>
-          <p:cNvSpPr txBox="1"/>
-          <p:nvPr/>
-        </p:nvSpPr>
-        <p:spPr>
-          <a:xfrm>
-            <a:off x="804671" y="2893321"/>
-            <a:ext cx="10616184" cy="228600"/>
-          </a:xfrm>
-          <a:prstGeom prst="rect">
-            <a:avLst/>
-          </a:prstGeom>
-          <a:noFill/>
-        </p:spPr>
-        <p:txBody>
-          <a:bodyPr wrap="none" lIns="9144" rIns="9144" tIns="9144" bIns="9144" anchor="t">
-            <a:spAutoFit/>
-          </a:bodyPr>
-          <a:lstStyle/>
-          <a:p>
-            <a:pPr algn="l">
-              <a:spcAft>
-                <a:spcPts val="0"/>
-              </a:spcAft>
-              <a:defRPr sz="1000" b="1">
-                <a:solidFill>
-                  <a:srgbClr val="0D1117"/>
-                </a:solidFill>
-                <a:latin typeface="Inter"/>
-              </a:defRPr>
-            </a:pPr>
-            <a:r>
-              <a:t>Not available</a:t>
-            </a:r>
-          </a:p>
-        </p:txBody>
-      </p:sp>
-      <p:sp>
-        <p:nvSpPr>
-          <p:cNvPr id="15" name="TextBox 14"/>
-          <p:cNvSpPr txBox="1"/>
-          <p:nvPr/>
-        </p:nvSpPr>
-        <p:spPr>
-          <a:xfrm>
-            <a:off x="804671" y="3176785"/>
-            <a:ext cx="10616184" cy="863353"/>
-          </a:xfrm>
-          <a:prstGeom prst="rect">
-            <a:avLst/>
-          </a:prstGeom>
-          <a:noFill/>
-        </p:spPr>
-        <p:txBody>
-          <a:bodyPr wrap="none" lIns="9144" rIns="9144" tIns="9144" bIns="9144" anchor="t">
-            <a:spAutoFit/>
-          </a:bodyPr>
-          <a:lstStyle/>
-          <a:p>
-            <a:pPr algn="l">
-              <a:spcAft>
-                <a:spcPts val="0"/>
-              </a:spcAft>
-              <a:defRPr sz="950" b="0">
-                <a:solidFill>
-                  <a:srgbClr val="4A5563"/>
-                </a:solidFill>
-                <a:latin typeface="Inter"/>
-              </a:defRPr>
-            </a:pPr>
-            <a:r>
-              <a:t>Not available — this compact render fixture omits fund operations [S1].</a:t>
-            </a:r>
-          </a:p>
-        </p:txBody>
-      </p:sp>
-      <p:sp>
-        <p:nvSpPr>
-          <p:cNvPr id="16" name="Rectangle 15"/>
-          <p:cNvSpPr/>
-          <p:nvPr/>
-        </p:nvSpPr>
-        <p:spPr>
-          <a:xfrm>
-            <a:off x="640080" y="4241306"/>
-            <a:ext cx="10908792" cy="1976613"/>
-          </a:xfrm>
-          <a:prstGeom prst="rect">
-            <a:avLst/>
-          </a:prstGeom>
-          <a:solidFill>
-            <a:srgbClr val="F5F7F9"/>
-          </a:solidFill>
-          <a:ln>
-            <a:solidFill>
-              <a:srgbClr val="E3E7EC"/>
-            </a:solidFill>
-          </a:ln>
-        </p:spPr>
-        <p:style>
-          <a:lnRef idx="1">
-            <a:schemeClr val="accent1"/>
-          </a:lnRef>
-          <a:fillRef idx="3">
-            <a:schemeClr val="accent1"/>
-          </a:fillRef>
-          <a:effectRef idx="2">
-            <a:schemeClr val="accent1"/>
-          </a:effectRef>
-          <a:fontRef idx="minor">
-            <a:schemeClr val="lt1"/>
-          </a:fontRef>
-        </p:style>
-        <p:txBody>
-          <a:bodyPr rtlCol="0" anchor="ctr"/>
-          <a:lstStyle/>
-          <a:p>
-            <a:pPr algn="ctr"/>
+            <a:pPr algn="ctr">
+              <a:defRPr>
+                <a:latin typeface="Inter"/>
+              </a:defRPr>
+            </a:pPr>
           </a:p>
         </p:txBody>
       </p:sp>
@@ -5554,8 +5978,8 @@
         </p:nvSpPr>
         <p:spPr>
           <a:xfrm>
-            <a:off x="640080" y="4241306"/>
-            <a:ext cx="54864" cy="1976613"/>
+            <a:off x="640080" y="4137062"/>
+            <a:ext cx="54864" cy="2080857"/>
           </a:xfrm>
           <a:prstGeom prst="rect">
             <a:avLst/>
@@ -5587,7 +6011,11 @@
           <a:bodyPr rtlCol="0" anchor="ctr"/>
           <a:lstStyle/>
           <a:p>
-            <a:pPr algn="ctr"/>
+            <a:pPr algn="ctr">
+              <a:defRPr>
+                <a:latin typeface="Inter"/>
+              </a:defRPr>
+            </a:pPr>
           </a:p>
         </p:txBody>
       </p:sp>
@@ -5599,7 +6027,7 @@
         </p:nvSpPr>
         <p:spPr>
           <a:xfrm>
-            <a:off x="804671" y="4351034"/>
+            <a:off x="804671" y="4246790"/>
             <a:ext cx="10616184" cy="228600"/>
           </a:xfrm>
           <a:prstGeom prst="rect">
@@ -5625,6 +6053,9 @@
               </a:defRPr>
             </a:pPr>
             <a:r>
+              <a:rPr>
+                <a:latin typeface="Inter"/>
+              </a:rPr>
               <a:t>Analysis — Fund operations are not yet corroborated</a:t>
             </a:r>
           </a:p>
@@ -5638,8 +6069,8 @@
         </p:nvSpPr>
         <p:spPr>
           <a:xfrm>
-            <a:off x="804671" y="4634498"/>
-            <a:ext cx="10616184" cy="1491981"/>
+            <a:off x="804671" y="4530254"/>
+            <a:ext cx="10616184" cy="1596225"/>
           </a:xfrm>
           <a:prstGeom prst="rect">
             <a:avLst/>
@@ -5664,7 +6095,10 @@
               </a:defRPr>
             </a:pPr>
             <a:r>
-              <a:t>Observation: Fund-level service-provider evidence is absent from the compact TEST record [S1]. Why it matters: Operating-party independence cannot be assessed. Uncertainty: Absence is not adverse evidence. What would…</a:t>
+              <a:rPr>
+                <a:latin typeface="Inter"/>
+              </a:rPr>
+              <a:t>Observation: Zero fund-level provider records appear in the compact TEST fixture [S1]. Why it matters: Independence among operating parties cannot yet be assessed. Uncertainty: Missing provider coverage is…</a:t>
             </a:r>
           </a:p>
         </p:txBody>
@@ -5710,7 +6144,11 @@
           <a:bodyPr rtlCol="0" anchor="ctr"/>
           <a:lstStyle/>
           <a:p>
-            <a:pPr algn="ctr"/>
+            <a:pPr algn="ctr">
+              <a:defRPr>
+                <a:latin typeface="Inter"/>
+              </a:defRPr>
+            </a:pPr>
           </a:p>
         </p:txBody>
       </p:sp>
@@ -5748,6 +6186,9 @@
               </a:defRPr>
             </a:pPr>
             <a:r>
+              <a:rPr>
+                <a:latin typeface="Inter"/>
+              </a:rPr>
               <a:t>Sources: S1</a:t>
             </a:r>
           </a:p>
@@ -5787,7 +6228,10 @@
               </a:defRPr>
             </a:pPr>
             <a:r>
-              <a:t>RENDER TEST — partial sample, not a full ODD report</a:t>
+              <a:rPr>
+                <a:latin typeface="Inter"/>
+              </a:rPr>
+              <a:t>RENDER TEST — partial sample, not a full ODD report · Data as of 2026-10-01 (Form ADV); 2026-08-14 (Form 13F)</a:t>
             </a:r>
           </a:p>
         </p:txBody>
@@ -5826,6 +6270,9 @@
               </a:defRPr>
             </a:pPr>
             <a:r>
+              <a:rPr>
+                <a:latin typeface="Inter"/>
+              </a:rPr>
               <a:t>11</a:t>
             </a:r>
           </a:p>
@@ -5890,7 +6337,11 @@
           <a:bodyPr rtlCol="0" anchor="ctr"/>
           <a:lstStyle/>
           <a:p>
-            <a:pPr algn="ctr"/>
+            <a:pPr algn="ctr">
+              <a:defRPr>
+                <a:latin typeface="Inter"/>
+              </a:defRPr>
+            </a:pPr>
           </a:p>
         </p:txBody>
       </p:sp>
@@ -5928,6 +6379,9 @@
               </a:defRPr>
             </a:pPr>
             <a:r>
+              <a:rPr>
+                <a:latin typeface="Inter"/>
+              </a:rPr>
               <a:t>LAGGED HOLDINGS PROVIDE A PARTIAL CONCENTRATION LENS</a:t>
             </a:r>
           </a:p>
@@ -5967,6 +6421,9 @@
               </a:defRPr>
             </a:pPr>
             <a:r>
+              <a:rPr>
+                <a:latin typeface="Inter"/>
+              </a:rPr>
               <a:t>Reported equity holdings (Form 13F)</a:t>
             </a:r>
           </a:p>
@@ -6013,7 +6470,11 @@
           <a:bodyPr rtlCol="0" anchor="ctr"/>
           <a:lstStyle/>
           <a:p>
-            <a:pPr algn="ctr"/>
+            <a:pPr algn="ctr">
+              <a:defRPr>
+                <a:latin typeface="Inter"/>
+              </a:defRPr>
+            </a:pPr>
           </a:p>
         </p:txBody>
       </p:sp>
@@ -6058,7 +6519,11 @@
           <a:bodyPr rtlCol="0" anchor="ctr"/>
           <a:lstStyle/>
           <a:p>
-            <a:pPr algn="ctr"/>
+            <a:pPr algn="ctr">
+              <a:defRPr>
+                <a:latin typeface="Inter"/>
+              </a:defRPr>
+            </a:pPr>
           </a:p>
         </p:txBody>
       </p:sp>
@@ -6096,6 +6561,9 @@
               </a:defRPr>
             </a:pPr>
             <a:r>
+              <a:rPr>
+                <a:latin typeface="Inter"/>
+              </a:rPr>
               <a:t>06</a:t>
             </a:r>
           </a:p>
@@ -6110,7 +6578,7 @@
         <p:spPr>
           <a:xfrm>
             <a:off x="640080" y="1325880"/>
-            <a:ext cx="10908792" cy="1342399"/>
+            <a:ext cx="10908792" cy="1313374"/>
           </a:xfrm>
           <a:prstGeom prst="rect">
             <a:avLst/>
@@ -6142,7 +6610,11 @@
           <a:bodyPr rtlCol="0" anchor="ctr"/>
           <a:lstStyle/>
           <a:p>
-            <a:pPr algn="ctr"/>
+            <a:pPr algn="ctr">
+              <a:defRPr>
+                <a:latin typeface="Inter"/>
+              </a:defRPr>
+            </a:pPr>
           </a:p>
         </p:txBody>
       </p:sp>
@@ -6155,7 +6627,189 @@
         <p:spPr>
           <a:xfrm>
             <a:off x="640080" y="1325880"/>
-            <a:ext cx="54864" cy="1342399"/>
+            <a:ext cx="54864" cy="1313374"/>
+          </a:xfrm>
+          <a:prstGeom prst="rect">
+            <a:avLst/>
+          </a:prstGeom>
+          <a:solidFill>
+            <a:srgbClr val="F2A93B"/>
+          </a:solidFill>
+          <a:ln>
+            <a:solidFill>
+              <a:srgbClr val="F2A93B"/>
+            </a:solidFill>
+          </a:ln>
+        </p:spPr>
+        <p:style>
+          <a:lnRef idx="1">
+            <a:schemeClr val="accent1"/>
+          </a:lnRef>
+          <a:fillRef idx="3">
+            <a:schemeClr val="accent1"/>
+          </a:fillRef>
+          <a:effectRef idx="2">
+            <a:schemeClr val="accent1"/>
+          </a:effectRef>
+          <a:fontRef idx="minor">
+            <a:schemeClr val="lt1"/>
+          </a:fontRef>
+        </p:style>
+        <p:txBody>
+          <a:bodyPr rtlCol="0" anchor="ctr"/>
+          <a:lstStyle/>
+          <a:p>
+            <a:pPr algn="ctr">
+              <a:defRPr>
+                <a:latin typeface="Inter"/>
+              </a:defRPr>
+            </a:pPr>
+          </a:p>
+        </p:txBody>
+      </p:sp>
+      <p:sp>
+        <p:nvSpPr>
+          <p:cNvPr id="10" name="TextBox 9"/>
+          <p:cNvSpPr txBox="1"/>
+          <p:nvPr/>
+        </p:nvSpPr>
+        <p:spPr>
+          <a:xfrm>
+            <a:off x="804671" y="1435607"/>
+            <a:ext cx="10616184" cy="228600"/>
+          </a:xfrm>
+          <a:prstGeom prst="rect">
+            <a:avLst/>
+          </a:prstGeom>
+          <a:noFill/>
+        </p:spPr>
+        <p:txBody>
+          <a:bodyPr wrap="none" lIns="9144" rIns="9144" tIns="9144" bIns="9144" anchor="t">
+            <a:spAutoFit/>
+          </a:bodyPr>
+          <a:lstStyle/>
+          <a:p>
+            <a:pPr algn="l">
+              <a:spcAft>
+                <a:spcPts val="0"/>
+              </a:spcAft>
+              <a:defRPr sz="1000" b="1">
+                <a:solidFill>
+                  <a:srgbClr val="0D1117"/>
+                </a:solidFill>
+                <a:latin typeface="Inter"/>
+              </a:defRPr>
+            </a:pPr>
+            <a:r>
+              <a:rPr>
+                <a:latin typeface="Inter"/>
+              </a:rPr>
+              <a:t>Holding rows unavailable</a:t>
+            </a:r>
+          </a:p>
+        </p:txBody>
+      </p:sp>
+      <p:sp>
+        <p:nvSpPr>
+          <p:cNvPr id="11" name="TextBox 10"/>
+          <p:cNvSpPr txBox="1"/>
+          <p:nvPr/>
+        </p:nvSpPr>
+        <p:spPr>
+          <a:xfrm>
+            <a:off x="804671" y="1719072"/>
+            <a:ext cx="10616184" cy="828742"/>
+          </a:xfrm>
+          <a:prstGeom prst="rect">
+            <a:avLst/>
+          </a:prstGeom>
+          <a:noFill/>
+        </p:spPr>
+        <p:txBody>
+          <a:bodyPr wrap="none" lIns="9144" rIns="9144" tIns="9144" bIns="9144" anchor="t">
+            <a:spAutoFit/>
+          </a:bodyPr>
+          <a:lstStyle/>
+          <a:p>
+            <a:pPr algn="l">
+              <a:spcAft>
+                <a:spcPts val="0"/>
+              </a:spcAft>
+              <a:defRPr sz="950" b="0">
+                <a:solidFill>
+                  <a:srgbClr val="4A5563"/>
+                </a:solidFill>
+                <a:latin typeface="Inter"/>
+              </a:defRPr>
+            </a:pPr>
+            <a:r>
+              <a:rPr>
+                <a:latin typeface="Inter"/>
+              </a:rPr>
+              <a:t>Not available — the governed Form 13F snapshot is present, but this compact TEST fixture omits its holding rows [S3].</a:t>
+            </a:r>
+          </a:p>
+        </p:txBody>
+      </p:sp>
+      <p:sp>
+        <p:nvSpPr>
+          <p:cNvPr id="12" name="Rectangle 11"/>
+          <p:cNvSpPr/>
+          <p:nvPr/>
+        </p:nvSpPr>
+        <p:spPr>
+          <a:xfrm>
+            <a:off x="640080" y="2748982"/>
+            <a:ext cx="10908792" cy="1313374"/>
+          </a:xfrm>
+          <a:prstGeom prst="rect">
+            <a:avLst/>
+          </a:prstGeom>
+          <a:solidFill>
+            <a:srgbClr val="F5F7F9"/>
+          </a:solidFill>
+          <a:ln>
+            <a:solidFill>
+              <a:srgbClr val="E3E7EC"/>
+            </a:solidFill>
+          </a:ln>
+        </p:spPr>
+        <p:style>
+          <a:lnRef idx="1">
+            <a:schemeClr val="accent1"/>
+          </a:lnRef>
+          <a:fillRef idx="3">
+            <a:schemeClr val="accent1"/>
+          </a:fillRef>
+          <a:effectRef idx="2">
+            <a:schemeClr val="accent1"/>
+          </a:effectRef>
+          <a:fontRef idx="minor">
+            <a:schemeClr val="lt1"/>
+          </a:fontRef>
+        </p:style>
+        <p:txBody>
+          <a:bodyPr rtlCol="0" anchor="ctr"/>
+          <a:lstStyle/>
+          <a:p>
+            <a:pPr algn="ctr">
+              <a:defRPr>
+                <a:latin typeface="Inter"/>
+              </a:defRPr>
+            </a:pPr>
+          </a:p>
+        </p:txBody>
+      </p:sp>
+      <p:sp>
+        <p:nvSpPr>
+          <p:cNvPr id="13" name="Rectangle 12"/>
+          <p:cNvSpPr/>
+          <p:nvPr/>
+        </p:nvSpPr>
+        <p:spPr>
+          <a:xfrm>
+            <a:off x="640080" y="2748982"/>
+            <a:ext cx="54864" cy="1313374"/>
           </a:xfrm>
           <a:prstGeom prst="rect">
             <a:avLst/>
@@ -6187,19 +6841,23 @@
           <a:bodyPr rtlCol="0" anchor="ctr"/>
           <a:lstStyle/>
           <a:p>
-            <a:pPr algn="ctr"/>
-          </a:p>
-        </p:txBody>
-      </p:sp>
-      <p:sp>
-        <p:nvSpPr>
-          <p:cNvPr id="10" name="TextBox 9"/>
+            <a:pPr algn="ctr">
+              <a:defRPr>
+                <a:latin typeface="Inter"/>
+              </a:defRPr>
+            </a:pPr>
+          </a:p>
+        </p:txBody>
+      </p:sp>
+      <p:sp>
+        <p:nvSpPr>
+          <p:cNvPr id="14" name="TextBox 13"/>
           <p:cNvSpPr txBox="1"/>
           <p:nvPr/>
         </p:nvSpPr>
         <p:spPr>
           <a:xfrm>
-            <a:off x="804671" y="1435607"/>
+            <a:off x="804671" y="2858710"/>
             <a:ext cx="10616184" cy="228600"/>
           </a:xfrm>
           <a:prstGeom prst="rect">
@@ -6225,21 +6883,24 @@
               </a:defRPr>
             </a:pPr>
             <a:r>
-              <a:t>Visual evidence</a:t>
-            </a:r>
-          </a:p>
-        </p:txBody>
-      </p:sp>
-      <p:sp>
-        <p:nvSpPr>
-          <p:cNvPr id="11" name="TextBox 10"/>
+              <a:rPr>
+                <a:latin typeface="Inter"/>
+              </a:rPr>
+              <a:t>Not available</a:t>
+            </a:r>
+          </a:p>
+        </p:txBody>
+      </p:sp>
+      <p:sp>
+        <p:nvSpPr>
+          <p:cNvPr id="15" name="TextBox 14"/>
           <p:cNvSpPr txBox="1"/>
           <p:nvPr/>
         </p:nvSpPr>
         <p:spPr>
           <a:xfrm>
-            <a:off x="804671" y="1719072"/>
-            <a:ext cx="10616184" cy="857767"/>
+            <a:off x="804671" y="3142174"/>
+            <a:ext cx="10616184" cy="828742"/>
           </a:xfrm>
           <a:prstGeom prst="rect">
             <a:avLst/>
@@ -6264,21 +6925,24 @@
               </a:defRPr>
             </a:pPr>
             <a:r>
-              <a:t>Not available — No governed visual was returned for this fictional TEST fixture.</a:t>
-            </a:r>
-          </a:p>
-        </p:txBody>
-      </p:sp>
-      <p:sp>
-        <p:nvSpPr>
-          <p:cNvPr id="12" name="Rectangle 11"/>
+              <a:rPr>
+                <a:latin typeface="Inter"/>
+              </a:rPr>
+              <a:t>Not available — this compact render fixture omits holding rows [S3].</a:t>
+            </a:r>
+          </a:p>
+        </p:txBody>
+      </p:sp>
+      <p:sp>
+        <p:nvSpPr>
+          <p:cNvPr id="16" name="Rectangle 15"/>
           <p:cNvSpPr/>
           <p:nvPr/>
         </p:nvSpPr>
         <p:spPr>
           <a:xfrm>
-            <a:off x="640080" y="2778007"/>
-            <a:ext cx="10908792" cy="1342399"/>
+            <a:off x="640080" y="4172085"/>
+            <a:ext cx="10908792" cy="2045834"/>
           </a:xfrm>
           <a:prstGeom prst="rect">
             <a:avLst/>
@@ -6310,20 +6974,24 @@
           <a:bodyPr rtlCol="0" anchor="ctr"/>
           <a:lstStyle/>
           <a:p>
-            <a:pPr algn="ctr"/>
-          </a:p>
-        </p:txBody>
-      </p:sp>
-      <p:sp>
-        <p:nvSpPr>
-          <p:cNvPr id="13" name="Rectangle 12"/>
+            <a:pPr algn="ctr">
+              <a:defRPr>
+                <a:latin typeface="Inter"/>
+              </a:defRPr>
+            </a:pPr>
+          </a:p>
+        </p:txBody>
+      </p:sp>
+      <p:sp>
+        <p:nvSpPr>
+          <p:cNvPr id="17" name="Rectangle 16"/>
           <p:cNvSpPr/>
           <p:nvPr/>
         </p:nvSpPr>
         <p:spPr>
           <a:xfrm>
-            <a:off x="640080" y="2778007"/>
-            <a:ext cx="54864" cy="1342399"/>
+            <a:off x="640080" y="4172085"/>
+            <a:ext cx="54864" cy="2045834"/>
           </a:xfrm>
           <a:prstGeom prst="rect">
             <a:avLst/>
@@ -6355,19 +7023,23 @@
           <a:bodyPr rtlCol="0" anchor="ctr"/>
           <a:lstStyle/>
           <a:p>
-            <a:pPr algn="ctr"/>
-          </a:p>
-        </p:txBody>
-      </p:sp>
-      <p:sp>
-        <p:nvSpPr>
-          <p:cNvPr id="14" name="TextBox 13"/>
+            <a:pPr algn="ctr">
+              <a:defRPr>
+                <a:latin typeface="Inter"/>
+              </a:defRPr>
+            </a:pPr>
+          </a:p>
+        </p:txBody>
+      </p:sp>
+      <p:sp>
+        <p:nvSpPr>
+          <p:cNvPr id="18" name="TextBox 17"/>
           <p:cNvSpPr txBox="1"/>
           <p:nvPr/>
         </p:nvSpPr>
         <p:spPr>
           <a:xfrm>
-            <a:off x="804671" y="2887735"/>
+            <a:off x="804671" y="4281813"/>
             <a:ext cx="10616184" cy="228600"/>
           </a:xfrm>
           <a:prstGeom prst="rect">
@@ -6393,21 +7065,24 @@
               </a:defRPr>
             </a:pPr>
             <a:r>
-              <a:t>Not available</a:t>
-            </a:r>
-          </a:p>
-        </p:txBody>
-      </p:sp>
-      <p:sp>
-        <p:nvSpPr>
-          <p:cNvPr id="15" name="TextBox 14"/>
+              <a:rPr>
+                <a:latin typeface="Inter"/>
+              </a:rPr>
+              <a:t>Analysis — Holdings evidence remains partial</a:t>
+            </a:r>
+          </a:p>
+        </p:txBody>
+      </p:sp>
+      <p:sp>
+        <p:nvSpPr>
+          <p:cNvPr id="19" name="TextBox 18"/>
           <p:cNvSpPr txBox="1"/>
           <p:nvPr/>
         </p:nvSpPr>
         <p:spPr>
           <a:xfrm>
-            <a:off x="804671" y="3171199"/>
-            <a:ext cx="10616184" cy="857767"/>
+            <a:off x="804671" y="4565277"/>
+            <a:ext cx="10616184" cy="1561202"/>
           </a:xfrm>
           <a:prstGeom prst="rect">
             <a:avLst/>
@@ -6432,175 +7107,10 @@
               </a:defRPr>
             </a:pPr>
             <a:r>
-              <a:t>Not available — this compact render fixture omits holding rows [S3].</a:t>
-            </a:r>
-          </a:p>
-        </p:txBody>
-      </p:sp>
-      <p:sp>
-        <p:nvSpPr>
-          <p:cNvPr id="16" name="Rectangle 15"/>
-          <p:cNvSpPr/>
-          <p:nvPr/>
-        </p:nvSpPr>
-        <p:spPr>
-          <a:xfrm>
-            <a:off x="640080" y="4230135"/>
-            <a:ext cx="10908792" cy="1987784"/>
-          </a:xfrm>
-          <a:prstGeom prst="rect">
-            <a:avLst/>
-          </a:prstGeom>
-          <a:solidFill>
-            <a:srgbClr val="F5F7F9"/>
-          </a:solidFill>
-          <a:ln>
-            <a:solidFill>
-              <a:srgbClr val="E3E7EC"/>
-            </a:solidFill>
-          </a:ln>
-        </p:spPr>
-        <p:style>
-          <a:lnRef idx="1">
-            <a:schemeClr val="accent1"/>
-          </a:lnRef>
-          <a:fillRef idx="3">
-            <a:schemeClr val="accent1"/>
-          </a:fillRef>
-          <a:effectRef idx="2">
-            <a:schemeClr val="accent1"/>
-          </a:effectRef>
-          <a:fontRef idx="minor">
-            <a:schemeClr val="lt1"/>
-          </a:fontRef>
-        </p:style>
-        <p:txBody>
-          <a:bodyPr rtlCol="0" anchor="ctr"/>
-          <a:lstStyle/>
-          <a:p>
-            <a:pPr algn="ctr"/>
-          </a:p>
-        </p:txBody>
-      </p:sp>
-      <p:sp>
-        <p:nvSpPr>
-          <p:cNvPr id="17" name="Rectangle 16"/>
-          <p:cNvSpPr/>
-          <p:nvPr/>
-        </p:nvSpPr>
-        <p:spPr>
-          <a:xfrm>
-            <a:off x="640080" y="4230135"/>
-            <a:ext cx="54864" cy="1987784"/>
-          </a:xfrm>
-          <a:prstGeom prst="rect">
-            <a:avLst/>
-          </a:prstGeom>
-          <a:solidFill>
-            <a:srgbClr val="0D1117"/>
-          </a:solidFill>
-          <a:ln>
-            <a:solidFill>
-              <a:srgbClr val="0D1117"/>
-            </a:solidFill>
-          </a:ln>
-        </p:spPr>
-        <p:style>
-          <a:lnRef idx="1">
-            <a:schemeClr val="accent1"/>
-          </a:lnRef>
-          <a:fillRef idx="3">
-            <a:schemeClr val="accent1"/>
-          </a:fillRef>
-          <a:effectRef idx="2">
-            <a:schemeClr val="accent1"/>
-          </a:effectRef>
-          <a:fontRef idx="minor">
-            <a:schemeClr val="lt1"/>
-          </a:fontRef>
-        </p:style>
-        <p:txBody>
-          <a:bodyPr rtlCol="0" anchor="ctr"/>
-          <a:lstStyle/>
-          <a:p>
-            <a:pPr algn="ctr"/>
-          </a:p>
-        </p:txBody>
-      </p:sp>
-      <p:sp>
-        <p:nvSpPr>
-          <p:cNvPr id="18" name="TextBox 17"/>
-          <p:cNvSpPr txBox="1"/>
-          <p:nvPr/>
-        </p:nvSpPr>
-        <p:spPr>
-          <a:xfrm>
-            <a:off x="804671" y="4339863"/>
-            <a:ext cx="10616184" cy="228600"/>
-          </a:xfrm>
-          <a:prstGeom prst="rect">
-            <a:avLst/>
-          </a:prstGeom>
-          <a:noFill/>
-        </p:spPr>
-        <p:txBody>
-          <a:bodyPr wrap="none" lIns="9144" rIns="9144" tIns="9144" bIns="9144" anchor="t">
-            <a:spAutoFit/>
-          </a:bodyPr>
-          <a:lstStyle/>
-          <a:p>
-            <a:pPr algn="l">
-              <a:spcAft>
-                <a:spcPts val="0"/>
-              </a:spcAft>
-              <a:defRPr sz="1000" b="1">
-                <a:solidFill>
-                  <a:srgbClr val="0D1117"/>
-                </a:solidFill>
-                <a:latin typeface="Inter"/>
-              </a:defRPr>
-            </a:pPr>
-            <a:r>
-              <a:t>Analysis — Holdings evidence remains partial</a:t>
-            </a:r>
-          </a:p>
-        </p:txBody>
-      </p:sp>
-      <p:sp>
-        <p:nvSpPr>
-          <p:cNvPr id="19" name="TextBox 18"/>
-          <p:cNvSpPr txBox="1"/>
-          <p:nvPr/>
-        </p:nvSpPr>
-        <p:spPr>
-          <a:xfrm>
-            <a:off x="804671" y="4623327"/>
-            <a:ext cx="10616184" cy="1503152"/>
-          </a:xfrm>
-          <a:prstGeom prst="rect">
-            <a:avLst/>
-          </a:prstGeom>
-          <a:noFill/>
-        </p:spPr>
-        <p:txBody>
-          <a:bodyPr wrap="none" lIns="9144" rIns="9144" tIns="9144" bIns="9144" anchor="t">
-            <a:spAutoFit/>
-          </a:bodyPr>
-          <a:lstStyle/>
-          <a:p>
-            <a:pPr algn="l">
-              <a:spcAft>
-                <a:spcPts val="0"/>
-              </a:spcAft>
-              <a:defRPr sz="950" b="0">
-                <a:solidFill>
-                  <a:srgbClr val="4A5563"/>
-                </a:solidFill>
-                <a:latin typeface="Inter"/>
-              </a:defRPr>
-            </a:pPr>
-            <a:r>
-              <a:t>Observation: A Form 13F snapshot exists, but holding rows are omitted from this TEST fixture [S3]. Why it matters: Concentration cannot be interpreted from the summary alone. Uncertainty…</a:t>
+              <a:rPr>
+                <a:latin typeface="Inter"/>
+              </a:rPr>
+              <a:t>Observation: One Form 13F snapshot exists, but holding rows are omitted from this TEST fixture [S3]. Why it matters: Concentration cannot be interpreted from the summary alone. Uncertainty…</a:t>
             </a:r>
           </a:p>
         </p:txBody>
@@ -6646,7 +7156,11 @@
           <a:bodyPr rtlCol="0" anchor="ctr"/>
           <a:lstStyle/>
           <a:p>
-            <a:pPr algn="ctr"/>
+            <a:pPr algn="ctr">
+              <a:defRPr>
+                <a:latin typeface="Inter"/>
+              </a:defRPr>
+            </a:pPr>
           </a:p>
         </p:txBody>
       </p:sp>
@@ -6684,6 +7198,9 @@
               </a:defRPr>
             </a:pPr>
             <a:r>
+              <a:rPr>
+                <a:latin typeface="Inter"/>
+              </a:rPr>
               <a:t>Sources: S3</a:t>
             </a:r>
           </a:p>
@@ -6723,7 +7240,10 @@
               </a:defRPr>
             </a:pPr>
             <a:r>
-              <a:t>RENDER TEST — partial sample, not a full ODD report</a:t>
+              <a:rPr>
+                <a:latin typeface="Inter"/>
+              </a:rPr>
+              <a:t>RENDER TEST — partial sample, not a full ODD report · Data as of 2026-10-01 (Form ADV); 2026-08-14 (Form 13F)</a:t>
             </a:r>
           </a:p>
         </p:txBody>
@@ -6762,6 +7282,9 @@
               </a:defRPr>
             </a:pPr>
             <a:r>
+              <a:rPr>
+                <a:latin typeface="Inter"/>
+              </a:rPr>
               <a:t>12</a:t>
             </a:r>
           </a:p>
@@ -6826,7 +7349,11 @@
           <a:bodyPr rtlCol="0" anchor="ctr"/>
           <a:lstStyle/>
           <a:p>
-            <a:pPr algn="ctr"/>
+            <a:pPr algn="ctr">
+              <a:defRPr>
+                <a:latin typeface="Inter"/>
+              </a:defRPr>
+            </a:pPr>
           </a:p>
         </p:txBody>
       </p:sp>
@@ -6864,6 +7391,9 @@
               </a:defRPr>
             </a:pPr>
             <a:r>
+              <a:rPr>
+                <a:latin typeface="Inter"/>
+              </a:rPr>
               <a:t>OPEN EVIDENCE GAPS DEFINE THE NEXT DILIGENCE WORK</a:t>
             </a:r>
           </a:p>
@@ -6903,6 +7433,9 @@
               </a:defRPr>
             </a:pPr>
             <a:r>
+              <a:rPr>
+                <a:latin typeface="Inter"/>
+              </a:rPr>
               <a:t>Monitoring, findings &amp; DDQ</a:t>
             </a:r>
           </a:p>
@@ -6949,7 +7482,11 @@
           <a:bodyPr rtlCol="0" anchor="ctr"/>
           <a:lstStyle/>
           <a:p>
-            <a:pPr algn="ctr"/>
+            <a:pPr algn="ctr">
+              <a:defRPr>
+                <a:latin typeface="Inter"/>
+              </a:defRPr>
+            </a:pPr>
           </a:p>
         </p:txBody>
       </p:sp>
@@ -6994,7 +7531,11 @@
           <a:bodyPr rtlCol="0" anchor="ctr"/>
           <a:lstStyle/>
           <a:p>
-            <a:pPr algn="ctr"/>
+            <a:pPr algn="ctr">
+              <a:defRPr>
+                <a:latin typeface="Inter"/>
+              </a:defRPr>
+            </a:pPr>
           </a:p>
         </p:txBody>
       </p:sp>
@@ -7032,6 +7573,9 @@
               </a:defRPr>
             </a:pPr>
             <a:r>
+              <a:rPr>
+                <a:latin typeface="Inter"/>
+              </a:rPr>
               <a:t>07</a:t>
             </a:r>
           </a:p>
@@ -7039,104 +7583,14 @@
       </p:sp>
       <p:sp>
         <p:nvSpPr>
-          <p:cNvPr id="8" name="Rectangle 7"/>
-          <p:cNvSpPr/>
+          <p:cNvPr id="8" name="TextBox 7"/>
+          <p:cNvSpPr txBox="1"/>
           <p:nvPr/>
         </p:nvSpPr>
         <p:spPr>
           <a:xfrm>
             <a:off x="640080" y="1325880"/>
-            <a:ext cx="10908792" cy="4892040"/>
-          </a:xfrm>
-          <a:prstGeom prst="rect">
-            <a:avLst/>
-          </a:prstGeom>
-          <a:solidFill>
-            <a:srgbClr val="F5F7F9"/>
-          </a:solidFill>
-          <a:ln>
-            <a:solidFill>
-              <a:srgbClr val="E3E7EC"/>
-            </a:solidFill>
-          </a:ln>
-        </p:spPr>
-        <p:style>
-          <a:lnRef idx="1">
-            <a:schemeClr val="accent1"/>
-          </a:lnRef>
-          <a:fillRef idx="3">
-            <a:schemeClr val="accent1"/>
-          </a:fillRef>
-          <a:effectRef idx="2">
-            <a:schemeClr val="accent1"/>
-          </a:effectRef>
-          <a:fontRef idx="minor">
-            <a:schemeClr val="lt1"/>
-          </a:fontRef>
-        </p:style>
-        <p:txBody>
-          <a:bodyPr rtlCol="0" anchor="ctr"/>
-          <a:lstStyle/>
-          <a:p>
-            <a:pPr algn="ctr"/>
-          </a:p>
-        </p:txBody>
-      </p:sp>
-      <p:sp>
-        <p:nvSpPr>
-          <p:cNvPr id="9" name="Rectangle 8"/>
-          <p:cNvSpPr/>
-          <p:nvPr/>
-        </p:nvSpPr>
-        <p:spPr>
-          <a:xfrm>
-            <a:off x="640080" y="1325880"/>
-            <a:ext cx="54864" cy="4892040"/>
-          </a:xfrm>
-          <a:prstGeom prst="rect">
-            <a:avLst/>
-          </a:prstGeom>
-          <a:solidFill>
-            <a:srgbClr val="0D1117"/>
-          </a:solidFill>
-          <a:ln>
-            <a:solidFill>
-              <a:srgbClr val="0D1117"/>
-            </a:solidFill>
-          </a:ln>
-        </p:spPr>
-        <p:style>
-          <a:lnRef idx="1">
-            <a:schemeClr val="accent1"/>
-          </a:lnRef>
-          <a:fillRef idx="3">
-            <a:schemeClr val="accent1"/>
-          </a:fillRef>
-          <a:effectRef idx="2">
-            <a:schemeClr val="accent1"/>
-          </a:effectRef>
-          <a:fontRef idx="minor">
-            <a:schemeClr val="lt1"/>
-          </a:fontRef>
-        </p:style>
-        <p:txBody>
-          <a:bodyPr rtlCol="0" anchor="ctr"/>
-          <a:lstStyle/>
-          <a:p>
-            <a:pPr algn="ctr"/>
-          </a:p>
-        </p:txBody>
-      </p:sp>
-      <p:sp>
-        <p:nvSpPr>
-          <p:cNvPr id="10" name="TextBox 9"/>
-          <p:cNvSpPr txBox="1"/>
-          <p:nvPr/>
-        </p:nvSpPr>
-        <p:spPr>
-          <a:xfrm>
-            <a:off x="804671" y="1435607"/>
-            <a:ext cx="10616184" cy="228600"/>
+            <a:ext cx="10908792" cy="201168"/>
           </a:xfrm>
           <a:prstGeom prst="rect">
             <a:avLst/>
@@ -7153,46 +7607,7 @@
               <a:spcAft>
                 <a:spcPts val="0"/>
               </a:spcAft>
-              <a:defRPr sz="1000" b="1">
-                <a:solidFill>
-                  <a:srgbClr val="0D1117"/>
-                </a:solidFill>
-                <a:latin typeface="Inter"/>
-              </a:defRPr>
-            </a:pPr>
-            <a:r>
-              <a:t>Visual evidence</a:t>
-            </a:r>
-          </a:p>
-        </p:txBody>
-      </p:sp>
-      <p:sp>
-        <p:nvSpPr>
-          <p:cNvPr id="11" name="TextBox 10"/>
-          <p:cNvSpPr txBox="1"/>
-          <p:nvPr/>
-        </p:nvSpPr>
-        <p:spPr>
-          <a:xfrm>
-            <a:off x="804671" y="1719072"/>
-            <a:ext cx="10616184" cy="4407408"/>
-          </a:xfrm>
-          <a:prstGeom prst="rect">
-            <a:avLst/>
-          </a:prstGeom>
-          <a:noFill/>
-        </p:spPr>
-        <p:txBody>
-          <a:bodyPr wrap="none" lIns="9144" rIns="9144" tIns="9144" bIns="9144" anchor="t">
-            <a:spAutoFit/>
-          </a:bodyPr>
-          <a:lstStyle/>
-          <a:p>
-            <a:pPr algn="l">
-              <a:spcAft>
-                <a:spcPts val="0"/>
-              </a:spcAft>
-              <a:defRPr sz="950" b="0">
+              <a:defRPr sz="720" b="1">
                 <a:solidFill>
                   <a:srgbClr val="4A5563"/>
                 </a:solidFill>
@@ -7200,21 +7615,24 @@
               </a:defRPr>
             </a:pPr>
             <a:r>
-              <a:t>Not available — No governed visual was returned for this fictional TEST fixture.</a:t>
-            </a:r>
-          </a:p>
-        </p:txBody>
-      </p:sp>
-      <p:sp>
-        <p:nvSpPr>
-          <p:cNvPr id="12" name="Rectangle 11"/>
+              <a:rPr>
+                <a:latin typeface="Inter"/>
+              </a:rPr>
+              <a:t>GOVERNED EVENT TIMELINE</a:t>
+            </a:r>
+          </a:p>
+        </p:txBody>
+      </p:sp>
+      <p:sp>
+        <p:nvSpPr>
+          <p:cNvPr id="9" name="Rectangle 8"/>
           <p:cNvSpPr/>
           <p:nvPr/>
         </p:nvSpPr>
         <p:spPr>
           <a:xfrm>
-            <a:off x="640080" y="6446520"/>
-            <a:ext cx="10908792" cy="9144"/>
+            <a:off x="1874519" y="1673352"/>
+            <a:ext cx="22860" cy="4507992"/>
           </a:xfrm>
           <a:prstGeom prst="rect">
             <a:avLst/>
@@ -7246,13 +7664,591 @@
           <a:bodyPr rtlCol="0" anchor="ctr"/>
           <a:lstStyle/>
           <a:p>
-            <a:pPr algn="ctr"/>
+            <a:pPr algn="ctr">
+              <a:defRPr>
+                <a:latin typeface="Inter"/>
+              </a:defRPr>
+            </a:pPr>
+          </a:p>
+        </p:txBody>
+      </p:sp>
+      <p:sp>
+        <p:nvSpPr>
+          <p:cNvPr id="10" name="Oval 9"/>
+          <p:cNvSpPr/>
+          <p:nvPr/>
+        </p:nvSpPr>
+        <p:spPr>
+          <a:xfrm>
+            <a:off x="1824228" y="1837944"/>
+            <a:ext cx="128016" cy="128016"/>
+          </a:xfrm>
+          <a:prstGeom prst="ellipse">
+            <a:avLst/>
+          </a:prstGeom>
+          <a:solidFill>
+            <a:srgbClr val="0D1117"/>
+          </a:solidFill>
+          <a:ln>
+            <a:solidFill>
+              <a:srgbClr val="FFFFFF"/>
+            </a:solidFill>
+          </a:ln>
+        </p:spPr>
+        <p:style>
+          <a:lnRef idx="1">
+            <a:schemeClr val="accent1"/>
+          </a:lnRef>
+          <a:fillRef idx="3">
+            <a:schemeClr val="accent1"/>
+          </a:fillRef>
+          <a:effectRef idx="2">
+            <a:schemeClr val="accent1"/>
+          </a:effectRef>
+          <a:fontRef idx="minor">
+            <a:schemeClr val="lt1"/>
+          </a:fontRef>
+        </p:style>
+        <p:txBody>
+          <a:bodyPr rtlCol="0" anchor="ctr"/>
+          <a:lstStyle/>
+          <a:p>
+            <a:pPr algn="ctr">
+              <a:defRPr>
+                <a:latin typeface="Inter"/>
+              </a:defRPr>
+            </a:pPr>
+          </a:p>
+        </p:txBody>
+      </p:sp>
+      <p:sp>
+        <p:nvSpPr>
+          <p:cNvPr id="11" name="TextBox 10"/>
+          <p:cNvSpPr txBox="1"/>
+          <p:nvPr/>
+        </p:nvSpPr>
+        <p:spPr>
+          <a:xfrm>
+            <a:off x="640080" y="1673352"/>
+            <a:ext cx="1106424" cy="274320"/>
+          </a:xfrm>
+          <a:prstGeom prst="rect">
+            <a:avLst/>
+          </a:prstGeom>
+          <a:noFill/>
+        </p:spPr>
+        <p:txBody>
+          <a:bodyPr wrap="none" lIns="9144" rIns="9144" tIns="9144" bIns="9144" anchor="t">
+            <a:spAutoFit/>
+          </a:bodyPr>
+          <a:lstStyle/>
+          <a:p>
+            <a:pPr algn="r">
+              <a:spcAft>
+                <a:spcPts val="0"/>
+              </a:spcAft>
+              <a:defRPr sz="750" b="1">
+                <a:solidFill>
+                  <a:srgbClr val="4A5563"/>
+                </a:solidFill>
+                <a:latin typeface="Inter"/>
+              </a:defRPr>
+            </a:pPr>
+            <a:r>
+              <a:rPr>
+                <a:latin typeface="Inter"/>
+              </a:rPr>
+              <a:t>2026-08-14</a:t>
+            </a:r>
+          </a:p>
+        </p:txBody>
+      </p:sp>
+      <p:sp>
+        <p:nvSpPr>
+          <p:cNvPr id="12" name="TextBox 11"/>
+          <p:cNvSpPr txBox="1"/>
+          <p:nvPr/>
+        </p:nvSpPr>
+        <p:spPr>
+          <a:xfrm>
+            <a:off x="2057400" y="1673352"/>
+            <a:ext cx="9491472" cy="256032"/>
+          </a:xfrm>
+          <a:prstGeom prst="rect">
+            <a:avLst/>
+          </a:prstGeom>
+          <a:noFill/>
+        </p:spPr>
+        <p:txBody>
+          <a:bodyPr wrap="none" lIns="9144" rIns="9144" tIns="9144" bIns="9144" anchor="t">
+            <a:spAutoFit/>
+          </a:bodyPr>
+          <a:lstStyle/>
+          <a:p>
+            <a:pPr algn="l">
+              <a:spcAft>
+                <a:spcPts val="0"/>
+              </a:spcAft>
+              <a:defRPr sz="950" b="1">
+                <a:solidFill>
+                  <a:srgbClr val="0D1117"/>
+                </a:solidFill>
+                <a:latin typeface="Inter"/>
+              </a:defRPr>
+            </a:pPr>
+            <a:r>
+              <a:rPr>
+                <a:latin typeface="Inter"/>
+              </a:rPr>
+              <a:t>Form 13F snapshot</a:t>
+            </a:r>
           </a:p>
         </p:txBody>
       </p:sp>
       <p:sp>
         <p:nvSpPr>
           <p:cNvPr id="13" name="TextBox 12"/>
+          <p:cNvSpPr txBox="1"/>
+          <p:nvPr/>
+        </p:nvSpPr>
+        <p:spPr>
+          <a:xfrm>
+            <a:off x="2057400" y="1938528"/>
+            <a:ext cx="9491472" cy="781385"/>
+          </a:xfrm>
+          <a:prstGeom prst="rect">
+            <a:avLst/>
+          </a:prstGeom>
+          <a:noFill/>
+        </p:spPr>
+        <p:txBody>
+          <a:bodyPr wrap="none" lIns="9144" rIns="9144" tIns="9144" bIns="9144" anchor="t">
+            <a:spAutoFit/>
+          </a:bodyPr>
+          <a:lstStyle/>
+          <a:p>
+            <a:pPr algn="l">
+              <a:spcAft>
+                <a:spcPts val="0"/>
+              </a:spcAft>
+              <a:defRPr sz="850" b="0">
+                <a:solidFill>
+                  <a:srgbClr val="4A5563"/>
+                </a:solidFill>
+                <a:latin typeface="Inter"/>
+              </a:defRPr>
+            </a:pPr>
+            <a:r>
+              <a:rPr>
+                <a:latin typeface="Inter"/>
+              </a:rPr>
+              <a:t>Latest available lagged holdings evidence [S3].</a:t>
+            </a:r>
+          </a:p>
+        </p:txBody>
+      </p:sp>
+      <p:sp>
+        <p:nvSpPr>
+          <p:cNvPr id="14" name="Oval 13"/>
+          <p:cNvSpPr/>
+          <p:nvPr/>
+        </p:nvSpPr>
+        <p:spPr>
+          <a:xfrm>
+            <a:off x="1824228" y="3340608"/>
+            <a:ext cx="128016" cy="128016"/>
+          </a:xfrm>
+          <a:prstGeom prst="ellipse">
+            <a:avLst/>
+          </a:prstGeom>
+          <a:solidFill>
+            <a:srgbClr val="C6F432"/>
+          </a:solidFill>
+          <a:ln>
+            <a:solidFill>
+              <a:srgbClr val="FFFFFF"/>
+            </a:solidFill>
+          </a:ln>
+        </p:spPr>
+        <p:style>
+          <a:lnRef idx="1">
+            <a:schemeClr val="accent1"/>
+          </a:lnRef>
+          <a:fillRef idx="3">
+            <a:schemeClr val="accent1"/>
+          </a:fillRef>
+          <a:effectRef idx="2">
+            <a:schemeClr val="accent1"/>
+          </a:effectRef>
+          <a:fontRef idx="minor">
+            <a:schemeClr val="lt1"/>
+          </a:fontRef>
+        </p:style>
+        <p:txBody>
+          <a:bodyPr rtlCol="0" anchor="ctr"/>
+          <a:lstStyle/>
+          <a:p>
+            <a:pPr algn="ctr">
+              <a:defRPr>
+                <a:latin typeface="Inter"/>
+              </a:defRPr>
+            </a:pPr>
+          </a:p>
+        </p:txBody>
+      </p:sp>
+      <p:sp>
+        <p:nvSpPr>
+          <p:cNvPr id="15" name="TextBox 14"/>
+          <p:cNvSpPr txBox="1"/>
+          <p:nvPr/>
+        </p:nvSpPr>
+        <p:spPr>
+          <a:xfrm>
+            <a:off x="640080" y="3176016"/>
+            <a:ext cx="1106424" cy="274320"/>
+          </a:xfrm>
+          <a:prstGeom prst="rect">
+            <a:avLst/>
+          </a:prstGeom>
+          <a:noFill/>
+        </p:spPr>
+        <p:txBody>
+          <a:bodyPr wrap="none" lIns="9144" rIns="9144" tIns="9144" bIns="9144" anchor="t">
+            <a:spAutoFit/>
+          </a:bodyPr>
+          <a:lstStyle/>
+          <a:p>
+            <a:pPr algn="r">
+              <a:spcAft>
+                <a:spcPts val="0"/>
+              </a:spcAft>
+              <a:defRPr sz="750" b="1">
+                <a:solidFill>
+                  <a:srgbClr val="4A5563"/>
+                </a:solidFill>
+                <a:latin typeface="Inter"/>
+              </a:defRPr>
+            </a:pPr>
+            <a:r>
+              <a:rPr>
+                <a:latin typeface="Inter"/>
+              </a:rPr>
+              <a:t>2026-10-01</a:t>
+            </a:r>
+          </a:p>
+        </p:txBody>
+      </p:sp>
+      <p:sp>
+        <p:nvSpPr>
+          <p:cNvPr id="16" name="TextBox 15"/>
+          <p:cNvSpPr txBox="1"/>
+          <p:nvPr/>
+        </p:nvSpPr>
+        <p:spPr>
+          <a:xfrm>
+            <a:off x="2057400" y="3176016"/>
+            <a:ext cx="9491472" cy="256032"/>
+          </a:xfrm>
+          <a:prstGeom prst="rect">
+            <a:avLst/>
+          </a:prstGeom>
+          <a:noFill/>
+        </p:spPr>
+        <p:txBody>
+          <a:bodyPr wrap="none" lIns="9144" rIns="9144" tIns="9144" bIns="9144" anchor="t">
+            <a:spAutoFit/>
+          </a:bodyPr>
+          <a:lstStyle/>
+          <a:p>
+            <a:pPr algn="l">
+              <a:spcAft>
+                <a:spcPts val="0"/>
+              </a:spcAft>
+              <a:defRPr sz="950" b="1">
+                <a:solidFill>
+                  <a:srgbClr val="0D1117"/>
+                </a:solidFill>
+                <a:latin typeface="Inter"/>
+              </a:defRPr>
+            </a:pPr>
+            <a:r>
+              <a:rPr>
+                <a:latin typeface="Inter"/>
+              </a:rPr>
+              <a:t>Form ADV profile</a:t>
+            </a:r>
+          </a:p>
+        </p:txBody>
+      </p:sp>
+      <p:sp>
+        <p:nvSpPr>
+          <p:cNvPr id="17" name="TextBox 16"/>
+          <p:cNvSpPr txBox="1"/>
+          <p:nvPr/>
+        </p:nvSpPr>
+        <p:spPr>
+          <a:xfrm>
+            <a:off x="2057400" y="3441192"/>
+            <a:ext cx="9491472" cy="781385"/>
+          </a:xfrm>
+          <a:prstGeom prst="rect">
+            <a:avLst/>
+          </a:prstGeom>
+          <a:noFill/>
+        </p:spPr>
+        <p:txBody>
+          <a:bodyPr wrap="none" lIns="9144" rIns="9144" tIns="9144" bIns="9144" anchor="t">
+            <a:spAutoFit/>
+          </a:bodyPr>
+          <a:lstStyle/>
+          <a:p>
+            <a:pPr algn="l">
+              <a:spcAft>
+                <a:spcPts val="0"/>
+              </a:spcAft>
+              <a:defRPr sz="850" b="0">
+                <a:solidFill>
+                  <a:srgbClr val="4A5563"/>
+                </a:solidFill>
+                <a:latin typeface="Inter"/>
+              </a:defRPr>
+            </a:pPr>
+            <a:r>
+              <a:rPr>
+                <a:latin typeface="Inter"/>
+              </a:rPr>
+              <a:t>Latest validated adviser filing evidence [S1].</a:t>
+            </a:r>
+          </a:p>
+        </p:txBody>
+      </p:sp>
+      <p:sp>
+        <p:nvSpPr>
+          <p:cNvPr id="18" name="Oval 17"/>
+          <p:cNvSpPr/>
+          <p:nvPr/>
+        </p:nvSpPr>
+        <p:spPr>
+          <a:xfrm>
+            <a:off x="1824228" y="4843272"/>
+            <a:ext cx="128016" cy="128016"/>
+          </a:xfrm>
+          <a:prstGeom prst="ellipse">
+            <a:avLst/>
+          </a:prstGeom>
+          <a:solidFill>
+            <a:srgbClr val="F2A93B"/>
+          </a:solidFill>
+          <a:ln>
+            <a:solidFill>
+              <a:srgbClr val="FFFFFF"/>
+            </a:solidFill>
+          </a:ln>
+        </p:spPr>
+        <p:style>
+          <a:lnRef idx="1">
+            <a:schemeClr val="accent1"/>
+          </a:lnRef>
+          <a:fillRef idx="3">
+            <a:schemeClr val="accent1"/>
+          </a:fillRef>
+          <a:effectRef idx="2">
+            <a:schemeClr val="accent1"/>
+          </a:effectRef>
+          <a:fontRef idx="minor">
+            <a:schemeClr val="lt1"/>
+          </a:fontRef>
+        </p:style>
+        <p:txBody>
+          <a:bodyPr rtlCol="0" anchor="ctr"/>
+          <a:lstStyle/>
+          <a:p>
+            <a:pPr algn="ctr">
+              <a:defRPr>
+                <a:latin typeface="Inter"/>
+              </a:defRPr>
+            </a:pPr>
+          </a:p>
+        </p:txBody>
+      </p:sp>
+      <p:sp>
+        <p:nvSpPr>
+          <p:cNvPr id="19" name="TextBox 18"/>
+          <p:cNvSpPr txBox="1"/>
+          <p:nvPr/>
+        </p:nvSpPr>
+        <p:spPr>
+          <a:xfrm>
+            <a:off x="640080" y="4678680"/>
+            <a:ext cx="1106424" cy="274320"/>
+          </a:xfrm>
+          <a:prstGeom prst="rect">
+            <a:avLst/>
+          </a:prstGeom>
+          <a:noFill/>
+        </p:spPr>
+        <p:txBody>
+          <a:bodyPr wrap="none" lIns="9144" rIns="9144" tIns="9144" bIns="9144" anchor="t">
+            <a:spAutoFit/>
+          </a:bodyPr>
+          <a:lstStyle/>
+          <a:p>
+            <a:pPr algn="r">
+              <a:spcAft>
+                <a:spcPts val="0"/>
+              </a:spcAft>
+              <a:defRPr sz="750" b="1">
+                <a:solidFill>
+                  <a:srgbClr val="4A5563"/>
+                </a:solidFill>
+                <a:latin typeface="Inter"/>
+              </a:defRPr>
+            </a:pPr>
+            <a:r>
+              <a:rPr>
+                <a:latin typeface="Inter"/>
+              </a:rPr>
+              <a:t>Not available</a:t>
+            </a:r>
+          </a:p>
+        </p:txBody>
+      </p:sp>
+      <p:sp>
+        <p:nvSpPr>
+          <p:cNvPr id="20" name="TextBox 19"/>
+          <p:cNvSpPr txBox="1"/>
+          <p:nvPr/>
+        </p:nvSpPr>
+        <p:spPr>
+          <a:xfrm>
+            <a:off x="2057400" y="4678680"/>
+            <a:ext cx="9491472" cy="256032"/>
+          </a:xfrm>
+          <a:prstGeom prst="rect">
+            <a:avLst/>
+          </a:prstGeom>
+          <a:noFill/>
+        </p:spPr>
+        <p:txBody>
+          <a:bodyPr wrap="none" lIns="9144" rIns="9144" tIns="9144" bIns="9144" anchor="t">
+            <a:spAutoFit/>
+          </a:bodyPr>
+          <a:lstStyle/>
+          <a:p>
+            <a:pPr algn="l">
+              <a:spcAft>
+                <a:spcPts val="0"/>
+              </a:spcAft>
+              <a:defRPr sz="950" b="1">
+                <a:solidFill>
+                  <a:srgbClr val="0D1117"/>
+                </a:solidFill>
+                <a:latin typeface="Inter"/>
+              </a:defRPr>
+            </a:pPr>
+            <a:r>
+              <a:rPr>
+                <a:latin typeface="Inter"/>
+              </a:rPr>
+              <a:t>Firm and fund events</a:t>
+            </a:r>
+          </a:p>
+        </p:txBody>
+      </p:sp>
+      <p:sp>
+        <p:nvSpPr>
+          <p:cNvPr id="21" name="TextBox 20"/>
+          <p:cNvSpPr txBox="1"/>
+          <p:nvPr/>
+        </p:nvSpPr>
+        <p:spPr>
+          <a:xfrm>
+            <a:off x="2057400" y="4943856"/>
+            <a:ext cx="9491472" cy="781385"/>
+          </a:xfrm>
+          <a:prstGeom prst="rect">
+            <a:avLst/>
+          </a:prstGeom>
+          <a:noFill/>
+        </p:spPr>
+        <p:txBody>
+          <a:bodyPr wrap="none" lIns="9144" rIns="9144" tIns="9144" bIns="9144" anchor="t">
+            <a:spAutoFit/>
+          </a:bodyPr>
+          <a:lstStyle/>
+          <a:p>
+            <a:pPr algn="l">
+              <a:spcAft>
+                <a:spcPts val="0"/>
+              </a:spcAft>
+              <a:defRPr sz="850" b="0">
+                <a:solidFill>
+                  <a:srgbClr val="4A5563"/>
+                </a:solidFill>
+                <a:latin typeface="Inter"/>
+              </a:defRPr>
+            </a:pPr>
+            <a:r>
+              <a:rPr>
+                <a:latin typeface="Inter"/>
+              </a:rPr>
+              <a:t>Event publication is not yet available in the TEST record [S2].</a:t>
+            </a:r>
+          </a:p>
+        </p:txBody>
+      </p:sp>
+      <p:sp>
+        <p:nvSpPr>
+          <p:cNvPr id="22" name="Rectangle 21"/>
+          <p:cNvSpPr/>
+          <p:nvPr/>
+        </p:nvSpPr>
+        <p:spPr>
+          <a:xfrm>
+            <a:off x="640080" y="6446520"/>
+            <a:ext cx="10908792" cy="9144"/>
+          </a:xfrm>
+          <a:prstGeom prst="rect">
+            <a:avLst/>
+          </a:prstGeom>
+          <a:solidFill>
+            <a:srgbClr val="E3E7EC"/>
+          </a:solidFill>
+          <a:ln>
+            <a:solidFill>
+              <a:srgbClr val="E3E7EC"/>
+            </a:solidFill>
+          </a:ln>
+        </p:spPr>
+        <p:style>
+          <a:lnRef idx="1">
+            <a:schemeClr val="accent1"/>
+          </a:lnRef>
+          <a:fillRef idx="3">
+            <a:schemeClr val="accent1"/>
+          </a:fillRef>
+          <a:effectRef idx="2">
+            <a:schemeClr val="accent1"/>
+          </a:effectRef>
+          <a:fontRef idx="minor">
+            <a:schemeClr val="lt1"/>
+          </a:fontRef>
+        </p:style>
+        <p:txBody>
+          <a:bodyPr rtlCol="0" anchor="ctr"/>
+          <a:lstStyle/>
+          <a:p>
+            <a:pPr algn="ctr">
+              <a:defRPr>
+                <a:latin typeface="Inter"/>
+              </a:defRPr>
+            </a:pPr>
+          </a:p>
+        </p:txBody>
+      </p:sp>
+      <p:sp>
+        <p:nvSpPr>
+          <p:cNvPr id="23" name="TextBox 22"/>
           <p:cNvSpPr txBox="1"/>
           <p:nvPr/>
         </p:nvSpPr>
@@ -7284,14 +8280,17 @@
               </a:defRPr>
             </a:pPr>
             <a:r>
-              <a:t>Sources: none cited</a:t>
-            </a:r>
-          </a:p>
-        </p:txBody>
-      </p:sp>
-      <p:sp>
-        <p:nvSpPr>
-          <p:cNvPr id="14" name="TextBox 13"/>
+              <a:rPr>
+                <a:latin typeface="Inter"/>
+              </a:rPr>
+              <a:t>Sources: S1 · S2 · S3</a:t>
+            </a:r>
+          </a:p>
+        </p:txBody>
+      </p:sp>
+      <p:sp>
+        <p:nvSpPr>
+          <p:cNvPr id="24" name="TextBox 23"/>
           <p:cNvSpPr txBox="1"/>
           <p:nvPr/>
         </p:nvSpPr>
@@ -7323,14 +8322,17 @@
               </a:defRPr>
             </a:pPr>
             <a:r>
-              <a:t>RENDER TEST — partial sample, not a full ODD report</a:t>
-            </a:r>
-          </a:p>
-        </p:txBody>
-      </p:sp>
-      <p:sp>
-        <p:nvSpPr>
-          <p:cNvPr id="15" name="TextBox 14"/>
+              <a:rPr>
+                <a:latin typeface="Inter"/>
+              </a:rPr>
+              <a:t>RENDER TEST — partial sample, not a full ODD report · Data as of 2026-10-01 (Form ADV); 2026-08-14 (Form 13F)</a:t>
+            </a:r>
+          </a:p>
+        </p:txBody>
+      </p:sp>
+      <p:sp>
+        <p:nvSpPr>
+          <p:cNvPr id="25" name="TextBox 24"/>
           <p:cNvSpPr txBox="1"/>
           <p:nvPr/>
         </p:nvSpPr>
@@ -7362,6 +8364,9 @@
               </a:defRPr>
             </a:pPr>
             <a:r>
+              <a:rPr>
+                <a:latin typeface="Inter"/>
+              </a:rPr>
               <a:t>13</a:t>
             </a:r>
           </a:p>
@@ -7426,7 +8431,11 @@
           <a:bodyPr rtlCol="0" anchor="ctr"/>
           <a:lstStyle/>
           <a:p>
-            <a:pPr algn="ctr"/>
+            <a:pPr algn="ctr">
+              <a:defRPr>
+                <a:latin typeface="Inter"/>
+              </a:defRPr>
+            </a:pPr>
           </a:p>
         </p:txBody>
       </p:sp>
@@ -7464,6 +8473,9 @@
               </a:defRPr>
             </a:pPr>
             <a:r>
+              <a:rPr>
+                <a:latin typeface="Inter"/>
+              </a:rPr>
               <a:t>OPEN EVIDENCE GAPS DEFINE THE NEXT DILIGENCE WORK</a:t>
             </a:r>
           </a:p>
@@ -7503,6 +8515,9 @@
               </a:defRPr>
             </a:pPr>
             <a:r>
+              <a:rPr>
+                <a:latin typeface="Inter"/>
+              </a:rPr>
               <a:t>Monitoring, findings &amp; DDQ — continued</a:t>
             </a:r>
           </a:p>
@@ -7549,7 +8564,11 @@
           <a:bodyPr rtlCol="0" anchor="ctr"/>
           <a:lstStyle/>
           <a:p>
-            <a:pPr algn="ctr"/>
+            <a:pPr algn="ctr">
+              <a:defRPr>
+                <a:latin typeface="Inter"/>
+              </a:defRPr>
+            </a:pPr>
           </a:p>
         </p:txBody>
       </p:sp>
@@ -7594,7 +8613,11 @@
           <a:bodyPr rtlCol="0" anchor="ctr"/>
           <a:lstStyle/>
           <a:p>
-            <a:pPr algn="ctr"/>
+            <a:pPr algn="ctr">
+              <a:defRPr>
+                <a:latin typeface="Inter"/>
+              </a:defRPr>
+            </a:pPr>
           </a:p>
         </p:txBody>
       </p:sp>
@@ -7632,6 +8655,9 @@
               </a:defRPr>
             </a:pPr>
             <a:r>
+              <a:rPr>
+                <a:latin typeface="Inter"/>
+              </a:rPr>
               <a:t>07</a:t>
             </a:r>
           </a:p>
@@ -7639,14 +8665,112 @@
       </p:sp>
       <p:sp>
         <p:nvSpPr>
-          <p:cNvPr id="8" name="TextBox 7"/>
+          <p:cNvPr id="8" name="Rectangle 7"/>
+          <p:cNvSpPr/>
+          <p:nvPr/>
+        </p:nvSpPr>
+        <p:spPr>
+          <a:xfrm>
+            <a:off x="640080" y="1325880"/>
+            <a:ext cx="10908792" cy="1798771"/>
+          </a:xfrm>
+          <a:prstGeom prst="rect">
+            <a:avLst/>
+          </a:prstGeom>
+          <a:solidFill>
+            <a:srgbClr val="F5F7F9"/>
+          </a:solidFill>
+          <a:ln>
+            <a:solidFill>
+              <a:srgbClr val="E3E7EC"/>
+            </a:solidFill>
+          </a:ln>
+        </p:spPr>
+        <p:style>
+          <a:lnRef idx="1">
+            <a:schemeClr val="accent1"/>
+          </a:lnRef>
+          <a:fillRef idx="3">
+            <a:schemeClr val="accent1"/>
+          </a:fillRef>
+          <a:effectRef idx="2">
+            <a:schemeClr val="accent1"/>
+          </a:effectRef>
+          <a:fontRef idx="minor">
+            <a:schemeClr val="lt1"/>
+          </a:fontRef>
+        </p:style>
+        <p:txBody>
+          <a:bodyPr rtlCol="0" anchor="ctr"/>
+          <a:lstStyle/>
+          <a:p>
+            <a:pPr algn="ctr">
+              <a:defRPr>
+                <a:latin typeface="Inter"/>
+              </a:defRPr>
+            </a:pPr>
+          </a:p>
+        </p:txBody>
+      </p:sp>
+      <p:sp>
+        <p:nvSpPr>
+          <p:cNvPr id="9" name="Rectangle 8"/>
+          <p:cNvSpPr/>
+          <p:nvPr/>
+        </p:nvSpPr>
+        <p:spPr>
+          <a:xfrm>
+            <a:off x="640080" y="1325880"/>
+            <a:ext cx="54864" cy="1798771"/>
+          </a:xfrm>
+          <a:prstGeom prst="rect">
+            <a:avLst/>
+          </a:prstGeom>
+          <a:solidFill>
+            <a:srgbClr val="0D1117"/>
+          </a:solidFill>
+          <a:ln>
+            <a:solidFill>
+              <a:srgbClr val="0D1117"/>
+            </a:solidFill>
+          </a:ln>
+        </p:spPr>
+        <p:style>
+          <a:lnRef idx="1">
+            <a:schemeClr val="accent1"/>
+          </a:lnRef>
+          <a:fillRef idx="3">
+            <a:schemeClr val="accent1"/>
+          </a:fillRef>
+          <a:effectRef idx="2">
+            <a:schemeClr val="accent1"/>
+          </a:effectRef>
+          <a:fontRef idx="minor">
+            <a:schemeClr val="lt1"/>
+          </a:fontRef>
+        </p:style>
+        <p:txBody>
+          <a:bodyPr rtlCol="0" anchor="ctr"/>
+          <a:lstStyle/>
+          <a:p>
+            <a:pPr algn="ctr">
+              <a:defRPr>
+                <a:latin typeface="Inter"/>
+              </a:defRPr>
+            </a:pPr>
+          </a:p>
+        </p:txBody>
+      </p:sp>
+      <p:sp>
+        <p:nvSpPr>
+          <p:cNvPr id="10" name="TextBox 9"/>
           <p:cNvSpPr txBox="1"/>
           <p:nvPr/>
         </p:nvSpPr>
         <p:spPr>
           <a:xfrm>
-            <a:off x="640080" y="1325880"/>
-            <a:ext cx="10908792" cy="201168"/>
+            <a:off x="804671" y="1435607"/>
+            <a:ext cx="10616184" cy="228600"/>
           </a:xfrm>
           <a:prstGeom prst="rect">
             <a:avLst/>
@@ -7663,7 +8787,49 @@
               <a:spcAft>
                 <a:spcPts val="0"/>
               </a:spcAft>
-              <a:defRPr sz="720" b="1">
+              <a:defRPr sz="1000" b="1">
+                <a:solidFill>
+                  <a:srgbClr val="0D1117"/>
+                </a:solidFill>
+                <a:latin typeface="Inter"/>
+              </a:defRPr>
+            </a:pPr>
+            <a:r>
+              <a:rPr>
+                <a:latin typeface="Inter"/>
+              </a:rPr>
+              <a:t>Not available</a:t>
+            </a:r>
+          </a:p>
+        </p:txBody>
+      </p:sp>
+      <p:sp>
+        <p:nvSpPr>
+          <p:cNvPr id="11" name="TextBox 10"/>
+          <p:cNvSpPr txBox="1"/>
+          <p:nvPr/>
+        </p:nvSpPr>
+        <p:spPr>
+          <a:xfrm>
+            <a:off x="804671" y="1719072"/>
+            <a:ext cx="10616184" cy="1314139"/>
+          </a:xfrm>
+          <a:prstGeom prst="rect">
+            <a:avLst/>
+          </a:prstGeom>
+          <a:noFill/>
+        </p:spPr>
+        <p:txBody>
+          <a:bodyPr wrap="none" lIns="9144" rIns="9144" tIns="9144" bIns="9144" anchor="t">
+            <a:spAutoFit/>
+          </a:bodyPr>
+          <a:lstStyle/>
+          <a:p>
+            <a:pPr algn="l">
+              <a:spcAft>
+                <a:spcPts val="0"/>
+              </a:spcAft>
+              <a:defRPr sz="950" b="0">
                 <a:solidFill>
                   <a:srgbClr val="4A5563"/>
                 </a:solidFill>
@@ -7671,21 +8837,206 @@
               </a:defRPr>
             </a:pPr>
             <a:r>
-              <a:t>GOVERNED EVENT TIMELINE</a:t>
-            </a:r>
-          </a:p>
-        </p:txBody>
-      </p:sp>
-      <p:sp>
-        <p:nvSpPr>
-          <p:cNvPr id="9" name="Rectangle 8"/>
+              <a:rPr>
+                <a:latin typeface="Inter"/>
+              </a:rPr>
+              <a:t>Not available — this compact render fixture omits monitoring details [S2].</a:t>
+            </a:r>
+          </a:p>
+        </p:txBody>
+      </p:sp>
+      <p:sp>
+        <p:nvSpPr>
+          <p:cNvPr id="12" name="Rectangle 11"/>
           <p:cNvSpPr/>
           <p:nvPr/>
         </p:nvSpPr>
         <p:spPr>
           <a:xfrm>
-            <a:off x="1874519" y="1673352"/>
-            <a:ext cx="22860" cy="4507992"/>
+            <a:off x="640080" y="3234379"/>
+            <a:ext cx="10908792" cy="2983540"/>
+          </a:xfrm>
+          <a:prstGeom prst="rect">
+            <a:avLst/>
+          </a:prstGeom>
+          <a:solidFill>
+            <a:srgbClr val="F5F7F9"/>
+          </a:solidFill>
+          <a:ln>
+            <a:solidFill>
+              <a:srgbClr val="E3E7EC"/>
+            </a:solidFill>
+          </a:ln>
+        </p:spPr>
+        <p:style>
+          <a:lnRef idx="1">
+            <a:schemeClr val="accent1"/>
+          </a:lnRef>
+          <a:fillRef idx="3">
+            <a:schemeClr val="accent1"/>
+          </a:fillRef>
+          <a:effectRef idx="2">
+            <a:schemeClr val="accent1"/>
+          </a:effectRef>
+          <a:fontRef idx="minor">
+            <a:schemeClr val="lt1"/>
+          </a:fontRef>
+        </p:style>
+        <p:txBody>
+          <a:bodyPr rtlCol="0" anchor="ctr"/>
+          <a:lstStyle/>
+          <a:p>
+            <a:pPr algn="ctr">
+              <a:defRPr>
+                <a:latin typeface="Inter"/>
+              </a:defRPr>
+            </a:pPr>
+          </a:p>
+        </p:txBody>
+      </p:sp>
+      <p:sp>
+        <p:nvSpPr>
+          <p:cNvPr id="13" name="Rectangle 12"/>
+          <p:cNvSpPr/>
+          <p:nvPr/>
+        </p:nvSpPr>
+        <p:spPr>
+          <a:xfrm>
+            <a:off x="640080" y="3234379"/>
+            <a:ext cx="54864" cy="2983540"/>
+          </a:xfrm>
+          <a:prstGeom prst="rect">
+            <a:avLst/>
+          </a:prstGeom>
+          <a:solidFill>
+            <a:srgbClr val="F2A93B"/>
+          </a:solidFill>
+          <a:ln>
+            <a:solidFill>
+              <a:srgbClr val="F2A93B"/>
+            </a:solidFill>
+          </a:ln>
+        </p:spPr>
+        <p:style>
+          <a:lnRef idx="1">
+            <a:schemeClr val="accent1"/>
+          </a:lnRef>
+          <a:fillRef idx="3">
+            <a:schemeClr val="accent1"/>
+          </a:fillRef>
+          <a:effectRef idx="2">
+            <a:schemeClr val="accent1"/>
+          </a:effectRef>
+          <a:fontRef idx="minor">
+            <a:schemeClr val="lt1"/>
+          </a:fontRef>
+        </p:style>
+        <p:txBody>
+          <a:bodyPr rtlCol="0" anchor="ctr"/>
+          <a:lstStyle/>
+          <a:p>
+            <a:pPr algn="ctr">
+              <a:defRPr>
+                <a:latin typeface="Inter"/>
+              </a:defRPr>
+            </a:pPr>
+          </a:p>
+        </p:txBody>
+      </p:sp>
+      <p:sp>
+        <p:nvSpPr>
+          <p:cNvPr id="14" name="TextBox 13"/>
+          <p:cNvSpPr txBox="1"/>
+          <p:nvPr/>
+        </p:nvSpPr>
+        <p:spPr>
+          <a:xfrm>
+            <a:off x="804671" y="3344107"/>
+            <a:ext cx="10616184" cy="228600"/>
+          </a:xfrm>
+          <a:prstGeom prst="rect">
+            <a:avLst/>
+          </a:prstGeom>
+          <a:noFill/>
+        </p:spPr>
+        <p:txBody>
+          <a:bodyPr wrap="none" lIns="9144" rIns="9144" tIns="9144" bIns="9144" anchor="t">
+            <a:spAutoFit/>
+          </a:bodyPr>
+          <a:lstStyle/>
+          <a:p>
+            <a:pPr algn="l">
+              <a:spcAft>
+                <a:spcPts val="0"/>
+              </a:spcAft>
+              <a:defRPr sz="1000" b="1">
+                <a:solidFill>
+                  <a:srgbClr val="0D1117"/>
+                </a:solidFill>
+                <a:latin typeface="Inter"/>
+              </a:defRPr>
+            </a:pPr>
+            <a:r>
+              <a:rPr>
+                <a:latin typeface="Inter"/>
+              </a:rPr>
+              <a:t>Analysis — Event coverage limits the monitoring conclusion</a:t>
+            </a:r>
+          </a:p>
+        </p:txBody>
+      </p:sp>
+      <p:sp>
+        <p:nvSpPr>
+          <p:cNvPr id="15" name="TextBox 14"/>
+          <p:cNvSpPr txBox="1"/>
+          <p:nvPr/>
+        </p:nvSpPr>
+        <p:spPr>
+          <a:xfrm>
+            <a:off x="804671" y="3627571"/>
+            <a:ext cx="10616184" cy="2498908"/>
+          </a:xfrm>
+          <a:prstGeom prst="rect">
+            <a:avLst/>
+          </a:prstGeom>
+          <a:noFill/>
+        </p:spPr>
+        <p:txBody>
+          <a:bodyPr wrap="none" lIns="9144" rIns="9144" tIns="9144" bIns="9144" anchor="t">
+            <a:spAutoFit/>
+          </a:bodyPr>
+          <a:lstStyle/>
+          <a:p>
+            <a:pPr algn="l">
+              <a:spcAft>
+                <a:spcPts val="0"/>
+              </a:spcAft>
+              <a:defRPr sz="950" b="0">
+                <a:solidFill>
+                  <a:srgbClr val="4A5563"/>
+                </a:solidFill>
+                <a:latin typeface="Inter"/>
+              </a:defRPr>
+            </a:pPr>
+            <a:r>
+              <a:rPr>
+                <a:latin typeface="Inter"/>
+              </a:rPr>
+              <a:t>Observation: Three filing dates are known, but firm and fund events are unavailable [S1] [S2] [S3]. Why it matters: A quiet timeline cannot be inferred from missing publication…</a:t>
+            </a:r>
+          </a:p>
+        </p:txBody>
+      </p:sp>
+      <p:sp>
+        <p:nvSpPr>
+          <p:cNvPr id="16" name="Rectangle 15"/>
+          <p:cNvSpPr/>
+          <p:nvPr/>
+        </p:nvSpPr>
+        <p:spPr>
+          <a:xfrm>
+            <a:off x="640080" y="6446520"/>
+            <a:ext cx="10908792" cy="9144"/>
           </a:xfrm>
           <a:prstGeom prst="rect">
             <a:avLst/>
@@ -7717,544 +9068,17 @@
           <a:bodyPr rtlCol="0" anchor="ctr"/>
           <a:lstStyle/>
           <a:p>
-            <a:pPr algn="ctr"/>
-          </a:p>
-        </p:txBody>
-      </p:sp>
-      <p:sp>
-        <p:nvSpPr>
-          <p:cNvPr id="10" name="Oval 9"/>
-          <p:cNvSpPr/>
-          <p:nvPr/>
-        </p:nvSpPr>
-        <p:spPr>
-          <a:xfrm>
-            <a:off x="1824228" y="1837944"/>
-            <a:ext cx="128016" cy="128016"/>
-          </a:xfrm>
-          <a:prstGeom prst="ellipse">
-            <a:avLst/>
-          </a:prstGeom>
-          <a:solidFill>
-            <a:srgbClr val="0D1117"/>
-          </a:solidFill>
-          <a:ln>
-            <a:solidFill>
-              <a:srgbClr val="FFFFFF"/>
-            </a:solidFill>
-          </a:ln>
-        </p:spPr>
-        <p:style>
-          <a:lnRef idx="1">
-            <a:schemeClr val="accent1"/>
-          </a:lnRef>
-          <a:fillRef idx="3">
-            <a:schemeClr val="accent1"/>
-          </a:fillRef>
-          <a:effectRef idx="2">
-            <a:schemeClr val="accent1"/>
-          </a:effectRef>
-          <a:fontRef idx="minor">
-            <a:schemeClr val="lt1"/>
-          </a:fontRef>
-        </p:style>
-        <p:txBody>
-          <a:bodyPr rtlCol="0" anchor="ctr"/>
-          <a:lstStyle/>
-          <a:p>
-            <a:pPr algn="ctr"/>
-          </a:p>
-        </p:txBody>
-      </p:sp>
-      <p:sp>
-        <p:nvSpPr>
-          <p:cNvPr id="11" name="TextBox 10"/>
-          <p:cNvSpPr txBox="1"/>
-          <p:nvPr/>
-        </p:nvSpPr>
-        <p:spPr>
-          <a:xfrm>
-            <a:off x="640080" y="1673352"/>
-            <a:ext cx="1106424" cy="274320"/>
-          </a:xfrm>
-          <a:prstGeom prst="rect">
-            <a:avLst/>
-          </a:prstGeom>
-          <a:noFill/>
-        </p:spPr>
-        <p:txBody>
-          <a:bodyPr wrap="none" lIns="9144" rIns="9144" tIns="9144" bIns="9144" anchor="t">
-            <a:spAutoFit/>
-          </a:bodyPr>
-          <a:lstStyle/>
-          <a:p>
-            <a:pPr algn="r">
-              <a:spcAft>
-                <a:spcPts val="0"/>
-              </a:spcAft>
-              <a:defRPr sz="750" b="1">
-                <a:solidFill>
-                  <a:srgbClr val="4A5563"/>
-                </a:solidFill>
-                <a:latin typeface="Inter"/>
-              </a:defRPr>
-            </a:pPr>
-            <a:r>
-              <a:t>2026-08-14</a:t>
-            </a:r>
-          </a:p>
-        </p:txBody>
-      </p:sp>
-      <p:sp>
-        <p:nvSpPr>
-          <p:cNvPr id="12" name="TextBox 11"/>
-          <p:cNvSpPr txBox="1"/>
-          <p:nvPr/>
-        </p:nvSpPr>
-        <p:spPr>
-          <a:xfrm>
-            <a:off x="2057400" y="1673352"/>
-            <a:ext cx="9491472" cy="256032"/>
-          </a:xfrm>
-          <a:prstGeom prst="rect">
-            <a:avLst/>
-          </a:prstGeom>
-          <a:noFill/>
-        </p:spPr>
-        <p:txBody>
-          <a:bodyPr wrap="none" lIns="9144" rIns="9144" tIns="9144" bIns="9144" anchor="t">
-            <a:spAutoFit/>
-          </a:bodyPr>
-          <a:lstStyle/>
-          <a:p>
-            <a:pPr algn="l">
-              <a:spcAft>
-                <a:spcPts val="0"/>
-              </a:spcAft>
-              <a:defRPr sz="950" b="1">
-                <a:solidFill>
-                  <a:srgbClr val="0D1117"/>
-                </a:solidFill>
-                <a:latin typeface="Inter"/>
-              </a:defRPr>
-            </a:pPr>
-            <a:r>
-              <a:t>Form 13F snapshot</a:t>
-            </a:r>
-          </a:p>
-        </p:txBody>
-      </p:sp>
-      <p:sp>
-        <p:nvSpPr>
-          <p:cNvPr id="13" name="TextBox 12"/>
-          <p:cNvSpPr txBox="1"/>
-          <p:nvPr/>
-        </p:nvSpPr>
-        <p:spPr>
-          <a:xfrm>
-            <a:off x="2057400" y="1938528"/>
-            <a:ext cx="9491472" cy="781385"/>
-          </a:xfrm>
-          <a:prstGeom prst="rect">
-            <a:avLst/>
-          </a:prstGeom>
-          <a:noFill/>
-        </p:spPr>
-        <p:txBody>
-          <a:bodyPr wrap="none" lIns="9144" rIns="9144" tIns="9144" bIns="9144" anchor="t">
-            <a:spAutoFit/>
-          </a:bodyPr>
-          <a:lstStyle/>
-          <a:p>
-            <a:pPr algn="l">
-              <a:spcAft>
-                <a:spcPts val="0"/>
-              </a:spcAft>
-              <a:defRPr sz="850" b="0">
-                <a:solidFill>
-                  <a:srgbClr val="4A5563"/>
-                </a:solidFill>
-                <a:latin typeface="Inter"/>
-              </a:defRPr>
-            </a:pPr>
-            <a:r>
-              <a:t>Latest available lagged holdings evidence [S3].</a:t>
-            </a:r>
-          </a:p>
-        </p:txBody>
-      </p:sp>
-      <p:sp>
-        <p:nvSpPr>
-          <p:cNvPr id="14" name="Oval 13"/>
-          <p:cNvSpPr/>
-          <p:nvPr/>
-        </p:nvSpPr>
-        <p:spPr>
-          <a:xfrm>
-            <a:off x="1824228" y="3340608"/>
-            <a:ext cx="128016" cy="128016"/>
-          </a:xfrm>
-          <a:prstGeom prst="ellipse">
-            <a:avLst/>
-          </a:prstGeom>
-          <a:solidFill>
-            <a:srgbClr val="C6F432"/>
-          </a:solidFill>
-          <a:ln>
-            <a:solidFill>
-              <a:srgbClr val="FFFFFF"/>
-            </a:solidFill>
-          </a:ln>
-        </p:spPr>
-        <p:style>
-          <a:lnRef idx="1">
-            <a:schemeClr val="accent1"/>
-          </a:lnRef>
-          <a:fillRef idx="3">
-            <a:schemeClr val="accent1"/>
-          </a:fillRef>
-          <a:effectRef idx="2">
-            <a:schemeClr val="accent1"/>
-          </a:effectRef>
-          <a:fontRef idx="minor">
-            <a:schemeClr val="lt1"/>
-          </a:fontRef>
-        </p:style>
-        <p:txBody>
-          <a:bodyPr rtlCol="0" anchor="ctr"/>
-          <a:lstStyle/>
-          <a:p>
-            <a:pPr algn="ctr"/>
-          </a:p>
-        </p:txBody>
-      </p:sp>
-      <p:sp>
-        <p:nvSpPr>
-          <p:cNvPr id="15" name="TextBox 14"/>
-          <p:cNvSpPr txBox="1"/>
-          <p:nvPr/>
-        </p:nvSpPr>
-        <p:spPr>
-          <a:xfrm>
-            <a:off x="640080" y="3176016"/>
-            <a:ext cx="1106424" cy="274320"/>
-          </a:xfrm>
-          <a:prstGeom prst="rect">
-            <a:avLst/>
-          </a:prstGeom>
-          <a:noFill/>
-        </p:spPr>
-        <p:txBody>
-          <a:bodyPr wrap="none" lIns="9144" rIns="9144" tIns="9144" bIns="9144" anchor="t">
-            <a:spAutoFit/>
-          </a:bodyPr>
-          <a:lstStyle/>
-          <a:p>
-            <a:pPr algn="r">
-              <a:spcAft>
-                <a:spcPts val="0"/>
-              </a:spcAft>
-              <a:defRPr sz="750" b="1">
-                <a:solidFill>
-                  <a:srgbClr val="4A5563"/>
-                </a:solidFill>
-                <a:latin typeface="Inter"/>
-              </a:defRPr>
-            </a:pPr>
-            <a:r>
-              <a:t>2026-10-01</a:t>
-            </a:r>
-          </a:p>
-        </p:txBody>
-      </p:sp>
-      <p:sp>
-        <p:nvSpPr>
-          <p:cNvPr id="16" name="TextBox 15"/>
-          <p:cNvSpPr txBox="1"/>
-          <p:nvPr/>
-        </p:nvSpPr>
-        <p:spPr>
-          <a:xfrm>
-            <a:off x="2057400" y="3176016"/>
-            <a:ext cx="9491472" cy="256032"/>
-          </a:xfrm>
-          <a:prstGeom prst="rect">
-            <a:avLst/>
-          </a:prstGeom>
-          <a:noFill/>
-        </p:spPr>
-        <p:txBody>
-          <a:bodyPr wrap="none" lIns="9144" rIns="9144" tIns="9144" bIns="9144" anchor="t">
-            <a:spAutoFit/>
-          </a:bodyPr>
-          <a:lstStyle/>
-          <a:p>
-            <a:pPr algn="l">
-              <a:spcAft>
-                <a:spcPts val="0"/>
-              </a:spcAft>
-              <a:defRPr sz="950" b="1">
-                <a:solidFill>
-                  <a:srgbClr val="0D1117"/>
-                </a:solidFill>
-                <a:latin typeface="Inter"/>
-              </a:defRPr>
-            </a:pPr>
-            <a:r>
-              <a:t>Form ADV profile</a:t>
-            </a:r>
+            <a:pPr algn="ctr">
+              <a:defRPr>
+                <a:latin typeface="Inter"/>
+              </a:defRPr>
+            </a:pPr>
           </a:p>
         </p:txBody>
       </p:sp>
       <p:sp>
         <p:nvSpPr>
           <p:cNvPr id="17" name="TextBox 16"/>
-          <p:cNvSpPr txBox="1"/>
-          <p:nvPr/>
-        </p:nvSpPr>
-        <p:spPr>
-          <a:xfrm>
-            <a:off x="2057400" y="3441192"/>
-            <a:ext cx="9491472" cy="781385"/>
-          </a:xfrm>
-          <a:prstGeom prst="rect">
-            <a:avLst/>
-          </a:prstGeom>
-          <a:noFill/>
-        </p:spPr>
-        <p:txBody>
-          <a:bodyPr wrap="none" lIns="9144" rIns="9144" tIns="9144" bIns="9144" anchor="t">
-            <a:spAutoFit/>
-          </a:bodyPr>
-          <a:lstStyle/>
-          <a:p>
-            <a:pPr algn="l">
-              <a:spcAft>
-                <a:spcPts val="0"/>
-              </a:spcAft>
-              <a:defRPr sz="850" b="0">
-                <a:solidFill>
-                  <a:srgbClr val="4A5563"/>
-                </a:solidFill>
-                <a:latin typeface="Inter"/>
-              </a:defRPr>
-            </a:pPr>
-            <a:r>
-              <a:t>Latest validated adviser filing evidence [S1].</a:t>
-            </a:r>
-          </a:p>
-        </p:txBody>
-      </p:sp>
-      <p:sp>
-        <p:nvSpPr>
-          <p:cNvPr id="18" name="Oval 17"/>
-          <p:cNvSpPr/>
-          <p:nvPr/>
-        </p:nvSpPr>
-        <p:spPr>
-          <a:xfrm>
-            <a:off x="1824228" y="4843272"/>
-            <a:ext cx="128016" cy="128016"/>
-          </a:xfrm>
-          <a:prstGeom prst="ellipse">
-            <a:avLst/>
-          </a:prstGeom>
-          <a:solidFill>
-            <a:srgbClr val="F2A93B"/>
-          </a:solidFill>
-          <a:ln>
-            <a:solidFill>
-              <a:srgbClr val="FFFFFF"/>
-            </a:solidFill>
-          </a:ln>
-        </p:spPr>
-        <p:style>
-          <a:lnRef idx="1">
-            <a:schemeClr val="accent1"/>
-          </a:lnRef>
-          <a:fillRef idx="3">
-            <a:schemeClr val="accent1"/>
-          </a:fillRef>
-          <a:effectRef idx="2">
-            <a:schemeClr val="accent1"/>
-          </a:effectRef>
-          <a:fontRef idx="minor">
-            <a:schemeClr val="lt1"/>
-          </a:fontRef>
-        </p:style>
-        <p:txBody>
-          <a:bodyPr rtlCol="0" anchor="ctr"/>
-          <a:lstStyle/>
-          <a:p>
-            <a:pPr algn="ctr"/>
-          </a:p>
-        </p:txBody>
-      </p:sp>
-      <p:sp>
-        <p:nvSpPr>
-          <p:cNvPr id="19" name="TextBox 18"/>
-          <p:cNvSpPr txBox="1"/>
-          <p:nvPr/>
-        </p:nvSpPr>
-        <p:spPr>
-          <a:xfrm>
-            <a:off x="640080" y="4678680"/>
-            <a:ext cx="1106424" cy="274320"/>
-          </a:xfrm>
-          <a:prstGeom prst="rect">
-            <a:avLst/>
-          </a:prstGeom>
-          <a:noFill/>
-        </p:spPr>
-        <p:txBody>
-          <a:bodyPr wrap="none" lIns="9144" rIns="9144" tIns="9144" bIns="9144" anchor="t">
-            <a:spAutoFit/>
-          </a:bodyPr>
-          <a:lstStyle/>
-          <a:p>
-            <a:pPr algn="r">
-              <a:spcAft>
-                <a:spcPts val="0"/>
-              </a:spcAft>
-              <a:defRPr sz="750" b="1">
-                <a:solidFill>
-                  <a:srgbClr val="4A5563"/>
-                </a:solidFill>
-                <a:latin typeface="Inter"/>
-              </a:defRPr>
-            </a:pPr>
-            <a:r>
-              <a:t>Not available</a:t>
-            </a:r>
-          </a:p>
-        </p:txBody>
-      </p:sp>
-      <p:sp>
-        <p:nvSpPr>
-          <p:cNvPr id="20" name="TextBox 19"/>
-          <p:cNvSpPr txBox="1"/>
-          <p:nvPr/>
-        </p:nvSpPr>
-        <p:spPr>
-          <a:xfrm>
-            <a:off x="2057400" y="4678680"/>
-            <a:ext cx="9491472" cy="256032"/>
-          </a:xfrm>
-          <a:prstGeom prst="rect">
-            <a:avLst/>
-          </a:prstGeom>
-          <a:noFill/>
-        </p:spPr>
-        <p:txBody>
-          <a:bodyPr wrap="none" lIns="9144" rIns="9144" tIns="9144" bIns="9144" anchor="t">
-            <a:spAutoFit/>
-          </a:bodyPr>
-          <a:lstStyle/>
-          <a:p>
-            <a:pPr algn="l">
-              <a:spcAft>
-                <a:spcPts val="0"/>
-              </a:spcAft>
-              <a:defRPr sz="950" b="1">
-                <a:solidFill>
-                  <a:srgbClr val="0D1117"/>
-                </a:solidFill>
-                <a:latin typeface="Inter"/>
-              </a:defRPr>
-            </a:pPr>
-            <a:r>
-              <a:t>Firm and fund events</a:t>
-            </a:r>
-          </a:p>
-        </p:txBody>
-      </p:sp>
-      <p:sp>
-        <p:nvSpPr>
-          <p:cNvPr id="21" name="TextBox 20"/>
-          <p:cNvSpPr txBox="1"/>
-          <p:nvPr/>
-        </p:nvSpPr>
-        <p:spPr>
-          <a:xfrm>
-            <a:off x="2057400" y="4943856"/>
-            <a:ext cx="9491472" cy="781385"/>
-          </a:xfrm>
-          <a:prstGeom prst="rect">
-            <a:avLst/>
-          </a:prstGeom>
-          <a:noFill/>
-        </p:spPr>
-        <p:txBody>
-          <a:bodyPr wrap="none" lIns="9144" rIns="9144" tIns="9144" bIns="9144" anchor="t">
-            <a:spAutoFit/>
-          </a:bodyPr>
-          <a:lstStyle/>
-          <a:p>
-            <a:pPr algn="l">
-              <a:spcAft>
-                <a:spcPts val="0"/>
-              </a:spcAft>
-              <a:defRPr sz="850" b="0">
-                <a:solidFill>
-                  <a:srgbClr val="4A5563"/>
-                </a:solidFill>
-                <a:latin typeface="Inter"/>
-              </a:defRPr>
-            </a:pPr>
-            <a:r>
-              <a:t>Event publication is not yet available in the TEST record [S2].</a:t>
-            </a:r>
-          </a:p>
-        </p:txBody>
-      </p:sp>
-      <p:sp>
-        <p:nvSpPr>
-          <p:cNvPr id="22" name="Rectangle 21"/>
-          <p:cNvSpPr/>
-          <p:nvPr/>
-        </p:nvSpPr>
-        <p:spPr>
-          <a:xfrm>
-            <a:off x="640080" y="6446520"/>
-            <a:ext cx="10908792" cy="9144"/>
-          </a:xfrm>
-          <a:prstGeom prst="rect">
-            <a:avLst/>
-          </a:prstGeom>
-          <a:solidFill>
-            <a:srgbClr val="E3E7EC"/>
-          </a:solidFill>
-          <a:ln>
-            <a:solidFill>
-              <a:srgbClr val="E3E7EC"/>
-            </a:solidFill>
-          </a:ln>
-        </p:spPr>
-        <p:style>
-          <a:lnRef idx="1">
-            <a:schemeClr val="accent1"/>
-          </a:lnRef>
-          <a:fillRef idx="3">
-            <a:schemeClr val="accent1"/>
-          </a:fillRef>
-          <a:effectRef idx="2">
-            <a:schemeClr val="accent1"/>
-          </a:effectRef>
-          <a:fontRef idx="minor">
-            <a:schemeClr val="lt1"/>
-          </a:fontRef>
-        </p:style>
-        <p:txBody>
-          <a:bodyPr rtlCol="0" anchor="ctr"/>
-          <a:lstStyle/>
-          <a:p>
-            <a:pPr algn="ctr"/>
-          </a:p>
-        </p:txBody>
-      </p:sp>
-      <p:sp>
-        <p:nvSpPr>
-          <p:cNvPr id="23" name="TextBox 22"/>
           <p:cNvSpPr txBox="1"/>
           <p:nvPr/>
         </p:nvSpPr>
@@ -8286,6 +9110,9 @@
               </a:defRPr>
             </a:pPr>
             <a:r>
+              <a:rPr>
+                <a:latin typeface="Inter"/>
+              </a:rPr>
               <a:t>Sources: S1 · S2 · S3</a:t>
             </a:r>
           </a:p>
@@ -8293,7 +9120,7 @@
       </p:sp>
       <p:sp>
         <p:nvSpPr>
-          <p:cNvPr id="24" name="TextBox 23"/>
+          <p:cNvPr id="18" name="TextBox 17"/>
           <p:cNvSpPr txBox="1"/>
           <p:nvPr/>
         </p:nvSpPr>
@@ -8325,14 +9152,17 @@
               </a:defRPr>
             </a:pPr>
             <a:r>
-              <a:t>RENDER TEST — partial sample, not a full ODD report</a:t>
-            </a:r>
-          </a:p>
-        </p:txBody>
-      </p:sp>
-      <p:sp>
-        <p:nvSpPr>
-          <p:cNvPr id="25" name="TextBox 24"/>
+              <a:rPr>
+                <a:latin typeface="Inter"/>
+              </a:rPr>
+              <a:t>RENDER TEST — partial sample, not a full ODD report · Data as of 2026-10-01 (Form ADV); 2026-08-14 (Form 13F)</a:t>
+            </a:r>
+          </a:p>
+        </p:txBody>
+      </p:sp>
+      <p:sp>
+        <p:nvSpPr>
+          <p:cNvPr id="19" name="TextBox 18"/>
           <p:cNvSpPr txBox="1"/>
           <p:nvPr/>
         </p:nvSpPr>
@@ -8364,6 +9194,9 @@
               </a:defRPr>
             </a:pPr>
             <a:r>
+              <a:rPr>
+                <a:latin typeface="Inter"/>
+              </a:rPr>
               <a:t>14</a:t>
             </a:r>
           </a:p>
@@ -8428,52 +9261,17 @@
           <a:bodyPr rtlCol="0" anchor="ctr"/>
           <a:lstStyle/>
           <a:p>
-            <a:pPr algn="ctr"/>
+            <a:pPr algn="ctr">
+              <a:defRPr>
+                <a:latin typeface="Inter"/>
+              </a:defRPr>
+            </a:pPr>
           </a:p>
         </p:txBody>
       </p:sp>
       <p:sp>
         <p:nvSpPr>
           <p:cNvPr id="3" name="TextBox 2"/>
-          <p:cNvSpPr txBox="1"/>
-          <p:nvPr/>
-        </p:nvSpPr>
-        <p:spPr>
-          <a:xfrm>
-            <a:off x="640080" y="329184"/>
-            <a:ext cx="9875520" cy="182880"/>
-          </a:xfrm>
-          <a:prstGeom prst="rect">
-            <a:avLst/>
-          </a:prstGeom>
-          <a:noFill/>
-        </p:spPr>
-        <p:txBody>
-          <a:bodyPr wrap="none" lIns="9144" rIns="9144" tIns="9144" bIns="9144" anchor="t">
-            <a:spAutoFit/>
-          </a:bodyPr>
-          <a:lstStyle/>
-          <a:p>
-            <a:pPr algn="l">
-              <a:spcAft>
-                <a:spcPts val="0"/>
-              </a:spcAft>
-              <a:defRPr sz="750" b="1">
-                <a:solidFill>
-                  <a:srgbClr val="4F6B00"/>
-                </a:solidFill>
-                <a:latin typeface="Inter"/>
-              </a:defRPr>
-            </a:pPr>
-            <a:r>
-              <a:t>OPEN EVIDENCE GAPS DEFINE THE NEXT DILIGENCE WORK</a:t>
-            </a:r>
-          </a:p>
-        </p:txBody>
-      </p:sp>
-      <p:sp>
-        <p:nvSpPr>
-          <p:cNvPr id="4" name="TextBox 3"/>
           <p:cNvSpPr txBox="1"/>
           <p:nvPr/>
         </p:nvSpPr>
@@ -8505,14 +9303,17 @@
               </a:defRPr>
             </a:pPr>
             <a:r>
-              <a:t>Monitoring, findings &amp; DDQ — continued</a:t>
-            </a:r>
-          </a:p>
-        </p:txBody>
-      </p:sp>
-      <p:sp>
-        <p:nvSpPr>
-          <p:cNvPr id="5" name="Rectangle 4"/>
+              <a:rPr>
+                <a:latin typeface="Inter"/>
+              </a:rPr>
+              <a:t>Follow-up questions &amp; open items</a:t>
+            </a:r>
+          </a:p>
+        </p:txBody>
+      </p:sp>
+      <p:sp>
+        <p:nvSpPr>
+          <p:cNvPr id="4" name="Rectangle 3"/>
           <p:cNvSpPr/>
           <p:nvPr/>
         </p:nvSpPr>
@@ -8551,13 +9352,17 @@
           <a:bodyPr rtlCol="0" anchor="ctr"/>
           <a:lstStyle/>
           <a:p>
-            <a:pPr algn="ctr"/>
-          </a:p>
-        </p:txBody>
-      </p:sp>
-      <p:sp>
-        <p:nvSpPr>
-          <p:cNvPr id="6" name="Rectangle 5"/>
+            <a:pPr algn="ctr">
+              <a:defRPr>
+                <a:latin typeface="Inter"/>
+              </a:defRPr>
+            </a:pPr>
+          </a:p>
+        </p:txBody>
+      </p:sp>
+      <p:sp>
+        <p:nvSpPr>
+          <p:cNvPr id="5" name="Rectangle 4"/>
           <p:cNvSpPr/>
           <p:nvPr/>
         </p:nvSpPr>
@@ -8596,13 +9401,17 @@
           <a:bodyPr rtlCol="0" anchor="ctr"/>
           <a:lstStyle/>
           <a:p>
-            <a:pPr algn="ctr"/>
-          </a:p>
-        </p:txBody>
-      </p:sp>
-      <p:sp>
-        <p:nvSpPr>
-          <p:cNvPr id="7" name="TextBox 6"/>
+            <a:pPr algn="ctr">
+              <a:defRPr>
+                <a:latin typeface="Inter"/>
+              </a:defRPr>
+            </a:pPr>
+          </a:p>
+        </p:txBody>
+      </p:sp>
+      <p:sp>
+        <p:nvSpPr>
+          <p:cNvPr id="6" name="TextBox 5"/>
           <p:cNvSpPr txBox="1"/>
           <p:nvPr/>
         </p:nvSpPr>
@@ -8634,21 +9443,24 @@
               </a:defRPr>
             </a:pPr>
             <a:r>
-              <a:t>07</a:t>
-            </a:r>
-          </a:p>
-        </p:txBody>
-      </p:sp>
-      <p:sp>
-        <p:nvSpPr>
-          <p:cNvPr id="8" name="Rectangle 7"/>
+              <a:rPr>
+                <a:latin typeface="Inter"/>
+              </a:rPr>
+              <a:t>08</a:t>
+            </a:r>
+          </a:p>
+        </p:txBody>
+      </p:sp>
+      <p:sp>
+        <p:nvSpPr>
+          <p:cNvPr id="7" name="Rectangle 6"/>
           <p:cNvSpPr/>
           <p:nvPr/>
         </p:nvSpPr>
         <p:spPr>
           <a:xfrm>
             <a:off x="640080" y="1325880"/>
-            <a:ext cx="10908792" cy="1887515"/>
+            <a:ext cx="10908792" cy="4892040"/>
           </a:xfrm>
           <a:prstGeom prst="rect">
             <a:avLst/>
@@ -8680,20 +9492,24 @@
           <a:bodyPr rtlCol="0" anchor="ctr"/>
           <a:lstStyle/>
           <a:p>
-            <a:pPr algn="ctr"/>
-          </a:p>
-        </p:txBody>
-      </p:sp>
-      <p:sp>
-        <p:nvSpPr>
-          <p:cNvPr id="9" name="Rectangle 8"/>
+            <a:pPr algn="ctr">
+              <a:defRPr>
+                <a:latin typeface="Inter"/>
+              </a:defRPr>
+            </a:pPr>
+          </a:p>
+        </p:txBody>
+      </p:sp>
+      <p:sp>
+        <p:nvSpPr>
+          <p:cNvPr id="8" name="Rectangle 7"/>
           <p:cNvSpPr/>
           <p:nvPr/>
         </p:nvSpPr>
         <p:spPr>
           <a:xfrm>
             <a:off x="640080" y="1325880"/>
-            <a:ext cx="54864" cy="1887515"/>
+            <a:ext cx="54864" cy="4892040"/>
           </a:xfrm>
           <a:prstGeom prst="rect">
             <a:avLst/>
@@ -8725,13 +9541,17 @@
           <a:bodyPr rtlCol="0" anchor="ctr"/>
           <a:lstStyle/>
           <a:p>
-            <a:pPr algn="ctr"/>
-          </a:p>
-        </p:txBody>
-      </p:sp>
-      <p:sp>
-        <p:nvSpPr>
-          <p:cNvPr id="10" name="TextBox 9"/>
+            <a:pPr algn="ctr">
+              <a:defRPr>
+                <a:latin typeface="Inter"/>
+              </a:defRPr>
+            </a:pPr>
+          </a:p>
+        </p:txBody>
+      </p:sp>
+      <p:sp>
+        <p:nvSpPr>
+          <p:cNvPr id="9" name="TextBox 8"/>
           <p:cNvSpPr txBox="1"/>
           <p:nvPr/>
         </p:nvSpPr>
@@ -8763,6 +9583,9 @@
               </a:defRPr>
             </a:pPr>
             <a:r>
+              <a:rPr>
+                <a:latin typeface="Inter"/>
+              </a:rPr>
               <a:t>Not available</a:t>
             </a:r>
           </a:p>
@@ -8770,14 +9593,14 @@
       </p:sp>
       <p:sp>
         <p:nvSpPr>
-          <p:cNvPr id="11" name="TextBox 10"/>
+          <p:cNvPr id="10" name="TextBox 9"/>
           <p:cNvSpPr txBox="1"/>
           <p:nvPr/>
         </p:nvSpPr>
         <p:spPr>
           <a:xfrm>
             <a:off x="804671" y="1719072"/>
-            <a:ext cx="10616184" cy="1402883"/>
+            <a:ext cx="10616184" cy="4407408"/>
           </a:xfrm>
           <a:prstGeom prst="rect">
             <a:avLst/>
@@ -8802,182 +9625,17 @@
               </a:defRPr>
             </a:pPr>
             <a:r>
-              <a:t>Not available — this compact render fixture omits monitoring details [S2].</a:t>
-            </a:r>
-          </a:p>
-        </p:txBody>
-      </p:sp>
-      <p:sp>
-        <p:nvSpPr>
-          <p:cNvPr id="12" name="Rectangle 11"/>
-          <p:cNvSpPr/>
-          <p:nvPr/>
-        </p:nvSpPr>
-        <p:spPr>
-          <a:xfrm>
-            <a:off x="640080" y="3323123"/>
-            <a:ext cx="10908792" cy="2894796"/>
-          </a:xfrm>
-          <a:prstGeom prst="rect">
-            <a:avLst/>
-          </a:prstGeom>
-          <a:solidFill>
-            <a:srgbClr val="F5F7F9"/>
-          </a:solidFill>
-          <a:ln>
-            <a:solidFill>
-              <a:srgbClr val="E3E7EC"/>
-            </a:solidFill>
-          </a:ln>
-        </p:spPr>
-        <p:style>
-          <a:lnRef idx="1">
-            <a:schemeClr val="accent1"/>
-          </a:lnRef>
-          <a:fillRef idx="3">
-            <a:schemeClr val="accent1"/>
-          </a:fillRef>
-          <a:effectRef idx="2">
-            <a:schemeClr val="accent1"/>
-          </a:effectRef>
-          <a:fontRef idx="minor">
-            <a:schemeClr val="lt1"/>
-          </a:fontRef>
-        </p:style>
-        <p:txBody>
-          <a:bodyPr rtlCol="0" anchor="ctr"/>
-          <a:lstStyle/>
-          <a:p>
-            <a:pPr algn="ctr"/>
-          </a:p>
-        </p:txBody>
-      </p:sp>
-      <p:sp>
-        <p:nvSpPr>
-          <p:cNvPr id="13" name="Rectangle 12"/>
-          <p:cNvSpPr/>
-          <p:nvPr/>
-        </p:nvSpPr>
-        <p:spPr>
-          <a:xfrm>
-            <a:off x="640080" y="3323123"/>
-            <a:ext cx="54864" cy="2894796"/>
-          </a:xfrm>
-          <a:prstGeom prst="rect">
-            <a:avLst/>
-          </a:prstGeom>
-          <a:solidFill>
-            <a:srgbClr val="F2A93B"/>
-          </a:solidFill>
-          <a:ln>
-            <a:solidFill>
-              <a:srgbClr val="F2A93B"/>
-            </a:solidFill>
-          </a:ln>
-        </p:spPr>
-        <p:style>
-          <a:lnRef idx="1">
-            <a:schemeClr val="accent1"/>
-          </a:lnRef>
-          <a:fillRef idx="3">
-            <a:schemeClr val="accent1"/>
-          </a:fillRef>
-          <a:effectRef idx="2">
-            <a:schemeClr val="accent1"/>
-          </a:effectRef>
-          <a:fontRef idx="minor">
-            <a:schemeClr val="lt1"/>
-          </a:fontRef>
-        </p:style>
-        <p:txBody>
-          <a:bodyPr rtlCol="0" anchor="ctr"/>
-          <a:lstStyle/>
-          <a:p>
-            <a:pPr algn="ctr"/>
-          </a:p>
-        </p:txBody>
-      </p:sp>
-      <p:sp>
-        <p:nvSpPr>
-          <p:cNvPr id="14" name="TextBox 13"/>
-          <p:cNvSpPr txBox="1"/>
-          <p:nvPr/>
-        </p:nvSpPr>
-        <p:spPr>
-          <a:xfrm>
-            <a:off x="804671" y="3432851"/>
-            <a:ext cx="10616184" cy="228600"/>
-          </a:xfrm>
-          <a:prstGeom prst="rect">
-            <a:avLst/>
-          </a:prstGeom>
-          <a:noFill/>
-        </p:spPr>
-        <p:txBody>
-          <a:bodyPr wrap="none" lIns="9144" rIns="9144" tIns="9144" bIns="9144" anchor="t">
-            <a:spAutoFit/>
-          </a:bodyPr>
-          <a:lstStyle/>
-          <a:p>
-            <a:pPr algn="l">
-              <a:spcAft>
-                <a:spcPts val="0"/>
-              </a:spcAft>
-              <a:defRPr sz="1000" b="1">
-                <a:solidFill>
-                  <a:srgbClr val="0D1117"/>
-                </a:solidFill>
-                <a:latin typeface="Inter"/>
-              </a:defRPr>
-            </a:pPr>
-            <a:r>
-              <a:t>Analysis — Event coverage limits the monitoring conclusion</a:t>
-            </a:r>
-          </a:p>
-        </p:txBody>
-      </p:sp>
-      <p:sp>
-        <p:nvSpPr>
-          <p:cNvPr id="15" name="TextBox 14"/>
-          <p:cNvSpPr txBox="1"/>
-          <p:nvPr/>
-        </p:nvSpPr>
-        <p:spPr>
-          <a:xfrm>
-            <a:off x="804671" y="3716315"/>
-            <a:ext cx="10616184" cy="2410164"/>
-          </a:xfrm>
-          <a:prstGeom prst="rect">
-            <a:avLst/>
-          </a:prstGeom>
-          <a:noFill/>
-        </p:spPr>
-        <p:txBody>
-          <a:bodyPr wrap="none" lIns="9144" rIns="9144" tIns="9144" bIns="9144" anchor="t">
-            <a:spAutoFit/>
-          </a:bodyPr>
-          <a:lstStyle/>
-          <a:p>
-            <a:pPr algn="l">
-              <a:spcAft>
-                <a:spcPts val="0"/>
-              </a:spcAft>
-              <a:defRPr sz="950" b="0">
-                <a:solidFill>
-                  <a:srgbClr val="4A5563"/>
-                </a:solidFill>
-                <a:latin typeface="Inter"/>
-              </a:defRPr>
-            </a:pPr>
-            <a:r>
-              <a:t>Observation: Filing dates are known, but firm and fund events are unavailable [S1] [S2] [S3]. Why it matters: A quiet timeline cannot be inferred from missing publication. Uncertainty…</a:t>
-            </a:r>
-          </a:p>
-        </p:txBody>
-      </p:sp>
-      <p:sp>
-        <p:nvSpPr>
-          <p:cNvPr id="16" name="Rectangle 15"/>
+              <a:rPr>
+                <a:latin typeface="Inter"/>
+              </a:rPr>
+              <a:t>Not available — no follow-up questions are included in this compact render fixture [S1].</a:t>
+            </a:r>
+          </a:p>
+        </p:txBody>
+      </p:sp>
+      <p:sp>
+        <p:nvSpPr>
+          <p:cNvPr id="11" name="Rectangle 10"/>
           <p:cNvSpPr/>
           <p:nvPr/>
         </p:nvSpPr>
@@ -9016,13 +9674,17 @@
           <a:bodyPr rtlCol="0" anchor="ctr"/>
           <a:lstStyle/>
           <a:p>
-            <a:pPr algn="ctr"/>
-          </a:p>
-        </p:txBody>
-      </p:sp>
-      <p:sp>
-        <p:nvSpPr>
-          <p:cNvPr id="17" name="TextBox 16"/>
+            <a:pPr algn="ctr">
+              <a:defRPr>
+                <a:latin typeface="Inter"/>
+              </a:defRPr>
+            </a:pPr>
+          </a:p>
+        </p:txBody>
+      </p:sp>
+      <p:sp>
+        <p:nvSpPr>
+          <p:cNvPr id="12" name="TextBox 11"/>
           <p:cNvSpPr txBox="1"/>
           <p:nvPr/>
         </p:nvSpPr>
@@ -9054,14 +9716,17 @@
               </a:defRPr>
             </a:pPr>
             <a:r>
-              <a:t>Sources: S1 · S2 · S3</a:t>
-            </a:r>
-          </a:p>
-        </p:txBody>
-      </p:sp>
-      <p:sp>
-        <p:nvSpPr>
-          <p:cNvPr id="18" name="TextBox 17"/>
+              <a:rPr>
+                <a:latin typeface="Inter"/>
+              </a:rPr>
+              <a:t>Sources: S1</a:t>
+            </a:r>
+          </a:p>
+        </p:txBody>
+      </p:sp>
+      <p:sp>
+        <p:nvSpPr>
+          <p:cNvPr id="13" name="TextBox 12"/>
           <p:cNvSpPr txBox="1"/>
           <p:nvPr/>
         </p:nvSpPr>
@@ -9093,14 +9758,17 @@
               </a:defRPr>
             </a:pPr>
             <a:r>
-              <a:t>RENDER TEST — partial sample, not a full ODD report</a:t>
-            </a:r>
-          </a:p>
-        </p:txBody>
-      </p:sp>
-      <p:sp>
-        <p:nvSpPr>
-          <p:cNvPr id="19" name="TextBox 18"/>
+              <a:rPr>
+                <a:latin typeface="Inter"/>
+              </a:rPr>
+              <a:t>RENDER TEST — partial sample, not a full ODD report · Data as of 2026-10-01 (Form ADV); 2026-08-14 (Form 13F)</a:t>
+            </a:r>
+          </a:p>
+        </p:txBody>
+      </p:sp>
+      <p:sp>
+        <p:nvSpPr>
+          <p:cNvPr id="14" name="TextBox 13"/>
           <p:cNvSpPr txBox="1"/>
           <p:nvPr/>
         </p:nvSpPr>
@@ -9132,6 +9800,9 @@
               </a:defRPr>
             </a:pPr>
             <a:r>
+              <a:rPr>
+                <a:latin typeface="Inter"/>
+              </a:rPr>
               <a:t>15</a:t>
             </a:r>
           </a:p>
@@ -9196,7 +9867,11 @@
           <a:bodyPr rtlCol="0" anchor="ctr"/>
           <a:lstStyle/>
           <a:p>
-            <a:pPr algn="ctr"/>
+            <a:pPr algn="ctr">
+              <a:defRPr>
+                <a:latin typeface="Inter"/>
+              </a:defRPr>
+            </a:pPr>
           </a:p>
         </p:txBody>
       </p:sp>
@@ -9234,7 +9909,10 @@
               </a:defRPr>
             </a:pPr>
             <a:r>
-              <a:t>Follow-up questions &amp; open items</a:t>
+              <a:rPr>
+                <a:latin typeface="Inter"/>
+              </a:rPr>
+              <a:t>Appendix — sources &amp; method</a:t>
             </a:r>
           </a:p>
         </p:txBody>
@@ -9280,568 +9958,11 @@
           <a:bodyPr rtlCol="0" anchor="ctr"/>
           <a:lstStyle/>
           <a:p>
-            <a:pPr algn="ctr"/>
-          </a:p>
-        </p:txBody>
-      </p:sp>
-      <p:sp>
-        <p:nvSpPr>
-          <p:cNvPr id="5" name="Rectangle 4"/>
-          <p:cNvSpPr/>
-          <p:nvPr/>
-        </p:nvSpPr>
-        <p:spPr>
-          <a:xfrm>
-            <a:off x="11018520" y="502920"/>
-            <a:ext cx="530352" cy="393192"/>
-          </a:xfrm>
-          <a:prstGeom prst="rect">
-            <a:avLst/>
-          </a:prstGeom>
-          <a:solidFill>
-            <a:srgbClr val="C6F432"/>
-          </a:solidFill>
-          <a:ln>
-            <a:solidFill>
-              <a:srgbClr val="C6F432"/>
-            </a:solidFill>
-          </a:ln>
-        </p:spPr>
-        <p:style>
-          <a:lnRef idx="1">
-            <a:schemeClr val="accent1"/>
-          </a:lnRef>
-          <a:fillRef idx="3">
-            <a:schemeClr val="accent1"/>
-          </a:fillRef>
-          <a:effectRef idx="2">
-            <a:schemeClr val="accent1"/>
-          </a:effectRef>
-          <a:fontRef idx="minor">
-            <a:schemeClr val="lt1"/>
-          </a:fontRef>
-        </p:style>
-        <p:txBody>
-          <a:bodyPr rtlCol="0" anchor="ctr"/>
-          <a:lstStyle/>
-          <a:p>
-            <a:pPr algn="ctr"/>
-          </a:p>
-        </p:txBody>
-      </p:sp>
-      <p:sp>
-        <p:nvSpPr>
-          <p:cNvPr id="6" name="TextBox 5"/>
-          <p:cNvSpPr txBox="1"/>
-          <p:nvPr/>
-        </p:nvSpPr>
-        <p:spPr>
-          <a:xfrm>
-            <a:off x="11045952" y="557784"/>
-            <a:ext cx="475488" cy="182880"/>
-          </a:xfrm>
-          <a:prstGeom prst="rect">
-            <a:avLst/>
-          </a:prstGeom>
-          <a:noFill/>
-        </p:spPr>
-        <p:txBody>
-          <a:bodyPr wrap="none" lIns="9144" rIns="9144" tIns="9144" bIns="9144" anchor="t">
-            <a:spAutoFit/>
-          </a:bodyPr>
-          <a:lstStyle/>
-          <a:p>
             <a:pPr algn="ctr">
-              <a:spcAft>
-                <a:spcPts val="0"/>
-              </a:spcAft>
-              <a:defRPr sz="1000" b="1">
-                <a:solidFill>
-                  <a:srgbClr val="0D1117"/>
-                </a:solidFill>
-                <a:latin typeface="Inter"/>
-              </a:defRPr>
-            </a:pPr>
-            <a:r>
-              <a:t>08</a:t>
-            </a:r>
-          </a:p>
-        </p:txBody>
-      </p:sp>
-      <p:sp>
-        <p:nvSpPr>
-          <p:cNvPr id="7" name="Rectangle 6"/>
-          <p:cNvSpPr/>
-          <p:nvPr/>
-        </p:nvSpPr>
-        <p:spPr>
-          <a:xfrm>
-            <a:off x="640080" y="1325880"/>
-            <a:ext cx="10908792" cy="4892040"/>
-          </a:xfrm>
-          <a:prstGeom prst="rect">
-            <a:avLst/>
-          </a:prstGeom>
-          <a:solidFill>
-            <a:srgbClr val="F5F7F9"/>
-          </a:solidFill>
-          <a:ln>
-            <a:solidFill>
-              <a:srgbClr val="E3E7EC"/>
-            </a:solidFill>
-          </a:ln>
-        </p:spPr>
-        <p:style>
-          <a:lnRef idx="1">
-            <a:schemeClr val="accent1"/>
-          </a:lnRef>
-          <a:fillRef idx="3">
-            <a:schemeClr val="accent1"/>
-          </a:fillRef>
-          <a:effectRef idx="2">
-            <a:schemeClr val="accent1"/>
-          </a:effectRef>
-          <a:fontRef idx="minor">
-            <a:schemeClr val="lt1"/>
-          </a:fontRef>
-        </p:style>
-        <p:txBody>
-          <a:bodyPr rtlCol="0" anchor="ctr"/>
-          <a:lstStyle/>
-          <a:p>
-            <a:pPr algn="ctr"/>
-          </a:p>
-        </p:txBody>
-      </p:sp>
-      <p:sp>
-        <p:nvSpPr>
-          <p:cNvPr id="8" name="Rectangle 7"/>
-          <p:cNvSpPr/>
-          <p:nvPr/>
-        </p:nvSpPr>
-        <p:spPr>
-          <a:xfrm>
-            <a:off x="640080" y="1325880"/>
-            <a:ext cx="54864" cy="4892040"/>
-          </a:xfrm>
-          <a:prstGeom prst="rect">
-            <a:avLst/>
-          </a:prstGeom>
-          <a:solidFill>
-            <a:srgbClr val="0D1117"/>
-          </a:solidFill>
-          <a:ln>
-            <a:solidFill>
-              <a:srgbClr val="0D1117"/>
-            </a:solidFill>
-          </a:ln>
-        </p:spPr>
-        <p:style>
-          <a:lnRef idx="1">
-            <a:schemeClr val="accent1"/>
-          </a:lnRef>
-          <a:fillRef idx="3">
-            <a:schemeClr val="accent1"/>
-          </a:fillRef>
-          <a:effectRef idx="2">
-            <a:schemeClr val="accent1"/>
-          </a:effectRef>
-          <a:fontRef idx="minor">
-            <a:schemeClr val="lt1"/>
-          </a:fontRef>
-        </p:style>
-        <p:txBody>
-          <a:bodyPr rtlCol="0" anchor="ctr"/>
-          <a:lstStyle/>
-          <a:p>
-            <a:pPr algn="ctr"/>
-          </a:p>
-        </p:txBody>
-      </p:sp>
-      <p:sp>
-        <p:nvSpPr>
-          <p:cNvPr id="9" name="TextBox 8"/>
-          <p:cNvSpPr txBox="1"/>
-          <p:nvPr/>
-        </p:nvSpPr>
-        <p:spPr>
-          <a:xfrm>
-            <a:off x="804671" y="1435607"/>
-            <a:ext cx="10616184" cy="228600"/>
-          </a:xfrm>
-          <a:prstGeom prst="rect">
-            <a:avLst/>
-          </a:prstGeom>
-          <a:noFill/>
-        </p:spPr>
-        <p:txBody>
-          <a:bodyPr wrap="none" lIns="9144" rIns="9144" tIns="9144" bIns="9144" anchor="t">
-            <a:spAutoFit/>
-          </a:bodyPr>
-          <a:lstStyle/>
-          <a:p>
-            <a:pPr algn="l">
-              <a:spcAft>
-                <a:spcPts val="0"/>
-              </a:spcAft>
-              <a:defRPr sz="1000" b="1">
-                <a:solidFill>
-                  <a:srgbClr val="0D1117"/>
-                </a:solidFill>
-                <a:latin typeface="Inter"/>
-              </a:defRPr>
-            </a:pPr>
-            <a:r>
-              <a:t>Not available</a:t>
-            </a:r>
-          </a:p>
-        </p:txBody>
-      </p:sp>
-      <p:sp>
-        <p:nvSpPr>
-          <p:cNvPr id="10" name="TextBox 9"/>
-          <p:cNvSpPr txBox="1"/>
-          <p:nvPr/>
-        </p:nvSpPr>
-        <p:spPr>
-          <a:xfrm>
-            <a:off x="804671" y="1719072"/>
-            <a:ext cx="10616184" cy="4407408"/>
-          </a:xfrm>
-          <a:prstGeom prst="rect">
-            <a:avLst/>
-          </a:prstGeom>
-          <a:noFill/>
-        </p:spPr>
-        <p:txBody>
-          <a:bodyPr wrap="none" lIns="9144" rIns="9144" tIns="9144" bIns="9144" anchor="t">
-            <a:spAutoFit/>
-          </a:bodyPr>
-          <a:lstStyle/>
-          <a:p>
-            <a:pPr algn="l">
-              <a:spcAft>
-                <a:spcPts val="0"/>
-              </a:spcAft>
-              <a:defRPr sz="950" b="0">
-                <a:solidFill>
-                  <a:srgbClr val="4A5563"/>
-                </a:solidFill>
-                <a:latin typeface="Inter"/>
-              </a:defRPr>
-            </a:pPr>
-            <a:r>
-              <a:t>Not available — no follow-up questions are included in this compact render fixture [S1].</a:t>
-            </a:r>
-          </a:p>
-        </p:txBody>
-      </p:sp>
-      <p:sp>
-        <p:nvSpPr>
-          <p:cNvPr id="11" name="Rectangle 10"/>
-          <p:cNvSpPr/>
-          <p:nvPr/>
-        </p:nvSpPr>
-        <p:spPr>
-          <a:xfrm>
-            <a:off x="640080" y="6446520"/>
-            <a:ext cx="10908792" cy="9144"/>
-          </a:xfrm>
-          <a:prstGeom prst="rect">
-            <a:avLst/>
-          </a:prstGeom>
-          <a:solidFill>
-            <a:srgbClr val="E3E7EC"/>
-          </a:solidFill>
-          <a:ln>
-            <a:solidFill>
-              <a:srgbClr val="E3E7EC"/>
-            </a:solidFill>
-          </a:ln>
-        </p:spPr>
-        <p:style>
-          <a:lnRef idx="1">
-            <a:schemeClr val="accent1"/>
-          </a:lnRef>
-          <a:fillRef idx="3">
-            <a:schemeClr val="accent1"/>
-          </a:fillRef>
-          <a:effectRef idx="2">
-            <a:schemeClr val="accent1"/>
-          </a:effectRef>
-          <a:fontRef idx="minor">
-            <a:schemeClr val="lt1"/>
-          </a:fontRef>
-        </p:style>
-        <p:txBody>
-          <a:bodyPr rtlCol="0" anchor="ctr"/>
-          <a:lstStyle/>
-          <a:p>
-            <a:pPr algn="ctr"/>
-          </a:p>
-        </p:txBody>
-      </p:sp>
-      <p:sp>
-        <p:nvSpPr>
-          <p:cNvPr id="12" name="TextBox 11"/>
-          <p:cNvSpPr txBox="1"/>
-          <p:nvPr/>
-        </p:nvSpPr>
-        <p:spPr>
-          <a:xfrm>
-            <a:off x="640080" y="6501384"/>
-            <a:ext cx="4297680" cy="146304"/>
-          </a:xfrm>
-          <a:prstGeom prst="rect">
-            <a:avLst/>
-          </a:prstGeom>
-          <a:noFill/>
-        </p:spPr>
-        <p:txBody>
-          <a:bodyPr wrap="none" lIns="9144" rIns="9144" tIns="9144" bIns="9144" anchor="t">
-            <a:spAutoFit/>
-          </a:bodyPr>
-          <a:lstStyle/>
-          <a:p>
-            <a:pPr algn="l">
-              <a:spcAft>
-                <a:spcPts val="0"/>
-              </a:spcAft>
-              <a:defRPr sz="650" b="0">
-                <a:solidFill>
-                  <a:srgbClr val="8A94A1"/>
-                </a:solidFill>
-                <a:latin typeface="Inter"/>
-              </a:defRPr>
-            </a:pPr>
-            <a:r>
-              <a:t>Sources: S1</a:t>
-            </a:r>
-          </a:p>
-        </p:txBody>
-      </p:sp>
-      <p:sp>
-        <p:nvSpPr>
-          <p:cNvPr id="13" name="TextBox 12"/>
-          <p:cNvSpPr txBox="1"/>
-          <p:nvPr/>
-        </p:nvSpPr>
-        <p:spPr>
-          <a:xfrm>
-            <a:off x="4480560" y="6501384"/>
-            <a:ext cx="5303520" cy="146304"/>
-          </a:xfrm>
-          <a:prstGeom prst="rect">
-            <a:avLst/>
-          </a:prstGeom>
-          <a:noFill/>
-        </p:spPr>
-        <p:txBody>
-          <a:bodyPr wrap="none" lIns="9144" rIns="9144" tIns="9144" bIns="9144" anchor="t">
-            <a:spAutoFit/>
-          </a:bodyPr>
-          <a:lstStyle/>
-          <a:p>
-            <a:pPr algn="ctr">
-              <a:spcAft>
-                <a:spcPts val="0"/>
-              </a:spcAft>
-              <a:defRPr sz="650" b="0">
-                <a:solidFill>
-                  <a:srgbClr val="8A94A1"/>
-                </a:solidFill>
-                <a:latin typeface="Inter"/>
-              </a:defRPr>
-            </a:pPr>
-            <a:r>
-              <a:t>RENDER TEST — partial sample, not a full ODD report</a:t>
-            </a:r>
-          </a:p>
-        </p:txBody>
-      </p:sp>
-      <p:sp>
-        <p:nvSpPr>
-          <p:cNvPr id="14" name="TextBox 13"/>
-          <p:cNvSpPr txBox="1"/>
-          <p:nvPr/>
-        </p:nvSpPr>
-        <p:spPr>
-          <a:xfrm>
-            <a:off x="10287000" y="6501384"/>
-            <a:ext cx="1261872" cy="146304"/>
-          </a:xfrm>
-          <a:prstGeom prst="rect">
-            <a:avLst/>
-          </a:prstGeom>
-          <a:noFill/>
-        </p:spPr>
-        <p:txBody>
-          <a:bodyPr wrap="none" lIns="9144" rIns="9144" tIns="9144" bIns="9144" anchor="t">
-            <a:spAutoFit/>
-          </a:bodyPr>
-          <a:lstStyle/>
-          <a:p>
-            <a:pPr algn="r">
-              <a:spcAft>
-                <a:spcPts val="0"/>
-              </a:spcAft>
-              <a:defRPr sz="650" b="0">
-                <a:solidFill>
-                  <a:srgbClr val="8A94A1"/>
-                </a:solidFill>
-                <a:latin typeface="Inter"/>
-              </a:defRPr>
-            </a:pPr>
-            <a:r>
-              <a:t>16</a:t>
-            </a:r>
-          </a:p>
-        </p:txBody>
-      </p:sp>
-    </p:spTree>
-  </p:cSld>
-  <p:clrMapOvr>
-    <a:masterClrMapping/>
-  </p:clrMapOvr>
-</p:sld>
-</file>
-
-<file path=ppt/slides/slide17.xml><?xml version="1.0" encoding="utf-8"?>
-<p:sld xmlns:a="http://schemas.openxmlformats.org/drawingml/2006/main" xmlns:p="http://schemas.openxmlformats.org/presentationml/2006/main" xmlns:r="http://schemas.openxmlformats.org/officeDocument/2006/relationships">
-  <p:cSld>
-    <p:spTree>
-      <p:nvGrpSpPr>
-        <p:cNvPr id="1" name=""/>
-        <p:cNvGrpSpPr/>
-        <p:nvPr/>
-      </p:nvGrpSpPr>
-      <p:grpSpPr/>
-      <p:sp>
-        <p:nvSpPr>
-          <p:cNvPr id="2" name="Rectangle 1"/>
-          <p:cNvSpPr/>
-          <p:nvPr/>
-        </p:nvSpPr>
-        <p:spPr>
-          <a:xfrm>
-            <a:off x="0" y="0"/>
-            <a:ext cx="12191695" cy="6858000"/>
-          </a:xfrm>
-          <a:prstGeom prst="rect">
-            <a:avLst/>
-          </a:prstGeom>
-          <a:solidFill>
-            <a:srgbClr val="FFFFFF"/>
-          </a:solidFill>
-          <a:ln>
-            <a:solidFill>
-              <a:srgbClr val="FFFFFF"/>
-            </a:solidFill>
-          </a:ln>
-        </p:spPr>
-        <p:style>
-          <a:lnRef idx="1">
-            <a:schemeClr val="accent1"/>
-          </a:lnRef>
-          <a:fillRef idx="3">
-            <a:schemeClr val="accent1"/>
-          </a:fillRef>
-          <a:effectRef idx="2">
-            <a:schemeClr val="accent1"/>
-          </a:effectRef>
-          <a:fontRef idx="minor">
-            <a:schemeClr val="lt1"/>
-          </a:fontRef>
-        </p:style>
-        <p:txBody>
-          <a:bodyPr rtlCol="0" anchor="ctr"/>
-          <a:lstStyle/>
-          <a:p>
-            <a:pPr algn="ctr"/>
-          </a:p>
-        </p:txBody>
-      </p:sp>
-      <p:sp>
-        <p:nvSpPr>
-          <p:cNvPr id="3" name="TextBox 2"/>
-          <p:cNvSpPr txBox="1"/>
-          <p:nvPr/>
-        </p:nvSpPr>
-        <p:spPr>
-          <a:xfrm>
-            <a:off x="640080" y="566928"/>
-            <a:ext cx="10058400" cy="530352"/>
-          </a:xfrm>
-          <a:prstGeom prst="rect">
-            <a:avLst/>
-          </a:prstGeom>
-          <a:noFill/>
-        </p:spPr>
-        <p:txBody>
-          <a:bodyPr wrap="none" lIns="9144" rIns="9144" tIns="9144" bIns="9144" anchor="t">
-            <a:spAutoFit/>
-          </a:bodyPr>
-          <a:lstStyle/>
-          <a:p>
-            <a:pPr algn="l">
-              <a:spcAft>
-                <a:spcPts val="0"/>
-              </a:spcAft>
-              <a:defRPr sz="2300" b="1">
-                <a:solidFill>
-                  <a:srgbClr val="0D1117"/>
-                </a:solidFill>
-                <a:latin typeface="Inter"/>
-              </a:defRPr>
-            </a:pPr>
-            <a:r>
-              <a:t>Appendix — sources &amp; method</a:t>
-            </a:r>
-          </a:p>
-        </p:txBody>
-      </p:sp>
-      <p:sp>
-        <p:nvSpPr>
-          <p:cNvPr id="4" name="Rectangle 3"/>
-          <p:cNvSpPr/>
-          <p:nvPr/>
-        </p:nvSpPr>
-        <p:spPr>
-          <a:xfrm>
-            <a:off x="640080" y="1115568"/>
-            <a:ext cx="10908792" cy="18288"/>
-          </a:xfrm>
-          <a:prstGeom prst="rect">
-            <a:avLst/>
-          </a:prstGeom>
-          <a:solidFill>
-            <a:srgbClr val="0D1117"/>
-          </a:solidFill>
-          <a:ln>
-            <a:solidFill>
-              <a:srgbClr val="0D1117"/>
-            </a:solidFill>
-          </a:ln>
-        </p:spPr>
-        <p:style>
-          <a:lnRef idx="1">
-            <a:schemeClr val="accent1"/>
-          </a:lnRef>
-          <a:fillRef idx="3">
-            <a:schemeClr val="accent1"/>
-          </a:fillRef>
-          <a:effectRef idx="2">
-            <a:schemeClr val="accent1"/>
-          </a:effectRef>
-          <a:fontRef idx="minor">
-            <a:schemeClr val="lt1"/>
-          </a:fontRef>
-        </p:style>
-        <p:txBody>
-          <a:bodyPr rtlCol="0" anchor="ctr"/>
-          <a:lstStyle/>
-          <a:p>
-            <a:pPr algn="ctr"/>
+              <a:defRPr>
+                <a:latin typeface="Inter"/>
+              </a:defRPr>
+            </a:pPr>
           </a:p>
         </p:txBody>
       </p:sp>
@@ -9886,7 +10007,11 @@
           <a:bodyPr rtlCol="0" anchor="ctr"/>
           <a:lstStyle/>
           <a:p>
-            <a:pPr algn="ctr"/>
+            <a:pPr algn="ctr">
+              <a:defRPr>
+                <a:latin typeface="Inter"/>
+              </a:defRPr>
+            </a:pPr>
           </a:p>
         </p:txBody>
       </p:sp>
@@ -9924,6 +10049,9 @@
               </a:defRPr>
             </a:pPr>
             <a:r>
+              <a:rPr>
+                <a:latin typeface="Inter"/>
+              </a:rPr>
               <a:t>09</a:t>
             </a:r>
           </a:p>
@@ -9963,6 +10091,9 @@
               </a:defRPr>
             </a:pPr>
             <a:r>
+              <a:rPr>
+                <a:latin typeface="Inter"/>
+              </a:rPr>
               <a:t>SOURCES</a:t>
             </a:r>
           </a:p>
@@ -9978,7 +10109,7 @@
         </p:nvGraphicFramePr>
         <p:xfrm>
           <a:off x="640080" y="1600200"/>
-          <a:ext cx="10908790" cy="4617720"/>
+          <a:ext cx="10908790" cy="2043034"/>
         </p:xfrm>
         <a:graphic>
           <a:graphicData uri="http://schemas.openxmlformats.org/drawingml/2006/table">
@@ -9994,7 +10125,7 @@
                 <a:gridCol w="1779422"/>
                 <a:gridCol w="1779422"/>
               </a:tblGrid>
-              <a:tr h="1154430">
+              <a:tr h="510758">
                 <a:tc>
                   <a:txBody>
                     <a:bodyPr/>
@@ -10009,6 +10140,9 @@
                         </a:defRPr>
                       </a:pPr>
                       <a:r>
+                        <a:rPr>
+                          <a:latin typeface="Inter"/>
+                        </a:rPr>
                         <a:t>Tag</a:t>
                       </a:r>
                     </a:p>
@@ -10033,6 +10167,9 @@
                         </a:defRPr>
                       </a:pPr>
                       <a:r>
+                        <a:rPr>
+                          <a:latin typeface="Inter"/>
+                        </a:rPr>
                         <a:t>Evidence</a:t>
                       </a:r>
                     </a:p>
@@ -10057,6 +10194,9 @@
                         </a:defRPr>
                       </a:pPr>
                       <a:r>
+                        <a:rPr>
+                          <a:latin typeface="Inter"/>
+                        </a:rPr>
                         <a:t>Tool</a:t>
                       </a:r>
                     </a:p>
@@ -10081,6 +10221,9 @@
                         </a:defRPr>
                       </a:pPr>
                       <a:r>
+                        <a:rPr>
+                          <a:latin typeface="Inter"/>
+                        </a:rPr>
                         <a:t>As of</a:t>
                       </a:r>
                     </a:p>
@@ -10105,6 +10248,9 @@
                         </a:defRPr>
                       </a:pPr>
                       <a:r>
+                        <a:rPr>
+                          <a:latin typeface="Inter"/>
+                        </a:rPr>
                         <a:t>Validation</a:t>
                       </a:r>
                     </a:p>
@@ -10129,6 +10275,9 @@
                         </a:defRPr>
                       </a:pPr>
                       <a:r>
+                        <a:rPr>
+                          <a:latin typeface="Inter"/>
+                        </a:rPr>
                         <a:t>Digest</a:t>
                       </a:r>
                     </a:p>
@@ -10140,7 +10289,7 @@
                   </a:tcPr>
                 </a:tc>
               </a:tr>
-              <a:tr h="1154430">
+              <a:tr h="510758">
                 <a:tc>
                   <a:txBody>
                     <a:bodyPr/>
@@ -10155,6 +10304,9 @@
                         </a:defRPr>
                       </a:pPr>
                       <a:r>
+                        <a:rPr>
+                          <a:latin typeface="Inter"/>
+                        </a:rPr>
                         <a:t>S1</a:t>
                       </a:r>
                     </a:p>
@@ -10179,6 +10331,9 @@
                         </a:defRPr>
                       </a:pPr>
                       <a:r>
+                        <a:rPr>
+                          <a:latin typeface="Inter"/>
+                        </a:rPr>
                         <a:t>Form ADV profile</a:t>
                       </a:r>
                     </a:p>
@@ -10203,6 +10358,9 @@
                         </a:defRPr>
                       </a:pPr>
                       <a:r>
+                        <a:rPr>
+                          <a:latin typeface="Inter"/>
+                        </a:rPr>
                         <a:t>get_manager_odd_profile</a:t>
                       </a:r>
                     </a:p>
@@ -10227,6 +10385,9 @@
                         </a:defRPr>
                       </a:pPr>
                       <a:r>
+                        <a:rPr>
+                          <a:latin typeface="Inter"/>
+                        </a:rPr>
                         <a:t>2026-10-01</a:t>
                       </a:r>
                     </a:p>
@@ -10251,6 +10412,9 @@
                         </a:defRPr>
                       </a:pPr>
                       <a:r>
+                        <a:rPr>
+                          <a:latin typeface="Inter"/>
+                        </a:rPr>
                         <a:t>● not_run</a:t>
                       </a:r>
                     </a:p>
@@ -10275,6 +10439,9 @@
                         </a:defRPr>
                       </a:pPr>
                       <a:r>
+                        <a:rPr>
+                          <a:latin typeface="Inter"/>
+                        </a:rPr>
                         <a:t>091b0cf9</a:t>
                       </a:r>
                     </a:p>
@@ -10286,7 +10453,7 @@
                   </a:tcPr>
                 </a:tc>
               </a:tr>
-              <a:tr h="1154430">
+              <a:tr h="510758">
                 <a:tc>
                   <a:txBody>
                     <a:bodyPr/>
@@ -10301,6 +10468,9 @@
                         </a:defRPr>
                       </a:pPr>
                       <a:r>
+                        <a:rPr>
+                          <a:latin typeface="Inter"/>
+                        </a:rPr>
                         <a:t>S2</a:t>
                       </a:r>
                     </a:p>
@@ -10325,6 +10495,9 @@
                         </a:defRPr>
                       </a:pPr>
                       <a:r>
+                        <a:rPr>
+                          <a:latin typeface="Inter"/>
+                        </a:rPr>
                         <a:t>Manager Monitor</a:t>
                       </a:r>
                     </a:p>
@@ -10349,6 +10522,9 @@
                         </a:defRPr>
                       </a:pPr>
                       <a:r>
+                        <a:rPr>
+                          <a:latin typeface="Inter"/>
+                        </a:rPr>
                         <a:t>get_manager_monitor_evidence</a:t>
                       </a:r>
                     </a:p>
@@ -10373,6 +10549,9 @@
                         </a:defRPr>
                       </a:pPr>
                       <a:r>
+                        <a:rPr>
+                          <a:latin typeface="Inter"/>
+                        </a:rPr>
                         <a:t>2026-10-01</a:t>
                       </a:r>
                     </a:p>
@@ -10397,6 +10576,9 @@
                         </a:defRPr>
                       </a:pPr>
                       <a:r>
+                        <a:rPr>
+                          <a:latin typeface="Inter"/>
+                        </a:rPr>
                         <a:t>● passed</a:t>
                       </a:r>
                     </a:p>
@@ -10421,6 +10603,9 @@
                         </a:defRPr>
                       </a:pPr>
                       <a:r>
+                        <a:rPr>
+                          <a:latin typeface="Inter"/>
+                        </a:rPr>
                         <a:t>f337365b</a:t>
                       </a:r>
                     </a:p>
@@ -10432,7 +10617,7 @@
                   </a:tcPr>
                 </a:tc>
               </a:tr>
-              <a:tr h="1154430">
+              <a:tr h="510760">
                 <a:tc>
                   <a:txBody>
                     <a:bodyPr/>
@@ -10447,6 +10632,9 @@
                         </a:defRPr>
                       </a:pPr>
                       <a:r>
+                        <a:rPr>
+                          <a:latin typeface="Inter"/>
+                        </a:rPr>
                         <a:t>S3</a:t>
                       </a:r>
                     </a:p>
@@ -10471,6 +10659,9 @@
                         </a:defRPr>
                       </a:pPr>
                       <a:r>
+                        <a:rPr>
+                          <a:latin typeface="Inter"/>
+                        </a:rPr>
                         <a:t>Form 13F snapshot</a:t>
                       </a:r>
                     </a:p>
@@ -10495,6 +10686,9 @@
                         </a:defRPr>
                       </a:pPr>
                       <a:r>
+                        <a:rPr>
+                          <a:latin typeface="Inter"/>
+                        </a:rPr>
                         <a:t>get_firm_13f_portfolio_review</a:t>
                       </a:r>
                     </a:p>
@@ -10519,6 +10713,9 @@
                         </a:defRPr>
                       </a:pPr>
                       <a:r>
+                        <a:rPr>
+                          <a:latin typeface="Inter"/>
+                        </a:rPr>
                         <a:t>2026-08-14</a:t>
                       </a:r>
                     </a:p>
@@ -10543,6 +10740,9 @@
                         </a:defRPr>
                       </a:pPr>
                       <a:r>
+                        <a:rPr>
+                          <a:latin typeface="Inter"/>
+                        </a:rPr>
                         <a:t>● passed</a:t>
                       </a:r>
                     </a:p>
@@ -10567,6 +10767,9 @@
                         </a:defRPr>
                       </a:pPr>
                       <a:r>
+                        <a:rPr>
+                          <a:latin typeface="Inter"/>
+                        </a:rPr>
                         <a:t>90d3de53</a:t>
                       </a:r>
                     </a:p>
@@ -10584,7 +10787,87 @@
       </p:graphicFrame>
       <p:sp>
         <p:nvSpPr>
-          <p:cNvPr id="9" name="Rectangle 8"/>
+          <p:cNvPr id="9" name="TextBox 8"/>
+          <p:cNvSpPr txBox="1"/>
+          <p:nvPr/>
+        </p:nvSpPr>
+        <p:spPr>
+          <a:xfrm>
+            <a:off x="640080" y="3752962"/>
+            <a:ext cx="10908792" cy="2464957"/>
+          </a:xfrm>
+          <a:prstGeom prst="rect">
+            <a:avLst/>
+          </a:prstGeom>
+          <a:noFill/>
+        </p:spPr>
+        <p:txBody>
+          <a:bodyPr wrap="none" lIns="9144" rIns="9144" tIns="9144" bIns="9144" anchor="t">
+            <a:spAutoFit/>
+          </a:bodyPr>
+          <a:lstStyle/>
+          <a:p>
+            <a:pPr algn="l">
+              <a:spcAft>
+                <a:spcPts val="500"/>
+              </a:spcAft>
+              <a:defRPr sz="1050" b="0">
+                <a:solidFill>
+                  <a:srgbClr val="0D1117"/>
+                </a:solidFill>
+                <a:latin typeface="Inter"/>
+              </a:defRPr>
+            </a:pPr>
+            <a:r>
+              <a:rPr>
+                <a:latin typeface="Inter"/>
+              </a:rPr>
+              <a:t>•  Method: the ODD signal applies the governed Item 11, finding, alert, ownership-change and cohort-percentile rules to available evidence; unavailable evidence degrades completeness rather than becoming zero [S1] [S2] [S3].</a:t>
+            </a:r>
+          </a:p>
+          <a:p>
+            <a:pPr algn="l">
+              <a:spcAft>
+                <a:spcPts val="500"/>
+              </a:spcAft>
+              <a:defRPr sz="1050" b="0">
+                <a:solidFill>
+                  <a:srgbClr val="0D1117"/>
+                </a:solidFill>
+                <a:latin typeface="Inter"/>
+              </a:defRPr>
+            </a:pPr>
+            <a:r>
+              <a:rPr>
+                <a:latin typeface="Inter"/>
+              </a:rPr>
+              <a:t>•  Form ADV is adviser-reported. Gradient cohort percentiles describe positioning, not quality or performance. Form 13F is firm-level, lagged and partial [S1] [S3].</a:t>
+            </a:r>
+          </a:p>
+          <a:p>
+            <a:pPr algn="l">
+              <a:spcAft>
+                <a:spcPts val="500"/>
+              </a:spcAft>
+              <a:defRPr sz="1050" b="0">
+                <a:solidFill>
+                  <a:srgbClr val="0D1117"/>
+                </a:solidFill>
+                <a:latin typeface="Inter"/>
+              </a:defRPr>
+            </a:pPr>
+            <a:r>
+              <a:rPr>
+                <a:latin typeface="Inter"/>
+              </a:rPr>
+              <a:t>•  This fictional TEST report is a diligence aid, not investment, legal or compliance advice. No hire, fire, redemption, termination or allocation recommendation is made.</a:t>
+            </a:r>
+          </a:p>
+        </p:txBody>
+      </p:sp>
+      <p:sp>
+        <p:nvSpPr>
+          <p:cNvPr id="10" name="Rectangle 9"/>
           <p:cNvSpPr/>
           <p:nvPr/>
         </p:nvSpPr>
@@ -10623,13 +10906,17 @@
           <a:bodyPr rtlCol="0" anchor="ctr"/>
           <a:lstStyle/>
           <a:p>
-            <a:pPr algn="ctr"/>
-          </a:p>
-        </p:txBody>
-      </p:sp>
-      <p:sp>
-        <p:nvSpPr>
-          <p:cNvPr id="10" name="TextBox 9"/>
+            <a:pPr algn="ctr">
+              <a:defRPr>
+                <a:latin typeface="Inter"/>
+              </a:defRPr>
+            </a:pPr>
+          </a:p>
+        </p:txBody>
+      </p:sp>
+      <p:sp>
+        <p:nvSpPr>
+          <p:cNvPr id="11" name="TextBox 10"/>
           <p:cNvSpPr txBox="1"/>
           <p:nvPr/>
         </p:nvSpPr>
@@ -10661,6 +10948,9 @@
               </a:defRPr>
             </a:pPr>
             <a:r>
+              <a:rPr>
+                <a:latin typeface="Inter"/>
+              </a:rPr>
               <a:t>Sources: S1 · S2 · S3</a:t>
             </a:r>
           </a:p>
@@ -10668,7 +10958,7 @@
       </p:sp>
       <p:sp>
         <p:nvSpPr>
-          <p:cNvPr id="11" name="TextBox 10"/>
+          <p:cNvPr id="12" name="TextBox 11"/>
           <p:cNvSpPr txBox="1"/>
           <p:nvPr/>
         </p:nvSpPr>
@@ -10700,14 +10990,17 @@
               </a:defRPr>
             </a:pPr>
             <a:r>
-              <a:t>RENDER TEST — partial sample, not a full ODD report</a:t>
-            </a:r>
-          </a:p>
-        </p:txBody>
-      </p:sp>
-      <p:sp>
-        <p:nvSpPr>
-          <p:cNvPr id="12" name="TextBox 11"/>
+              <a:rPr>
+                <a:latin typeface="Inter"/>
+              </a:rPr>
+              <a:t>RENDER TEST — partial sample, not a full ODD report · Data as of 2026-10-01 (Form ADV); 2026-08-14 (Form 13F)</a:t>
+            </a:r>
+          </a:p>
+        </p:txBody>
+      </p:sp>
+      <p:sp>
+        <p:nvSpPr>
+          <p:cNvPr id="13" name="TextBox 12"/>
           <p:cNvSpPr txBox="1"/>
           <p:nvPr/>
         </p:nvSpPr>
@@ -10739,7 +11032,10 @@
               </a:defRPr>
             </a:pPr>
             <a:r>
-              <a:t>17</a:t>
+              <a:rPr>
+                <a:latin typeface="Inter"/>
+              </a:rPr>
+              <a:t>16</a:t>
             </a:r>
           </a:p>
         </p:txBody>
@@ -10803,7 +11099,11 @@
           <a:bodyPr rtlCol="0" anchor="ctr"/>
           <a:lstStyle/>
           <a:p>
-            <a:pPr algn="ctr"/>
+            <a:pPr algn="ctr">
+              <a:defRPr>
+                <a:latin typeface="Inter"/>
+              </a:defRPr>
+            </a:pPr>
           </a:p>
         </p:txBody>
       </p:sp>
@@ -10841,6 +11141,9 @@
               </a:defRPr>
             </a:pPr>
             <a:r>
+              <a:rPr>
+                <a:latin typeface="Inter"/>
+              </a:rPr>
               <a:t>RENDER TEST OF THE SHARED RENDERER WITH ODD BLOCKS</a:t>
             </a:r>
           </a:p>
@@ -10880,6 +11183,9 @@
               </a:defRPr>
             </a:pPr>
             <a:r>
+              <a:rPr>
+                <a:latin typeface="Inter"/>
+              </a:rPr>
               <a:t>Executive summary</a:t>
             </a:r>
           </a:p>
@@ -10926,7 +11232,11 @@
           <a:bodyPr rtlCol="0" anchor="ctr"/>
           <a:lstStyle/>
           <a:p>
-            <a:pPr algn="ctr"/>
+            <a:pPr algn="ctr">
+              <a:defRPr>
+                <a:latin typeface="Inter"/>
+              </a:defRPr>
+            </a:pPr>
           </a:p>
         </p:txBody>
       </p:sp>
@@ -10971,7 +11281,11 @@
           <a:bodyPr rtlCol="0" anchor="ctr"/>
           <a:lstStyle/>
           <a:p>
-            <a:pPr algn="ctr"/>
+            <a:pPr algn="ctr">
+              <a:defRPr>
+                <a:latin typeface="Inter"/>
+              </a:defRPr>
+            </a:pPr>
           </a:p>
         </p:txBody>
       </p:sp>
@@ -11009,6 +11323,9 @@
               </a:defRPr>
             </a:pPr>
             <a:r>
+              <a:rPr>
+                <a:latin typeface="Inter"/>
+              </a:rPr>
               <a:t>01</a:t>
             </a:r>
           </a:p>
@@ -11055,7 +11372,11 @@
           <a:bodyPr rtlCol="0" anchor="ctr"/>
           <a:lstStyle/>
           <a:p>
-            <a:pPr algn="ctr"/>
+            <a:pPr algn="ctr">
+              <a:defRPr>
+                <a:latin typeface="Inter"/>
+              </a:defRPr>
+            </a:pPr>
           </a:p>
         </p:txBody>
       </p:sp>
@@ -11100,7 +11421,11 @@
           <a:bodyPr rtlCol="0" anchor="ctr"/>
           <a:lstStyle/>
           <a:p>
-            <a:pPr algn="ctr"/>
+            <a:pPr algn="ctr">
+              <a:defRPr>
+                <a:latin typeface="Inter"/>
+              </a:defRPr>
+            </a:pPr>
           </a:p>
         </p:txBody>
       </p:sp>
@@ -11138,6 +11463,9 @@
               </a:defRPr>
             </a:pPr>
             <a:r>
+              <a:rPr>
+                <a:latin typeface="Inter"/>
+              </a:rPr>
               <a:t>Bottom line</a:t>
             </a:r>
           </a:p>
@@ -11177,6 +11505,9 @@
               </a:defRPr>
             </a:pPr>
             <a:r>
+              <a:rPr>
+                <a:latin typeface="Inter"/>
+              </a:rPr>
               <a:t>Ridgeview reports $12.40B regulatory AUM, 38 private funds and no Item 11 disclosures [S1]. No cohort metric is in the top quartile; the highest is AUM per adviser representative at the 62.6th percentile [S1]. Firm events are not yet published, so completeness is degraded and this is not a clean bill of health.</a:t>
             </a:r>
           </a:p>
@@ -11223,7 +11554,11 @@
           <a:bodyPr rtlCol="0" anchor="ctr"/>
           <a:lstStyle/>
           <a:p>
-            <a:pPr algn="ctr"/>
+            <a:pPr algn="ctr">
+              <a:defRPr>
+                <a:latin typeface="Inter"/>
+              </a:defRPr>
+            </a:pPr>
           </a:p>
         </p:txBody>
       </p:sp>
@@ -11268,7 +11603,11 @@
           <a:bodyPr rtlCol="0" anchor="ctr"/>
           <a:lstStyle/>
           <a:p>
-            <a:pPr algn="ctr"/>
+            <a:pPr algn="ctr">
+              <a:defRPr>
+                <a:latin typeface="Inter"/>
+              </a:defRPr>
+            </a:pPr>
           </a:p>
         </p:txBody>
       </p:sp>
@@ -11306,6 +11645,9 @@
               </a:defRPr>
             </a:pPr>
             <a:r>
+              <a:rPr>
+                <a:latin typeface="Inter"/>
+              </a:rPr>
               <a:t>REGULATORY AUM</a:t>
             </a:r>
           </a:p>
@@ -11345,6 +11687,9 @@
               </a:defRPr>
             </a:pPr>
             <a:r>
+              <a:rPr>
+                <a:latin typeface="Inter"/>
+              </a:rPr>
               <a:t>$12.4B</a:t>
             </a:r>
           </a:p>
@@ -11384,6 +11729,9 @@
               </a:defRPr>
             </a:pPr>
             <a:r>
+              <a:rPr>
+                <a:latin typeface="Inter"/>
+              </a:rPr>
               <a:t>Item 5.F [S1]</a:t>
             </a:r>
           </a:p>
@@ -11430,7 +11778,11 @@
           <a:bodyPr rtlCol="0" anchor="ctr"/>
           <a:lstStyle/>
           <a:p>
-            <a:pPr algn="ctr"/>
+            <a:pPr algn="ctr">
+              <a:defRPr>
+                <a:latin typeface="Inter"/>
+              </a:defRPr>
+            </a:pPr>
           </a:p>
         </p:txBody>
       </p:sp>
@@ -11475,7 +11827,11 @@
           <a:bodyPr rtlCol="0" anchor="ctr"/>
           <a:lstStyle/>
           <a:p>
-            <a:pPr algn="ctr"/>
+            <a:pPr algn="ctr">
+              <a:defRPr>
+                <a:latin typeface="Inter"/>
+              </a:defRPr>
+            </a:pPr>
           </a:p>
         </p:txBody>
       </p:sp>
@@ -11513,6 +11869,9 @@
               </a:defRPr>
             </a:pPr>
             <a:r>
+              <a:rPr>
+                <a:latin typeface="Inter"/>
+              </a:rPr>
               <a:t>PRIVATE FUNDS</a:t>
             </a:r>
           </a:p>
@@ -11552,6 +11911,9 @@
               </a:defRPr>
             </a:pPr>
             <a:r>
+              <a:rPr>
+                <a:latin typeface="Inter"/>
+              </a:rPr>
               <a:t>38</a:t>
             </a:r>
           </a:p>
@@ -11591,6 +11953,9 @@
               </a:defRPr>
             </a:pPr>
             <a:r>
+              <a:rPr>
+                <a:latin typeface="Inter"/>
+              </a:rPr>
               <a:t>Schedule D 7.B.1 [S1]</a:t>
             </a:r>
           </a:p>
@@ -11637,7 +12002,11 @@
           <a:bodyPr rtlCol="0" anchor="ctr"/>
           <a:lstStyle/>
           <a:p>
-            <a:pPr algn="ctr"/>
+            <a:pPr algn="ctr">
+              <a:defRPr>
+                <a:latin typeface="Inter"/>
+              </a:defRPr>
+            </a:pPr>
           </a:p>
         </p:txBody>
       </p:sp>
@@ -11682,7 +12051,11 @@
           <a:bodyPr rtlCol="0" anchor="ctr"/>
           <a:lstStyle/>
           <a:p>
-            <a:pPr algn="ctr"/>
+            <a:pPr algn="ctr">
+              <a:defRPr>
+                <a:latin typeface="Inter"/>
+              </a:defRPr>
+            </a:pPr>
           </a:p>
         </p:txBody>
       </p:sp>
@@ -11720,6 +12093,9 @@
               </a:defRPr>
             </a:pPr>
             <a:r>
+              <a:rPr>
+                <a:latin typeface="Inter"/>
+              </a:rPr>
               <a:t>ITEM 11</a:t>
             </a:r>
           </a:p>
@@ -11759,6 +12135,9 @@
               </a:defRPr>
             </a:pPr>
             <a:r>
+              <a:rPr>
+                <a:latin typeface="Inter"/>
+              </a:rPr>
               <a:t>0</a:t>
             </a:r>
           </a:p>
@@ -11798,6 +12177,9 @@
               </a:defRPr>
             </a:pPr>
             <a:r>
+              <a:rPr>
+                <a:latin typeface="Inter"/>
+              </a:rPr>
               <a:t>Disciplinary disclosures [S1]</a:t>
             </a:r>
           </a:p>
@@ -11844,7 +12226,11 @@
           <a:bodyPr rtlCol="0" anchor="ctr"/>
           <a:lstStyle/>
           <a:p>
-            <a:pPr algn="ctr"/>
+            <a:pPr algn="ctr">
+              <a:defRPr>
+                <a:latin typeface="Inter"/>
+              </a:defRPr>
+            </a:pPr>
           </a:p>
         </p:txBody>
       </p:sp>
@@ -11889,7 +12275,11 @@
           <a:bodyPr rtlCol="0" anchor="ctr"/>
           <a:lstStyle/>
           <a:p>
-            <a:pPr algn="ctr"/>
+            <a:pPr algn="ctr">
+              <a:defRPr>
+                <a:latin typeface="Inter"/>
+              </a:defRPr>
+            </a:pPr>
           </a:p>
         </p:txBody>
       </p:sp>
@@ -11927,6 +12317,9 @@
               </a:defRPr>
             </a:pPr>
             <a:r>
+              <a:rPr>
+                <a:latin typeface="Inter"/>
+              </a:rPr>
               <a:t>COMPOSITE</a:t>
             </a:r>
           </a:p>
@@ -11966,6 +12359,9 @@
               </a:defRPr>
             </a:pPr>
             <a:r>
+              <a:rPr>
+                <a:latin typeface="Inter"/>
+              </a:rPr>
               <a:t>32.4</a:t>
             </a:r>
           </a:p>
@@ -12005,6 +12401,9 @@
               </a:defRPr>
             </a:pPr>
             <a:r>
+              <a:rPr>
+                <a:latin typeface="Inter"/>
+              </a:rPr>
               <a:t>Gradient risk profile [S1]</a:t>
             </a:r>
           </a:p>
@@ -12051,7 +12450,11 @@
           <a:bodyPr rtlCol="0" anchor="ctr"/>
           <a:lstStyle/>
           <a:p>
-            <a:pPr algn="ctr"/>
+            <a:pPr algn="ctr">
+              <a:defRPr>
+                <a:latin typeface="Inter"/>
+              </a:defRPr>
+            </a:pPr>
           </a:p>
         </p:txBody>
       </p:sp>
@@ -12089,6 +12492,9 @@
               </a:defRPr>
             </a:pPr>
             <a:r>
+              <a:rPr>
+                <a:latin typeface="Inter"/>
+              </a:rPr>
               <a:t>Sources: S1</a:t>
             </a:r>
           </a:p>
@@ -12128,7 +12534,10 @@
               </a:defRPr>
             </a:pPr>
             <a:r>
-              <a:t>RENDER TEST — partial sample, not a full ODD report</a:t>
+              <a:rPr>
+                <a:latin typeface="Inter"/>
+              </a:rPr>
+              <a:t>RENDER TEST — partial sample, not a full ODD report · Data as of 2026-10-01 (Form ADV); 2026-08-14 (Form 13F)</a:t>
             </a:r>
           </a:p>
         </p:txBody>
@@ -12167,6 +12576,9 @@
               </a:defRPr>
             </a:pPr>
             <a:r>
+              <a:rPr>
+                <a:latin typeface="Inter"/>
+              </a:rPr>
               <a:t>2</a:t>
             </a:r>
           </a:p>
@@ -12231,7 +12643,11 @@
           <a:bodyPr rtlCol="0" anchor="ctr"/>
           <a:lstStyle/>
           <a:p>
-            <a:pPr algn="ctr"/>
+            <a:pPr algn="ctr">
+              <a:defRPr>
+                <a:latin typeface="Inter"/>
+              </a:defRPr>
+            </a:pPr>
           </a:p>
         </p:txBody>
       </p:sp>
@@ -12269,6 +12685,9 @@
               </a:defRPr>
             </a:pPr>
             <a:r>
+              <a:rPr>
+                <a:latin typeface="Inter"/>
+              </a:rPr>
               <a:t>RENDER TEST OF THE SHARED RENDERER WITH ODD BLOCKS</a:t>
             </a:r>
           </a:p>
@@ -12308,6 +12727,9 @@
               </a:defRPr>
             </a:pPr>
             <a:r>
+              <a:rPr>
+                <a:latin typeface="Inter"/>
+              </a:rPr>
               <a:t>Executive summary — continued</a:t>
             </a:r>
           </a:p>
@@ -12354,7 +12776,11 @@
           <a:bodyPr rtlCol="0" anchor="ctr"/>
           <a:lstStyle/>
           <a:p>
-            <a:pPr algn="ctr"/>
+            <a:pPr algn="ctr">
+              <a:defRPr>
+                <a:latin typeface="Inter"/>
+              </a:defRPr>
+            </a:pPr>
           </a:p>
         </p:txBody>
       </p:sp>
@@ -12399,7 +12825,11 @@
           <a:bodyPr rtlCol="0" anchor="ctr"/>
           <a:lstStyle/>
           <a:p>
-            <a:pPr algn="ctr"/>
+            <a:pPr algn="ctr">
+              <a:defRPr>
+                <a:latin typeface="Inter"/>
+              </a:defRPr>
+            </a:pPr>
           </a:p>
         </p:txBody>
       </p:sp>
@@ -12437,6 +12867,9 @@
               </a:defRPr>
             </a:pPr>
             <a:r>
+              <a:rPr>
+                <a:latin typeface="Inter"/>
+              </a:rPr>
               <a:t>01</a:t>
             </a:r>
           </a:p>
@@ -12476,6 +12909,9 @@
               </a:defRPr>
             </a:pPr>
             <a:r>
+              <a:rPr>
+                <a:latin typeface="Inter"/>
+              </a:rPr>
               <a:t>EVIDENCE COVERAGE</a:t>
             </a:r>
           </a:p>
@@ -12491,7 +12927,7 @@
         </p:nvGraphicFramePr>
         <p:xfrm>
           <a:off x="640080" y="1600200"/>
-          <a:ext cx="10908792" cy="2512083"/>
+          <a:ext cx="10908792" cy="2933328"/>
         </p:xfrm>
         <a:graphic>
           <a:graphicData uri="http://schemas.openxmlformats.org/drawingml/2006/table">
@@ -12504,7 +12940,7 @@
                 <a:gridCol w="4448556"/>
                 <a:gridCol w="4448556"/>
               </a:tblGrid>
-              <a:tr h="502416">
+              <a:tr h="586665">
                 <a:tc>
                   <a:txBody>
                     <a:bodyPr/>
@@ -12519,6 +12955,9 @@
                         </a:defRPr>
                       </a:pPr>
                       <a:r>
+                        <a:rPr>
+                          <a:latin typeface="Inter"/>
+                        </a:rPr>
                         <a:t>Source</a:t>
                       </a:r>
                     </a:p>
@@ -12543,6 +12982,9 @@
                         </a:defRPr>
                       </a:pPr>
                       <a:r>
+                        <a:rPr>
+                          <a:latin typeface="Inter"/>
+                        </a:rPr>
                         <a:t>Status</a:t>
                       </a:r>
                     </a:p>
@@ -12567,6 +13009,9 @@
                         </a:defRPr>
                       </a:pPr>
                       <a:r>
+                        <a:rPr>
+                          <a:latin typeface="Inter"/>
+                        </a:rPr>
                         <a:t>Note</a:t>
                       </a:r>
                     </a:p>
@@ -12578,7 +13023,7 @@
                   </a:tcPr>
                 </a:tc>
               </a:tr>
-              <a:tr h="502416">
+              <a:tr h="586665">
                 <a:tc>
                   <a:txBody>
                     <a:bodyPr/>
@@ -12593,6 +13038,9 @@
                         </a:defRPr>
                       </a:pPr>
                       <a:r>
+                        <a:rPr>
+                          <a:latin typeface="Inter"/>
+                        </a:rPr>
                         <a:t>Form ADV profile</a:t>
                       </a:r>
                     </a:p>
@@ -12617,6 +13065,9 @@
                         </a:defRPr>
                       </a:pPr>
                       <a:r>
+                        <a:rPr>
+                          <a:latin typeface="Inter"/>
+                        </a:rPr>
                         <a:t>● available</a:t>
                       </a:r>
                     </a:p>
@@ -12641,6 +13092,9 @@
                         </a:defRPr>
                       </a:pPr>
                       <a:r>
+                        <a:rPr>
+                          <a:latin typeface="Inter"/>
+                        </a:rPr>
                         <a:t>Report 2026-10-01 [S1]</a:t>
                       </a:r>
                     </a:p>
@@ -12652,7 +13106,7 @@
                   </a:tcPr>
                 </a:tc>
               </a:tr>
-              <a:tr h="502416">
+              <a:tr h="586665">
                 <a:tc>
                   <a:txBody>
                     <a:bodyPr/>
@@ -12667,6 +13121,9 @@
                         </a:defRPr>
                       </a:pPr>
                       <a:r>
+                        <a:rPr>
+                          <a:latin typeface="Inter"/>
+                        </a:rPr>
                         <a:t>Manager Monitor</a:t>
                       </a:r>
                     </a:p>
@@ -12691,6 +13148,9 @@
                         </a:defRPr>
                       </a:pPr>
                       <a:r>
+                        <a:rPr>
+                          <a:latin typeface="Inter"/>
+                        </a:rPr>
                         <a:t>● available</a:t>
                       </a:r>
                     </a:p>
@@ -12715,6 +13175,9 @@
                         </a:defRPr>
                       </a:pPr>
                       <a:r>
+                        <a:rPr>
+                          <a:latin typeface="Inter"/>
+                        </a:rPr>
                         <a:t>Aligned, 0 alerts [S2]</a:t>
                       </a:r>
                     </a:p>
@@ -12726,7 +13189,7 @@
                   </a:tcPr>
                 </a:tc>
               </a:tr>
-              <a:tr h="502416">
+              <a:tr h="586665">
                 <a:tc>
                   <a:txBody>
                     <a:bodyPr/>
@@ -12741,6 +13204,9 @@
                         </a:defRPr>
                       </a:pPr>
                       <a:r>
+                        <a:rPr>
+                          <a:latin typeface="Inter"/>
+                        </a:rPr>
                         <a:t>Firm &amp; fund events</a:t>
                       </a:r>
                     </a:p>
@@ -12759,12 +13225,15 @@
                       <a:pPr>
                         <a:defRPr sz="800" b="1">
                           <a:solidFill>
-                            <a:srgbClr val="9AA5B1"/>
+                            <a:srgbClr val="FF6B5E"/>
                           </a:solidFill>
                           <a:latin typeface="Inter"/>
                         </a:defRPr>
                       </a:pPr>
                       <a:r>
+                        <a:rPr>
+                          <a:latin typeface="Inter"/>
+                        </a:rPr>
                         <a:t>● unavailable</a:t>
                       </a:r>
                     </a:p>
@@ -12789,6 +13258,9 @@
                         </a:defRPr>
                       </a:pPr>
                       <a:r>
+                        <a:rPr>
+                          <a:latin typeface="Inter"/>
+                        </a:rPr>
                         <a:t>Event publication not ready</a:t>
                       </a:r>
                     </a:p>
@@ -12800,7 +13272,7 @@
                   </a:tcPr>
                 </a:tc>
               </a:tr>
-              <a:tr h="502419">
+              <a:tr h="586668">
                 <a:tc>
                   <a:txBody>
                     <a:bodyPr/>
@@ -12815,6 +13287,9 @@
                         </a:defRPr>
                       </a:pPr>
                       <a:r>
+                        <a:rPr>
+                          <a:latin typeface="Inter"/>
+                        </a:rPr>
                         <a:t>Form 13F</a:t>
                       </a:r>
                     </a:p>
@@ -12839,6 +13314,9 @@
                         </a:defRPr>
                       </a:pPr>
                       <a:r>
+                        <a:rPr>
+                          <a:latin typeface="Inter"/>
+                        </a:rPr>
                         <a:t>● available</a:t>
                       </a:r>
                     </a:p>
@@ -12863,6 +13341,9 @@
                         </a:defRPr>
                       </a:pPr>
                       <a:r>
+                        <a:rPr>
+                          <a:latin typeface="Inter"/>
+                        </a:rPr>
                         <a:t>Q2 2026 filing [S3]</a:t>
                       </a:r>
                     </a:p>
@@ -12886,8 +13367,8 @@
         </p:nvSpPr>
         <p:spPr>
           <a:xfrm>
-            <a:off x="640080" y="4222011"/>
-            <a:ext cx="10908792" cy="900222"/>
+            <a:off x="640080" y="4643256"/>
+            <a:ext cx="10908792" cy="1574663"/>
           </a:xfrm>
           <a:prstGeom prst="rect">
             <a:avLst/>
@@ -12919,7 +13400,11 @@
           <a:bodyPr rtlCol="0" anchor="ctr"/>
           <a:lstStyle/>
           <a:p>
-            <a:pPr algn="ctr"/>
+            <a:pPr algn="ctr">
+              <a:defRPr>
+                <a:latin typeface="Inter"/>
+              </a:defRPr>
+            </a:pPr>
           </a:p>
         </p:txBody>
       </p:sp>
@@ -12931,8 +13416,8 @@
         </p:nvSpPr>
         <p:spPr>
           <a:xfrm>
-            <a:off x="640080" y="4222011"/>
-            <a:ext cx="54864" cy="900222"/>
+            <a:off x="640080" y="4643256"/>
+            <a:ext cx="54864" cy="1574663"/>
           </a:xfrm>
           <a:prstGeom prst="rect">
             <a:avLst/>
@@ -12964,7 +13449,11 @@
           <a:bodyPr rtlCol="0" anchor="ctr"/>
           <a:lstStyle/>
           <a:p>
-            <a:pPr algn="ctr"/>
+            <a:pPr algn="ctr">
+              <a:defRPr>
+                <a:latin typeface="Inter"/>
+              </a:defRPr>
+            </a:pPr>
           </a:p>
         </p:txBody>
       </p:sp>
@@ -12976,7 +13465,7 @@
         </p:nvSpPr>
         <p:spPr>
           <a:xfrm>
-            <a:off x="804671" y="4331739"/>
+            <a:off x="804671" y="4752984"/>
             <a:ext cx="10616184" cy="228600"/>
           </a:xfrm>
           <a:prstGeom prst="rect">
@@ -13002,6 +13491,9 @@
               </a:defRPr>
             </a:pPr>
             <a:r>
+              <a:rPr>
+                <a:latin typeface="Inter"/>
+              </a:rPr>
               <a:t>Key judgment — headline signal</a:t>
             </a:r>
           </a:p>
@@ -13015,8 +13507,8 @@
         </p:nvSpPr>
         <p:spPr>
           <a:xfrm>
-            <a:off x="804671" y="4615203"/>
-            <a:ext cx="10616184" cy="415590"/>
+            <a:off x="804671" y="5036448"/>
+            <a:ext cx="10616184" cy="1090031"/>
           </a:xfrm>
           <a:prstGeom prst="rect">
             <a:avLst/>
@@ -13041,7 +13533,10 @@
               </a:defRPr>
             </a:pPr>
             <a:r>
-              <a:t>Observation: The fictional TEST report carries a clear signal [S1]. Why it matters: The signal frames the review. Uncertainty: Evidence coverage is bounded. What would change the view: New governed evidence that changes the signal.</a:t>
+              <a:rPr>
+                <a:latin typeface="Inter"/>
+              </a:rPr>
+              <a:t>Observation: The fictional TEST report carries one clear headline signal [S1]. Why it matters: This signal focuses oversight on the report's most decision-relevant condition. Uncertainty: Evidence coverage may exclude newer or more detailed observations. What would change the view: A governed refresh showing a different signal or breached threshold.</a:t>
             </a:r>
           </a:p>
         </p:txBody>
@@ -13049,174 +13544,6 @@
       <p:sp>
         <p:nvSpPr>
           <p:cNvPr id="14" name="Rectangle 13"/>
-          <p:cNvSpPr/>
-          <p:nvPr/>
-        </p:nvSpPr>
-        <p:spPr>
-          <a:xfrm>
-            <a:off x="640080" y="5231961"/>
-            <a:ext cx="10908792" cy="985958"/>
-          </a:xfrm>
-          <a:prstGeom prst="rect">
-            <a:avLst/>
-          </a:prstGeom>
-          <a:solidFill>
-            <a:srgbClr val="F5F7F9"/>
-          </a:solidFill>
-          <a:ln>
-            <a:solidFill>
-              <a:srgbClr val="E3E7EC"/>
-            </a:solidFill>
-          </a:ln>
-        </p:spPr>
-        <p:style>
-          <a:lnRef idx="1">
-            <a:schemeClr val="accent1"/>
-          </a:lnRef>
-          <a:fillRef idx="3">
-            <a:schemeClr val="accent1"/>
-          </a:fillRef>
-          <a:effectRef idx="2">
-            <a:schemeClr val="accent1"/>
-          </a:effectRef>
-          <a:fontRef idx="minor">
-            <a:schemeClr val="lt1"/>
-          </a:fontRef>
-        </p:style>
-        <p:txBody>
-          <a:bodyPr rtlCol="0" anchor="ctr"/>
-          <a:lstStyle/>
-          <a:p>
-            <a:pPr algn="ctr"/>
-          </a:p>
-        </p:txBody>
-      </p:sp>
-      <p:sp>
-        <p:nvSpPr>
-          <p:cNvPr id="15" name="Rectangle 14"/>
-          <p:cNvSpPr/>
-          <p:nvPr/>
-        </p:nvSpPr>
-        <p:spPr>
-          <a:xfrm>
-            <a:off x="640080" y="5231961"/>
-            <a:ext cx="54864" cy="985958"/>
-          </a:xfrm>
-          <a:prstGeom prst="rect">
-            <a:avLst/>
-          </a:prstGeom>
-          <a:solidFill>
-            <a:srgbClr val="0D1117"/>
-          </a:solidFill>
-          <a:ln>
-            <a:solidFill>
-              <a:srgbClr val="0D1117"/>
-            </a:solidFill>
-          </a:ln>
-        </p:spPr>
-        <p:style>
-          <a:lnRef idx="1">
-            <a:schemeClr val="accent1"/>
-          </a:lnRef>
-          <a:fillRef idx="3">
-            <a:schemeClr val="accent1"/>
-          </a:fillRef>
-          <a:effectRef idx="2">
-            <a:schemeClr val="accent1"/>
-          </a:effectRef>
-          <a:fontRef idx="minor">
-            <a:schemeClr val="lt1"/>
-          </a:fontRef>
-        </p:style>
-        <p:txBody>
-          <a:bodyPr rtlCol="0" anchor="ctr"/>
-          <a:lstStyle/>
-          <a:p>
-            <a:pPr algn="ctr"/>
-          </a:p>
-        </p:txBody>
-      </p:sp>
-      <p:sp>
-        <p:nvSpPr>
-          <p:cNvPr id="16" name="TextBox 15"/>
-          <p:cNvSpPr txBox="1"/>
-          <p:nvPr/>
-        </p:nvSpPr>
-        <p:spPr>
-          <a:xfrm>
-            <a:off x="804671" y="5341689"/>
-            <a:ext cx="10616184" cy="228600"/>
-          </a:xfrm>
-          <a:prstGeom prst="rect">
-            <a:avLst/>
-          </a:prstGeom>
-          <a:noFill/>
-        </p:spPr>
-        <p:txBody>
-          <a:bodyPr wrap="none" lIns="9144" rIns="9144" tIns="9144" bIns="9144" anchor="t">
-            <a:spAutoFit/>
-          </a:bodyPr>
-          <a:lstStyle/>
-          <a:p>
-            <a:pPr algn="l">
-              <a:spcAft>
-                <a:spcPts val="0"/>
-              </a:spcAft>
-              <a:defRPr sz="1000" b="1">
-                <a:solidFill>
-                  <a:srgbClr val="0D1117"/>
-                </a:solidFill>
-                <a:latin typeface="Inter"/>
-              </a:defRPr>
-            </a:pPr>
-            <a:r>
-              <a:t>Key judgment — primary measure</a:t>
-            </a:r>
-          </a:p>
-        </p:txBody>
-      </p:sp>
-      <p:sp>
-        <p:nvSpPr>
-          <p:cNvPr id="17" name="TextBox 16"/>
-          <p:cNvSpPr txBox="1"/>
-          <p:nvPr/>
-        </p:nvSpPr>
-        <p:spPr>
-          <a:xfrm>
-            <a:off x="804671" y="5625153"/>
-            <a:ext cx="10616184" cy="501326"/>
-          </a:xfrm>
-          <a:prstGeom prst="rect">
-            <a:avLst/>
-          </a:prstGeom>
-          <a:noFill/>
-        </p:spPr>
-        <p:txBody>
-          <a:bodyPr wrap="none" lIns="9144" rIns="9144" tIns="9144" bIns="9144" anchor="t">
-            <a:spAutoFit/>
-          </a:bodyPr>
-          <a:lstStyle/>
-          <a:p>
-            <a:pPr algn="l">
-              <a:spcAft>
-                <a:spcPts val="0"/>
-              </a:spcAft>
-              <a:defRPr sz="950" b="0">
-                <a:solidFill>
-                  <a:srgbClr val="4A5563"/>
-                </a:solidFill>
-                <a:latin typeface="Inter"/>
-              </a:defRPr>
-            </a:pPr>
-            <a:r>
-              <a:t>Observation: Regulatory AUM is $12.4B in the TEST evidence [S2]. Why it matters: This measure anchors the executive view. Uncertainty: The fixture is deliberately compact. What would change the view: A refreshed source with a materially different value.</a:t>
-            </a:r>
-          </a:p>
-        </p:txBody>
-      </p:sp>
-      <p:sp>
-        <p:nvSpPr>
-          <p:cNvPr id="18" name="Rectangle 17"/>
           <p:cNvSpPr/>
           <p:nvPr/>
         </p:nvSpPr>
@@ -13255,13 +13582,17 @@
           <a:bodyPr rtlCol="0" anchor="ctr"/>
           <a:lstStyle/>
           <a:p>
-            <a:pPr algn="ctr"/>
-          </a:p>
-        </p:txBody>
-      </p:sp>
-      <p:sp>
-        <p:nvSpPr>
-          <p:cNvPr id="19" name="TextBox 18"/>
+            <a:pPr algn="ctr">
+              <a:defRPr>
+                <a:latin typeface="Inter"/>
+              </a:defRPr>
+            </a:pPr>
+          </a:p>
+        </p:txBody>
+      </p:sp>
+      <p:sp>
+        <p:nvSpPr>
+          <p:cNvPr id="15" name="TextBox 14"/>
           <p:cNvSpPr txBox="1"/>
           <p:nvPr/>
         </p:nvSpPr>
@@ -13293,6 +13624,9 @@
               </a:defRPr>
             </a:pPr>
             <a:r>
+              <a:rPr>
+                <a:latin typeface="Inter"/>
+              </a:rPr>
               <a:t>Sources: S1 · S2 · S3</a:t>
             </a:r>
           </a:p>
@@ -13300,7 +13634,7 @@
       </p:sp>
       <p:sp>
         <p:nvSpPr>
-          <p:cNvPr id="20" name="TextBox 19"/>
+          <p:cNvPr id="16" name="TextBox 15"/>
           <p:cNvSpPr txBox="1"/>
           <p:nvPr/>
         </p:nvSpPr>
@@ -13332,14 +13666,17 @@
               </a:defRPr>
             </a:pPr>
             <a:r>
-              <a:t>RENDER TEST — partial sample, not a full ODD report</a:t>
-            </a:r>
-          </a:p>
-        </p:txBody>
-      </p:sp>
-      <p:sp>
-        <p:nvSpPr>
-          <p:cNvPr id="21" name="TextBox 20"/>
+              <a:rPr>
+                <a:latin typeface="Inter"/>
+              </a:rPr>
+              <a:t>RENDER TEST — partial sample, not a full ODD report · Data as of 2026-10-01 (Form ADV); 2026-08-14 (Form 13F)</a:t>
+            </a:r>
+          </a:p>
+        </p:txBody>
+      </p:sp>
+      <p:sp>
+        <p:nvSpPr>
+          <p:cNvPr id="17" name="TextBox 16"/>
           <p:cNvSpPr txBox="1"/>
           <p:nvPr/>
         </p:nvSpPr>
@@ -13371,6 +13708,9 @@
               </a:defRPr>
             </a:pPr>
             <a:r>
+              <a:rPr>
+                <a:latin typeface="Inter"/>
+              </a:rPr>
               <a:t>3</a:t>
             </a:r>
           </a:p>
@@ -13435,7 +13775,11 @@
           <a:bodyPr rtlCol="0" anchor="ctr"/>
           <a:lstStyle/>
           <a:p>
-            <a:pPr algn="ctr"/>
+            <a:pPr algn="ctr">
+              <a:defRPr>
+                <a:latin typeface="Inter"/>
+              </a:defRPr>
+            </a:pPr>
           </a:p>
         </p:txBody>
       </p:sp>
@@ -13473,6 +13817,9 @@
               </a:defRPr>
             </a:pPr>
             <a:r>
+              <a:rPr>
+                <a:latin typeface="Inter"/>
+              </a:rPr>
               <a:t>RENDER TEST OF THE SHARED RENDERER WITH ODD BLOCKS</a:t>
             </a:r>
           </a:p>
@@ -13512,6 +13859,9 @@
               </a:defRPr>
             </a:pPr>
             <a:r>
+              <a:rPr>
+                <a:latin typeface="Inter"/>
+              </a:rPr>
               <a:t>Executive summary — continued</a:t>
             </a:r>
           </a:p>
@@ -13558,7 +13908,11 @@
           <a:bodyPr rtlCol="0" anchor="ctr"/>
           <a:lstStyle/>
           <a:p>
-            <a:pPr algn="ctr"/>
+            <a:pPr algn="ctr">
+              <a:defRPr>
+                <a:latin typeface="Inter"/>
+              </a:defRPr>
+            </a:pPr>
           </a:p>
         </p:txBody>
       </p:sp>
@@ -13603,7 +13957,11 @@
           <a:bodyPr rtlCol="0" anchor="ctr"/>
           <a:lstStyle/>
           <a:p>
-            <a:pPr algn="ctr"/>
+            <a:pPr algn="ctr">
+              <a:defRPr>
+                <a:latin typeface="Inter"/>
+              </a:defRPr>
+            </a:pPr>
           </a:p>
         </p:txBody>
       </p:sp>
@@ -13641,6 +13999,9 @@
               </a:defRPr>
             </a:pPr>
             <a:r>
+              <a:rPr>
+                <a:latin typeface="Inter"/>
+              </a:rPr>
               <a:t>01</a:t>
             </a:r>
           </a:p>
@@ -13655,7 +14016,7 @@
         <p:spPr>
           <a:xfrm>
             <a:off x="640080" y="1325880"/>
-            <a:ext cx="10908792" cy="4892040"/>
+            <a:ext cx="10908792" cy="2339495"/>
           </a:xfrm>
           <a:prstGeom prst="rect">
             <a:avLst/>
@@ -13687,7 +14048,11 @@
           <a:bodyPr rtlCol="0" anchor="ctr"/>
           <a:lstStyle/>
           <a:p>
-            <a:pPr algn="ctr"/>
+            <a:pPr algn="ctr">
+              <a:defRPr>
+                <a:latin typeface="Inter"/>
+              </a:defRPr>
+            </a:pPr>
           </a:p>
         </p:txBody>
       </p:sp>
@@ -13700,7 +14065,7 @@
         <p:spPr>
           <a:xfrm>
             <a:off x="640080" y="1325880"/>
-            <a:ext cx="54864" cy="4892040"/>
+            <a:ext cx="54864" cy="2339495"/>
           </a:xfrm>
           <a:prstGeom prst="rect">
             <a:avLst/>
@@ -13732,7 +14097,11 @@
           <a:bodyPr rtlCol="0" anchor="ctr"/>
           <a:lstStyle/>
           <a:p>
-            <a:pPr algn="ctr"/>
+            <a:pPr algn="ctr">
+              <a:defRPr>
+                <a:latin typeface="Inter"/>
+              </a:defRPr>
+            </a:pPr>
           </a:p>
         </p:txBody>
       </p:sp>
@@ -13770,7 +14139,10 @@
               </a:defRPr>
             </a:pPr>
             <a:r>
-              <a:t>Key judgment — monitoring priority</a:t>
+              <a:rPr>
+                <a:latin typeface="Inter"/>
+              </a:rPr>
+              <a:t>Key judgment — primary measure</a:t>
             </a:r>
           </a:p>
         </p:txBody>
@@ -13784,7 +14156,7 @@
         <p:spPr>
           <a:xfrm>
             <a:off x="804671" y="1719072"/>
-            <a:ext cx="10616184" cy="4407408"/>
+            <a:ext cx="10616184" cy="1854863"/>
           </a:xfrm>
           <a:prstGeom prst="rect">
             <a:avLst/>
@@ -13809,7 +14181,10 @@
               </a:defRPr>
             </a:pPr>
             <a:r>
-              <a:t>Observation: Composite is 32.4 in the TEST evidence [S3]. Why it matters: It identifies a monitoring priority. Uncertainty: Supporting detail is limited. What would change the view: Corroborated evidence that resolves or reverses the item.</a:t>
+              <a:rPr>
+                <a:latin typeface="Inter"/>
+              </a:rPr>
+              <a:t>Observation: Regulatory AUM is $12.4B in the TEST evidence [S2]. Why it matters: This measure establishes the baseline for comparing later governed results. Uncertainty: The source basis may omit newer observations outside this fixture. What would change the view: A refreshed source report showing a change above 1%.</a:t>
             </a:r>
           </a:p>
         </p:txBody>
@@ -13817,6 +14192,188 @@
       <p:sp>
         <p:nvSpPr>
           <p:cNvPr id="12" name="Rectangle 11"/>
+          <p:cNvSpPr/>
+          <p:nvPr/>
+        </p:nvSpPr>
+        <p:spPr>
+          <a:xfrm>
+            <a:off x="640080" y="3775103"/>
+            <a:ext cx="10908792" cy="2442816"/>
+          </a:xfrm>
+          <a:prstGeom prst="rect">
+            <a:avLst/>
+          </a:prstGeom>
+          <a:solidFill>
+            <a:srgbClr val="F5F7F9"/>
+          </a:solidFill>
+          <a:ln>
+            <a:solidFill>
+              <a:srgbClr val="E3E7EC"/>
+            </a:solidFill>
+          </a:ln>
+        </p:spPr>
+        <p:style>
+          <a:lnRef idx="1">
+            <a:schemeClr val="accent1"/>
+          </a:lnRef>
+          <a:fillRef idx="3">
+            <a:schemeClr val="accent1"/>
+          </a:fillRef>
+          <a:effectRef idx="2">
+            <a:schemeClr val="accent1"/>
+          </a:effectRef>
+          <a:fontRef idx="minor">
+            <a:schemeClr val="lt1"/>
+          </a:fontRef>
+        </p:style>
+        <p:txBody>
+          <a:bodyPr rtlCol="0" anchor="ctr"/>
+          <a:lstStyle/>
+          <a:p>
+            <a:pPr algn="ctr">
+              <a:defRPr>
+                <a:latin typeface="Inter"/>
+              </a:defRPr>
+            </a:pPr>
+          </a:p>
+        </p:txBody>
+      </p:sp>
+      <p:sp>
+        <p:nvSpPr>
+          <p:cNvPr id="13" name="Rectangle 12"/>
+          <p:cNvSpPr/>
+          <p:nvPr/>
+        </p:nvSpPr>
+        <p:spPr>
+          <a:xfrm>
+            <a:off x="640080" y="3775103"/>
+            <a:ext cx="54864" cy="2442816"/>
+          </a:xfrm>
+          <a:prstGeom prst="rect">
+            <a:avLst/>
+          </a:prstGeom>
+          <a:solidFill>
+            <a:srgbClr val="0D1117"/>
+          </a:solidFill>
+          <a:ln>
+            <a:solidFill>
+              <a:srgbClr val="0D1117"/>
+            </a:solidFill>
+          </a:ln>
+        </p:spPr>
+        <p:style>
+          <a:lnRef idx="1">
+            <a:schemeClr val="accent1"/>
+          </a:lnRef>
+          <a:fillRef idx="3">
+            <a:schemeClr val="accent1"/>
+          </a:fillRef>
+          <a:effectRef idx="2">
+            <a:schemeClr val="accent1"/>
+          </a:effectRef>
+          <a:fontRef idx="minor">
+            <a:schemeClr val="lt1"/>
+          </a:fontRef>
+        </p:style>
+        <p:txBody>
+          <a:bodyPr rtlCol="0" anchor="ctr"/>
+          <a:lstStyle/>
+          <a:p>
+            <a:pPr algn="ctr">
+              <a:defRPr>
+                <a:latin typeface="Inter"/>
+              </a:defRPr>
+            </a:pPr>
+          </a:p>
+        </p:txBody>
+      </p:sp>
+      <p:sp>
+        <p:nvSpPr>
+          <p:cNvPr id="14" name="TextBox 13"/>
+          <p:cNvSpPr txBox="1"/>
+          <p:nvPr/>
+        </p:nvSpPr>
+        <p:spPr>
+          <a:xfrm>
+            <a:off x="804671" y="3884831"/>
+            <a:ext cx="10616184" cy="228600"/>
+          </a:xfrm>
+          <a:prstGeom prst="rect">
+            <a:avLst/>
+          </a:prstGeom>
+          <a:noFill/>
+        </p:spPr>
+        <p:txBody>
+          <a:bodyPr wrap="none" lIns="9144" rIns="9144" tIns="9144" bIns="9144" anchor="t">
+            <a:spAutoFit/>
+          </a:bodyPr>
+          <a:lstStyle/>
+          <a:p>
+            <a:pPr algn="l">
+              <a:spcAft>
+                <a:spcPts val="0"/>
+              </a:spcAft>
+              <a:defRPr sz="1000" b="1">
+                <a:solidFill>
+                  <a:srgbClr val="0D1117"/>
+                </a:solidFill>
+                <a:latin typeface="Inter"/>
+              </a:defRPr>
+            </a:pPr>
+            <a:r>
+              <a:rPr>
+                <a:latin typeface="Inter"/>
+              </a:rPr>
+              <a:t>Key judgment — monitoring priority</a:t>
+            </a:r>
+          </a:p>
+        </p:txBody>
+      </p:sp>
+      <p:sp>
+        <p:nvSpPr>
+          <p:cNvPr id="15" name="TextBox 14"/>
+          <p:cNvSpPr txBox="1"/>
+          <p:nvPr/>
+        </p:nvSpPr>
+        <p:spPr>
+          <a:xfrm>
+            <a:off x="804671" y="4168295"/>
+            <a:ext cx="10616184" cy="1958184"/>
+          </a:xfrm>
+          <a:prstGeom prst="rect">
+            <a:avLst/>
+          </a:prstGeom>
+          <a:noFill/>
+        </p:spPr>
+        <p:txBody>
+          <a:bodyPr wrap="none" lIns="9144" rIns="9144" tIns="9144" bIns="9144" anchor="t">
+            <a:spAutoFit/>
+          </a:bodyPr>
+          <a:lstStyle/>
+          <a:p>
+            <a:pPr algn="l">
+              <a:spcAft>
+                <a:spcPts val="0"/>
+              </a:spcAft>
+              <a:defRPr sz="950" b="0">
+                <a:solidFill>
+                  <a:srgbClr val="4A5563"/>
+                </a:solidFill>
+                <a:latin typeface="Inter"/>
+              </a:defRPr>
+            </a:pPr>
+            <a:r>
+              <a:rPr>
+                <a:latin typeface="Inter"/>
+              </a:rPr>
+              <a:t>Observation: Composite is 32.4 in the TEST evidence [S3]. Why it matters: This result determines which item receives priority in the next monitoring cycle. Uncertainty: Supporting coverage may omit later filings or corroborating detail. What would change the view: A new filing or report that resolves the item or changes it by 1%.</a:t>
+            </a:r>
+          </a:p>
+        </p:txBody>
+      </p:sp>
+      <p:sp>
+        <p:nvSpPr>
+          <p:cNvPr id="16" name="Rectangle 15"/>
           <p:cNvSpPr/>
           <p:nvPr/>
         </p:nvSpPr>
@@ -13855,13 +14412,17 @@
           <a:bodyPr rtlCol="0" anchor="ctr"/>
           <a:lstStyle/>
           <a:p>
-            <a:pPr algn="ctr"/>
-          </a:p>
-        </p:txBody>
-      </p:sp>
-      <p:sp>
-        <p:nvSpPr>
-          <p:cNvPr id="13" name="TextBox 12"/>
+            <a:pPr algn="ctr">
+              <a:defRPr>
+                <a:latin typeface="Inter"/>
+              </a:defRPr>
+            </a:pPr>
+          </a:p>
+        </p:txBody>
+      </p:sp>
+      <p:sp>
+        <p:nvSpPr>
+          <p:cNvPr id="17" name="TextBox 16"/>
           <p:cNvSpPr txBox="1"/>
           <p:nvPr/>
         </p:nvSpPr>
@@ -13893,14 +14454,17 @@
               </a:defRPr>
             </a:pPr>
             <a:r>
-              <a:t>Sources: S3</a:t>
-            </a:r>
-          </a:p>
-        </p:txBody>
-      </p:sp>
-      <p:sp>
-        <p:nvSpPr>
-          <p:cNvPr id="14" name="TextBox 13"/>
+              <a:rPr>
+                <a:latin typeface="Inter"/>
+              </a:rPr>
+              <a:t>Sources: S2 · S3</a:t>
+            </a:r>
+          </a:p>
+        </p:txBody>
+      </p:sp>
+      <p:sp>
+        <p:nvSpPr>
+          <p:cNvPr id="18" name="TextBox 17"/>
           <p:cNvSpPr txBox="1"/>
           <p:nvPr/>
         </p:nvSpPr>
@@ -13932,14 +14496,17 @@
               </a:defRPr>
             </a:pPr>
             <a:r>
-              <a:t>RENDER TEST — partial sample, not a full ODD report</a:t>
-            </a:r>
-          </a:p>
-        </p:txBody>
-      </p:sp>
-      <p:sp>
-        <p:nvSpPr>
-          <p:cNvPr id="15" name="TextBox 14"/>
+              <a:rPr>
+                <a:latin typeface="Inter"/>
+              </a:rPr>
+              <a:t>RENDER TEST — partial sample, not a full ODD report · Data as of 2026-10-01 (Form ADV); 2026-08-14 (Form 13F)</a:t>
+            </a:r>
+          </a:p>
+        </p:txBody>
+      </p:sp>
+      <p:sp>
+        <p:nvSpPr>
+          <p:cNvPr id="19" name="TextBox 18"/>
           <p:cNvSpPr txBox="1"/>
           <p:nvPr/>
         </p:nvSpPr>
@@ -13971,6 +14538,9 @@
               </a:defRPr>
             </a:pPr>
             <a:r>
+              <a:rPr>
+                <a:latin typeface="Inter"/>
+              </a:rPr>
               <a:t>4</a:t>
             </a:r>
           </a:p>
@@ -14035,7 +14605,11 @@
           <a:bodyPr rtlCol="0" anchor="ctr"/>
           <a:lstStyle/>
           <a:p>
-            <a:pPr algn="ctr"/>
+            <a:pPr algn="ctr">
+              <a:defRPr>
+                <a:latin typeface="Inter"/>
+              </a:defRPr>
+            </a:pPr>
           </a:p>
         </p:txBody>
       </p:sp>
@@ -14073,6 +14647,9 @@
               </a:defRPr>
             </a:pPr>
             <a:r>
+              <a:rPr>
+                <a:latin typeface="Inter"/>
+              </a:rPr>
               <a:t>FORM ADV PART 1A, REPORT 2026-10-01</a:t>
             </a:r>
           </a:p>
@@ -14112,6 +14689,9 @@
               </a:defRPr>
             </a:pPr>
             <a:r>
+              <a:rPr>
+                <a:latin typeface="Inter"/>
+              </a:rPr>
               <a:t>Firm profile &amp; ownership</a:t>
             </a:r>
           </a:p>
@@ -14158,7 +14738,11 @@
           <a:bodyPr rtlCol="0" anchor="ctr"/>
           <a:lstStyle/>
           <a:p>
-            <a:pPr algn="ctr"/>
+            <a:pPr algn="ctr">
+              <a:defRPr>
+                <a:latin typeface="Inter"/>
+              </a:defRPr>
+            </a:pPr>
           </a:p>
         </p:txBody>
       </p:sp>
@@ -14203,7 +14787,11 @@
           <a:bodyPr rtlCol="0" anchor="ctr"/>
           <a:lstStyle/>
           <a:p>
-            <a:pPr algn="ctr"/>
+            <a:pPr algn="ctr">
+              <a:defRPr>
+                <a:latin typeface="Inter"/>
+              </a:defRPr>
+            </a:pPr>
           </a:p>
         </p:txBody>
       </p:sp>
@@ -14241,6 +14829,9 @@
               </a:defRPr>
             </a:pPr>
             <a:r>
+              <a:rPr>
+                <a:latin typeface="Inter"/>
+              </a:rPr>
               <a:t>02</a:t>
             </a:r>
           </a:p>
@@ -14255,7 +14846,7 @@
         <p:spPr>
           <a:xfrm>
             <a:off x="640080" y="1325880"/>
-            <a:ext cx="10908792" cy="1866268"/>
+            <a:ext cx="2644902" cy="4892040"/>
           </a:xfrm>
           <a:prstGeom prst="rect">
             <a:avLst/>
@@ -14287,7 +14878,11 @@
           <a:bodyPr rtlCol="0" anchor="ctr"/>
           <a:lstStyle/>
           <a:p>
-            <a:pPr algn="ctr"/>
+            <a:pPr algn="ctr">
+              <a:defRPr>
+                <a:latin typeface="Inter"/>
+              </a:defRPr>
+            </a:pPr>
           </a:p>
         </p:txBody>
       </p:sp>
@@ -14300,17 +14895,17 @@
         <p:spPr>
           <a:xfrm>
             <a:off x="640080" y="1325880"/>
-            <a:ext cx="54864" cy="1866268"/>
+            <a:ext cx="2644902" cy="45720"/>
           </a:xfrm>
           <a:prstGeom prst="rect">
             <a:avLst/>
           </a:prstGeom>
           <a:solidFill>
-            <a:srgbClr val="0D1117"/>
+            <a:srgbClr val="C6F432"/>
           </a:solidFill>
           <a:ln>
             <a:solidFill>
-              <a:srgbClr val="0D1117"/>
+              <a:srgbClr val="C6F432"/>
             </a:solidFill>
           </a:ln>
         </p:spPr>
@@ -14332,7 +14927,11 @@
           <a:bodyPr rtlCol="0" anchor="ctr"/>
           <a:lstStyle/>
           <a:p>
-            <a:pPr algn="ctr"/>
+            <a:pPr algn="ctr">
+              <a:defRPr>
+                <a:latin typeface="Inter"/>
+              </a:defRPr>
+            </a:pPr>
           </a:p>
         </p:txBody>
       </p:sp>
@@ -14344,8 +14943,8 @@
         </p:nvSpPr>
         <p:spPr>
           <a:xfrm>
-            <a:off x="804671" y="1435607"/>
-            <a:ext cx="10616184" cy="228600"/>
+            <a:off x="749808" y="1453895"/>
+            <a:ext cx="2425446" cy="201168"/>
           </a:xfrm>
           <a:prstGeom prst="rect">
             <a:avLst/>
@@ -14362,15 +14961,18 @@
               <a:spcAft>
                 <a:spcPts val="0"/>
               </a:spcAft>
-              <a:defRPr sz="1000" b="1">
-                <a:solidFill>
-                  <a:srgbClr val="0D1117"/>
-                </a:solidFill>
-                <a:latin typeface="Inter"/>
-              </a:defRPr>
-            </a:pPr>
-            <a:r>
-              <a:t>Visual evidence</a:t>
+              <a:defRPr sz="650" b="1">
+                <a:solidFill>
+                  <a:srgbClr val="4A5563"/>
+                </a:solidFill>
+                <a:latin typeface="Inter"/>
+              </a:defRPr>
+            </a:pPr>
+            <a:r>
+              <a:rPr>
+                <a:latin typeface="Inter"/>
+              </a:rPr>
+              <a:t>REGULATORY AUM</a:t>
             </a:r>
           </a:p>
         </p:txBody>
@@ -14383,8 +14985,8 @@
         </p:nvSpPr>
         <p:spPr>
           <a:xfrm>
-            <a:off x="804671" y="1719072"/>
-            <a:ext cx="10616184" cy="1381636"/>
+            <a:off x="749808" y="1709928"/>
+            <a:ext cx="2425446" cy="475488"/>
           </a:xfrm>
           <a:prstGeom prst="rect">
             <a:avLst/>
@@ -14401,7 +15003,49 @@
               <a:spcAft>
                 <a:spcPts val="0"/>
               </a:spcAft>
-              <a:defRPr sz="950" b="0">
+              <a:defRPr sz="1800" b="1">
+                <a:solidFill>
+                  <a:srgbClr val="0D1117"/>
+                </a:solidFill>
+                <a:latin typeface="Inter"/>
+              </a:defRPr>
+            </a:pPr>
+            <a:r>
+              <a:rPr>
+                <a:latin typeface="Inter"/>
+              </a:rPr>
+              <a:t>$12.4B</a:t>
+            </a:r>
+          </a:p>
+        </p:txBody>
+      </p:sp>
+      <p:sp>
+        <p:nvSpPr>
+          <p:cNvPr id="12" name="TextBox 11"/>
+          <p:cNvSpPr txBox="1"/>
+          <p:nvPr/>
+        </p:nvSpPr>
+        <p:spPr>
+          <a:xfrm>
+            <a:off x="749808" y="5888736"/>
+            <a:ext cx="2425446" cy="228600"/>
+          </a:xfrm>
+          <a:prstGeom prst="rect">
+            <a:avLst/>
+          </a:prstGeom>
+          <a:noFill/>
+        </p:spPr>
+        <p:txBody>
+          <a:bodyPr wrap="none" lIns="9144" rIns="9144" tIns="9144" bIns="9144" anchor="t">
+            <a:spAutoFit/>
+          </a:bodyPr>
+          <a:lstStyle/>
+          <a:p>
+            <a:pPr algn="l">
+              <a:spcAft>
+                <a:spcPts val="0"/>
+              </a:spcAft>
+              <a:defRPr sz="700" b="0">
                 <a:solidFill>
                   <a:srgbClr val="4A5563"/>
                 </a:solidFill>
@@ -14409,21 +15053,24 @@
               </a:defRPr>
             </a:pPr>
             <a:r>
-              <a:t>Not available — No governed visual was returned for this fictional TEST fixture.</a:t>
-            </a:r>
-          </a:p>
-        </p:txBody>
-      </p:sp>
-      <p:sp>
-        <p:nvSpPr>
-          <p:cNvPr id="12" name="Rectangle 11"/>
+              <a:rPr>
+                <a:latin typeface="Inter"/>
+              </a:rPr>
+              <a:t>Item 5.F [S1]</a:t>
+            </a:r>
+          </a:p>
+        </p:txBody>
+      </p:sp>
+      <p:sp>
+        <p:nvSpPr>
+          <p:cNvPr id="13" name="Rectangle 12"/>
           <p:cNvSpPr/>
           <p:nvPr/>
         </p:nvSpPr>
         <p:spPr>
           <a:xfrm>
-            <a:off x="640080" y="3301876"/>
-            <a:ext cx="2644902" cy="2916043"/>
+            <a:off x="3394710" y="1325880"/>
+            <a:ext cx="2644902" cy="4892040"/>
           </a:xfrm>
           <a:prstGeom prst="rect">
             <a:avLst/>
@@ -14455,19 +15102,23 @@
           <a:bodyPr rtlCol="0" anchor="ctr"/>
           <a:lstStyle/>
           <a:p>
-            <a:pPr algn="ctr"/>
-          </a:p>
-        </p:txBody>
-      </p:sp>
-      <p:sp>
-        <p:nvSpPr>
-          <p:cNvPr id="13" name="Rectangle 12"/>
+            <a:pPr algn="ctr">
+              <a:defRPr>
+                <a:latin typeface="Inter"/>
+              </a:defRPr>
+            </a:pPr>
+          </a:p>
+        </p:txBody>
+      </p:sp>
+      <p:sp>
+        <p:nvSpPr>
+          <p:cNvPr id="14" name="Rectangle 13"/>
           <p:cNvSpPr/>
           <p:nvPr/>
         </p:nvSpPr>
         <p:spPr>
           <a:xfrm>
-            <a:off x="640080" y="3301876"/>
+            <a:off x="3394710" y="1325880"/>
             <a:ext cx="2644902" cy="45720"/>
           </a:xfrm>
           <a:prstGeom prst="rect">
@@ -14500,19 +15151,23 @@
           <a:bodyPr rtlCol="0" anchor="ctr"/>
           <a:lstStyle/>
           <a:p>
-            <a:pPr algn="ctr"/>
-          </a:p>
-        </p:txBody>
-      </p:sp>
-      <p:sp>
-        <p:nvSpPr>
-          <p:cNvPr id="14" name="TextBox 13"/>
+            <a:pPr algn="ctr">
+              <a:defRPr>
+                <a:latin typeface="Inter"/>
+              </a:defRPr>
+            </a:pPr>
+          </a:p>
+        </p:txBody>
+      </p:sp>
+      <p:sp>
+        <p:nvSpPr>
+          <p:cNvPr id="15" name="TextBox 14"/>
           <p:cNvSpPr txBox="1"/>
           <p:nvPr/>
         </p:nvSpPr>
         <p:spPr>
           <a:xfrm>
-            <a:off x="749808" y="3429892"/>
+            <a:off x="3504438" y="1453895"/>
             <a:ext cx="2425446" cy="201168"/>
           </a:xfrm>
           <a:prstGeom prst="rect">
@@ -14538,20 +15193,23 @@
               </a:defRPr>
             </a:pPr>
             <a:r>
-              <a:t>REGULATORY AUM</a:t>
-            </a:r>
-          </a:p>
-        </p:txBody>
-      </p:sp>
-      <p:sp>
-        <p:nvSpPr>
-          <p:cNvPr id="15" name="TextBox 14"/>
+              <a:rPr>
+                <a:latin typeface="Inter"/>
+              </a:rPr>
+              <a:t>CLIENTS</a:t>
+            </a:r>
+          </a:p>
+        </p:txBody>
+      </p:sp>
+      <p:sp>
+        <p:nvSpPr>
+          <p:cNvPr id="16" name="TextBox 15"/>
           <p:cNvSpPr txBox="1"/>
           <p:nvPr/>
         </p:nvSpPr>
         <p:spPr>
           <a:xfrm>
-            <a:off x="749808" y="3685924"/>
+            <a:off x="3504438" y="1709928"/>
             <a:ext cx="2425446" cy="475488"/>
           </a:xfrm>
           <a:prstGeom prst="rect">
@@ -14577,20 +15235,23 @@
               </a:defRPr>
             </a:pPr>
             <a:r>
-              <a:t>$12.4B</a:t>
-            </a:r>
-          </a:p>
-        </p:txBody>
-      </p:sp>
-      <p:sp>
-        <p:nvSpPr>
-          <p:cNvPr id="16" name="TextBox 15"/>
+              <a:rPr>
+                <a:latin typeface="Inter"/>
+              </a:rPr>
+              <a:t>133</a:t>
+            </a:r>
+          </a:p>
+        </p:txBody>
+      </p:sp>
+      <p:sp>
+        <p:nvSpPr>
+          <p:cNvPr id="17" name="TextBox 16"/>
           <p:cNvSpPr txBox="1"/>
           <p:nvPr/>
         </p:nvSpPr>
         <p:spPr>
           <a:xfrm>
-            <a:off x="749808" y="5888736"/>
+            <a:off x="3504438" y="5888736"/>
             <a:ext cx="2425446" cy="228600"/>
           </a:xfrm>
           <a:prstGeom prst="rect">
@@ -14616,21 +15277,24 @@
               </a:defRPr>
             </a:pPr>
             <a:r>
-              <a:t>Item 5.F [S1]</a:t>
-            </a:r>
-          </a:p>
-        </p:txBody>
-      </p:sp>
-      <p:sp>
-        <p:nvSpPr>
-          <p:cNvPr id="17" name="Rectangle 16"/>
+              <a:rPr>
+                <a:latin typeface="Inter"/>
+              </a:rPr>
+              <a:t>ADV profile [S1]</a:t>
+            </a:r>
+          </a:p>
+        </p:txBody>
+      </p:sp>
+      <p:sp>
+        <p:nvSpPr>
+          <p:cNvPr id="18" name="Rectangle 17"/>
           <p:cNvSpPr/>
           <p:nvPr/>
         </p:nvSpPr>
         <p:spPr>
           <a:xfrm>
-            <a:off x="3394710" y="3301876"/>
-            <a:ext cx="2644902" cy="2916043"/>
+            <a:off x="6149340" y="1325880"/>
+            <a:ext cx="2644902" cy="4892040"/>
           </a:xfrm>
           <a:prstGeom prst="rect">
             <a:avLst/>
@@ -14662,19 +15326,23 @@
           <a:bodyPr rtlCol="0" anchor="ctr"/>
           <a:lstStyle/>
           <a:p>
-            <a:pPr algn="ctr"/>
-          </a:p>
-        </p:txBody>
-      </p:sp>
-      <p:sp>
-        <p:nvSpPr>
-          <p:cNvPr id="18" name="Rectangle 17"/>
+            <a:pPr algn="ctr">
+              <a:defRPr>
+                <a:latin typeface="Inter"/>
+              </a:defRPr>
+            </a:pPr>
+          </a:p>
+        </p:txBody>
+      </p:sp>
+      <p:sp>
+        <p:nvSpPr>
+          <p:cNvPr id="19" name="Rectangle 18"/>
           <p:cNvSpPr/>
           <p:nvPr/>
         </p:nvSpPr>
         <p:spPr>
           <a:xfrm>
-            <a:off x="3394710" y="3301876"/>
+            <a:off x="6149340" y="1325880"/>
             <a:ext cx="2644902" cy="45720"/>
           </a:xfrm>
           <a:prstGeom prst="rect">
@@ -14707,19 +15375,23 @@
           <a:bodyPr rtlCol="0" anchor="ctr"/>
           <a:lstStyle/>
           <a:p>
-            <a:pPr algn="ctr"/>
-          </a:p>
-        </p:txBody>
-      </p:sp>
-      <p:sp>
-        <p:nvSpPr>
-          <p:cNvPr id="19" name="TextBox 18"/>
+            <a:pPr algn="ctr">
+              <a:defRPr>
+                <a:latin typeface="Inter"/>
+              </a:defRPr>
+            </a:pPr>
+          </a:p>
+        </p:txBody>
+      </p:sp>
+      <p:sp>
+        <p:nvSpPr>
+          <p:cNvPr id="20" name="TextBox 19"/>
           <p:cNvSpPr txBox="1"/>
           <p:nvPr/>
         </p:nvSpPr>
         <p:spPr>
           <a:xfrm>
-            <a:off x="3504438" y="3429892"/>
+            <a:off x="6259068" y="1453895"/>
             <a:ext cx="2425446" cy="201168"/>
           </a:xfrm>
           <a:prstGeom prst="rect">
@@ -14745,20 +15417,23 @@
               </a:defRPr>
             </a:pPr>
             <a:r>
-              <a:t>CLIENTS</a:t>
-            </a:r>
-          </a:p>
-        </p:txBody>
-      </p:sp>
-      <p:sp>
-        <p:nvSpPr>
-          <p:cNvPr id="20" name="TextBox 19"/>
+              <a:rPr>
+                <a:latin typeface="Inter"/>
+              </a:rPr>
+              <a:t>EMPLOYEES</a:t>
+            </a:r>
+          </a:p>
+        </p:txBody>
+      </p:sp>
+      <p:sp>
+        <p:nvSpPr>
+          <p:cNvPr id="21" name="TextBox 20"/>
           <p:cNvSpPr txBox="1"/>
           <p:nvPr/>
         </p:nvSpPr>
         <p:spPr>
           <a:xfrm>
-            <a:off x="3504438" y="3685924"/>
+            <a:off x="6259068" y="1709928"/>
             <a:ext cx="2425446" cy="475488"/>
           </a:xfrm>
           <a:prstGeom prst="rect">
@@ -14784,20 +15459,23 @@
               </a:defRPr>
             </a:pPr>
             <a:r>
-              <a:t>133</a:t>
-            </a:r>
-          </a:p>
-        </p:txBody>
-      </p:sp>
-      <p:sp>
-        <p:nvSpPr>
-          <p:cNvPr id="21" name="TextBox 20"/>
+              <a:rPr>
+                <a:latin typeface="Inter"/>
+              </a:rPr>
+              <a:t>1,135</a:t>
+            </a:r>
+          </a:p>
+        </p:txBody>
+      </p:sp>
+      <p:sp>
+        <p:nvSpPr>
+          <p:cNvPr id="22" name="TextBox 21"/>
           <p:cNvSpPr txBox="1"/>
           <p:nvPr/>
         </p:nvSpPr>
         <p:spPr>
           <a:xfrm>
-            <a:off x="3504438" y="5888736"/>
+            <a:off x="6259068" y="5888736"/>
             <a:ext cx="2425446" cy="228600"/>
           </a:xfrm>
           <a:prstGeom prst="rect">
@@ -14823,6 +15501,9 @@
               </a:defRPr>
             </a:pPr>
             <a:r>
+              <a:rPr>
+                <a:latin typeface="Inter"/>
+              </a:rPr>
               <a:t>ADV profile [S1]</a:t>
             </a:r>
           </a:p>
@@ -14830,14 +15511,14 @@
       </p:sp>
       <p:sp>
         <p:nvSpPr>
-          <p:cNvPr id="22" name="Rectangle 21"/>
+          <p:cNvPr id="23" name="Rectangle 22"/>
           <p:cNvSpPr/>
           <p:nvPr/>
         </p:nvSpPr>
         <p:spPr>
           <a:xfrm>
-            <a:off x="6149340" y="3301876"/>
-            <a:ext cx="2644902" cy="2916043"/>
+            <a:off x="8903970" y="1325880"/>
+            <a:ext cx="2644902" cy="4892040"/>
           </a:xfrm>
           <a:prstGeom prst="rect">
             <a:avLst/>
@@ -14869,19 +15550,23 @@
           <a:bodyPr rtlCol="0" anchor="ctr"/>
           <a:lstStyle/>
           <a:p>
-            <a:pPr algn="ctr"/>
-          </a:p>
-        </p:txBody>
-      </p:sp>
-      <p:sp>
-        <p:nvSpPr>
-          <p:cNvPr id="23" name="Rectangle 22"/>
+            <a:pPr algn="ctr">
+              <a:defRPr>
+                <a:latin typeface="Inter"/>
+              </a:defRPr>
+            </a:pPr>
+          </a:p>
+        </p:txBody>
+      </p:sp>
+      <p:sp>
+        <p:nvSpPr>
+          <p:cNvPr id="24" name="Rectangle 23"/>
           <p:cNvSpPr/>
           <p:nvPr/>
         </p:nvSpPr>
         <p:spPr>
           <a:xfrm>
-            <a:off x="6149340" y="3301876"/>
+            <a:off x="8903970" y="1325880"/>
             <a:ext cx="2644902" cy="45720"/>
           </a:xfrm>
           <a:prstGeom prst="rect">
@@ -14914,19 +15599,23 @@
           <a:bodyPr rtlCol="0" anchor="ctr"/>
           <a:lstStyle/>
           <a:p>
-            <a:pPr algn="ctr"/>
-          </a:p>
-        </p:txBody>
-      </p:sp>
-      <p:sp>
-        <p:nvSpPr>
-          <p:cNvPr id="24" name="TextBox 23"/>
+            <a:pPr algn="ctr">
+              <a:defRPr>
+                <a:latin typeface="Inter"/>
+              </a:defRPr>
+            </a:pPr>
+          </a:p>
+        </p:txBody>
+      </p:sp>
+      <p:sp>
+        <p:nvSpPr>
+          <p:cNvPr id="25" name="TextBox 24"/>
           <p:cNvSpPr txBox="1"/>
           <p:nvPr/>
         </p:nvSpPr>
         <p:spPr>
           <a:xfrm>
-            <a:off x="6259068" y="3429892"/>
+            <a:off x="9013698" y="1453895"/>
             <a:ext cx="2425446" cy="201168"/>
           </a:xfrm>
           <a:prstGeom prst="rect">
@@ -14952,20 +15641,23 @@
               </a:defRPr>
             </a:pPr>
             <a:r>
-              <a:t>EMPLOYEES</a:t>
-            </a:r>
-          </a:p>
-        </p:txBody>
-      </p:sp>
-      <p:sp>
-        <p:nvSpPr>
-          <p:cNvPr id="25" name="TextBox 24"/>
+              <a:rPr>
+                <a:latin typeface="Inter"/>
+              </a:rPr>
+              <a:t>PRIVATE FUNDS</a:t>
+            </a:r>
+          </a:p>
+        </p:txBody>
+      </p:sp>
+      <p:sp>
+        <p:nvSpPr>
+          <p:cNvPr id="26" name="TextBox 25"/>
           <p:cNvSpPr txBox="1"/>
           <p:nvPr/>
         </p:nvSpPr>
         <p:spPr>
           <a:xfrm>
-            <a:off x="6259068" y="3685924"/>
+            <a:off x="9013698" y="1709928"/>
             <a:ext cx="2425446" cy="475488"/>
           </a:xfrm>
           <a:prstGeom prst="rect">
@@ -14991,20 +15683,23 @@
               </a:defRPr>
             </a:pPr>
             <a:r>
-              <a:t>1,135</a:t>
-            </a:r>
-          </a:p>
-        </p:txBody>
-      </p:sp>
-      <p:sp>
-        <p:nvSpPr>
-          <p:cNvPr id="26" name="TextBox 25"/>
+              <a:rPr>
+                <a:latin typeface="Inter"/>
+              </a:rPr>
+              <a:t>38</a:t>
+            </a:r>
+          </a:p>
+        </p:txBody>
+      </p:sp>
+      <p:sp>
+        <p:nvSpPr>
+          <p:cNvPr id="27" name="TextBox 26"/>
           <p:cNvSpPr txBox="1"/>
           <p:nvPr/>
         </p:nvSpPr>
         <p:spPr>
           <a:xfrm>
-            <a:off x="6259068" y="5888736"/>
+            <a:off x="9013698" y="5888736"/>
             <a:ext cx="2425446" cy="228600"/>
           </a:xfrm>
           <a:prstGeom prst="rect">
@@ -15030,221 +15725,17 @@
               </a:defRPr>
             </a:pPr>
             <a:r>
-              <a:t>ADV profile [S1]</a:t>
-            </a:r>
-          </a:p>
-        </p:txBody>
-      </p:sp>
-      <p:sp>
-        <p:nvSpPr>
-          <p:cNvPr id="27" name="Rectangle 26"/>
-          <p:cNvSpPr/>
-          <p:nvPr/>
-        </p:nvSpPr>
-        <p:spPr>
-          <a:xfrm>
-            <a:off x="8903970" y="3301876"/>
-            <a:ext cx="2644902" cy="2916043"/>
-          </a:xfrm>
-          <a:prstGeom prst="rect">
-            <a:avLst/>
-          </a:prstGeom>
-          <a:solidFill>
-            <a:srgbClr val="F5F7F9"/>
-          </a:solidFill>
-          <a:ln>
-            <a:solidFill>
-              <a:srgbClr val="E3E7EC"/>
-            </a:solidFill>
-          </a:ln>
-        </p:spPr>
-        <p:style>
-          <a:lnRef idx="1">
-            <a:schemeClr val="accent1"/>
-          </a:lnRef>
-          <a:fillRef idx="3">
-            <a:schemeClr val="accent1"/>
-          </a:fillRef>
-          <a:effectRef idx="2">
-            <a:schemeClr val="accent1"/>
-          </a:effectRef>
-          <a:fontRef idx="minor">
-            <a:schemeClr val="lt1"/>
-          </a:fontRef>
-        </p:style>
-        <p:txBody>
-          <a:bodyPr rtlCol="0" anchor="ctr"/>
-          <a:lstStyle/>
-          <a:p>
-            <a:pPr algn="ctr"/>
+              <a:rPr>
+                <a:latin typeface="Inter"/>
+              </a:rPr>
+              <a:t>Schedule D [S1]</a:t>
+            </a:r>
           </a:p>
         </p:txBody>
       </p:sp>
       <p:sp>
         <p:nvSpPr>
           <p:cNvPr id="28" name="Rectangle 27"/>
-          <p:cNvSpPr/>
-          <p:nvPr/>
-        </p:nvSpPr>
-        <p:spPr>
-          <a:xfrm>
-            <a:off x="8903970" y="3301876"/>
-            <a:ext cx="2644902" cy="45720"/>
-          </a:xfrm>
-          <a:prstGeom prst="rect">
-            <a:avLst/>
-          </a:prstGeom>
-          <a:solidFill>
-            <a:srgbClr val="C6F432"/>
-          </a:solidFill>
-          <a:ln>
-            <a:solidFill>
-              <a:srgbClr val="C6F432"/>
-            </a:solidFill>
-          </a:ln>
-        </p:spPr>
-        <p:style>
-          <a:lnRef idx="1">
-            <a:schemeClr val="accent1"/>
-          </a:lnRef>
-          <a:fillRef idx="3">
-            <a:schemeClr val="accent1"/>
-          </a:fillRef>
-          <a:effectRef idx="2">
-            <a:schemeClr val="accent1"/>
-          </a:effectRef>
-          <a:fontRef idx="minor">
-            <a:schemeClr val="lt1"/>
-          </a:fontRef>
-        </p:style>
-        <p:txBody>
-          <a:bodyPr rtlCol="0" anchor="ctr"/>
-          <a:lstStyle/>
-          <a:p>
-            <a:pPr algn="ctr"/>
-          </a:p>
-        </p:txBody>
-      </p:sp>
-      <p:sp>
-        <p:nvSpPr>
-          <p:cNvPr id="29" name="TextBox 28"/>
-          <p:cNvSpPr txBox="1"/>
-          <p:nvPr/>
-        </p:nvSpPr>
-        <p:spPr>
-          <a:xfrm>
-            <a:off x="9013698" y="3429892"/>
-            <a:ext cx="2425446" cy="201168"/>
-          </a:xfrm>
-          <a:prstGeom prst="rect">
-            <a:avLst/>
-          </a:prstGeom>
-          <a:noFill/>
-        </p:spPr>
-        <p:txBody>
-          <a:bodyPr wrap="none" lIns="9144" rIns="9144" tIns="9144" bIns="9144" anchor="t">
-            <a:spAutoFit/>
-          </a:bodyPr>
-          <a:lstStyle/>
-          <a:p>
-            <a:pPr algn="l">
-              <a:spcAft>
-                <a:spcPts val="0"/>
-              </a:spcAft>
-              <a:defRPr sz="650" b="1">
-                <a:solidFill>
-                  <a:srgbClr val="4A5563"/>
-                </a:solidFill>
-                <a:latin typeface="Inter"/>
-              </a:defRPr>
-            </a:pPr>
-            <a:r>
-              <a:t>PRIVATE FUNDS</a:t>
-            </a:r>
-          </a:p>
-        </p:txBody>
-      </p:sp>
-      <p:sp>
-        <p:nvSpPr>
-          <p:cNvPr id="30" name="TextBox 29"/>
-          <p:cNvSpPr txBox="1"/>
-          <p:nvPr/>
-        </p:nvSpPr>
-        <p:spPr>
-          <a:xfrm>
-            <a:off x="9013698" y="3685924"/>
-            <a:ext cx="2425446" cy="475488"/>
-          </a:xfrm>
-          <a:prstGeom prst="rect">
-            <a:avLst/>
-          </a:prstGeom>
-          <a:noFill/>
-        </p:spPr>
-        <p:txBody>
-          <a:bodyPr wrap="none" lIns="9144" rIns="9144" tIns="9144" bIns="9144" anchor="t">
-            <a:spAutoFit/>
-          </a:bodyPr>
-          <a:lstStyle/>
-          <a:p>
-            <a:pPr algn="l">
-              <a:spcAft>
-                <a:spcPts val="0"/>
-              </a:spcAft>
-              <a:defRPr sz="1800" b="1">
-                <a:solidFill>
-                  <a:srgbClr val="0D1117"/>
-                </a:solidFill>
-                <a:latin typeface="Inter"/>
-              </a:defRPr>
-            </a:pPr>
-            <a:r>
-              <a:t>38</a:t>
-            </a:r>
-          </a:p>
-        </p:txBody>
-      </p:sp>
-      <p:sp>
-        <p:nvSpPr>
-          <p:cNvPr id="31" name="TextBox 30"/>
-          <p:cNvSpPr txBox="1"/>
-          <p:nvPr/>
-        </p:nvSpPr>
-        <p:spPr>
-          <a:xfrm>
-            <a:off x="9013698" y="5888736"/>
-            <a:ext cx="2425446" cy="228600"/>
-          </a:xfrm>
-          <a:prstGeom prst="rect">
-            <a:avLst/>
-          </a:prstGeom>
-          <a:noFill/>
-        </p:spPr>
-        <p:txBody>
-          <a:bodyPr wrap="none" lIns="9144" rIns="9144" tIns="9144" bIns="9144" anchor="t">
-            <a:spAutoFit/>
-          </a:bodyPr>
-          <a:lstStyle/>
-          <a:p>
-            <a:pPr algn="l">
-              <a:spcAft>
-                <a:spcPts val="0"/>
-              </a:spcAft>
-              <a:defRPr sz="700" b="0">
-                <a:solidFill>
-                  <a:srgbClr val="4A5563"/>
-                </a:solidFill>
-                <a:latin typeface="Inter"/>
-              </a:defRPr>
-            </a:pPr>
-            <a:r>
-              <a:t>Schedule D [S1]</a:t>
-            </a:r>
-          </a:p>
-        </p:txBody>
-      </p:sp>
-      <p:sp>
-        <p:nvSpPr>
-          <p:cNvPr id="32" name="Rectangle 31"/>
           <p:cNvSpPr/>
           <p:nvPr/>
         </p:nvSpPr>
@@ -15283,13 +15774,17 @@
           <a:bodyPr rtlCol="0" anchor="ctr"/>
           <a:lstStyle/>
           <a:p>
-            <a:pPr algn="ctr"/>
-          </a:p>
-        </p:txBody>
-      </p:sp>
-      <p:sp>
-        <p:nvSpPr>
-          <p:cNvPr id="33" name="TextBox 32"/>
+            <a:pPr algn="ctr">
+              <a:defRPr>
+                <a:latin typeface="Inter"/>
+              </a:defRPr>
+            </a:pPr>
+          </a:p>
+        </p:txBody>
+      </p:sp>
+      <p:sp>
+        <p:nvSpPr>
+          <p:cNvPr id="29" name="TextBox 28"/>
           <p:cNvSpPr txBox="1"/>
           <p:nvPr/>
         </p:nvSpPr>
@@ -15321,6 +15816,9 @@
               </a:defRPr>
             </a:pPr>
             <a:r>
+              <a:rPr>
+                <a:latin typeface="Inter"/>
+              </a:rPr>
               <a:t>Sources: S1</a:t>
             </a:r>
           </a:p>
@@ -15328,7 +15826,7 @@
       </p:sp>
       <p:sp>
         <p:nvSpPr>
-          <p:cNvPr id="34" name="TextBox 33"/>
+          <p:cNvPr id="30" name="TextBox 29"/>
           <p:cNvSpPr txBox="1"/>
           <p:nvPr/>
         </p:nvSpPr>
@@ -15360,14 +15858,17 @@
               </a:defRPr>
             </a:pPr>
             <a:r>
-              <a:t>RENDER TEST — partial sample, not a full ODD report</a:t>
-            </a:r>
-          </a:p>
-        </p:txBody>
-      </p:sp>
-      <p:sp>
-        <p:nvSpPr>
-          <p:cNvPr id="35" name="TextBox 34"/>
+              <a:rPr>
+                <a:latin typeface="Inter"/>
+              </a:rPr>
+              <a:t>RENDER TEST — partial sample, not a full ODD report · Data as of 2026-10-01 (Form ADV); 2026-08-14 (Form 13F)</a:t>
+            </a:r>
+          </a:p>
+        </p:txBody>
+      </p:sp>
+      <p:sp>
+        <p:nvSpPr>
+          <p:cNvPr id="31" name="TextBox 30"/>
           <p:cNvSpPr txBox="1"/>
           <p:nvPr/>
         </p:nvSpPr>
@@ -15399,6 +15900,9 @@
               </a:defRPr>
             </a:pPr>
             <a:r>
+              <a:rPr>
+                <a:latin typeface="Inter"/>
+              </a:rPr>
               <a:t>5</a:t>
             </a:r>
           </a:p>
@@ -15463,7 +15967,11 @@
           <a:bodyPr rtlCol="0" anchor="ctr"/>
           <a:lstStyle/>
           <a:p>
-            <a:pPr algn="ctr"/>
+            <a:pPr algn="ctr">
+              <a:defRPr>
+                <a:latin typeface="Inter"/>
+              </a:defRPr>
+            </a:pPr>
           </a:p>
         </p:txBody>
       </p:sp>
@@ -15501,6 +16009,9 @@
               </a:defRPr>
             </a:pPr>
             <a:r>
+              <a:rPr>
+                <a:latin typeface="Inter"/>
+              </a:rPr>
               <a:t>FORM ADV PART 1A, REPORT 2026-10-01</a:t>
             </a:r>
           </a:p>
@@ -15540,6 +16051,9 @@
               </a:defRPr>
             </a:pPr>
             <a:r>
+              <a:rPr>
+                <a:latin typeface="Inter"/>
+              </a:rPr>
               <a:t>Firm profile &amp; ownership — continued</a:t>
             </a:r>
           </a:p>
@@ -15586,7 +16100,11 @@
           <a:bodyPr rtlCol="0" anchor="ctr"/>
           <a:lstStyle/>
           <a:p>
-            <a:pPr algn="ctr"/>
+            <a:pPr algn="ctr">
+              <a:defRPr>
+                <a:latin typeface="Inter"/>
+              </a:defRPr>
+            </a:pPr>
           </a:p>
         </p:txBody>
       </p:sp>
@@ -15631,7 +16149,11 @@
           <a:bodyPr rtlCol="0" anchor="ctr"/>
           <a:lstStyle/>
           <a:p>
-            <a:pPr algn="ctr"/>
+            <a:pPr algn="ctr">
+              <a:defRPr>
+                <a:latin typeface="Inter"/>
+              </a:defRPr>
+            </a:pPr>
           </a:p>
         </p:txBody>
       </p:sp>
@@ -15669,6 +16191,9 @@
               </a:defRPr>
             </a:pPr>
             <a:r>
+              <a:rPr>
+                <a:latin typeface="Inter"/>
+              </a:rPr>
               <a:t>02</a:t>
             </a:r>
           </a:p>
@@ -15708,6 +16233,9 @@
               </a:defRPr>
             </a:pPr>
             <a:r>
+              <a:rPr>
+                <a:latin typeface="Inter"/>
+              </a:rPr>
               <a:t>IDENTITY</a:t>
             </a:r>
           </a:p>
@@ -15750,6 +16278,9 @@
                         </a:defRPr>
                       </a:pPr>
                       <a:r>
+                        <a:rPr>
+                          <a:latin typeface="Inter"/>
+                        </a:rPr>
                         <a:t>Legal name</a:t>
                       </a:r>
                     </a:p>
@@ -15774,6 +16305,9 @@
                         </a:defRPr>
                       </a:pPr>
                       <a:r>
+                        <a:rPr>
+                          <a:latin typeface="Inter"/>
+                        </a:rPr>
                         <a:t>Ridgeview Example Advisors, LP (TEST) [S1]</a:t>
                       </a:r>
                     </a:p>
@@ -15800,6 +16334,9 @@
                         </a:defRPr>
                       </a:pPr>
                       <a:r>
+                        <a:rPr>
+                          <a:latin typeface="Inter"/>
+                        </a:rPr>
                         <a:t>Employees</a:t>
                       </a:r>
                     </a:p>
@@ -15824,6 +16361,9 @@
                         </a:defRPr>
                       </a:pPr>
                       <a:r>
+                        <a:rPr>
+                          <a:latin typeface="Inter"/>
+                        </a:rPr>
                         <a:t>1,135 [S1]</a:t>
                       </a:r>
                     </a:p>
@@ -15850,6 +16390,9 @@
                         </a:defRPr>
                       </a:pPr>
                       <a:r>
+                        <a:rPr>
+                          <a:latin typeface="Inter"/>
+                        </a:rPr>
                         <a:t>Accounts</a:t>
                       </a:r>
                     </a:p>
@@ -15874,6 +16417,9 @@
                         </a:defRPr>
                       </a:pPr>
                       <a:r>
+                        <a:rPr>
+                          <a:latin typeface="Inter"/>
+                        </a:rPr>
                         <a:t>133 [S1]</a:t>
                       </a:r>
                     </a:p>
@@ -15900,6 +16446,9 @@
                         </a:defRPr>
                       </a:pPr>
                       <a:r>
+                        <a:rPr>
+                          <a:latin typeface="Inter"/>
+                        </a:rPr>
                         <a:t>Custody</a:t>
                       </a:r>
                     </a:p>
@@ -15924,6 +16473,9 @@
                         </a:defRPr>
                       </a:pPr>
                       <a:r>
+                        <a:rPr>
+                          <a:latin typeface="Inter"/>
+                        </a:rPr>
                         <a:t>$127.22B [S1]</a:t>
                       </a:r>
                     </a:p>
@@ -15980,7 +16532,11 @@
           <a:bodyPr rtlCol="0" anchor="ctr"/>
           <a:lstStyle/>
           <a:p>
-            <a:pPr algn="ctr"/>
+            <a:pPr algn="ctr">
+              <a:defRPr>
+                <a:latin typeface="Inter"/>
+              </a:defRPr>
+            </a:pPr>
           </a:p>
         </p:txBody>
       </p:sp>
@@ -16018,7 +16574,10 @@
               </a:defRPr>
             </a:pPr>
             <a:r>
-              <a:t>RAUM BY CLIENT TYPE ($B)</a:t>
+              <a:rPr>
+                <a:latin typeface="Inter"/>
+              </a:rPr>
+              <a:t>REPORTED CLIENT MIX ($B)</a:t>
             </a:r>
           </a:p>
         </p:txBody>
@@ -16082,7 +16641,11 @@
           <a:bodyPr rtlCol="0" anchor="ctr"/>
           <a:lstStyle/>
           <a:p>
-            <a:pPr algn="ctr"/>
+            <a:pPr algn="ctr">
+              <a:defRPr>
+                <a:latin typeface="Inter"/>
+              </a:defRPr>
+            </a:pPr>
           </a:p>
         </p:txBody>
       </p:sp>
@@ -16120,6 +16683,9 @@
               </a:defRPr>
             </a:pPr>
             <a:r>
+              <a:rPr>
+                <a:latin typeface="Inter"/>
+              </a:rPr>
               <a:t>Sources: S1</a:t>
             </a:r>
           </a:p>
@@ -16159,7 +16725,10 @@
               </a:defRPr>
             </a:pPr>
             <a:r>
-              <a:t>RENDER TEST — partial sample, not a full ODD report</a:t>
+              <a:rPr>
+                <a:latin typeface="Inter"/>
+              </a:rPr>
+              <a:t>RENDER TEST — partial sample, not a full ODD report · Data as of 2026-10-01 (Form ADV); 2026-08-14 (Form 13F)</a:t>
             </a:r>
           </a:p>
         </p:txBody>
@@ -16198,6 +16767,9 @@
               </a:defRPr>
             </a:pPr>
             <a:r>
+              <a:rPr>
+                <a:latin typeface="Inter"/>
+              </a:rPr>
               <a:t>6</a:t>
             </a:r>
           </a:p>
@@ -16262,7 +16834,11 @@
           <a:bodyPr rtlCol="0" anchor="ctr"/>
           <a:lstStyle/>
           <a:p>
-            <a:pPr algn="ctr"/>
+            <a:pPr algn="ctr">
+              <a:defRPr>
+                <a:latin typeface="Inter"/>
+              </a:defRPr>
+            </a:pPr>
           </a:p>
         </p:txBody>
       </p:sp>
@@ -16300,6 +16876,9 @@
               </a:defRPr>
             </a:pPr>
             <a:r>
+              <a:rPr>
+                <a:latin typeface="Inter"/>
+              </a:rPr>
               <a:t>FORM ADV PART 1A, REPORT 2026-10-01</a:t>
             </a:r>
           </a:p>
@@ -16339,6 +16918,9 @@
               </a:defRPr>
             </a:pPr>
             <a:r>
+              <a:rPr>
+                <a:latin typeface="Inter"/>
+              </a:rPr>
               <a:t>Firm profile &amp; ownership — continued</a:t>
             </a:r>
           </a:p>
@@ -16385,7 +16967,11 @@
           <a:bodyPr rtlCol="0" anchor="ctr"/>
           <a:lstStyle/>
           <a:p>
-            <a:pPr algn="ctr"/>
+            <a:pPr algn="ctr">
+              <a:defRPr>
+                <a:latin typeface="Inter"/>
+              </a:defRPr>
+            </a:pPr>
           </a:p>
         </p:txBody>
       </p:sp>
@@ -16430,7 +17016,11 @@
           <a:bodyPr rtlCol="0" anchor="ctr"/>
           <a:lstStyle/>
           <a:p>
-            <a:pPr algn="ctr"/>
+            <a:pPr algn="ctr">
+              <a:defRPr>
+                <a:latin typeface="Inter"/>
+              </a:defRPr>
+            </a:pPr>
           </a:p>
         </p:txBody>
       </p:sp>
@@ -16468,6 +17058,9 @@
               </a:defRPr>
             </a:pPr>
             <a:r>
+              <a:rPr>
+                <a:latin typeface="Inter"/>
+              </a:rPr>
               <a:t>02</a:t>
             </a:r>
           </a:p>
@@ -16514,7 +17107,11 @@
           <a:bodyPr rtlCol="0" anchor="ctr"/>
           <a:lstStyle/>
           <a:p>
-            <a:pPr algn="ctr"/>
+            <a:pPr algn="ctr">
+              <a:defRPr>
+                <a:latin typeface="Inter"/>
+              </a:defRPr>
+            </a:pPr>
           </a:p>
         </p:txBody>
       </p:sp>
@@ -16559,7 +17156,11 @@
           <a:bodyPr rtlCol="0" anchor="ctr"/>
           <a:lstStyle/>
           <a:p>
-            <a:pPr algn="ctr"/>
+            <a:pPr algn="ctr">
+              <a:defRPr>
+                <a:latin typeface="Inter"/>
+              </a:defRPr>
+            </a:pPr>
           </a:p>
         </p:txBody>
       </p:sp>
@@ -16597,6 +17198,9 @@
               </a:defRPr>
             </a:pPr>
             <a:r>
+              <a:rPr>
+                <a:latin typeface="Inter"/>
+              </a:rPr>
               <a:t>Analysis — Scale frames the operating review</a:t>
             </a:r>
           </a:p>
@@ -16636,7 +17240,10 @@
               </a:defRPr>
             </a:pPr>
             <a:r>
-              <a:t>Observation: The TEST adviser reports $12.4B of RAUM and 38 private funds [S1]. Why it matters: Scale raises the importance of ownership and service-provider controls. Uncertainty: The compact…</a:t>
+              <a:rPr>
+                <a:latin typeface="Inter"/>
+              </a:rPr>
+              <a:t>Observation: The TEST adviser reports $12.4B of RAUM and 38 private funds [S1]. Why it matters: Scale raises the importance of ownership and provider controls. Uncertainty: The compact…</a:t>
             </a:r>
           </a:p>
         </p:txBody>
@@ -16682,7 +17289,11 @@
           <a:bodyPr rtlCol="0" anchor="ctr"/>
           <a:lstStyle/>
           <a:p>
-            <a:pPr algn="ctr"/>
+            <a:pPr algn="ctr">
+              <a:defRPr>
+                <a:latin typeface="Inter"/>
+              </a:defRPr>
+            </a:pPr>
           </a:p>
         </p:txBody>
       </p:sp>
@@ -16720,6 +17331,9 @@
               </a:defRPr>
             </a:pPr>
             <a:r>
+              <a:rPr>
+                <a:latin typeface="Inter"/>
+              </a:rPr>
               <a:t>Sources: S1</a:t>
             </a:r>
           </a:p>
@@ -16759,7 +17373,10 @@
               </a:defRPr>
             </a:pPr>
             <a:r>
-              <a:t>RENDER TEST — partial sample, not a full ODD report</a:t>
+              <a:rPr>
+                <a:latin typeface="Inter"/>
+              </a:rPr>
+              <a:t>RENDER TEST — partial sample, not a full ODD report · Data as of 2026-10-01 (Form ADV); 2026-08-14 (Form 13F)</a:t>
             </a:r>
           </a:p>
         </p:txBody>
@@ -16798,6 +17415,9 @@
               </a:defRPr>
             </a:pPr>
             <a:r>
+              <a:rPr>
+                <a:latin typeface="Inter"/>
+              </a:rPr>
               <a:t>7</a:t>
             </a:r>
           </a:p>
@@ -16862,7 +17482,11 @@
           <a:bodyPr rtlCol="0" anchor="ctr"/>
           <a:lstStyle/>
           <a:p>
-            <a:pPr algn="ctr"/>
+            <a:pPr algn="ctr">
+              <a:defRPr>
+                <a:latin typeface="Inter"/>
+              </a:defRPr>
+            </a:pPr>
           </a:p>
         </p:txBody>
       </p:sp>
@@ -16900,6 +17524,9 @@
               </a:defRPr>
             </a:pPr>
             <a:r>
+              <a:rPr>
+                <a:latin typeface="Inter"/>
+              </a:rPr>
               <a:t>THE FILING EVIDENCE IDENTIFIES CUSTODY AND CONFLICT ITEMS FOR REVIEW</a:t>
             </a:r>
           </a:p>
@@ -16939,6 +17566,9 @@
               </a:defRPr>
             </a:pPr>
             <a:r>
+              <a:rPr>
+                <a:latin typeface="Inter"/>
+              </a:rPr>
               <a:t>Regulatory, conflicts &amp; custody</a:t>
             </a:r>
           </a:p>
@@ -16985,7 +17615,11 @@
           <a:bodyPr rtlCol="0" anchor="ctr"/>
           <a:lstStyle/>
           <a:p>
-            <a:pPr algn="ctr"/>
+            <a:pPr algn="ctr">
+              <a:defRPr>
+                <a:latin typeface="Inter"/>
+              </a:defRPr>
+            </a:pPr>
           </a:p>
         </p:txBody>
       </p:sp>
@@ -17030,7 +17664,11 @@
           <a:bodyPr rtlCol="0" anchor="ctr"/>
           <a:lstStyle/>
           <a:p>
-            <a:pPr algn="ctr"/>
+            <a:pPr algn="ctr">
+              <a:defRPr>
+                <a:latin typeface="Inter"/>
+              </a:defRPr>
+            </a:pPr>
           </a:p>
         </p:txBody>
       </p:sp>
@@ -17068,6 +17706,9 @@
               </a:defRPr>
             </a:pPr>
             <a:r>
+              <a:rPr>
+                <a:latin typeface="Inter"/>
+              </a:rPr>
               <a:t>03</a:t>
             </a:r>
           </a:p>
@@ -17114,7 +17755,11 @@
           <a:bodyPr rtlCol="0" anchor="ctr"/>
           <a:lstStyle/>
           <a:p>
-            <a:pPr algn="ctr"/>
+            <a:pPr algn="ctr">
+              <a:defRPr>
+                <a:latin typeface="Inter"/>
+              </a:defRPr>
+            </a:pPr>
           </a:p>
         </p:txBody>
       </p:sp>
@@ -17127,6 +17772,188 @@
         <p:spPr>
           <a:xfrm>
             <a:off x="640080" y="1325880"/>
+            <a:ext cx="54864" cy="1359297"/>
+          </a:xfrm>
+          <a:prstGeom prst="rect">
+            <a:avLst/>
+          </a:prstGeom>
+          <a:solidFill>
+            <a:srgbClr val="F2A93B"/>
+          </a:solidFill>
+          <a:ln>
+            <a:solidFill>
+              <a:srgbClr val="F2A93B"/>
+            </a:solidFill>
+          </a:ln>
+        </p:spPr>
+        <p:style>
+          <a:lnRef idx="1">
+            <a:schemeClr val="accent1"/>
+          </a:lnRef>
+          <a:fillRef idx="3">
+            <a:schemeClr val="accent1"/>
+          </a:fillRef>
+          <a:effectRef idx="2">
+            <a:schemeClr val="accent1"/>
+          </a:effectRef>
+          <a:fontRef idx="minor">
+            <a:schemeClr val="lt1"/>
+          </a:fontRef>
+        </p:style>
+        <p:txBody>
+          <a:bodyPr rtlCol="0" anchor="ctr"/>
+          <a:lstStyle/>
+          <a:p>
+            <a:pPr algn="ctr">
+              <a:defRPr>
+                <a:latin typeface="Inter"/>
+              </a:defRPr>
+            </a:pPr>
+          </a:p>
+        </p:txBody>
+      </p:sp>
+      <p:sp>
+        <p:nvSpPr>
+          <p:cNvPr id="10" name="TextBox 9"/>
+          <p:cNvSpPr txBox="1"/>
+          <p:nvPr/>
+        </p:nvSpPr>
+        <p:spPr>
+          <a:xfrm>
+            <a:off x="804671" y="1435607"/>
+            <a:ext cx="10616184" cy="228600"/>
+          </a:xfrm>
+          <a:prstGeom prst="rect">
+            <a:avLst/>
+          </a:prstGeom>
+          <a:noFill/>
+        </p:spPr>
+        <p:txBody>
+          <a:bodyPr wrap="none" lIns="9144" rIns="9144" tIns="9144" bIns="9144" anchor="t">
+            <a:spAutoFit/>
+          </a:bodyPr>
+          <a:lstStyle/>
+          <a:p>
+            <a:pPr algn="l">
+              <a:spcAft>
+                <a:spcPts val="0"/>
+              </a:spcAft>
+              <a:defRPr sz="1000" b="1">
+                <a:solidFill>
+                  <a:srgbClr val="0D1117"/>
+                </a:solidFill>
+                <a:latin typeface="Inter"/>
+              </a:defRPr>
+            </a:pPr>
+            <a:r>
+              <a:rPr>
+                <a:latin typeface="Inter"/>
+              </a:rPr>
+              <a:t>Regulatory evidence unavailable</a:t>
+            </a:r>
+          </a:p>
+        </p:txBody>
+      </p:sp>
+      <p:sp>
+        <p:nvSpPr>
+          <p:cNvPr id="11" name="TextBox 10"/>
+          <p:cNvSpPr txBox="1"/>
+          <p:nvPr/>
+        </p:nvSpPr>
+        <p:spPr>
+          <a:xfrm>
+            <a:off x="804671" y="1719072"/>
+            <a:ext cx="10616184" cy="874665"/>
+          </a:xfrm>
+          <a:prstGeom prst="rect">
+            <a:avLst/>
+          </a:prstGeom>
+          <a:noFill/>
+        </p:spPr>
+        <p:txBody>
+          <a:bodyPr wrap="none" lIns="9144" rIns="9144" tIns="9144" bIns="9144" anchor="t">
+            <a:spAutoFit/>
+          </a:bodyPr>
+          <a:lstStyle/>
+          <a:p>
+            <a:pPr algn="l">
+              <a:spcAft>
+                <a:spcPts val="0"/>
+              </a:spcAft>
+              <a:defRPr sz="950" b="0">
+                <a:solidFill>
+                  <a:srgbClr val="4A5563"/>
+                </a:solidFill>
+                <a:latin typeface="Inter"/>
+              </a:defRPr>
+            </a:pPr>
+            <a:r>
+              <a:rPr>
+                <a:latin typeface="Inter"/>
+              </a:rPr>
+              <a:t>Not available — this compact TEST fixture does not return governed regulatory rows [S1].</a:t>
+            </a:r>
+          </a:p>
+        </p:txBody>
+      </p:sp>
+      <p:sp>
+        <p:nvSpPr>
+          <p:cNvPr id="12" name="Rectangle 11"/>
+          <p:cNvSpPr/>
+          <p:nvPr/>
+        </p:nvSpPr>
+        <p:spPr>
+          <a:xfrm>
+            <a:off x="640080" y="2794905"/>
+            <a:ext cx="10908792" cy="1359297"/>
+          </a:xfrm>
+          <a:prstGeom prst="rect">
+            <a:avLst/>
+          </a:prstGeom>
+          <a:solidFill>
+            <a:srgbClr val="F5F7F9"/>
+          </a:solidFill>
+          <a:ln>
+            <a:solidFill>
+              <a:srgbClr val="E3E7EC"/>
+            </a:solidFill>
+          </a:ln>
+        </p:spPr>
+        <p:style>
+          <a:lnRef idx="1">
+            <a:schemeClr val="accent1"/>
+          </a:lnRef>
+          <a:fillRef idx="3">
+            <a:schemeClr val="accent1"/>
+          </a:fillRef>
+          <a:effectRef idx="2">
+            <a:schemeClr val="accent1"/>
+          </a:effectRef>
+          <a:fontRef idx="minor">
+            <a:schemeClr val="lt1"/>
+          </a:fontRef>
+        </p:style>
+        <p:txBody>
+          <a:bodyPr rtlCol="0" anchor="ctr"/>
+          <a:lstStyle/>
+          <a:p>
+            <a:pPr algn="ctr">
+              <a:defRPr>
+                <a:latin typeface="Inter"/>
+              </a:defRPr>
+            </a:pPr>
+          </a:p>
+        </p:txBody>
+      </p:sp>
+      <p:sp>
+        <p:nvSpPr>
+          <p:cNvPr id="13" name="Rectangle 12"/>
+          <p:cNvSpPr/>
+          <p:nvPr/>
+        </p:nvSpPr>
+        <p:spPr>
+          <a:xfrm>
+            <a:off x="640080" y="2794905"/>
             <a:ext cx="54864" cy="1359297"/>
           </a:xfrm>
           <a:prstGeom prst="rect">
@@ -17159,19 +17986,23 @@
           <a:bodyPr rtlCol="0" anchor="ctr"/>
           <a:lstStyle/>
           <a:p>
-            <a:pPr algn="ctr"/>
-          </a:p>
-        </p:txBody>
-      </p:sp>
-      <p:sp>
-        <p:nvSpPr>
-          <p:cNvPr id="10" name="TextBox 9"/>
+            <a:pPr algn="ctr">
+              <a:defRPr>
+                <a:latin typeface="Inter"/>
+              </a:defRPr>
+            </a:pPr>
+          </a:p>
+        </p:txBody>
+      </p:sp>
+      <p:sp>
+        <p:nvSpPr>
+          <p:cNvPr id="14" name="TextBox 13"/>
           <p:cNvSpPr txBox="1"/>
           <p:nvPr/>
         </p:nvSpPr>
         <p:spPr>
           <a:xfrm>
-            <a:off x="804671" y="1435607"/>
+            <a:off x="804671" y="2904633"/>
             <a:ext cx="10616184" cy="228600"/>
           </a:xfrm>
           <a:prstGeom prst="rect">
@@ -17197,20 +18028,23 @@
               </a:defRPr>
             </a:pPr>
             <a:r>
-              <a:t>Visual evidence</a:t>
-            </a:r>
-          </a:p>
-        </p:txBody>
-      </p:sp>
-      <p:sp>
-        <p:nvSpPr>
-          <p:cNvPr id="11" name="TextBox 10"/>
+              <a:rPr>
+                <a:latin typeface="Inter"/>
+              </a:rPr>
+              <a:t>Not available</a:t>
+            </a:r>
+          </a:p>
+        </p:txBody>
+      </p:sp>
+      <p:sp>
+        <p:nvSpPr>
+          <p:cNvPr id="15" name="TextBox 14"/>
           <p:cNvSpPr txBox="1"/>
           <p:nvPr/>
         </p:nvSpPr>
         <p:spPr>
           <a:xfrm>
-            <a:off x="804671" y="1719072"/>
+            <a:off x="804671" y="3188097"/>
             <a:ext cx="10616184" cy="874665"/>
           </a:xfrm>
           <a:prstGeom prst="rect">
@@ -17236,21 +18070,24 @@
               </a:defRPr>
             </a:pPr>
             <a:r>
-              <a:t>Not available — No governed visual was returned for this fictional TEST fixture.</a:t>
-            </a:r>
-          </a:p>
-        </p:txBody>
-      </p:sp>
-      <p:sp>
-        <p:nvSpPr>
-          <p:cNvPr id="12" name="Rectangle 11"/>
+              <a:rPr>
+                <a:latin typeface="Inter"/>
+              </a:rPr>
+              <a:t>Not available — this compact render fixture does not include regulatory detail [S1].</a:t>
+            </a:r>
+          </a:p>
+        </p:txBody>
+      </p:sp>
+      <p:sp>
+        <p:nvSpPr>
+          <p:cNvPr id="16" name="Rectangle 15"/>
           <p:cNvSpPr/>
           <p:nvPr/>
         </p:nvSpPr>
         <p:spPr>
           <a:xfrm>
-            <a:off x="640080" y="2794905"/>
-            <a:ext cx="10908792" cy="1359297"/>
+            <a:off x="640080" y="4263930"/>
+            <a:ext cx="10908792" cy="1953989"/>
           </a:xfrm>
           <a:prstGeom prst="rect">
             <a:avLst/>
@@ -17282,175 +18119,11 @@
           <a:bodyPr rtlCol="0" anchor="ctr"/>
           <a:lstStyle/>
           <a:p>
-            <a:pPr algn="ctr"/>
-          </a:p>
-        </p:txBody>
-      </p:sp>
-      <p:sp>
-        <p:nvSpPr>
-          <p:cNvPr id="13" name="Rectangle 12"/>
-          <p:cNvSpPr/>
-          <p:nvPr/>
-        </p:nvSpPr>
-        <p:spPr>
-          <a:xfrm>
-            <a:off x="640080" y="2794905"/>
-            <a:ext cx="54864" cy="1359297"/>
-          </a:xfrm>
-          <a:prstGeom prst="rect">
-            <a:avLst/>
-          </a:prstGeom>
-          <a:solidFill>
-            <a:srgbClr val="0D1117"/>
-          </a:solidFill>
-          <a:ln>
-            <a:solidFill>
-              <a:srgbClr val="0D1117"/>
-            </a:solidFill>
-          </a:ln>
-        </p:spPr>
-        <p:style>
-          <a:lnRef idx="1">
-            <a:schemeClr val="accent1"/>
-          </a:lnRef>
-          <a:fillRef idx="3">
-            <a:schemeClr val="accent1"/>
-          </a:fillRef>
-          <a:effectRef idx="2">
-            <a:schemeClr val="accent1"/>
-          </a:effectRef>
-          <a:fontRef idx="minor">
-            <a:schemeClr val="lt1"/>
-          </a:fontRef>
-        </p:style>
-        <p:txBody>
-          <a:bodyPr rtlCol="0" anchor="ctr"/>
-          <a:lstStyle/>
-          <a:p>
-            <a:pPr algn="ctr"/>
-          </a:p>
-        </p:txBody>
-      </p:sp>
-      <p:sp>
-        <p:nvSpPr>
-          <p:cNvPr id="14" name="TextBox 13"/>
-          <p:cNvSpPr txBox="1"/>
-          <p:nvPr/>
-        </p:nvSpPr>
-        <p:spPr>
-          <a:xfrm>
-            <a:off x="804671" y="2904633"/>
-            <a:ext cx="10616184" cy="228600"/>
-          </a:xfrm>
-          <a:prstGeom prst="rect">
-            <a:avLst/>
-          </a:prstGeom>
-          <a:noFill/>
-        </p:spPr>
-        <p:txBody>
-          <a:bodyPr wrap="none" lIns="9144" rIns="9144" tIns="9144" bIns="9144" anchor="t">
-            <a:spAutoFit/>
-          </a:bodyPr>
-          <a:lstStyle/>
-          <a:p>
-            <a:pPr algn="l">
-              <a:spcAft>
-                <a:spcPts val="0"/>
-              </a:spcAft>
-              <a:defRPr sz="1000" b="1">
-                <a:solidFill>
-                  <a:srgbClr val="0D1117"/>
-                </a:solidFill>
-                <a:latin typeface="Inter"/>
-              </a:defRPr>
-            </a:pPr>
-            <a:r>
-              <a:t>Not available</a:t>
-            </a:r>
-          </a:p>
-        </p:txBody>
-      </p:sp>
-      <p:sp>
-        <p:nvSpPr>
-          <p:cNvPr id="15" name="TextBox 14"/>
-          <p:cNvSpPr txBox="1"/>
-          <p:nvPr/>
-        </p:nvSpPr>
-        <p:spPr>
-          <a:xfrm>
-            <a:off x="804671" y="3188097"/>
-            <a:ext cx="10616184" cy="874665"/>
-          </a:xfrm>
-          <a:prstGeom prst="rect">
-            <a:avLst/>
-          </a:prstGeom>
-          <a:noFill/>
-        </p:spPr>
-        <p:txBody>
-          <a:bodyPr wrap="none" lIns="9144" rIns="9144" tIns="9144" bIns="9144" anchor="t">
-            <a:spAutoFit/>
-          </a:bodyPr>
-          <a:lstStyle/>
-          <a:p>
-            <a:pPr algn="l">
-              <a:spcAft>
-                <a:spcPts val="0"/>
-              </a:spcAft>
-              <a:defRPr sz="950" b="0">
-                <a:solidFill>
-                  <a:srgbClr val="4A5563"/>
-                </a:solidFill>
-                <a:latin typeface="Inter"/>
-              </a:defRPr>
-            </a:pPr>
-            <a:r>
-              <a:t>Not available — this compact render fixture does not include regulatory detail [S1].</a:t>
-            </a:r>
-          </a:p>
-        </p:txBody>
-      </p:sp>
-      <p:sp>
-        <p:nvSpPr>
-          <p:cNvPr id="16" name="Rectangle 15"/>
-          <p:cNvSpPr/>
-          <p:nvPr/>
-        </p:nvSpPr>
-        <p:spPr>
-          <a:xfrm>
-            <a:off x="640080" y="4263930"/>
-            <a:ext cx="10908792" cy="1953989"/>
-          </a:xfrm>
-          <a:prstGeom prst="rect">
-            <a:avLst/>
-          </a:prstGeom>
-          <a:solidFill>
-            <a:srgbClr val="F5F7F9"/>
-          </a:solidFill>
-          <a:ln>
-            <a:solidFill>
-              <a:srgbClr val="E3E7EC"/>
-            </a:solidFill>
-          </a:ln>
-        </p:spPr>
-        <p:style>
-          <a:lnRef idx="1">
-            <a:schemeClr val="accent1"/>
-          </a:lnRef>
-          <a:fillRef idx="3">
-            <a:schemeClr val="accent1"/>
-          </a:fillRef>
-          <a:effectRef idx="2">
-            <a:schemeClr val="accent1"/>
-          </a:effectRef>
-          <a:fontRef idx="minor">
-            <a:schemeClr val="lt1"/>
-          </a:fontRef>
-        </p:style>
-        <p:txBody>
-          <a:bodyPr rtlCol="0" anchor="ctr"/>
-          <a:lstStyle/>
-          <a:p>
-            <a:pPr algn="ctr"/>
+            <a:pPr algn="ctr">
+              <a:defRPr>
+                <a:latin typeface="Inter"/>
+              </a:defRPr>
+            </a:pPr>
           </a:p>
         </p:txBody>
       </p:sp>
@@ -17495,7 +18168,11 @@
           <a:bodyPr rtlCol="0" anchor="ctr"/>
           <a:lstStyle/>
           <a:p>
-            <a:pPr algn="ctr"/>
+            <a:pPr algn="ctr">
+              <a:defRPr>
+                <a:latin typeface="Inter"/>
+              </a:defRPr>
+            </a:pPr>
           </a:p>
         </p:txBody>
       </p:sp>
@@ -17533,6 +18210,9 @@
               </a:defRPr>
             </a:pPr>
             <a:r>
+              <a:rPr>
+                <a:latin typeface="Inter"/>
+              </a:rPr>
               <a:t>Analysis — Regulatory detail remains an evidence gap</a:t>
             </a:r>
           </a:p>
@@ -17572,7 +18252,10 @@
               </a:defRPr>
             </a:pPr>
             <a:r>
-              <a:t>Observation: Detailed conflict and custody rows are unavailable in this compact TEST record [S1]. Why it matters: The signal cannot be read as a clean bill of health…</a:t>
+              <a:rPr>
+                <a:latin typeface="Inter"/>
+              </a:rPr>
+              <a:t>Observation: Zero detailed conflict or custody rows are available in this compact TEST record [S1]. Why it matters: The signal cannot be read as a clean bill of…</a:t>
             </a:r>
           </a:p>
         </p:txBody>
@@ -17618,7 +18301,11 @@
           <a:bodyPr rtlCol="0" anchor="ctr"/>
           <a:lstStyle/>
           <a:p>
-            <a:pPr algn="ctr"/>
+            <a:pPr algn="ctr">
+              <a:defRPr>
+                <a:latin typeface="Inter"/>
+              </a:defRPr>
+            </a:pPr>
           </a:p>
         </p:txBody>
       </p:sp>
@@ -17656,6 +18343,9 @@
               </a:defRPr>
             </a:pPr>
             <a:r>
+              <a:rPr>
+                <a:latin typeface="Inter"/>
+              </a:rPr>
               <a:t>Sources: S1</a:t>
             </a:r>
           </a:p>
@@ -17695,7 +18385,10 @@
               </a:defRPr>
             </a:pPr>
             <a:r>
-              <a:t>RENDER TEST — partial sample, not a full ODD report</a:t>
+              <a:rPr>
+                <a:latin typeface="Inter"/>
+              </a:rPr>
+              <a:t>RENDER TEST — partial sample, not a full ODD report · Data as of 2026-10-01 (Form ADV); 2026-08-14 (Form 13F)</a:t>
             </a:r>
           </a:p>
         </p:txBody>
@@ -17734,6 +18427,9 @@
               </a:defRPr>
             </a:pPr>
             <a:r>
+              <a:rPr>
+                <a:latin typeface="Inter"/>
+              </a:rPr>
               <a:t>8</a:t>
             </a:r>
           </a:p>
@@ -17798,7 +18494,11 @@
           <a:bodyPr rtlCol="0" anchor="ctr"/>
           <a:lstStyle/>
           <a:p>
-            <a:pPr algn="ctr"/>
+            <a:pPr algn="ctr">
+              <a:defRPr>
+                <a:latin typeface="Inter"/>
+              </a:defRPr>
+            </a:pPr>
           </a:p>
         </p:txBody>
       </p:sp>
@@ -17836,6 +18536,9 @@
               </a:defRPr>
             </a:pPr>
             <a:r>
+              <a:rPr>
+                <a:latin typeface="Inter"/>
+              </a:rPr>
               <a:t>GRADIENT COHORT ANALYTICS · 587 ADVISERS</a:t>
             </a:r>
           </a:p>
@@ -17875,6 +18578,9 @@
               </a:defRPr>
             </a:pPr>
             <a:r>
+              <a:rPr>
+                <a:latin typeface="Inter"/>
+              </a:rPr>
               <a:t>Peer positioning</a:t>
             </a:r>
           </a:p>
@@ -17921,7 +18627,11 @@
           <a:bodyPr rtlCol="0" anchor="ctr"/>
           <a:lstStyle/>
           <a:p>
-            <a:pPr algn="ctr"/>
+            <a:pPr algn="ctr">
+              <a:defRPr>
+                <a:latin typeface="Inter"/>
+              </a:defRPr>
+            </a:pPr>
           </a:p>
         </p:txBody>
       </p:sp>
@@ -17966,7 +18676,11 @@
           <a:bodyPr rtlCol="0" anchor="ctr"/>
           <a:lstStyle/>
           <a:p>
-            <a:pPr algn="ctr"/>
+            <a:pPr algn="ctr">
+              <a:defRPr>
+                <a:latin typeface="Inter"/>
+              </a:defRPr>
+            </a:pPr>
           </a:p>
         </p:txBody>
       </p:sp>
@@ -18004,6 +18718,9 @@
               </a:defRPr>
             </a:pPr>
             <a:r>
+              <a:rPr>
+                <a:latin typeface="Inter"/>
+              </a:rPr>
               <a:t>04</a:t>
             </a:r>
           </a:p>
@@ -18068,7 +18785,11 @@
           <a:bodyPr rtlCol="0" anchor="ctr"/>
           <a:lstStyle/>
           <a:p>
-            <a:pPr algn="ctr"/>
+            <a:pPr algn="ctr">
+              <a:defRPr>
+                <a:latin typeface="Inter"/>
+              </a:defRPr>
+            </a:pPr>
           </a:p>
         </p:txBody>
       </p:sp>
@@ -18106,6 +18827,9 @@
               </a:defRPr>
             </a:pPr>
             <a:r>
+              <a:rPr>
+                <a:latin typeface="Inter"/>
+              </a:rPr>
               <a:t>Sources: S1</a:t>
             </a:r>
           </a:p>
@@ -18145,7 +18869,10 @@
               </a:defRPr>
             </a:pPr>
             <a:r>
-              <a:t>RENDER TEST — partial sample, not a full ODD report</a:t>
+              <a:rPr>
+                <a:latin typeface="Inter"/>
+              </a:rPr>
+              <a:t>RENDER TEST — partial sample, not a full ODD report · Data as of 2026-10-01 (Form ADV); 2026-08-14 (Form 13F)</a:t>
             </a:r>
           </a:p>
         </p:txBody>
@@ -18184,6 +18911,9 @@
               </a:defRPr>
             </a:pPr>
             <a:r>
+              <a:rPr>
+                <a:latin typeface="Inter"/>
+              </a:rPr>
               <a:t>9</a:t>
             </a:r>
           </a:p>
@@ -18202,34 +18932,34 @@
   <a:themeElements>
     <a:clrScheme name="Office">
       <a:dk1>
-        <a:sysClr val="windowText" lastClr="000000"/>
+        <a:srgbClr val="0D1117"/>
       </a:dk1>
       <a:lt1>
-        <a:sysClr val="window" lastClr="FFFFFF"/>
+        <a:srgbClr val="FFFFFF"/>
       </a:lt1>
       <a:dk2>
-        <a:srgbClr val="1F497D"/>
+        <a:srgbClr val="161C24"/>
       </a:dk2>
       <a:lt2>
-        <a:srgbClr val="EEECE1"/>
+        <a:srgbClr val="F5F7F9"/>
       </a:lt2>
       <a:accent1>
-        <a:srgbClr val="4F81BD"/>
+        <a:srgbClr val="C6F432"/>
       </a:accent1>
       <a:accent2>
-        <a:srgbClr val="C0504D"/>
+        <a:srgbClr val="4F6B00"/>
       </a:accent2>
       <a:accent3>
-        <a:srgbClr val="9BBB59"/>
+        <a:srgbClr val="F2A93B"/>
       </a:accent3>
       <a:accent4>
-        <a:srgbClr val="8064A2"/>
+        <a:srgbClr val="5B8DEF"/>
       </a:accent4>
       <a:accent5>
-        <a:srgbClr val="4BACC6"/>
+        <a:srgbClr val="FF6B5E"/>
       </a:accent5>
       <a:accent6>
-        <a:srgbClr val="F79646"/>
+        <a:srgbClr val="3FB8AF"/>
       </a:accent6>
       <a:hlink>
         <a:srgbClr val="0000FF"/>

--- a/plugins/gradient-cio/assets/examples/gradient-odd-report.pptx
+++ b/plugins/gradient-cio/assets/examples/gradient-odd-report.pptx
@@ -494,6 +494,169 @@
               </a:solidFill>
             </c:spPr>
           </c:dPt>
+          <c:dLbls>
+            <c:dLbl>
+              <c:idx val="0"/>
+              <c:tx>
+                <c:rich>
+                  <a:bodyPr/>
+                  <a:lstStyle/>
+                  <a:p>
+                    <a:r>
+                      <a:rPr lang="en-US" sz="800"/>
+                      <a:t>$589M</a:t>
+                    </a:r>
+                  </a:p>
+                </c:rich>
+              </c:tx>
+              <c:dLblPos val="outEnd"/>
+              <c:showLegendKey val="0"/>
+              <c:showVal val="0"/>
+              <c:showCatName val="0"/>
+              <c:showSerName val="0"/>
+              <c:showPercent val="0"/>
+              <c:showBubbleSize val="0"/>
+            </c:dLbl>
+            <c:dLbl>
+              <c:idx val="1"/>
+              <c:tx>
+                <c:rich>
+                  <a:bodyPr/>
+                  <a:lstStyle/>
+                  <a:p>
+                    <a:r>
+                      <a:rPr lang="en-US" sz="800"/>
+                      <a:t>100%</a:t>
+                    </a:r>
+                  </a:p>
+                </c:rich>
+              </c:tx>
+              <c:dLblPos val="outEnd"/>
+              <c:showLegendKey val="0"/>
+              <c:showVal val="0"/>
+              <c:showCatName val="0"/>
+              <c:showSerName val="0"/>
+              <c:showPercent val="0"/>
+              <c:showBubbleSize val="0"/>
+            </c:dLbl>
+            <c:dLbl>
+              <c:idx val="2"/>
+              <c:tx>
+                <c:rich>
+                  <a:bodyPr/>
+                  <a:lstStyle/>
+                  <a:p>
+                    <a:r>
+                      <a:rPr lang="en-US" sz="800"/>
+                      <a:t>0</a:t>
+                    </a:r>
+                  </a:p>
+                </c:rich>
+              </c:tx>
+              <c:dLblPos val="outEnd"/>
+              <c:showLegendKey val="0"/>
+              <c:showVal val="0"/>
+              <c:showCatName val="0"/>
+              <c:showSerName val="0"/>
+              <c:showPercent val="0"/>
+              <c:showBubbleSize val="0"/>
+            </c:dLbl>
+            <c:dLbl>
+              <c:idx val="3"/>
+              <c:tx>
+                <c:rich>
+                  <a:bodyPr/>
+                  <a:lstStyle/>
+                  <a:p>
+                    <a:r>
+                      <a:rPr lang="en-US" sz="800"/>
+                      <a:t>84.7%</a:t>
+                    </a:r>
+                  </a:p>
+                </c:rich>
+              </c:tx>
+              <c:dLblPos val="outEnd"/>
+              <c:showLegendKey val="0"/>
+              <c:showVal val="0"/>
+              <c:showCatName val="0"/>
+              <c:showSerName val="0"/>
+              <c:showPercent val="0"/>
+              <c:showBubbleSize val="0"/>
+            </c:dLbl>
+            <c:dLbl>
+              <c:idx val="4"/>
+              <c:tx>
+                <c:rich>
+                  <a:bodyPr/>
+                  <a:lstStyle/>
+                  <a:p>
+                    <a:r>
+                      <a:rPr lang="en-US" sz="800"/>
+                      <a:t>84.5%</a:t>
+                    </a:r>
+                  </a:p>
+                </c:rich>
+              </c:tx>
+              <c:dLblPos val="outEnd"/>
+              <c:showLegendKey val="0"/>
+              <c:showVal val="0"/>
+              <c:showCatName val="0"/>
+              <c:showSerName val="0"/>
+              <c:showPercent val="0"/>
+              <c:showBubbleSize val="0"/>
+            </c:dLbl>
+            <c:dLbl>
+              <c:idx val="5"/>
+              <c:tx>
+                <c:rich>
+                  <a:bodyPr/>
+                  <a:lstStyle/>
+                  <a:p>
+                    <a:r>
+                      <a:rPr lang="en-US" sz="800"/>
+                      <a:t>$132M</a:t>
+                    </a:r>
+                  </a:p>
+                </c:rich>
+              </c:tx>
+              <c:dLblPos val="outEnd"/>
+              <c:showLegendKey val="0"/>
+              <c:showVal val="0"/>
+              <c:showCatName val="0"/>
+              <c:showSerName val="0"/>
+              <c:showPercent val="0"/>
+              <c:showBubbleSize val="0"/>
+            </c:dLbl>
+            <c:dLbl>
+              <c:idx val="6"/>
+              <c:tx>
+                <c:rich>
+                  <a:bodyPr/>
+                  <a:lstStyle/>
+                  <a:p>
+                    <a:r>
+                      <a:rPr lang="en-US" sz="800"/>
+                      <a:t>0.60</a:t>
+                    </a:r>
+                  </a:p>
+                </c:rich>
+              </c:tx>
+              <c:dLblPos val="outEnd"/>
+              <c:showLegendKey val="0"/>
+              <c:showVal val="0"/>
+              <c:showCatName val="0"/>
+              <c:showSerName val="0"/>
+              <c:showPercent val="0"/>
+              <c:showBubbleSize val="0"/>
+            </c:dLbl>
+            <c:dLblPos val="outEnd"/>
+            <c:showLegendKey val="0"/>
+            <c:showVal val="0"/>
+            <c:showCatName val="0"/>
+            <c:showSerName val="0"/>
+            <c:showPercent val="0"/>
+            <c:showBubbleSize val="0"/>
+          </c:dLbls>
           <c:cat>
             <c:strRef>
               <c:f>Sheet1!$A$2:$A$8</c:f>
@@ -1043,7 +1206,7 @@
           </a:p>
           <a:p>
             <a:r>
-              <a:t>Observation: The TEST adviser reports $12.4B of RAUM and 38 private funds [S1]. Why it matters: Scale raises the importance of ownership and provider controls. Uncertainty: The compact fixture omits detailed owner records. What would change the view: Corroborated ownership records changing the control assessment.</a:t>
+              <a:t>Observation: The adviser reports $12.4B of RAUM and 38 private funds [S1]. Why it matters: Scale raises the importance of ownership and provider controls. Uncertainty: The public sample omits detailed owner records. What would change the view: Corroborated ownership records changing the control assessment.</a:t>
             </a:r>
           </a:p>
         </p:txBody>
@@ -1118,7 +1281,7 @@
           </a:p>
           <a:p>
             <a:r>
-              <a:t>Observation: Zero detailed conflict or custody rows are available in this compact TEST record [S1]. Why it matters: The signal cannot be read as a clean bill of health. Uncertainty: Missing rows may contain neutral or adverse items. What would change the view: A complete validated ADV response set.</a:t>
+              <a:t>Observation: Zero detailed conflict or custody rows are available in the reviewed evidence [S1]. Why it matters: The signal cannot be read as a clean bill of health. Uncertainty: Missing rows may contain neutral or adverse items. What would change the view: A complete validated ADV response set.</a:t>
             </a:r>
           </a:p>
         </p:txBody>
@@ -1268,7 +1431,7 @@
           </a:p>
           <a:p>
             <a:r>
-              <a:t>Observation: Zero fund-level provider records appear in the compact TEST fixture [S1]. Why it matters: Independence among operating parties cannot yet be assessed. Uncertainty: Missing provider coverage is not affirmative adverse evidence. What would change the view: Validated records naming the administrator, auditor and custodian.</a:t>
+              <a:t>Observation: Zero fund-level provider records appear in the reviewed evidence [S1]. Why it matters: Independence among operating parties cannot yet be assessed. Uncertainty: Missing provider coverage is not affirmative adverse evidence. What would change the view: Validated records naming the administrator, auditor and custodian.</a:t>
             </a:r>
           </a:p>
         </p:txBody>
@@ -1343,7 +1506,7 @@
           </a:p>
           <a:p>
             <a:r>
-              <a:t>Observation: One Form 13F snapshot exists, but holding rows are omitted from this TEST fixture [S3]. Why it matters: Concentration cannot be interpreted from the summary alone. Uncertainty: Form 13F coverage is lagged and partial. What would change the view: Complete holding records plus successful identity reconciliation.</a:t>
+              <a:t>Observation: One Form 13F snapshot exists, but its holding rows are unavailable [S3]. Why it matters: Concentration cannot be interpreted from the summary alone. Uncertainty: Form 13F coverage is lagged and partial. What would change the view: Complete holding records plus successful identity reconciliation.</a:t>
             </a:r>
           </a:p>
         </p:txBody>
@@ -3688,7 +3851,7 @@
         </p:nvSpPr>
         <p:spPr>
           <a:xfrm>
-            <a:off x="685800" y="1828800"/>
+            <a:off x="685800" y="1664208"/>
             <a:ext cx="9966960" cy="274320"/>
           </a:xfrm>
           <a:prstGeom prst="rect">
@@ -3706,7 +3869,7 @@
               <a:spcAft>
                 <a:spcPts val="0"/>
               </a:spcAft>
-              <a:defRPr sz="900" b="1">
+              <a:defRPr sz="850" b="1">
                 <a:solidFill>
                   <a:srgbClr val="C6F432"/>
                 </a:solidFill>
@@ -3730,7 +3893,7 @@
         </p:nvSpPr>
         <p:spPr>
           <a:xfrm>
-            <a:off x="685800" y="2176272"/>
+            <a:off x="685800" y="2011680"/>
             <a:ext cx="9966960" cy="1234440"/>
           </a:xfrm>
           <a:prstGeom prst="rect">
@@ -3748,7 +3911,7 @@
               <a:spcAft>
                 <a:spcPts val="0"/>
               </a:spcAft>
-              <a:defRPr sz="3400" b="1">
+              <a:defRPr sz="3300" b="1">
                 <a:solidFill>
                   <a:srgbClr val="FFFFFF"/>
                 </a:solidFill>
@@ -3759,7 +3922,7 @@
               <a:rPr>
                 <a:latin typeface="Inter"/>
               </a:rPr>
-              <a:t>Ridgeview Example Advisors, LP (TEST)</a:t>
+              <a:t>Ridgeview Advisors, LP</a:t>
             </a:r>
           </a:p>
         </p:txBody>
@@ -3772,8 +3935,8 @@
         </p:nvSpPr>
         <p:spPr>
           <a:xfrm>
-            <a:off x="685800" y="3456432"/>
-            <a:ext cx="9692640" cy="640080"/>
+            <a:off x="685800" y="3273552"/>
+            <a:ext cx="9692640" cy="594360"/>
           </a:xfrm>
           <a:prstGeom prst="rect">
             <a:avLst/>
@@ -3790,7 +3953,7 @@
               <a:spcAft>
                 <a:spcPts val="0"/>
               </a:spcAft>
-              <a:defRPr sz="1500" b="0">
+              <a:defRPr sz="1400" b="0">
                 <a:solidFill>
                   <a:srgbClr val="9AA5B1"/>
                 </a:solidFill>
@@ -3801,7 +3964,7 @@
               <a:rPr>
                 <a:latin typeface="Inter"/>
               </a:rPr>
-              <a:t>Example City, ST · SEC-registered adviser · RENDER TEST</a:t>
+              <a:t>Operational due diligence review · SEC-registered adviser</a:t>
             </a:r>
           </a:p>
         </p:txBody>
@@ -3814,8 +3977,8 @@
         </p:nvSpPr>
         <p:spPr>
           <a:xfrm>
-            <a:off x="685800" y="4251960"/>
-            <a:ext cx="1005840" cy="54864"/>
+            <a:off x="685800" y="4005072"/>
+            <a:ext cx="822960" cy="45720"/>
           </a:xfrm>
           <a:prstGeom prst="rect">
             <a:avLst/>
@@ -3863,8 +4026,8 @@
         </p:nvSpPr>
         <p:spPr>
           <a:xfrm>
-            <a:off x="685800" y="4572000"/>
-            <a:ext cx="3063240" cy="182880"/>
+            <a:off x="685800" y="4315968"/>
+            <a:ext cx="4709160" cy="182880"/>
           </a:xfrm>
           <a:prstGeom prst="rect">
             <a:avLst/>
@@ -3905,8 +4068,8 @@
         </p:nvSpPr>
         <p:spPr>
           <a:xfrm>
-            <a:off x="685800" y="4773168"/>
-            <a:ext cx="3063240" cy="320040"/>
+            <a:off x="685800" y="4507992"/>
+            <a:ext cx="4709160" cy="310896"/>
           </a:xfrm>
           <a:prstGeom prst="rect">
             <a:avLst/>
@@ -3947,8 +4110,8 @@
         </p:nvSpPr>
         <p:spPr>
           <a:xfrm>
-            <a:off x="4160520" y="4572000"/>
-            <a:ext cx="3063240" cy="182880"/>
+            <a:off x="5852160" y="4315968"/>
+            <a:ext cx="4709160" cy="182880"/>
           </a:xfrm>
           <a:prstGeom prst="rect">
             <a:avLst/>
@@ -3976,7 +4139,7 @@
               <a:rPr>
                 <a:latin typeface="Inter"/>
               </a:rPr>
-              <a:t>SEC FILE NO.</a:t>
+              <a:t>REGULATORY AUM</a:t>
             </a:r>
           </a:p>
         </p:txBody>
@@ -3989,8 +4152,8 @@
         </p:nvSpPr>
         <p:spPr>
           <a:xfrm>
-            <a:off x="4160520" y="4773168"/>
-            <a:ext cx="3063240" cy="320040"/>
+            <a:off x="5852160" y="4507992"/>
+            <a:ext cx="4709160" cy="310896"/>
           </a:xfrm>
           <a:prstGeom prst="rect">
             <a:avLst/>
@@ -4018,7 +4181,7 @@
               <a:rPr>
                 <a:latin typeface="Inter"/>
               </a:rPr>
-              <a:t>801-00000</a:t>
+              <a:t>$12.40B</a:t>
             </a:r>
           </a:p>
         </p:txBody>
@@ -4031,8 +4194,8 @@
         </p:nvSpPr>
         <p:spPr>
           <a:xfrm>
-            <a:off x="7635240" y="4572000"/>
-            <a:ext cx="3063240" cy="182880"/>
+            <a:off x="685800" y="4937759"/>
+            <a:ext cx="4709160" cy="182880"/>
           </a:xfrm>
           <a:prstGeom prst="rect">
             <a:avLst/>
@@ -4060,7 +4223,7 @@
               <a:rPr>
                 <a:latin typeface="Inter"/>
               </a:rPr>
-              <a:t>REGULATORY AUM</a:t>
+              <a:t>FORM ADV REPORT</a:t>
             </a:r>
           </a:p>
         </p:txBody>
@@ -4073,8 +4236,8 @@
         </p:nvSpPr>
         <p:spPr>
           <a:xfrm>
-            <a:off x="7635240" y="4773168"/>
-            <a:ext cx="3063240" cy="320040"/>
+            <a:off x="685800" y="5129783"/>
+            <a:ext cx="4709160" cy="310896"/>
           </a:xfrm>
           <a:prstGeom prst="rect">
             <a:avLst/>
@@ -4102,7 +4265,7 @@
               <a:rPr>
                 <a:latin typeface="Inter"/>
               </a:rPr>
-              <a:t>$12.40B</a:t>
+              <a:t>2026-10-01</a:t>
             </a:r>
           </a:p>
         </p:txBody>
@@ -4115,8 +4278,8 @@
         </p:nvSpPr>
         <p:spPr>
           <a:xfrm>
-            <a:off x="685800" y="5230368"/>
-            <a:ext cx="3063240" cy="182880"/>
+            <a:off x="5852160" y="4937759"/>
+            <a:ext cx="4709160" cy="182880"/>
           </a:xfrm>
           <a:prstGeom prst="rect">
             <a:avLst/>
@@ -4144,7 +4307,7 @@
               <a:rPr>
                 <a:latin typeface="Inter"/>
               </a:rPr>
-              <a:t>FORM ADV REPORT DATE</a:t>
+              <a:t>REPORT DATE</a:t>
             </a:r>
           </a:p>
         </p:txBody>
@@ -4157,8 +4320,8 @@
         </p:nvSpPr>
         <p:spPr>
           <a:xfrm>
-            <a:off x="685800" y="5431536"/>
-            <a:ext cx="3063240" cy="320040"/>
+            <a:off x="5852160" y="5129783"/>
+            <a:ext cx="4709160" cy="310896"/>
           </a:xfrm>
           <a:prstGeom prst="rect">
             <a:avLst/>
@@ -4186,174 +4349,6 @@
               <a:rPr>
                 <a:latin typeface="Inter"/>
               </a:rPr>
-              <a:t>2026-10-01</a:t>
-            </a:r>
-          </a:p>
-        </p:txBody>
-      </p:sp>
-      <p:sp>
-        <p:nvSpPr>
-          <p:cNvPr id="17" name="TextBox 16"/>
-          <p:cNvSpPr txBox="1"/>
-          <p:nvPr/>
-        </p:nvSpPr>
-        <p:spPr>
-          <a:xfrm>
-            <a:off x="4160520" y="5230368"/>
-            <a:ext cx="3063240" cy="182880"/>
-          </a:xfrm>
-          <a:prstGeom prst="rect">
-            <a:avLst/>
-          </a:prstGeom>
-          <a:noFill/>
-        </p:spPr>
-        <p:txBody>
-          <a:bodyPr wrap="none" lIns="9144" rIns="9144" tIns="9144" bIns="9144" anchor="t">
-            <a:spAutoFit/>
-          </a:bodyPr>
-          <a:lstStyle/>
-          <a:p>
-            <a:pPr algn="l">
-              <a:spcAft>
-                <a:spcPts val="0"/>
-              </a:spcAft>
-              <a:defRPr sz="700" b="1">
-                <a:solidFill>
-                  <a:srgbClr val="8A94A1"/>
-                </a:solidFill>
-                <a:latin typeface="Inter"/>
-              </a:defRPr>
-            </a:pPr>
-            <a:r>
-              <a:rPr>
-                <a:latin typeface="Inter"/>
-              </a:rPr>
-              <a:t>PREPARED FOR</a:t>
-            </a:r>
-          </a:p>
-        </p:txBody>
-      </p:sp>
-      <p:sp>
-        <p:nvSpPr>
-          <p:cNvPr id="18" name="TextBox 17"/>
-          <p:cNvSpPr txBox="1"/>
-          <p:nvPr/>
-        </p:nvSpPr>
-        <p:spPr>
-          <a:xfrm>
-            <a:off x="4160520" y="5431536"/>
-            <a:ext cx="3063240" cy="320040"/>
-          </a:xfrm>
-          <a:prstGeom prst="rect">
-            <a:avLst/>
-          </a:prstGeom>
-          <a:noFill/>
-        </p:spPr>
-        <p:txBody>
-          <a:bodyPr wrap="none" lIns="9144" rIns="9144" tIns="9144" bIns="9144" anchor="t">
-            <a:spAutoFit/>
-          </a:bodyPr>
-          <a:lstStyle/>
-          <a:p>
-            <a:pPr algn="l">
-              <a:spcAft>
-                <a:spcPts val="0"/>
-              </a:spcAft>
-              <a:defRPr sz="1000" b="1">
-                <a:solidFill>
-                  <a:srgbClr val="FFFFFF"/>
-                </a:solidFill>
-                <a:latin typeface="Inter"/>
-              </a:defRPr>
-            </a:pPr>
-            <a:r>
-              <a:rPr>
-                <a:latin typeface="Inter"/>
-              </a:rPr>
-              <a:t>Gradient</a:t>
-            </a:r>
-          </a:p>
-        </p:txBody>
-      </p:sp>
-      <p:sp>
-        <p:nvSpPr>
-          <p:cNvPr id="19" name="TextBox 18"/>
-          <p:cNvSpPr txBox="1"/>
-          <p:nvPr/>
-        </p:nvSpPr>
-        <p:spPr>
-          <a:xfrm>
-            <a:off x="7635240" y="5230368"/>
-            <a:ext cx="3063240" cy="182880"/>
-          </a:xfrm>
-          <a:prstGeom prst="rect">
-            <a:avLst/>
-          </a:prstGeom>
-          <a:noFill/>
-        </p:spPr>
-        <p:txBody>
-          <a:bodyPr wrap="none" lIns="9144" rIns="9144" tIns="9144" bIns="9144" anchor="t">
-            <a:spAutoFit/>
-          </a:bodyPr>
-          <a:lstStyle/>
-          <a:p>
-            <a:pPr algn="l">
-              <a:spcAft>
-                <a:spcPts val="0"/>
-              </a:spcAft>
-              <a:defRPr sz="700" b="1">
-                <a:solidFill>
-                  <a:srgbClr val="8A94A1"/>
-                </a:solidFill>
-                <a:latin typeface="Inter"/>
-              </a:defRPr>
-            </a:pPr>
-            <a:r>
-              <a:rPr>
-                <a:latin typeface="Inter"/>
-              </a:rPr>
-              <a:t>REPORT DATE</a:t>
-            </a:r>
-          </a:p>
-        </p:txBody>
-      </p:sp>
-      <p:sp>
-        <p:nvSpPr>
-          <p:cNvPr id="20" name="TextBox 19"/>
-          <p:cNvSpPr txBox="1"/>
-          <p:nvPr/>
-        </p:nvSpPr>
-        <p:spPr>
-          <a:xfrm>
-            <a:off x="7635240" y="5431536"/>
-            <a:ext cx="3063240" cy="320040"/>
-          </a:xfrm>
-          <a:prstGeom prst="rect">
-            <a:avLst/>
-          </a:prstGeom>
-          <a:noFill/>
-        </p:spPr>
-        <p:txBody>
-          <a:bodyPr wrap="none" lIns="9144" rIns="9144" tIns="9144" bIns="9144" anchor="t">
-            <a:spAutoFit/>
-          </a:bodyPr>
-          <a:lstStyle/>
-          <a:p>
-            <a:pPr algn="l">
-              <a:spcAft>
-                <a:spcPts val="0"/>
-              </a:spcAft>
-              <a:defRPr sz="1000" b="1">
-                <a:solidFill>
-                  <a:srgbClr val="FFFFFF"/>
-                </a:solidFill>
-                <a:latin typeface="Inter"/>
-              </a:defRPr>
-            </a:pPr>
-            <a:r>
-              <a:rPr>
-                <a:latin typeface="Inter"/>
-              </a:rPr>
               <a:t>2026-10-04</a:t>
             </a:r>
           </a:p>
@@ -4361,14 +4356,14 @@
       </p:sp>
       <p:sp>
         <p:nvSpPr>
-          <p:cNvPr id="21" name="Rectangle 20"/>
+          <p:cNvPr id="17" name="Rectangle 16"/>
           <p:cNvSpPr/>
           <p:nvPr/>
         </p:nvSpPr>
         <p:spPr>
           <a:xfrm>
-            <a:off x="685800" y="5833872"/>
-            <a:ext cx="3063240" cy="384048"/>
+            <a:off x="685800" y="5687568"/>
+            <a:ext cx="3337560" cy="530352"/>
           </a:xfrm>
           <a:prstGeom prst="rect">
             <a:avLst/>
@@ -4410,14 +4405,140 @@
       </p:sp>
       <p:sp>
         <p:nvSpPr>
-          <p:cNvPr id="22" name="TextBox 21"/>
+          <p:cNvPr id="18" name="TextBox 17"/>
           <p:cNvSpPr txBox="1"/>
           <p:nvPr/>
         </p:nvSpPr>
         <p:spPr>
           <a:xfrm>
-            <a:off x="822960" y="5934456"/>
-            <a:ext cx="2788920" cy="164592"/>
+            <a:off x="822960" y="5760720"/>
+            <a:ext cx="3063240" cy="128016"/>
+          </a:xfrm>
+          <a:prstGeom prst="rect">
+            <a:avLst/>
+          </a:prstGeom>
+          <a:noFill/>
+        </p:spPr>
+        <p:txBody>
+          <a:bodyPr wrap="none" lIns="9144" rIns="9144" tIns="9144" bIns="9144" anchor="t">
+            <a:spAutoFit/>
+          </a:bodyPr>
+          <a:lstStyle/>
+          <a:p>
+            <a:pPr algn="l">
+              <a:spcAft>
+                <a:spcPts val="0"/>
+              </a:spcAft>
+              <a:defRPr sz="620" b="1">
+                <a:solidFill>
+                  <a:srgbClr val="0D1117"/>
+                </a:solidFill>
+                <a:latin typeface="Inter"/>
+              </a:defRPr>
+            </a:pPr>
+            <a:r>
+              <a:rPr>
+                <a:latin typeface="Inter"/>
+              </a:rPr>
+              <a:t>OVERALL VIEW</a:t>
+            </a:r>
+          </a:p>
+        </p:txBody>
+      </p:sp>
+      <p:sp>
+        <p:nvSpPr>
+          <p:cNvPr id="19" name="TextBox 18"/>
+          <p:cNvSpPr txBox="1"/>
+          <p:nvPr/>
+        </p:nvSpPr>
+        <p:spPr>
+          <a:xfrm>
+            <a:off x="822960" y="5916168"/>
+            <a:ext cx="3063240" cy="182880"/>
+          </a:xfrm>
+          <a:prstGeom prst="rect">
+            <a:avLst/>
+          </a:prstGeom>
+          <a:noFill/>
+        </p:spPr>
+        <p:txBody>
+          <a:bodyPr wrap="none" lIns="9144" rIns="9144" tIns="9144" bIns="9144" anchor="t">
+            <a:spAutoFit/>
+          </a:bodyPr>
+          <a:lstStyle/>
+          <a:p>
+            <a:pPr algn="l">
+              <a:spcAft>
+                <a:spcPts val="0"/>
+              </a:spcAft>
+              <a:defRPr sz="900" b="1">
+                <a:solidFill>
+                  <a:srgbClr val="0D1117"/>
+                </a:solidFill>
+                <a:latin typeface="Inter"/>
+              </a:defRPr>
+            </a:pPr>
+            <a:r>
+              <a:rPr>
+                <a:latin typeface="Inter"/>
+              </a:rPr>
+              <a:t>No flags identified</a:t>
+            </a:r>
+          </a:p>
+        </p:txBody>
+      </p:sp>
+      <p:sp>
+        <p:nvSpPr>
+          <p:cNvPr id="20" name="TextBox 19"/>
+          <p:cNvSpPr txBox="1"/>
+          <p:nvPr/>
+        </p:nvSpPr>
+        <p:spPr>
+          <a:xfrm>
+            <a:off x="4297680" y="5733288"/>
+            <a:ext cx="3108960" cy="164592"/>
+          </a:xfrm>
+          <a:prstGeom prst="rect">
+            <a:avLst/>
+          </a:prstGeom>
+          <a:noFill/>
+        </p:spPr>
+        <p:txBody>
+          <a:bodyPr wrap="none" lIns="9144" rIns="9144" tIns="9144" bIns="9144" anchor="t">
+            <a:spAutoFit/>
+          </a:bodyPr>
+          <a:lstStyle/>
+          <a:p>
+            <a:pPr algn="l">
+              <a:spcAft>
+                <a:spcPts val="0"/>
+              </a:spcAft>
+              <a:defRPr sz="650" b="1">
+                <a:solidFill>
+                  <a:srgbClr val="8A94A1"/>
+                </a:solidFill>
+                <a:latin typeface="Inter"/>
+              </a:defRPr>
+            </a:pPr>
+            <a:r>
+              <a:rPr>
+                <a:latin typeface="Inter"/>
+              </a:rPr>
+              <a:t>SCOPE REVIEWED</a:t>
+            </a:r>
+          </a:p>
+        </p:txBody>
+      </p:sp>
+      <p:sp>
+        <p:nvSpPr>
+          <p:cNvPr id="21" name="TextBox 20"/>
+          <p:cNvSpPr txBox="1"/>
+          <p:nvPr/>
+        </p:nvSpPr>
+        <p:spPr>
+          <a:xfrm>
+            <a:off x="4297680" y="5934456"/>
+            <a:ext cx="3108960" cy="201168"/>
           </a:xfrm>
           <a:prstGeom prst="rect">
             <a:avLst/>
@@ -4436,7 +4557,7 @@
               </a:spcAft>
               <a:defRPr sz="800" b="1">
                 <a:solidFill>
-                  <a:srgbClr val="0D1117"/>
+                  <a:srgbClr val="FFFFFF"/>
                 </a:solidFill>
                 <a:latin typeface="Inter"/>
               </a:defRPr>
@@ -4445,105 +4566,21 @@
               <a:rPr>
                 <a:latin typeface="Inter"/>
               </a:rPr>
-              <a:t>No flags identified</a:t>
-            </a:r>
-          </a:p>
-        </p:txBody>
-      </p:sp>
-      <p:sp>
-        <p:nvSpPr>
-          <p:cNvPr id="23" name="TextBox 22"/>
+              <a:t>5 of 7 · Partial</a:t>
+            </a:r>
+          </a:p>
+        </p:txBody>
+      </p:sp>
+      <p:sp>
+        <p:nvSpPr>
+          <p:cNvPr id="22" name="TextBox 21"/>
           <p:cNvSpPr txBox="1"/>
           <p:nvPr/>
         </p:nvSpPr>
         <p:spPr>
           <a:xfrm>
-            <a:off x="3977639" y="5824728"/>
-            <a:ext cx="3108960" cy="164592"/>
-          </a:xfrm>
-          <a:prstGeom prst="rect">
-            <a:avLst/>
-          </a:prstGeom>
-          <a:noFill/>
-        </p:spPr>
-        <p:txBody>
-          <a:bodyPr wrap="none" lIns="9144" rIns="9144" tIns="9144" bIns="9144" anchor="t">
-            <a:spAutoFit/>
-          </a:bodyPr>
-          <a:lstStyle/>
-          <a:p>
-            <a:pPr algn="l">
-              <a:spcAft>
-                <a:spcPts val="0"/>
-              </a:spcAft>
-              <a:defRPr sz="650" b="1">
-                <a:solidFill>
-                  <a:srgbClr val="8A94A1"/>
-                </a:solidFill>
-                <a:latin typeface="Inter"/>
-              </a:defRPr>
-            </a:pPr>
-            <a:r>
-              <a:rPr>
-                <a:latin typeface="Inter"/>
-              </a:rPr>
-              <a:t>EVIDENCE COMPLETENESS</a:t>
-            </a:r>
-          </a:p>
-        </p:txBody>
-      </p:sp>
-      <p:sp>
-        <p:nvSpPr>
-          <p:cNvPr id="24" name="TextBox 23"/>
-          <p:cNvSpPr txBox="1"/>
-          <p:nvPr/>
-        </p:nvSpPr>
-        <p:spPr>
-          <a:xfrm>
-            <a:off x="3977639" y="5998464"/>
-            <a:ext cx="3108960" cy="201168"/>
-          </a:xfrm>
-          <a:prstGeom prst="rect">
-            <a:avLst/>
-          </a:prstGeom>
-          <a:noFill/>
-        </p:spPr>
-        <p:txBody>
-          <a:bodyPr wrap="none" lIns="9144" rIns="9144" tIns="9144" bIns="9144" anchor="t">
-            <a:spAutoFit/>
-          </a:bodyPr>
-          <a:lstStyle/>
-          <a:p>
-            <a:pPr algn="l">
-              <a:spcAft>
-                <a:spcPts val="0"/>
-              </a:spcAft>
-              <a:defRPr sz="800" b="1">
-                <a:solidFill>
-                  <a:srgbClr val="FFFFFF"/>
-                </a:solidFill>
-                <a:latin typeface="Inter"/>
-              </a:defRPr>
-            </a:pPr>
-            <a:r>
-              <a:rPr>
-                <a:latin typeface="Inter"/>
-              </a:rPr>
-              <a:t>5 of 7 · Degraded</a:t>
-            </a:r>
-          </a:p>
-        </p:txBody>
-      </p:sp>
-      <p:sp>
-        <p:nvSpPr>
-          <p:cNvPr id="25" name="TextBox 24"/>
-          <p:cNvSpPr txBox="1"/>
-          <p:nvPr/>
-        </p:nvSpPr>
-        <p:spPr>
-          <a:xfrm>
-            <a:off x="685800" y="6473952"/>
-            <a:ext cx="8046720" cy="182880"/>
+            <a:off x="685800" y="6400800"/>
+            <a:ext cx="8046720" cy="146304"/>
           </a:xfrm>
           <a:prstGeom prst="rect">
             <a:avLst/>
@@ -4571,14 +4608,56 @@
               <a:rPr>
                 <a:latin typeface="Inter"/>
               </a:rPr>
-              <a:t>RENDER TEST — partial sample, not a full ODD report</a:t>
-            </a:r>
-          </a:p>
-        </p:txBody>
-      </p:sp>
-      <p:sp>
-        <p:nvSpPr>
-          <p:cNvPr id="26" name="TextBox 25"/>
+              <a:t>Confidential — operational due diligence review</a:t>
+            </a:r>
+          </a:p>
+        </p:txBody>
+      </p:sp>
+      <p:sp>
+        <p:nvSpPr>
+          <p:cNvPr id="23" name="TextBox 22"/>
+          <p:cNvSpPr txBox="1"/>
+          <p:nvPr/>
+        </p:nvSpPr>
+        <p:spPr>
+          <a:xfrm>
+            <a:off x="685800" y="6556248"/>
+            <a:ext cx="8046720" cy="128016"/>
+          </a:xfrm>
+          <a:prstGeom prst="rect">
+            <a:avLst/>
+          </a:prstGeom>
+          <a:noFill/>
+        </p:spPr>
+        <p:txBody>
+          <a:bodyPr wrap="none" lIns="9144" rIns="9144" tIns="9144" bIns="9144" anchor="t">
+            <a:spAutoFit/>
+          </a:bodyPr>
+          <a:lstStyle/>
+          <a:p>
+            <a:pPr algn="l">
+              <a:spcAft>
+                <a:spcPts val="0"/>
+              </a:spcAft>
+              <a:defRPr sz="650" b="0">
+                <a:solidFill>
+                  <a:srgbClr val="8A94A1"/>
+                </a:solidFill>
+                <a:latin typeface="Inter"/>
+              </a:defRPr>
+            </a:pPr>
+            <a:r>
+              <a:rPr>
+                <a:latin typeface="Inter"/>
+              </a:rPr>
+              <a:t>Illustrative sample · not client data</a:t>
+            </a:r>
+          </a:p>
+        </p:txBody>
+      </p:sp>
+      <p:sp>
+        <p:nvSpPr>
+          <p:cNvPr id="24" name="TextBox 23"/>
           <p:cNvSpPr txBox="1"/>
           <p:nvPr/>
         </p:nvSpPr>
@@ -4694,7 +4773,7 @@
         <p:spPr>
           <a:xfrm>
             <a:off x="640080" y="329184"/>
-            <a:ext cx="9875520" cy="182880"/>
+            <a:ext cx="5303520" cy="182880"/>
           </a:xfrm>
           <a:prstGeom prst="rect">
             <a:avLst/>
@@ -4735,6 +4814,48 @@
         </p:nvSpPr>
         <p:spPr>
           <a:xfrm>
+            <a:off x="5897880" y="310896"/>
+            <a:ext cx="4800600" cy="256032"/>
+          </a:xfrm>
+          <a:prstGeom prst="rect">
+            <a:avLst/>
+          </a:prstGeom>
+          <a:noFill/>
+        </p:spPr>
+        <p:txBody>
+          <a:bodyPr wrap="none" lIns="9144" rIns="9144" tIns="9144" bIns="9144" anchor="t">
+            <a:spAutoFit/>
+          </a:bodyPr>
+          <a:lstStyle/>
+          <a:p>
+            <a:pPr algn="r">
+              <a:spcAft>
+                <a:spcPts val="0"/>
+              </a:spcAft>
+              <a:defRPr sz="680" b="1">
+                <a:solidFill>
+                  <a:srgbClr val="4F6B00"/>
+                </a:solidFill>
+                <a:latin typeface="Inter"/>
+              </a:defRPr>
+            </a:pPr>
+            <a:r>
+              <a:rPr>
+                <a:latin typeface="Inter"/>
+              </a:rPr>
+              <a:t>Illustrative, Gradient Maintained — demo data, not the client's holdings or managers</a:t>
+            </a:r>
+          </a:p>
+        </p:txBody>
+      </p:sp>
+      <p:sp>
+        <p:nvSpPr>
+          <p:cNvPr id="5" name="TextBox 4"/>
+          <p:cNvSpPr txBox="1"/>
+          <p:nvPr/>
+        </p:nvSpPr>
+        <p:spPr>
+          <a:xfrm>
             <a:off x="640080" y="566928"/>
             <a:ext cx="10058400" cy="530352"/>
           </a:xfrm>
@@ -4771,7 +4892,7 @@
       </p:sp>
       <p:sp>
         <p:nvSpPr>
-          <p:cNvPr id="5" name="Rectangle 4"/>
+          <p:cNvPr id="6" name="Rectangle 5"/>
           <p:cNvSpPr/>
           <p:nvPr/>
         </p:nvSpPr>
@@ -4820,7 +4941,7 @@
       </p:sp>
       <p:sp>
         <p:nvSpPr>
-          <p:cNvPr id="6" name="Rectangle 5"/>
+          <p:cNvPr id="7" name="Rectangle 6"/>
           <p:cNvSpPr/>
           <p:nvPr/>
         </p:nvSpPr>
@@ -4869,7 +4990,7 @@
       </p:sp>
       <p:sp>
         <p:nvSpPr>
-          <p:cNvPr id="7" name="TextBox 6"/>
+          <p:cNvPr id="8" name="TextBox 7"/>
           <p:cNvSpPr txBox="1"/>
           <p:nvPr/>
         </p:nvSpPr>
@@ -4911,7 +5032,7 @@
       </p:sp>
       <p:sp>
         <p:nvSpPr>
-          <p:cNvPr id="8" name="Rectangle 7"/>
+          <p:cNvPr id="9" name="Rectangle 8"/>
           <p:cNvSpPr/>
           <p:nvPr/>
         </p:nvSpPr>
@@ -4960,7 +5081,7 @@
       </p:sp>
       <p:sp>
         <p:nvSpPr>
-          <p:cNvPr id="9" name="Rectangle 8"/>
+          <p:cNvPr id="10" name="Rectangle 9"/>
           <p:cNvSpPr/>
           <p:nvPr/>
         </p:nvSpPr>
@@ -5009,7 +5130,7 @@
       </p:sp>
       <p:sp>
         <p:nvSpPr>
-          <p:cNvPr id="10" name="TextBox 9"/>
+          <p:cNvPr id="11" name="TextBox 10"/>
           <p:cNvSpPr txBox="1"/>
           <p:nvPr/>
         </p:nvSpPr>
@@ -5051,7 +5172,7 @@
       </p:sp>
       <p:sp>
         <p:nvSpPr>
-          <p:cNvPr id="11" name="TextBox 10"/>
+          <p:cNvPr id="12" name="TextBox 11"/>
           <p:cNvSpPr txBox="1"/>
           <p:nvPr/>
         </p:nvSpPr>
@@ -5093,7 +5214,7 @@
       </p:sp>
       <p:sp>
         <p:nvSpPr>
-          <p:cNvPr id="12" name="Rectangle 11"/>
+          <p:cNvPr id="13" name="Rectangle 12"/>
           <p:cNvSpPr/>
           <p:nvPr/>
         </p:nvSpPr>
@@ -5142,7 +5263,7 @@
       </p:sp>
       <p:sp>
         <p:nvSpPr>
-          <p:cNvPr id="13" name="TextBox 12"/>
+          <p:cNvPr id="14" name="TextBox 13"/>
           <p:cNvSpPr txBox="1"/>
           <p:nvPr/>
         </p:nvSpPr>
@@ -5184,7 +5305,7 @@
       </p:sp>
       <p:sp>
         <p:nvSpPr>
-          <p:cNvPr id="14" name="TextBox 13"/>
+          <p:cNvPr id="15" name="TextBox 14"/>
           <p:cNvSpPr txBox="1"/>
           <p:nvPr/>
         </p:nvSpPr>
@@ -5219,14 +5340,14 @@
               <a:rPr>
                 <a:latin typeface="Inter"/>
               </a:rPr>
-              <a:t>RENDER TEST — partial sample, not a full ODD report · Data as of 2026-10-01 (Form ADV); 2026-08-14 (Form 13F)</a:t>
-            </a:r>
-          </a:p>
-        </p:txBody>
-      </p:sp>
-      <p:sp>
-        <p:nvSpPr>
-          <p:cNvPr id="15" name="TextBox 14"/>
+              <a:t>Confidential — operational due diligence review · Data as of 2026-10-01 (Form ADV); 2026-08-14 (Form 13F)</a:t>
+            </a:r>
+          </a:p>
+        </p:txBody>
+      </p:sp>
+      <p:sp>
+        <p:nvSpPr>
+          <p:cNvPr id="16" name="TextBox 15"/>
           <p:cNvSpPr txBox="1"/>
           <p:nvPr/>
         </p:nvSpPr>
@@ -5342,7 +5463,7 @@
         <p:spPr>
           <a:xfrm>
             <a:off x="640080" y="329184"/>
-            <a:ext cx="9875520" cy="182880"/>
+            <a:ext cx="5303520" cy="182880"/>
           </a:xfrm>
           <a:prstGeom prst="rect">
             <a:avLst/>
@@ -5370,7 +5491,7 @@
               <a:rPr>
                 <a:latin typeface="Inter"/>
               </a:rPr>
-              <a:t>SERVICE-PROVIDER EVIDENCE REMAINS INCOMPLETE IN THE COMPACT TEST RECORD</a:t>
+              <a:t>SERVICE-PROVIDER EVIDENCE REMAINS INCOMPLETE</a:t>
             </a:r>
           </a:p>
         </p:txBody>
@@ -5378,6 +5499,48 @@
       <p:sp>
         <p:nvSpPr>
           <p:cNvPr id="4" name="TextBox 3"/>
+          <p:cNvSpPr txBox="1"/>
+          <p:nvPr/>
+        </p:nvSpPr>
+        <p:spPr>
+          <a:xfrm>
+            <a:off x="5897880" y="310896"/>
+            <a:ext cx="4800600" cy="256032"/>
+          </a:xfrm>
+          <a:prstGeom prst="rect">
+            <a:avLst/>
+          </a:prstGeom>
+          <a:noFill/>
+        </p:spPr>
+        <p:txBody>
+          <a:bodyPr wrap="none" lIns="9144" rIns="9144" tIns="9144" bIns="9144" anchor="t">
+            <a:spAutoFit/>
+          </a:bodyPr>
+          <a:lstStyle/>
+          <a:p>
+            <a:pPr algn="r">
+              <a:spcAft>
+                <a:spcPts val="0"/>
+              </a:spcAft>
+              <a:defRPr sz="680" b="1">
+                <a:solidFill>
+                  <a:srgbClr val="4F6B00"/>
+                </a:solidFill>
+                <a:latin typeface="Inter"/>
+              </a:defRPr>
+            </a:pPr>
+            <a:r>
+              <a:rPr>
+                <a:latin typeface="Inter"/>
+              </a:rPr>
+              <a:t>Illustrative, Gradient Maintained — demo data, not the client's holdings or managers</a:t>
+            </a:r>
+          </a:p>
+        </p:txBody>
+      </p:sp>
+      <p:sp>
+        <p:nvSpPr>
+          <p:cNvPr id="5" name="TextBox 4"/>
           <p:cNvSpPr txBox="1"/>
           <p:nvPr/>
         </p:nvSpPr>
@@ -5419,7 +5582,7 @@
       </p:sp>
       <p:sp>
         <p:nvSpPr>
-          <p:cNvPr id="5" name="Rectangle 4"/>
+          <p:cNvPr id="6" name="Rectangle 5"/>
           <p:cNvSpPr/>
           <p:nvPr/>
         </p:nvSpPr>
@@ -5468,7 +5631,7 @@
       </p:sp>
       <p:sp>
         <p:nvSpPr>
-          <p:cNvPr id="6" name="Rectangle 5"/>
+          <p:cNvPr id="7" name="Rectangle 6"/>
           <p:cNvSpPr/>
           <p:nvPr/>
         </p:nvSpPr>
@@ -5517,7 +5680,7 @@
       </p:sp>
       <p:sp>
         <p:nvSpPr>
-          <p:cNvPr id="7" name="TextBox 6"/>
+          <p:cNvPr id="8" name="TextBox 7"/>
           <p:cNvSpPr txBox="1"/>
           <p:nvPr/>
         </p:nvSpPr>
@@ -5559,14 +5722,14 @@
       </p:sp>
       <p:sp>
         <p:nvSpPr>
-          <p:cNvPr id="8" name="Rectangle 7"/>
+          <p:cNvPr id="9" name="Rectangle 8"/>
           <p:cNvSpPr/>
           <p:nvPr/>
         </p:nvSpPr>
         <p:spPr>
           <a:xfrm>
             <a:off x="640080" y="1325880"/>
-            <a:ext cx="10908792" cy="1295863"/>
+            <a:ext cx="10908792" cy="1301067"/>
           </a:xfrm>
           <a:prstGeom prst="rect">
             <a:avLst/>
@@ -5608,14 +5771,14 @@
       </p:sp>
       <p:sp>
         <p:nvSpPr>
-          <p:cNvPr id="9" name="Rectangle 8"/>
+          <p:cNvPr id="10" name="Rectangle 9"/>
           <p:cNvSpPr/>
           <p:nvPr/>
         </p:nvSpPr>
         <p:spPr>
           <a:xfrm>
             <a:off x="640080" y="1325880"/>
-            <a:ext cx="54864" cy="1295863"/>
+            <a:ext cx="54864" cy="1301067"/>
           </a:xfrm>
           <a:prstGeom prst="rect">
             <a:avLst/>
@@ -5657,7 +5820,7 @@
       </p:sp>
       <p:sp>
         <p:nvSpPr>
-          <p:cNvPr id="10" name="TextBox 9"/>
+          <p:cNvPr id="11" name="TextBox 10"/>
           <p:cNvSpPr txBox="1"/>
           <p:nvPr/>
         </p:nvSpPr>
@@ -5699,14 +5862,14 @@
       </p:sp>
       <p:sp>
         <p:nvSpPr>
-          <p:cNvPr id="11" name="TextBox 10"/>
+          <p:cNvPr id="12" name="TextBox 11"/>
           <p:cNvSpPr txBox="1"/>
           <p:nvPr/>
         </p:nvSpPr>
         <p:spPr>
           <a:xfrm>
             <a:off x="804671" y="1719072"/>
-            <a:ext cx="10616184" cy="811231"/>
+            <a:ext cx="10616184" cy="816435"/>
           </a:xfrm>
           <a:prstGeom prst="rect">
             <a:avLst/>
@@ -5734,21 +5897,21 @@
               <a:rPr>
                 <a:latin typeface="Inter"/>
               </a:rPr>
-              <a:t>Not available — this compact TEST fixture does not return governed administrator, auditor or custodian rows [S1].</a:t>
-            </a:r>
-          </a:p>
-        </p:txBody>
-      </p:sp>
-      <p:sp>
-        <p:nvSpPr>
-          <p:cNvPr id="12" name="Rectangle 11"/>
+              <a:t>Not available — the reviewed evidence does not include administrator, auditor or custodian rows [S1].</a:t>
+            </a:r>
+          </a:p>
+        </p:txBody>
+      </p:sp>
+      <p:sp>
+        <p:nvSpPr>
+          <p:cNvPr id="13" name="Rectangle 12"/>
           <p:cNvSpPr/>
           <p:nvPr/>
         </p:nvSpPr>
         <p:spPr>
           <a:xfrm>
-            <a:off x="640080" y="2731471"/>
-            <a:ext cx="10908792" cy="1295863"/>
+            <a:off x="640080" y="2736675"/>
+            <a:ext cx="10908792" cy="1301067"/>
           </a:xfrm>
           <a:prstGeom prst="rect">
             <a:avLst/>
@@ -5790,14 +5953,14 @@
       </p:sp>
       <p:sp>
         <p:nvSpPr>
-          <p:cNvPr id="13" name="Rectangle 12"/>
+          <p:cNvPr id="14" name="Rectangle 13"/>
           <p:cNvSpPr/>
           <p:nvPr/>
         </p:nvSpPr>
         <p:spPr>
           <a:xfrm>
-            <a:off x="640080" y="2731471"/>
-            <a:ext cx="54864" cy="1295863"/>
+            <a:off x="640080" y="2736675"/>
+            <a:ext cx="54864" cy="1301067"/>
           </a:xfrm>
           <a:prstGeom prst="rect">
             <a:avLst/>
@@ -5839,13 +6002,13 @@
       </p:sp>
       <p:sp>
         <p:nvSpPr>
-          <p:cNvPr id="14" name="TextBox 13"/>
+          <p:cNvPr id="15" name="TextBox 14"/>
           <p:cNvSpPr txBox="1"/>
           <p:nvPr/>
         </p:nvSpPr>
         <p:spPr>
           <a:xfrm>
-            <a:off x="804671" y="2841199"/>
+            <a:off x="804671" y="2846403"/>
             <a:ext cx="10616184" cy="228600"/>
           </a:xfrm>
           <a:prstGeom prst="rect">
@@ -5881,14 +6044,14 @@
       </p:sp>
       <p:sp>
         <p:nvSpPr>
-          <p:cNvPr id="15" name="TextBox 14"/>
+          <p:cNvPr id="16" name="TextBox 15"/>
           <p:cNvSpPr txBox="1"/>
           <p:nvPr/>
         </p:nvSpPr>
         <p:spPr>
           <a:xfrm>
-            <a:off x="804671" y="3124663"/>
-            <a:ext cx="10616184" cy="811231"/>
+            <a:off x="804671" y="3129867"/>
+            <a:ext cx="10616184" cy="816435"/>
           </a:xfrm>
           <a:prstGeom prst="rect">
             <a:avLst/>
@@ -5916,21 +6079,21 @@
               <a:rPr>
                 <a:latin typeface="Inter"/>
               </a:rPr>
-              <a:t>Not available — this compact render fixture omits fund operations [S1].</a:t>
-            </a:r>
-          </a:p>
-        </p:txBody>
-      </p:sp>
-      <p:sp>
-        <p:nvSpPr>
-          <p:cNvPr id="16" name="Rectangle 15"/>
+              <a:t>Not available — fund-operations detail was not included in the reviewed evidence [S1].</a:t>
+            </a:r>
+          </a:p>
+        </p:txBody>
+      </p:sp>
+      <p:sp>
+        <p:nvSpPr>
+          <p:cNvPr id="17" name="Rectangle 16"/>
           <p:cNvSpPr/>
           <p:nvPr/>
         </p:nvSpPr>
         <p:spPr>
           <a:xfrm>
-            <a:off x="640080" y="4137062"/>
-            <a:ext cx="10908792" cy="2080857"/>
+            <a:off x="640080" y="4147471"/>
+            <a:ext cx="10908792" cy="2070448"/>
           </a:xfrm>
           <a:prstGeom prst="rect">
             <a:avLst/>
@@ -5972,14 +6135,14 @@
       </p:sp>
       <p:sp>
         <p:nvSpPr>
-          <p:cNvPr id="17" name="Rectangle 16"/>
+          <p:cNvPr id="18" name="Rectangle 17"/>
           <p:cNvSpPr/>
           <p:nvPr/>
         </p:nvSpPr>
         <p:spPr>
           <a:xfrm>
-            <a:off x="640080" y="4137062"/>
-            <a:ext cx="54864" cy="2080857"/>
+            <a:off x="640080" y="4147471"/>
+            <a:ext cx="54864" cy="2070448"/>
           </a:xfrm>
           <a:prstGeom prst="rect">
             <a:avLst/>
@@ -6021,13 +6184,13 @@
       </p:sp>
       <p:sp>
         <p:nvSpPr>
-          <p:cNvPr id="18" name="TextBox 17"/>
+          <p:cNvPr id="19" name="TextBox 18"/>
           <p:cNvSpPr txBox="1"/>
           <p:nvPr/>
         </p:nvSpPr>
         <p:spPr>
           <a:xfrm>
-            <a:off x="804671" y="4246790"/>
+            <a:off x="804671" y="4257199"/>
             <a:ext cx="10616184" cy="228600"/>
           </a:xfrm>
           <a:prstGeom prst="rect">
@@ -6063,14 +6226,14 @@
       </p:sp>
       <p:sp>
         <p:nvSpPr>
-          <p:cNvPr id="19" name="TextBox 18"/>
+          <p:cNvPr id="20" name="TextBox 19"/>
           <p:cNvSpPr txBox="1"/>
           <p:nvPr/>
         </p:nvSpPr>
         <p:spPr>
           <a:xfrm>
-            <a:off x="804671" y="4530254"/>
-            <a:ext cx="10616184" cy="1596225"/>
+            <a:off x="804671" y="4540663"/>
+            <a:ext cx="10616184" cy="1585816"/>
           </a:xfrm>
           <a:prstGeom prst="rect">
             <a:avLst/>
@@ -6098,14 +6261,14 @@
               <a:rPr>
                 <a:latin typeface="Inter"/>
               </a:rPr>
-              <a:t>Observation: Zero fund-level provider records appear in the compact TEST fixture [S1]. Why it matters: Independence among operating parties cannot yet be assessed. Uncertainty: Missing provider coverage is…</a:t>
-            </a:r>
-          </a:p>
-        </p:txBody>
-      </p:sp>
-      <p:sp>
-        <p:nvSpPr>
-          <p:cNvPr id="20" name="Rectangle 19"/>
+              <a:t>Observation: Zero fund-level provider records appear in the reviewed evidence [S1]. Why it matters: Independence among operating parties cannot yet be assessed. Uncertainty: Missing provider coverage is not…</a:t>
+            </a:r>
+          </a:p>
+        </p:txBody>
+      </p:sp>
+      <p:sp>
+        <p:nvSpPr>
+          <p:cNvPr id="21" name="Rectangle 20"/>
           <p:cNvSpPr/>
           <p:nvPr/>
         </p:nvSpPr>
@@ -6154,7 +6317,7 @@
       </p:sp>
       <p:sp>
         <p:nvSpPr>
-          <p:cNvPr id="21" name="TextBox 20"/>
+          <p:cNvPr id="22" name="TextBox 21"/>
           <p:cNvSpPr txBox="1"/>
           <p:nvPr/>
         </p:nvSpPr>
@@ -6196,7 +6359,7 @@
       </p:sp>
       <p:sp>
         <p:nvSpPr>
-          <p:cNvPr id="22" name="TextBox 21"/>
+          <p:cNvPr id="23" name="TextBox 22"/>
           <p:cNvSpPr txBox="1"/>
           <p:nvPr/>
         </p:nvSpPr>
@@ -6231,14 +6394,14 @@
               <a:rPr>
                 <a:latin typeface="Inter"/>
               </a:rPr>
-              <a:t>RENDER TEST — partial sample, not a full ODD report · Data as of 2026-10-01 (Form ADV); 2026-08-14 (Form 13F)</a:t>
-            </a:r>
-          </a:p>
-        </p:txBody>
-      </p:sp>
-      <p:sp>
-        <p:nvSpPr>
-          <p:cNvPr id="23" name="TextBox 22"/>
+              <a:t>Confidential — operational due diligence review · Data as of 2026-10-01 (Form ADV); 2026-08-14 (Form 13F)</a:t>
+            </a:r>
+          </a:p>
+        </p:txBody>
+      </p:sp>
+      <p:sp>
+        <p:nvSpPr>
+          <p:cNvPr id="24" name="TextBox 23"/>
           <p:cNvSpPr txBox="1"/>
           <p:nvPr/>
         </p:nvSpPr>
@@ -6354,7 +6517,7 @@
         <p:spPr>
           <a:xfrm>
             <a:off x="640080" y="329184"/>
-            <a:ext cx="9875520" cy="182880"/>
+            <a:ext cx="5303520" cy="182880"/>
           </a:xfrm>
           <a:prstGeom prst="rect">
             <a:avLst/>
@@ -6395,6 +6558,48 @@
         </p:nvSpPr>
         <p:spPr>
           <a:xfrm>
+            <a:off x="5897880" y="310896"/>
+            <a:ext cx="4800600" cy="256032"/>
+          </a:xfrm>
+          <a:prstGeom prst="rect">
+            <a:avLst/>
+          </a:prstGeom>
+          <a:noFill/>
+        </p:spPr>
+        <p:txBody>
+          <a:bodyPr wrap="none" lIns="9144" rIns="9144" tIns="9144" bIns="9144" anchor="t">
+            <a:spAutoFit/>
+          </a:bodyPr>
+          <a:lstStyle/>
+          <a:p>
+            <a:pPr algn="r">
+              <a:spcAft>
+                <a:spcPts val="0"/>
+              </a:spcAft>
+              <a:defRPr sz="680" b="1">
+                <a:solidFill>
+                  <a:srgbClr val="4F6B00"/>
+                </a:solidFill>
+                <a:latin typeface="Inter"/>
+              </a:defRPr>
+            </a:pPr>
+            <a:r>
+              <a:rPr>
+                <a:latin typeface="Inter"/>
+              </a:rPr>
+              <a:t>Illustrative, Gradient Maintained — demo data, not the client's holdings or managers</a:t>
+            </a:r>
+          </a:p>
+        </p:txBody>
+      </p:sp>
+      <p:sp>
+        <p:nvSpPr>
+          <p:cNvPr id="5" name="TextBox 4"/>
+          <p:cNvSpPr txBox="1"/>
+          <p:nvPr/>
+        </p:nvSpPr>
+        <p:spPr>
+          <a:xfrm>
             <a:off x="640080" y="566928"/>
             <a:ext cx="10058400" cy="530352"/>
           </a:xfrm>
@@ -6431,7 +6636,7 @@
       </p:sp>
       <p:sp>
         <p:nvSpPr>
-          <p:cNvPr id="5" name="Rectangle 4"/>
+          <p:cNvPr id="6" name="Rectangle 5"/>
           <p:cNvSpPr/>
           <p:nvPr/>
         </p:nvSpPr>
@@ -6480,7 +6685,7 @@
       </p:sp>
       <p:sp>
         <p:nvSpPr>
-          <p:cNvPr id="6" name="Rectangle 5"/>
+          <p:cNvPr id="7" name="Rectangle 6"/>
           <p:cNvSpPr/>
           <p:nvPr/>
         </p:nvSpPr>
@@ -6529,7 +6734,7 @@
       </p:sp>
       <p:sp>
         <p:nvSpPr>
-          <p:cNvPr id="7" name="TextBox 6"/>
+          <p:cNvPr id="8" name="TextBox 7"/>
           <p:cNvSpPr txBox="1"/>
           <p:nvPr/>
         </p:nvSpPr>
@@ -6571,14 +6776,14 @@
       </p:sp>
       <p:sp>
         <p:nvSpPr>
-          <p:cNvPr id="8" name="Rectangle 7"/>
+          <p:cNvPr id="9" name="Rectangle 8"/>
           <p:cNvSpPr/>
           <p:nvPr/>
         </p:nvSpPr>
         <p:spPr>
           <a:xfrm>
             <a:off x="640080" y="1325880"/>
-            <a:ext cx="10908792" cy="1313374"/>
+            <a:ext cx="10908792" cy="1340548"/>
           </a:xfrm>
           <a:prstGeom prst="rect">
             <a:avLst/>
@@ -6620,14 +6825,14 @@
       </p:sp>
       <p:sp>
         <p:nvSpPr>
-          <p:cNvPr id="9" name="Rectangle 8"/>
+          <p:cNvPr id="10" name="Rectangle 9"/>
           <p:cNvSpPr/>
           <p:nvPr/>
         </p:nvSpPr>
         <p:spPr>
           <a:xfrm>
             <a:off x="640080" y="1325880"/>
-            <a:ext cx="54864" cy="1313374"/>
+            <a:ext cx="54864" cy="1340548"/>
           </a:xfrm>
           <a:prstGeom prst="rect">
             <a:avLst/>
@@ -6669,7 +6874,7 @@
       </p:sp>
       <p:sp>
         <p:nvSpPr>
-          <p:cNvPr id="10" name="TextBox 9"/>
+          <p:cNvPr id="11" name="TextBox 10"/>
           <p:cNvSpPr txBox="1"/>
           <p:nvPr/>
         </p:nvSpPr>
@@ -6711,14 +6916,14 @@
       </p:sp>
       <p:sp>
         <p:nvSpPr>
-          <p:cNvPr id="11" name="TextBox 10"/>
+          <p:cNvPr id="12" name="TextBox 11"/>
           <p:cNvSpPr txBox="1"/>
           <p:nvPr/>
         </p:nvSpPr>
         <p:spPr>
           <a:xfrm>
             <a:off x="804671" y="1719072"/>
-            <a:ext cx="10616184" cy="828742"/>
+            <a:ext cx="10616184" cy="855916"/>
           </a:xfrm>
           <a:prstGeom prst="rect">
             <a:avLst/>
@@ -6746,21 +6951,21 @@
               <a:rPr>
                 <a:latin typeface="Inter"/>
               </a:rPr>
-              <a:t>Not available — the governed Form 13F snapshot is present, but this compact TEST fixture omits its holding rows [S3].</a:t>
-            </a:r>
-          </a:p>
-        </p:txBody>
-      </p:sp>
-      <p:sp>
-        <p:nvSpPr>
-          <p:cNvPr id="12" name="Rectangle 11"/>
+              <a:t>Not available — the governed Form 13F snapshot is present, but its holding rows are unavailable [S3].</a:t>
+            </a:r>
+          </a:p>
+        </p:txBody>
+      </p:sp>
+      <p:sp>
+        <p:nvSpPr>
+          <p:cNvPr id="13" name="Rectangle 12"/>
           <p:cNvSpPr/>
           <p:nvPr/>
         </p:nvSpPr>
         <p:spPr>
           <a:xfrm>
-            <a:off x="640080" y="2748982"/>
-            <a:ext cx="10908792" cy="1313374"/>
+            <a:off x="640080" y="2776156"/>
+            <a:ext cx="10908792" cy="1340548"/>
           </a:xfrm>
           <a:prstGeom prst="rect">
             <a:avLst/>
@@ -6802,14 +7007,14 @@
       </p:sp>
       <p:sp>
         <p:nvSpPr>
-          <p:cNvPr id="13" name="Rectangle 12"/>
+          <p:cNvPr id="14" name="Rectangle 13"/>
           <p:cNvSpPr/>
           <p:nvPr/>
         </p:nvSpPr>
         <p:spPr>
           <a:xfrm>
-            <a:off x="640080" y="2748982"/>
-            <a:ext cx="54864" cy="1313374"/>
+            <a:off x="640080" y="2776156"/>
+            <a:ext cx="54864" cy="1340548"/>
           </a:xfrm>
           <a:prstGeom prst="rect">
             <a:avLst/>
@@ -6851,13 +7056,13 @@
       </p:sp>
       <p:sp>
         <p:nvSpPr>
-          <p:cNvPr id="14" name="TextBox 13"/>
+          <p:cNvPr id="15" name="TextBox 14"/>
           <p:cNvSpPr txBox="1"/>
           <p:nvPr/>
         </p:nvSpPr>
         <p:spPr>
           <a:xfrm>
-            <a:off x="804671" y="2858710"/>
+            <a:off x="804671" y="2885884"/>
             <a:ext cx="10616184" cy="228600"/>
           </a:xfrm>
           <a:prstGeom prst="rect">
@@ -6893,14 +7098,14 @@
       </p:sp>
       <p:sp>
         <p:nvSpPr>
-          <p:cNvPr id="15" name="TextBox 14"/>
+          <p:cNvPr id="16" name="TextBox 15"/>
           <p:cNvSpPr txBox="1"/>
           <p:nvPr/>
         </p:nvSpPr>
         <p:spPr>
           <a:xfrm>
-            <a:off x="804671" y="3142174"/>
-            <a:ext cx="10616184" cy="828742"/>
+            <a:off x="804671" y="3169348"/>
+            <a:ext cx="10616184" cy="855916"/>
           </a:xfrm>
           <a:prstGeom prst="rect">
             <a:avLst/>
@@ -6928,21 +7133,21 @@
               <a:rPr>
                 <a:latin typeface="Inter"/>
               </a:rPr>
-              <a:t>Not available — this compact render fixture omits holding rows [S3].</a:t>
-            </a:r>
-          </a:p>
-        </p:txBody>
-      </p:sp>
-      <p:sp>
-        <p:nvSpPr>
-          <p:cNvPr id="16" name="Rectangle 15"/>
+              <a:t>Not available — holding rows were not included in the reviewed evidence [S3].</a:t>
+            </a:r>
+          </a:p>
+        </p:txBody>
+      </p:sp>
+      <p:sp>
+        <p:nvSpPr>
+          <p:cNvPr id="17" name="Rectangle 16"/>
           <p:cNvSpPr/>
           <p:nvPr/>
         </p:nvSpPr>
         <p:spPr>
           <a:xfrm>
-            <a:off x="640080" y="4172085"/>
-            <a:ext cx="10908792" cy="2045834"/>
+            <a:off x="640080" y="4226432"/>
+            <a:ext cx="10908792" cy="1991487"/>
           </a:xfrm>
           <a:prstGeom prst="rect">
             <a:avLst/>
@@ -6984,14 +7189,14 @@
       </p:sp>
       <p:sp>
         <p:nvSpPr>
-          <p:cNvPr id="17" name="Rectangle 16"/>
+          <p:cNvPr id="18" name="Rectangle 17"/>
           <p:cNvSpPr/>
           <p:nvPr/>
         </p:nvSpPr>
         <p:spPr>
           <a:xfrm>
-            <a:off x="640080" y="4172085"/>
-            <a:ext cx="54864" cy="2045834"/>
+            <a:off x="640080" y="4226432"/>
+            <a:ext cx="54864" cy="1991487"/>
           </a:xfrm>
           <a:prstGeom prst="rect">
             <a:avLst/>
@@ -7033,13 +7238,13 @@
       </p:sp>
       <p:sp>
         <p:nvSpPr>
-          <p:cNvPr id="18" name="TextBox 17"/>
+          <p:cNvPr id="19" name="TextBox 18"/>
           <p:cNvSpPr txBox="1"/>
           <p:nvPr/>
         </p:nvSpPr>
         <p:spPr>
           <a:xfrm>
-            <a:off x="804671" y="4281813"/>
+            <a:off x="804671" y="4336160"/>
             <a:ext cx="10616184" cy="228600"/>
           </a:xfrm>
           <a:prstGeom prst="rect">
@@ -7075,14 +7280,14 @@
       </p:sp>
       <p:sp>
         <p:nvSpPr>
-          <p:cNvPr id="19" name="TextBox 18"/>
+          <p:cNvPr id="20" name="TextBox 19"/>
           <p:cNvSpPr txBox="1"/>
           <p:nvPr/>
         </p:nvSpPr>
         <p:spPr>
           <a:xfrm>
-            <a:off x="804671" y="4565277"/>
-            <a:ext cx="10616184" cy="1561202"/>
+            <a:off x="804671" y="4619624"/>
+            <a:ext cx="10616184" cy="1506855"/>
           </a:xfrm>
           <a:prstGeom prst="rect">
             <a:avLst/>
@@ -7110,14 +7315,14 @@
               <a:rPr>
                 <a:latin typeface="Inter"/>
               </a:rPr>
-              <a:t>Observation: One Form 13F snapshot exists, but holding rows are omitted from this TEST fixture [S3]. Why it matters: Concentration cannot be interpreted from the summary alone. Uncertainty…</a:t>
-            </a:r>
-          </a:p>
-        </p:txBody>
-      </p:sp>
-      <p:sp>
-        <p:nvSpPr>
-          <p:cNvPr id="20" name="Rectangle 19"/>
+              <a:t>Observation: One Form 13F snapshot exists, but its holding rows are unavailable [S3]. Why it matters: Concentration cannot be interpreted from the summary alone. Uncertainty: Form 13F coverage…</a:t>
+            </a:r>
+          </a:p>
+        </p:txBody>
+      </p:sp>
+      <p:sp>
+        <p:nvSpPr>
+          <p:cNvPr id="21" name="Rectangle 20"/>
           <p:cNvSpPr/>
           <p:nvPr/>
         </p:nvSpPr>
@@ -7166,7 +7371,7 @@
       </p:sp>
       <p:sp>
         <p:nvSpPr>
-          <p:cNvPr id="21" name="TextBox 20"/>
+          <p:cNvPr id="22" name="TextBox 21"/>
           <p:cNvSpPr txBox="1"/>
           <p:nvPr/>
         </p:nvSpPr>
@@ -7208,7 +7413,7 @@
       </p:sp>
       <p:sp>
         <p:nvSpPr>
-          <p:cNvPr id="22" name="TextBox 21"/>
+          <p:cNvPr id="23" name="TextBox 22"/>
           <p:cNvSpPr txBox="1"/>
           <p:nvPr/>
         </p:nvSpPr>
@@ -7243,14 +7448,14 @@
               <a:rPr>
                 <a:latin typeface="Inter"/>
               </a:rPr>
-              <a:t>RENDER TEST — partial sample, not a full ODD report · Data as of 2026-10-01 (Form ADV); 2026-08-14 (Form 13F)</a:t>
-            </a:r>
-          </a:p>
-        </p:txBody>
-      </p:sp>
-      <p:sp>
-        <p:nvSpPr>
-          <p:cNvPr id="23" name="TextBox 22"/>
+              <a:t>Confidential — operational due diligence review · Data as of 2026-10-01 (Form ADV); 2026-08-14 (Form 13F)</a:t>
+            </a:r>
+          </a:p>
+        </p:txBody>
+      </p:sp>
+      <p:sp>
+        <p:nvSpPr>
+          <p:cNvPr id="24" name="TextBox 23"/>
           <p:cNvSpPr txBox="1"/>
           <p:nvPr/>
         </p:nvSpPr>
@@ -7366,7 +7571,7 @@
         <p:spPr>
           <a:xfrm>
             <a:off x="640080" y="329184"/>
-            <a:ext cx="9875520" cy="182880"/>
+            <a:ext cx="5303520" cy="182880"/>
           </a:xfrm>
           <a:prstGeom prst="rect">
             <a:avLst/>
@@ -7407,6 +7612,48 @@
         </p:nvSpPr>
         <p:spPr>
           <a:xfrm>
+            <a:off x="5897880" y="310896"/>
+            <a:ext cx="4800600" cy="256032"/>
+          </a:xfrm>
+          <a:prstGeom prst="rect">
+            <a:avLst/>
+          </a:prstGeom>
+          <a:noFill/>
+        </p:spPr>
+        <p:txBody>
+          <a:bodyPr wrap="none" lIns="9144" rIns="9144" tIns="9144" bIns="9144" anchor="t">
+            <a:spAutoFit/>
+          </a:bodyPr>
+          <a:lstStyle/>
+          <a:p>
+            <a:pPr algn="r">
+              <a:spcAft>
+                <a:spcPts val="0"/>
+              </a:spcAft>
+              <a:defRPr sz="680" b="1">
+                <a:solidFill>
+                  <a:srgbClr val="4F6B00"/>
+                </a:solidFill>
+                <a:latin typeface="Inter"/>
+              </a:defRPr>
+            </a:pPr>
+            <a:r>
+              <a:rPr>
+                <a:latin typeface="Inter"/>
+              </a:rPr>
+              <a:t>Illustrative, Gradient Maintained — demo data, not the client's holdings or managers</a:t>
+            </a:r>
+          </a:p>
+        </p:txBody>
+      </p:sp>
+      <p:sp>
+        <p:nvSpPr>
+          <p:cNvPr id="5" name="TextBox 4"/>
+          <p:cNvSpPr txBox="1"/>
+          <p:nvPr/>
+        </p:nvSpPr>
+        <p:spPr>
+          <a:xfrm>
             <a:off x="640080" y="566928"/>
             <a:ext cx="10058400" cy="530352"/>
           </a:xfrm>
@@ -7443,7 +7690,7 @@
       </p:sp>
       <p:sp>
         <p:nvSpPr>
-          <p:cNvPr id="5" name="Rectangle 4"/>
+          <p:cNvPr id="6" name="Rectangle 5"/>
           <p:cNvSpPr/>
           <p:nvPr/>
         </p:nvSpPr>
@@ -7492,7 +7739,7 @@
       </p:sp>
       <p:sp>
         <p:nvSpPr>
-          <p:cNvPr id="6" name="Rectangle 5"/>
+          <p:cNvPr id="7" name="Rectangle 6"/>
           <p:cNvSpPr/>
           <p:nvPr/>
         </p:nvSpPr>
@@ -7541,7 +7788,7 @@
       </p:sp>
       <p:sp>
         <p:nvSpPr>
-          <p:cNvPr id="7" name="TextBox 6"/>
+          <p:cNvPr id="8" name="TextBox 7"/>
           <p:cNvSpPr txBox="1"/>
           <p:nvPr/>
         </p:nvSpPr>
@@ -7583,7 +7830,7 @@
       </p:sp>
       <p:sp>
         <p:nvSpPr>
-          <p:cNvPr id="8" name="TextBox 7"/>
+          <p:cNvPr id="9" name="TextBox 8"/>
           <p:cNvSpPr txBox="1"/>
           <p:nvPr/>
         </p:nvSpPr>
@@ -7625,7 +7872,7 @@
       </p:sp>
       <p:sp>
         <p:nvSpPr>
-          <p:cNvPr id="9" name="Rectangle 8"/>
+          <p:cNvPr id="10" name="Rectangle 9"/>
           <p:cNvSpPr/>
           <p:nvPr/>
         </p:nvSpPr>
@@ -7674,7 +7921,7 @@
       </p:sp>
       <p:sp>
         <p:nvSpPr>
-          <p:cNvPr id="10" name="Oval 9"/>
+          <p:cNvPr id="11" name="Oval 10"/>
           <p:cNvSpPr/>
           <p:nvPr/>
         </p:nvSpPr>
@@ -7723,7 +7970,7 @@
       </p:sp>
       <p:sp>
         <p:nvSpPr>
-          <p:cNvPr id="11" name="TextBox 10"/>
+          <p:cNvPr id="12" name="TextBox 11"/>
           <p:cNvSpPr txBox="1"/>
           <p:nvPr/>
         </p:nvSpPr>
@@ -7765,7 +8012,7 @@
       </p:sp>
       <p:sp>
         <p:nvSpPr>
-          <p:cNvPr id="12" name="TextBox 11"/>
+          <p:cNvPr id="13" name="TextBox 12"/>
           <p:cNvSpPr txBox="1"/>
           <p:nvPr/>
         </p:nvSpPr>
@@ -7807,7 +8054,7 @@
       </p:sp>
       <p:sp>
         <p:nvSpPr>
-          <p:cNvPr id="13" name="TextBox 12"/>
+          <p:cNvPr id="14" name="TextBox 13"/>
           <p:cNvSpPr txBox="1"/>
           <p:nvPr/>
         </p:nvSpPr>
@@ -7849,7 +8096,7 @@
       </p:sp>
       <p:sp>
         <p:nvSpPr>
-          <p:cNvPr id="14" name="Oval 13"/>
+          <p:cNvPr id="15" name="Oval 14"/>
           <p:cNvSpPr/>
           <p:nvPr/>
         </p:nvSpPr>
@@ -7898,7 +8145,7 @@
       </p:sp>
       <p:sp>
         <p:nvSpPr>
-          <p:cNvPr id="15" name="TextBox 14"/>
+          <p:cNvPr id="16" name="TextBox 15"/>
           <p:cNvSpPr txBox="1"/>
           <p:nvPr/>
         </p:nvSpPr>
@@ -7940,7 +8187,7 @@
       </p:sp>
       <p:sp>
         <p:nvSpPr>
-          <p:cNvPr id="16" name="TextBox 15"/>
+          <p:cNvPr id="17" name="TextBox 16"/>
           <p:cNvSpPr txBox="1"/>
           <p:nvPr/>
         </p:nvSpPr>
@@ -7982,7 +8229,7 @@
       </p:sp>
       <p:sp>
         <p:nvSpPr>
-          <p:cNvPr id="17" name="TextBox 16"/>
+          <p:cNvPr id="18" name="TextBox 17"/>
           <p:cNvSpPr txBox="1"/>
           <p:nvPr/>
         </p:nvSpPr>
@@ -8024,7 +8271,7 @@
       </p:sp>
       <p:sp>
         <p:nvSpPr>
-          <p:cNvPr id="18" name="Oval 17"/>
+          <p:cNvPr id="19" name="Oval 18"/>
           <p:cNvSpPr/>
           <p:nvPr/>
         </p:nvSpPr>
@@ -8073,7 +8320,7 @@
       </p:sp>
       <p:sp>
         <p:nvSpPr>
-          <p:cNvPr id="19" name="TextBox 18"/>
+          <p:cNvPr id="20" name="TextBox 19"/>
           <p:cNvSpPr txBox="1"/>
           <p:nvPr/>
         </p:nvSpPr>
@@ -8115,7 +8362,7 @@
       </p:sp>
       <p:sp>
         <p:nvSpPr>
-          <p:cNvPr id="20" name="TextBox 19"/>
+          <p:cNvPr id="21" name="TextBox 20"/>
           <p:cNvSpPr txBox="1"/>
           <p:nvPr/>
         </p:nvSpPr>
@@ -8157,7 +8404,7 @@
       </p:sp>
       <p:sp>
         <p:nvSpPr>
-          <p:cNvPr id="21" name="TextBox 20"/>
+          <p:cNvPr id="22" name="TextBox 21"/>
           <p:cNvSpPr txBox="1"/>
           <p:nvPr/>
         </p:nvSpPr>
@@ -8192,14 +8439,14 @@
               <a:rPr>
                 <a:latin typeface="Inter"/>
               </a:rPr>
-              <a:t>Event publication is not yet available in the TEST record [S2].</a:t>
-            </a:r>
-          </a:p>
-        </p:txBody>
-      </p:sp>
-      <p:sp>
-        <p:nvSpPr>
-          <p:cNvPr id="22" name="Rectangle 21"/>
+              <a:t>Event publication is not yet available in the reviewed evidence [S2].</a:t>
+            </a:r>
+          </a:p>
+        </p:txBody>
+      </p:sp>
+      <p:sp>
+        <p:nvSpPr>
+          <p:cNvPr id="23" name="Rectangle 22"/>
           <p:cNvSpPr/>
           <p:nvPr/>
         </p:nvSpPr>
@@ -8248,7 +8495,7 @@
       </p:sp>
       <p:sp>
         <p:nvSpPr>
-          <p:cNvPr id="23" name="TextBox 22"/>
+          <p:cNvPr id="24" name="TextBox 23"/>
           <p:cNvSpPr txBox="1"/>
           <p:nvPr/>
         </p:nvSpPr>
@@ -8290,7 +8537,7 @@
       </p:sp>
       <p:sp>
         <p:nvSpPr>
-          <p:cNvPr id="24" name="TextBox 23"/>
+          <p:cNvPr id="25" name="TextBox 24"/>
           <p:cNvSpPr txBox="1"/>
           <p:nvPr/>
         </p:nvSpPr>
@@ -8325,14 +8572,14 @@
               <a:rPr>
                 <a:latin typeface="Inter"/>
               </a:rPr>
-              <a:t>RENDER TEST — partial sample, not a full ODD report · Data as of 2026-10-01 (Form ADV); 2026-08-14 (Form 13F)</a:t>
-            </a:r>
-          </a:p>
-        </p:txBody>
-      </p:sp>
-      <p:sp>
-        <p:nvSpPr>
-          <p:cNvPr id="25" name="TextBox 24"/>
+              <a:t>Confidential — operational due diligence review · Data as of 2026-10-01 (Form ADV); 2026-08-14 (Form 13F)</a:t>
+            </a:r>
+          </a:p>
+        </p:txBody>
+      </p:sp>
+      <p:sp>
+        <p:nvSpPr>
+          <p:cNvPr id="26" name="TextBox 25"/>
           <p:cNvSpPr txBox="1"/>
           <p:nvPr/>
         </p:nvSpPr>
@@ -8448,7 +8695,7 @@
         <p:spPr>
           <a:xfrm>
             <a:off x="640080" y="329184"/>
-            <a:ext cx="9875520" cy="182880"/>
+            <a:ext cx="5303520" cy="182880"/>
           </a:xfrm>
           <a:prstGeom prst="rect">
             <a:avLst/>
@@ -8489,6 +8736,48 @@
         </p:nvSpPr>
         <p:spPr>
           <a:xfrm>
+            <a:off x="5897880" y="310896"/>
+            <a:ext cx="4800600" cy="256032"/>
+          </a:xfrm>
+          <a:prstGeom prst="rect">
+            <a:avLst/>
+          </a:prstGeom>
+          <a:noFill/>
+        </p:spPr>
+        <p:txBody>
+          <a:bodyPr wrap="none" lIns="9144" rIns="9144" tIns="9144" bIns="9144" anchor="t">
+            <a:spAutoFit/>
+          </a:bodyPr>
+          <a:lstStyle/>
+          <a:p>
+            <a:pPr algn="r">
+              <a:spcAft>
+                <a:spcPts val="0"/>
+              </a:spcAft>
+              <a:defRPr sz="680" b="1">
+                <a:solidFill>
+                  <a:srgbClr val="4F6B00"/>
+                </a:solidFill>
+                <a:latin typeface="Inter"/>
+              </a:defRPr>
+            </a:pPr>
+            <a:r>
+              <a:rPr>
+                <a:latin typeface="Inter"/>
+              </a:rPr>
+              <a:t>Illustrative, Gradient Maintained — demo data, not the client's holdings or managers</a:t>
+            </a:r>
+          </a:p>
+        </p:txBody>
+      </p:sp>
+      <p:sp>
+        <p:nvSpPr>
+          <p:cNvPr id="5" name="TextBox 4"/>
+          <p:cNvSpPr txBox="1"/>
+          <p:nvPr/>
+        </p:nvSpPr>
+        <p:spPr>
+          <a:xfrm>
             <a:off x="640080" y="566928"/>
             <a:ext cx="10058400" cy="530352"/>
           </a:xfrm>
@@ -8525,7 +8814,7 @@
       </p:sp>
       <p:sp>
         <p:nvSpPr>
-          <p:cNvPr id="5" name="Rectangle 4"/>
+          <p:cNvPr id="6" name="Rectangle 5"/>
           <p:cNvSpPr/>
           <p:nvPr/>
         </p:nvSpPr>
@@ -8574,7 +8863,7 @@
       </p:sp>
       <p:sp>
         <p:nvSpPr>
-          <p:cNvPr id="6" name="Rectangle 5"/>
+          <p:cNvPr id="7" name="Rectangle 6"/>
           <p:cNvSpPr/>
           <p:nvPr/>
         </p:nvSpPr>
@@ -8623,7 +8912,7 @@
       </p:sp>
       <p:sp>
         <p:nvSpPr>
-          <p:cNvPr id="7" name="TextBox 6"/>
+          <p:cNvPr id="8" name="TextBox 7"/>
           <p:cNvSpPr txBox="1"/>
           <p:nvPr/>
         </p:nvSpPr>
@@ -8665,7 +8954,7 @@
       </p:sp>
       <p:sp>
         <p:nvSpPr>
-          <p:cNvPr id="8" name="Rectangle 7"/>
+          <p:cNvPr id="9" name="Rectangle 8"/>
           <p:cNvSpPr/>
           <p:nvPr/>
         </p:nvSpPr>
@@ -8714,7 +9003,7 @@
       </p:sp>
       <p:sp>
         <p:nvSpPr>
-          <p:cNvPr id="9" name="Rectangle 8"/>
+          <p:cNvPr id="10" name="Rectangle 9"/>
           <p:cNvSpPr/>
           <p:nvPr/>
         </p:nvSpPr>
@@ -8763,7 +9052,7 @@
       </p:sp>
       <p:sp>
         <p:nvSpPr>
-          <p:cNvPr id="10" name="TextBox 9"/>
+          <p:cNvPr id="11" name="TextBox 10"/>
           <p:cNvSpPr txBox="1"/>
           <p:nvPr/>
         </p:nvSpPr>
@@ -8805,7 +9094,7 @@
       </p:sp>
       <p:sp>
         <p:nvSpPr>
-          <p:cNvPr id="11" name="TextBox 10"/>
+          <p:cNvPr id="12" name="TextBox 11"/>
           <p:cNvSpPr txBox="1"/>
           <p:nvPr/>
         </p:nvSpPr>
@@ -8840,14 +9129,14 @@
               <a:rPr>
                 <a:latin typeface="Inter"/>
               </a:rPr>
-              <a:t>Not available — this compact render fixture omits monitoring details [S2].</a:t>
-            </a:r>
-          </a:p>
-        </p:txBody>
-      </p:sp>
-      <p:sp>
-        <p:nvSpPr>
-          <p:cNvPr id="12" name="Rectangle 11"/>
+              <a:t>Not available — monitoring details were not included in the reviewed evidence [S2].</a:t>
+            </a:r>
+          </a:p>
+        </p:txBody>
+      </p:sp>
+      <p:sp>
+        <p:nvSpPr>
+          <p:cNvPr id="13" name="Rectangle 12"/>
           <p:cNvSpPr/>
           <p:nvPr/>
         </p:nvSpPr>
@@ -8896,7 +9185,7 @@
       </p:sp>
       <p:sp>
         <p:nvSpPr>
-          <p:cNvPr id="13" name="Rectangle 12"/>
+          <p:cNvPr id="14" name="Rectangle 13"/>
           <p:cNvSpPr/>
           <p:nvPr/>
         </p:nvSpPr>
@@ -8945,7 +9234,7 @@
       </p:sp>
       <p:sp>
         <p:nvSpPr>
-          <p:cNvPr id="14" name="TextBox 13"/>
+          <p:cNvPr id="15" name="TextBox 14"/>
           <p:cNvSpPr txBox="1"/>
           <p:nvPr/>
         </p:nvSpPr>
@@ -8987,7 +9276,7 @@
       </p:sp>
       <p:sp>
         <p:nvSpPr>
-          <p:cNvPr id="15" name="TextBox 14"/>
+          <p:cNvPr id="16" name="TextBox 15"/>
           <p:cNvSpPr txBox="1"/>
           <p:nvPr/>
         </p:nvSpPr>
@@ -9029,7 +9318,7 @@
       </p:sp>
       <p:sp>
         <p:nvSpPr>
-          <p:cNvPr id="16" name="Rectangle 15"/>
+          <p:cNvPr id="17" name="Rectangle 16"/>
           <p:cNvSpPr/>
           <p:nvPr/>
         </p:nvSpPr>
@@ -9078,7 +9367,7 @@
       </p:sp>
       <p:sp>
         <p:nvSpPr>
-          <p:cNvPr id="17" name="TextBox 16"/>
+          <p:cNvPr id="18" name="TextBox 17"/>
           <p:cNvSpPr txBox="1"/>
           <p:nvPr/>
         </p:nvSpPr>
@@ -9120,7 +9409,7 @@
       </p:sp>
       <p:sp>
         <p:nvSpPr>
-          <p:cNvPr id="18" name="TextBox 17"/>
+          <p:cNvPr id="19" name="TextBox 18"/>
           <p:cNvSpPr txBox="1"/>
           <p:nvPr/>
         </p:nvSpPr>
@@ -9155,14 +9444,14 @@
               <a:rPr>
                 <a:latin typeface="Inter"/>
               </a:rPr>
-              <a:t>RENDER TEST — partial sample, not a full ODD report · Data as of 2026-10-01 (Form ADV); 2026-08-14 (Form 13F)</a:t>
-            </a:r>
-          </a:p>
-        </p:txBody>
-      </p:sp>
-      <p:sp>
-        <p:nvSpPr>
-          <p:cNvPr id="19" name="TextBox 18"/>
+              <a:t>Confidential — operational due diligence review · Data as of 2026-10-01 (Form ADV); 2026-08-14 (Form 13F)</a:t>
+            </a:r>
+          </a:p>
+        </p:txBody>
+      </p:sp>
+      <p:sp>
+        <p:nvSpPr>
+          <p:cNvPr id="20" name="TextBox 19"/>
           <p:cNvSpPr txBox="1"/>
           <p:nvPr/>
         </p:nvSpPr>
@@ -9277,6 +9566,48 @@
         </p:nvSpPr>
         <p:spPr>
           <a:xfrm>
+            <a:off x="5897880" y="310896"/>
+            <a:ext cx="4800600" cy="256032"/>
+          </a:xfrm>
+          <a:prstGeom prst="rect">
+            <a:avLst/>
+          </a:prstGeom>
+          <a:noFill/>
+        </p:spPr>
+        <p:txBody>
+          <a:bodyPr wrap="none" lIns="9144" rIns="9144" tIns="9144" bIns="9144" anchor="t">
+            <a:spAutoFit/>
+          </a:bodyPr>
+          <a:lstStyle/>
+          <a:p>
+            <a:pPr algn="r">
+              <a:spcAft>
+                <a:spcPts val="0"/>
+              </a:spcAft>
+              <a:defRPr sz="680" b="1">
+                <a:solidFill>
+                  <a:srgbClr val="4F6B00"/>
+                </a:solidFill>
+                <a:latin typeface="Inter"/>
+              </a:defRPr>
+            </a:pPr>
+            <a:r>
+              <a:rPr>
+                <a:latin typeface="Inter"/>
+              </a:rPr>
+              <a:t>Illustrative, Gradient Maintained — demo data, not the client's holdings or managers</a:t>
+            </a:r>
+          </a:p>
+        </p:txBody>
+      </p:sp>
+      <p:sp>
+        <p:nvSpPr>
+          <p:cNvPr id="4" name="TextBox 3"/>
+          <p:cNvSpPr txBox="1"/>
+          <p:nvPr/>
+        </p:nvSpPr>
+        <p:spPr>
+          <a:xfrm>
             <a:off x="640080" y="566928"/>
             <a:ext cx="10058400" cy="530352"/>
           </a:xfrm>
@@ -9313,7 +9644,7 @@
       </p:sp>
       <p:sp>
         <p:nvSpPr>
-          <p:cNvPr id="4" name="Rectangle 3"/>
+          <p:cNvPr id="5" name="Rectangle 4"/>
           <p:cNvSpPr/>
           <p:nvPr/>
         </p:nvSpPr>
@@ -9362,7 +9693,7 @@
       </p:sp>
       <p:sp>
         <p:nvSpPr>
-          <p:cNvPr id="5" name="Rectangle 4"/>
+          <p:cNvPr id="6" name="Rectangle 5"/>
           <p:cNvSpPr/>
           <p:nvPr/>
         </p:nvSpPr>
@@ -9411,7 +9742,7 @@
       </p:sp>
       <p:sp>
         <p:nvSpPr>
-          <p:cNvPr id="6" name="TextBox 5"/>
+          <p:cNvPr id="7" name="TextBox 6"/>
           <p:cNvSpPr txBox="1"/>
           <p:nvPr/>
         </p:nvSpPr>
@@ -9453,7 +9784,7 @@
       </p:sp>
       <p:sp>
         <p:nvSpPr>
-          <p:cNvPr id="7" name="Rectangle 6"/>
+          <p:cNvPr id="8" name="Rectangle 7"/>
           <p:cNvSpPr/>
           <p:nvPr/>
         </p:nvSpPr>
@@ -9502,7 +9833,7 @@
       </p:sp>
       <p:sp>
         <p:nvSpPr>
-          <p:cNvPr id="8" name="Rectangle 7"/>
+          <p:cNvPr id="9" name="Rectangle 8"/>
           <p:cNvSpPr/>
           <p:nvPr/>
         </p:nvSpPr>
@@ -9551,7 +9882,7 @@
       </p:sp>
       <p:sp>
         <p:nvSpPr>
-          <p:cNvPr id="9" name="TextBox 8"/>
+          <p:cNvPr id="10" name="TextBox 9"/>
           <p:cNvSpPr txBox="1"/>
           <p:nvPr/>
         </p:nvSpPr>
@@ -9593,7 +9924,7 @@
       </p:sp>
       <p:sp>
         <p:nvSpPr>
-          <p:cNvPr id="10" name="TextBox 9"/>
+          <p:cNvPr id="11" name="TextBox 10"/>
           <p:cNvSpPr txBox="1"/>
           <p:nvPr/>
         </p:nvSpPr>
@@ -9628,14 +9959,14 @@
               <a:rPr>
                 <a:latin typeface="Inter"/>
               </a:rPr>
-              <a:t>Not available — no follow-up questions are included in this compact render fixture [S1].</a:t>
-            </a:r>
-          </a:p>
-        </p:txBody>
-      </p:sp>
-      <p:sp>
-        <p:nvSpPr>
-          <p:cNvPr id="11" name="Rectangle 10"/>
+              <a:t>Not available — no follow-up questions are included in this review [S1].</a:t>
+            </a:r>
+          </a:p>
+        </p:txBody>
+      </p:sp>
+      <p:sp>
+        <p:nvSpPr>
+          <p:cNvPr id="12" name="Rectangle 11"/>
           <p:cNvSpPr/>
           <p:nvPr/>
         </p:nvSpPr>
@@ -9684,7 +10015,7 @@
       </p:sp>
       <p:sp>
         <p:nvSpPr>
-          <p:cNvPr id="12" name="TextBox 11"/>
+          <p:cNvPr id="13" name="TextBox 12"/>
           <p:cNvSpPr txBox="1"/>
           <p:nvPr/>
         </p:nvSpPr>
@@ -9726,7 +10057,7 @@
       </p:sp>
       <p:sp>
         <p:nvSpPr>
-          <p:cNvPr id="13" name="TextBox 12"/>
+          <p:cNvPr id="14" name="TextBox 13"/>
           <p:cNvSpPr txBox="1"/>
           <p:nvPr/>
         </p:nvSpPr>
@@ -9761,14 +10092,14 @@
               <a:rPr>
                 <a:latin typeface="Inter"/>
               </a:rPr>
-              <a:t>RENDER TEST — partial sample, not a full ODD report · Data as of 2026-10-01 (Form ADV); 2026-08-14 (Form 13F)</a:t>
-            </a:r>
-          </a:p>
-        </p:txBody>
-      </p:sp>
-      <p:sp>
-        <p:nvSpPr>
-          <p:cNvPr id="14" name="TextBox 13"/>
+              <a:t>Confidential — operational due diligence review · Data as of 2026-10-01 (Form ADV); 2026-08-14 (Form 13F)</a:t>
+            </a:r>
+          </a:p>
+        </p:txBody>
+      </p:sp>
+      <p:sp>
+        <p:nvSpPr>
+          <p:cNvPr id="15" name="TextBox 14"/>
           <p:cNvSpPr txBox="1"/>
           <p:nvPr/>
         </p:nvSpPr>
@@ -9883,6 +10214,48 @@
         </p:nvSpPr>
         <p:spPr>
           <a:xfrm>
+            <a:off x="5897880" y="310896"/>
+            <a:ext cx="4800600" cy="256032"/>
+          </a:xfrm>
+          <a:prstGeom prst="rect">
+            <a:avLst/>
+          </a:prstGeom>
+          <a:noFill/>
+        </p:spPr>
+        <p:txBody>
+          <a:bodyPr wrap="none" lIns="9144" rIns="9144" tIns="9144" bIns="9144" anchor="t">
+            <a:spAutoFit/>
+          </a:bodyPr>
+          <a:lstStyle/>
+          <a:p>
+            <a:pPr algn="r">
+              <a:spcAft>
+                <a:spcPts val="0"/>
+              </a:spcAft>
+              <a:defRPr sz="680" b="1">
+                <a:solidFill>
+                  <a:srgbClr val="4F6B00"/>
+                </a:solidFill>
+                <a:latin typeface="Inter"/>
+              </a:defRPr>
+            </a:pPr>
+            <a:r>
+              <a:rPr>
+                <a:latin typeface="Inter"/>
+              </a:rPr>
+              <a:t>Illustrative, Gradient Maintained — demo data, not the client's holdings or managers</a:t>
+            </a:r>
+          </a:p>
+        </p:txBody>
+      </p:sp>
+      <p:sp>
+        <p:nvSpPr>
+          <p:cNvPr id="4" name="TextBox 3"/>
+          <p:cNvSpPr txBox="1"/>
+          <p:nvPr/>
+        </p:nvSpPr>
+        <p:spPr>
+          <a:xfrm>
             <a:off x="640080" y="566928"/>
             <a:ext cx="10058400" cy="530352"/>
           </a:xfrm>
@@ -9912,14 +10285,14 @@
               <a:rPr>
                 <a:latin typeface="Inter"/>
               </a:rPr>
-              <a:t>Appendix — sources &amp; method</a:t>
-            </a:r>
-          </a:p>
-        </p:txBody>
-      </p:sp>
-      <p:sp>
-        <p:nvSpPr>
-          <p:cNvPr id="4" name="Rectangle 3"/>
+              <a:t>Appendix — Sources and methods</a:t>
+            </a:r>
+          </a:p>
+        </p:txBody>
+      </p:sp>
+      <p:sp>
+        <p:nvSpPr>
+          <p:cNvPr id="5" name="Rectangle 4"/>
           <p:cNvSpPr/>
           <p:nvPr/>
         </p:nvSpPr>
@@ -9968,7 +10341,7 @@
       </p:sp>
       <p:sp>
         <p:nvSpPr>
-          <p:cNvPr id="5" name="Rectangle 4"/>
+          <p:cNvPr id="6" name="Rectangle 5"/>
           <p:cNvSpPr/>
           <p:nvPr/>
         </p:nvSpPr>
@@ -10017,7 +10390,7 @@
       </p:sp>
       <p:sp>
         <p:nvSpPr>
-          <p:cNvPr id="6" name="TextBox 5"/>
+          <p:cNvPr id="7" name="TextBox 6"/>
           <p:cNvSpPr txBox="1"/>
           <p:nvPr/>
         </p:nvSpPr>
@@ -10052,14 +10425,14 @@
               <a:rPr>
                 <a:latin typeface="Inter"/>
               </a:rPr>
-              <a:t>09</a:t>
-            </a:r>
-          </a:p>
-        </p:txBody>
-      </p:sp>
-      <p:sp>
-        <p:nvSpPr>
-          <p:cNvPr id="7" name="TextBox 6"/>
+              <a:t>A</a:t>
+            </a:r>
+          </a:p>
+        </p:txBody>
+      </p:sp>
+      <p:sp>
+        <p:nvSpPr>
+          <p:cNvPr id="8" name="TextBox 7"/>
           <p:cNvSpPr txBox="1"/>
           <p:nvPr/>
         </p:nvSpPr>
@@ -10101,7 +10474,7 @@
       </p:sp>
       <p:graphicFrame>
         <p:nvGraphicFramePr>
-          <p:cNvPr id="8" name="Table 7"/>
+          <p:cNvPr id="9" name="Table 8"/>
           <p:cNvGraphicFramePr>
             <a:graphicFrameLocks noGrp="1"/>
           </p:cNvGraphicFramePr>
@@ -10109,7 +10482,7 @@
         </p:nvGraphicFramePr>
         <p:xfrm>
           <a:off x="640080" y="1600200"/>
-          <a:ext cx="10908790" cy="2043034"/>
+          <a:ext cx="10908792" cy="1841866"/>
         </p:xfrm>
         <a:graphic>
           <a:graphicData uri="http://schemas.openxmlformats.org/drawingml/2006/table">
@@ -10119,13 +10492,16 @@
               </a:tblPr>
               <a:tblGrid>
                 <a:gridCol w="2011680"/>
-                <a:gridCol w="1779422"/>
-                <a:gridCol w="1779422"/>
-                <a:gridCol w="1779422"/>
-                <a:gridCol w="1779422"/>
-                <a:gridCol w="1779422"/>
+                <a:gridCol w="1112139"/>
+                <a:gridCol w="1112139"/>
+                <a:gridCol w="1112139"/>
+                <a:gridCol w="1112139"/>
+                <a:gridCol w="1112139"/>
+                <a:gridCol w="1112139"/>
+                <a:gridCol w="1112139"/>
+                <a:gridCol w="1112139"/>
               </a:tblGrid>
-              <a:tr h="510758">
+              <a:tr h="460466">
                 <a:tc>
                   <a:txBody>
                     <a:bodyPr/>
@@ -10197,7 +10573,61 @@
                         <a:rPr>
                           <a:latin typeface="Inter"/>
                         </a:rPr>
-                        <a:t>Tool</a:t>
+                        <a:t>Basis</a:t>
+                      </a:r>
+                    </a:p>
+                  </a:txBody>
+                  <a:tcPr marL="54864" marR="54864" marT="27432" marB="27432" anchor="ctr">
+                    <a:solidFill>
+                      <a:srgbClr val="0D1117"/>
+                    </a:solidFill>
+                  </a:tcPr>
+                </a:tc>
+                <a:tc>
+                  <a:txBody>
+                    <a:bodyPr/>
+                    <a:lstStyle/>
+                    <a:p>
+                      <a:pPr>
+                        <a:defRPr sz="750" b="1">
+                          <a:solidFill>
+                            <a:srgbClr val="FFFFFF"/>
+                          </a:solidFill>
+                          <a:latin typeface="Inter"/>
+                        </a:defRPr>
+                      </a:pPr>
+                      <a:r>
+                        <a:rPr>
+                          <a:latin typeface="Inter"/>
+                        </a:rPr>
+                        <a:t>Tool / view</a:t>
+                      </a:r>
+                    </a:p>
+                  </a:txBody>
+                  <a:tcPr marL="54864" marR="54864" marT="27432" marB="27432" anchor="ctr">
+                    <a:solidFill>
+                      <a:srgbClr val="0D1117"/>
+                    </a:solidFill>
+                  </a:tcPr>
+                </a:tc>
+                <a:tc>
+                  <a:txBody>
+                    <a:bodyPr/>
+                    <a:lstStyle/>
+                    <a:p>
+                      <a:pPr>
+                        <a:defRPr sz="750" b="1">
+                          <a:solidFill>
+                            <a:srgbClr val="FFFFFF"/>
+                          </a:solidFill>
+                          <a:latin typeface="Inter"/>
+                        </a:defRPr>
+                      </a:pPr>
+                      <a:r>
+                        <a:rPr>
+                          <a:latin typeface="Inter"/>
+                        </a:rPr>
+                        <a:t>Key parameters</a:t>
                       </a:r>
                     </a:p>
                   </a:txBody>
@@ -10225,6 +10655,33 @@
                           <a:latin typeface="Inter"/>
                         </a:rPr>
                         <a:t>As of</a:t>
+                      </a:r>
+                    </a:p>
+                  </a:txBody>
+                  <a:tcPr marL="54864" marR="54864" marT="27432" marB="27432" anchor="ctr">
+                    <a:solidFill>
+                      <a:srgbClr val="0D1117"/>
+                    </a:solidFill>
+                  </a:tcPr>
+                </a:tc>
+                <a:tc>
+                  <a:txBody>
+                    <a:bodyPr/>
+                    <a:lstStyle/>
+                    <a:p>
+                      <a:pPr>
+                        <a:defRPr sz="750" b="1">
+                          <a:solidFill>
+                            <a:srgbClr val="FFFFFF"/>
+                          </a:solidFill>
+                          <a:latin typeface="Inter"/>
+                        </a:defRPr>
+                      </a:pPr>
+                      <a:r>
+                        <a:rPr>
+                          <a:latin typeface="Inter"/>
+                        </a:rPr>
+                        <a:t>Data scope</a:t>
                       </a:r>
                     </a:p>
                   </a:txBody>
@@ -10289,7 +10746,7 @@
                   </a:tcPr>
                 </a:tc>
               </a:tr>
-              <a:tr h="510758">
+              <a:tr h="460466">
                 <a:tc>
                   <a:txBody>
                     <a:bodyPr/>
@@ -10361,7 +10818,61 @@
                         <a:rPr>
                           <a:latin typeface="Inter"/>
                         </a:rPr>
+                        <a:t>gradient_tool</a:t>
+                      </a:r>
+                    </a:p>
+                  </a:txBody>
+                  <a:tcPr marL="54864" marR="54864" marT="27432" marB="27432" anchor="ctr">
+                    <a:solidFill>
+                      <a:srgbClr val="FFFFFF"/>
+                    </a:solidFill>
+                  </a:tcPr>
+                </a:tc>
+                <a:tc>
+                  <a:txBody>
+                    <a:bodyPr/>
+                    <a:lstStyle/>
+                    <a:p>
+                      <a:pPr>
+                        <a:defRPr sz="650" b="0">
+                          <a:solidFill>
+                            <a:srgbClr val="0D1117"/>
+                          </a:solidFill>
+                          <a:latin typeface="Inter"/>
+                        </a:defRPr>
+                      </a:pPr>
+                      <a:r>
+                        <a:rPr>
+                          <a:latin typeface="Inter"/>
+                        </a:rPr>
                         <a:t>get_manager_odd_profile</a:t>
+                      </a:r>
+                    </a:p>
+                  </a:txBody>
+                  <a:tcPr marL="54864" marR="54864" marT="27432" marB="27432" anchor="ctr">
+                    <a:solidFill>
+                      <a:srgbClr val="FFFFFF"/>
+                    </a:solidFill>
+                  </a:tcPr>
+                </a:tc>
+                <a:tc>
+                  <a:txBody>
+                    <a:bodyPr/>
+                    <a:lstStyle/>
+                    <a:p>
+                      <a:pPr>
+                        <a:defRPr sz="650" b="0">
+                          <a:solidFill>
+                            <a:srgbClr val="0D1117"/>
+                          </a:solidFill>
+                          <a:latin typeface="Inter"/>
+                        </a:defRPr>
+                      </a:pPr>
+                      <a:r>
+                        <a:rPr>
+                          <a:latin typeface="Inter"/>
+                        </a:rPr>
+                        <a:t>illustrative sample</a:t>
                       </a:r>
                     </a:p>
                   </a:txBody>
@@ -10404,9 +10915,9 @@
                     <a:lstStyle/>
                     <a:p>
                       <a:pPr>
-                        <a:defRPr sz="650" b="1">
+                        <a:defRPr sz="650" b="0">
                           <a:solidFill>
-                            <a:srgbClr val="9AA5B1"/>
+                            <a:srgbClr val="0D1117"/>
                           </a:solidFill>
                           <a:latin typeface="Inter"/>
                         </a:defRPr>
@@ -10415,13 +10926,13 @@
                         <a:rPr>
                           <a:latin typeface="Inter"/>
                         </a:rPr>
-                        <a:t>● not_run</a:t>
+                        <a:t>Gradient-governed review evidence</a:t>
                       </a:r>
                     </a:p>
                   </a:txBody>
                   <a:tcPr marL="54864" marR="54864" marT="27432" marB="27432" anchor="ctr">
                     <a:solidFill>
-                      <a:srgbClr val="F5F7F9"/>
+                      <a:srgbClr val="FFFFFF"/>
                     </a:solidFill>
                   </a:tcPr>
                 </a:tc>
@@ -10442,7 +10953,34 @@
                         <a:rPr>
                           <a:latin typeface="Inter"/>
                         </a:rPr>
-                        <a:t>091b0cf9</a:t>
+                        <a:t>{'chip': 'not_run', 'status': 'not_run'}</a:t>
+                      </a:r>
+                    </a:p>
+                  </a:txBody>
+                  <a:tcPr marL="54864" marR="54864" marT="27432" marB="27432" anchor="ctr">
+                    <a:solidFill>
+                      <a:srgbClr val="FFFFFF"/>
+                    </a:solidFill>
+                  </a:tcPr>
+                </a:tc>
+                <a:tc>
+                  <a:txBody>
+                    <a:bodyPr/>
+                    <a:lstStyle/>
+                    <a:p>
+                      <a:pPr>
+                        <a:defRPr sz="650" b="0">
+                          <a:solidFill>
+                            <a:srgbClr val="0D1117"/>
+                          </a:solidFill>
+                          <a:latin typeface="Inter"/>
+                        </a:defRPr>
+                      </a:pPr>
+                      <a:r>
+                        <a:rPr>
+                          <a:latin typeface="Inter"/>
+                        </a:rPr>
+                        <a:t>sha256:273814b06d98b1737c111b83024663b8e8600d4b69330958b9c6b9c61b827814</a:t>
                       </a:r>
                     </a:p>
                   </a:txBody>
@@ -10453,7 +10991,7 @@
                   </a:tcPr>
                 </a:tc>
               </a:tr>
-              <a:tr h="510758">
+              <a:tr h="460466">
                 <a:tc>
                   <a:txBody>
                     <a:bodyPr/>
@@ -10525,7 +11063,61 @@
                         <a:rPr>
                           <a:latin typeface="Inter"/>
                         </a:rPr>
+                        <a:t>gradient_tool</a:t>
+                      </a:r>
+                    </a:p>
+                  </a:txBody>
+                  <a:tcPr marL="54864" marR="54864" marT="27432" marB="27432" anchor="ctr">
+                    <a:solidFill>
+                      <a:srgbClr val="F5F7F9"/>
+                    </a:solidFill>
+                  </a:tcPr>
+                </a:tc>
+                <a:tc>
+                  <a:txBody>
+                    <a:bodyPr/>
+                    <a:lstStyle/>
+                    <a:p>
+                      <a:pPr>
+                        <a:defRPr sz="650" b="0">
+                          <a:solidFill>
+                            <a:srgbClr val="0D1117"/>
+                          </a:solidFill>
+                          <a:latin typeface="Inter"/>
+                        </a:defRPr>
+                      </a:pPr>
+                      <a:r>
+                        <a:rPr>
+                          <a:latin typeface="Inter"/>
+                        </a:rPr>
                         <a:t>get_manager_monitor_evidence</a:t>
+                      </a:r>
+                    </a:p>
+                  </a:txBody>
+                  <a:tcPr marL="54864" marR="54864" marT="27432" marB="27432" anchor="ctr">
+                    <a:solidFill>
+                      <a:srgbClr val="F5F7F9"/>
+                    </a:solidFill>
+                  </a:tcPr>
+                </a:tc>
+                <a:tc>
+                  <a:txBody>
+                    <a:bodyPr/>
+                    <a:lstStyle/>
+                    <a:p>
+                      <a:pPr>
+                        <a:defRPr sz="650" b="0">
+                          <a:solidFill>
+                            <a:srgbClr val="0D1117"/>
+                          </a:solidFill>
+                          <a:latin typeface="Inter"/>
+                        </a:defRPr>
+                      </a:pPr>
+                      <a:r>
+                        <a:rPr>
+                          <a:latin typeface="Inter"/>
+                        </a:rPr>
+                        <a:t>illustrative sample</a:t>
                       </a:r>
                     </a:p>
                   </a:txBody>
@@ -10568,9 +11160,9 @@
                     <a:lstStyle/>
                     <a:p>
                       <a:pPr>
-                        <a:defRPr sz="650" b="1">
+                        <a:defRPr sz="650" b="0">
                           <a:solidFill>
-                            <a:srgbClr val="C6F432"/>
+                            <a:srgbClr val="0D1117"/>
                           </a:solidFill>
                           <a:latin typeface="Inter"/>
                         </a:defRPr>
@@ -10579,7 +11171,7 @@
                         <a:rPr>
                           <a:latin typeface="Inter"/>
                         </a:rPr>
-                        <a:t>● passed</a:t>
+                        <a:t>Gradient-governed review evidence</a:t>
                       </a:r>
                     </a:p>
                   </a:txBody>
@@ -10606,7 +11198,34 @@
                         <a:rPr>
                           <a:latin typeface="Inter"/>
                         </a:rPr>
-                        <a:t>f337365b</a:t>
+                        <a:t>{'chip': 'passed', 'status': 'passed'}</a:t>
+                      </a:r>
+                    </a:p>
+                  </a:txBody>
+                  <a:tcPr marL="54864" marR="54864" marT="27432" marB="27432" anchor="ctr">
+                    <a:solidFill>
+                      <a:srgbClr val="F5F7F9"/>
+                    </a:solidFill>
+                  </a:tcPr>
+                </a:tc>
+                <a:tc>
+                  <a:txBody>
+                    <a:bodyPr/>
+                    <a:lstStyle/>
+                    <a:p>
+                      <a:pPr>
+                        <a:defRPr sz="650" b="0">
+                          <a:solidFill>
+                            <a:srgbClr val="0D1117"/>
+                          </a:solidFill>
+                          <a:latin typeface="Inter"/>
+                        </a:defRPr>
+                      </a:pPr>
+                      <a:r>
+                        <a:rPr>
+                          <a:latin typeface="Inter"/>
+                        </a:rPr>
+                        <a:t>sha256:2bdcc27a6e4cd1e329899b4d04e170b5c8d8495ae3ac85508662595e0ddba249</a:t>
                       </a:r>
                     </a:p>
                   </a:txBody>
@@ -10617,7 +11236,7 @@
                   </a:tcPr>
                 </a:tc>
               </a:tr>
-              <a:tr h="510760">
+              <a:tr h="460468">
                 <a:tc>
                   <a:txBody>
                     <a:bodyPr/>
@@ -10689,7 +11308,61 @@
                         <a:rPr>
                           <a:latin typeface="Inter"/>
                         </a:rPr>
+                        <a:t>gradient_tool</a:t>
+                      </a:r>
+                    </a:p>
+                  </a:txBody>
+                  <a:tcPr marL="54864" marR="54864" marT="27432" marB="27432" anchor="ctr">
+                    <a:solidFill>
+                      <a:srgbClr val="FFFFFF"/>
+                    </a:solidFill>
+                  </a:tcPr>
+                </a:tc>
+                <a:tc>
+                  <a:txBody>
+                    <a:bodyPr/>
+                    <a:lstStyle/>
+                    <a:p>
+                      <a:pPr>
+                        <a:defRPr sz="650" b="0">
+                          <a:solidFill>
+                            <a:srgbClr val="0D1117"/>
+                          </a:solidFill>
+                          <a:latin typeface="Inter"/>
+                        </a:defRPr>
+                      </a:pPr>
+                      <a:r>
+                        <a:rPr>
+                          <a:latin typeface="Inter"/>
+                        </a:rPr>
                         <a:t>get_firm_13f_portfolio_review</a:t>
+                      </a:r>
+                    </a:p>
+                  </a:txBody>
+                  <a:tcPr marL="54864" marR="54864" marT="27432" marB="27432" anchor="ctr">
+                    <a:solidFill>
+                      <a:srgbClr val="FFFFFF"/>
+                    </a:solidFill>
+                  </a:tcPr>
+                </a:tc>
+                <a:tc>
+                  <a:txBody>
+                    <a:bodyPr/>
+                    <a:lstStyle/>
+                    <a:p>
+                      <a:pPr>
+                        <a:defRPr sz="650" b="0">
+                          <a:solidFill>
+                            <a:srgbClr val="0D1117"/>
+                          </a:solidFill>
+                          <a:latin typeface="Inter"/>
+                        </a:defRPr>
+                      </a:pPr>
+                      <a:r>
+                        <a:rPr>
+                          <a:latin typeface="Inter"/>
+                        </a:rPr>
+                        <a:t>illustrative sample</a:t>
                       </a:r>
                     </a:p>
                   </a:txBody>
@@ -10732,9 +11405,9 @@
                     <a:lstStyle/>
                     <a:p>
                       <a:pPr>
-                        <a:defRPr sz="650" b="1">
+                        <a:defRPr sz="650" b="0">
                           <a:solidFill>
-                            <a:srgbClr val="C6F432"/>
+                            <a:srgbClr val="0D1117"/>
                           </a:solidFill>
                           <a:latin typeface="Inter"/>
                         </a:defRPr>
@@ -10743,13 +11416,13 @@
                         <a:rPr>
                           <a:latin typeface="Inter"/>
                         </a:rPr>
-                        <a:t>● passed</a:t>
+                        <a:t>Gradient-governed review evidence</a:t>
                       </a:r>
                     </a:p>
                   </a:txBody>
                   <a:tcPr marL="54864" marR="54864" marT="27432" marB="27432" anchor="ctr">
                     <a:solidFill>
-                      <a:srgbClr val="F5F7F9"/>
+                      <a:srgbClr val="FFFFFF"/>
                     </a:solidFill>
                   </a:tcPr>
                 </a:tc>
@@ -10770,7 +11443,34 @@
                         <a:rPr>
                           <a:latin typeface="Inter"/>
                         </a:rPr>
-                        <a:t>90d3de53</a:t>
+                        <a:t>{'chip': 'passed', 'status': 'passed'}</a:t>
+                      </a:r>
+                    </a:p>
+                  </a:txBody>
+                  <a:tcPr marL="54864" marR="54864" marT="27432" marB="27432" anchor="ctr">
+                    <a:solidFill>
+                      <a:srgbClr val="FFFFFF"/>
+                    </a:solidFill>
+                  </a:tcPr>
+                </a:tc>
+                <a:tc>
+                  <a:txBody>
+                    <a:bodyPr/>
+                    <a:lstStyle/>
+                    <a:p>
+                      <a:pPr>
+                        <a:defRPr sz="650" b="0">
+                          <a:solidFill>
+                            <a:srgbClr val="0D1117"/>
+                          </a:solidFill>
+                          <a:latin typeface="Inter"/>
+                        </a:defRPr>
+                      </a:pPr>
+                      <a:r>
+                        <a:rPr>
+                          <a:latin typeface="Inter"/>
+                        </a:rPr>
+                        <a:t>sha256:b978ab9ea42f3266f45899cd2105866e57f56016496c2bd775d7260eab4fd245</a:t>
                       </a:r>
                     </a:p>
                   </a:txBody>
@@ -10787,7 +11487,49 @@
       </p:graphicFrame>
       <p:sp>
         <p:nvSpPr>
-          <p:cNvPr id="9" name="TextBox 8"/>
+          <p:cNvPr id="10" name="TextBox 9"/>
+          <p:cNvSpPr txBox="1"/>
+          <p:nvPr/>
+        </p:nvSpPr>
+        <p:spPr>
+          <a:xfrm>
+            <a:off x="640080" y="3460354"/>
+            <a:ext cx="10908792" cy="164592"/>
+          </a:xfrm>
+          <a:prstGeom prst="rect">
+            <a:avLst/>
+          </a:prstGeom>
+          <a:noFill/>
+        </p:spPr>
+        <p:txBody>
+          <a:bodyPr wrap="none" lIns="9144" rIns="9144" tIns="9144" bIns="9144" anchor="t">
+            <a:spAutoFit/>
+          </a:bodyPr>
+          <a:lstStyle/>
+          <a:p>
+            <a:pPr algn="l">
+              <a:spcAft>
+                <a:spcPts val="0"/>
+              </a:spcAft>
+              <a:defRPr sz="680" b="0">
+                <a:solidFill>
+                  <a:srgbClr val="8A94A1"/>
+                </a:solidFill>
+                <a:latin typeface="Inter"/>
+              </a:defRPr>
+            </a:pPr>
+            <a:r>
+              <a:rPr>
+                <a:latin typeface="Inter"/>
+              </a:rPr>
+              <a:t>Illustrative, Gradient Maintained — demo data, not the client's holdings or managers. All organizations, portfolios, managers and results in this public example are illustrative.</a:t>
+            </a:r>
+          </a:p>
+        </p:txBody>
+      </p:sp>
+      <p:sp>
+        <p:nvSpPr>
+          <p:cNvPr id="11" name="TextBox 10"/>
           <p:cNvSpPr txBox="1"/>
           <p:nvPr/>
         </p:nvSpPr>
@@ -10860,14 +11602,14 @@
               <a:rPr>
                 <a:latin typeface="Inter"/>
               </a:rPr>
-              <a:t>•  This fictional TEST report is a diligence aid, not investment, legal or compliance advice. No hire, fire, redemption, termination or allocation recommendation is made.</a:t>
-            </a:r>
-          </a:p>
-        </p:txBody>
-      </p:sp>
-      <p:sp>
-        <p:nvSpPr>
-          <p:cNvPr id="10" name="Rectangle 9"/>
+              <a:t>•  This sample report is a diligence aid, not investment, legal or compliance advice. No hire, fire, redemption, termination or allocation recommendation is made.</a:t>
+            </a:r>
+          </a:p>
+        </p:txBody>
+      </p:sp>
+      <p:sp>
+        <p:nvSpPr>
+          <p:cNvPr id="12" name="Rectangle 11"/>
           <p:cNvSpPr/>
           <p:nvPr/>
         </p:nvSpPr>
@@ -10916,7 +11658,7 @@
       </p:sp>
       <p:sp>
         <p:nvSpPr>
-          <p:cNvPr id="11" name="TextBox 10"/>
+          <p:cNvPr id="13" name="TextBox 12"/>
           <p:cNvSpPr txBox="1"/>
           <p:nvPr/>
         </p:nvSpPr>
@@ -10958,7 +11700,7 @@
       </p:sp>
       <p:sp>
         <p:nvSpPr>
-          <p:cNvPr id="12" name="TextBox 11"/>
+          <p:cNvPr id="14" name="TextBox 13"/>
           <p:cNvSpPr txBox="1"/>
           <p:nvPr/>
         </p:nvSpPr>
@@ -10993,14 +11735,14 @@
               <a:rPr>
                 <a:latin typeface="Inter"/>
               </a:rPr>
-              <a:t>RENDER TEST — partial sample, not a full ODD report · Data as of 2026-10-01 (Form ADV); 2026-08-14 (Form 13F)</a:t>
-            </a:r>
-          </a:p>
-        </p:txBody>
-      </p:sp>
-      <p:sp>
-        <p:nvSpPr>
-          <p:cNvPr id="13" name="TextBox 12"/>
+              <a:t>Confidential — operational due diligence review · Data as of 2026-10-01 (Form ADV); 2026-08-14 (Form 13F)</a:t>
+            </a:r>
+          </a:p>
+        </p:txBody>
+      </p:sp>
+      <p:sp>
+        <p:nvSpPr>
+          <p:cNvPr id="15" name="TextBox 14"/>
           <p:cNvSpPr txBox="1"/>
           <p:nvPr/>
         </p:nvSpPr>
@@ -11116,7 +11858,7 @@
         <p:spPr>
           <a:xfrm>
             <a:off x="640080" y="329184"/>
-            <a:ext cx="9875520" cy="182880"/>
+            <a:ext cx="5303520" cy="182880"/>
           </a:xfrm>
           <a:prstGeom prst="rect">
             <a:avLst/>
@@ -11144,7 +11886,7 @@
               <a:rPr>
                 <a:latin typeface="Inter"/>
               </a:rPr>
-              <a:t>RENDER TEST OF THE SHARED RENDERER WITH ODD BLOCKS</a:t>
+              <a:t>PUBLIC SAMPLE OF THE SHARED RENDERER WITH ODD BLOCKS</a:t>
             </a:r>
           </a:p>
         </p:txBody>
@@ -11152,6 +11894,48 @@
       <p:sp>
         <p:nvSpPr>
           <p:cNvPr id="4" name="TextBox 3"/>
+          <p:cNvSpPr txBox="1"/>
+          <p:nvPr/>
+        </p:nvSpPr>
+        <p:spPr>
+          <a:xfrm>
+            <a:off x="5897880" y="310896"/>
+            <a:ext cx="4800600" cy="256032"/>
+          </a:xfrm>
+          <a:prstGeom prst="rect">
+            <a:avLst/>
+          </a:prstGeom>
+          <a:noFill/>
+        </p:spPr>
+        <p:txBody>
+          <a:bodyPr wrap="none" lIns="9144" rIns="9144" tIns="9144" bIns="9144" anchor="t">
+            <a:spAutoFit/>
+          </a:bodyPr>
+          <a:lstStyle/>
+          <a:p>
+            <a:pPr algn="r">
+              <a:spcAft>
+                <a:spcPts val="0"/>
+              </a:spcAft>
+              <a:defRPr sz="680" b="1">
+                <a:solidFill>
+                  <a:srgbClr val="4F6B00"/>
+                </a:solidFill>
+                <a:latin typeface="Inter"/>
+              </a:defRPr>
+            </a:pPr>
+            <a:r>
+              <a:rPr>
+                <a:latin typeface="Inter"/>
+              </a:rPr>
+              <a:t>Illustrative, Gradient Maintained — demo data, not the client's holdings or managers</a:t>
+            </a:r>
+          </a:p>
+        </p:txBody>
+      </p:sp>
+      <p:sp>
+        <p:nvSpPr>
+          <p:cNvPr id="5" name="TextBox 4"/>
           <p:cNvSpPr txBox="1"/>
           <p:nvPr/>
         </p:nvSpPr>
@@ -11193,7 +11977,7 @@
       </p:sp>
       <p:sp>
         <p:nvSpPr>
-          <p:cNvPr id="5" name="Rectangle 4"/>
+          <p:cNvPr id="6" name="Rectangle 5"/>
           <p:cNvSpPr/>
           <p:nvPr/>
         </p:nvSpPr>
@@ -11242,7 +12026,7 @@
       </p:sp>
       <p:sp>
         <p:nvSpPr>
-          <p:cNvPr id="6" name="Rectangle 5"/>
+          <p:cNvPr id="7" name="Rectangle 6"/>
           <p:cNvSpPr/>
           <p:nvPr/>
         </p:nvSpPr>
@@ -11291,7 +12075,7 @@
       </p:sp>
       <p:sp>
         <p:nvSpPr>
-          <p:cNvPr id="7" name="TextBox 6"/>
+          <p:cNvPr id="8" name="TextBox 7"/>
           <p:cNvSpPr txBox="1"/>
           <p:nvPr/>
         </p:nvSpPr>
@@ -11333,7 +12117,7 @@
       </p:sp>
       <p:sp>
         <p:nvSpPr>
-          <p:cNvPr id="8" name="Rectangle 7"/>
+          <p:cNvPr id="9" name="Rectangle 8"/>
           <p:cNvSpPr/>
           <p:nvPr/>
         </p:nvSpPr>
@@ -11382,7 +12166,7 @@
       </p:sp>
       <p:sp>
         <p:nvSpPr>
-          <p:cNvPr id="9" name="Rectangle 8"/>
+          <p:cNvPr id="10" name="Rectangle 9"/>
           <p:cNvSpPr/>
           <p:nvPr/>
         </p:nvSpPr>
@@ -11431,7 +12215,7 @@
       </p:sp>
       <p:sp>
         <p:nvSpPr>
-          <p:cNvPr id="10" name="TextBox 9"/>
+          <p:cNvPr id="11" name="TextBox 10"/>
           <p:cNvSpPr txBox="1"/>
           <p:nvPr/>
         </p:nvSpPr>
@@ -11473,7 +12257,7 @@
       </p:sp>
       <p:sp>
         <p:nvSpPr>
-          <p:cNvPr id="11" name="TextBox 10"/>
+          <p:cNvPr id="12" name="TextBox 11"/>
           <p:cNvSpPr txBox="1"/>
           <p:nvPr/>
         </p:nvSpPr>
@@ -11515,7 +12299,7 @@
       </p:sp>
       <p:sp>
         <p:nvSpPr>
-          <p:cNvPr id="12" name="Rectangle 11"/>
+          <p:cNvPr id="13" name="Rectangle 12"/>
           <p:cNvSpPr/>
           <p:nvPr/>
         </p:nvSpPr>
@@ -11564,7 +12348,7 @@
       </p:sp>
       <p:sp>
         <p:nvSpPr>
-          <p:cNvPr id="13" name="Rectangle 12"/>
+          <p:cNvPr id="14" name="Rectangle 13"/>
           <p:cNvSpPr/>
           <p:nvPr/>
         </p:nvSpPr>
@@ -11613,7 +12397,7 @@
       </p:sp>
       <p:sp>
         <p:nvSpPr>
-          <p:cNvPr id="14" name="TextBox 13"/>
+          <p:cNvPr id="15" name="TextBox 14"/>
           <p:cNvSpPr txBox="1"/>
           <p:nvPr/>
         </p:nvSpPr>
@@ -11655,7 +12439,7 @@
       </p:sp>
       <p:sp>
         <p:nvSpPr>
-          <p:cNvPr id="15" name="TextBox 14"/>
+          <p:cNvPr id="16" name="TextBox 15"/>
           <p:cNvSpPr txBox="1"/>
           <p:nvPr/>
         </p:nvSpPr>
@@ -11697,7 +12481,7 @@
       </p:sp>
       <p:sp>
         <p:nvSpPr>
-          <p:cNvPr id="16" name="TextBox 15"/>
+          <p:cNvPr id="17" name="TextBox 16"/>
           <p:cNvSpPr txBox="1"/>
           <p:nvPr/>
         </p:nvSpPr>
@@ -11739,7 +12523,7 @@
       </p:sp>
       <p:sp>
         <p:nvSpPr>
-          <p:cNvPr id="17" name="Rectangle 16"/>
+          <p:cNvPr id="18" name="Rectangle 17"/>
           <p:cNvSpPr/>
           <p:nvPr/>
         </p:nvSpPr>
@@ -11788,7 +12572,7 @@
       </p:sp>
       <p:sp>
         <p:nvSpPr>
-          <p:cNvPr id="18" name="Rectangle 17"/>
+          <p:cNvPr id="19" name="Rectangle 18"/>
           <p:cNvSpPr/>
           <p:nvPr/>
         </p:nvSpPr>
@@ -11837,7 +12621,7 @@
       </p:sp>
       <p:sp>
         <p:nvSpPr>
-          <p:cNvPr id="19" name="TextBox 18"/>
+          <p:cNvPr id="20" name="TextBox 19"/>
           <p:cNvSpPr txBox="1"/>
           <p:nvPr/>
         </p:nvSpPr>
@@ -11879,7 +12663,7 @@
       </p:sp>
       <p:sp>
         <p:nvSpPr>
-          <p:cNvPr id="20" name="TextBox 19"/>
+          <p:cNvPr id="21" name="TextBox 20"/>
           <p:cNvSpPr txBox="1"/>
           <p:nvPr/>
         </p:nvSpPr>
@@ -11921,7 +12705,7 @@
       </p:sp>
       <p:sp>
         <p:nvSpPr>
-          <p:cNvPr id="21" name="TextBox 20"/>
+          <p:cNvPr id="22" name="TextBox 21"/>
           <p:cNvSpPr txBox="1"/>
           <p:nvPr/>
         </p:nvSpPr>
@@ -11963,7 +12747,7 @@
       </p:sp>
       <p:sp>
         <p:nvSpPr>
-          <p:cNvPr id="22" name="Rectangle 21"/>
+          <p:cNvPr id="23" name="Rectangle 22"/>
           <p:cNvSpPr/>
           <p:nvPr/>
         </p:nvSpPr>
@@ -12012,7 +12796,7 @@
       </p:sp>
       <p:sp>
         <p:nvSpPr>
-          <p:cNvPr id="23" name="Rectangle 22"/>
+          <p:cNvPr id="24" name="Rectangle 23"/>
           <p:cNvSpPr/>
           <p:nvPr/>
         </p:nvSpPr>
@@ -12061,7 +12845,7 @@
       </p:sp>
       <p:sp>
         <p:nvSpPr>
-          <p:cNvPr id="24" name="TextBox 23"/>
+          <p:cNvPr id="25" name="TextBox 24"/>
           <p:cNvSpPr txBox="1"/>
           <p:nvPr/>
         </p:nvSpPr>
@@ -12103,7 +12887,7 @@
       </p:sp>
       <p:sp>
         <p:nvSpPr>
-          <p:cNvPr id="25" name="TextBox 24"/>
+          <p:cNvPr id="26" name="TextBox 25"/>
           <p:cNvSpPr txBox="1"/>
           <p:nvPr/>
         </p:nvSpPr>
@@ -12145,7 +12929,7 @@
       </p:sp>
       <p:sp>
         <p:nvSpPr>
-          <p:cNvPr id="26" name="TextBox 25"/>
+          <p:cNvPr id="27" name="TextBox 26"/>
           <p:cNvSpPr txBox="1"/>
           <p:nvPr/>
         </p:nvSpPr>
@@ -12187,7 +12971,7 @@
       </p:sp>
       <p:sp>
         <p:nvSpPr>
-          <p:cNvPr id="27" name="Rectangle 26"/>
+          <p:cNvPr id="28" name="Rectangle 27"/>
           <p:cNvSpPr/>
           <p:nvPr/>
         </p:nvSpPr>
@@ -12236,7 +13020,7 @@
       </p:sp>
       <p:sp>
         <p:nvSpPr>
-          <p:cNvPr id="28" name="Rectangle 27"/>
+          <p:cNvPr id="29" name="Rectangle 28"/>
           <p:cNvSpPr/>
           <p:nvPr/>
         </p:nvSpPr>
@@ -12285,7 +13069,7 @@
       </p:sp>
       <p:sp>
         <p:nvSpPr>
-          <p:cNvPr id="29" name="TextBox 28"/>
+          <p:cNvPr id="30" name="TextBox 29"/>
           <p:cNvSpPr txBox="1"/>
           <p:nvPr/>
         </p:nvSpPr>
@@ -12327,7 +13111,7 @@
       </p:sp>
       <p:sp>
         <p:nvSpPr>
-          <p:cNvPr id="30" name="TextBox 29"/>
+          <p:cNvPr id="31" name="TextBox 30"/>
           <p:cNvSpPr txBox="1"/>
           <p:nvPr/>
         </p:nvSpPr>
@@ -12369,7 +13153,7 @@
       </p:sp>
       <p:sp>
         <p:nvSpPr>
-          <p:cNvPr id="31" name="TextBox 30"/>
+          <p:cNvPr id="32" name="TextBox 31"/>
           <p:cNvSpPr txBox="1"/>
           <p:nvPr/>
         </p:nvSpPr>
@@ -12411,7 +13195,7 @@
       </p:sp>
       <p:sp>
         <p:nvSpPr>
-          <p:cNvPr id="32" name="Rectangle 31"/>
+          <p:cNvPr id="33" name="Rectangle 32"/>
           <p:cNvSpPr/>
           <p:nvPr/>
         </p:nvSpPr>
@@ -12460,7 +13244,7 @@
       </p:sp>
       <p:sp>
         <p:nvSpPr>
-          <p:cNvPr id="33" name="TextBox 32"/>
+          <p:cNvPr id="34" name="TextBox 33"/>
           <p:cNvSpPr txBox="1"/>
           <p:nvPr/>
         </p:nvSpPr>
@@ -12502,7 +13286,7 @@
       </p:sp>
       <p:sp>
         <p:nvSpPr>
-          <p:cNvPr id="34" name="TextBox 33"/>
+          <p:cNvPr id="35" name="TextBox 34"/>
           <p:cNvSpPr txBox="1"/>
           <p:nvPr/>
         </p:nvSpPr>
@@ -12537,14 +13321,14 @@
               <a:rPr>
                 <a:latin typeface="Inter"/>
               </a:rPr>
-              <a:t>RENDER TEST — partial sample, not a full ODD report · Data as of 2026-10-01 (Form ADV); 2026-08-14 (Form 13F)</a:t>
-            </a:r>
-          </a:p>
-        </p:txBody>
-      </p:sp>
-      <p:sp>
-        <p:nvSpPr>
-          <p:cNvPr id="35" name="TextBox 34"/>
+              <a:t>Confidential — operational due diligence review · Data as of 2026-10-01 (Form ADV); 2026-08-14 (Form 13F)</a:t>
+            </a:r>
+          </a:p>
+        </p:txBody>
+      </p:sp>
+      <p:sp>
+        <p:nvSpPr>
+          <p:cNvPr id="36" name="TextBox 35"/>
           <p:cNvSpPr txBox="1"/>
           <p:nvPr/>
         </p:nvSpPr>
@@ -12660,7 +13444,7 @@
         <p:spPr>
           <a:xfrm>
             <a:off x="640080" y="329184"/>
-            <a:ext cx="9875520" cy="182880"/>
+            <a:ext cx="5303520" cy="182880"/>
           </a:xfrm>
           <a:prstGeom prst="rect">
             <a:avLst/>
@@ -12688,7 +13472,7 @@
               <a:rPr>
                 <a:latin typeface="Inter"/>
               </a:rPr>
-              <a:t>RENDER TEST OF THE SHARED RENDERER WITH ODD BLOCKS</a:t>
+              <a:t>PUBLIC SAMPLE OF THE SHARED RENDERER WITH ODD BLOCKS</a:t>
             </a:r>
           </a:p>
         </p:txBody>
@@ -12696,6 +13480,48 @@
       <p:sp>
         <p:nvSpPr>
           <p:cNvPr id="4" name="TextBox 3"/>
+          <p:cNvSpPr txBox="1"/>
+          <p:nvPr/>
+        </p:nvSpPr>
+        <p:spPr>
+          <a:xfrm>
+            <a:off x="5897880" y="310896"/>
+            <a:ext cx="4800600" cy="256032"/>
+          </a:xfrm>
+          <a:prstGeom prst="rect">
+            <a:avLst/>
+          </a:prstGeom>
+          <a:noFill/>
+        </p:spPr>
+        <p:txBody>
+          <a:bodyPr wrap="none" lIns="9144" rIns="9144" tIns="9144" bIns="9144" anchor="t">
+            <a:spAutoFit/>
+          </a:bodyPr>
+          <a:lstStyle/>
+          <a:p>
+            <a:pPr algn="r">
+              <a:spcAft>
+                <a:spcPts val="0"/>
+              </a:spcAft>
+              <a:defRPr sz="680" b="1">
+                <a:solidFill>
+                  <a:srgbClr val="4F6B00"/>
+                </a:solidFill>
+                <a:latin typeface="Inter"/>
+              </a:defRPr>
+            </a:pPr>
+            <a:r>
+              <a:rPr>
+                <a:latin typeface="Inter"/>
+              </a:rPr>
+              <a:t>Illustrative, Gradient Maintained — demo data, not the client's holdings or managers</a:t>
+            </a:r>
+          </a:p>
+        </p:txBody>
+      </p:sp>
+      <p:sp>
+        <p:nvSpPr>
+          <p:cNvPr id="5" name="TextBox 4"/>
           <p:cNvSpPr txBox="1"/>
           <p:nvPr/>
         </p:nvSpPr>
@@ -12737,7 +13563,7 @@
       </p:sp>
       <p:sp>
         <p:nvSpPr>
-          <p:cNvPr id="5" name="Rectangle 4"/>
+          <p:cNvPr id="6" name="Rectangle 5"/>
           <p:cNvSpPr/>
           <p:nvPr/>
         </p:nvSpPr>
@@ -12786,7 +13612,7 @@
       </p:sp>
       <p:sp>
         <p:nvSpPr>
-          <p:cNvPr id="6" name="Rectangle 5"/>
+          <p:cNvPr id="7" name="Rectangle 6"/>
           <p:cNvSpPr/>
           <p:nvPr/>
         </p:nvSpPr>
@@ -12835,7 +13661,7 @@
       </p:sp>
       <p:sp>
         <p:nvSpPr>
-          <p:cNvPr id="7" name="TextBox 6"/>
+          <p:cNvPr id="8" name="TextBox 7"/>
           <p:cNvSpPr txBox="1"/>
           <p:nvPr/>
         </p:nvSpPr>
@@ -12877,7 +13703,7 @@
       </p:sp>
       <p:sp>
         <p:nvSpPr>
-          <p:cNvPr id="8" name="TextBox 7"/>
+          <p:cNvPr id="9" name="TextBox 8"/>
           <p:cNvSpPr txBox="1"/>
           <p:nvPr/>
         </p:nvSpPr>
@@ -12919,7 +13745,7 @@
       </p:sp>
       <p:graphicFrame>
         <p:nvGraphicFramePr>
-          <p:cNvPr id="9" name="Table 8"/>
+          <p:cNvPr id="10" name="Table 9"/>
           <p:cNvGraphicFramePr>
             <a:graphicFrameLocks noGrp="1"/>
           </p:cNvGraphicFramePr>
@@ -12927,7 +13753,7 @@
         </p:nvGraphicFramePr>
         <p:xfrm>
           <a:off x="640080" y="1600200"/>
-          <a:ext cx="10908792" cy="2933328"/>
+          <a:ext cx="10908792" cy="2957582"/>
         </p:xfrm>
         <a:graphic>
           <a:graphicData uri="http://schemas.openxmlformats.org/drawingml/2006/table">
@@ -12940,7 +13766,7 @@
                 <a:gridCol w="4448556"/>
                 <a:gridCol w="4448556"/>
               </a:tblGrid>
-              <a:tr h="586665">
+              <a:tr h="591516">
                 <a:tc>
                   <a:txBody>
                     <a:bodyPr/>
@@ -13023,7 +13849,7 @@
                   </a:tcPr>
                 </a:tc>
               </a:tr>
-              <a:tr h="586665">
+              <a:tr h="591516">
                 <a:tc>
                   <a:txBody>
                     <a:bodyPr/>
@@ -13106,7 +13932,7 @@
                   </a:tcPr>
                 </a:tc>
               </a:tr>
-              <a:tr h="586665">
+              <a:tr h="591516">
                 <a:tc>
                   <a:txBody>
                     <a:bodyPr/>
@@ -13189,7 +14015,7 @@
                   </a:tcPr>
                 </a:tc>
               </a:tr>
-              <a:tr h="586665">
+              <a:tr h="591516">
                 <a:tc>
                   <a:txBody>
                     <a:bodyPr/>
@@ -13272,7 +14098,7 @@
                   </a:tcPr>
                 </a:tc>
               </a:tr>
-              <a:tr h="586668">
+              <a:tr h="591518">
                 <a:tc>
                   <a:txBody>
                     <a:bodyPr/>
@@ -13361,14 +14187,14 @@
       </p:graphicFrame>
       <p:sp>
         <p:nvSpPr>
-          <p:cNvPr id="10" name="Rectangle 9"/>
+          <p:cNvPr id="11" name="Rectangle 10"/>
           <p:cNvSpPr/>
           <p:nvPr/>
         </p:nvSpPr>
         <p:spPr>
           <a:xfrm>
-            <a:off x="640080" y="4643256"/>
-            <a:ext cx="10908792" cy="1574663"/>
+            <a:off x="640080" y="4667510"/>
+            <a:ext cx="10908792" cy="1550409"/>
           </a:xfrm>
           <a:prstGeom prst="rect">
             <a:avLst/>
@@ -13410,14 +14236,14 @@
       </p:sp>
       <p:sp>
         <p:nvSpPr>
-          <p:cNvPr id="11" name="Rectangle 10"/>
+          <p:cNvPr id="12" name="Rectangle 11"/>
           <p:cNvSpPr/>
           <p:nvPr/>
         </p:nvSpPr>
         <p:spPr>
           <a:xfrm>
-            <a:off x="640080" y="4643256"/>
-            <a:ext cx="54864" cy="1574663"/>
+            <a:off x="640080" y="4667510"/>
+            <a:ext cx="54864" cy="1550409"/>
           </a:xfrm>
           <a:prstGeom prst="rect">
             <a:avLst/>
@@ -13459,13 +14285,13 @@
       </p:sp>
       <p:sp>
         <p:nvSpPr>
-          <p:cNvPr id="12" name="TextBox 11"/>
+          <p:cNvPr id="13" name="TextBox 12"/>
           <p:cNvSpPr txBox="1"/>
           <p:nvPr/>
         </p:nvSpPr>
         <p:spPr>
           <a:xfrm>
-            <a:off x="804671" y="4752984"/>
+            <a:off x="804671" y="4777238"/>
             <a:ext cx="10616184" cy="228600"/>
           </a:xfrm>
           <a:prstGeom prst="rect">
@@ -13501,14 +14327,14 @@
       </p:sp>
       <p:sp>
         <p:nvSpPr>
-          <p:cNvPr id="13" name="TextBox 12"/>
+          <p:cNvPr id="14" name="TextBox 13"/>
           <p:cNvSpPr txBox="1"/>
           <p:nvPr/>
         </p:nvSpPr>
         <p:spPr>
           <a:xfrm>
-            <a:off x="804671" y="5036448"/>
-            <a:ext cx="10616184" cy="1090031"/>
+            <a:off x="804671" y="5060702"/>
+            <a:ext cx="10616184" cy="1065777"/>
           </a:xfrm>
           <a:prstGeom prst="rect">
             <a:avLst/>
@@ -13536,14 +14362,14 @@
               <a:rPr>
                 <a:latin typeface="Inter"/>
               </a:rPr>
-              <a:t>Observation: The fictional TEST report carries one clear headline signal [S1]. Why it matters: This signal focuses oversight on the report's most decision-relevant condition. Uncertainty: Evidence coverage may exclude newer or more detailed observations. What would change the view: A governed refresh showing a different signal or breached threshold.</a:t>
-            </a:r>
-          </a:p>
-        </p:txBody>
-      </p:sp>
-      <p:sp>
-        <p:nvSpPr>
-          <p:cNvPr id="14" name="Rectangle 13"/>
+              <a:t>Observation: The sample report carries one clear headline signal [S1]. Why it matters: This signal focuses oversight on the report's most decision-relevant condition. Uncertainty: Evidence coverage may exclude newer or more detailed observations. What would change the view: A governed refresh showing a different signal or breached threshold.</a:t>
+            </a:r>
+          </a:p>
+        </p:txBody>
+      </p:sp>
+      <p:sp>
+        <p:nvSpPr>
+          <p:cNvPr id="15" name="Rectangle 14"/>
           <p:cNvSpPr/>
           <p:nvPr/>
         </p:nvSpPr>
@@ -13592,7 +14418,7 @@
       </p:sp>
       <p:sp>
         <p:nvSpPr>
-          <p:cNvPr id="15" name="TextBox 14"/>
+          <p:cNvPr id="16" name="TextBox 15"/>
           <p:cNvSpPr txBox="1"/>
           <p:nvPr/>
         </p:nvSpPr>
@@ -13634,7 +14460,7 @@
       </p:sp>
       <p:sp>
         <p:nvSpPr>
-          <p:cNvPr id="16" name="TextBox 15"/>
+          <p:cNvPr id="17" name="TextBox 16"/>
           <p:cNvSpPr txBox="1"/>
           <p:nvPr/>
         </p:nvSpPr>
@@ -13669,14 +14495,14 @@
               <a:rPr>
                 <a:latin typeface="Inter"/>
               </a:rPr>
-              <a:t>RENDER TEST — partial sample, not a full ODD report · Data as of 2026-10-01 (Form ADV); 2026-08-14 (Form 13F)</a:t>
-            </a:r>
-          </a:p>
-        </p:txBody>
-      </p:sp>
-      <p:sp>
-        <p:nvSpPr>
-          <p:cNvPr id="17" name="TextBox 16"/>
+              <a:t>Confidential — operational due diligence review · Data as of 2026-10-01 (Form ADV); 2026-08-14 (Form 13F)</a:t>
+            </a:r>
+          </a:p>
+        </p:txBody>
+      </p:sp>
+      <p:sp>
+        <p:nvSpPr>
+          <p:cNvPr id="18" name="TextBox 17"/>
           <p:cNvSpPr txBox="1"/>
           <p:nvPr/>
         </p:nvSpPr>
@@ -13792,7 +14618,7 @@
         <p:spPr>
           <a:xfrm>
             <a:off x="640080" y="329184"/>
-            <a:ext cx="9875520" cy="182880"/>
+            <a:ext cx="5303520" cy="182880"/>
           </a:xfrm>
           <a:prstGeom prst="rect">
             <a:avLst/>
@@ -13820,7 +14646,7 @@
               <a:rPr>
                 <a:latin typeface="Inter"/>
               </a:rPr>
-              <a:t>RENDER TEST OF THE SHARED RENDERER WITH ODD BLOCKS</a:t>
+              <a:t>PUBLIC SAMPLE OF THE SHARED RENDERER WITH ODD BLOCKS</a:t>
             </a:r>
           </a:p>
         </p:txBody>
@@ -13828,6 +14654,48 @@
       <p:sp>
         <p:nvSpPr>
           <p:cNvPr id="4" name="TextBox 3"/>
+          <p:cNvSpPr txBox="1"/>
+          <p:nvPr/>
+        </p:nvSpPr>
+        <p:spPr>
+          <a:xfrm>
+            <a:off x="5897880" y="310896"/>
+            <a:ext cx="4800600" cy="256032"/>
+          </a:xfrm>
+          <a:prstGeom prst="rect">
+            <a:avLst/>
+          </a:prstGeom>
+          <a:noFill/>
+        </p:spPr>
+        <p:txBody>
+          <a:bodyPr wrap="none" lIns="9144" rIns="9144" tIns="9144" bIns="9144" anchor="t">
+            <a:spAutoFit/>
+          </a:bodyPr>
+          <a:lstStyle/>
+          <a:p>
+            <a:pPr algn="r">
+              <a:spcAft>
+                <a:spcPts val="0"/>
+              </a:spcAft>
+              <a:defRPr sz="680" b="1">
+                <a:solidFill>
+                  <a:srgbClr val="4F6B00"/>
+                </a:solidFill>
+                <a:latin typeface="Inter"/>
+              </a:defRPr>
+            </a:pPr>
+            <a:r>
+              <a:rPr>
+                <a:latin typeface="Inter"/>
+              </a:rPr>
+              <a:t>Illustrative, Gradient Maintained — demo data, not the client's holdings or managers</a:t>
+            </a:r>
+          </a:p>
+        </p:txBody>
+      </p:sp>
+      <p:sp>
+        <p:nvSpPr>
+          <p:cNvPr id="5" name="TextBox 4"/>
           <p:cNvSpPr txBox="1"/>
           <p:nvPr/>
         </p:nvSpPr>
@@ -13869,7 +14737,7 @@
       </p:sp>
       <p:sp>
         <p:nvSpPr>
-          <p:cNvPr id="5" name="Rectangle 4"/>
+          <p:cNvPr id="6" name="Rectangle 5"/>
           <p:cNvSpPr/>
           <p:nvPr/>
         </p:nvSpPr>
@@ -13918,7 +14786,7 @@
       </p:sp>
       <p:sp>
         <p:nvSpPr>
-          <p:cNvPr id="6" name="Rectangle 5"/>
+          <p:cNvPr id="7" name="Rectangle 6"/>
           <p:cNvSpPr/>
           <p:nvPr/>
         </p:nvSpPr>
@@ -13967,7 +14835,7 @@
       </p:sp>
       <p:sp>
         <p:nvSpPr>
-          <p:cNvPr id="7" name="TextBox 6"/>
+          <p:cNvPr id="8" name="TextBox 7"/>
           <p:cNvSpPr txBox="1"/>
           <p:nvPr/>
         </p:nvSpPr>
@@ -14009,14 +14877,14 @@
       </p:sp>
       <p:sp>
         <p:nvSpPr>
-          <p:cNvPr id="8" name="Rectangle 7"/>
+          <p:cNvPr id="9" name="Rectangle 8"/>
           <p:cNvSpPr/>
           <p:nvPr/>
         </p:nvSpPr>
         <p:spPr>
           <a:xfrm>
             <a:off x="640080" y="1325880"/>
-            <a:ext cx="10908792" cy="2339495"/>
+            <a:ext cx="10908792" cy="2373068"/>
           </a:xfrm>
           <a:prstGeom prst="rect">
             <a:avLst/>
@@ -14058,14 +14926,14 @@
       </p:sp>
       <p:sp>
         <p:nvSpPr>
-          <p:cNvPr id="9" name="Rectangle 8"/>
+          <p:cNvPr id="10" name="Rectangle 9"/>
           <p:cNvSpPr/>
           <p:nvPr/>
         </p:nvSpPr>
         <p:spPr>
           <a:xfrm>
             <a:off x="640080" y="1325880"/>
-            <a:ext cx="54864" cy="2339495"/>
+            <a:ext cx="54864" cy="2373068"/>
           </a:xfrm>
           <a:prstGeom prst="rect">
             <a:avLst/>
@@ -14107,7 +14975,7 @@
       </p:sp>
       <p:sp>
         <p:nvSpPr>
-          <p:cNvPr id="10" name="TextBox 9"/>
+          <p:cNvPr id="11" name="TextBox 10"/>
           <p:cNvSpPr txBox="1"/>
           <p:nvPr/>
         </p:nvSpPr>
@@ -14149,14 +15017,14 @@
       </p:sp>
       <p:sp>
         <p:nvSpPr>
-          <p:cNvPr id="11" name="TextBox 10"/>
+          <p:cNvPr id="12" name="TextBox 11"/>
           <p:cNvSpPr txBox="1"/>
           <p:nvPr/>
         </p:nvSpPr>
         <p:spPr>
           <a:xfrm>
             <a:off x="804671" y="1719072"/>
-            <a:ext cx="10616184" cy="1854863"/>
+            <a:ext cx="10616184" cy="1888436"/>
           </a:xfrm>
           <a:prstGeom prst="rect">
             <a:avLst/>
@@ -14184,21 +15052,21 @@
               <a:rPr>
                 <a:latin typeface="Inter"/>
               </a:rPr>
-              <a:t>Observation: Regulatory AUM is $12.4B in the TEST evidence [S2]. Why it matters: This measure establishes the baseline for comparing later governed results. Uncertainty: The source basis may omit newer observations outside this fixture. What would change the view: A refreshed source report showing a change above 1%.</a:t>
-            </a:r>
-          </a:p>
-        </p:txBody>
-      </p:sp>
-      <p:sp>
-        <p:nvSpPr>
-          <p:cNvPr id="12" name="Rectangle 11"/>
+              <a:t>Observation: Regulatory AUM is $12.4B in the review evidence [S2]. Why it matters: This measure establishes the baseline for comparing later governed results. Uncertainty: The source basis may omit newer observations outside the reviewed evidence. What would change the view: A refreshed source report showing a change above 1%.</a:t>
+            </a:r>
+          </a:p>
+        </p:txBody>
+      </p:sp>
+      <p:sp>
+        <p:nvSpPr>
+          <p:cNvPr id="13" name="Rectangle 12"/>
           <p:cNvSpPr/>
           <p:nvPr/>
         </p:nvSpPr>
         <p:spPr>
           <a:xfrm>
-            <a:off x="640080" y="3775103"/>
-            <a:ext cx="10908792" cy="2442816"/>
+            <a:off x="640080" y="3808676"/>
+            <a:ext cx="10908792" cy="2409243"/>
           </a:xfrm>
           <a:prstGeom prst="rect">
             <a:avLst/>
@@ -14240,14 +15108,14 @@
       </p:sp>
       <p:sp>
         <p:nvSpPr>
-          <p:cNvPr id="13" name="Rectangle 12"/>
+          <p:cNvPr id="14" name="Rectangle 13"/>
           <p:cNvSpPr/>
           <p:nvPr/>
         </p:nvSpPr>
         <p:spPr>
           <a:xfrm>
-            <a:off x="640080" y="3775103"/>
-            <a:ext cx="54864" cy="2442816"/>
+            <a:off x="640080" y="3808676"/>
+            <a:ext cx="54864" cy="2409243"/>
           </a:xfrm>
           <a:prstGeom prst="rect">
             <a:avLst/>
@@ -14289,13 +15157,13 @@
       </p:sp>
       <p:sp>
         <p:nvSpPr>
-          <p:cNvPr id="14" name="TextBox 13"/>
+          <p:cNvPr id="15" name="TextBox 14"/>
           <p:cNvSpPr txBox="1"/>
           <p:nvPr/>
         </p:nvSpPr>
         <p:spPr>
           <a:xfrm>
-            <a:off x="804671" y="3884831"/>
+            <a:off x="804671" y="3918404"/>
             <a:ext cx="10616184" cy="228600"/>
           </a:xfrm>
           <a:prstGeom prst="rect">
@@ -14331,14 +15199,14 @@
       </p:sp>
       <p:sp>
         <p:nvSpPr>
-          <p:cNvPr id="15" name="TextBox 14"/>
+          <p:cNvPr id="16" name="TextBox 15"/>
           <p:cNvSpPr txBox="1"/>
           <p:nvPr/>
         </p:nvSpPr>
         <p:spPr>
           <a:xfrm>
-            <a:off x="804671" y="4168295"/>
-            <a:ext cx="10616184" cy="1958184"/>
+            <a:off x="804671" y="4201868"/>
+            <a:ext cx="10616184" cy="1924611"/>
           </a:xfrm>
           <a:prstGeom prst="rect">
             <a:avLst/>
@@ -14366,14 +15234,14 @@
               <a:rPr>
                 <a:latin typeface="Inter"/>
               </a:rPr>
-              <a:t>Observation: Composite is 32.4 in the TEST evidence [S3]. Why it matters: This result determines which item receives priority in the next monitoring cycle. Uncertainty: Supporting coverage may omit later filings or corroborating detail. What would change the view: A new filing or report that resolves the item or changes it by 1%.</a:t>
-            </a:r>
-          </a:p>
-        </p:txBody>
-      </p:sp>
-      <p:sp>
-        <p:nvSpPr>
-          <p:cNvPr id="16" name="Rectangle 15"/>
+              <a:t>Observation: Composite is 32.4 in the review evidence [S3]. Why it matters: This result determines which item receives priority in the next monitoring cycle. Uncertainty: Supporting coverage may omit later filings or corroborating detail. What would change the view: A new filing or report that resolves the item or changes it by 1%.</a:t>
+            </a:r>
+          </a:p>
+        </p:txBody>
+      </p:sp>
+      <p:sp>
+        <p:nvSpPr>
+          <p:cNvPr id="17" name="Rectangle 16"/>
           <p:cNvSpPr/>
           <p:nvPr/>
         </p:nvSpPr>
@@ -14422,7 +15290,7 @@
       </p:sp>
       <p:sp>
         <p:nvSpPr>
-          <p:cNvPr id="17" name="TextBox 16"/>
+          <p:cNvPr id="18" name="TextBox 17"/>
           <p:cNvSpPr txBox="1"/>
           <p:nvPr/>
         </p:nvSpPr>
@@ -14464,7 +15332,7 @@
       </p:sp>
       <p:sp>
         <p:nvSpPr>
-          <p:cNvPr id="18" name="TextBox 17"/>
+          <p:cNvPr id="19" name="TextBox 18"/>
           <p:cNvSpPr txBox="1"/>
           <p:nvPr/>
         </p:nvSpPr>
@@ -14499,14 +15367,14 @@
               <a:rPr>
                 <a:latin typeface="Inter"/>
               </a:rPr>
-              <a:t>RENDER TEST — partial sample, not a full ODD report · Data as of 2026-10-01 (Form ADV); 2026-08-14 (Form 13F)</a:t>
-            </a:r>
-          </a:p>
-        </p:txBody>
-      </p:sp>
-      <p:sp>
-        <p:nvSpPr>
-          <p:cNvPr id="19" name="TextBox 18"/>
+              <a:t>Confidential — operational due diligence review · Data as of 2026-10-01 (Form ADV); 2026-08-14 (Form 13F)</a:t>
+            </a:r>
+          </a:p>
+        </p:txBody>
+      </p:sp>
+      <p:sp>
+        <p:nvSpPr>
+          <p:cNvPr id="20" name="TextBox 19"/>
           <p:cNvSpPr txBox="1"/>
           <p:nvPr/>
         </p:nvSpPr>
@@ -14622,7 +15490,7 @@
         <p:spPr>
           <a:xfrm>
             <a:off x="640080" y="329184"/>
-            <a:ext cx="9875520" cy="182880"/>
+            <a:ext cx="5303520" cy="182880"/>
           </a:xfrm>
           <a:prstGeom prst="rect">
             <a:avLst/>
@@ -14663,6 +15531,48 @@
         </p:nvSpPr>
         <p:spPr>
           <a:xfrm>
+            <a:off x="5897880" y="310896"/>
+            <a:ext cx="4800600" cy="256032"/>
+          </a:xfrm>
+          <a:prstGeom prst="rect">
+            <a:avLst/>
+          </a:prstGeom>
+          <a:noFill/>
+        </p:spPr>
+        <p:txBody>
+          <a:bodyPr wrap="none" lIns="9144" rIns="9144" tIns="9144" bIns="9144" anchor="t">
+            <a:spAutoFit/>
+          </a:bodyPr>
+          <a:lstStyle/>
+          <a:p>
+            <a:pPr algn="r">
+              <a:spcAft>
+                <a:spcPts val="0"/>
+              </a:spcAft>
+              <a:defRPr sz="680" b="1">
+                <a:solidFill>
+                  <a:srgbClr val="4F6B00"/>
+                </a:solidFill>
+                <a:latin typeface="Inter"/>
+              </a:defRPr>
+            </a:pPr>
+            <a:r>
+              <a:rPr>
+                <a:latin typeface="Inter"/>
+              </a:rPr>
+              <a:t>Illustrative, Gradient Maintained — demo data, not the client's holdings or managers</a:t>
+            </a:r>
+          </a:p>
+        </p:txBody>
+      </p:sp>
+      <p:sp>
+        <p:nvSpPr>
+          <p:cNvPr id="5" name="TextBox 4"/>
+          <p:cNvSpPr txBox="1"/>
+          <p:nvPr/>
+        </p:nvSpPr>
+        <p:spPr>
+          <a:xfrm>
             <a:off x="640080" y="566928"/>
             <a:ext cx="10058400" cy="530352"/>
           </a:xfrm>
@@ -14699,7 +15609,7 @@
       </p:sp>
       <p:sp>
         <p:nvSpPr>
-          <p:cNvPr id="5" name="Rectangle 4"/>
+          <p:cNvPr id="6" name="Rectangle 5"/>
           <p:cNvSpPr/>
           <p:nvPr/>
         </p:nvSpPr>
@@ -14748,7 +15658,7 @@
       </p:sp>
       <p:sp>
         <p:nvSpPr>
-          <p:cNvPr id="6" name="Rectangle 5"/>
+          <p:cNvPr id="7" name="Rectangle 6"/>
           <p:cNvSpPr/>
           <p:nvPr/>
         </p:nvSpPr>
@@ -14797,7 +15707,7 @@
       </p:sp>
       <p:sp>
         <p:nvSpPr>
-          <p:cNvPr id="7" name="TextBox 6"/>
+          <p:cNvPr id="8" name="TextBox 7"/>
           <p:cNvSpPr txBox="1"/>
           <p:nvPr/>
         </p:nvSpPr>
@@ -14839,7 +15749,7 @@
       </p:sp>
       <p:sp>
         <p:nvSpPr>
-          <p:cNvPr id="8" name="Rectangle 7"/>
+          <p:cNvPr id="9" name="Rectangle 8"/>
           <p:cNvSpPr/>
           <p:nvPr/>
         </p:nvSpPr>
@@ -14888,7 +15798,7 @@
       </p:sp>
       <p:sp>
         <p:nvSpPr>
-          <p:cNvPr id="9" name="Rectangle 8"/>
+          <p:cNvPr id="10" name="Rectangle 9"/>
           <p:cNvSpPr/>
           <p:nvPr/>
         </p:nvSpPr>
@@ -14937,7 +15847,7 @@
       </p:sp>
       <p:sp>
         <p:nvSpPr>
-          <p:cNvPr id="10" name="TextBox 9"/>
+          <p:cNvPr id="11" name="TextBox 10"/>
           <p:cNvSpPr txBox="1"/>
           <p:nvPr/>
         </p:nvSpPr>
@@ -14979,7 +15889,7 @@
       </p:sp>
       <p:sp>
         <p:nvSpPr>
-          <p:cNvPr id="11" name="TextBox 10"/>
+          <p:cNvPr id="12" name="TextBox 11"/>
           <p:cNvSpPr txBox="1"/>
           <p:nvPr/>
         </p:nvSpPr>
@@ -15021,7 +15931,7 @@
       </p:sp>
       <p:sp>
         <p:nvSpPr>
-          <p:cNvPr id="12" name="TextBox 11"/>
+          <p:cNvPr id="13" name="TextBox 12"/>
           <p:cNvSpPr txBox="1"/>
           <p:nvPr/>
         </p:nvSpPr>
@@ -15063,7 +15973,7 @@
       </p:sp>
       <p:sp>
         <p:nvSpPr>
-          <p:cNvPr id="13" name="Rectangle 12"/>
+          <p:cNvPr id="14" name="Rectangle 13"/>
           <p:cNvSpPr/>
           <p:nvPr/>
         </p:nvSpPr>
@@ -15112,7 +16022,7 @@
       </p:sp>
       <p:sp>
         <p:nvSpPr>
-          <p:cNvPr id="14" name="Rectangle 13"/>
+          <p:cNvPr id="15" name="Rectangle 14"/>
           <p:cNvSpPr/>
           <p:nvPr/>
         </p:nvSpPr>
@@ -15161,7 +16071,7 @@
       </p:sp>
       <p:sp>
         <p:nvSpPr>
-          <p:cNvPr id="15" name="TextBox 14"/>
+          <p:cNvPr id="16" name="TextBox 15"/>
           <p:cNvSpPr txBox="1"/>
           <p:nvPr/>
         </p:nvSpPr>
@@ -15203,7 +16113,7 @@
       </p:sp>
       <p:sp>
         <p:nvSpPr>
-          <p:cNvPr id="16" name="TextBox 15"/>
+          <p:cNvPr id="17" name="TextBox 16"/>
           <p:cNvSpPr txBox="1"/>
           <p:nvPr/>
         </p:nvSpPr>
@@ -15245,7 +16155,7 @@
       </p:sp>
       <p:sp>
         <p:nvSpPr>
-          <p:cNvPr id="17" name="TextBox 16"/>
+          <p:cNvPr id="18" name="TextBox 17"/>
           <p:cNvSpPr txBox="1"/>
           <p:nvPr/>
         </p:nvSpPr>
@@ -15287,7 +16197,7 @@
       </p:sp>
       <p:sp>
         <p:nvSpPr>
-          <p:cNvPr id="18" name="Rectangle 17"/>
+          <p:cNvPr id="19" name="Rectangle 18"/>
           <p:cNvSpPr/>
           <p:nvPr/>
         </p:nvSpPr>
@@ -15336,7 +16246,7 @@
       </p:sp>
       <p:sp>
         <p:nvSpPr>
-          <p:cNvPr id="19" name="Rectangle 18"/>
+          <p:cNvPr id="20" name="Rectangle 19"/>
           <p:cNvSpPr/>
           <p:nvPr/>
         </p:nvSpPr>
@@ -15385,7 +16295,7 @@
       </p:sp>
       <p:sp>
         <p:nvSpPr>
-          <p:cNvPr id="20" name="TextBox 19"/>
+          <p:cNvPr id="21" name="TextBox 20"/>
           <p:cNvSpPr txBox="1"/>
           <p:nvPr/>
         </p:nvSpPr>
@@ -15427,7 +16337,7 @@
       </p:sp>
       <p:sp>
         <p:nvSpPr>
-          <p:cNvPr id="21" name="TextBox 20"/>
+          <p:cNvPr id="22" name="TextBox 21"/>
           <p:cNvSpPr txBox="1"/>
           <p:nvPr/>
         </p:nvSpPr>
@@ -15469,7 +16379,7 @@
       </p:sp>
       <p:sp>
         <p:nvSpPr>
-          <p:cNvPr id="22" name="TextBox 21"/>
+          <p:cNvPr id="23" name="TextBox 22"/>
           <p:cNvSpPr txBox="1"/>
           <p:nvPr/>
         </p:nvSpPr>
@@ -15511,7 +16421,7 @@
       </p:sp>
       <p:sp>
         <p:nvSpPr>
-          <p:cNvPr id="23" name="Rectangle 22"/>
+          <p:cNvPr id="24" name="Rectangle 23"/>
           <p:cNvSpPr/>
           <p:nvPr/>
         </p:nvSpPr>
@@ -15560,7 +16470,7 @@
       </p:sp>
       <p:sp>
         <p:nvSpPr>
-          <p:cNvPr id="24" name="Rectangle 23"/>
+          <p:cNvPr id="25" name="Rectangle 24"/>
           <p:cNvSpPr/>
           <p:nvPr/>
         </p:nvSpPr>
@@ -15609,7 +16519,7 @@
       </p:sp>
       <p:sp>
         <p:nvSpPr>
-          <p:cNvPr id="25" name="TextBox 24"/>
+          <p:cNvPr id="26" name="TextBox 25"/>
           <p:cNvSpPr txBox="1"/>
           <p:nvPr/>
         </p:nvSpPr>
@@ -15651,7 +16561,7 @@
       </p:sp>
       <p:sp>
         <p:nvSpPr>
-          <p:cNvPr id="26" name="TextBox 25"/>
+          <p:cNvPr id="27" name="TextBox 26"/>
           <p:cNvSpPr txBox="1"/>
           <p:nvPr/>
         </p:nvSpPr>
@@ -15693,7 +16603,7 @@
       </p:sp>
       <p:sp>
         <p:nvSpPr>
-          <p:cNvPr id="27" name="TextBox 26"/>
+          <p:cNvPr id="28" name="TextBox 27"/>
           <p:cNvSpPr txBox="1"/>
           <p:nvPr/>
         </p:nvSpPr>
@@ -15735,7 +16645,7 @@
       </p:sp>
       <p:sp>
         <p:nvSpPr>
-          <p:cNvPr id="28" name="Rectangle 27"/>
+          <p:cNvPr id="29" name="Rectangle 28"/>
           <p:cNvSpPr/>
           <p:nvPr/>
         </p:nvSpPr>
@@ -15784,7 +16694,7 @@
       </p:sp>
       <p:sp>
         <p:nvSpPr>
-          <p:cNvPr id="29" name="TextBox 28"/>
+          <p:cNvPr id="30" name="TextBox 29"/>
           <p:cNvSpPr txBox="1"/>
           <p:nvPr/>
         </p:nvSpPr>
@@ -15826,7 +16736,7 @@
       </p:sp>
       <p:sp>
         <p:nvSpPr>
-          <p:cNvPr id="30" name="TextBox 29"/>
+          <p:cNvPr id="31" name="TextBox 30"/>
           <p:cNvSpPr txBox="1"/>
           <p:nvPr/>
         </p:nvSpPr>
@@ -15861,14 +16771,14 @@
               <a:rPr>
                 <a:latin typeface="Inter"/>
               </a:rPr>
-              <a:t>RENDER TEST — partial sample, not a full ODD report · Data as of 2026-10-01 (Form ADV); 2026-08-14 (Form 13F)</a:t>
-            </a:r>
-          </a:p>
-        </p:txBody>
-      </p:sp>
-      <p:sp>
-        <p:nvSpPr>
-          <p:cNvPr id="31" name="TextBox 30"/>
+              <a:t>Confidential — operational due diligence review · Data as of 2026-10-01 (Form ADV); 2026-08-14 (Form 13F)</a:t>
+            </a:r>
+          </a:p>
+        </p:txBody>
+      </p:sp>
+      <p:sp>
+        <p:nvSpPr>
+          <p:cNvPr id="32" name="TextBox 31"/>
           <p:cNvSpPr txBox="1"/>
           <p:nvPr/>
         </p:nvSpPr>
@@ -15984,7 +16894,7 @@
         <p:spPr>
           <a:xfrm>
             <a:off x="640080" y="329184"/>
-            <a:ext cx="9875520" cy="182880"/>
+            <a:ext cx="5303520" cy="182880"/>
           </a:xfrm>
           <a:prstGeom prst="rect">
             <a:avLst/>
@@ -16025,6 +16935,48 @@
         </p:nvSpPr>
         <p:spPr>
           <a:xfrm>
+            <a:off x="5897880" y="310896"/>
+            <a:ext cx="4800600" cy="256032"/>
+          </a:xfrm>
+          <a:prstGeom prst="rect">
+            <a:avLst/>
+          </a:prstGeom>
+          <a:noFill/>
+        </p:spPr>
+        <p:txBody>
+          <a:bodyPr wrap="none" lIns="9144" rIns="9144" tIns="9144" bIns="9144" anchor="t">
+            <a:spAutoFit/>
+          </a:bodyPr>
+          <a:lstStyle/>
+          <a:p>
+            <a:pPr algn="r">
+              <a:spcAft>
+                <a:spcPts val="0"/>
+              </a:spcAft>
+              <a:defRPr sz="680" b="1">
+                <a:solidFill>
+                  <a:srgbClr val="4F6B00"/>
+                </a:solidFill>
+                <a:latin typeface="Inter"/>
+              </a:defRPr>
+            </a:pPr>
+            <a:r>
+              <a:rPr>
+                <a:latin typeface="Inter"/>
+              </a:rPr>
+              <a:t>Illustrative, Gradient Maintained — demo data, not the client's holdings or managers</a:t>
+            </a:r>
+          </a:p>
+        </p:txBody>
+      </p:sp>
+      <p:sp>
+        <p:nvSpPr>
+          <p:cNvPr id="5" name="TextBox 4"/>
+          <p:cNvSpPr txBox="1"/>
+          <p:nvPr/>
+        </p:nvSpPr>
+        <p:spPr>
+          <a:xfrm>
             <a:off x="640080" y="566928"/>
             <a:ext cx="10058400" cy="530352"/>
           </a:xfrm>
@@ -16061,7 +17013,7 @@
       </p:sp>
       <p:sp>
         <p:nvSpPr>
-          <p:cNvPr id="5" name="Rectangle 4"/>
+          <p:cNvPr id="6" name="Rectangle 5"/>
           <p:cNvSpPr/>
           <p:nvPr/>
         </p:nvSpPr>
@@ -16110,7 +17062,7 @@
       </p:sp>
       <p:sp>
         <p:nvSpPr>
-          <p:cNvPr id="6" name="Rectangle 5"/>
+          <p:cNvPr id="7" name="Rectangle 6"/>
           <p:cNvSpPr/>
           <p:nvPr/>
         </p:nvSpPr>
@@ -16159,7 +17111,7 @@
       </p:sp>
       <p:sp>
         <p:nvSpPr>
-          <p:cNvPr id="7" name="TextBox 6"/>
+          <p:cNvPr id="8" name="TextBox 7"/>
           <p:cNvSpPr txBox="1"/>
           <p:nvPr/>
         </p:nvSpPr>
@@ -16201,7 +17153,7 @@
       </p:sp>
       <p:sp>
         <p:nvSpPr>
-          <p:cNvPr id="8" name="TextBox 7"/>
+          <p:cNvPr id="9" name="TextBox 8"/>
           <p:cNvSpPr txBox="1"/>
           <p:nvPr/>
         </p:nvSpPr>
@@ -16243,7 +17195,7 @@
       </p:sp>
       <p:graphicFrame>
         <p:nvGraphicFramePr>
-          <p:cNvPr id="9" name="Table 8"/>
+          <p:cNvPr id="10" name="Table 9"/>
           <p:cNvGraphicFramePr>
             <a:graphicFrameLocks noGrp="1"/>
           </p:cNvGraphicFramePr>
@@ -16308,7 +17260,7 @@
                         <a:rPr>
                           <a:latin typeface="Inter"/>
                         </a:rPr>
-                        <a:t>Ridgeview Example Advisors, LP (TEST) [S1]</a:t>
+                        <a:t>Ridgeview Advisors, LP [S1]</a:t>
                       </a:r>
                     </a:p>
                   </a:txBody>
@@ -16493,7 +17445,7 @@
       </p:graphicFrame>
       <p:sp>
         <p:nvSpPr>
-          <p:cNvPr id="10" name="Rectangle 9"/>
+          <p:cNvPr id="11" name="Rectangle 10"/>
           <p:cNvSpPr/>
           <p:nvPr/>
         </p:nvSpPr>
@@ -16542,7 +17494,7 @@
       </p:sp>
       <p:sp>
         <p:nvSpPr>
-          <p:cNvPr id="11" name="TextBox 10"/>
+          <p:cNvPr id="12" name="TextBox 11"/>
           <p:cNvSpPr txBox="1"/>
           <p:nvPr/>
         </p:nvSpPr>
@@ -16584,7 +17536,7 @@
       </p:sp>
       <p:graphicFrame>
         <p:nvGraphicFramePr>
-          <p:cNvPr id="12" name="Chart 11"/>
+          <p:cNvPr id="13" name="Chart 12"/>
           <p:cNvGraphicFramePr>
             <a:graphicFrameLocks noGrp="1"/>
           </p:cNvGraphicFramePr>
@@ -16602,7 +17554,7 @@
       </p:graphicFrame>
       <p:sp>
         <p:nvSpPr>
-          <p:cNvPr id="13" name="Rectangle 12"/>
+          <p:cNvPr id="14" name="Rectangle 13"/>
           <p:cNvSpPr/>
           <p:nvPr/>
         </p:nvSpPr>
@@ -16651,7 +17603,7 @@
       </p:sp>
       <p:sp>
         <p:nvSpPr>
-          <p:cNvPr id="14" name="TextBox 13"/>
+          <p:cNvPr id="15" name="TextBox 14"/>
           <p:cNvSpPr txBox="1"/>
           <p:nvPr/>
         </p:nvSpPr>
@@ -16693,7 +17645,7 @@
       </p:sp>
       <p:sp>
         <p:nvSpPr>
-          <p:cNvPr id="15" name="TextBox 14"/>
+          <p:cNvPr id="16" name="TextBox 15"/>
           <p:cNvSpPr txBox="1"/>
           <p:nvPr/>
         </p:nvSpPr>
@@ -16728,14 +17680,14 @@
               <a:rPr>
                 <a:latin typeface="Inter"/>
               </a:rPr>
-              <a:t>RENDER TEST — partial sample, not a full ODD report · Data as of 2026-10-01 (Form ADV); 2026-08-14 (Form 13F)</a:t>
-            </a:r>
-          </a:p>
-        </p:txBody>
-      </p:sp>
-      <p:sp>
-        <p:nvSpPr>
-          <p:cNvPr id="16" name="TextBox 15"/>
+              <a:t>Confidential — operational due diligence review · Data as of 2026-10-01 (Form ADV); 2026-08-14 (Form 13F)</a:t>
+            </a:r>
+          </a:p>
+        </p:txBody>
+      </p:sp>
+      <p:sp>
+        <p:nvSpPr>
+          <p:cNvPr id="17" name="TextBox 16"/>
           <p:cNvSpPr txBox="1"/>
           <p:nvPr/>
         </p:nvSpPr>
@@ -16851,7 +17803,7 @@
         <p:spPr>
           <a:xfrm>
             <a:off x="640080" y="329184"/>
-            <a:ext cx="9875520" cy="182880"/>
+            <a:ext cx="5303520" cy="182880"/>
           </a:xfrm>
           <a:prstGeom prst="rect">
             <a:avLst/>
@@ -16892,6 +17844,48 @@
         </p:nvSpPr>
         <p:spPr>
           <a:xfrm>
+            <a:off x="5897880" y="310896"/>
+            <a:ext cx="4800600" cy="256032"/>
+          </a:xfrm>
+          <a:prstGeom prst="rect">
+            <a:avLst/>
+          </a:prstGeom>
+          <a:noFill/>
+        </p:spPr>
+        <p:txBody>
+          <a:bodyPr wrap="none" lIns="9144" rIns="9144" tIns="9144" bIns="9144" anchor="t">
+            <a:spAutoFit/>
+          </a:bodyPr>
+          <a:lstStyle/>
+          <a:p>
+            <a:pPr algn="r">
+              <a:spcAft>
+                <a:spcPts val="0"/>
+              </a:spcAft>
+              <a:defRPr sz="680" b="1">
+                <a:solidFill>
+                  <a:srgbClr val="4F6B00"/>
+                </a:solidFill>
+                <a:latin typeface="Inter"/>
+              </a:defRPr>
+            </a:pPr>
+            <a:r>
+              <a:rPr>
+                <a:latin typeface="Inter"/>
+              </a:rPr>
+              <a:t>Illustrative, Gradient Maintained — demo data, not the client's holdings or managers</a:t>
+            </a:r>
+          </a:p>
+        </p:txBody>
+      </p:sp>
+      <p:sp>
+        <p:nvSpPr>
+          <p:cNvPr id="5" name="TextBox 4"/>
+          <p:cNvSpPr txBox="1"/>
+          <p:nvPr/>
+        </p:nvSpPr>
+        <p:spPr>
+          <a:xfrm>
             <a:off x="640080" y="566928"/>
             <a:ext cx="10058400" cy="530352"/>
           </a:xfrm>
@@ -16928,7 +17922,7 @@
       </p:sp>
       <p:sp>
         <p:nvSpPr>
-          <p:cNvPr id="5" name="Rectangle 4"/>
+          <p:cNvPr id="6" name="Rectangle 5"/>
           <p:cNvSpPr/>
           <p:nvPr/>
         </p:nvSpPr>
@@ -16977,7 +17971,7 @@
       </p:sp>
       <p:sp>
         <p:nvSpPr>
-          <p:cNvPr id="6" name="Rectangle 5"/>
+          <p:cNvPr id="7" name="Rectangle 6"/>
           <p:cNvSpPr/>
           <p:nvPr/>
         </p:nvSpPr>
@@ -17026,7 +18020,7 @@
       </p:sp>
       <p:sp>
         <p:nvSpPr>
-          <p:cNvPr id="7" name="TextBox 6"/>
+          <p:cNvPr id="8" name="TextBox 7"/>
           <p:cNvSpPr txBox="1"/>
           <p:nvPr/>
         </p:nvSpPr>
@@ -17068,7 +18062,7 @@
       </p:sp>
       <p:sp>
         <p:nvSpPr>
-          <p:cNvPr id="8" name="Rectangle 7"/>
+          <p:cNvPr id="9" name="Rectangle 8"/>
           <p:cNvSpPr/>
           <p:nvPr/>
         </p:nvSpPr>
@@ -17117,7 +18111,7 @@
       </p:sp>
       <p:sp>
         <p:nvSpPr>
-          <p:cNvPr id="9" name="Rectangle 8"/>
+          <p:cNvPr id="10" name="Rectangle 9"/>
           <p:cNvSpPr/>
           <p:nvPr/>
         </p:nvSpPr>
@@ -17166,7 +18160,7 @@
       </p:sp>
       <p:sp>
         <p:nvSpPr>
-          <p:cNvPr id="10" name="TextBox 9"/>
+          <p:cNvPr id="11" name="TextBox 10"/>
           <p:cNvSpPr txBox="1"/>
           <p:nvPr/>
         </p:nvSpPr>
@@ -17208,7 +18202,7 @@
       </p:sp>
       <p:sp>
         <p:nvSpPr>
-          <p:cNvPr id="11" name="TextBox 10"/>
+          <p:cNvPr id="12" name="TextBox 11"/>
           <p:cNvSpPr txBox="1"/>
           <p:nvPr/>
         </p:nvSpPr>
@@ -17243,14 +18237,14 @@
               <a:rPr>
                 <a:latin typeface="Inter"/>
               </a:rPr>
-              <a:t>Observation: The TEST adviser reports $12.4B of RAUM and 38 private funds [S1]. Why it matters: Scale raises the importance of ownership and provider controls. Uncertainty: The compact…</a:t>
-            </a:r>
-          </a:p>
-        </p:txBody>
-      </p:sp>
-      <p:sp>
-        <p:nvSpPr>
-          <p:cNvPr id="12" name="Rectangle 11"/>
+              <a:t>Observation: The adviser reports $12.4B of RAUM and 38 private funds [S1]. Why it matters: Scale raises the importance of ownership and provider controls. Uncertainty: The public sample…</a:t>
+            </a:r>
+          </a:p>
+        </p:txBody>
+      </p:sp>
+      <p:sp>
+        <p:nvSpPr>
+          <p:cNvPr id="13" name="Rectangle 12"/>
           <p:cNvSpPr/>
           <p:nvPr/>
         </p:nvSpPr>
@@ -17299,7 +18293,7 @@
       </p:sp>
       <p:sp>
         <p:nvSpPr>
-          <p:cNvPr id="13" name="TextBox 12"/>
+          <p:cNvPr id="14" name="TextBox 13"/>
           <p:cNvSpPr txBox="1"/>
           <p:nvPr/>
         </p:nvSpPr>
@@ -17341,7 +18335,7 @@
       </p:sp>
       <p:sp>
         <p:nvSpPr>
-          <p:cNvPr id="14" name="TextBox 13"/>
+          <p:cNvPr id="15" name="TextBox 14"/>
           <p:cNvSpPr txBox="1"/>
           <p:nvPr/>
         </p:nvSpPr>
@@ -17376,14 +18370,14 @@
               <a:rPr>
                 <a:latin typeface="Inter"/>
               </a:rPr>
-              <a:t>RENDER TEST — partial sample, not a full ODD report · Data as of 2026-10-01 (Form ADV); 2026-08-14 (Form 13F)</a:t>
-            </a:r>
-          </a:p>
-        </p:txBody>
-      </p:sp>
-      <p:sp>
-        <p:nvSpPr>
-          <p:cNvPr id="15" name="TextBox 14"/>
+              <a:t>Confidential — operational due diligence review · Data as of 2026-10-01 (Form ADV); 2026-08-14 (Form 13F)</a:t>
+            </a:r>
+          </a:p>
+        </p:txBody>
+      </p:sp>
+      <p:sp>
+        <p:nvSpPr>
+          <p:cNvPr id="16" name="TextBox 15"/>
           <p:cNvSpPr txBox="1"/>
           <p:nvPr/>
         </p:nvSpPr>
@@ -17499,7 +18493,7 @@
         <p:spPr>
           <a:xfrm>
             <a:off x="640080" y="329184"/>
-            <a:ext cx="9875520" cy="182880"/>
+            <a:ext cx="5303520" cy="182880"/>
           </a:xfrm>
           <a:prstGeom prst="rect">
             <a:avLst/>
@@ -17540,6 +18534,48 @@
         </p:nvSpPr>
         <p:spPr>
           <a:xfrm>
+            <a:off x="5897880" y="310896"/>
+            <a:ext cx="4800600" cy="256032"/>
+          </a:xfrm>
+          <a:prstGeom prst="rect">
+            <a:avLst/>
+          </a:prstGeom>
+          <a:noFill/>
+        </p:spPr>
+        <p:txBody>
+          <a:bodyPr wrap="none" lIns="9144" rIns="9144" tIns="9144" bIns="9144" anchor="t">
+            <a:spAutoFit/>
+          </a:bodyPr>
+          <a:lstStyle/>
+          <a:p>
+            <a:pPr algn="r">
+              <a:spcAft>
+                <a:spcPts val="0"/>
+              </a:spcAft>
+              <a:defRPr sz="680" b="1">
+                <a:solidFill>
+                  <a:srgbClr val="4F6B00"/>
+                </a:solidFill>
+                <a:latin typeface="Inter"/>
+              </a:defRPr>
+            </a:pPr>
+            <a:r>
+              <a:rPr>
+                <a:latin typeface="Inter"/>
+              </a:rPr>
+              <a:t>Illustrative, Gradient Maintained — demo data, not the client's holdings or managers</a:t>
+            </a:r>
+          </a:p>
+        </p:txBody>
+      </p:sp>
+      <p:sp>
+        <p:nvSpPr>
+          <p:cNvPr id="5" name="TextBox 4"/>
+          <p:cNvSpPr txBox="1"/>
+          <p:nvPr/>
+        </p:nvSpPr>
+        <p:spPr>
+          <a:xfrm>
             <a:off x="640080" y="566928"/>
             <a:ext cx="10058400" cy="530352"/>
           </a:xfrm>
@@ -17576,7 +18612,7 @@
       </p:sp>
       <p:sp>
         <p:nvSpPr>
-          <p:cNvPr id="5" name="Rectangle 4"/>
+          <p:cNvPr id="6" name="Rectangle 5"/>
           <p:cNvSpPr/>
           <p:nvPr/>
         </p:nvSpPr>
@@ -17625,7 +18661,7 @@
       </p:sp>
       <p:sp>
         <p:nvSpPr>
-          <p:cNvPr id="6" name="Rectangle 5"/>
+          <p:cNvPr id="7" name="Rectangle 6"/>
           <p:cNvSpPr/>
           <p:nvPr/>
         </p:nvSpPr>
@@ -17674,7 +18710,7 @@
       </p:sp>
       <p:sp>
         <p:nvSpPr>
-          <p:cNvPr id="7" name="TextBox 6"/>
+          <p:cNvPr id="8" name="TextBox 7"/>
           <p:cNvSpPr txBox="1"/>
           <p:nvPr/>
         </p:nvSpPr>
@@ -17716,14 +18752,14 @@
       </p:sp>
       <p:sp>
         <p:nvSpPr>
-          <p:cNvPr id="8" name="Rectangle 7"/>
+          <p:cNvPr id="9" name="Rectangle 8"/>
           <p:cNvSpPr/>
           <p:nvPr/>
         </p:nvSpPr>
         <p:spPr>
           <a:xfrm>
             <a:off x="640080" y="1325880"/>
-            <a:ext cx="10908792" cy="1359297"/>
+            <a:ext cx="10908792" cy="1365024"/>
           </a:xfrm>
           <a:prstGeom prst="rect">
             <a:avLst/>
@@ -17765,14 +18801,14 @@
       </p:sp>
       <p:sp>
         <p:nvSpPr>
-          <p:cNvPr id="9" name="Rectangle 8"/>
+          <p:cNvPr id="10" name="Rectangle 9"/>
           <p:cNvSpPr/>
           <p:nvPr/>
         </p:nvSpPr>
         <p:spPr>
           <a:xfrm>
             <a:off x="640080" y="1325880"/>
-            <a:ext cx="54864" cy="1359297"/>
+            <a:ext cx="54864" cy="1365024"/>
           </a:xfrm>
           <a:prstGeom prst="rect">
             <a:avLst/>
@@ -17814,7 +18850,7 @@
       </p:sp>
       <p:sp>
         <p:nvSpPr>
-          <p:cNvPr id="10" name="TextBox 9"/>
+          <p:cNvPr id="11" name="TextBox 10"/>
           <p:cNvSpPr txBox="1"/>
           <p:nvPr/>
         </p:nvSpPr>
@@ -17856,14 +18892,14 @@
       </p:sp>
       <p:sp>
         <p:nvSpPr>
-          <p:cNvPr id="11" name="TextBox 10"/>
+          <p:cNvPr id="12" name="TextBox 11"/>
           <p:cNvSpPr txBox="1"/>
           <p:nvPr/>
         </p:nvSpPr>
         <p:spPr>
           <a:xfrm>
             <a:off x="804671" y="1719072"/>
-            <a:ext cx="10616184" cy="874665"/>
+            <a:ext cx="10616184" cy="880392"/>
           </a:xfrm>
           <a:prstGeom prst="rect">
             <a:avLst/>
@@ -17891,21 +18927,21 @@
               <a:rPr>
                 <a:latin typeface="Inter"/>
               </a:rPr>
-              <a:t>Not available — this compact TEST fixture does not return governed regulatory rows [S1].</a:t>
-            </a:r>
-          </a:p>
-        </p:txBody>
-      </p:sp>
-      <p:sp>
-        <p:nvSpPr>
-          <p:cNvPr id="12" name="Rectangle 11"/>
+              <a:t>Not available — the reviewed evidence does not include detailed regulatory rows [S1].</a:t>
+            </a:r>
+          </a:p>
+        </p:txBody>
+      </p:sp>
+      <p:sp>
+        <p:nvSpPr>
+          <p:cNvPr id="13" name="Rectangle 12"/>
           <p:cNvSpPr/>
           <p:nvPr/>
         </p:nvSpPr>
         <p:spPr>
           <a:xfrm>
-            <a:off x="640080" y="2794905"/>
-            <a:ext cx="10908792" cy="1359297"/>
+            <a:off x="640080" y="2800632"/>
+            <a:ext cx="10908792" cy="1365024"/>
           </a:xfrm>
           <a:prstGeom prst="rect">
             <a:avLst/>
@@ -17947,14 +18983,14 @@
       </p:sp>
       <p:sp>
         <p:nvSpPr>
-          <p:cNvPr id="13" name="Rectangle 12"/>
+          <p:cNvPr id="14" name="Rectangle 13"/>
           <p:cNvSpPr/>
           <p:nvPr/>
         </p:nvSpPr>
         <p:spPr>
           <a:xfrm>
-            <a:off x="640080" y="2794905"/>
-            <a:ext cx="54864" cy="1359297"/>
+            <a:off x="640080" y="2800632"/>
+            <a:ext cx="54864" cy="1365024"/>
           </a:xfrm>
           <a:prstGeom prst="rect">
             <a:avLst/>
@@ -17996,13 +19032,13 @@
       </p:sp>
       <p:sp>
         <p:nvSpPr>
-          <p:cNvPr id="14" name="TextBox 13"/>
+          <p:cNvPr id="15" name="TextBox 14"/>
           <p:cNvSpPr txBox="1"/>
           <p:nvPr/>
         </p:nvSpPr>
         <p:spPr>
           <a:xfrm>
-            <a:off x="804671" y="2904633"/>
+            <a:off x="804671" y="2910360"/>
             <a:ext cx="10616184" cy="228600"/>
           </a:xfrm>
           <a:prstGeom prst="rect">
@@ -18038,14 +19074,14 @@
       </p:sp>
       <p:sp>
         <p:nvSpPr>
-          <p:cNvPr id="15" name="TextBox 14"/>
+          <p:cNvPr id="16" name="TextBox 15"/>
           <p:cNvSpPr txBox="1"/>
           <p:nvPr/>
         </p:nvSpPr>
         <p:spPr>
           <a:xfrm>
-            <a:off x="804671" y="3188097"/>
-            <a:ext cx="10616184" cy="874665"/>
+            <a:off x="804671" y="3193824"/>
+            <a:ext cx="10616184" cy="880392"/>
           </a:xfrm>
           <a:prstGeom prst="rect">
             <a:avLst/>
@@ -18073,21 +19109,21 @@
               <a:rPr>
                 <a:latin typeface="Inter"/>
               </a:rPr>
-              <a:t>Not available — this compact render fixture does not include regulatory detail [S1].</a:t>
-            </a:r>
-          </a:p>
-        </p:txBody>
-      </p:sp>
-      <p:sp>
-        <p:nvSpPr>
-          <p:cNvPr id="16" name="Rectangle 15"/>
+              <a:t>Not available — regulatory detail was not included in the reviewed evidence [S1].</a:t>
+            </a:r>
+          </a:p>
+        </p:txBody>
+      </p:sp>
+      <p:sp>
+        <p:nvSpPr>
+          <p:cNvPr id="17" name="Rectangle 16"/>
           <p:cNvSpPr/>
           <p:nvPr/>
         </p:nvSpPr>
         <p:spPr>
           <a:xfrm>
-            <a:off x="640080" y="4263930"/>
-            <a:ext cx="10908792" cy="1953989"/>
+            <a:off x="640080" y="4275385"/>
+            <a:ext cx="10908792" cy="1942534"/>
           </a:xfrm>
           <a:prstGeom prst="rect">
             <a:avLst/>
@@ -18129,14 +19165,14 @@
       </p:sp>
       <p:sp>
         <p:nvSpPr>
-          <p:cNvPr id="17" name="Rectangle 16"/>
+          <p:cNvPr id="18" name="Rectangle 17"/>
           <p:cNvSpPr/>
           <p:nvPr/>
         </p:nvSpPr>
         <p:spPr>
           <a:xfrm>
-            <a:off x="640080" y="4263930"/>
-            <a:ext cx="54864" cy="1953989"/>
+            <a:off x="640080" y="4275385"/>
+            <a:ext cx="54864" cy="1942534"/>
           </a:xfrm>
           <a:prstGeom prst="rect">
             <a:avLst/>
@@ -18178,13 +19214,13 @@
       </p:sp>
       <p:sp>
         <p:nvSpPr>
-          <p:cNvPr id="18" name="TextBox 17"/>
+          <p:cNvPr id="19" name="TextBox 18"/>
           <p:cNvSpPr txBox="1"/>
           <p:nvPr/>
         </p:nvSpPr>
         <p:spPr>
           <a:xfrm>
-            <a:off x="804671" y="4373658"/>
+            <a:off x="804671" y="4385113"/>
             <a:ext cx="10616184" cy="228600"/>
           </a:xfrm>
           <a:prstGeom prst="rect">
@@ -18220,14 +19256,14 @@
       </p:sp>
       <p:sp>
         <p:nvSpPr>
-          <p:cNvPr id="19" name="TextBox 18"/>
+          <p:cNvPr id="20" name="TextBox 19"/>
           <p:cNvSpPr txBox="1"/>
           <p:nvPr/>
         </p:nvSpPr>
         <p:spPr>
           <a:xfrm>
-            <a:off x="804671" y="4657122"/>
-            <a:ext cx="10616184" cy="1469357"/>
+            <a:off x="804671" y="4668577"/>
+            <a:ext cx="10616184" cy="1457902"/>
           </a:xfrm>
           <a:prstGeom prst="rect">
             <a:avLst/>
@@ -18255,14 +19291,14 @@
               <a:rPr>
                 <a:latin typeface="Inter"/>
               </a:rPr>
-              <a:t>Observation: Zero detailed conflict or custody rows are available in this compact TEST record [S1]. Why it matters: The signal cannot be read as a clean bill of…</a:t>
-            </a:r>
-          </a:p>
-        </p:txBody>
-      </p:sp>
-      <p:sp>
-        <p:nvSpPr>
-          <p:cNvPr id="20" name="Rectangle 19"/>
+              <a:t>Observation: Zero detailed conflict or custody rows are available in the reviewed evidence [S1]. Why it matters: The signal cannot be read as a clean bill of health…</a:t>
+            </a:r>
+          </a:p>
+        </p:txBody>
+      </p:sp>
+      <p:sp>
+        <p:nvSpPr>
+          <p:cNvPr id="21" name="Rectangle 20"/>
           <p:cNvSpPr/>
           <p:nvPr/>
         </p:nvSpPr>
@@ -18311,7 +19347,7 @@
       </p:sp>
       <p:sp>
         <p:nvSpPr>
-          <p:cNvPr id="21" name="TextBox 20"/>
+          <p:cNvPr id="22" name="TextBox 21"/>
           <p:cNvSpPr txBox="1"/>
           <p:nvPr/>
         </p:nvSpPr>
@@ -18353,7 +19389,7 @@
       </p:sp>
       <p:sp>
         <p:nvSpPr>
-          <p:cNvPr id="22" name="TextBox 21"/>
+          <p:cNvPr id="23" name="TextBox 22"/>
           <p:cNvSpPr txBox="1"/>
           <p:nvPr/>
         </p:nvSpPr>
@@ -18388,14 +19424,14 @@
               <a:rPr>
                 <a:latin typeface="Inter"/>
               </a:rPr>
-              <a:t>RENDER TEST — partial sample, not a full ODD report · Data as of 2026-10-01 (Form ADV); 2026-08-14 (Form 13F)</a:t>
-            </a:r>
-          </a:p>
-        </p:txBody>
-      </p:sp>
-      <p:sp>
-        <p:nvSpPr>
-          <p:cNvPr id="23" name="TextBox 22"/>
+              <a:t>Confidential — operational due diligence review · Data as of 2026-10-01 (Form ADV); 2026-08-14 (Form 13F)</a:t>
+            </a:r>
+          </a:p>
+        </p:txBody>
+      </p:sp>
+      <p:sp>
+        <p:nvSpPr>
+          <p:cNvPr id="24" name="TextBox 23"/>
           <p:cNvSpPr txBox="1"/>
           <p:nvPr/>
         </p:nvSpPr>
@@ -18511,7 +19547,7 @@
         <p:spPr>
           <a:xfrm>
             <a:off x="640080" y="329184"/>
-            <a:ext cx="9875520" cy="182880"/>
+            <a:ext cx="5303520" cy="182880"/>
           </a:xfrm>
           <a:prstGeom prst="rect">
             <a:avLst/>
@@ -18552,6 +19588,48 @@
         </p:nvSpPr>
         <p:spPr>
           <a:xfrm>
+            <a:off x="5897880" y="310896"/>
+            <a:ext cx="4800600" cy="256032"/>
+          </a:xfrm>
+          <a:prstGeom prst="rect">
+            <a:avLst/>
+          </a:prstGeom>
+          <a:noFill/>
+        </p:spPr>
+        <p:txBody>
+          <a:bodyPr wrap="none" lIns="9144" rIns="9144" tIns="9144" bIns="9144" anchor="t">
+            <a:spAutoFit/>
+          </a:bodyPr>
+          <a:lstStyle/>
+          <a:p>
+            <a:pPr algn="r">
+              <a:spcAft>
+                <a:spcPts val="0"/>
+              </a:spcAft>
+              <a:defRPr sz="680" b="1">
+                <a:solidFill>
+                  <a:srgbClr val="4F6B00"/>
+                </a:solidFill>
+                <a:latin typeface="Inter"/>
+              </a:defRPr>
+            </a:pPr>
+            <a:r>
+              <a:rPr>
+                <a:latin typeface="Inter"/>
+              </a:rPr>
+              <a:t>Illustrative, Gradient Maintained — demo data, not the client's holdings or managers</a:t>
+            </a:r>
+          </a:p>
+        </p:txBody>
+      </p:sp>
+      <p:sp>
+        <p:nvSpPr>
+          <p:cNvPr id="5" name="TextBox 4"/>
+          <p:cNvSpPr txBox="1"/>
+          <p:nvPr/>
+        </p:nvSpPr>
+        <p:spPr>
+          <a:xfrm>
             <a:off x="640080" y="566928"/>
             <a:ext cx="10058400" cy="530352"/>
           </a:xfrm>
@@ -18588,7 +19666,7 @@
       </p:sp>
       <p:sp>
         <p:nvSpPr>
-          <p:cNvPr id="5" name="Rectangle 4"/>
+          <p:cNvPr id="6" name="Rectangle 5"/>
           <p:cNvSpPr/>
           <p:nvPr/>
         </p:nvSpPr>
@@ -18637,7 +19715,7 @@
       </p:sp>
       <p:sp>
         <p:nvSpPr>
-          <p:cNvPr id="6" name="Rectangle 5"/>
+          <p:cNvPr id="7" name="Rectangle 6"/>
           <p:cNvSpPr/>
           <p:nvPr/>
         </p:nvSpPr>
@@ -18686,7 +19764,7 @@
       </p:sp>
       <p:sp>
         <p:nvSpPr>
-          <p:cNvPr id="7" name="TextBox 6"/>
+          <p:cNvPr id="8" name="TextBox 7"/>
           <p:cNvSpPr txBox="1"/>
           <p:nvPr/>
         </p:nvSpPr>
@@ -18728,7 +19806,7 @@
       </p:sp>
       <p:graphicFrame>
         <p:nvGraphicFramePr>
-          <p:cNvPr id="8" name="Chart 7"/>
+          <p:cNvPr id="9" name="Chart 8"/>
           <p:cNvGraphicFramePr>
             <a:graphicFrameLocks noGrp="1"/>
           </p:cNvGraphicFramePr>
@@ -18746,7 +19824,7 @@
       </p:graphicFrame>
       <p:sp>
         <p:nvSpPr>
-          <p:cNvPr id="9" name="Rectangle 8"/>
+          <p:cNvPr id="10" name="Rectangle 9"/>
           <p:cNvSpPr/>
           <p:nvPr/>
         </p:nvSpPr>
@@ -18795,7 +19873,7 @@
       </p:sp>
       <p:sp>
         <p:nvSpPr>
-          <p:cNvPr id="10" name="TextBox 9"/>
+          <p:cNvPr id="11" name="TextBox 10"/>
           <p:cNvSpPr txBox="1"/>
           <p:nvPr/>
         </p:nvSpPr>
@@ -18837,7 +19915,7 @@
       </p:sp>
       <p:sp>
         <p:nvSpPr>
-          <p:cNvPr id="11" name="TextBox 10"/>
+          <p:cNvPr id="12" name="TextBox 11"/>
           <p:cNvSpPr txBox="1"/>
           <p:nvPr/>
         </p:nvSpPr>
@@ -18872,14 +19950,14 @@
               <a:rPr>
                 <a:latin typeface="Inter"/>
               </a:rPr>
-              <a:t>RENDER TEST — partial sample, not a full ODD report · Data as of 2026-10-01 (Form ADV); 2026-08-14 (Form 13F)</a:t>
-            </a:r>
-          </a:p>
-        </p:txBody>
-      </p:sp>
-      <p:sp>
-        <p:nvSpPr>
-          <p:cNvPr id="12" name="TextBox 11"/>
+              <a:t>Confidential — operational due diligence review · Data as of 2026-10-01 (Form ADV); 2026-08-14 (Form 13F)</a:t>
+            </a:r>
+          </a:p>
+        </p:txBody>
+      </p:sp>
+      <p:sp>
+        <p:nvSpPr>
+          <p:cNvPr id="13" name="TextBox 12"/>
           <p:cNvSpPr txBox="1"/>
           <p:nvPr/>
         </p:nvSpPr>

--- a/plugins/gradient-cio/assets/examples/gradient-odd-report.pptx
+++ b/plugins/gradient-cio/assets/examples/gradient-odd-report.pptx
@@ -4356,224 +4356,7 @@
       </p:sp>
       <p:sp>
         <p:nvSpPr>
-          <p:cNvPr id="17" name="Rectangle 16"/>
-          <p:cNvSpPr/>
-          <p:nvPr/>
-        </p:nvSpPr>
-        <p:spPr>
-          <a:xfrm>
-            <a:off x="685800" y="5687568"/>
-            <a:ext cx="3337560" cy="530352"/>
-          </a:xfrm>
-          <a:prstGeom prst="rect">
-            <a:avLst/>
-          </a:prstGeom>
-          <a:solidFill>
-            <a:srgbClr val="C6F432"/>
-          </a:solidFill>
-          <a:ln>
-            <a:solidFill>
-              <a:srgbClr val="C6F432"/>
-            </a:solidFill>
-          </a:ln>
-        </p:spPr>
-        <p:style>
-          <a:lnRef idx="1">
-            <a:schemeClr val="accent1"/>
-          </a:lnRef>
-          <a:fillRef idx="3">
-            <a:schemeClr val="accent1"/>
-          </a:fillRef>
-          <a:effectRef idx="2">
-            <a:schemeClr val="accent1"/>
-          </a:effectRef>
-          <a:fontRef idx="minor">
-            <a:schemeClr val="lt1"/>
-          </a:fontRef>
-        </p:style>
-        <p:txBody>
-          <a:bodyPr rtlCol="0" anchor="ctr"/>
-          <a:lstStyle/>
-          <a:p>
-            <a:pPr algn="ctr">
-              <a:defRPr>
-                <a:latin typeface="Inter"/>
-              </a:defRPr>
-            </a:pPr>
-          </a:p>
-        </p:txBody>
-      </p:sp>
-      <p:sp>
-        <p:nvSpPr>
-          <p:cNvPr id="18" name="TextBox 17"/>
-          <p:cNvSpPr txBox="1"/>
-          <p:nvPr/>
-        </p:nvSpPr>
-        <p:spPr>
-          <a:xfrm>
-            <a:off x="822960" y="5760720"/>
-            <a:ext cx="3063240" cy="128016"/>
-          </a:xfrm>
-          <a:prstGeom prst="rect">
-            <a:avLst/>
-          </a:prstGeom>
-          <a:noFill/>
-        </p:spPr>
-        <p:txBody>
-          <a:bodyPr wrap="none" lIns="9144" rIns="9144" tIns="9144" bIns="9144" anchor="t">
-            <a:spAutoFit/>
-          </a:bodyPr>
-          <a:lstStyle/>
-          <a:p>
-            <a:pPr algn="l">
-              <a:spcAft>
-                <a:spcPts val="0"/>
-              </a:spcAft>
-              <a:defRPr sz="620" b="1">
-                <a:solidFill>
-                  <a:srgbClr val="0D1117"/>
-                </a:solidFill>
-                <a:latin typeface="Inter"/>
-              </a:defRPr>
-            </a:pPr>
-            <a:r>
-              <a:rPr>
-                <a:latin typeface="Inter"/>
-              </a:rPr>
-              <a:t>OVERALL VIEW</a:t>
-            </a:r>
-          </a:p>
-        </p:txBody>
-      </p:sp>
-      <p:sp>
-        <p:nvSpPr>
-          <p:cNvPr id="19" name="TextBox 18"/>
-          <p:cNvSpPr txBox="1"/>
-          <p:nvPr/>
-        </p:nvSpPr>
-        <p:spPr>
-          <a:xfrm>
-            <a:off x="822960" y="5916168"/>
-            <a:ext cx="3063240" cy="182880"/>
-          </a:xfrm>
-          <a:prstGeom prst="rect">
-            <a:avLst/>
-          </a:prstGeom>
-          <a:noFill/>
-        </p:spPr>
-        <p:txBody>
-          <a:bodyPr wrap="none" lIns="9144" rIns="9144" tIns="9144" bIns="9144" anchor="t">
-            <a:spAutoFit/>
-          </a:bodyPr>
-          <a:lstStyle/>
-          <a:p>
-            <a:pPr algn="l">
-              <a:spcAft>
-                <a:spcPts val="0"/>
-              </a:spcAft>
-              <a:defRPr sz="900" b="1">
-                <a:solidFill>
-                  <a:srgbClr val="0D1117"/>
-                </a:solidFill>
-                <a:latin typeface="Inter"/>
-              </a:defRPr>
-            </a:pPr>
-            <a:r>
-              <a:rPr>
-                <a:latin typeface="Inter"/>
-              </a:rPr>
-              <a:t>No flags identified</a:t>
-            </a:r>
-          </a:p>
-        </p:txBody>
-      </p:sp>
-      <p:sp>
-        <p:nvSpPr>
-          <p:cNvPr id="20" name="TextBox 19"/>
-          <p:cNvSpPr txBox="1"/>
-          <p:nvPr/>
-        </p:nvSpPr>
-        <p:spPr>
-          <a:xfrm>
-            <a:off x="4297680" y="5733288"/>
-            <a:ext cx="3108960" cy="164592"/>
-          </a:xfrm>
-          <a:prstGeom prst="rect">
-            <a:avLst/>
-          </a:prstGeom>
-          <a:noFill/>
-        </p:spPr>
-        <p:txBody>
-          <a:bodyPr wrap="none" lIns="9144" rIns="9144" tIns="9144" bIns="9144" anchor="t">
-            <a:spAutoFit/>
-          </a:bodyPr>
-          <a:lstStyle/>
-          <a:p>
-            <a:pPr algn="l">
-              <a:spcAft>
-                <a:spcPts val="0"/>
-              </a:spcAft>
-              <a:defRPr sz="650" b="1">
-                <a:solidFill>
-                  <a:srgbClr val="8A94A1"/>
-                </a:solidFill>
-                <a:latin typeface="Inter"/>
-              </a:defRPr>
-            </a:pPr>
-            <a:r>
-              <a:rPr>
-                <a:latin typeface="Inter"/>
-              </a:rPr>
-              <a:t>SCOPE REVIEWED</a:t>
-            </a:r>
-          </a:p>
-        </p:txBody>
-      </p:sp>
-      <p:sp>
-        <p:nvSpPr>
-          <p:cNvPr id="21" name="TextBox 20"/>
-          <p:cNvSpPr txBox="1"/>
-          <p:nvPr/>
-        </p:nvSpPr>
-        <p:spPr>
-          <a:xfrm>
-            <a:off x="4297680" y="5934456"/>
-            <a:ext cx="3108960" cy="201168"/>
-          </a:xfrm>
-          <a:prstGeom prst="rect">
-            <a:avLst/>
-          </a:prstGeom>
-          <a:noFill/>
-        </p:spPr>
-        <p:txBody>
-          <a:bodyPr wrap="none" lIns="9144" rIns="9144" tIns="9144" bIns="9144" anchor="t">
-            <a:spAutoFit/>
-          </a:bodyPr>
-          <a:lstStyle/>
-          <a:p>
-            <a:pPr algn="l">
-              <a:spcAft>
-                <a:spcPts val="0"/>
-              </a:spcAft>
-              <a:defRPr sz="800" b="1">
-                <a:solidFill>
-                  <a:srgbClr val="FFFFFF"/>
-                </a:solidFill>
-                <a:latin typeface="Inter"/>
-              </a:defRPr>
-            </a:pPr>
-            <a:r>
-              <a:rPr>
-                <a:latin typeface="Inter"/>
-              </a:rPr>
-              <a:t>5 of 7 · Partial</a:t>
-            </a:r>
-          </a:p>
-        </p:txBody>
-      </p:sp>
-      <p:sp>
-        <p:nvSpPr>
-          <p:cNvPr id="22" name="TextBox 21"/>
+          <p:cNvPr id="17" name="TextBox 16"/>
           <p:cNvSpPr txBox="1"/>
           <p:nvPr/>
         </p:nvSpPr>
@@ -4615,7 +4398,7 @@
       </p:sp>
       <p:sp>
         <p:nvSpPr>
-          <p:cNvPr id="23" name="TextBox 22"/>
+          <p:cNvPr id="18" name="TextBox 17"/>
           <p:cNvSpPr txBox="1"/>
           <p:nvPr/>
         </p:nvSpPr>
@@ -4657,7 +4440,7 @@
       </p:sp>
       <p:sp>
         <p:nvSpPr>
-          <p:cNvPr id="24" name="TextBox 23"/>
+          <p:cNvPr id="19" name="TextBox 18"/>
           <p:cNvSpPr txBox="1"/>
           <p:nvPr/>
         </p:nvSpPr>
@@ -4773,7 +4556,7 @@
         <p:spPr>
           <a:xfrm>
             <a:off x="640080" y="329184"/>
-            <a:ext cx="5303520" cy="182880"/>
+            <a:ext cx="9875520" cy="182880"/>
           </a:xfrm>
           <a:prstGeom prst="rect">
             <a:avLst/>
@@ -4814,48 +4597,6 @@
         </p:nvSpPr>
         <p:spPr>
           <a:xfrm>
-            <a:off x="5897880" y="310896"/>
-            <a:ext cx="4800600" cy="256032"/>
-          </a:xfrm>
-          <a:prstGeom prst="rect">
-            <a:avLst/>
-          </a:prstGeom>
-          <a:noFill/>
-        </p:spPr>
-        <p:txBody>
-          <a:bodyPr wrap="none" lIns="9144" rIns="9144" tIns="9144" bIns="9144" anchor="t">
-            <a:spAutoFit/>
-          </a:bodyPr>
-          <a:lstStyle/>
-          <a:p>
-            <a:pPr algn="r">
-              <a:spcAft>
-                <a:spcPts val="0"/>
-              </a:spcAft>
-              <a:defRPr sz="680" b="1">
-                <a:solidFill>
-                  <a:srgbClr val="4F6B00"/>
-                </a:solidFill>
-                <a:latin typeface="Inter"/>
-              </a:defRPr>
-            </a:pPr>
-            <a:r>
-              <a:rPr>
-                <a:latin typeface="Inter"/>
-              </a:rPr>
-              <a:t>Illustrative, Gradient Maintained — demo data, not the client's holdings or managers</a:t>
-            </a:r>
-          </a:p>
-        </p:txBody>
-      </p:sp>
-      <p:sp>
-        <p:nvSpPr>
-          <p:cNvPr id="5" name="TextBox 4"/>
-          <p:cNvSpPr txBox="1"/>
-          <p:nvPr/>
-        </p:nvSpPr>
-        <p:spPr>
-          <a:xfrm>
             <a:off x="640080" y="566928"/>
             <a:ext cx="10058400" cy="530352"/>
           </a:xfrm>
@@ -4892,7 +4633,7 @@
       </p:sp>
       <p:sp>
         <p:nvSpPr>
-          <p:cNvPr id="6" name="Rectangle 5"/>
+          <p:cNvPr id="5" name="Rectangle 4"/>
           <p:cNvSpPr/>
           <p:nvPr/>
         </p:nvSpPr>
@@ -4941,7 +4682,7 @@
       </p:sp>
       <p:sp>
         <p:nvSpPr>
-          <p:cNvPr id="7" name="Rectangle 6"/>
+          <p:cNvPr id="6" name="Rectangle 5"/>
           <p:cNvSpPr/>
           <p:nvPr/>
         </p:nvSpPr>
@@ -4990,7 +4731,7 @@
       </p:sp>
       <p:sp>
         <p:nvSpPr>
-          <p:cNvPr id="8" name="TextBox 7"/>
+          <p:cNvPr id="7" name="TextBox 6"/>
           <p:cNvSpPr txBox="1"/>
           <p:nvPr/>
         </p:nvSpPr>
@@ -5032,7 +4773,7 @@
       </p:sp>
       <p:sp>
         <p:nvSpPr>
-          <p:cNvPr id="9" name="Rectangle 8"/>
+          <p:cNvPr id="8" name="Rectangle 7"/>
           <p:cNvSpPr/>
           <p:nvPr/>
         </p:nvSpPr>
@@ -5081,7 +4822,7 @@
       </p:sp>
       <p:sp>
         <p:nvSpPr>
-          <p:cNvPr id="10" name="Rectangle 9"/>
+          <p:cNvPr id="9" name="Rectangle 8"/>
           <p:cNvSpPr/>
           <p:nvPr/>
         </p:nvSpPr>
@@ -5130,7 +4871,7 @@
       </p:sp>
       <p:sp>
         <p:nvSpPr>
-          <p:cNvPr id="11" name="TextBox 10"/>
+          <p:cNvPr id="10" name="TextBox 9"/>
           <p:cNvSpPr txBox="1"/>
           <p:nvPr/>
         </p:nvSpPr>
@@ -5172,7 +4913,7 @@
       </p:sp>
       <p:sp>
         <p:nvSpPr>
-          <p:cNvPr id="12" name="TextBox 11"/>
+          <p:cNvPr id="11" name="TextBox 10"/>
           <p:cNvSpPr txBox="1"/>
           <p:nvPr/>
         </p:nvSpPr>
@@ -5214,7 +4955,7 @@
       </p:sp>
       <p:sp>
         <p:nvSpPr>
-          <p:cNvPr id="13" name="Rectangle 12"/>
+          <p:cNvPr id="12" name="Rectangle 11"/>
           <p:cNvSpPr/>
           <p:nvPr/>
         </p:nvSpPr>
@@ -5263,7 +5004,7 @@
       </p:sp>
       <p:sp>
         <p:nvSpPr>
-          <p:cNvPr id="14" name="TextBox 13"/>
+          <p:cNvPr id="13" name="TextBox 12"/>
           <p:cNvSpPr txBox="1"/>
           <p:nvPr/>
         </p:nvSpPr>
@@ -5305,7 +5046,7 @@
       </p:sp>
       <p:sp>
         <p:nvSpPr>
-          <p:cNvPr id="15" name="TextBox 14"/>
+          <p:cNvPr id="14" name="TextBox 13"/>
           <p:cNvSpPr txBox="1"/>
           <p:nvPr/>
         </p:nvSpPr>
@@ -5347,7 +5088,7 @@
       </p:sp>
       <p:sp>
         <p:nvSpPr>
-          <p:cNvPr id="16" name="TextBox 15"/>
+          <p:cNvPr id="15" name="TextBox 14"/>
           <p:cNvSpPr txBox="1"/>
           <p:nvPr/>
         </p:nvSpPr>
@@ -5463,7 +5204,7 @@
         <p:spPr>
           <a:xfrm>
             <a:off x="640080" y="329184"/>
-            <a:ext cx="5303520" cy="182880"/>
+            <a:ext cx="9875520" cy="182880"/>
           </a:xfrm>
           <a:prstGeom prst="rect">
             <a:avLst/>
@@ -5504,48 +5245,6 @@
         </p:nvSpPr>
         <p:spPr>
           <a:xfrm>
-            <a:off x="5897880" y="310896"/>
-            <a:ext cx="4800600" cy="256032"/>
-          </a:xfrm>
-          <a:prstGeom prst="rect">
-            <a:avLst/>
-          </a:prstGeom>
-          <a:noFill/>
-        </p:spPr>
-        <p:txBody>
-          <a:bodyPr wrap="none" lIns="9144" rIns="9144" tIns="9144" bIns="9144" anchor="t">
-            <a:spAutoFit/>
-          </a:bodyPr>
-          <a:lstStyle/>
-          <a:p>
-            <a:pPr algn="r">
-              <a:spcAft>
-                <a:spcPts val="0"/>
-              </a:spcAft>
-              <a:defRPr sz="680" b="1">
-                <a:solidFill>
-                  <a:srgbClr val="4F6B00"/>
-                </a:solidFill>
-                <a:latin typeface="Inter"/>
-              </a:defRPr>
-            </a:pPr>
-            <a:r>
-              <a:rPr>
-                <a:latin typeface="Inter"/>
-              </a:rPr>
-              <a:t>Illustrative, Gradient Maintained — demo data, not the client's holdings or managers</a:t>
-            </a:r>
-          </a:p>
-        </p:txBody>
-      </p:sp>
-      <p:sp>
-        <p:nvSpPr>
-          <p:cNvPr id="5" name="TextBox 4"/>
-          <p:cNvSpPr txBox="1"/>
-          <p:nvPr/>
-        </p:nvSpPr>
-        <p:spPr>
-          <a:xfrm>
             <a:off x="640080" y="566928"/>
             <a:ext cx="10058400" cy="530352"/>
           </a:xfrm>
@@ -5582,7 +5281,7 @@
       </p:sp>
       <p:sp>
         <p:nvSpPr>
-          <p:cNvPr id="6" name="Rectangle 5"/>
+          <p:cNvPr id="5" name="Rectangle 4"/>
           <p:cNvSpPr/>
           <p:nvPr/>
         </p:nvSpPr>
@@ -5631,7 +5330,7 @@
       </p:sp>
       <p:sp>
         <p:nvSpPr>
-          <p:cNvPr id="7" name="Rectangle 6"/>
+          <p:cNvPr id="6" name="Rectangle 5"/>
           <p:cNvSpPr/>
           <p:nvPr/>
         </p:nvSpPr>
@@ -5680,7 +5379,7 @@
       </p:sp>
       <p:sp>
         <p:nvSpPr>
-          <p:cNvPr id="8" name="TextBox 7"/>
+          <p:cNvPr id="7" name="TextBox 6"/>
           <p:cNvSpPr txBox="1"/>
           <p:nvPr/>
         </p:nvSpPr>
@@ -5722,7 +5421,7 @@
       </p:sp>
       <p:sp>
         <p:nvSpPr>
-          <p:cNvPr id="9" name="Rectangle 8"/>
+          <p:cNvPr id="8" name="Rectangle 7"/>
           <p:cNvSpPr/>
           <p:nvPr/>
         </p:nvSpPr>
@@ -5771,7 +5470,7 @@
       </p:sp>
       <p:sp>
         <p:nvSpPr>
-          <p:cNvPr id="10" name="Rectangle 9"/>
+          <p:cNvPr id="9" name="Rectangle 8"/>
           <p:cNvSpPr/>
           <p:nvPr/>
         </p:nvSpPr>
@@ -5820,7 +5519,7 @@
       </p:sp>
       <p:sp>
         <p:nvSpPr>
-          <p:cNvPr id="11" name="TextBox 10"/>
+          <p:cNvPr id="10" name="TextBox 9"/>
           <p:cNvSpPr txBox="1"/>
           <p:nvPr/>
         </p:nvSpPr>
@@ -5862,7 +5561,7 @@
       </p:sp>
       <p:sp>
         <p:nvSpPr>
-          <p:cNvPr id="12" name="TextBox 11"/>
+          <p:cNvPr id="11" name="TextBox 10"/>
           <p:cNvSpPr txBox="1"/>
           <p:nvPr/>
         </p:nvSpPr>
@@ -5904,7 +5603,7 @@
       </p:sp>
       <p:sp>
         <p:nvSpPr>
-          <p:cNvPr id="13" name="Rectangle 12"/>
+          <p:cNvPr id="12" name="Rectangle 11"/>
           <p:cNvSpPr/>
           <p:nvPr/>
         </p:nvSpPr>
@@ -5953,7 +5652,7 @@
       </p:sp>
       <p:sp>
         <p:nvSpPr>
-          <p:cNvPr id="14" name="Rectangle 13"/>
+          <p:cNvPr id="13" name="Rectangle 12"/>
           <p:cNvSpPr/>
           <p:nvPr/>
         </p:nvSpPr>
@@ -6002,7 +5701,7 @@
       </p:sp>
       <p:sp>
         <p:nvSpPr>
-          <p:cNvPr id="15" name="TextBox 14"/>
+          <p:cNvPr id="14" name="TextBox 13"/>
           <p:cNvSpPr txBox="1"/>
           <p:nvPr/>
         </p:nvSpPr>
@@ -6044,7 +5743,7 @@
       </p:sp>
       <p:sp>
         <p:nvSpPr>
-          <p:cNvPr id="16" name="TextBox 15"/>
+          <p:cNvPr id="15" name="TextBox 14"/>
           <p:cNvSpPr txBox="1"/>
           <p:nvPr/>
         </p:nvSpPr>
@@ -6079,14 +5778,14 @@
               <a:rPr>
                 <a:latin typeface="Inter"/>
               </a:rPr>
-              <a:t>Not available — fund-operations detail was not included in the reviewed evidence [S1].</a:t>
-            </a:r>
-          </a:p>
-        </p:txBody>
-      </p:sp>
-      <p:sp>
-        <p:nvSpPr>
-          <p:cNvPr id="17" name="Rectangle 16"/>
+              <a:t>Fund-operations detail was not included in the reviewed evidence [S1].</a:t>
+            </a:r>
+          </a:p>
+        </p:txBody>
+      </p:sp>
+      <p:sp>
+        <p:nvSpPr>
+          <p:cNvPr id="16" name="Rectangle 15"/>
           <p:cNvSpPr/>
           <p:nvPr/>
         </p:nvSpPr>
@@ -6135,7 +5834,7 @@
       </p:sp>
       <p:sp>
         <p:nvSpPr>
-          <p:cNvPr id="18" name="Rectangle 17"/>
+          <p:cNvPr id="17" name="Rectangle 16"/>
           <p:cNvSpPr/>
           <p:nvPr/>
         </p:nvSpPr>
@@ -6184,7 +5883,7 @@
       </p:sp>
       <p:sp>
         <p:nvSpPr>
-          <p:cNvPr id="19" name="TextBox 18"/>
+          <p:cNvPr id="18" name="TextBox 17"/>
           <p:cNvSpPr txBox="1"/>
           <p:nvPr/>
         </p:nvSpPr>
@@ -6226,7 +5925,7 @@
       </p:sp>
       <p:sp>
         <p:nvSpPr>
-          <p:cNvPr id="20" name="TextBox 19"/>
+          <p:cNvPr id="19" name="TextBox 18"/>
           <p:cNvSpPr txBox="1"/>
           <p:nvPr/>
         </p:nvSpPr>
@@ -6268,7 +5967,7 @@
       </p:sp>
       <p:sp>
         <p:nvSpPr>
-          <p:cNvPr id="21" name="Rectangle 20"/>
+          <p:cNvPr id="20" name="Rectangle 19"/>
           <p:cNvSpPr/>
           <p:nvPr/>
         </p:nvSpPr>
@@ -6317,7 +6016,7 @@
       </p:sp>
       <p:sp>
         <p:nvSpPr>
-          <p:cNvPr id="22" name="TextBox 21"/>
+          <p:cNvPr id="21" name="TextBox 20"/>
           <p:cNvSpPr txBox="1"/>
           <p:nvPr/>
         </p:nvSpPr>
@@ -6359,7 +6058,7 @@
       </p:sp>
       <p:sp>
         <p:nvSpPr>
-          <p:cNvPr id="23" name="TextBox 22"/>
+          <p:cNvPr id="22" name="TextBox 21"/>
           <p:cNvSpPr txBox="1"/>
           <p:nvPr/>
         </p:nvSpPr>
@@ -6401,7 +6100,7 @@
       </p:sp>
       <p:sp>
         <p:nvSpPr>
-          <p:cNvPr id="24" name="TextBox 23"/>
+          <p:cNvPr id="23" name="TextBox 22"/>
           <p:cNvSpPr txBox="1"/>
           <p:nvPr/>
         </p:nvSpPr>
@@ -6517,7 +6216,7 @@
         <p:spPr>
           <a:xfrm>
             <a:off x="640080" y="329184"/>
-            <a:ext cx="5303520" cy="182880"/>
+            <a:ext cx="9875520" cy="182880"/>
           </a:xfrm>
           <a:prstGeom prst="rect">
             <a:avLst/>
@@ -6558,48 +6257,6 @@
         </p:nvSpPr>
         <p:spPr>
           <a:xfrm>
-            <a:off x="5897880" y="310896"/>
-            <a:ext cx="4800600" cy="256032"/>
-          </a:xfrm>
-          <a:prstGeom prst="rect">
-            <a:avLst/>
-          </a:prstGeom>
-          <a:noFill/>
-        </p:spPr>
-        <p:txBody>
-          <a:bodyPr wrap="none" lIns="9144" rIns="9144" tIns="9144" bIns="9144" anchor="t">
-            <a:spAutoFit/>
-          </a:bodyPr>
-          <a:lstStyle/>
-          <a:p>
-            <a:pPr algn="r">
-              <a:spcAft>
-                <a:spcPts val="0"/>
-              </a:spcAft>
-              <a:defRPr sz="680" b="1">
-                <a:solidFill>
-                  <a:srgbClr val="4F6B00"/>
-                </a:solidFill>
-                <a:latin typeface="Inter"/>
-              </a:defRPr>
-            </a:pPr>
-            <a:r>
-              <a:rPr>
-                <a:latin typeface="Inter"/>
-              </a:rPr>
-              <a:t>Illustrative, Gradient Maintained — demo data, not the client's holdings or managers</a:t>
-            </a:r>
-          </a:p>
-        </p:txBody>
-      </p:sp>
-      <p:sp>
-        <p:nvSpPr>
-          <p:cNvPr id="5" name="TextBox 4"/>
-          <p:cNvSpPr txBox="1"/>
-          <p:nvPr/>
-        </p:nvSpPr>
-        <p:spPr>
-          <a:xfrm>
             <a:off x="640080" y="566928"/>
             <a:ext cx="10058400" cy="530352"/>
           </a:xfrm>
@@ -6636,7 +6293,7 @@
       </p:sp>
       <p:sp>
         <p:nvSpPr>
-          <p:cNvPr id="6" name="Rectangle 5"/>
+          <p:cNvPr id="5" name="Rectangle 4"/>
           <p:cNvSpPr/>
           <p:nvPr/>
         </p:nvSpPr>
@@ -6685,7 +6342,7 @@
       </p:sp>
       <p:sp>
         <p:nvSpPr>
-          <p:cNvPr id="7" name="Rectangle 6"/>
+          <p:cNvPr id="6" name="Rectangle 5"/>
           <p:cNvSpPr/>
           <p:nvPr/>
         </p:nvSpPr>
@@ -6734,7 +6391,7 @@
       </p:sp>
       <p:sp>
         <p:nvSpPr>
-          <p:cNvPr id="8" name="TextBox 7"/>
+          <p:cNvPr id="7" name="TextBox 6"/>
           <p:cNvSpPr txBox="1"/>
           <p:nvPr/>
         </p:nvSpPr>
@@ -6776,7 +6433,7 @@
       </p:sp>
       <p:sp>
         <p:nvSpPr>
-          <p:cNvPr id="9" name="Rectangle 8"/>
+          <p:cNvPr id="8" name="Rectangle 7"/>
           <p:cNvSpPr/>
           <p:nvPr/>
         </p:nvSpPr>
@@ -6825,7 +6482,7 @@
       </p:sp>
       <p:sp>
         <p:nvSpPr>
-          <p:cNvPr id="10" name="Rectangle 9"/>
+          <p:cNvPr id="9" name="Rectangle 8"/>
           <p:cNvSpPr/>
           <p:nvPr/>
         </p:nvSpPr>
@@ -6874,7 +6531,7 @@
       </p:sp>
       <p:sp>
         <p:nvSpPr>
-          <p:cNvPr id="11" name="TextBox 10"/>
+          <p:cNvPr id="10" name="TextBox 9"/>
           <p:cNvSpPr txBox="1"/>
           <p:nvPr/>
         </p:nvSpPr>
@@ -6916,7 +6573,7 @@
       </p:sp>
       <p:sp>
         <p:nvSpPr>
-          <p:cNvPr id="12" name="TextBox 11"/>
+          <p:cNvPr id="11" name="TextBox 10"/>
           <p:cNvSpPr txBox="1"/>
           <p:nvPr/>
         </p:nvSpPr>
@@ -6958,7 +6615,7 @@
       </p:sp>
       <p:sp>
         <p:nvSpPr>
-          <p:cNvPr id="13" name="Rectangle 12"/>
+          <p:cNvPr id="12" name="Rectangle 11"/>
           <p:cNvSpPr/>
           <p:nvPr/>
         </p:nvSpPr>
@@ -7007,7 +6664,7 @@
       </p:sp>
       <p:sp>
         <p:nvSpPr>
-          <p:cNvPr id="14" name="Rectangle 13"/>
+          <p:cNvPr id="13" name="Rectangle 12"/>
           <p:cNvSpPr/>
           <p:nvPr/>
         </p:nvSpPr>
@@ -7056,7 +6713,7 @@
       </p:sp>
       <p:sp>
         <p:nvSpPr>
-          <p:cNvPr id="15" name="TextBox 14"/>
+          <p:cNvPr id="14" name="TextBox 13"/>
           <p:cNvSpPr txBox="1"/>
           <p:nvPr/>
         </p:nvSpPr>
@@ -7098,7 +6755,7 @@
       </p:sp>
       <p:sp>
         <p:nvSpPr>
-          <p:cNvPr id="16" name="TextBox 15"/>
+          <p:cNvPr id="15" name="TextBox 14"/>
           <p:cNvSpPr txBox="1"/>
           <p:nvPr/>
         </p:nvSpPr>
@@ -7133,14 +6790,14 @@
               <a:rPr>
                 <a:latin typeface="Inter"/>
               </a:rPr>
-              <a:t>Not available — holding rows were not included in the reviewed evidence [S3].</a:t>
-            </a:r>
-          </a:p>
-        </p:txBody>
-      </p:sp>
-      <p:sp>
-        <p:nvSpPr>
-          <p:cNvPr id="17" name="Rectangle 16"/>
+              <a:t>Holding rows were not included in the reviewed evidence [S3].</a:t>
+            </a:r>
+          </a:p>
+        </p:txBody>
+      </p:sp>
+      <p:sp>
+        <p:nvSpPr>
+          <p:cNvPr id="16" name="Rectangle 15"/>
           <p:cNvSpPr/>
           <p:nvPr/>
         </p:nvSpPr>
@@ -7189,7 +6846,7 @@
       </p:sp>
       <p:sp>
         <p:nvSpPr>
-          <p:cNvPr id="18" name="Rectangle 17"/>
+          <p:cNvPr id="17" name="Rectangle 16"/>
           <p:cNvSpPr/>
           <p:nvPr/>
         </p:nvSpPr>
@@ -7238,7 +6895,7 @@
       </p:sp>
       <p:sp>
         <p:nvSpPr>
-          <p:cNvPr id="19" name="TextBox 18"/>
+          <p:cNvPr id="18" name="TextBox 17"/>
           <p:cNvSpPr txBox="1"/>
           <p:nvPr/>
         </p:nvSpPr>
@@ -7280,7 +6937,7 @@
       </p:sp>
       <p:sp>
         <p:nvSpPr>
-          <p:cNvPr id="20" name="TextBox 19"/>
+          <p:cNvPr id="19" name="TextBox 18"/>
           <p:cNvSpPr txBox="1"/>
           <p:nvPr/>
         </p:nvSpPr>
@@ -7322,7 +6979,7 @@
       </p:sp>
       <p:sp>
         <p:nvSpPr>
-          <p:cNvPr id="21" name="Rectangle 20"/>
+          <p:cNvPr id="20" name="Rectangle 19"/>
           <p:cNvSpPr/>
           <p:nvPr/>
         </p:nvSpPr>
@@ -7371,7 +7028,7 @@
       </p:sp>
       <p:sp>
         <p:nvSpPr>
-          <p:cNvPr id="22" name="TextBox 21"/>
+          <p:cNvPr id="21" name="TextBox 20"/>
           <p:cNvSpPr txBox="1"/>
           <p:nvPr/>
         </p:nvSpPr>
@@ -7413,7 +7070,7 @@
       </p:sp>
       <p:sp>
         <p:nvSpPr>
-          <p:cNvPr id="23" name="TextBox 22"/>
+          <p:cNvPr id="22" name="TextBox 21"/>
           <p:cNvSpPr txBox="1"/>
           <p:nvPr/>
         </p:nvSpPr>
@@ -7455,7 +7112,7 @@
       </p:sp>
       <p:sp>
         <p:nvSpPr>
-          <p:cNvPr id="24" name="TextBox 23"/>
+          <p:cNvPr id="23" name="TextBox 22"/>
           <p:cNvSpPr txBox="1"/>
           <p:nvPr/>
         </p:nvSpPr>
@@ -7571,7 +7228,7 @@
         <p:spPr>
           <a:xfrm>
             <a:off x="640080" y="329184"/>
-            <a:ext cx="5303520" cy="182880"/>
+            <a:ext cx="9875520" cy="182880"/>
           </a:xfrm>
           <a:prstGeom prst="rect">
             <a:avLst/>
@@ -7612,48 +7269,6 @@
         </p:nvSpPr>
         <p:spPr>
           <a:xfrm>
-            <a:off x="5897880" y="310896"/>
-            <a:ext cx="4800600" cy="256032"/>
-          </a:xfrm>
-          <a:prstGeom prst="rect">
-            <a:avLst/>
-          </a:prstGeom>
-          <a:noFill/>
-        </p:spPr>
-        <p:txBody>
-          <a:bodyPr wrap="none" lIns="9144" rIns="9144" tIns="9144" bIns="9144" anchor="t">
-            <a:spAutoFit/>
-          </a:bodyPr>
-          <a:lstStyle/>
-          <a:p>
-            <a:pPr algn="r">
-              <a:spcAft>
-                <a:spcPts val="0"/>
-              </a:spcAft>
-              <a:defRPr sz="680" b="1">
-                <a:solidFill>
-                  <a:srgbClr val="4F6B00"/>
-                </a:solidFill>
-                <a:latin typeface="Inter"/>
-              </a:defRPr>
-            </a:pPr>
-            <a:r>
-              <a:rPr>
-                <a:latin typeface="Inter"/>
-              </a:rPr>
-              <a:t>Illustrative, Gradient Maintained — demo data, not the client's holdings or managers</a:t>
-            </a:r>
-          </a:p>
-        </p:txBody>
-      </p:sp>
-      <p:sp>
-        <p:nvSpPr>
-          <p:cNvPr id="5" name="TextBox 4"/>
-          <p:cNvSpPr txBox="1"/>
-          <p:nvPr/>
-        </p:nvSpPr>
-        <p:spPr>
-          <a:xfrm>
             <a:off x="640080" y="566928"/>
             <a:ext cx="10058400" cy="530352"/>
           </a:xfrm>
@@ -7690,7 +7305,7 @@
       </p:sp>
       <p:sp>
         <p:nvSpPr>
-          <p:cNvPr id="6" name="Rectangle 5"/>
+          <p:cNvPr id="5" name="Rectangle 4"/>
           <p:cNvSpPr/>
           <p:nvPr/>
         </p:nvSpPr>
@@ -7739,7 +7354,7 @@
       </p:sp>
       <p:sp>
         <p:nvSpPr>
-          <p:cNvPr id="7" name="Rectangle 6"/>
+          <p:cNvPr id="6" name="Rectangle 5"/>
           <p:cNvSpPr/>
           <p:nvPr/>
         </p:nvSpPr>
@@ -7788,7 +7403,7 @@
       </p:sp>
       <p:sp>
         <p:nvSpPr>
-          <p:cNvPr id="8" name="TextBox 7"/>
+          <p:cNvPr id="7" name="TextBox 6"/>
           <p:cNvSpPr txBox="1"/>
           <p:nvPr/>
         </p:nvSpPr>
@@ -7830,7 +7445,7 @@
       </p:sp>
       <p:sp>
         <p:nvSpPr>
-          <p:cNvPr id="9" name="TextBox 8"/>
+          <p:cNvPr id="8" name="TextBox 7"/>
           <p:cNvSpPr txBox="1"/>
           <p:nvPr/>
         </p:nvSpPr>
@@ -7872,7 +7487,7 @@
       </p:sp>
       <p:sp>
         <p:nvSpPr>
-          <p:cNvPr id="10" name="Rectangle 9"/>
+          <p:cNvPr id="9" name="Rectangle 8"/>
           <p:cNvSpPr/>
           <p:nvPr/>
         </p:nvSpPr>
@@ -7921,7 +7536,7 @@
       </p:sp>
       <p:sp>
         <p:nvSpPr>
-          <p:cNvPr id="11" name="Oval 10"/>
+          <p:cNvPr id="10" name="Oval 9"/>
           <p:cNvSpPr/>
           <p:nvPr/>
         </p:nvSpPr>
@@ -7970,7 +7585,7 @@
       </p:sp>
       <p:sp>
         <p:nvSpPr>
-          <p:cNvPr id="12" name="TextBox 11"/>
+          <p:cNvPr id="11" name="TextBox 10"/>
           <p:cNvSpPr txBox="1"/>
           <p:nvPr/>
         </p:nvSpPr>
@@ -8012,7 +7627,7 @@
       </p:sp>
       <p:sp>
         <p:nvSpPr>
-          <p:cNvPr id="13" name="TextBox 12"/>
+          <p:cNvPr id="12" name="TextBox 11"/>
           <p:cNvSpPr txBox="1"/>
           <p:nvPr/>
         </p:nvSpPr>
@@ -8054,7 +7669,7 @@
       </p:sp>
       <p:sp>
         <p:nvSpPr>
-          <p:cNvPr id="14" name="TextBox 13"/>
+          <p:cNvPr id="13" name="TextBox 12"/>
           <p:cNvSpPr txBox="1"/>
           <p:nvPr/>
         </p:nvSpPr>
@@ -8096,7 +7711,7 @@
       </p:sp>
       <p:sp>
         <p:nvSpPr>
-          <p:cNvPr id="15" name="Oval 14"/>
+          <p:cNvPr id="14" name="Oval 13"/>
           <p:cNvSpPr/>
           <p:nvPr/>
         </p:nvSpPr>
@@ -8145,7 +7760,7 @@
       </p:sp>
       <p:sp>
         <p:nvSpPr>
-          <p:cNvPr id="16" name="TextBox 15"/>
+          <p:cNvPr id="15" name="TextBox 14"/>
           <p:cNvSpPr txBox="1"/>
           <p:nvPr/>
         </p:nvSpPr>
@@ -8187,7 +7802,7 @@
       </p:sp>
       <p:sp>
         <p:nvSpPr>
-          <p:cNvPr id="17" name="TextBox 16"/>
+          <p:cNvPr id="16" name="TextBox 15"/>
           <p:cNvSpPr txBox="1"/>
           <p:nvPr/>
         </p:nvSpPr>
@@ -8229,7 +7844,7 @@
       </p:sp>
       <p:sp>
         <p:nvSpPr>
-          <p:cNvPr id="18" name="TextBox 17"/>
+          <p:cNvPr id="17" name="TextBox 16"/>
           <p:cNvSpPr txBox="1"/>
           <p:nvPr/>
         </p:nvSpPr>
@@ -8271,7 +7886,7 @@
       </p:sp>
       <p:sp>
         <p:nvSpPr>
-          <p:cNvPr id="19" name="Oval 18"/>
+          <p:cNvPr id="18" name="Oval 17"/>
           <p:cNvSpPr/>
           <p:nvPr/>
         </p:nvSpPr>
@@ -8320,7 +7935,7 @@
       </p:sp>
       <p:sp>
         <p:nvSpPr>
-          <p:cNvPr id="20" name="TextBox 19"/>
+          <p:cNvPr id="19" name="TextBox 18"/>
           <p:cNvSpPr txBox="1"/>
           <p:nvPr/>
         </p:nvSpPr>
@@ -8362,7 +7977,7 @@
       </p:sp>
       <p:sp>
         <p:nvSpPr>
-          <p:cNvPr id="21" name="TextBox 20"/>
+          <p:cNvPr id="20" name="TextBox 19"/>
           <p:cNvSpPr txBox="1"/>
           <p:nvPr/>
         </p:nvSpPr>
@@ -8404,7 +8019,7 @@
       </p:sp>
       <p:sp>
         <p:nvSpPr>
-          <p:cNvPr id="22" name="TextBox 21"/>
+          <p:cNvPr id="21" name="TextBox 20"/>
           <p:cNvSpPr txBox="1"/>
           <p:nvPr/>
         </p:nvSpPr>
@@ -8446,7 +8061,7 @@
       </p:sp>
       <p:sp>
         <p:nvSpPr>
-          <p:cNvPr id="23" name="Rectangle 22"/>
+          <p:cNvPr id="22" name="Rectangle 21"/>
           <p:cNvSpPr/>
           <p:nvPr/>
         </p:nvSpPr>
@@ -8495,7 +8110,7 @@
       </p:sp>
       <p:sp>
         <p:nvSpPr>
-          <p:cNvPr id="24" name="TextBox 23"/>
+          <p:cNvPr id="23" name="TextBox 22"/>
           <p:cNvSpPr txBox="1"/>
           <p:nvPr/>
         </p:nvSpPr>
@@ -8537,7 +8152,7 @@
       </p:sp>
       <p:sp>
         <p:nvSpPr>
-          <p:cNvPr id="25" name="TextBox 24"/>
+          <p:cNvPr id="24" name="TextBox 23"/>
           <p:cNvSpPr txBox="1"/>
           <p:nvPr/>
         </p:nvSpPr>
@@ -8579,7 +8194,7 @@
       </p:sp>
       <p:sp>
         <p:nvSpPr>
-          <p:cNvPr id="26" name="TextBox 25"/>
+          <p:cNvPr id="25" name="TextBox 24"/>
           <p:cNvSpPr txBox="1"/>
           <p:nvPr/>
         </p:nvSpPr>
@@ -8695,7 +8310,7 @@
         <p:spPr>
           <a:xfrm>
             <a:off x="640080" y="329184"/>
-            <a:ext cx="5303520" cy="182880"/>
+            <a:ext cx="9875520" cy="182880"/>
           </a:xfrm>
           <a:prstGeom prst="rect">
             <a:avLst/>
@@ -8736,48 +8351,6 @@
         </p:nvSpPr>
         <p:spPr>
           <a:xfrm>
-            <a:off x="5897880" y="310896"/>
-            <a:ext cx="4800600" cy="256032"/>
-          </a:xfrm>
-          <a:prstGeom prst="rect">
-            <a:avLst/>
-          </a:prstGeom>
-          <a:noFill/>
-        </p:spPr>
-        <p:txBody>
-          <a:bodyPr wrap="none" lIns="9144" rIns="9144" tIns="9144" bIns="9144" anchor="t">
-            <a:spAutoFit/>
-          </a:bodyPr>
-          <a:lstStyle/>
-          <a:p>
-            <a:pPr algn="r">
-              <a:spcAft>
-                <a:spcPts val="0"/>
-              </a:spcAft>
-              <a:defRPr sz="680" b="1">
-                <a:solidFill>
-                  <a:srgbClr val="4F6B00"/>
-                </a:solidFill>
-                <a:latin typeface="Inter"/>
-              </a:defRPr>
-            </a:pPr>
-            <a:r>
-              <a:rPr>
-                <a:latin typeface="Inter"/>
-              </a:rPr>
-              <a:t>Illustrative, Gradient Maintained — demo data, not the client's holdings or managers</a:t>
-            </a:r>
-          </a:p>
-        </p:txBody>
-      </p:sp>
-      <p:sp>
-        <p:nvSpPr>
-          <p:cNvPr id="5" name="TextBox 4"/>
-          <p:cNvSpPr txBox="1"/>
-          <p:nvPr/>
-        </p:nvSpPr>
-        <p:spPr>
-          <a:xfrm>
             <a:off x="640080" y="566928"/>
             <a:ext cx="10058400" cy="530352"/>
           </a:xfrm>
@@ -8814,7 +8387,7 @@
       </p:sp>
       <p:sp>
         <p:nvSpPr>
-          <p:cNvPr id="6" name="Rectangle 5"/>
+          <p:cNvPr id="5" name="Rectangle 4"/>
           <p:cNvSpPr/>
           <p:nvPr/>
         </p:nvSpPr>
@@ -8863,7 +8436,7 @@
       </p:sp>
       <p:sp>
         <p:nvSpPr>
-          <p:cNvPr id="7" name="Rectangle 6"/>
+          <p:cNvPr id="6" name="Rectangle 5"/>
           <p:cNvSpPr/>
           <p:nvPr/>
         </p:nvSpPr>
@@ -8912,7 +8485,7 @@
       </p:sp>
       <p:sp>
         <p:nvSpPr>
-          <p:cNvPr id="8" name="TextBox 7"/>
+          <p:cNvPr id="7" name="TextBox 6"/>
           <p:cNvSpPr txBox="1"/>
           <p:nvPr/>
         </p:nvSpPr>
@@ -8954,7 +8527,7 @@
       </p:sp>
       <p:sp>
         <p:nvSpPr>
-          <p:cNvPr id="9" name="Rectangle 8"/>
+          <p:cNvPr id="8" name="Rectangle 7"/>
           <p:cNvSpPr/>
           <p:nvPr/>
         </p:nvSpPr>
@@ -9003,7 +8576,7 @@
       </p:sp>
       <p:sp>
         <p:nvSpPr>
-          <p:cNvPr id="10" name="Rectangle 9"/>
+          <p:cNvPr id="9" name="Rectangle 8"/>
           <p:cNvSpPr/>
           <p:nvPr/>
         </p:nvSpPr>
@@ -9052,7 +8625,7 @@
       </p:sp>
       <p:sp>
         <p:nvSpPr>
-          <p:cNvPr id="11" name="TextBox 10"/>
+          <p:cNvPr id="10" name="TextBox 9"/>
           <p:cNvSpPr txBox="1"/>
           <p:nvPr/>
         </p:nvSpPr>
@@ -9094,7 +8667,7 @@
       </p:sp>
       <p:sp>
         <p:nvSpPr>
-          <p:cNvPr id="12" name="TextBox 11"/>
+          <p:cNvPr id="11" name="TextBox 10"/>
           <p:cNvSpPr txBox="1"/>
           <p:nvPr/>
         </p:nvSpPr>
@@ -9129,14 +8702,14 @@
               <a:rPr>
                 <a:latin typeface="Inter"/>
               </a:rPr>
-              <a:t>Not available — monitoring details were not included in the reviewed evidence [S2].</a:t>
-            </a:r>
-          </a:p>
-        </p:txBody>
-      </p:sp>
-      <p:sp>
-        <p:nvSpPr>
-          <p:cNvPr id="13" name="Rectangle 12"/>
+              <a:t>Monitoring details were not included in the reviewed evidence [S2].</a:t>
+            </a:r>
+          </a:p>
+        </p:txBody>
+      </p:sp>
+      <p:sp>
+        <p:nvSpPr>
+          <p:cNvPr id="12" name="Rectangle 11"/>
           <p:cNvSpPr/>
           <p:nvPr/>
         </p:nvSpPr>
@@ -9185,7 +8758,7 @@
       </p:sp>
       <p:sp>
         <p:nvSpPr>
-          <p:cNvPr id="14" name="Rectangle 13"/>
+          <p:cNvPr id="13" name="Rectangle 12"/>
           <p:cNvSpPr/>
           <p:nvPr/>
         </p:nvSpPr>
@@ -9234,7 +8807,7 @@
       </p:sp>
       <p:sp>
         <p:nvSpPr>
-          <p:cNvPr id="15" name="TextBox 14"/>
+          <p:cNvPr id="14" name="TextBox 13"/>
           <p:cNvSpPr txBox="1"/>
           <p:nvPr/>
         </p:nvSpPr>
@@ -9276,7 +8849,7 @@
       </p:sp>
       <p:sp>
         <p:nvSpPr>
-          <p:cNvPr id="16" name="TextBox 15"/>
+          <p:cNvPr id="15" name="TextBox 14"/>
           <p:cNvSpPr txBox="1"/>
           <p:nvPr/>
         </p:nvSpPr>
@@ -9318,7 +8891,7 @@
       </p:sp>
       <p:sp>
         <p:nvSpPr>
-          <p:cNvPr id="17" name="Rectangle 16"/>
+          <p:cNvPr id="16" name="Rectangle 15"/>
           <p:cNvSpPr/>
           <p:nvPr/>
         </p:nvSpPr>
@@ -9367,7 +8940,7 @@
       </p:sp>
       <p:sp>
         <p:nvSpPr>
-          <p:cNvPr id="18" name="TextBox 17"/>
+          <p:cNvPr id="17" name="TextBox 16"/>
           <p:cNvSpPr txBox="1"/>
           <p:nvPr/>
         </p:nvSpPr>
@@ -9409,7 +8982,7 @@
       </p:sp>
       <p:sp>
         <p:nvSpPr>
-          <p:cNvPr id="19" name="TextBox 18"/>
+          <p:cNvPr id="18" name="TextBox 17"/>
           <p:cNvSpPr txBox="1"/>
           <p:nvPr/>
         </p:nvSpPr>
@@ -9451,7 +9024,7 @@
       </p:sp>
       <p:sp>
         <p:nvSpPr>
-          <p:cNvPr id="20" name="TextBox 19"/>
+          <p:cNvPr id="19" name="TextBox 18"/>
           <p:cNvSpPr txBox="1"/>
           <p:nvPr/>
         </p:nvSpPr>
@@ -9566,48 +9139,6 @@
         </p:nvSpPr>
         <p:spPr>
           <a:xfrm>
-            <a:off x="5897880" y="310896"/>
-            <a:ext cx="4800600" cy="256032"/>
-          </a:xfrm>
-          <a:prstGeom prst="rect">
-            <a:avLst/>
-          </a:prstGeom>
-          <a:noFill/>
-        </p:spPr>
-        <p:txBody>
-          <a:bodyPr wrap="none" lIns="9144" rIns="9144" tIns="9144" bIns="9144" anchor="t">
-            <a:spAutoFit/>
-          </a:bodyPr>
-          <a:lstStyle/>
-          <a:p>
-            <a:pPr algn="r">
-              <a:spcAft>
-                <a:spcPts val="0"/>
-              </a:spcAft>
-              <a:defRPr sz="680" b="1">
-                <a:solidFill>
-                  <a:srgbClr val="4F6B00"/>
-                </a:solidFill>
-                <a:latin typeface="Inter"/>
-              </a:defRPr>
-            </a:pPr>
-            <a:r>
-              <a:rPr>
-                <a:latin typeface="Inter"/>
-              </a:rPr>
-              <a:t>Illustrative, Gradient Maintained — demo data, not the client's holdings or managers</a:t>
-            </a:r>
-          </a:p>
-        </p:txBody>
-      </p:sp>
-      <p:sp>
-        <p:nvSpPr>
-          <p:cNvPr id="4" name="TextBox 3"/>
-          <p:cNvSpPr txBox="1"/>
-          <p:nvPr/>
-        </p:nvSpPr>
-        <p:spPr>
-          <a:xfrm>
             <a:off x="640080" y="566928"/>
             <a:ext cx="10058400" cy="530352"/>
           </a:xfrm>
@@ -9644,7 +9175,7 @@
       </p:sp>
       <p:sp>
         <p:nvSpPr>
-          <p:cNvPr id="5" name="Rectangle 4"/>
+          <p:cNvPr id="4" name="Rectangle 3"/>
           <p:cNvSpPr/>
           <p:nvPr/>
         </p:nvSpPr>
@@ -9693,7 +9224,7 @@
       </p:sp>
       <p:sp>
         <p:nvSpPr>
-          <p:cNvPr id="6" name="Rectangle 5"/>
+          <p:cNvPr id="5" name="Rectangle 4"/>
           <p:cNvSpPr/>
           <p:nvPr/>
         </p:nvSpPr>
@@ -9742,7 +9273,7 @@
       </p:sp>
       <p:sp>
         <p:nvSpPr>
-          <p:cNvPr id="7" name="TextBox 6"/>
+          <p:cNvPr id="6" name="TextBox 5"/>
           <p:cNvSpPr txBox="1"/>
           <p:nvPr/>
         </p:nvSpPr>
@@ -9784,7 +9315,7 @@
       </p:sp>
       <p:sp>
         <p:nvSpPr>
-          <p:cNvPr id="8" name="Rectangle 7"/>
+          <p:cNvPr id="7" name="Rectangle 6"/>
           <p:cNvSpPr/>
           <p:nvPr/>
         </p:nvSpPr>
@@ -9833,7 +9364,7 @@
       </p:sp>
       <p:sp>
         <p:nvSpPr>
-          <p:cNvPr id="9" name="Rectangle 8"/>
+          <p:cNvPr id="8" name="Rectangle 7"/>
           <p:cNvSpPr/>
           <p:nvPr/>
         </p:nvSpPr>
@@ -9882,7 +9413,7 @@
       </p:sp>
       <p:sp>
         <p:nvSpPr>
-          <p:cNvPr id="10" name="TextBox 9"/>
+          <p:cNvPr id="9" name="TextBox 8"/>
           <p:cNvSpPr txBox="1"/>
           <p:nvPr/>
         </p:nvSpPr>
@@ -9924,7 +9455,7 @@
       </p:sp>
       <p:sp>
         <p:nvSpPr>
-          <p:cNvPr id="11" name="TextBox 10"/>
+          <p:cNvPr id="10" name="TextBox 9"/>
           <p:cNvSpPr txBox="1"/>
           <p:nvPr/>
         </p:nvSpPr>
@@ -9959,14 +9490,14 @@
               <a:rPr>
                 <a:latin typeface="Inter"/>
               </a:rPr>
-              <a:t>Not available — no follow-up questions are included in this review [S1].</a:t>
-            </a:r>
-          </a:p>
-        </p:txBody>
-      </p:sp>
-      <p:sp>
-        <p:nvSpPr>
-          <p:cNvPr id="12" name="Rectangle 11"/>
+              <a:t>No follow-up questions are included in this review [S1].</a:t>
+            </a:r>
+          </a:p>
+        </p:txBody>
+      </p:sp>
+      <p:sp>
+        <p:nvSpPr>
+          <p:cNvPr id="11" name="Rectangle 10"/>
           <p:cNvSpPr/>
           <p:nvPr/>
         </p:nvSpPr>
@@ -10015,7 +9546,7 @@
       </p:sp>
       <p:sp>
         <p:nvSpPr>
-          <p:cNvPr id="13" name="TextBox 12"/>
+          <p:cNvPr id="12" name="TextBox 11"/>
           <p:cNvSpPr txBox="1"/>
           <p:nvPr/>
         </p:nvSpPr>
@@ -10057,7 +9588,7 @@
       </p:sp>
       <p:sp>
         <p:nvSpPr>
-          <p:cNvPr id="14" name="TextBox 13"/>
+          <p:cNvPr id="13" name="TextBox 12"/>
           <p:cNvSpPr txBox="1"/>
           <p:nvPr/>
         </p:nvSpPr>
@@ -10099,7 +9630,7 @@
       </p:sp>
       <p:sp>
         <p:nvSpPr>
-          <p:cNvPr id="15" name="TextBox 14"/>
+          <p:cNvPr id="14" name="TextBox 13"/>
           <p:cNvSpPr txBox="1"/>
           <p:nvPr/>
         </p:nvSpPr>
@@ -10214,48 +9745,6 @@
         </p:nvSpPr>
         <p:spPr>
           <a:xfrm>
-            <a:off x="5897880" y="310896"/>
-            <a:ext cx="4800600" cy="256032"/>
-          </a:xfrm>
-          <a:prstGeom prst="rect">
-            <a:avLst/>
-          </a:prstGeom>
-          <a:noFill/>
-        </p:spPr>
-        <p:txBody>
-          <a:bodyPr wrap="none" lIns="9144" rIns="9144" tIns="9144" bIns="9144" anchor="t">
-            <a:spAutoFit/>
-          </a:bodyPr>
-          <a:lstStyle/>
-          <a:p>
-            <a:pPr algn="r">
-              <a:spcAft>
-                <a:spcPts val="0"/>
-              </a:spcAft>
-              <a:defRPr sz="680" b="1">
-                <a:solidFill>
-                  <a:srgbClr val="4F6B00"/>
-                </a:solidFill>
-                <a:latin typeface="Inter"/>
-              </a:defRPr>
-            </a:pPr>
-            <a:r>
-              <a:rPr>
-                <a:latin typeface="Inter"/>
-              </a:rPr>
-              <a:t>Illustrative, Gradient Maintained — demo data, not the client's holdings or managers</a:t>
-            </a:r>
-          </a:p>
-        </p:txBody>
-      </p:sp>
-      <p:sp>
-        <p:nvSpPr>
-          <p:cNvPr id="4" name="TextBox 3"/>
-          <p:cNvSpPr txBox="1"/>
-          <p:nvPr/>
-        </p:nvSpPr>
-        <p:spPr>
-          <a:xfrm>
             <a:off x="640080" y="566928"/>
             <a:ext cx="10058400" cy="530352"/>
           </a:xfrm>
@@ -10292,7 +9781,7 @@
       </p:sp>
       <p:sp>
         <p:nvSpPr>
-          <p:cNvPr id="5" name="Rectangle 4"/>
+          <p:cNvPr id="4" name="Rectangle 3"/>
           <p:cNvSpPr/>
           <p:nvPr/>
         </p:nvSpPr>
@@ -10341,7 +9830,7 @@
       </p:sp>
       <p:sp>
         <p:nvSpPr>
-          <p:cNvPr id="6" name="Rectangle 5"/>
+          <p:cNvPr id="5" name="Rectangle 4"/>
           <p:cNvSpPr/>
           <p:nvPr/>
         </p:nvSpPr>
@@ -10390,7 +9879,7 @@
       </p:sp>
       <p:sp>
         <p:nvSpPr>
-          <p:cNvPr id="7" name="TextBox 6"/>
+          <p:cNvPr id="6" name="TextBox 5"/>
           <p:cNvSpPr txBox="1"/>
           <p:nvPr/>
         </p:nvSpPr>
@@ -10432,7 +9921,7 @@
       </p:sp>
       <p:sp>
         <p:nvSpPr>
-          <p:cNvPr id="8" name="TextBox 7"/>
+          <p:cNvPr id="7" name="TextBox 6"/>
           <p:cNvSpPr txBox="1"/>
           <p:nvPr/>
         </p:nvSpPr>
@@ -10474,7 +9963,7 @@
       </p:sp>
       <p:graphicFrame>
         <p:nvGraphicFramePr>
-          <p:cNvPr id="9" name="Table 8"/>
+          <p:cNvPr id="8" name="Table 7"/>
           <p:cNvGraphicFramePr>
             <a:graphicFrameLocks noGrp="1"/>
           </p:cNvGraphicFramePr>
@@ -10482,7 +9971,7 @@
         </p:nvGraphicFramePr>
         <p:xfrm>
           <a:off x="640080" y="1600200"/>
-          <a:ext cx="10908792" cy="1841866"/>
+          <a:ext cx="10908792" cy="1049658"/>
         </p:xfrm>
         <a:graphic>
           <a:graphicData uri="http://schemas.openxmlformats.org/drawingml/2006/table">
@@ -10492,16 +9981,12 @@
               </a:tblPr>
               <a:tblGrid>
                 <a:gridCol w="2011680"/>
-                <a:gridCol w="1112139"/>
-                <a:gridCol w="1112139"/>
-                <a:gridCol w="1112139"/>
-                <a:gridCol w="1112139"/>
-                <a:gridCol w="1112139"/>
-                <a:gridCol w="1112139"/>
-                <a:gridCol w="1112139"/>
-                <a:gridCol w="1112139"/>
+                <a:gridCol w="2224278"/>
+                <a:gridCol w="2224278"/>
+                <a:gridCol w="2224278"/>
+                <a:gridCol w="2224278"/>
               </a:tblGrid>
-              <a:tr h="460466">
+              <a:tr h="262414">
                 <a:tc>
                   <a:txBody>
                     <a:bodyPr/>
@@ -10573,61 +10058,7 @@
                         <a:rPr>
                           <a:latin typeface="Inter"/>
                         </a:rPr>
-                        <a:t>Basis</a:t>
-                      </a:r>
-                    </a:p>
-                  </a:txBody>
-                  <a:tcPr marL="54864" marR="54864" marT="27432" marB="27432" anchor="ctr">
-                    <a:solidFill>
-                      <a:srgbClr val="0D1117"/>
-                    </a:solidFill>
-                  </a:tcPr>
-                </a:tc>
-                <a:tc>
-                  <a:txBody>
-                    <a:bodyPr/>
-                    <a:lstStyle/>
-                    <a:p>
-                      <a:pPr>
-                        <a:defRPr sz="750" b="1">
-                          <a:solidFill>
-                            <a:srgbClr val="FFFFFF"/>
-                          </a:solidFill>
-                          <a:latin typeface="Inter"/>
-                        </a:defRPr>
-                      </a:pPr>
-                      <a:r>
-                        <a:rPr>
-                          <a:latin typeface="Inter"/>
-                        </a:rPr>
-                        <a:t>Tool / view</a:t>
-                      </a:r>
-                    </a:p>
-                  </a:txBody>
-                  <a:tcPr marL="54864" marR="54864" marT="27432" marB="27432" anchor="ctr">
-                    <a:solidFill>
-                      <a:srgbClr val="0D1117"/>
-                    </a:solidFill>
-                  </a:tcPr>
-                </a:tc>
-                <a:tc>
-                  <a:txBody>
-                    <a:bodyPr/>
-                    <a:lstStyle/>
-                    <a:p>
-                      <a:pPr>
-                        <a:defRPr sz="750" b="1">
-                          <a:solidFill>
-                            <a:srgbClr val="FFFFFF"/>
-                          </a:solidFill>
-                          <a:latin typeface="Inter"/>
-                        </a:defRPr>
-                      </a:pPr>
-                      <a:r>
-                        <a:rPr>
-                          <a:latin typeface="Inter"/>
-                        </a:rPr>
-                        <a:t>Key parameters</a:t>
+                        <a:t>Source</a:t>
                       </a:r>
                     </a:p>
                   </a:txBody>
@@ -10681,7 +10112,7 @@
                         <a:rPr>
                           <a:latin typeface="Inter"/>
                         </a:rPr>
-                        <a:t>Data scope</a:t>
+                        <a:t>Check</a:t>
                       </a:r>
                     </a:p>
                   </a:txBody>
@@ -10691,6 +10122,529 @@
                     </a:solidFill>
                   </a:tcPr>
                 </a:tc>
+              </a:tr>
+              <a:tr h="262414">
+                <a:tc>
+                  <a:txBody>
+                    <a:bodyPr/>
+                    <a:lstStyle/>
+                    <a:p>
+                      <a:pPr>
+                        <a:defRPr sz="720" b="1">
+                          <a:solidFill>
+                            <a:srgbClr val="0D1117"/>
+                          </a:solidFill>
+                          <a:latin typeface="Inter"/>
+                        </a:defRPr>
+                      </a:pPr>
+                      <a:r>
+                        <a:rPr>
+                          <a:latin typeface="Inter"/>
+                        </a:rPr>
+                        <a:t>S1</a:t>
+                      </a:r>
+                    </a:p>
+                  </a:txBody>
+                  <a:tcPr marL="54864" marR="54864" marT="27432" marB="27432" anchor="ctr">
+                    <a:solidFill>
+                      <a:srgbClr val="FFFFFF"/>
+                    </a:solidFill>
+                  </a:tcPr>
+                </a:tc>
+                <a:tc>
+                  <a:txBody>
+                    <a:bodyPr/>
+                    <a:lstStyle/>
+                    <a:p>
+                      <a:pPr>
+                        <a:defRPr sz="720" b="0">
+                          <a:solidFill>
+                            <a:srgbClr val="0D1117"/>
+                          </a:solidFill>
+                          <a:latin typeface="Inter"/>
+                        </a:defRPr>
+                      </a:pPr>
+                      <a:r>
+                        <a:rPr>
+                          <a:latin typeface="Inter"/>
+                        </a:rPr>
+                        <a:t>Form ADV profile</a:t>
+                      </a:r>
+                    </a:p>
+                  </a:txBody>
+                  <a:tcPr marL="54864" marR="54864" marT="27432" marB="27432" anchor="ctr">
+                    <a:solidFill>
+                      <a:srgbClr val="FFFFFF"/>
+                    </a:solidFill>
+                  </a:tcPr>
+                </a:tc>
+                <a:tc>
+                  <a:txBody>
+                    <a:bodyPr/>
+                    <a:lstStyle/>
+                    <a:p>
+                      <a:pPr>
+                        <a:defRPr sz="720" b="0">
+                          <a:solidFill>
+                            <a:srgbClr val="0D1117"/>
+                          </a:solidFill>
+                          <a:latin typeface="Inter"/>
+                        </a:defRPr>
+                      </a:pPr>
+                      <a:r>
+                        <a:rPr>
+                          <a:latin typeface="Inter"/>
+                        </a:rPr>
+                        <a:t>get_manager_odd_profile</a:t>
+                      </a:r>
+                    </a:p>
+                  </a:txBody>
+                  <a:tcPr marL="54864" marR="54864" marT="27432" marB="27432" anchor="ctr">
+                    <a:solidFill>
+                      <a:srgbClr val="FFFFFF"/>
+                    </a:solidFill>
+                  </a:tcPr>
+                </a:tc>
+                <a:tc>
+                  <a:txBody>
+                    <a:bodyPr/>
+                    <a:lstStyle/>
+                    <a:p>
+                      <a:pPr>
+                        <a:defRPr sz="720" b="0">
+                          <a:solidFill>
+                            <a:srgbClr val="0D1117"/>
+                          </a:solidFill>
+                          <a:latin typeface="Inter"/>
+                        </a:defRPr>
+                      </a:pPr>
+                      <a:r>
+                        <a:rPr>
+                          <a:latin typeface="Inter"/>
+                        </a:rPr>
+                        <a:t>2026-10-01</a:t>
+                      </a:r>
+                    </a:p>
+                  </a:txBody>
+                  <a:tcPr marL="54864" marR="54864" marT="27432" marB="27432" anchor="ctr">
+                    <a:solidFill>
+                      <a:srgbClr val="FFFFFF"/>
+                    </a:solidFill>
+                  </a:tcPr>
+                </a:tc>
+                <a:tc>
+                  <a:txBody>
+                    <a:bodyPr/>
+                    <a:lstStyle/>
+                    <a:p>
+                      <a:pPr>
+                        <a:defRPr sz="720" b="1">
+                          <a:solidFill>
+                            <a:srgbClr val="9AA5B1"/>
+                          </a:solidFill>
+                          <a:latin typeface="Inter"/>
+                        </a:defRPr>
+                      </a:pPr>
+                      <a:r>
+                        <a:rPr>
+                          <a:latin typeface="Inter"/>
+                        </a:rPr>
+                        <a:t>● Not checked</a:t>
+                      </a:r>
+                    </a:p>
+                  </a:txBody>
+                  <a:tcPr marL="54864" marR="54864" marT="27432" marB="27432" anchor="ctr">
+                    <a:solidFill>
+                      <a:srgbClr val="F5F7F9"/>
+                    </a:solidFill>
+                  </a:tcPr>
+                </a:tc>
+              </a:tr>
+              <a:tr h="262414">
+                <a:tc>
+                  <a:txBody>
+                    <a:bodyPr/>
+                    <a:lstStyle/>
+                    <a:p>
+                      <a:pPr>
+                        <a:defRPr sz="720" b="1">
+                          <a:solidFill>
+                            <a:srgbClr val="0D1117"/>
+                          </a:solidFill>
+                          <a:latin typeface="Inter"/>
+                        </a:defRPr>
+                      </a:pPr>
+                      <a:r>
+                        <a:rPr>
+                          <a:latin typeface="Inter"/>
+                        </a:rPr>
+                        <a:t>S2</a:t>
+                      </a:r>
+                    </a:p>
+                  </a:txBody>
+                  <a:tcPr marL="54864" marR="54864" marT="27432" marB="27432" anchor="ctr">
+                    <a:solidFill>
+                      <a:srgbClr val="F5F7F9"/>
+                    </a:solidFill>
+                  </a:tcPr>
+                </a:tc>
+                <a:tc>
+                  <a:txBody>
+                    <a:bodyPr/>
+                    <a:lstStyle/>
+                    <a:p>
+                      <a:pPr>
+                        <a:defRPr sz="720" b="0">
+                          <a:solidFill>
+                            <a:srgbClr val="0D1117"/>
+                          </a:solidFill>
+                          <a:latin typeface="Inter"/>
+                        </a:defRPr>
+                      </a:pPr>
+                      <a:r>
+                        <a:rPr>
+                          <a:latin typeface="Inter"/>
+                        </a:rPr>
+                        <a:t>Manager Monitor</a:t>
+                      </a:r>
+                    </a:p>
+                  </a:txBody>
+                  <a:tcPr marL="54864" marR="54864" marT="27432" marB="27432" anchor="ctr">
+                    <a:solidFill>
+                      <a:srgbClr val="F5F7F9"/>
+                    </a:solidFill>
+                  </a:tcPr>
+                </a:tc>
+                <a:tc>
+                  <a:txBody>
+                    <a:bodyPr/>
+                    <a:lstStyle/>
+                    <a:p>
+                      <a:pPr>
+                        <a:defRPr sz="720" b="0">
+                          <a:solidFill>
+                            <a:srgbClr val="0D1117"/>
+                          </a:solidFill>
+                          <a:latin typeface="Inter"/>
+                        </a:defRPr>
+                      </a:pPr>
+                      <a:r>
+                        <a:rPr>
+                          <a:latin typeface="Inter"/>
+                        </a:rPr>
+                        <a:t>get_manager_monitor_evidence</a:t>
+                      </a:r>
+                    </a:p>
+                  </a:txBody>
+                  <a:tcPr marL="54864" marR="54864" marT="27432" marB="27432" anchor="ctr">
+                    <a:solidFill>
+                      <a:srgbClr val="F5F7F9"/>
+                    </a:solidFill>
+                  </a:tcPr>
+                </a:tc>
+                <a:tc>
+                  <a:txBody>
+                    <a:bodyPr/>
+                    <a:lstStyle/>
+                    <a:p>
+                      <a:pPr>
+                        <a:defRPr sz="720" b="0">
+                          <a:solidFill>
+                            <a:srgbClr val="0D1117"/>
+                          </a:solidFill>
+                          <a:latin typeface="Inter"/>
+                        </a:defRPr>
+                      </a:pPr>
+                      <a:r>
+                        <a:rPr>
+                          <a:latin typeface="Inter"/>
+                        </a:rPr>
+                        <a:t>2026-10-01</a:t>
+                      </a:r>
+                    </a:p>
+                  </a:txBody>
+                  <a:tcPr marL="54864" marR="54864" marT="27432" marB="27432" anchor="ctr">
+                    <a:solidFill>
+                      <a:srgbClr val="F5F7F9"/>
+                    </a:solidFill>
+                  </a:tcPr>
+                </a:tc>
+                <a:tc>
+                  <a:txBody>
+                    <a:bodyPr/>
+                    <a:lstStyle/>
+                    <a:p>
+                      <a:pPr>
+                        <a:defRPr sz="720" b="1">
+                          <a:solidFill>
+                            <a:srgbClr val="C6F432"/>
+                          </a:solidFill>
+                          <a:latin typeface="Inter"/>
+                        </a:defRPr>
+                      </a:pPr>
+                      <a:r>
+                        <a:rPr>
+                          <a:latin typeface="Inter"/>
+                        </a:rPr>
+                        <a:t>● Passed</a:t>
+                      </a:r>
+                    </a:p>
+                  </a:txBody>
+                  <a:tcPr marL="54864" marR="54864" marT="27432" marB="27432" anchor="ctr">
+                    <a:solidFill>
+                      <a:srgbClr val="F5F7F9"/>
+                    </a:solidFill>
+                  </a:tcPr>
+                </a:tc>
+              </a:tr>
+              <a:tr h="262416">
+                <a:tc>
+                  <a:txBody>
+                    <a:bodyPr/>
+                    <a:lstStyle/>
+                    <a:p>
+                      <a:pPr>
+                        <a:defRPr sz="720" b="1">
+                          <a:solidFill>
+                            <a:srgbClr val="0D1117"/>
+                          </a:solidFill>
+                          <a:latin typeface="Inter"/>
+                        </a:defRPr>
+                      </a:pPr>
+                      <a:r>
+                        <a:rPr>
+                          <a:latin typeface="Inter"/>
+                        </a:rPr>
+                        <a:t>S3</a:t>
+                      </a:r>
+                    </a:p>
+                  </a:txBody>
+                  <a:tcPr marL="54864" marR="54864" marT="27432" marB="27432" anchor="ctr">
+                    <a:solidFill>
+                      <a:srgbClr val="FFFFFF"/>
+                    </a:solidFill>
+                  </a:tcPr>
+                </a:tc>
+                <a:tc>
+                  <a:txBody>
+                    <a:bodyPr/>
+                    <a:lstStyle/>
+                    <a:p>
+                      <a:pPr>
+                        <a:defRPr sz="720" b="0">
+                          <a:solidFill>
+                            <a:srgbClr val="0D1117"/>
+                          </a:solidFill>
+                          <a:latin typeface="Inter"/>
+                        </a:defRPr>
+                      </a:pPr>
+                      <a:r>
+                        <a:rPr>
+                          <a:latin typeface="Inter"/>
+                        </a:rPr>
+                        <a:t>Form 13F snapshot</a:t>
+                      </a:r>
+                    </a:p>
+                  </a:txBody>
+                  <a:tcPr marL="54864" marR="54864" marT="27432" marB="27432" anchor="ctr">
+                    <a:solidFill>
+                      <a:srgbClr val="FFFFFF"/>
+                    </a:solidFill>
+                  </a:tcPr>
+                </a:tc>
+                <a:tc>
+                  <a:txBody>
+                    <a:bodyPr/>
+                    <a:lstStyle/>
+                    <a:p>
+                      <a:pPr>
+                        <a:defRPr sz="720" b="0">
+                          <a:solidFill>
+                            <a:srgbClr val="0D1117"/>
+                          </a:solidFill>
+                          <a:latin typeface="Inter"/>
+                        </a:defRPr>
+                      </a:pPr>
+                      <a:r>
+                        <a:rPr>
+                          <a:latin typeface="Inter"/>
+                        </a:rPr>
+                        <a:t>get_firm_13f_portfolio_review</a:t>
+                      </a:r>
+                    </a:p>
+                  </a:txBody>
+                  <a:tcPr marL="54864" marR="54864" marT="27432" marB="27432" anchor="ctr">
+                    <a:solidFill>
+                      <a:srgbClr val="FFFFFF"/>
+                    </a:solidFill>
+                  </a:tcPr>
+                </a:tc>
+                <a:tc>
+                  <a:txBody>
+                    <a:bodyPr/>
+                    <a:lstStyle/>
+                    <a:p>
+                      <a:pPr>
+                        <a:defRPr sz="720" b="0">
+                          <a:solidFill>
+                            <a:srgbClr val="0D1117"/>
+                          </a:solidFill>
+                          <a:latin typeface="Inter"/>
+                        </a:defRPr>
+                      </a:pPr>
+                      <a:r>
+                        <a:rPr>
+                          <a:latin typeface="Inter"/>
+                        </a:rPr>
+                        <a:t>2026-08-14</a:t>
+                      </a:r>
+                    </a:p>
+                  </a:txBody>
+                  <a:tcPr marL="54864" marR="54864" marT="27432" marB="27432" anchor="ctr">
+                    <a:solidFill>
+                      <a:srgbClr val="FFFFFF"/>
+                    </a:solidFill>
+                  </a:tcPr>
+                </a:tc>
+                <a:tc>
+                  <a:txBody>
+                    <a:bodyPr/>
+                    <a:lstStyle/>
+                    <a:p>
+                      <a:pPr>
+                        <a:defRPr sz="720" b="1">
+                          <a:solidFill>
+                            <a:srgbClr val="C6F432"/>
+                          </a:solidFill>
+                          <a:latin typeface="Inter"/>
+                        </a:defRPr>
+                      </a:pPr>
+                      <a:r>
+                        <a:rPr>
+                          <a:latin typeface="Inter"/>
+                        </a:rPr>
+                        <a:t>● Passed</a:t>
+                      </a:r>
+                    </a:p>
+                  </a:txBody>
+                  <a:tcPr marL="54864" marR="54864" marT="27432" marB="27432" anchor="ctr">
+                    <a:solidFill>
+                      <a:srgbClr val="F5F7F9"/>
+                    </a:solidFill>
+                  </a:tcPr>
+                </a:tc>
+              </a:tr>
+            </a:tbl>
+          </a:graphicData>
+        </a:graphic>
+      </p:graphicFrame>
+      <p:sp>
+        <p:nvSpPr>
+          <p:cNvPr id="9" name="TextBox 8"/>
+          <p:cNvSpPr txBox="1"/>
+          <p:nvPr/>
+        </p:nvSpPr>
+        <p:spPr>
+          <a:xfrm>
+            <a:off x="640080" y="2668146"/>
+            <a:ext cx="10908792" cy="164592"/>
+          </a:xfrm>
+          <a:prstGeom prst="rect">
+            <a:avLst/>
+          </a:prstGeom>
+          <a:noFill/>
+        </p:spPr>
+        <p:txBody>
+          <a:bodyPr wrap="none" lIns="9144" rIns="9144" tIns="9144" bIns="9144" anchor="t">
+            <a:spAutoFit/>
+          </a:bodyPr>
+          <a:lstStyle/>
+          <a:p>
+            <a:pPr algn="l">
+              <a:spcAft>
+                <a:spcPts val="0"/>
+              </a:spcAft>
+              <a:defRPr sz="680" b="0">
+                <a:solidFill>
+                  <a:srgbClr val="8A94A1"/>
+                </a:solidFill>
+                <a:latin typeface="Inter"/>
+              </a:defRPr>
+            </a:pPr>
+            <a:r>
+              <a:rPr>
+                <a:latin typeface="Inter"/>
+              </a:rPr>
+              <a:t>Illustrative, Gradient Maintained — demo data, not the client's holdings or managers. All organizations, portfolios, managers and results in this public example are illustrative.</a:t>
+            </a:r>
+          </a:p>
+        </p:txBody>
+      </p:sp>
+      <p:sp>
+        <p:nvSpPr>
+          <p:cNvPr id="10" name="TextBox 9"/>
+          <p:cNvSpPr txBox="1"/>
+          <p:nvPr/>
+        </p:nvSpPr>
+        <p:spPr>
+          <a:xfrm>
+            <a:off x="640080" y="2960754"/>
+            <a:ext cx="10908792" cy="201168"/>
+          </a:xfrm>
+          <a:prstGeom prst="rect">
+            <a:avLst/>
+          </a:prstGeom>
+          <a:noFill/>
+        </p:spPr>
+        <p:txBody>
+          <a:bodyPr wrap="none" lIns="9144" rIns="9144" tIns="9144" bIns="9144" anchor="t">
+            <a:spAutoFit/>
+          </a:bodyPr>
+          <a:lstStyle/>
+          <a:p>
+            <a:pPr algn="l">
+              <a:spcAft>
+                <a:spcPts val="0"/>
+              </a:spcAft>
+              <a:defRPr sz="720" b="1">
+                <a:solidFill>
+                  <a:srgbClr val="4A5563"/>
+                </a:solidFill>
+                <a:latin typeface="Inter"/>
+              </a:defRPr>
+            </a:pPr>
+            <a:r>
+              <a:rPr>
+                <a:latin typeface="Inter"/>
+              </a:rPr>
+              <a:t>SOURCE AUDIT TRAIL</a:t>
+            </a:r>
+          </a:p>
+        </p:txBody>
+      </p:sp>
+      <p:graphicFrame>
+        <p:nvGraphicFramePr>
+          <p:cNvPr id="11" name="Table 10"/>
+          <p:cNvGraphicFramePr>
+            <a:graphicFrameLocks noGrp="1"/>
+          </p:cNvGraphicFramePr>
+          <p:nvPr/>
+        </p:nvGraphicFramePr>
+        <p:xfrm>
+          <a:off x="640080" y="3235074"/>
+          <a:ext cx="10908792" cy="1049658"/>
+        </p:xfrm>
+        <a:graphic>
+          <a:graphicData uri="http://schemas.openxmlformats.org/drawingml/2006/table">
+            <a:tbl>
+              <a:tblPr firstRow="1" bandRow="1">
+                <a:tableStyleId>{5C22544A-7EE6-4342-B048-85BDC9FD1C3A}</a:tableStyleId>
+              </a:tblPr>
+              <a:tblGrid>
+                <a:gridCol w="2011680"/>
+                <a:gridCol w="8897112"/>
+              </a:tblGrid>
+              <a:tr h="262414">
                 <a:tc>
                   <a:txBody>
                     <a:bodyPr/>
@@ -10708,7 +10662,7 @@
                         <a:rPr>
                           <a:latin typeface="Inter"/>
                         </a:rPr>
-                        <a:t>Validation</a:t>
+                        <a:t>Tag</a:t>
                       </a:r>
                     </a:p>
                   </a:txBody>
@@ -10746,14 +10700,14 @@
                   </a:tcPr>
                 </a:tc>
               </a:tr>
-              <a:tr h="460466">
+              <a:tr h="262414">
                 <a:tc>
                   <a:txBody>
                     <a:bodyPr/>
                     <a:lstStyle/>
                     <a:p>
                       <a:pPr>
-                        <a:defRPr sz="650" b="1">
+                        <a:defRPr sz="800" b="1">
                           <a:solidFill>
                             <a:srgbClr val="0D1117"/>
                           </a:solidFill>
@@ -10780,196 +10734,7 @@
                     <a:lstStyle/>
                     <a:p>
                       <a:pPr>
-                        <a:defRPr sz="650" b="0">
-                          <a:solidFill>
-                            <a:srgbClr val="0D1117"/>
-                          </a:solidFill>
-                          <a:latin typeface="Inter"/>
-                        </a:defRPr>
-                      </a:pPr>
-                      <a:r>
-                        <a:rPr>
-                          <a:latin typeface="Inter"/>
-                        </a:rPr>
-                        <a:t>Form ADV profile</a:t>
-                      </a:r>
-                    </a:p>
-                  </a:txBody>
-                  <a:tcPr marL="54864" marR="54864" marT="27432" marB="27432" anchor="ctr">
-                    <a:solidFill>
-                      <a:srgbClr val="FFFFFF"/>
-                    </a:solidFill>
-                  </a:tcPr>
-                </a:tc>
-                <a:tc>
-                  <a:txBody>
-                    <a:bodyPr/>
-                    <a:lstStyle/>
-                    <a:p>
-                      <a:pPr>
-                        <a:defRPr sz="650" b="0">
-                          <a:solidFill>
-                            <a:srgbClr val="0D1117"/>
-                          </a:solidFill>
-                          <a:latin typeface="Inter"/>
-                        </a:defRPr>
-                      </a:pPr>
-                      <a:r>
-                        <a:rPr>
-                          <a:latin typeface="Inter"/>
-                        </a:rPr>
-                        <a:t>gradient_tool</a:t>
-                      </a:r>
-                    </a:p>
-                  </a:txBody>
-                  <a:tcPr marL="54864" marR="54864" marT="27432" marB="27432" anchor="ctr">
-                    <a:solidFill>
-                      <a:srgbClr val="FFFFFF"/>
-                    </a:solidFill>
-                  </a:tcPr>
-                </a:tc>
-                <a:tc>
-                  <a:txBody>
-                    <a:bodyPr/>
-                    <a:lstStyle/>
-                    <a:p>
-                      <a:pPr>
-                        <a:defRPr sz="650" b="0">
-                          <a:solidFill>
-                            <a:srgbClr val="0D1117"/>
-                          </a:solidFill>
-                          <a:latin typeface="Inter"/>
-                        </a:defRPr>
-                      </a:pPr>
-                      <a:r>
-                        <a:rPr>
-                          <a:latin typeface="Inter"/>
-                        </a:rPr>
-                        <a:t>get_manager_odd_profile</a:t>
-                      </a:r>
-                    </a:p>
-                  </a:txBody>
-                  <a:tcPr marL="54864" marR="54864" marT="27432" marB="27432" anchor="ctr">
-                    <a:solidFill>
-                      <a:srgbClr val="FFFFFF"/>
-                    </a:solidFill>
-                  </a:tcPr>
-                </a:tc>
-                <a:tc>
-                  <a:txBody>
-                    <a:bodyPr/>
-                    <a:lstStyle/>
-                    <a:p>
-                      <a:pPr>
-                        <a:defRPr sz="650" b="0">
-                          <a:solidFill>
-                            <a:srgbClr val="0D1117"/>
-                          </a:solidFill>
-                          <a:latin typeface="Inter"/>
-                        </a:defRPr>
-                      </a:pPr>
-                      <a:r>
-                        <a:rPr>
-                          <a:latin typeface="Inter"/>
-                        </a:rPr>
-                        <a:t>illustrative sample</a:t>
-                      </a:r>
-                    </a:p>
-                  </a:txBody>
-                  <a:tcPr marL="54864" marR="54864" marT="27432" marB="27432" anchor="ctr">
-                    <a:solidFill>
-                      <a:srgbClr val="FFFFFF"/>
-                    </a:solidFill>
-                  </a:tcPr>
-                </a:tc>
-                <a:tc>
-                  <a:txBody>
-                    <a:bodyPr/>
-                    <a:lstStyle/>
-                    <a:p>
-                      <a:pPr>
-                        <a:defRPr sz="650" b="0">
-                          <a:solidFill>
-                            <a:srgbClr val="0D1117"/>
-                          </a:solidFill>
-                          <a:latin typeface="Inter"/>
-                        </a:defRPr>
-                      </a:pPr>
-                      <a:r>
-                        <a:rPr>
-                          <a:latin typeface="Inter"/>
-                        </a:rPr>
-                        <a:t>2026-10-01</a:t>
-                      </a:r>
-                    </a:p>
-                  </a:txBody>
-                  <a:tcPr marL="54864" marR="54864" marT="27432" marB="27432" anchor="ctr">
-                    <a:solidFill>
-                      <a:srgbClr val="FFFFFF"/>
-                    </a:solidFill>
-                  </a:tcPr>
-                </a:tc>
-                <a:tc>
-                  <a:txBody>
-                    <a:bodyPr/>
-                    <a:lstStyle/>
-                    <a:p>
-                      <a:pPr>
-                        <a:defRPr sz="650" b="0">
-                          <a:solidFill>
-                            <a:srgbClr val="0D1117"/>
-                          </a:solidFill>
-                          <a:latin typeface="Inter"/>
-                        </a:defRPr>
-                      </a:pPr>
-                      <a:r>
-                        <a:rPr>
-                          <a:latin typeface="Inter"/>
-                        </a:rPr>
-                        <a:t>Gradient-governed review evidence</a:t>
-                      </a:r>
-                    </a:p>
-                  </a:txBody>
-                  <a:tcPr marL="54864" marR="54864" marT="27432" marB="27432" anchor="ctr">
-                    <a:solidFill>
-                      <a:srgbClr val="FFFFFF"/>
-                    </a:solidFill>
-                  </a:tcPr>
-                </a:tc>
-                <a:tc>
-                  <a:txBody>
-                    <a:bodyPr/>
-                    <a:lstStyle/>
-                    <a:p>
-                      <a:pPr>
-                        <a:defRPr sz="650" b="0">
-                          <a:solidFill>
-                            <a:srgbClr val="0D1117"/>
-                          </a:solidFill>
-                          <a:latin typeface="Inter"/>
-                        </a:defRPr>
-                      </a:pPr>
-                      <a:r>
-                        <a:rPr>
-                          <a:latin typeface="Inter"/>
-                        </a:rPr>
-                        <a:t>{'chip': 'not_run', 'status': 'not_run'}</a:t>
-                      </a:r>
-                    </a:p>
-                  </a:txBody>
-                  <a:tcPr marL="54864" marR="54864" marT="27432" marB="27432" anchor="ctr">
-                    <a:solidFill>
-                      <a:srgbClr val="FFFFFF"/>
-                    </a:solidFill>
-                  </a:tcPr>
-                </a:tc>
-                <a:tc>
-                  <a:txBody>
-                    <a:bodyPr/>
-                    <a:lstStyle/>
-                    <a:p>
-                      <a:pPr>
-                        <a:defRPr sz="650" b="0">
+                        <a:defRPr sz="800" b="0">
                           <a:solidFill>
                             <a:srgbClr val="0D1117"/>
                           </a:solidFill>
@@ -10991,14 +10756,14 @@
                   </a:tcPr>
                 </a:tc>
               </a:tr>
-              <a:tr h="460466">
+              <a:tr h="262414">
                 <a:tc>
                   <a:txBody>
                     <a:bodyPr/>
                     <a:lstStyle/>
                     <a:p>
                       <a:pPr>
-                        <a:defRPr sz="650" b="1">
+                        <a:defRPr sz="800" b="1">
                           <a:solidFill>
                             <a:srgbClr val="0D1117"/>
                           </a:solidFill>
@@ -11025,196 +10790,7 @@
                     <a:lstStyle/>
                     <a:p>
                       <a:pPr>
-                        <a:defRPr sz="650" b="0">
-                          <a:solidFill>
-                            <a:srgbClr val="0D1117"/>
-                          </a:solidFill>
-                          <a:latin typeface="Inter"/>
-                        </a:defRPr>
-                      </a:pPr>
-                      <a:r>
-                        <a:rPr>
-                          <a:latin typeface="Inter"/>
-                        </a:rPr>
-                        <a:t>Manager Monitor</a:t>
-                      </a:r>
-                    </a:p>
-                  </a:txBody>
-                  <a:tcPr marL="54864" marR="54864" marT="27432" marB="27432" anchor="ctr">
-                    <a:solidFill>
-                      <a:srgbClr val="F5F7F9"/>
-                    </a:solidFill>
-                  </a:tcPr>
-                </a:tc>
-                <a:tc>
-                  <a:txBody>
-                    <a:bodyPr/>
-                    <a:lstStyle/>
-                    <a:p>
-                      <a:pPr>
-                        <a:defRPr sz="650" b="0">
-                          <a:solidFill>
-                            <a:srgbClr val="0D1117"/>
-                          </a:solidFill>
-                          <a:latin typeface="Inter"/>
-                        </a:defRPr>
-                      </a:pPr>
-                      <a:r>
-                        <a:rPr>
-                          <a:latin typeface="Inter"/>
-                        </a:rPr>
-                        <a:t>gradient_tool</a:t>
-                      </a:r>
-                    </a:p>
-                  </a:txBody>
-                  <a:tcPr marL="54864" marR="54864" marT="27432" marB="27432" anchor="ctr">
-                    <a:solidFill>
-                      <a:srgbClr val="F5F7F9"/>
-                    </a:solidFill>
-                  </a:tcPr>
-                </a:tc>
-                <a:tc>
-                  <a:txBody>
-                    <a:bodyPr/>
-                    <a:lstStyle/>
-                    <a:p>
-                      <a:pPr>
-                        <a:defRPr sz="650" b="0">
-                          <a:solidFill>
-                            <a:srgbClr val="0D1117"/>
-                          </a:solidFill>
-                          <a:latin typeface="Inter"/>
-                        </a:defRPr>
-                      </a:pPr>
-                      <a:r>
-                        <a:rPr>
-                          <a:latin typeface="Inter"/>
-                        </a:rPr>
-                        <a:t>get_manager_monitor_evidence</a:t>
-                      </a:r>
-                    </a:p>
-                  </a:txBody>
-                  <a:tcPr marL="54864" marR="54864" marT="27432" marB="27432" anchor="ctr">
-                    <a:solidFill>
-                      <a:srgbClr val="F5F7F9"/>
-                    </a:solidFill>
-                  </a:tcPr>
-                </a:tc>
-                <a:tc>
-                  <a:txBody>
-                    <a:bodyPr/>
-                    <a:lstStyle/>
-                    <a:p>
-                      <a:pPr>
-                        <a:defRPr sz="650" b="0">
-                          <a:solidFill>
-                            <a:srgbClr val="0D1117"/>
-                          </a:solidFill>
-                          <a:latin typeface="Inter"/>
-                        </a:defRPr>
-                      </a:pPr>
-                      <a:r>
-                        <a:rPr>
-                          <a:latin typeface="Inter"/>
-                        </a:rPr>
-                        <a:t>illustrative sample</a:t>
-                      </a:r>
-                    </a:p>
-                  </a:txBody>
-                  <a:tcPr marL="54864" marR="54864" marT="27432" marB="27432" anchor="ctr">
-                    <a:solidFill>
-                      <a:srgbClr val="F5F7F9"/>
-                    </a:solidFill>
-                  </a:tcPr>
-                </a:tc>
-                <a:tc>
-                  <a:txBody>
-                    <a:bodyPr/>
-                    <a:lstStyle/>
-                    <a:p>
-                      <a:pPr>
-                        <a:defRPr sz="650" b="0">
-                          <a:solidFill>
-                            <a:srgbClr val="0D1117"/>
-                          </a:solidFill>
-                          <a:latin typeface="Inter"/>
-                        </a:defRPr>
-                      </a:pPr>
-                      <a:r>
-                        <a:rPr>
-                          <a:latin typeface="Inter"/>
-                        </a:rPr>
-                        <a:t>2026-10-01</a:t>
-                      </a:r>
-                    </a:p>
-                  </a:txBody>
-                  <a:tcPr marL="54864" marR="54864" marT="27432" marB="27432" anchor="ctr">
-                    <a:solidFill>
-                      <a:srgbClr val="F5F7F9"/>
-                    </a:solidFill>
-                  </a:tcPr>
-                </a:tc>
-                <a:tc>
-                  <a:txBody>
-                    <a:bodyPr/>
-                    <a:lstStyle/>
-                    <a:p>
-                      <a:pPr>
-                        <a:defRPr sz="650" b="0">
-                          <a:solidFill>
-                            <a:srgbClr val="0D1117"/>
-                          </a:solidFill>
-                          <a:latin typeface="Inter"/>
-                        </a:defRPr>
-                      </a:pPr>
-                      <a:r>
-                        <a:rPr>
-                          <a:latin typeface="Inter"/>
-                        </a:rPr>
-                        <a:t>Gradient-governed review evidence</a:t>
-                      </a:r>
-                    </a:p>
-                  </a:txBody>
-                  <a:tcPr marL="54864" marR="54864" marT="27432" marB="27432" anchor="ctr">
-                    <a:solidFill>
-                      <a:srgbClr val="F5F7F9"/>
-                    </a:solidFill>
-                  </a:tcPr>
-                </a:tc>
-                <a:tc>
-                  <a:txBody>
-                    <a:bodyPr/>
-                    <a:lstStyle/>
-                    <a:p>
-                      <a:pPr>
-                        <a:defRPr sz="650" b="0">
-                          <a:solidFill>
-                            <a:srgbClr val="0D1117"/>
-                          </a:solidFill>
-                          <a:latin typeface="Inter"/>
-                        </a:defRPr>
-                      </a:pPr>
-                      <a:r>
-                        <a:rPr>
-                          <a:latin typeface="Inter"/>
-                        </a:rPr>
-                        <a:t>{'chip': 'passed', 'status': 'passed'}</a:t>
-                      </a:r>
-                    </a:p>
-                  </a:txBody>
-                  <a:tcPr marL="54864" marR="54864" marT="27432" marB="27432" anchor="ctr">
-                    <a:solidFill>
-                      <a:srgbClr val="F5F7F9"/>
-                    </a:solidFill>
-                  </a:tcPr>
-                </a:tc>
-                <a:tc>
-                  <a:txBody>
-                    <a:bodyPr/>
-                    <a:lstStyle/>
-                    <a:p>
-                      <a:pPr>
-                        <a:defRPr sz="650" b="0">
+                        <a:defRPr sz="800" b="0">
                           <a:solidFill>
                             <a:srgbClr val="0D1117"/>
                           </a:solidFill>
@@ -11236,14 +10812,14 @@
                   </a:tcPr>
                 </a:tc>
               </a:tr>
-              <a:tr h="460468">
+              <a:tr h="262416">
                 <a:tc>
                   <a:txBody>
                     <a:bodyPr/>
                     <a:lstStyle/>
                     <a:p>
                       <a:pPr>
-                        <a:defRPr sz="650" b="1">
+                        <a:defRPr sz="800" b="1">
                           <a:solidFill>
                             <a:srgbClr val="0D1117"/>
                           </a:solidFill>
@@ -11270,196 +10846,7 @@
                     <a:lstStyle/>
                     <a:p>
                       <a:pPr>
-                        <a:defRPr sz="650" b="0">
-                          <a:solidFill>
-                            <a:srgbClr val="0D1117"/>
-                          </a:solidFill>
-                          <a:latin typeface="Inter"/>
-                        </a:defRPr>
-                      </a:pPr>
-                      <a:r>
-                        <a:rPr>
-                          <a:latin typeface="Inter"/>
-                        </a:rPr>
-                        <a:t>Form 13F snapshot</a:t>
-                      </a:r>
-                    </a:p>
-                  </a:txBody>
-                  <a:tcPr marL="54864" marR="54864" marT="27432" marB="27432" anchor="ctr">
-                    <a:solidFill>
-                      <a:srgbClr val="FFFFFF"/>
-                    </a:solidFill>
-                  </a:tcPr>
-                </a:tc>
-                <a:tc>
-                  <a:txBody>
-                    <a:bodyPr/>
-                    <a:lstStyle/>
-                    <a:p>
-                      <a:pPr>
-                        <a:defRPr sz="650" b="0">
-                          <a:solidFill>
-                            <a:srgbClr val="0D1117"/>
-                          </a:solidFill>
-                          <a:latin typeface="Inter"/>
-                        </a:defRPr>
-                      </a:pPr>
-                      <a:r>
-                        <a:rPr>
-                          <a:latin typeface="Inter"/>
-                        </a:rPr>
-                        <a:t>gradient_tool</a:t>
-                      </a:r>
-                    </a:p>
-                  </a:txBody>
-                  <a:tcPr marL="54864" marR="54864" marT="27432" marB="27432" anchor="ctr">
-                    <a:solidFill>
-                      <a:srgbClr val="FFFFFF"/>
-                    </a:solidFill>
-                  </a:tcPr>
-                </a:tc>
-                <a:tc>
-                  <a:txBody>
-                    <a:bodyPr/>
-                    <a:lstStyle/>
-                    <a:p>
-                      <a:pPr>
-                        <a:defRPr sz="650" b="0">
-                          <a:solidFill>
-                            <a:srgbClr val="0D1117"/>
-                          </a:solidFill>
-                          <a:latin typeface="Inter"/>
-                        </a:defRPr>
-                      </a:pPr>
-                      <a:r>
-                        <a:rPr>
-                          <a:latin typeface="Inter"/>
-                        </a:rPr>
-                        <a:t>get_firm_13f_portfolio_review</a:t>
-                      </a:r>
-                    </a:p>
-                  </a:txBody>
-                  <a:tcPr marL="54864" marR="54864" marT="27432" marB="27432" anchor="ctr">
-                    <a:solidFill>
-                      <a:srgbClr val="FFFFFF"/>
-                    </a:solidFill>
-                  </a:tcPr>
-                </a:tc>
-                <a:tc>
-                  <a:txBody>
-                    <a:bodyPr/>
-                    <a:lstStyle/>
-                    <a:p>
-                      <a:pPr>
-                        <a:defRPr sz="650" b="0">
-                          <a:solidFill>
-                            <a:srgbClr val="0D1117"/>
-                          </a:solidFill>
-                          <a:latin typeface="Inter"/>
-                        </a:defRPr>
-                      </a:pPr>
-                      <a:r>
-                        <a:rPr>
-                          <a:latin typeface="Inter"/>
-                        </a:rPr>
-                        <a:t>illustrative sample</a:t>
-                      </a:r>
-                    </a:p>
-                  </a:txBody>
-                  <a:tcPr marL="54864" marR="54864" marT="27432" marB="27432" anchor="ctr">
-                    <a:solidFill>
-                      <a:srgbClr val="FFFFFF"/>
-                    </a:solidFill>
-                  </a:tcPr>
-                </a:tc>
-                <a:tc>
-                  <a:txBody>
-                    <a:bodyPr/>
-                    <a:lstStyle/>
-                    <a:p>
-                      <a:pPr>
-                        <a:defRPr sz="650" b="0">
-                          <a:solidFill>
-                            <a:srgbClr val="0D1117"/>
-                          </a:solidFill>
-                          <a:latin typeface="Inter"/>
-                        </a:defRPr>
-                      </a:pPr>
-                      <a:r>
-                        <a:rPr>
-                          <a:latin typeface="Inter"/>
-                        </a:rPr>
-                        <a:t>2026-08-14</a:t>
-                      </a:r>
-                    </a:p>
-                  </a:txBody>
-                  <a:tcPr marL="54864" marR="54864" marT="27432" marB="27432" anchor="ctr">
-                    <a:solidFill>
-                      <a:srgbClr val="FFFFFF"/>
-                    </a:solidFill>
-                  </a:tcPr>
-                </a:tc>
-                <a:tc>
-                  <a:txBody>
-                    <a:bodyPr/>
-                    <a:lstStyle/>
-                    <a:p>
-                      <a:pPr>
-                        <a:defRPr sz="650" b="0">
-                          <a:solidFill>
-                            <a:srgbClr val="0D1117"/>
-                          </a:solidFill>
-                          <a:latin typeface="Inter"/>
-                        </a:defRPr>
-                      </a:pPr>
-                      <a:r>
-                        <a:rPr>
-                          <a:latin typeface="Inter"/>
-                        </a:rPr>
-                        <a:t>Gradient-governed review evidence</a:t>
-                      </a:r>
-                    </a:p>
-                  </a:txBody>
-                  <a:tcPr marL="54864" marR="54864" marT="27432" marB="27432" anchor="ctr">
-                    <a:solidFill>
-                      <a:srgbClr val="FFFFFF"/>
-                    </a:solidFill>
-                  </a:tcPr>
-                </a:tc>
-                <a:tc>
-                  <a:txBody>
-                    <a:bodyPr/>
-                    <a:lstStyle/>
-                    <a:p>
-                      <a:pPr>
-                        <a:defRPr sz="650" b="0">
-                          <a:solidFill>
-                            <a:srgbClr val="0D1117"/>
-                          </a:solidFill>
-                          <a:latin typeface="Inter"/>
-                        </a:defRPr>
-                      </a:pPr>
-                      <a:r>
-                        <a:rPr>
-                          <a:latin typeface="Inter"/>
-                        </a:rPr>
-                        <a:t>{'chip': 'passed', 'status': 'passed'}</a:t>
-                      </a:r>
-                    </a:p>
-                  </a:txBody>
-                  <a:tcPr marL="54864" marR="54864" marT="27432" marB="27432" anchor="ctr">
-                    <a:solidFill>
-                      <a:srgbClr val="FFFFFF"/>
-                    </a:solidFill>
-                  </a:tcPr>
-                </a:tc>
-                <a:tc>
-                  <a:txBody>
-                    <a:bodyPr/>
-                    <a:lstStyle/>
-                    <a:p>
-                      <a:pPr>
-                        <a:defRPr sz="650" b="0">
+                        <a:defRPr sz="800" b="0">
                           <a:solidFill>
                             <a:srgbClr val="0D1117"/>
                           </a:solidFill>
@@ -11487,13 +10874,13 @@
       </p:graphicFrame>
       <p:sp>
         <p:nvSpPr>
-          <p:cNvPr id="10" name="TextBox 9"/>
+          <p:cNvPr id="12" name="TextBox 11"/>
           <p:cNvSpPr txBox="1"/>
           <p:nvPr/>
         </p:nvSpPr>
         <p:spPr>
           <a:xfrm>
-            <a:off x="640080" y="3460354"/>
+            <a:off x="640080" y="4303021"/>
             <a:ext cx="10908792" cy="164592"/>
           </a:xfrm>
           <a:prstGeom prst="rect">
@@ -11522,21 +10909,21 @@
               <a:rPr>
                 <a:latin typeface="Inter"/>
               </a:rPr>
-              <a:t>Illustrative, Gradient Maintained — demo data, not the client's holdings or managers. All organizations, portfolios, managers and results in this public example are illustrative.</a:t>
-            </a:r>
-          </a:p>
-        </p:txBody>
-      </p:sp>
-      <p:sp>
-        <p:nvSpPr>
-          <p:cNvPr id="11" name="TextBox 10"/>
+              <a:t>Data scope for every source: Illustrative sample data. Each digest is the SHA-256 fingerprint of the exact data the report used.</a:t>
+            </a:r>
+          </a:p>
+        </p:txBody>
+      </p:sp>
+      <p:sp>
+        <p:nvSpPr>
+          <p:cNvPr id="13" name="TextBox 12"/>
           <p:cNvSpPr txBox="1"/>
           <p:nvPr/>
         </p:nvSpPr>
         <p:spPr>
           <a:xfrm>
-            <a:off x="640080" y="3752962"/>
-            <a:ext cx="10908792" cy="2464957"/>
+            <a:off x="640080" y="4595629"/>
+            <a:ext cx="10908792" cy="1622290"/>
           </a:xfrm>
           <a:prstGeom prst="rect">
             <a:avLst/>
@@ -11609,7 +10996,7 @@
       </p:sp>
       <p:sp>
         <p:nvSpPr>
-          <p:cNvPr id="12" name="Rectangle 11"/>
+          <p:cNvPr id="14" name="Rectangle 13"/>
           <p:cNvSpPr/>
           <p:nvPr/>
         </p:nvSpPr>
@@ -11658,7 +11045,7 @@
       </p:sp>
       <p:sp>
         <p:nvSpPr>
-          <p:cNvPr id="13" name="TextBox 12"/>
+          <p:cNvPr id="15" name="TextBox 14"/>
           <p:cNvSpPr txBox="1"/>
           <p:nvPr/>
         </p:nvSpPr>
@@ -11700,7 +11087,7 @@
       </p:sp>
       <p:sp>
         <p:nvSpPr>
-          <p:cNvPr id="14" name="TextBox 13"/>
+          <p:cNvPr id="16" name="TextBox 15"/>
           <p:cNvSpPr txBox="1"/>
           <p:nvPr/>
         </p:nvSpPr>
@@ -11742,7 +11129,7 @@
       </p:sp>
       <p:sp>
         <p:nvSpPr>
-          <p:cNvPr id="15" name="TextBox 14"/>
+          <p:cNvPr id="17" name="TextBox 16"/>
           <p:cNvSpPr txBox="1"/>
           <p:nvPr/>
         </p:nvSpPr>
@@ -11858,7 +11245,7 @@
         <p:spPr>
           <a:xfrm>
             <a:off x="640080" y="329184"/>
-            <a:ext cx="5303520" cy="182880"/>
+            <a:ext cx="9875520" cy="182880"/>
           </a:xfrm>
           <a:prstGeom prst="rect">
             <a:avLst/>
@@ -11899,48 +11286,6 @@
         </p:nvSpPr>
         <p:spPr>
           <a:xfrm>
-            <a:off x="5897880" y="310896"/>
-            <a:ext cx="4800600" cy="256032"/>
-          </a:xfrm>
-          <a:prstGeom prst="rect">
-            <a:avLst/>
-          </a:prstGeom>
-          <a:noFill/>
-        </p:spPr>
-        <p:txBody>
-          <a:bodyPr wrap="none" lIns="9144" rIns="9144" tIns="9144" bIns="9144" anchor="t">
-            <a:spAutoFit/>
-          </a:bodyPr>
-          <a:lstStyle/>
-          <a:p>
-            <a:pPr algn="r">
-              <a:spcAft>
-                <a:spcPts val="0"/>
-              </a:spcAft>
-              <a:defRPr sz="680" b="1">
-                <a:solidFill>
-                  <a:srgbClr val="4F6B00"/>
-                </a:solidFill>
-                <a:latin typeface="Inter"/>
-              </a:defRPr>
-            </a:pPr>
-            <a:r>
-              <a:rPr>
-                <a:latin typeface="Inter"/>
-              </a:rPr>
-              <a:t>Illustrative, Gradient Maintained — demo data, not the client's holdings or managers</a:t>
-            </a:r>
-          </a:p>
-        </p:txBody>
-      </p:sp>
-      <p:sp>
-        <p:nvSpPr>
-          <p:cNvPr id="5" name="TextBox 4"/>
-          <p:cNvSpPr txBox="1"/>
-          <p:nvPr/>
-        </p:nvSpPr>
-        <p:spPr>
-          <a:xfrm>
             <a:off x="640080" y="566928"/>
             <a:ext cx="10058400" cy="530352"/>
           </a:xfrm>
@@ -11977,7 +11322,7 @@
       </p:sp>
       <p:sp>
         <p:nvSpPr>
-          <p:cNvPr id="6" name="Rectangle 5"/>
+          <p:cNvPr id="5" name="Rectangle 4"/>
           <p:cNvSpPr/>
           <p:nvPr/>
         </p:nvSpPr>
@@ -12026,7 +11371,7 @@
       </p:sp>
       <p:sp>
         <p:nvSpPr>
-          <p:cNvPr id="7" name="Rectangle 6"/>
+          <p:cNvPr id="6" name="Rectangle 5"/>
           <p:cNvSpPr/>
           <p:nvPr/>
         </p:nvSpPr>
@@ -12075,7 +11420,7 @@
       </p:sp>
       <p:sp>
         <p:nvSpPr>
-          <p:cNvPr id="8" name="TextBox 7"/>
+          <p:cNvPr id="7" name="TextBox 6"/>
           <p:cNvSpPr txBox="1"/>
           <p:nvPr/>
         </p:nvSpPr>
@@ -12117,14 +11462,105 @@
       </p:sp>
       <p:sp>
         <p:nvSpPr>
-          <p:cNvPr id="9" name="Rectangle 8"/>
+          <p:cNvPr id="8" name="Rectangle 7"/>
           <p:cNvSpPr/>
           <p:nvPr/>
         </p:nvSpPr>
         <p:spPr>
           <a:xfrm>
-            <a:off x="640080" y="1325880"/>
-            <a:ext cx="10908792" cy="2342356"/>
+            <a:off x="640080" y="1399032"/>
+            <a:ext cx="73152" cy="1003870"/>
+          </a:xfrm>
+          <a:prstGeom prst="rect">
+            <a:avLst/>
+          </a:prstGeom>
+          <a:solidFill>
+            <a:srgbClr val="C6F432"/>
+          </a:solidFill>
+          <a:ln>
+            <a:solidFill>
+              <a:srgbClr val="C6F432"/>
+            </a:solidFill>
+          </a:ln>
+        </p:spPr>
+        <p:style>
+          <a:lnRef idx="1">
+            <a:schemeClr val="accent1"/>
+          </a:lnRef>
+          <a:fillRef idx="3">
+            <a:schemeClr val="accent1"/>
+          </a:fillRef>
+          <a:effectRef idx="2">
+            <a:schemeClr val="accent1"/>
+          </a:effectRef>
+          <a:fontRef idx="minor">
+            <a:schemeClr val="lt1"/>
+          </a:fontRef>
+        </p:style>
+        <p:txBody>
+          <a:bodyPr rtlCol="0" anchor="ctr"/>
+          <a:lstStyle/>
+          <a:p>
+            <a:pPr algn="ctr">
+              <a:defRPr>
+                <a:latin typeface="Inter"/>
+              </a:defRPr>
+            </a:pPr>
+          </a:p>
+        </p:txBody>
+      </p:sp>
+      <p:sp>
+        <p:nvSpPr>
+          <p:cNvPr id="9" name="TextBox 8"/>
+          <p:cNvSpPr txBox="1"/>
+          <p:nvPr/>
+        </p:nvSpPr>
+        <p:spPr>
+          <a:xfrm>
+            <a:off x="896112" y="1371600"/>
+            <a:ext cx="10588752" cy="667101"/>
+          </a:xfrm>
+          <a:prstGeom prst="rect">
+            <a:avLst/>
+          </a:prstGeom>
+          <a:noFill/>
+        </p:spPr>
+        <p:txBody>
+          <a:bodyPr wrap="none" lIns="9144" rIns="9144" tIns="9144" bIns="9144" anchor="t">
+            <a:spAutoFit/>
+          </a:bodyPr>
+          <a:lstStyle/>
+          <a:p>
+            <a:pPr algn="l">
+              <a:spcAft>
+                <a:spcPts val="0"/>
+              </a:spcAft>
+              <a:defRPr sz="1800" b="1">
+                <a:solidFill>
+                  <a:srgbClr val="0D1117"/>
+                </a:solidFill>
+                <a:latin typeface="Inter"/>
+              </a:defRPr>
+            </a:pPr>
+            <a:r>
+              <a:rPr>
+                <a:latin typeface="Inter"/>
+              </a:rPr>
+              <a:t>No operational flags in the filings reviewed</a:t>
+            </a:r>
+          </a:p>
+        </p:txBody>
+      </p:sp>
+      <p:sp>
+        <p:nvSpPr>
+          <p:cNvPr id="10" name="Rectangle 9"/>
+          <p:cNvSpPr/>
+          <p:nvPr/>
+        </p:nvSpPr>
+        <p:spPr>
+          <a:xfrm>
+            <a:off x="640080" y="2585782"/>
+            <a:ext cx="10908792" cy="1725261"/>
           </a:xfrm>
           <a:prstGeom prst="rect">
             <a:avLst/>
@@ -12166,14 +11602,14 @@
       </p:sp>
       <p:sp>
         <p:nvSpPr>
-          <p:cNvPr id="10" name="Rectangle 9"/>
+          <p:cNvPr id="11" name="Rectangle 10"/>
           <p:cNvSpPr/>
           <p:nvPr/>
         </p:nvSpPr>
         <p:spPr>
           <a:xfrm>
-            <a:off x="640080" y="1325880"/>
-            <a:ext cx="54864" cy="2342356"/>
+            <a:off x="640080" y="2585782"/>
+            <a:ext cx="54864" cy="1725261"/>
           </a:xfrm>
           <a:prstGeom prst="rect">
             <a:avLst/>
@@ -12215,13 +11651,13 @@
       </p:sp>
       <p:sp>
         <p:nvSpPr>
-          <p:cNvPr id="11" name="TextBox 10"/>
+          <p:cNvPr id="12" name="TextBox 11"/>
           <p:cNvSpPr txBox="1"/>
           <p:nvPr/>
         </p:nvSpPr>
         <p:spPr>
           <a:xfrm>
-            <a:off x="804671" y="1435607"/>
+            <a:off x="804671" y="2695510"/>
             <a:ext cx="10616184" cy="228600"/>
           </a:xfrm>
           <a:prstGeom prst="rect">
@@ -12257,14 +11693,14 @@
       </p:sp>
       <p:sp>
         <p:nvSpPr>
-          <p:cNvPr id="12" name="TextBox 11"/>
+          <p:cNvPr id="13" name="TextBox 12"/>
           <p:cNvSpPr txBox="1"/>
           <p:nvPr/>
         </p:nvSpPr>
         <p:spPr>
           <a:xfrm>
-            <a:off x="804671" y="1719072"/>
-            <a:ext cx="10616184" cy="1857724"/>
+            <a:off x="804671" y="2978974"/>
+            <a:ext cx="10616184" cy="1240629"/>
           </a:xfrm>
           <a:prstGeom prst="rect">
             <a:avLst/>
@@ -12299,14 +11735,14 @@
       </p:sp>
       <p:sp>
         <p:nvSpPr>
-          <p:cNvPr id="13" name="Rectangle 12"/>
+          <p:cNvPr id="14" name="Rectangle 13"/>
           <p:cNvSpPr/>
           <p:nvPr/>
         </p:nvSpPr>
         <p:spPr>
           <a:xfrm>
-            <a:off x="640080" y="3777964"/>
-            <a:ext cx="2644902" cy="2439955"/>
+            <a:off x="640080" y="4420772"/>
+            <a:ext cx="2644902" cy="1797147"/>
           </a:xfrm>
           <a:prstGeom prst="rect">
             <a:avLst/>
@@ -12348,13 +11784,13 @@
       </p:sp>
       <p:sp>
         <p:nvSpPr>
-          <p:cNvPr id="14" name="Rectangle 13"/>
+          <p:cNvPr id="15" name="Rectangle 14"/>
           <p:cNvSpPr/>
           <p:nvPr/>
         </p:nvSpPr>
         <p:spPr>
           <a:xfrm>
-            <a:off x="640080" y="3777964"/>
+            <a:off x="640080" y="4420772"/>
             <a:ext cx="2644902" cy="45720"/>
           </a:xfrm>
           <a:prstGeom prst="rect">
@@ -12397,13 +11833,13 @@
       </p:sp>
       <p:sp>
         <p:nvSpPr>
-          <p:cNvPr id="15" name="TextBox 14"/>
+          <p:cNvPr id="16" name="TextBox 15"/>
           <p:cNvSpPr txBox="1"/>
           <p:nvPr/>
         </p:nvSpPr>
         <p:spPr>
           <a:xfrm>
-            <a:off x="749808" y="3905980"/>
+            <a:off x="749808" y="4548788"/>
             <a:ext cx="2425446" cy="201168"/>
           </a:xfrm>
           <a:prstGeom prst="rect">
@@ -12439,13 +11875,13 @@
       </p:sp>
       <p:sp>
         <p:nvSpPr>
-          <p:cNvPr id="16" name="TextBox 15"/>
+          <p:cNvPr id="17" name="TextBox 16"/>
           <p:cNvSpPr txBox="1"/>
           <p:nvPr/>
         </p:nvSpPr>
         <p:spPr>
           <a:xfrm>
-            <a:off x="749808" y="4162012"/>
+            <a:off x="749808" y="4804820"/>
             <a:ext cx="2425446" cy="475488"/>
           </a:xfrm>
           <a:prstGeom prst="rect">
@@ -12481,7 +11917,7 @@
       </p:sp>
       <p:sp>
         <p:nvSpPr>
-          <p:cNvPr id="17" name="TextBox 16"/>
+          <p:cNvPr id="18" name="TextBox 17"/>
           <p:cNvSpPr txBox="1"/>
           <p:nvPr/>
         </p:nvSpPr>
@@ -12523,14 +11959,14 @@
       </p:sp>
       <p:sp>
         <p:nvSpPr>
-          <p:cNvPr id="18" name="Rectangle 17"/>
+          <p:cNvPr id="19" name="Rectangle 18"/>
           <p:cNvSpPr/>
           <p:nvPr/>
         </p:nvSpPr>
         <p:spPr>
           <a:xfrm>
-            <a:off x="3394710" y="3777964"/>
-            <a:ext cx="2644902" cy="2439955"/>
+            <a:off x="3394710" y="4420772"/>
+            <a:ext cx="2644902" cy="1797147"/>
           </a:xfrm>
           <a:prstGeom prst="rect">
             <a:avLst/>
@@ -12572,13 +12008,13 @@
       </p:sp>
       <p:sp>
         <p:nvSpPr>
-          <p:cNvPr id="19" name="Rectangle 18"/>
+          <p:cNvPr id="20" name="Rectangle 19"/>
           <p:cNvSpPr/>
           <p:nvPr/>
         </p:nvSpPr>
         <p:spPr>
           <a:xfrm>
-            <a:off x="3394710" y="3777964"/>
+            <a:off x="3394710" y="4420772"/>
             <a:ext cx="2644902" cy="45720"/>
           </a:xfrm>
           <a:prstGeom prst="rect">
@@ -12621,13 +12057,13 @@
       </p:sp>
       <p:sp>
         <p:nvSpPr>
-          <p:cNvPr id="20" name="TextBox 19"/>
+          <p:cNvPr id="21" name="TextBox 20"/>
           <p:cNvSpPr txBox="1"/>
           <p:nvPr/>
         </p:nvSpPr>
         <p:spPr>
           <a:xfrm>
-            <a:off x="3504438" y="3905980"/>
+            <a:off x="3504438" y="4548788"/>
             <a:ext cx="2425446" cy="201168"/>
           </a:xfrm>
           <a:prstGeom prst="rect">
@@ -12663,13 +12099,13 @@
       </p:sp>
       <p:sp>
         <p:nvSpPr>
-          <p:cNvPr id="21" name="TextBox 20"/>
+          <p:cNvPr id="22" name="TextBox 21"/>
           <p:cNvSpPr txBox="1"/>
           <p:nvPr/>
         </p:nvSpPr>
         <p:spPr>
           <a:xfrm>
-            <a:off x="3504438" y="4162012"/>
+            <a:off x="3504438" y="4804820"/>
             <a:ext cx="2425446" cy="475488"/>
           </a:xfrm>
           <a:prstGeom prst="rect">
@@ -12705,7 +12141,7 @@
       </p:sp>
       <p:sp>
         <p:nvSpPr>
-          <p:cNvPr id="22" name="TextBox 21"/>
+          <p:cNvPr id="23" name="TextBox 22"/>
           <p:cNvSpPr txBox="1"/>
           <p:nvPr/>
         </p:nvSpPr>
@@ -12747,14 +12183,14 @@
       </p:sp>
       <p:sp>
         <p:nvSpPr>
-          <p:cNvPr id="23" name="Rectangle 22"/>
+          <p:cNvPr id="24" name="Rectangle 23"/>
           <p:cNvSpPr/>
           <p:nvPr/>
         </p:nvSpPr>
         <p:spPr>
           <a:xfrm>
-            <a:off x="6149340" y="3777964"/>
-            <a:ext cx="2644902" cy="2439955"/>
+            <a:off x="6149340" y="4420772"/>
+            <a:ext cx="2644902" cy="1797147"/>
           </a:xfrm>
           <a:prstGeom prst="rect">
             <a:avLst/>
@@ -12796,13 +12232,13 @@
       </p:sp>
       <p:sp>
         <p:nvSpPr>
-          <p:cNvPr id="24" name="Rectangle 23"/>
+          <p:cNvPr id="25" name="Rectangle 24"/>
           <p:cNvSpPr/>
           <p:nvPr/>
         </p:nvSpPr>
         <p:spPr>
           <a:xfrm>
-            <a:off x="6149340" y="3777964"/>
+            <a:off x="6149340" y="4420772"/>
             <a:ext cx="2644902" cy="45720"/>
           </a:xfrm>
           <a:prstGeom prst="rect">
@@ -12845,13 +12281,13 @@
       </p:sp>
       <p:sp>
         <p:nvSpPr>
-          <p:cNvPr id="25" name="TextBox 24"/>
+          <p:cNvPr id="26" name="TextBox 25"/>
           <p:cNvSpPr txBox="1"/>
           <p:nvPr/>
         </p:nvSpPr>
         <p:spPr>
           <a:xfrm>
-            <a:off x="6259068" y="3905980"/>
+            <a:off x="6259068" y="4548788"/>
             <a:ext cx="2425446" cy="201168"/>
           </a:xfrm>
           <a:prstGeom prst="rect">
@@ -12887,13 +12323,13 @@
       </p:sp>
       <p:sp>
         <p:nvSpPr>
-          <p:cNvPr id="26" name="TextBox 25"/>
+          <p:cNvPr id="27" name="TextBox 26"/>
           <p:cNvSpPr txBox="1"/>
           <p:nvPr/>
         </p:nvSpPr>
         <p:spPr>
           <a:xfrm>
-            <a:off x="6259068" y="4162012"/>
+            <a:off x="6259068" y="4804820"/>
             <a:ext cx="2425446" cy="475488"/>
           </a:xfrm>
           <a:prstGeom prst="rect">
@@ -12929,7 +12365,7 @@
       </p:sp>
       <p:sp>
         <p:nvSpPr>
-          <p:cNvPr id="27" name="TextBox 26"/>
+          <p:cNvPr id="28" name="TextBox 27"/>
           <p:cNvSpPr txBox="1"/>
           <p:nvPr/>
         </p:nvSpPr>
@@ -12971,14 +12407,14 @@
       </p:sp>
       <p:sp>
         <p:nvSpPr>
-          <p:cNvPr id="28" name="Rectangle 27"/>
+          <p:cNvPr id="29" name="Rectangle 28"/>
           <p:cNvSpPr/>
           <p:nvPr/>
         </p:nvSpPr>
         <p:spPr>
           <a:xfrm>
-            <a:off x="8903970" y="3777964"/>
-            <a:ext cx="2644902" cy="2439955"/>
+            <a:off x="8903970" y="4420772"/>
+            <a:ext cx="2644902" cy="1797147"/>
           </a:xfrm>
           <a:prstGeom prst="rect">
             <a:avLst/>
@@ -13020,13 +12456,13 @@
       </p:sp>
       <p:sp>
         <p:nvSpPr>
-          <p:cNvPr id="29" name="Rectangle 28"/>
+          <p:cNvPr id="30" name="Rectangle 29"/>
           <p:cNvSpPr/>
           <p:nvPr/>
         </p:nvSpPr>
         <p:spPr>
           <a:xfrm>
-            <a:off x="8903970" y="3777964"/>
+            <a:off x="8903970" y="4420772"/>
             <a:ext cx="2644902" cy="45720"/>
           </a:xfrm>
           <a:prstGeom prst="rect">
@@ -13069,13 +12505,13 @@
       </p:sp>
       <p:sp>
         <p:nvSpPr>
-          <p:cNvPr id="30" name="TextBox 29"/>
+          <p:cNvPr id="31" name="TextBox 30"/>
           <p:cNvSpPr txBox="1"/>
           <p:nvPr/>
         </p:nvSpPr>
         <p:spPr>
           <a:xfrm>
-            <a:off x="9013698" y="3905980"/>
+            <a:off x="9013698" y="4548788"/>
             <a:ext cx="2425446" cy="201168"/>
           </a:xfrm>
           <a:prstGeom prst="rect">
@@ -13111,13 +12547,13 @@
       </p:sp>
       <p:sp>
         <p:nvSpPr>
-          <p:cNvPr id="31" name="TextBox 30"/>
+          <p:cNvPr id="32" name="TextBox 31"/>
           <p:cNvSpPr txBox="1"/>
           <p:nvPr/>
         </p:nvSpPr>
         <p:spPr>
           <a:xfrm>
-            <a:off x="9013698" y="4162012"/>
+            <a:off x="9013698" y="4804820"/>
             <a:ext cx="2425446" cy="475488"/>
           </a:xfrm>
           <a:prstGeom prst="rect">
@@ -13153,7 +12589,7 @@
       </p:sp>
       <p:sp>
         <p:nvSpPr>
-          <p:cNvPr id="32" name="TextBox 31"/>
+          <p:cNvPr id="33" name="TextBox 32"/>
           <p:cNvSpPr txBox="1"/>
           <p:nvPr/>
         </p:nvSpPr>
@@ -13195,7 +12631,7 @@
       </p:sp>
       <p:sp>
         <p:nvSpPr>
-          <p:cNvPr id="33" name="Rectangle 32"/>
+          <p:cNvPr id="34" name="Rectangle 33"/>
           <p:cNvSpPr/>
           <p:nvPr/>
         </p:nvSpPr>
@@ -13244,7 +12680,7 @@
       </p:sp>
       <p:sp>
         <p:nvSpPr>
-          <p:cNvPr id="34" name="TextBox 33"/>
+          <p:cNvPr id="35" name="TextBox 34"/>
           <p:cNvSpPr txBox="1"/>
           <p:nvPr/>
         </p:nvSpPr>
@@ -13286,7 +12722,7 @@
       </p:sp>
       <p:sp>
         <p:nvSpPr>
-          <p:cNvPr id="35" name="TextBox 34"/>
+          <p:cNvPr id="36" name="TextBox 35"/>
           <p:cNvSpPr txBox="1"/>
           <p:nvPr/>
         </p:nvSpPr>
@@ -13328,7 +12764,7 @@
       </p:sp>
       <p:sp>
         <p:nvSpPr>
-          <p:cNvPr id="36" name="TextBox 35"/>
+          <p:cNvPr id="37" name="TextBox 36"/>
           <p:cNvSpPr txBox="1"/>
           <p:nvPr/>
         </p:nvSpPr>
@@ -13444,7 +12880,7 @@
         <p:spPr>
           <a:xfrm>
             <a:off x="640080" y="329184"/>
-            <a:ext cx="5303520" cy="182880"/>
+            <a:ext cx="9875520" cy="182880"/>
           </a:xfrm>
           <a:prstGeom prst="rect">
             <a:avLst/>
@@ -13485,48 +12921,6 @@
         </p:nvSpPr>
         <p:spPr>
           <a:xfrm>
-            <a:off x="5897880" y="310896"/>
-            <a:ext cx="4800600" cy="256032"/>
-          </a:xfrm>
-          <a:prstGeom prst="rect">
-            <a:avLst/>
-          </a:prstGeom>
-          <a:noFill/>
-        </p:spPr>
-        <p:txBody>
-          <a:bodyPr wrap="none" lIns="9144" rIns="9144" tIns="9144" bIns="9144" anchor="t">
-            <a:spAutoFit/>
-          </a:bodyPr>
-          <a:lstStyle/>
-          <a:p>
-            <a:pPr algn="r">
-              <a:spcAft>
-                <a:spcPts val="0"/>
-              </a:spcAft>
-              <a:defRPr sz="680" b="1">
-                <a:solidFill>
-                  <a:srgbClr val="4F6B00"/>
-                </a:solidFill>
-                <a:latin typeface="Inter"/>
-              </a:defRPr>
-            </a:pPr>
-            <a:r>
-              <a:rPr>
-                <a:latin typeface="Inter"/>
-              </a:rPr>
-              <a:t>Illustrative, Gradient Maintained — demo data, not the client's holdings or managers</a:t>
-            </a:r>
-          </a:p>
-        </p:txBody>
-      </p:sp>
-      <p:sp>
-        <p:nvSpPr>
-          <p:cNvPr id="5" name="TextBox 4"/>
-          <p:cNvSpPr txBox="1"/>
-          <p:nvPr/>
-        </p:nvSpPr>
-        <p:spPr>
-          <a:xfrm>
             <a:off x="640080" y="566928"/>
             <a:ext cx="10058400" cy="530352"/>
           </a:xfrm>
@@ -13563,7 +12957,7 @@
       </p:sp>
       <p:sp>
         <p:nvSpPr>
-          <p:cNvPr id="6" name="Rectangle 5"/>
+          <p:cNvPr id="5" name="Rectangle 4"/>
           <p:cNvSpPr/>
           <p:nvPr/>
         </p:nvSpPr>
@@ -13612,7 +13006,7 @@
       </p:sp>
       <p:sp>
         <p:nvSpPr>
-          <p:cNvPr id="7" name="Rectangle 6"/>
+          <p:cNvPr id="6" name="Rectangle 5"/>
           <p:cNvSpPr/>
           <p:nvPr/>
         </p:nvSpPr>
@@ -13661,7 +13055,7 @@
       </p:sp>
       <p:sp>
         <p:nvSpPr>
-          <p:cNvPr id="8" name="TextBox 7"/>
+          <p:cNvPr id="7" name="TextBox 6"/>
           <p:cNvSpPr txBox="1"/>
           <p:nvPr/>
         </p:nvSpPr>
@@ -13703,7 +13097,7 @@
       </p:sp>
       <p:sp>
         <p:nvSpPr>
-          <p:cNvPr id="9" name="TextBox 8"/>
+          <p:cNvPr id="8" name="TextBox 7"/>
           <p:cNvSpPr txBox="1"/>
           <p:nvPr/>
         </p:nvSpPr>
@@ -13745,7 +13139,7 @@
       </p:sp>
       <p:graphicFrame>
         <p:nvGraphicFramePr>
-          <p:cNvPr id="10" name="Table 9"/>
+          <p:cNvPr id="9" name="Table 8"/>
           <p:cNvGraphicFramePr>
             <a:graphicFrameLocks noGrp="1"/>
           </p:cNvGraphicFramePr>
@@ -13753,7 +13147,7 @@
         </p:nvGraphicFramePr>
         <p:xfrm>
           <a:off x="640080" y="1600200"/>
-          <a:ext cx="10908792" cy="2957582"/>
+          <a:ext cx="10908792" cy="3074703"/>
         </p:xfrm>
         <a:graphic>
           <a:graphicData uri="http://schemas.openxmlformats.org/drawingml/2006/table">
@@ -13766,7 +13160,7 @@
                 <a:gridCol w="4448556"/>
                 <a:gridCol w="4448556"/>
               </a:tblGrid>
-              <a:tr h="591516">
+              <a:tr h="614940">
                 <a:tc>
                   <a:txBody>
                     <a:bodyPr/>
@@ -13849,7 +13243,7 @@
                   </a:tcPr>
                 </a:tc>
               </a:tr>
-              <a:tr h="591516">
+              <a:tr h="614940">
                 <a:tc>
                   <a:txBody>
                     <a:bodyPr/>
@@ -13894,7 +13288,7 @@
                         <a:rPr>
                           <a:latin typeface="Inter"/>
                         </a:rPr>
-                        <a:t>● available</a:t>
+                        <a:t>● Available</a:t>
                       </a:r>
                     </a:p>
                   </a:txBody>
@@ -13932,7 +13326,7 @@
                   </a:tcPr>
                 </a:tc>
               </a:tr>
-              <a:tr h="591516">
+              <a:tr h="614940">
                 <a:tc>
                   <a:txBody>
                     <a:bodyPr/>
@@ -13977,7 +13371,7 @@
                         <a:rPr>
                           <a:latin typeface="Inter"/>
                         </a:rPr>
-                        <a:t>● available</a:t>
+                        <a:t>● Available</a:t>
                       </a:r>
                     </a:p>
                   </a:txBody>
@@ -14015,7 +13409,7 @@
                   </a:tcPr>
                 </a:tc>
               </a:tr>
-              <a:tr h="591516">
+              <a:tr h="614940">
                 <a:tc>
                   <a:txBody>
                     <a:bodyPr/>
@@ -14060,7 +13454,7 @@
                         <a:rPr>
                           <a:latin typeface="Inter"/>
                         </a:rPr>
-                        <a:t>● unavailable</a:t>
+                        <a:t>● Not available</a:t>
                       </a:r>
                     </a:p>
                   </a:txBody>
@@ -14098,7 +13492,7 @@
                   </a:tcPr>
                 </a:tc>
               </a:tr>
-              <a:tr h="591518">
+              <a:tr h="614943">
                 <a:tc>
                   <a:txBody>
                     <a:bodyPr/>
@@ -14143,7 +13537,7 @@
                         <a:rPr>
                           <a:latin typeface="Inter"/>
                         </a:rPr>
-                        <a:t>● available</a:t>
+                        <a:t>● Available</a:t>
                       </a:r>
                     </a:p>
                   </a:txBody>
@@ -14187,14 +13581,14 @@
       </p:graphicFrame>
       <p:sp>
         <p:nvSpPr>
-          <p:cNvPr id="11" name="Rectangle 10"/>
+          <p:cNvPr id="10" name="Rectangle 9"/>
           <p:cNvSpPr/>
           <p:nvPr/>
         </p:nvSpPr>
         <p:spPr>
           <a:xfrm>
-            <a:off x="640080" y="4667510"/>
-            <a:ext cx="10908792" cy="1550409"/>
+            <a:off x="640080" y="4784631"/>
+            <a:ext cx="10908792" cy="1433288"/>
           </a:xfrm>
           <a:prstGeom prst="rect">
             <a:avLst/>
@@ -14236,14 +13630,14 @@
       </p:sp>
       <p:sp>
         <p:nvSpPr>
-          <p:cNvPr id="12" name="Rectangle 11"/>
+          <p:cNvPr id="11" name="Rectangle 10"/>
           <p:cNvSpPr/>
           <p:nvPr/>
         </p:nvSpPr>
         <p:spPr>
           <a:xfrm>
-            <a:off x="640080" y="4667510"/>
-            <a:ext cx="54864" cy="1550409"/>
+            <a:off x="640080" y="4784631"/>
+            <a:ext cx="54864" cy="1433288"/>
           </a:xfrm>
           <a:prstGeom prst="rect">
             <a:avLst/>
@@ -14285,13 +13679,13 @@
       </p:sp>
       <p:sp>
         <p:nvSpPr>
-          <p:cNvPr id="13" name="TextBox 12"/>
+          <p:cNvPr id="12" name="TextBox 11"/>
           <p:cNvSpPr txBox="1"/>
           <p:nvPr/>
         </p:nvSpPr>
         <p:spPr>
           <a:xfrm>
-            <a:off x="804671" y="4777238"/>
+            <a:off x="804671" y="4894359"/>
             <a:ext cx="10616184" cy="228600"/>
           </a:xfrm>
           <a:prstGeom prst="rect">
@@ -14320,21 +13714,21 @@
               <a:rPr>
                 <a:latin typeface="Inter"/>
               </a:rPr>
-              <a:t>Key judgment — headline signal</a:t>
-            </a:r>
-          </a:p>
-        </p:txBody>
-      </p:sp>
-      <p:sp>
-        <p:nvSpPr>
-          <p:cNvPr id="14" name="TextBox 13"/>
+              <a:t>Key judgment — Operational flags</a:t>
+            </a:r>
+          </a:p>
+        </p:txBody>
+      </p:sp>
+      <p:sp>
+        <p:nvSpPr>
+          <p:cNvPr id="13" name="TextBox 12"/>
           <p:cNvSpPr txBox="1"/>
           <p:nvPr/>
         </p:nvSpPr>
         <p:spPr>
           <a:xfrm>
-            <a:off x="804671" y="5060702"/>
-            <a:ext cx="10616184" cy="1065777"/>
+            <a:off x="804671" y="5177823"/>
+            <a:ext cx="10616184" cy="948656"/>
           </a:xfrm>
           <a:prstGeom prst="rect">
             <a:avLst/>
@@ -14362,14 +13756,14 @@
               <a:rPr>
                 <a:latin typeface="Inter"/>
               </a:rPr>
-              <a:t>Observation: The sample report carries one clear headline signal [S1]. Why it matters: This signal focuses oversight on the report's most decision-relevant condition. Uncertainty: Evidence coverage may exclude newer or more detailed observations. What would change the view: A governed refresh showing a different signal or breached threshold.</a:t>
-            </a:r>
-          </a:p>
-        </p:txBody>
-      </p:sp>
-      <p:sp>
-        <p:nvSpPr>
-          <p:cNvPr id="15" name="Rectangle 14"/>
+              <a:t>Observation: The filings reviewed show no operational flags [S1]. Why it matters: Nothing in the regulatory record blocks the diligence from proceeding. Uncertainty: Areas the filings do not cover are listed under evidence coverage. What would change the view: Firm events or audit findings in those areas.</a:t>
+            </a:r>
+          </a:p>
+        </p:txBody>
+      </p:sp>
+      <p:sp>
+        <p:nvSpPr>
+          <p:cNvPr id="14" name="Rectangle 13"/>
           <p:cNvSpPr/>
           <p:nvPr/>
         </p:nvSpPr>
@@ -14418,7 +13812,7 @@
       </p:sp>
       <p:sp>
         <p:nvSpPr>
-          <p:cNvPr id="16" name="TextBox 15"/>
+          <p:cNvPr id="15" name="TextBox 14"/>
           <p:cNvSpPr txBox="1"/>
           <p:nvPr/>
         </p:nvSpPr>
@@ -14460,7 +13854,7 @@
       </p:sp>
       <p:sp>
         <p:nvSpPr>
-          <p:cNvPr id="17" name="TextBox 16"/>
+          <p:cNvPr id="16" name="TextBox 15"/>
           <p:cNvSpPr txBox="1"/>
           <p:nvPr/>
         </p:nvSpPr>
@@ -14502,7 +13896,7 @@
       </p:sp>
       <p:sp>
         <p:nvSpPr>
-          <p:cNvPr id="18" name="TextBox 17"/>
+          <p:cNvPr id="17" name="TextBox 16"/>
           <p:cNvSpPr txBox="1"/>
           <p:nvPr/>
         </p:nvSpPr>
@@ -14618,7 +14012,7 @@
         <p:spPr>
           <a:xfrm>
             <a:off x="640080" y="329184"/>
-            <a:ext cx="5303520" cy="182880"/>
+            <a:ext cx="9875520" cy="182880"/>
           </a:xfrm>
           <a:prstGeom prst="rect">
             <a:avLst/>
@@ -14659,48 +14053,6 @@
         </p:nvSpPr>
         <p:spPr>
           <a:xfrm>
-            <a:off x="5897880" y="310896"/>
-            <a:ext cx="4800600" cy="256032"/>
-          </a:xfrm>
-          <a:prstGeom prst="rect">
-            <a:avLst/>
-          </a:prstGeom>
-          <a:noFill/>
-        </p:spPr>
-        <p:txBody>
-          <a:bodyPr wrap="none" lIns="9144" rIns="9144" tIns="9144" bIns="9144" anchor="t">
-            <a:spAutoFit/>
-          </a:bodyPr>
-          <a:lstStyle/>
-          <a:p>
-            <a:pPr algn="r">
-              <a:spcAft>
-                <a:spcPts val="0"/>
-              </a:spcAft>
-              <a:defRPr sz="680" b="1">
-                <a:solidFill>
-                  <a:srgbClr val="4F6B00"/>
-                </a:solidFill>
-                <a:latin typeface="Inter"/>
-              </a:defRPr>
-            </a:pPr>
-            <a:r>
-              <a:rPr>
-                <a:latin typeface="Inter"/>
-              </a:rPr>
-              <a:t>Illustrative, Gradient Maintained — demo data, not the client's holdings or managers</a:t>
-            </a:r>
-          </a:p>
-        </p:txBody>
-      </p:sp>
-      <p:sp>
-        <p:nvSpPr>
-          <p:cNvPr id="5" name="TextBox 4"/>
-          <p:cNvSpPr txBox="1"/>
-          <p:nvPr/>
-        </p:nvSpPr>
-        <p:spPr>
-          <a:xfrm>
             <a:off x="640080" y="566928"/>
             <a:ext cx="10058400" cy="530352"/>
           </a:xfrm>
@@ -14737,7 +14089,7 @@
       </p:sp>
       <p:sp>
         <p:nvSpPr>
-          <p:cNvPr id="6" name="Rectangle 5"/>
+          <p:cNvPr id="5" name="Rectangle 4"/>
           <p:cNvSpPr/>
           <p:nvPr/>
         </p:nvSpPr>
@@ -14786,7 +14138,7 @@
       </p:sp>
       <p:sp>
         <p:nvSpPr>
-          <p:cNvPr id="7" name="Rectangle 6"/>
+          <p:cNvPr id="6" name="Rectangle 5"/>
           <p:cNvSpPr/>
           <p:nvPr/>
         </p:nvSpPr>
@@ -14835,7 +14187,7 @@
       </p:sp>
       <p:sp>
         <p:nvSpPr>
-          <p:cNvPr id="8" name="TextBox 7"/>
+          <p:cNvPr id="7" name="TextBox 6"/>
           <p:cNvSpPr txBox="1"/>
           <p:nvPr/>
         </p:nvSpPr>
@@ -14877,14 +14229,14 @@
       </p:sp>
       <p:sp>
         <p:nvSpPr>
-          <p:cNvPr id="9" name="Rectangle 8"/>
+          <p:cNvPr id="8" name="Rectangle 7"/>
           <p:cNvSpPr/>
           <p:nvPr/>
         </p:nvSpPr>
         <p:spPr>
           <a:xfrm>
             <a:off x="640080" y="1325880"/>
-            <a:ext cx="10908792" cy="2373068"/>
+            <a:ext cx="10908792" cy="2581315"/>
           </a:xfrm>
           <a:prstGeom prst="rect">
             <a:avLst/>
@@ -14926,14 +14278,14 @@
       </p:sp>
       <p:sp>
         <p:nvSpPr>
-          <p:cNvPr id="10" name="Rectangle 9"/>
+          <p:cNvPr id="9" name="Rectangle 8"/>
           <p:cNvSpPr/>
           <p:nvPr/>
         </p:nvSpPr>
         <p:spPr>
           <a:xfrm>
             <a:off x="640080" y="1325880"/>
-            <a:ext cx="54864" cy="2373068"/>
+            <a:ext cx="54864" cy="2581315"/>
           </a:xfrm>
           <a:prstGeom prst="rect">
             <a:avLst/>
@@ -14975,7 +14327,7 @@
       </p:sp>
       <p:sp>
         <p:nvSpPr>
-          <p:cNvPr id="11" name="TextBox 10"/>
+          <p:cNvPr id="10" name="TextBox 9"/>
           <p:cNvSpPr txBox="1"/>
           <p:nvPr/>
         </p:nvSpPr>
@@ -15010,21 +14362,21 @@
               <a:rPr>
                 <a:latin typeface="Inter"/>
               </a:rPr>
-              <a:t>Key judgment — primary measure</a:t>
-            </a:r>
-          </a:p>
-        </p:txBody>
-      </p:sp>
-      <p:sp>
-        <p:nvSpPr>
-          <p:cNvPr id="12" name="TextBox 11"/>
+              <a:t>Key judgment — Firm scale</a:t>
+            </a:r>
+          </a:p>
+        </p:txBody>
+      </p:sp>
+      <p:sp>
+        <p:nvSpPr>
+          <p:cNvPr id="11" name="TextBox 10"/>
           <p:cNvSpPr txBox="1"/>
           <p:nvPr/>
         </p:nvSpPr>
         <p:spPr>
           <a:xfrm>
             <a:off x="804671" y="1719072"/>
-            <a:ext cx="10616184" cy="1888436"/>
+            <a:ext cx="10616184" cy="2096683"/>
           </a:xfrm>
           <a:prstGeom prst="rect">
             <a:avLst/>
@@ -15052,21 +14404,21 @@
               <a:rPr>
                 <a:latin typeface="Inter"/>
               </a:rPr>
-              <a:t>Observation: Regulatory AUM is $12.4B in the review evidence [S2]. Why it matters: This measure establishes the baseline for comparing later governed results. Uncertainty: The source basis may omit newer observations outside the reviewed evidence. What would change the view: A refreshed source report showing a change above 1%.</a:t>
-            </a:r>
-          </a:p>
-        </p:txBody>
-      </p:sp>
-      <p:sp>
-        <p:nvSpPr>
-          <p:cNvPr id="13" name="Rectangle 12"/>
+              <a:t>Observation: The adviser reports $12.4B of regulatory assets under management [S2]. Why it matters: Scale supports the custody, audit and compliance infrastructure expected for the mandate. Uncertainty: The figure is as of the latest Form ADV. What would change the view: A material change in the next annual amendment.</a:t>
+            </a:r>
+          </a:p>
+        </p:txBody>
+      </p:sp>
+      <p:sp>
+        <p:nvSpPr>
+          <p:cNvPr id="12" name="Rectangle 11"/>
           <p:cNvSpPr/>
           <p:nvPr/>
         </p:nvSpPr>
         <p:spPr>
           <a:xfrm>
-            <a:off x="640080" y="3808676"/>
-            <a:ext cx="10908792" cy="2409243"/>
+            <a:off x="640080" y="4016923"/>
+            <a:ext cx="10908792" cy="2200996"/>
           </a:xfrm>
           <a:prstGeom prst="rect">
             <a:avLst/>
@@ -15108,14 +14460,14 @@
       </p:sp>
       <p:sp>
         <p:nvSpPr>
-          <p:cNvPr id="14" name="Rectangle 13"/>
+          <p:cNvPr id="13" name="Rectangle 12"/>
           <p:cNvSpPr/>
           <p:nvPr/>
         </p:nvSpPr>
         <p:spPr>
           <a:xfrm>
-            <a:off x="640080" y="3808676"/>
-            <a:ext cx="54864" cy="2409243"/>
+            <a:off x="640080" y="4016923"/>
+            <a:ext cx="54864" cy="2200996"/>
           </a:xfrm>
           <a:prstGeom prst="rect">
             <a:avLst/>
@@ -15157,13 +14509,13 @@
       </p:sp>
       <p:sp>
         <p:nvSpPr>
-          <p:cNvPr id="15" name="TextBox 14"/>
+          <p:cNvPr id="14" name="TextBox 13"/>
           <p:cNvSpPr txBox="1"/>
           <p:nvPr/>
         </p:nvSpPr>
         <p:spPr>
           <a:xfrm>
-            <a:off x="804671" y="3918404"/>
+            <a:off x="804671" y="4126651"/>
             <a:ext cx="10616184" cy="228600"/>
           </a:xfrm>
           <a:prstGeom prst="rect">
@@ -15192,21 +14544,21 @@
               <a:rPr>
                 <a:latin typeface="Inter"/>
               </a:rPr>
-              <a:t>Key judgment — monitoring priority</a:t>
-            </a:r>
-          </a:p>
-        </p:txBody>
-      </p:sp>
-      <p:sp>
-        <p:nvSpPr>
-          <p:cNvPr id="16" name="TextBox 15"/>
+              <a:t>Key judgment — Operational score</a:t>
+            </a:r>
+          </a:p>
+        </p:txBody>
+      </p:sp>
+      <p:sp>
+        <p:nvSpPr>
+          <p:cNvPr id="15" name="TextBox 14"/>
           <p:cNvSpPr txBox="1"/>
           <p:nvPr/>
         </p:nvSpPr>
         <p:spPr>
           <a:xfrm>
-            <a:off x="804671" y="4201868"/>
-            <a:ext cx="10616184" cy="1924611"/>
+            <a:off x="804671" y="4410115"/>
+            <a:ext cx="10616184" cy="1716364"/>
           </a:xfrm>
           <a:prstGeom prst="rect">
             <a:avLst/>
@@ -15234,14 +14586,14 @@
               <a:rPr>
                 <a:latin typeface="Inter"/>
               </a:rPr>
-              <a:t>Observation: Composite is 32.4 in the review evidence [S3]. Why it matters: This result determines which item receives priority in the next monitoring cycle. Uncertainty: Supporting coverage may omit later filings or corroborating detail. What would change the view: A new filing or report that resolves the item or changes it by 1%.</a:t>
-            </a:r>
-          </a:p>
-        </p:txBody>
-      </p:sp>
-      <p:sp>
-        <p:nvSpPr>
-          <p:cNvPr id="17" name="Rectangle 16"/>
+              <a:t>Observation: The composite operational score is 32.4 [S3]. Why it matters: It sets the baseline for the next review of this manager. Uncertainty: The score covers only the evidence areas returned. What would change the view: New firm events or filings that move the score.</a:t>
+            </a:r>
+          </a:p>
+        </p:txBody>
+      </p:sp>
+      <p:sp>
+        <p:nvSpPr>
+          <p:cNvPr id="16" name="Rectangle 15"/>
           <p:cNvSpPr/>
           <p:nvPr/>
         </p:nvSpPr>
@@ -15290,7 +14642,7 @@
       </p:sp>
       <p:sp>
         <p:nvSpPr>
-          <p:cNvPr id="18" name="TextBox 17"/>
+          <p:cNvPr id="17" name="TextBox 16"/>
           <p:cNvSpPr txBox="1"/>
           <p:nvPr/>
         </p:nvSpPr>
@@ -15332,7 +14684,7 @@
       </p:sp>
       <p:sp>
         <p:nvSpPr>
-          <p:cNvPr id="19" name="TextBox 18"/>
+          <p:cNvPr id="18" name="TextBox 17"/>
           <p:cNvSpPr txBox="1"/>
           <p:nvPr/>
         </p:nvSpPr>
@@ -15374,7 +14726,7 @@
       </p:sp>
       <p:sp>
         <p:nvSpPr>
-          <p:cNvPr id="20" name="TextBox 19"/>
+          <p:cNvPr id="19" name="TextBox 18"/>
           <p:cNvSpPr txBox="1"/>
           <p:nvPr/>
         </p:nvSpPr>
@@ -15490,7 +14842,7 @@
         <p:spPr>
           <a:xfrm>
             <a:off x="640080" y="329184"/>
-            <a:ext cx="5303520" cy="182880"/>
+            <a:ext cx="9875520" cy="182880"/>
           </a:xfrm>
           <a:prstGeom prst="rect">
             <a:avLst/>
@@ -15531,48 +14883,6 @@
         </p:nvSpPr>
         <p:spPr>
           <a:xfrm>
-            <a:off x="5897880" y="310896"/>
-            <a:ext cx="4800600" cy="256032"/>
-          </a:xfrm>
-          <a:prstGeom prst="rect">
-            <a:avLst/>
-          </a:prstGeom>
-          <a:noFill/>
-        </p:spPr>
-        <p:txBody>
-          <a:bodyPr wrap="none" lIns="9144" rIns="9144" tIns="9144" bIns="9144" anchor="t">
-            <a:spAutoFit/>
-          </a:bodyPr>
-          <a:lstStyle/>
-          <a:p>
-            <a:pPr algn="r">
-              <a:spcAft>
-                <a:spcPts val="0"/>
-              </a:spcAft>
-              <a:defRPr sz="680" b="1">
-                <a:solidFill>
-                  <a:srgbClr val="4F6B00"/>
-                </a:solidFill>
-                <a:latin typeface="Inter"/>
-              </a:defRPr>
-            </a:pPr>
-            <a:r>
-              <a:rPr>
-                <a:latin typeface="Inter"/>
-              </a:rPr>
-              <a:t>Illustrative, Gradient Maintained — demo data, not the client's holdings or managers</a:t>
-            </a:r>
-          </a:p>
-        </p:txBody>
-      </p:sp>
-      <p:sp>
-        <p:nvSpPr>
-          <p:cNvPr id="5" name="TextBox 4"/>
-          <p:cNvSpPr txBox="1"/>
-          <p:nvPr/>
-        </p:nvSpPr>
-        <p:spPr>
-          <a:xfrm>
             <a:off x="640080" y="566928"/>
             <a:ext cx="10058400" cy="530352"/>
           </a:xfrm>
@@ -15609,7 +14919,7 @@
       </p:sp>
       <p:sp>
         <p:nvSpPr>
-          <p:cNvPr id="6" name="Rectangle 5"/>
+          <p:cNvPr id="5" name="Rectangle 4"/>
           <p:cNvSpPr/>
           <p:nvPr/>
         </p:nvSpPr>
@@ -15658,7 +14968,7 @@
       </p:sp>
       <p:sp>
         <p:nvSpPr>
-          <p:cNvPr id="7" name="Rectangle 6"/>
+          <p:cNvPr id="6" name="Rectangle 5"/>
           <p:cNvSpPr/>
           <p:nvPr/>
         </p:nvSpPr>
@@ -15707,7 +15017,7 @@
       </p:sp>
       <p:sp>
         <p:nvSpPr>
-          <p:cNvPr id="8" name="TextBox 7"/>
+          <p:cNvPr id="7" name="TextBox 6"/>
           <p:cNvSpPr txBox="1"/>
           <p:nvPr/>
         </p:nvSpPr>
@@ -15749,7 +15059,7 @@
       </p:sp>
       <p:sp>
         <p:nvSpPr>
-          <p:cNvPr id="9" name="Rectangle 8"/>
+          <p:cNvPr id="8" name="Rectangle 7"/>
           <p:cNvSpPr/>
           <p:nvPr/>
         </p:nvSpPr>
@@ -15798,7 +15108,7 @@
       </p:sp>
       <p:sp>
         <p:nvSpPr>
-          <p:cNvPr id="10" name="Rectangle 9"/>
+          <p:cNvPr id="9" name="Rectangle 8"/>
           <p:cNvSpPr/>
           <p:nvPr/>
         </p:nvSpPr>
@@ -15847,7 +15157,7 @@
       </p:sp>
       <p:sp>
         <p:nvSpPr>
-          <p:cNvPr id="11" name="TextBox 10"/>
+          <p:cNvPr id="10" name="TextBox 9"/>
           <p:cNvSpPr txBox="1"/>
           <p:nvPr/>
         </p:nvSpPr>
@@ -15889,7 +15199,7 @@
       </p:sp>
       <p:sp>
         <p:nvSpPr>
-          <p:cNvPr id="12" name="TextBox 11"/>
+          <p:cNvPr id="11" name="TextBox 10"/>
           <p:cNvSpPr txBox="1"/>
           <p:nvPr/>
         </p:nvSpPr>
@@ -15931,7 +15241,7 @@
       </p:sp>
       <p:sp>
         <p:nvSpPr>
-          <p:cNvPr id="13" name="TextBox 12"/>
+          <p:cNvPr id="12" name="TextBox 11"/>
           <p:cNvSpPr txBox="1"/>
           <p:nvPr/>
         </p:nvSpPr>
@@ -15973,7 +15283,7 @@
       </p:sp>
       <p:sp>
         <p:nvSpPr>
-          <p:cNvPr id="14" name="Rectangle 13"/>
+          <p:cNvPr id="13" name="Rectangle 12"/>
           <p:cNvSpPr/>
           <p:nvPr/>
         </p:nvSpPr>
@@ -16022,7 +15332,7 @@
       </p:sp>
       <p:sp>
         <p:nvSpPr>
-          <p:cNvPr id="15" name="Rectangle 14"/>
+          <p:cNvPr id="14" name="Rectangle 13"/>
           <p:cNvSpPr/>
           <p:nvPr/>
         </p:nvSpPr>
@@ -16071,7 +15381,7 @@
       </p:sp>
       <p:sp>
         <p:nvSpPr>
-          <p:cNvPr id="16" name="TextBox 15"/>
+          <p:cNvPr id="15" name="TextBox 14"/>
           <p:cNvSpPr txBox="1"/>
           <p:nvPr/>
         </p:nvSpPr>
@@ -16113,7 +15423,7 @@
       </p:sp>
       <p:sp>
         <p:nvSpPr>
-          <p:cNvPr id="17" name="TextBox 16"/>
+          <p:cNvPr id="16" name="TextBox 15"/>
           <p:cNvSpPr txBox="1"/>
           <p:nvPr/>
         </p:nvSpPr>
@@ -16155,7 +15465,7 @@
       </p:sp>
       <p:sp>
         <p:nvSpPr>
-          <p:cNvPr id="18" name="TextBox 17"/>
+          <p:cNvPr id="17" name="TextBox 16"/>
           <p:cNvSpPr txBox="1"/>
           <p:nvPr/>
         </p:nvSpPr>
@@ -16197,7 +15507,7 @@
       </p:sp>
       <p:sp>
         <p:nvSpPr>
-          <p:cNvPr id="19" name="Rectangle 18"/>
+          <p:cNvPr id="18" name="Rectangle 17"/>
           <p:cNvSpPr/>
           <p:nvPr/>
         </p:nvSpPr>
@@ -16246,7 +15556,7 @@
       </p:sp>
       <p:sp>
         <p:nvSpPr>
-          <p:cNvPr id="20" name="Rectangle 19"/>
+          <p:cNvPr id="19" name="Rectangle 18"/>
           <p:cNvSpPr/>
           <p:nvPr/>
         </p:nvSpPr>
@@ -16295,7 +15605,7 @@
       </p:sp>
       <p:sp>
         <p:nvSpPr>
-          <p:cNvPr id="21" name="TextBox 20"/>
+          <p:cNvPr id="20" name="TextBox 19"/>
           <p:cNvSpPr txBox="1"/>
           <p:nvPr/>
         </p:nvSpPr>
@@ -16337,7 +15647,7 @@
       </p:sp>
       <p:sp>
         <p:nvSpPr>
-          <p:cNvPr id="22" name="TextBox 21"/>
+          <p:cNvPr id="21" name="TextBox 20"/>
           <p:cNvSpPr txBox="1"/>
           <p:nvPr/>
         </p:nvSpPr>
@@ -16379,7 +15689,7 @@
       </p:sp>
       <p:sp>
         <p:nvSpPr>
-          <p:cNvPr id="23" name="TextBox 22"/>
+          <p:cNvPr id="22" name="TextBox 21"/>
           <p:cNvSpPr txBox="1"/>
           <p:nvPr/>
         </p:nvSpPr>
@@ -16421,7 +15731,7 @@
       </p:sp>
       <p:sp>
         <p:nvSpPr>
-          <p:cNvPr id="24" name="Rectangle 23"/>
+          <p:cNvPr id="23" name="Rectangle 22"/>
           <p:cNvSpPr/>
           <p:nvPr/>
         </p:nvSpPr>
@@ -16470,7 +15780,7 @@
       </p:sp>
       <p:sp>
         <p:nvSpPr>
-          <p:cNvPr id="25" name="Rectangle 24"/>
+          <p:cNvPr id="24" name="Rectangle 23"/>
           <p:cNvSpPr/>
           <p:nvPr/>
         </p:nvSpPr>
@@ -16519,7 +15829,7 @@
       </p:sp>
       <p:sp>
         <p:nvSpPr>
-          <p:cNvPr id="26" name="TextBox 25"/>
+          <p:cNvPr id="25" name="TextBox 24"/>
           <p:cNvSpPr txBox="1"/>
           <p:nvPr/>
         </p:nvSpPr>
@@ -16561,7 +15871,7 @@
       </p:sp>
       <p:sp>
         <p:nvSpPr>
-          <p:cNvPr id="27" name="TextBox 26"/>
+          <p:cNvPr id="26" name="TextBox 25"/>
           <p:cNvSpPr txBox="1"/>
           <p:nvPr/>
         </p:nvSpPr>
@@ -16603,7 +15913,7 @@
       </p:sp>
       <p:sp>
         <p:nvSpPr>
-          <p:cNvPr id="28" name="TextBox 27"/>
+          <p:cNvPr id="27" name="TextBox 26"/>
           <p:cNvSpPr txBox="1"/>
           <p:nvPr/>
         </p:nvSpPr>
@@ -16645,7 +15955,7 @@
       </p:sp>
       <p:sp>
         <p:nvSpPr>
-          <p:cNvPr id="29" name="Rectangle 28"/>
+          <p:cNvPr id="28" name="Rectangle 27"/>
           <p:cNvSpPr/>
           <p:nvPr/>
         </p:nvSpPr>
@@ -16694,7 +16004,7 @@
       </p:sp>
       <p:sp>
         <p:nvSpPr>
-          <p:cNvPr id="30" name="TextBox 29"/>
+          <p:cNvPr id="29" name="TextBox 28"/>
           <p:cNvSpPr txBox="1"/>
           <p:nvPr/>
         </p:nvSpPr>
@@ -16736,7 +16046,7 @@
       </p:sp>
       <p:sp>
         <p:nvSpPr>
-          <p:cNvPr id="31" name="TextBox 30"/>
+          <p:cNvPr id="30" name="TextBox 29"/>
           <p:cNvSpPr txBox="1"/>
           <p:nvPr/>
         </p:nvSpPr>
@@ -16778,7 +16088,7 @@
       </p:sp>
       <p:sp>
         <p:nvSpPr>
-          <p:cNvPr id="32" name="TextBox 31"/>
+          <p:cNvPr id="31" name="TextBox 30"/>
           <p:cNvSpPr txBox="1"/>
           <p:nvPr/>
         </p:nvSpPr>
@@ -16894,7 +16204,7 @@
         <p:spPr>
           <a:xfrm>
             <a:off x="640080" y="329184"/>
-            <a:ext cx="5303520" cy="182880"/>
+            <a:ext cx="9875520" cy="182880"/>
           </a:xfrm>
           <a:prstGeom prst="rect">
             <a:avLst/>
@@ -16935,48 +16245,6 @@
         </p:nvSpPr>
         <p:spPr>
           <a:xfrm>
-            <a:off x="5897880" y="310896"/>
-            <a:ext cx="4800600" cy="256032"/>
-          </a:xfrm>
-          <a:prstGeom prst="rect">
-            <a:avLst/>
-          </a:prstGeom>
-          <a:noFill/>
-        </p:spPr>
-        <p:txBody>
-          <a:bodyPr wrap="none" lIns="9144" rIns="9144" tIns="9144" bIns="9144" anchor="t">
-            <a:spAutoFit/>
-          </a:bodyPr>
-          <a:lstStyle/>
-          <a:p>
-            <a:pPr algn="r">
-              <a:spcAft>
-                <a:spcPts val="0"/>
-              </a:spcAft>
-              <a:defRPr sz="680" b="1">
-                <a:solidFill>
-                  <a:srgbClr val="4F6B00"/>
-                </a:solidFill>
-                <a:latin typeface="Inter"/>
-              </a:defRPr>
-            </a:pPr>
-            <a:r>
-              <a:rPr>
-                <a:latin typeface="Inter"/>
-              </a:rPr>
-              <a:t>Illustrative, Gradient Maintained — demo data, not the client's holdings or managers</a:t>
-            </a:r>
-          </a:p>
-        </p:txBody>
-      </p:sp>
-      <p:sp>
-        <p:nvSpPr>
-          <p:cNvPr id="5" name="TextBox 4"/>
-          <p:cNvSpPr txBox="1"/>
-          <p:nvPr/>
-        </p:nvSpPr>
-        <p:spPr>
-          <a:xfrm>
             <a:off x="640080" y="566928"/>
             <a:ext cx="10058400" cy="530352"/>
           </a:xfrm>
@@ -17013,7 +16281,7 @@
       </p:sp>
       <p:sp>
         <p:nvSpPr>
-          <p:cNvPr id="6" name="Rectangle 5"/>
+          <p:cNvPr id="5" name="Rectangle 4"/>
           <p:cNvSpPr/>
           <p:nvPr/>
         </p:nvSpPr>
@@ -17062,7 +16330,7 @@
       </p:sp>
       <p:sp>
         <p:nvSpPr>
-          <p:cNvPr id="7" name="Rectangle 6"/>
+          <p:cNvPr id="6" name="Rectangle 5"/>
           <p:cNvSpPr/>
           <p:nvPr/>
         </p:nvSpPr>
@@ -17111,7 +16379,7 @@
       </p:sp>
       <p:sp>
         <p:nvSpPr>
-          <p:cNvPr id="8" name="TextBox 7"/>
+          <p:cNvPr id="7" name="TextBox 6"/>
           <p:cNvSpPr txBox="1"/>
           <p:nvPr/>
         </p:nvSpPr>
@@ -17153,7 +16421,7 @@
       </p:sp>
       <p:sp>
         <p:nvSpPr>
-          <p:cNvPr id="9" name="TextBox 8"/>
+          <p:cNvPr id="8" name="TextBox 7"/>
           <p:cNvSpPr txBox="1"/>
           <p:nvPr/>
         </p:nvSpPr>
@@ -17195,7 +16463,7 @@
       </p:sp>
       <p:graphicFrame>
         <p:nvGraphicFramePr>
-          <p:cNvPr id="10" name="Table 9"/>
+          <p:cNvPr id="9" name="Table 8"/>
           <p:cNvGraphicFramePr>
             <a:graphicFrameLocks noGrp="1"/>
           </p:cNvGraphicFramePr>
@@ -17445,7 +16713,7 @@
       </p:graphicFrame>
       <p:sp>
         <p:nvSpPr>
-          <p:cNvPr id="11" name="Rectangle 10"/>
+          <p:cNvPr id="10" name="Rectangle 9"/>
           <p:cNvSpPr/>
           <p:nvPr/>
         </p:nvSpPr>
@@ -17494,7 +16762,7 @@
       </p:sp>
       <p:sp>
         <p:nvSpPr>
-          <p:cNvPr id="12" name="TextBox 11"/>
+          <p:cNvPr id="11" name="TextBox 10"/>
           <p:cNvSpPr txBox="1"/>
           <p:nvPr/>
         </p:nvSpPr>
@@ -17536,7 +16804,7 @@
       </p:sp>
       <p:graphicFrame>
         <p:nvGraphicFramePr>
-          <p:cNvPr id="13" name="Chart 12"/>
+          <p:cNvPr id="12" name="Chart 11"/>
           <p:cNvGraphicFramePr>
             <a:graphicFrameLocks noGrp="1"/>
           </p:cNvGraphicFramePr>
@@ -17554,7 +16822,7 @@
       </p:graphicFrame>
       <p:sp>
         <p:nvSpPr>
-          <p:cNvPr id="14" name="Rectangle 13"/>
+          <p:cNvPr id="13" name="Rectangle 12"/>
           <p:cNvSpPr/>
           <p:nvPr/>
         </p:nvSpPr>
@@ -17603,7 +16871,7 @@
       </p:sp>
       <p:sp>
         <p:nvSpPr>
-          <p:cNvPr id="15" name="TextBox 14"/>
+          <p:cNvPr id="14" name="TextBox 13"/>
           <p:cNvSpPr txBox="1"/>
           <p:nvPr/>
         </p:nvSpPr>
@@ -17645,7 +16913,7 @@
       </p:sp>
       <p:sp>
         <p:nvSpPr>
-          <p:cNvPr id="16" name="TextBox 15"/>
+          <p:cNvPr id="15" name="TextBox 14"/>
           <p:cNvSpPr txBox="1"/>
           <p:nvPr/>
         </p:nvSpPr>
@@ -17687,7 +16955,7 @@
       </p:sp>
       <p:sp>
         <p:nvSpPr>
-          <p:cNvPr id="17" name="TextBox 16"/>
+          <p:cNvPr id="16" name="TextBox 15"/>
           <p:cNvSpPr txBox="1"/>
           <p:nvPr/>
         </p:nvSpPr>
@@ -17803,7 +17071,7 @@
         <p:spPr>
           <a:xfrm>
             <a:off x="640080" y="329184"/>
-            <a:ext cx="5303520" cy="182880"/>
+            <a:ext cx="9875520" cy="182880"/>
           </a:xfrm>
           <a:prstGeom prst="rect">
             <a:avLst/>
@@ -17844,48 +17112,6 @@
         </p:nvSpPr>
         <p:spPr>
           <a:xfrm>
-            <a:off x="5897880" y="310896"/>
-            <a:ext cx="4800600" cy="256032"/>
-          </a:xfrm>
-          <a:prstGeom prst="rect">
-            <a:avLst/>
-          </a:prstGeom>
-          <a:noFill/>
-        </p:spPr>
-        <p:txBody>
-          <a:bodyPr wrap="none" lIns="9144" rIns="9144" tIns="9144" bIns="9144" anchor="t">
-            <a:spAutoFit/>
-          </a:bodyPr>
-          <a:lstStyle/>
-          <a:p>
-            <a:pPr algn="r">
-              <a:spcAft>
-                <a:spcPts val="0"/>
-              </a:spcAft>
-              <a:defRPr sz="680" b="1">
-                <a:solidFill>
-                  <a:srgbClr val="4F6B00"/>
-                </a:solidFill>
-                <a:latin typeface="Inter"/>
-              </a:defRPr>
-            </a:pPr>
-            <a:r>
-              <a:rPr>
-                <a:latin typeface="Inter"/>
-              </a:rPr>
-              <a:t>Illustrative, Gradient Maintained — demo data, not the client's holdings or managers</a:t>
-            </a:r>
-          </a:p>
-        </p:txBody>
-      </p:sp>
-      <p:sp>
-        <p:nvSpPr>
-          <p:cNvPr id="5" name="TextBox 4"/>
-          <p:cNvSpPr txBox="1"/>
-          <p:nvPr/>
-        </p:nvSpPr>
-        <p:spPr>
-          <a:xfrm>
             <a:off x="640080" y="566928"/>
             <a:ext cx="10058400" cy="530352"/>
           </a:xfrm>
@@ -17922,7 +17148,7 @@
       </p:sp>
       <p:sp>
         <p:nvSpPr>
-          <p:cNvPr id="6" name="Rectangle 5"/>
+          <p:cNvPr id="5" name="Rectangle 4"/>
           <p:cNvSpPr/>
           <p:nvPr/>
         </p:nvSpPr>
@@ -17971,7 +17197,7 @@
       </p:sp>
       <p:sp>
         <p:nvSpPr>
-          <p:cNvPr id="7" name="Rectangle 6"/>
+          <p:cNvPr id="6" name="Rectangle 5"/>
           <p:cNvSpPr/>
           <p:nvPr/>
         </p:nvSpPr>
@@ -18020,7 +17246,7 @@
       </p:sp>
       <p:sp>
         <p:nvSpPr>
-          <p:cNvPr id="8" name="TextBox 7"/>
+          <p:cNvPr id="7" name="TextBox 6"/>
           <p:cNvSpPr txBox="1"/>
           <p:nvPr/>
         </p:nvSpPr>
@@ -18062,7 +17288,7 @@
       </p:sp>
       <p:sp>
         <p:nvSpPr>
-          <p:cNvPr id="9" name="Rectangle 8"/>
+          <p:cNvPr id="8" name="Rectangle 7"/>
           <p:cNvSpPr/>
           <p:nvPr/>
         </p:nvSpPr>
@@ -18111,7 +17337,7 @@
       </p:sp>
       <p:sp>
         <p:nvSpPr>
-          <p:cNvPr id="10" name="Rectangle 9"/>
+          <p:cNvPr id="9" name="Rectangle 8"/>
           <p:cNvSpPr/>
           <p:nvPr/>
         </p:nvSpPr>
@@ -18160,7 +17386,7 @@
       </p:sp>
       <p:sp>
         <p:nvSpPr>
-          <p:cNvPr id="11" name="TextBox 10"/>
+          <p:cNvPr id="10" name="TextBox 9"/>
           <p:cNvSpPr txBox="1"/>
           <p:nvPr/>
         </p:nvSpPr>
@@ -18202,7 +17428,7 @@
       </p:sp>
       <p:sp>
         <p:nvSpPr>
-          <p:cNvPr id="12" name="TextBox 11"/>
+          <p:cNvPr id="11" name="TextBox 10"/>
           <p:cNvSpPr txBox="1"/>
           <p:nvPr/>
         </p:nvSpPr>
@@ -18244,7 +17470,7 @@
       </p:sp>
       <p:sp>
         <p:nvSpPr>
-          <p:cNvPr id="13" name="Rectangle 12"/>
+          <p:cNvPr id="12" name="Rectangle 11"/>
           <p:cNvSpPr/>
           <p:nvPr/>
         </p:nvSpPr>
@@ -18293,7 +17519,7 @@
       </p:sp>
       <p:sp>
         <p:nvSpPr>
-          <p:cNvPr id="14" name="TextBox 13"/>
+          <p:cNvPr id="13" name="TextBox 12"/>
           <p:cNvSpPr txBox="1"/>
           <p:nvPr/>
         </p:nvSpPr>
@@ -18335,7 +17561,7 @@
       </p:sp>
       <p:sp>
         <p:nvSpPr>
-          <p:cNvPr id="15" name="TextBox 14"/>
+          <p:cNvPr id="14" name="TextBox 13"/>
           <p:cNvSpPr txBox="1"/>
           <p:nvPr/>
         </p:nvSpPr>
@@ -18377,7 +17603,7 @@
       </p:sp>
       <p:sp>
         <p:nvSpPr>
-          <p:cNvPr id="16" name="TextBox 15"/>
+          <p:cNvPr id="15" name="TextBox 14"/>
           <p:cNvSpPr txBox="1"/>
           <p:nvPr/>
         </p:nvSpPr>
@@ -18493,7 +17719,7 @@
         <p:spPr>
           <a:xfrm>
             <a:off x="640080" y="329184"/>
-            <a:ext cx="5303520" cy="182880"/>
+            <a:ext cx="9875520" cy="182880"/>
           </a:xfrm>
           <a:prstGeom prst="rect">
             <a:avLst/>
@@ -18534,48 +17760,6 @@
         </p:nvSpPr>
         <p:spPr>
           <a:xfrm>
-            <a:off x="5897880" y="310896"/>
-            <a:ext cx="4800600" cy="256032"/>
-          </a:xfrm>
-          <a:prstGeom prst="rect">
-            <a:avLst/>
-          </a:prstGeom>
-          <a:noFill/>
-        </p:spPr>
-        <p:txBody>
-          <a:bodyPr wrap="none" lIns="9144" rIns="9144" tIns="9144" bIns="9144" anchor="t">
-            <a:spAutoFit/>
-          </a:bodyPr>
-          <a:lstStyle/>
-          <a:p>
-            <a:pPr algn="r">
-              <a:spcAft>
-                <a:spcPts val="0"/>
-              </a:spcAft>
-              <a:defRPr sz="680" b="1">
-                <a:solidFill>
-                  <a:srgbClr val="4F6B00"/>
-                </a:solidFill>
-                <a:latin typeface="Inter"/>
-              </a:defRPr>
-            </a:pPr>
-            <a:r>
-              <a:rPr>
-                <a:latin typeface="Inter"/>
-              </a:rPr>
-              <a:t>Illustrative, Gradient Maintained — demo data, not the client's holdings or managers</a:t>
-            </a:r>
-          </a:p>
-        </p:txBody>
-      </p:sp>
-      <p:sp>
-        <p:nvSpPr>
-          <p:cNvPr id="5" name="TextBox 4"/>
-          <p:cNvSpPr txBox="1"/>
-          <p:nvPr/>
-        </p:nvSpPr>
-        <p:spPr>
-          <a:xfrm>
             <a:off x="640080" y="566928"/>
             <a:ext cx="10058400" cy="530352"/>
           </a:xfrm>
@@ -18612,7 +17796,7 @@
       </p:sp>
       <p:sp>
         <p:nvSpPr>
-          <p:cNvPr id="6" name="Rectangle 5"/>
+          <p:cNvPr id="5" name="Rectangle 4"/>
           <p:cNvSpPr/>
           <p:nvPr/>
         </p:nvSpPr>
@@ -18661,7 +17845,7 @@
       </p:sp>
       <p:sp>
         <p:nvSpPr>
-          <p:cNvPr id="7" name="Rectangle 6"/>
+          <p:cNvPr id="6" name="Rectangle 5"/>
           <p:cNvSpPr/>
           <p:nvPr/>
         </p:nvSpPr>
@@ -18710,7 +17894,7 @@
       </p:sp>
       <p:sp>
         <p:nvSpPr>
-          <p:cNvPr id="8" name="TextBox 7"/>
+          <p:cNvPr id="7" name="TextBox 6"/>
           <p:cNvSpPr txBox="1"/>
           <p:nvPr/>
         </p:nvSpPr>
@@ -18752,7 +17936,7 @@
       </p:sp>
       <p:sp>
         <p:nvSpPr>
-          <p:cNvPr id="9" name="Rectangle 8"/>
+          <p:cNvPr id="8" name="Rectangle 7"/>
           <p:cNvSpPr/>
           <p:nvPr/>
         </p:nvSpPr>
@@ -18801,7 +17985,7 @@
       </p:sp>
       <p:sp>
         <p:nvSpPr>
-          <p:cNvPr id="10" name="Rectangle 9"/>
+          <p:cNvPr id="9" name="Rectangle 8"/>
           <p:cNvSpPr/>
           <p:nvPr/>
         </p:nvSpPr>
@@ -18850,7 +18034,7 @@
       </p:sp>
       <p:sp>
         <p:nvSpPr>
-          <p:cNvPr id="11" name="TextBox 10"/>
+          <p:cNvPr id="10" name="TextBox 9"/>
           <p:cNvSpPr txBox="1"/>
           <p:nvPr/>
         </p:nvSpPr>
@@ -18892,7 +18076,7 @@
       </p:sp>
       <p:sp>
         <p:nvSpPr>
-          <p:cNvPr id="12" name="TextBox 11"/>
+          <p:cNvPr id="11" name="TextBox 10"/>
           <p:cNvSpPr txBox="1"/>
           <p:nvPr/>
         </p:nvSpPr>
@@ -18934,7 +18118,7 @@
       </p:sp>
       <p:sp>
         <p:nvSpPr>
-          <p:cNvPr id="13" name="Rectangle 12"/>
+          <p:cNvPr id="12" name="Rectangle 11"/>
           <p:cNvSpPr/>
           <p:nvPr/>
         </p:nvSpPr>
@@ -18983,7 +18167,7 @@
       </p:sp>
       <p:sp>
         <p:nvSpPr>
-          <p:cNvPr id="14" name="Rectangle 13"/>
+          <p:cNvPr id="13" name="Rectangle 12"/>
           <p:cNvSpPr/>
           <p:nvPr/>
         </p:nvSpPr>
@@ -19032,7 +18216,7 @@
       </p:sp>
       <p:sp>
         <p:nvSpPr>
-          <p:cNvPr id="15" name="TextBox 14"/>
+          <p:cNvPr id="14" name="TextBox 13"/>
           <p:cNvSpPr txBox="1"/>
           <p:nvPr/>
         </p:nvSpPr>
@@ -19074,7 +18258,7 @@
       </p:sp>
       <p:sp>
         <p:nvSpPr>
-          <p:cNvPr id="16" name="TextBox 15"/>
+          <p:cNvPr id="15" name="TextBox 14"/>
           <p:cNvSpPr txBox="1"/>
           <p:nvPr/>
         </p:nvSpPr>
@@ -19109,14 +18293,14 @@
               <a:rPr>
                 <a:latin typeface="Inter"/>
               </a:rPr>
-              <a:t>Not available — regulatory detail was not included in the reviewed evidence [S1].</a:t>
-            </a:r>
-          </a:p>
-        </p:txBody>
-      </p:sp>
-      <p:sp>
-        <p:nvSpPr>
-          <p:cNvPr id="17" name="Rectangle 16"/>
+              <a:t>Regulatory detail was not included in the reviewed evidence [S1].</a:t>
+            </a:r>
+          </a:p>
+        </p:txBody>
+      </p:sp>
+      <p:sp>
+        <p:nvSpPr>
+          <p:cNvPr id="16" name="Rectangle 15"/>
           <p:cNvSpPr/>
           <p:nvPr/>
         </p:nvSpPr>
@@ -19165,7 +18349,7 @@
       </p:sp>
       <p:sp>
         <p:nvSpPr>
-          <p:cNvPr id="18" name="Rectangle 17"/>
+          <p:cNvPr id="17" name="Rectangle 16"/>
           <p:cNvSpPr/>
           <p:nvPr/>
         </p:nvSpPr>
@@ -19214,7 +18398,7 @@
       </p:sp>
       <p:sp>
         <p:nvSpPr>
-          <p:cNvPr id="19" name="TextBox 18"/>
+          <p:cNvPr id="18" name="TextBox 17"/>
           <p:cNvSpPr txBox="1"/>
           <p:nvPr/>
         </p:nvSpPr>
@@ -19256,7 +18440,7 @@
       </p:sp>
       <p:sp>
         <p:nvSpPr>
-          <p:cNvPr id="20" name="TextBox 19"/>
+          <p:cNvPr id="19" name="TextBox 18"/>
           <p:cNvSpPr txBox="1"/>
           <p:nvPr/>
         </p:nvSpPr>
@@ -19298,7 +18482,7 @@
       </p:sp>
       <p:sp>
         <p:nvSpPr>
-          <p:cNvPr id="21" name="Rectangle 20"/>
+          <p:cNvPr id="20" name="Rectangle 19"/>
           <p:cNvSpPr/>
           <p:nvPr/>
         </p:nvSpPr>
@@ -19347,7 +18531,7 @@
       </p:sp>
       <p:sp>
         <p:nvSpPr>
-          <p:cNvPr id="22" name="TextBox 21"/>
+          <p:cNvPr id="21" name="TextBox 20"/>
           <p:cNvSpPr txBox="1"/>
           <p:nvPr/>
         </p:nvSpPr>
@@ -19389,7 +18573,7 @@
       </p:sp>
       <p:sp>
         <p:nvSpPr>
-          <p:cNvPr id="23" name="TextBox 22"/>
+          <p:cNvPr id="22" name="TextBox 21"/>
           <p:cNvSpPr txBox="1"/>
           <p:nvPr/>
         </p:nvSpPr>
@@ -19431,7 +18615,7 @@
       </p:sp>
       <p:sp>
         <p:nvSpPr>
-          <p:cNvPr id="24" name="TextBox 23"/>
+          <p:cNvPr id="23" name="TextBox 22"/>
           <p:cNvSpPr txBox="1"/>
           <p:nvPr/>
         </p:nvSpPr>
@@ -19547,7 +18731,7 @@
         <p:spPr>
           <a:xfrm>
             <a:off x="640080" y="329184"/>
-            <a:ext cx="5303520" cy="182880"/>
+            <a:ext cx="9875520" cy="182880"/>
           </a:xfrm>
           <a:prstGeom prst="rect">
             <a:avLst/>
@@ -19588,48 +18772,6 @@
         </p:nvSpPr>
         <p:spPr>
           <a:xfrm>
-            <a:off x="5897880" y="310896"/>
-            <a:ext cx="4800600" cy="256032"/>
-          </a:xfrm>
-          <a:prstGeom prst="rect">
-            <a:avLst/>
-          </a:prstGeom>
-          <a:noFill/>
-        </p:spPr>
-        <p:txBody>
-          <a:bodyPr wrap="none" lIns="9144" rIns="9144" tIns="9144" bIns="9144" anchor="t">
-            <a:spAutoFit/>
-          </a:bodyPr>
-          <a:lstStyle/>
-          <a:p>
-            <a:pPr algn="r">
-              <a:spcAft>
-                <a:spcPts val="0"/>
-              </a:spcAft>
-              <a:defRPr sz="680" b="1">
-                <a:solidFill>
-                  <a:srgbClr val="4F6B00"/>
-                </a:solidFill>
-                <a:latin typeface="Inter"/>
-              </a:defRPr>
-            </a:pPr>
-            <a:r>
-              <a:rPr>
-                <a:latin typeface="Inter"/>
-              </a:rPr>
-              <a:t>Illustrative, Gradient Maintained — demo data, not the client's holdings or managers</a:t>
-            </a:r>
-          </a:p>
-        </p:txBody>
-      </p:sp>
-      <p:sp>
-        <p:nvSpPr>
-          <p:cNvPr id="5" name="TextBox 4"/>
-          <p:cNvSpPr txBox="1"/>
-          <p:nvPr/>
-        </p:nvSpPr>
-        <p:spPr>
-          <a:xfrm>
             <a:off x="640080" y="566928"/>
             <a:ext cx="10058400" cy="530352"/>
           </a:xfrm>
@@ -19666,7 +18808,7 @@
       </p:sp>
       <p:sp>
         <p:nvSpPr>
-          <p:cNvPr id="6" name="Rectangle 5"/>
+          <p:cNvPr id="5" name="Rectangle 4"/>
           <p:cNvSpPr/>
           <p:nvPr/>
         </p:nvSpPr>
@@ -19715,7 +18857,7 @@
       </p:sp>
       <p:sp>
         <p:nvSpPr>
-          <p:cNvPr id="7" name="Rectangle 6"/>
+          <p:cNvPr id="6" name="Rectangle 5"/>
           <p:cNvSpPr/>
           <p:nvPr/>
         </p:nvSpPr>
@@ -19764,7 +18906,7 @@
       </p:sp>
       <p:sp>
         <p:nvSpPr>
-          <p:cNvPr id="8" name="TextBox 7"/>
+          <p:cNvPr id="7" name="TextBox 6"/>
           <p:cNvSpPr txBox="1"/>
           <p:nvPr/>
         </p:nvSpPr>
@@ -19806,7 +18948,7 @@
       </p:sp>
       <p:graphicFrame>
         <p:nvGraphicFramePr>
-          <p:cNvPr id="9" name="Chart 8"/>
+          <p:cNvPr id="8" name="Chart 7"/>
           <p:cNvGraphicFramePr>
             <a:graphicFrameLocks noGrp="1"/>
           </p:cNvGraphicFramePr>
@@ -19824,7 +18966,7 @@
       </p:graphicFrame>
       <p:sp>
         <p:nvSpPr>
-          <p:cNvPr id="10" name="Rectangle 9"/>
+          <p:cNvPr id="9" name="Rectangle 8"/>
           <p:cNvSpPr/>
           <p:nvPr/>
         </p:nvSpPr>
@@ -19873,7 +19015,7 @@
       </p:sp>
       <p:sp>
         <p:nvSpPr>
-          <p:cNvPr id="11" name="TextBox 10"/>
+          <p:cNvPr id="10" name="TextBox 9"/>
           <p:cNvSpPr txBox="1"/>
           <p:nvPr/>
         </p:nvSpPr>
@@ -19915,7 +19057,7 @@
       </p:sp>
       <p:sp>
         <p:nvSpPr>
-          <p:cNvPr id="12" name="TextBox 11"/>
+          <p:cNvPr id="11" name="TextBox 10"/>
           <p:cNvSpPr txBox="1"/>
           <p:nvPr/>
         </p:nvSpPr>
@@ -19957,7 +19099,7 @@
       </p:sp>
       <p:sp>
         <p:nvSpPr>
-          <p:cNvPr id="13" name="TextBox 12"/>
+          <p:cNvPr id="12" name="TextBox 11"/>
           <p:cNvSpPr txBox="1"/>
           <p:nvPr/>
         </p:nvSpPr>

--- a/plugins/gradient-cio/assets/examples/gradient-odd-report.pptx
+++ b/plugins/gradient-cio/assets/examples/gradient-odd-report.pptx
@@ -19,8 +19,6 @@
     <ns0:sldId id="267" ns1:id="rId18"/>
     <ns0:sldId id="268" ns1:id="rId19"/>
     <ns0:sldId id="269" ns1:id="rId20"/>
-    <ns0:sldId id="270" ns1:id="rId21"/>
-    <ns0:sldId id="271" ns1:id="rId22"/>
   </ns0:sldIdLst>
   <ns0:sldSz cx="12191695" cy="6858000" type="screen16x9"/>
   <ns0:notesSz cx="6858000" cy="9144000"/>
@@ -4801,7 +4799,7 @@
               <a:rPr>
                 <a:latin typeface="Inter"/>
               </a:rPr>
-              <a:t>GRADIENT COHORT ANALYTICS · 587 ADVISERS</a:t>
+              <a:t>SERVICE-PROVIDER EVIDENCE REMAINS INCOMPLETE</a:t>
             </a:r>
           </a:p>
         </p:txBody>
@@ -4885,7 +4883,7 @@
               <a:rPr>
                 <a:latin typeface="Inter"/>
               </a:rPr>
-              <a:t>Peer positioning — continued</a:t>
+              <a:t>Fund operations &amp; service providers</a:t>
             </a:r>
           </a:p>
         </p:txBody>
@@ -5025,7 +5023,7 @@
               <a:rPr>
                 <a:latin typeface="Inter"/>
               </a:rPr>
-              <a:t>04</a:t>
+              <a:t>05</a:t>
             </a:r>
           </a:p>
         </p:txBody>
@@ -5039,7 +5037,7 @@
         <p:spPr>
           <a:xfrm>
             <a:off x="640080" y="1325880"/>
-            <a:ext cx="10908792" cy="4892040"/>
+            <a:ext cx="10908792" cy="1444632"/>
           </a:xfrm>
           <a:prstGeom prst="rect">
             <a:avLst/>
@@ -5088,7 +5086,7 @@
         <p:spPr>
           <a:xfrm>
             <a:off x="640080" y="1325880"/>
-            <a:ext cx="54864" cy="4892040"/>
+            <a:ext cx="54864" cy="1444632"/>
           </a:xfrm>
           <a:prstGeom prst="rect">
             <a:avLst/>
@@ -5165,7 +5163,7 @@
               <a:rPr>
                 <a:latin typeface="Inter"/>
               </a:rPr>
-              <a:t>Analysis — Percentiles do not close gaps</a:t>
+              <a:t>Service-provider evidence unavailable</a:t>
             </a:r>
           </a:p>
         </p:txBody>
@@ -5179,7 +5177,7 @@
         <p:spPr>
           <a:xfrm>
             <a:off x="804671" y="1719072"/>
-            <a:ext cx="10616184" cy="4407408"/>
+            <a:ext cx="10616184" cy="960000"/>
           </a:xfrm>
           <a:prstGeom prst="rect">
             <a:avLst/>
@@ -5207,7 +5205,7 @@
               <a:rPr>
                 <a:latin typeface="Inter"/>
               </a:rPr>
-              <a:t>Observation: No pillar reaches the 75th percentile, while events remain unavailable [S1]. Why it matters: Moderate peer positioning does not override unresolved findings. Uncertainty: Gradient-selected cohort coverage may…</a:t>
+              <a:t>Not available — the reviewed evidence does not include administrator, auditor or custodian rows [S1].</a:t>
             </a:r>
           </a:p>
         </p:txBody>
@@ -5215,6 +5213,370 @@
       <p:sp>
         <p:nvSpPr>
           <p:cNvPr id="13" name="Rectangle 12"/>
+          <p:cNvSpPr/>
+          <p:nvPr/>
+        </p:nvSpPr>
+        <p:spPr>
+          <a:xfrm>
+            <a:off x="640080" y="2880240"/>
+            <a:ext cx="10908792" cy="1444632"/>
+          </a:xfrm>
+          <a:prstGeom prst="rect">
+            <a:avLst/>
+          </a:prstGeom>
+          <a:solidFill>
+            <a:srgbClr val="F5F7F9"/>
+          </a:solidFill>
+          <a:ln>
+            <a:solidFill>
+              <a:srgbClr val="E3E7EC"/>
+            </a:solidFill>
+          </a:ln>
+        </p:spPr>
+        <p:style>
+          <a:lnRef idx="1">
+            <a:schemeClr val="accent1"/>
+          </a:lnRef>
+          <a:fillRef idx="3">
+            <a:schemeClr val="accent1"/>
+          </a:fillRef>
+          <a:effectRef idx="2">
+            <a:schemeClr val="accent1"/>
+          </a:effectRef>
+          <a:fontRef idx="minor">
+            <a:schemeClr val="lt1"/>
+          </a:fontRef>
+        </p:style>
+        <p:txBody>
+          <a:bodyPr rtlCol="0" anchor="ctr"/>
+          <a:lstStyle/>
+          <a:p>
+            <a:pPr algn="ctr">
+              <a:defRPr>
+                <a:latin typeface="Inter"/>
+              </a:defRPr>
+            </a:pPr>
+          </a:p>
+        </p:txBody>
+      </p:sp>
+      <p:sp>
+        <p:nvSpPr>
+          <p:cNvPr id="14" name="Rectangle 13"/>
+          <p:cNvSpPr/>
+          <p:nvPr/>
+        </p:nvSpPr>
+        <p:spPr>
+          <a:xfrm>
+            <a:off x="640080" y="2880240"/>
+            <a:ext cx="54864" cy="1444632"/>
+          </a:xfrm>
+          <a:prstGeom prst="rect">
+            <a:avLst/>
+          </a:prstGeom>
+          <a:solidFill>
+            <a:srgbClr val="0D1117"/>
+          </a:solidFill>
+          <a:ln>
+            <a:solidFill>
+              <a:srgbClr val="0D1117"/>
+            </a:solidFill>
+          </a:ln>
+        </p:spPr>
+        <p:style>
+          <a:lnRef idx="1">
+            <a:schemeClr val="accent1"/>
+          </a:lnRef>
+          <a:fillRef idx="3">
+            <a:schemeClr val="accent1"/>
+          </a:fillRef>
+          <a:effectRef idx="2">
+            <a:schemeClr val="accent1"/>
+          </a:effectRef>
+          <a:fontRef idx="minor">
+            <a:schemeClr val="lt1"/>
+          </a:fontRef>
+        </p:style>
+        <p:txBody>
+          <a:bodyPr rtlCol="0" anchor="ctr"/>
+          <a:lstStyle/>
+          <a:p>
+            <a:pPr algn="ctr">
+              <a:defRPr>
+                <a:latin typeface="Inter"/>
+              </a:defRPr>
+            </a:pPr>
+          </a:p>
+        </p:txBody>
+      </p:sp>
+      <p:sp>
+        <p:nvSpPr>
+          <p:cNvPr id="15" name="TextBox 14"/>
+          <p:cNvSpPr txBox="1"/>
+          <p:nvPr/>
+        </p:nvSpPr>
+        <p:spPr>
+          <a:xfrm>
+            <a:off x="804671" y="2989968"/>
+            <a:ext cx="10616184" cy="228600"/>
+          </a:xfrm>
+          <a:prstGeom prst="rect">
+            <a:avLst/>
+          </a:prstGeom>
+          <a:noFill/>
+        </p:spPr>
+        <p:txBody>
+          <a:bodyPr wrap="none" lIns="9144" rIns="9144" tIns="9144" bIns="9144" anchor="t">
+            <a:spAutoFit/>
+          </a:bodyPr>
+          <a:lstStyle/>
+          <a:p>
+            <a:pPr algn="l">
+              <a:spcAft>
+                <a:spcPts val="0"/>
+              </a:spcAft>
+              <a:defRPr sz="1000" b="1">
+                <a:solidFill>
+                  <a:srgbClr val="0D1117"/>
+                </a:solidFill>
+                <a:latin typeface="Inter"/>
+              </a:defRPr>
+            </a:pPr>
+            <a:r>
+              <a:rPr>
+                <a:latin typeface="Inter"/>
+              </a:rPr>
+              <a:t>Not available</a:t>
+            </a:r>
+          </a:p>
+        </p:txBody>
+      </p:sp>
+      <p:sp>
+        <p:nvSpPr>
+          <p:cNvPr id="16" name="TextBox 15"/>
+          <p:cNvSpPr txBox="1"/>
+          <p:nvPr/>
+        </p:nvSpPr>
+        <p:spPr>
+          <a:xfrm>
+            <a:off x="804671" y="3273432"/>
+            <a:ext cx="10616184" cy="960000"/>
+          </a:xfrm>
+          <a:prstGeom prst="rect">
+            <a:avLst/>
+          </a:prstGeom>
+          <a:noFill/>
+        </p:spPr>
+        <p:txBody>
+          <a:bodyPr wrap="none" lIns="9144" rIns="9144" tIns="9144" bIns="9144" anchor="t">
+            <a:spAutoFit/>
+          </a:bodyPr>
+          <a:lstStyle/>
+          <a:p>
+            <a:pPr algn="l">
+              <a:spcAft>
+                <a:spcPts val="0"/>
+              </a:spcAft>
+              <a:defRPr sz="950" b="0">
+                <a:solidFill>
+                  <a:srgbClr val="4A5563"/>
+                </a:solidFill>
+                <a:latin typeface="Inter"/>
+              </a:defRPr>
+            </a:pPr>
+            <a:r>
+              <a:rPr>
+                <a:latin typeface="Inter"/>
+              </a:rPr>
+              <a:t>Not available — fund-operations detail was not included in the reviewed evidence [S1].</a:t>
+            </a:r>
+          </a:p>
+        </p:txBody>
+      </p:sp>
+      <p:sp>
+        <p:nvSpPr>
+          <p:cNvPr id="17" name="Rectangle 16"/>
+          <p:cNvSpPr/>
+          <p:nvPr/>
+        </p:nvSpPr>
+        <p:spPr>
+          <a:xfrm>
+            <a:off x="640080" y="4434601"/>
+            <a:ext cx="10908792" cy="1783318"/>
+          </a:xfrm>
+          <a:prstGeom prst="rect">
+            <a:avLst/>
+          </a:prstGeom>
+          <a:solidFill>
+            <a:srgbClr val="F5F7F9"/>
+          </a:solidFill>
+          <a:ln>
+            <a:solidFill>
+              <a:srgbClr val="E3E7EC"/>
+            </a:solidFill>
+          </a:ln>
+        </p:spPr>
+        <p:style>
+          <a:lnRef idx="1">
+            <a:schemeClr val="accent1"/>
+          </a:lnRef>
+          <a:fillRef idx="3">
+            <a:schemeClr val="accent1"/>
+          </a:fillRef>
+          <a:effectRef idx="2">
+            <a:schemeClr val="accent1"/>
+          </a:effectRef>
+          <a:fontRef idx="minor">
+            <a:schemeClr val="lt1"/>
+          </a:fontRef>
+        </p:style>
+        <p:txBody>
+          <a:bodyPr rtlCol="0" anchor="ctr"/>
+          <a:lstStyle/>
+          <a:p>
+            <a:pPr algn="ctr">
+              <a:defRPr>
+                <a:latin typeface="Inter"/>
+              </a:defRPr>
+            </a:pPr>
+          </a:p>
+        </p:txBody>
+      </p:sp>
+      <p:sp>
+        <p:nvSpPr>
+          <p:cNvPr id="18" name="Rectangle 17"/>
+          <p:cNvSpPr/>
+          <p:nvPr/>
+        </p:nvSpPr>
+        <p:spPr>
+          <a:xfrm>
+            <a:off x="640080" y="4434601"/>
+            <a:ext cx="54864" cy="1783318"/>
+          </a:xfrm>
+          <a:prstGeom prst="rect">
+            <a:avLst/>
+          </a:prstGeom>
+          <a:solidFill>
+            <a:srgbClr val="F2A93B"/>
+          </a:solidFill>
+          <a:ln>
+            <a:solidFill>
+              <a:srgbClr val="F2A93B"/>
+            </a:solidFill>
+          </a:ln>
+        </p:spPr>
+        <p:style>
+          <a:lnRef idx="1">
+            <a:schemeClr val="accent1"/>
+          </a:lnRef>
+          <a:fillRef idx="3">
+            <a:schemeClr val="accent1"/>
+          </a:fillRef>
+          <a:effectRef idx="2">
+            <a:schemeClr val="accent1"/>
+          </a:effectRef>
+          <a:fontRef idx="minor">
+            <a:schemeClr val="lt1"/>
+          </a:fontRef>
+        </p:style>
+        <p:txBody>
+          <a:bodyPr rtlCol="0" anchor="ctr"/>
+          <a:lstStyle/>
+          <a:p>
+            <a:pPr algn="ctr">
+              <a:defRPr>
+                <a:latin typeface="Inter"/>
+              </a:defRPr>
+            </a:pPr>
+          </a:p>
+        </p:txBody>
+      </p:sp>
+      <p:sp>
+        <p:nvSpPr>
+          <p:cNvPr id="19" name="TextBox 18"/>
+          <p:cNvSpPr txBox="1"/>
+          <p:nvPr/>
+        </p:nvSpPr>
+        <p:spPr>
+          <a:xfrm>
+            <a:off x="804671" y="4544329"/>
+            <a:ext cx="10616184" cy="228600"/>
+          </a:xfrm>
+          <a:prstGeom prst="rect">
+            <a:avLst/>
+          </a:prstGeom>
+          <a:noFill/>
+        </p:spPr>
+        <p:txBody>
+          <a:bodyPr wrap="none" lIns="9144" rIns="9144" tIns="9144" bIns="9144" anchor="t">
+            <a:spAutoFit/>
+          </a:bodyPr>
+          <a:lstStyle/>
+          <a:p>
+            <a:pPr algn="l">
+              <a:spcAft>
+                <a:spcPts val="0"/>
+              </a:spcAft>
+              <a:defRPr sz="1000" b="1">
+                <a:solidFill>
+                  <a:srgbClr val="0D1117"/>
+                </a:solidFill>
+                <a:latin typeface="Inter"/>
+              </a:defRPr>
+            </a:pPr>
+            <a:r>
+              <a:rPr>
+                <a:latin typeface="Inter"/>
+              </a:rPr>
+              <a:t>Analysis — Fund operations are not yet corroborated</a:t>
+            </a:r>
+          </a:p>
+        </p:txBody>
+      </p:sp>
+      <p:sp>
+        <p:nvSpPr>
+          <p:cNvPr id="20" name="TextBox 19"/>
+          <p:cNvSpPr txBox="1"/>
+          <p:nvPr/>
+        </p:nvSpPr>
+        <p:spPr>
+          <a:xfrm>
+            <a:off x="804671" y="4827793"/>
+            <a:ext cx="10616184" cy="1298686"/>
+          </a:xfrm>
+          <a:prstGeom prst="rect">
+            <a:avLst/>
+          </a:prstGeom>
+          <a:noFill/>
+        </p:spPr>
+        <p:txBody>
+          <a:bodyPr wrap="none" lIns="9144" rIns="9144" tIns="9144" bIns="9144" anchor="t">
+            <a:spAutoFit/>
+          </a:bodyPr>
+          <a:lstStyle/>
+          <a:p>
+            <a:pPr algn="l">
+              <a:spcAft>
+                <a:spcPts val="0"/>
+              </a:spcAft>
+              <a:defRPr sz="950" b="0">
+                <a:solidFill>
+                  <a:srgbClr val="4A5563"/>
+                </a:solidFill>
+                <a:latin typeface="Inter"/>
+              </a:defRPr>
+            </a:pPr>
+            <a:r>
+              <a:rPr>
+                <a:latin typeface="Inter"/>
+              </a:rPr>
+              <a:t>Observation: Zero fund-level provider records appear in the reviewed evidence [S1]. Why it matters: Independence among operating parties cannot yet be assessed. Uncertainty: Missing provider coverage is not…</a:t>
+            </a:r>
+          </a:p>
+        </p:txBody>
+      </p:sp>
+      <p:sp>
+        <p:nvSpPr>
+          <p:cNvPr id="21" name="Rectangle 20"/>
           <p:cNvSpPr/>
           <p:nvPr/>
         </p:nvSpPr>
@@ -5263,7 +5625,7 @@
       </p:sp>
       <p:sp>
         <p:nvSpPr>
-          <p:cNvPr id="14" name="TextBox 13"/>
+          <p:cNvPr id="22" name="TextBox 21"/>
           <p:cNvSpPr txBox="1"/>
           <p:nvPr/>
         </p:nvSpPr>
@@ -5305,7 +5667,7 @@
       </p:sp>
       <p:sp>
         <p:nvSpPr>
-          <p:cNvPr id="15" name="TextBox 14"/>
+          <p:cNvPr id="23" name="TextBox 22"/>
           <p:cNvSpPr txBox="1"/>
           <p:nvPr/>
         </p:nvSpPr>
@@ -5347,7 +5709,7 @@
       </p:sp>
       <p:sp>
         <p:nvSpPr>
-          <p:cNvPr id="16" name="TextBox 15"/>
+          <p:cNvPr id="24" name="TextBox 23"/>
           <p:cNvSpPr txBox="1"/>
           <p:nvPr/>
         </p:nvSpPr>
@@ -5491,7 +5853,7 @@
               <a:rPr>
                 <a:latin typeface="Inter"/>
               </a:rPr>
-              <a:t>SERVICE-PROVIDER EVIDENCE REMAINS INCOMPLETE</a:t>
+              <a:t>LAGGED HOLDINGS PROVIDE A PARTIAL CONCENTRATION LENS</a:t>
             </a:r>
           </a:p>
         </p:txBody>
@@ -5575,7 +5937,7 @@
               <a:rPr>
                 <a:latin typeface="Inter"/>
               </a:rPr>
-              <a:t>Fund operations &amp; service providers</a:t>
+              <a:t>Reported equity holdings (Form 13F)</a:t>
             </a:r>
           </a:p>
         </p:txBody>
@@ -5715,7 +6077,7 @@
               <a:rPr>
                 <a:latin typeface="Inter"/>
               </a:rPr>
-              <a:t>05</a:t>
+              <a:t>06</a:t>
             </a:r>
           </a:p>
         </p:txBody>
@@ -5729,7 +6091,7 @@
         <p:spPr>
           <a:xfrm>
             <a:off x="640080" y="1325880"/>
-            <a:ext cx="10908792" cy="1301067"/>
+            <a:ext cx="10908792" cy="1444632"/>
           </a:xfrm>
           <a:prstGeom prst="rect">
             <a:avLst/>
@@ -5778,7 +6140,7 @@
         <p:spPr>
           <a:xfrm>
             <a:off x="640080" y="1325880"/>
-            <a:ext cx="54864" cy="1301067"/>
+            <a:ext cx="54864" cy="1444632"/>
           </a:xfrm>
           <a:prstGeom prst="rect">
             <a:avLst/>
@@ -5855,7 +6217,7 @@
               <a:rPr>
                 <a:latin typeface="Inter"/>
               </a:rPr>
-              <a:t>Service-provider evidence unavailable</a:t>
+              <a:t>Holding rows unavailable</a:t>
             </a:r>
           </a:p>
         </p:txBody>
@@ -5869,7 +6231,7 @@
         <p:spPr>
           <a:xfrm>
             <a:off x="804671" y="1719072"/>
-            <a:ext cx="10616184" cy="816435"/>
+            <a:ext cx="10616184" cy="960000"/>
           </a:xfrm>
           <a:prstGeom prst="rect">
             <a:avLst/>
@@ -5897,7 +6259,7 @@
               <a:rPr>
                 <a:latin typeface="Inter"/>
               </a:rPr>
-              <a:t>Not available — the reviewed evidence does not include administrator, auditor or custodian rows [S1].</a:t>
+              <a:t>Not available — the governed Form 13F snapshot is present, but its holding rows are unavailable [S3].</a:t>
             </a:r>
           </a:p>
         </p:txBody>
@@ -5910,8 +6272,8 @@
         </p:nvSpPr>
         <p:spPr>
           <a:xfrm>
-            <a:off x="640080" y="2736675"/>
-            <a:ext cx="10908792" cy="1301067"/>
+            <a:off x="640080" y="2880240"/>
+            <a:ext cx="10908792" cy="1444632"/>
           </a:xfrm>
           <a:prstGeom prst="rect">
             <a:avLst/>
@@ -5959,8 +6321,8 @@
         </p:nvSpPr>
         <p:spPr>
           <a:xfrm>
-            <a:off x="640080" y="2736675"/>
-            <a:ext cx="54864" cy="1301067"/>
+            <a:off x="640080" y="2880240"/>
+            <a:ext cx="54864" cy="1444632"/>
           </a:xfrm>
           <a:prstGeom prst="rect">
             <a:avLst/>
@@ -6008,7 +6370,7 @@
         </p:nvSpPr>
         <p:spPr>
           <a:xfrm>
-            <a:off x="804671" y="2846403"/>
+            <a:off x="804671" y="2989968"/>
             <a:ext cx="10616184" cy="228600"/>
           </a:xfrm>
           <a:prstGeom prst="rect">
@@ -6050,8 +6412,8 @@
         </p:nvSpPr>
         <p:spPr>
           <a:xfrm>
-            <a:off x="804671" y="3129867"/>
-            <a:ext cx="10616184" cy="816435"/>
+            <a:off x="804671" y="3273432"/>
+            <a:ext cx="10616184" cy="960000"/>
           </a:xfrm>
           <a:prstGeom prst="rect">
             <a:avLst/>
@@ -6079,7 +6441,7 @@
               <a:rPr>
                 <a:latin typeface="Inter"/>
               </a:rPr>
-              <a:t>Not available — fund-operations detail was not included in the reviewed evidence [S1].</a:t>
+              <a:t>Not available — holding rows were not included in the reviewed evidence [S3].</a:t>
             </a:r>
           </a:p>
         </p:txBody>
@@ -6092,8 +6454,8 @@
         </p:nvSpPr>
         <p:spPr>
           <a:xfrm>
-            <a:off x="640080" y="4147471"/>
-            <a:ext cx="10908792" cy="2070448"/>
+            <a:off x="640080" y="4434601"/>
+            <a:ext cx="10908792" cy="1783318"/>
           </a:xfrm>
           <a:prstGeom prst="rect">
             <a:avLst/>
@@ -6141,18 +6503,18 @@
         </p:nvSpPr>
         <p:spPr>
           <a:xfrm>
-            <a:off x="640080" y="4147471"/>
-            <a:ext cx="54864" cy="2070448"/>
+            <a:off x="640080" y="4434601"/>
+            <a:ext cx="54864" cy="1783318"/>
           </a:xfrm>
           <a:prstGeom prst="rect">
             <a:avLst/>
           </a:prstGeom>
           <a:solidFill>
-            <a:srgbClr val="F2A93B"/>
+            <a:srgbClr val="0D1117"/>
           </a:solidFill>
           <a:ln>
             <a:solidFill>
-              <a:srgbClr val="F2A93B"/>
+              <a:srgbClr val="0D1117"/>
             </a:solidFill>
           </a:ln>
         </p:spPr>
@@ -6190,7 +6552,7 @@
         </p:nvSpPr>
         <p:spPr>
           <a:xfrm>
-            <a:off x="804671" y="4257199"/>
+            <a:off x="804671" y="4544329"/>
             <a:ext cx="10616184" cy="228600"/>
           </a:xfrm>
           <a:prstGeom prst="rect">
@@ -6219,7 +6581,7 @@
               <a:rPr>
                 <a:latin typeface="Inter"/>
               </a:rPr>
-              <a:t>Analysis — Fund operations are not yet corroborated</a:t>
+              <a:t>Analysis — Holdings evidence remains partial</a:t>
             </a:r>
           </a:p>
         </p:txBody>
@@ -6232,8 +6594,8 @@
         </p:nvSpPr>
         <p:spPr>
           <a:xfrm>
-            <a:off x="804671" y="4540663"/>
-            <a:ext cx="10616184" cy="1585816"/>
+            <a:off x="804671" y="4827793"/>
+            <a:ext cx="10616184" cy="1298686"/>
           </a:xfrm>
           <a:prstGeom prst="rect">
             <a:avLst/>
@@ -6261,7 +6623,7 @@
               <a:rPr>
                 <a:latin typeface="Inter"/>
               </a:rPr>
-              <a:t>Observation: Zero fund-level provider records appear in the reviewed evidence [S1]. Why it matters: Independence among operating parties cannot yet be assessed. Uncertainty: Missing provider coverage is not…</a:t>
+              <a:t>Observation: One Form 13F snapshot exists, but its holding rows are unavailable [S3]. Why it matters: Concentration cannot be interpreted from the summary alone. Uncertainty: Form 13F coverage…</a:t>
             </a:r>
           </a:p>
         </p:txBody>
@@ -6352,7 +6714,7 @@
               <a:rPr>
                 <a:latin typeface="Inter"/>
               </a:rPr>
-              <a:t>Sources: S1</a:t>
+              <a:t>Sources: S3</a:t>
             </a:r>
           </a:p>
         </p:txBody>
@@ -6545,7 +6907,7 @@
               <a:rPr>
                 <a:latin typeface="Inter"/>
               </a:rPr>
-              <a:t>LAGGED HOLDINGS PROVIDE A PARTIAL CONCENTRATION LENS</a:t>
+              <a:t>OPEN EVIDENCE GAPS DEFINE THE NEXT DILIGENCE WORK</a:t>
             </a:r>
           </a:p>
         </p:txBody>
@@ -6629,7 +6991,7 @@
               <a:rPr>
                 <a:latin typeface="Inter"/>
               </a:rPr>
-              <a:t>Reported equity holdings (Form 13F)</a:t>
+              <a:t>Monitoring, findings &amp; DDQ</a:t>
             </a:r>
           </a:p>
         </p:txBody>
@@ -6769,21 +7131,637 @@
               <a:rPr>
                 <a:latin typeface="Inter"/>
               </a:rPr>
-              <a:t>06</a:t>
-            </a:r>
-          </a:p>
-        </p:txBody>
-      </p:sp>
-      <p:sp>
-        <p:nvSpPr>
-          <p:cNvPr id="9" name="Rectangle 8"/>
+              <a:t>07</a:t>
+            </a:r>
+          </a:p>
+        </p:txBody>
+      </p:sp>
+      <p:sp>
+        <p:nvSpPr>
+          <p:cNvPr id="9" name="TextBox 8"/>
+          <p:cNvSpPr txBox="1"/>
+          <p:nvPr/>
+        </p:nvSpPr>
+        <p:spPr>
+          <a:xfrm>
+            <a:off x="640080" y="1325880"/>
+            <a:ext cx="10908792" cy="201168"/>
+          </a:xfrm>
+          <a:prstGeom prst="rect">
+            <a:avLst/>
+          </a:prstGeom>
+          <a:noFill/>
+        </p:spPr>
+        <p:txBody>
+          <a:bodyPr wrap="none" lIns="9144" rIns="9144" tIns="9144" bIns="9144" anchor="t">
+            <a:spAutoFit/>
+          </a:bodyPr>
+          <a:lstStyle/>
+          <a:p>
+            <a:pPr algn="l">
+              <a:spcAft>
+                <a:spcPts val="0"/>
+              </a:spcAft>
+              <a:defRPr sz="720" b="1">
+                <a:solidFill>
+                  <a:srgbClr val="4A5563"/>
+                </a:solidFill>
+                <a:latin typeface="Inter"/>
+              </a:defRPr>
+            </a:pPr>
+            <a:r>
+              <a:rPr>
+                <a:latin typeface="Inter"/>
+              </a:rPr>
+              <a:t>GOVERNED EVENT TIMELINE</a:t>
+            </a:r>
+          </a:p>
+        </p:txBody>
+      </p:sp>
+      <p:sp>
+        <p:nvSpPr>
+          <p:cNvPr id="10" name="Rectangle 9"/>
           <p:cNvSpPr/>
           <p:nvPr/>
         </p:nvSpPr>
         <p:spPr>
           <a:xfrm>
-            <a:off x="640080" y="1325880"/>
-            <a:ext cx="10908792" cy="1340548"/>
+            <a:off x="1874519" y="1673352"/>
+            <a:ext cx="22860" cy="2756153"/>
+          </a:xfrm>
+          <a:prstGeom prst="rect">
+            <a:avLst/>
+          </a:prstGeom>
+          <a:solidFill>
+            <a:srgbClr val="E3E7EC"/>
+          </a:solidFill>
+          <a:ln>
+            <a:solidFill>
+              <a:srgbClr val="E3E7EC"/>
+            </a:solidFill>
+          </a:ln>
+        </p:spPr>
+        <p:style>
+          <a:lnRef idx="1">
+            <a:schemeClr val="accent1"/>
+          </a:lnRef>
+          <a:fillRef idx="3">
+            <a:schemeClr val="accent1"/>
+          </a:fillRef>
+          <a:effectRef idx="2">
+            <a:schemeClr val="accent1"/>
+          </a:effectRef>
+          <a:fontRef idx="minor">
+            <a:schemeClr val="lt1"/>
+          </a:fontRef>
+        </p:style>
+        <p:txBody>
+          <a:bodyPr rtlCol="0" anchor="ctr"/>
+          <a:lstStyle/>
+          <a:p>
+            <a:pPr algn="ctr">
+              <a:defRPr>
+                <a:latin typeface="Inter"/>
+              </a:defRPr>
+            </a:pPr>
+          </a:p>
+        </p:txBody>
+      </p:sp>
+      <p:sp>
+        <p:nvSpPr>
+          <p:cNvPr id="11" name="Oval 10"/>
+          <p:cNvSpPr/>
+          <p:nvPr/>
+        </p:nvSpPr>
+        <p:spPr>
+          <a:xfrm>
+            <a:off x="1824228" y="1837944"/>
+            <a:ext cx="128016" cy="128016"/>
+          </a:xfrm>
+          <a:prstGeom prst="ellipse">
+            <a:avLst/>
+          </a:prstGeom>
+          <a:solidFill>
+            <a:srgbClr val="0D1117"/>
+          </a:solidFill>
+          <a:ln>
+            <a:solidFill>
+              <a:srgbClr val="FFFFFF"/>
+            </a:solidFill>
+          </a:ln>
+        </p:spPr>
+        <p:style>
+          <a:lnRef idx="1">
+            <a:schemeClr val="accent1"/>
+          </a:lnRef>
+          <a:fillRef idx="3">
+            <a:schemeClr val="accent1"/>
+          </a:fillRef>
+          <a:effectRef idx="2">
+            <a:schemeClr val="accent1"/>
+          </a:effectRef>
+          <a:fontRef idx="minor">
+            <a:schemeClr val="lt1"/>
+          </a:fontRef>
+        </p:style>
+        <p:txBody>
+          <a:bodyPr rtlCol="0" anchor="ctr"/>
+          <a:lstStyle/>
+          <a:p>
+            <a:pPr algn="ctr">
+              <a:defRPr>
+                <a:latin typeface="Inter"/>
+              </a:defRPr>
+            </a:pPr>
+          </a:p>
+        </p:txBody>
+      </p:sp>
+      <p:sp>
+        <p:nvSpPr>
+          <p:cNvPr id="12" name="TextBox 11"/>
+          <p:cNvSpPr txBox="1"/>
+          <p:nvPr/>
+        </p:nvSpPr>
+        <p:spPr>
+          <a:xfrm>
+            <a:off x="640080" y="1673352"/>
+            <a:ext cx="1106424" cy="274320"/>
+          </a:xfrm>
+          <a:prstGeom prst="rect">
+            <a:avLst/>
+          </a:prstGeom>
+          <a:noFill/>
+        </p:spPr>
+        <p:txBody>
+          <a:bodyPr wrap="none" lIns="9144" rIns="9144" tIns="9144" bIns="9144" anchor="t">
+            <a:spAutoFit/>
+          </a:bodyPr>
+          <a:lstStyle/>
+          <a:p>
+            <a:pPr algn="r">
+              <a:spcAft>
+                <a:spcPts val="0"/>
+              </a:spcAft>
+              <a:defRPr sz="750" b="1">
+                <a:solidFill>
+                  <a:srgbClr val="4A5563"/>
+                </a:solidFill>
+                <a:latin typeface="Inter"/>
+              </a:defRPr>
+            </a:pPr>
+            <a:r>
+              <a:rPr>
+                <a:latin typeface="Inter"/>
+              </a:rPr>
+              <a:t>2026-08-14</a:t>
+            </a:r>
+          </a:p>
+        </p:txBody>
+      </p:sp>
+      <p:sp>
+        <p:nvSpPr>
+          <p:cNvPr id="13" name="TextBox 12"/>
+          <p:cNvSpPr txBox="1"/>
+          <p:nvPr/>
+        </p:nvSpPr>
+        <p:spPr>
+          <a:xfrm>
+            <a:off x="2057400" y="1673352"/>
+            <a:ext cx="9491472" cy="256032"/>
+          </a:xfrm>
+          <a:prstGeom prst="rect">
+            <a:avLst/>
+          </a:prstGeom>
+          <a:noFill/>
+        </p:spPr>
+        <p:txBody>
+          <a:bodyPr wrap="none" lIns="9144" rIns="9144" tIns="9144" bIns="9144" anchor="t">
+            <a:spAutoFit/>
+          </a:bodyPr>
+          <a:lstStyle/>
+          <a:p>
+            <a:pPr algn="l">
+              <a:spcAft>
+                <a:spcPts val="0"/>
+              </a:spcAft>
+              <a:defRPr sz="950" b="1">
+                <a:solidFill>
+                  <a:srgbClr val="0D1117"/>
+                </a:solidFill>
+                <a:latin typeface="Inter"/>
+              </a:defRPr>
+            </a:pPr>
+            <a:r>
+              <a:rPr>
+                <a:latin typeface="Inter"/>
+              </a:rPr>
+              <a:t>Form 13F snapshot</a:t>
+            </a:r>
+          </a:p>
+        </p:txBody>
+      </p:sp>
+      <p:sp>
+        <p:nvSpPr>
+          <p:cNvPr id="14" name="TextBox 13"/>
+          <p:cNvSpPr txBox="1"/>
+          <p:nvPr/>
+        </p:nvSpPr>
+        <p:spPr>
+          <a:xfrm>
+            <a:off x="2057400" y="1938528"/>
+            <a:ext cx="9491472" cy="477733"/>
+          </a:xfrm>
+          <a:prstGeom prst="rect">
+            <a:avLst/>
+          </a:prstGeom>
+          <a:noFill/>
+        </p:spPr>
+        <p:txBody>
+          <a:bodyPr wrap="none" lIns="9144" rIns="9144" tIns="9144" bIns="9144" anchor="t">
+            <a:spAutoFit/>
+          </a:bodyPr>
+          <a:lstStyle/>
+          <a:p>
+            <a:pPr algn="l">
+              <a:spcAft>
+                <a:spcPts val="0"/>
+              </a:spcAft>
+              <a:defRPr sz="850" b="0">
+                <a:solidFill>
+                  <a:srgbClr val="4A5563"/>
+                </a:solidFill>
+                <a:latin typeface="Inter"/>
+              </a:defRPr>
+            </a:pPr>
+            <a:r>
+              <a:rPr>
+                <a:latin typeface="Inter"/>
+              </a:rPr>
+              <a:t>Latest available lagged holdings evidence [S3].</a:t>
+            </a:r>
+          </a:p>
+        </p:txBody>
+      </p:sp>
+      <p:sp>
+        <p:nvSpPr>
+          <p:cNvPr id="15" name="Oval 14"/>
+          <p:cNvSpPr/>
+          <p:nvPr/>
+        </p:nvSpPr>
+        <p:spPr>
+          <a:xfrm>
+            <a:off x="1824228" y="2756662"/>
+            <a:ext cx="128016" cy="128016"/>
+          </a:xfrm>
+          <a:prstGeom prst="ellipse">
+            <a:avLst/>
+          </a:prstGeom>
+          <a:solidFill>
+            <a:srgbClr val="C6F432"/>
+          </a:solidFill>
+          <a:ln>
+            <a:solidFill>
+              <a:srgbClr val="FFFFFF"/>
+            </a:solidFill>
+          </a:ln>
+        </p:spPr>
+        <p:style>
+          <a:lnRef idx="1">
+            <a:schemeClr val="accent1"/>
+          </a:lnRef>
+          <a:fillRef idx="3">
+            <a:schemeClr val="accent1"/>
+          </a:fillRef>
+          <a:effectRef idx="2">
+            <a:schemeClr val="accent1"/>
+          </a:effectRef>
+          <a:fontRef idx="minor">
+            <a:schemeClr val="lt1"/>
+          </a:fontRef>
+        </p:style>
+        <p:txBody>
+          <a:bodyPr rtlCol="0" anchor="ctr"/>
+          <a:lstStyle/>
+          <a:p>
+            <a:pPr algn="ctr">
+              <a:defRPr>
+                <a:latin typeface="Inter"/>
+              </a:defRPr>
+            </a:pPr>
+          </a:p>
+        </p:txBody>
+      </p:sp>
+      <p:sp>
+        <p:nvSpPr>
+          <p:cNvPr id="16" name="TextBox 15"/>
+          <p:cNvSpPr txBox="1"/>
+          <p:nvPr/>
+        </p:nvSpPr>
+        <p:spPr>
+          <a:xfrm>
+            <a:off x="640080" y="2592070"/>
+            <a:ext cx="1106424" cy="274320"/>
+          </a:xfrm>
+          <a:prstGeom prst="rect">
+            <a:avLst/>
+          </a:prstGeom>
+          <a:noFill/>
+        </p:spPr>
+        <p:txBody>
+          <a:bodyPr wrap="none" lIns="9144" rIns="9144" tIns="9144" bIns="9144" anchor="t">
+            <a:spAutoFit/>
+          </a:bodyPr>
+          <a:lstStyle/>
+          <a:p>
+            <a:pPr algn="r">
+              <a:spcAft>
+                <a:spcPts val="0"/>
+              </a:spcAft>
+              <a:defRPr sz="750" b="1">
+                <a:solidFill>
+                  <a:srgbClr val="4A5563"/>
+                </a:solidFill>
+                <a:latin typeface="Inter"/>
+              </a:defRPr>
+            </a:pPr>
+            <a:r>
+              <a:rPr>
+                <a:latin typeface="Inter"/>
+              </a:rPr>
+              <a:t>2026-10-01</a:t>
+            </a:r>
+          </a:p>
+        </p:txBody>
+      </p:sp>
+      <p:sp>
+        <p:nvSpPr>
+          <p:cNvPr id="17" name="TextBox 16"/>
+          <p:cNvSpPr txBox="1"/>
+          <p:nvPr/>
+        </p:nvSpPr>
+        <p:spPr>
+          <a:xfrm>
+            <a:off x="2057400" y="2592070"/>
+            <a:ext cx="9491472" cy="256032"/>
+          </a:xfrm>
+          <a:prstGeom prst="rect">
+            <a:avLst/>
+          </a:prstGeom>
+          <a:noFill/>
+        </p:spPr>
+        <p:txBody>
+          <a:bodyPr wrap="none" lIns="9144" rIns="9144" tIns="9144" bIns="9144" anchor="t">
+            <a:spAutoFit/>
+          </a:bodyPr>
+          <a:lstStyle/>
+          <a:p>
+            <a:pPr algn="l">
+              <a:spcAft>
+                <a:spcPts val="0"/>
+              </a:spcAft>
+              <a:defRPr sz="950" b="1">
+                <a:solidFill>
+                  <a:srgbClr val="0D1117"/>
+                </a:solidFill>
+                <a:latin typeface="Inter"/>
+              </a:defRPr>
+            </a:pPr>
+            <a:r>
+              <a:rPr>
+                <a:latin typeface="Inter"/>
+              </a:rPr>
+              <a:t>Form ADV profile</a:t>
+            </a:r>
+          </a:p>
+        </p:txBody>
+      </p:sp>
+      <p:sp>
+        <p:nvSpPr>
+          <p:cNvPr id="18" name="TextBox 17"/>
+          <p:cNvSpPr txBox="1"/>
+          <p:nvPr/>
+        </p:nvSpPr>
+        <p:spPr>
+          <a:xfrm>
+            <a:off x="2057400" y="2857246"/>
+            <a:ext cx="9491472" cy="477733"/>
+          </a:xfrm>
+          <a:prstGeom prst="rect">
+            <a:avLst/>
+          </a:prstGeom>
+          <a:noFill/>
+        </p:spPr>
+        <p:txBody>
+          <a:bodyPr wrap="none" lIns="9144" rIns="9144" tIns="9144" bIns="9144" anchor="t">
+            <a:spAutoFit/>
+          </a:bodyPr>
+          <a:lstStyle/>
+          <a:p>
+            <a:pPr algn="l">
+              <a:spcAft>
+                <a:spcPts val="0"/>
+              </a:spcAft>
+              <a:defRPr sz="850" b="0">
+                <a:solidFill>
+                  <a:srgbClr val="4A5563"/>
+                </a:solidFill>
+                <a:latin typeface="Inter"/>
+              </a:defRPr>
+            </a:pPr>
+            <a:r>
+              <a:rPr>
+                <a:latin typeface="Inter"/>
+              </a:rPr>
+              <a:t>Latest validated adviser filing evidence [S1].</a:t>
+            </a:r>
+          </a:p>
+        </p:txBody>
+      </p:sp>
+      <p:sp>
+        <p:nvSpPr>
+          <p:cNvPr id="19" name="Oval 18"/>
+          <p:cNvSpPr/>
+          <p:nvPr/>
+        </p:nvSpPr>
+        <p:spPr>
+          <a:xfrm>
+            <a:off x="1824228" y="3675379"/>
+            <a:ext cx="128016" cy="128016"/>
+          </a:xfrm>
+          <a:prstGeom prst="ellipse">
+            <a:avLst/>
+          </a:prstGeom>
+          <a:solidFill>
+            <a:srgbClr val="F2A93B"/>
+          </a:solidFill>
+          <a:ln>
+            <a:solidFill>
+              <a:srgbClr val="FFFFFF"/>
+            </a:solidFill>
+          </a:ln>
+        </p:spPr>
+        <p:style>
+          <a:lnRef idx="1">
+            <a:schemeClr val="accent1"/>
+          </a:lnRef>
+          <a:fillRef idx="3">
+            <a:schemeClr val="accent1"/>
+          </a:fillRef>
+          <a:effectRef idx="2">
+            <a:schemeClr val="accent1"/>
+          </a:effectRef>
+          <a:fontRef idx="minor">
+            <a:schemeClr val="lt1"/>
+          </a:fontRef>
+        </p:style>
+        <p:txBody>
+          <a:bodyPr rtlCol="0" anchor="ctr"/>
+          <a:lstStyle/>
+          <a:p>
+            <a:pPr algn="ctr">
+              <a:defRPr>
+                <a:latin typeface="Inter"/>
+              </a:defRPr>
+            </a:pPr>
+          </a:p>
+        </p:txBody>
+      </p:sp>
+      <p:sp>
+        <p:nvSpPr>
+          <p:cNvPr id="20" name="TextBox 19"/>
+          <p:cNvSpPr txBox="1"/>
+          <p:nvPr/>
+        </p:nvSpPr>
+        <p:spPr>
+          <a:xfrm>
+            <a:off x="640080" y="3510788"/>
+            <a:ext cx="1106424" cy="274320"/>
+          </a:xfrm>
+          <a:prstGeom prst="rect">
+            <a:avLst/>
+          </a:prstGeom>
+          <a:noFill/>
+        </p:spPr>
+        <p:txBody>
+          <a:bodyPr wrap="none" lIns="9144" rIns="9144" tIns="9144" bIns="9144" anchor="t">
+            <a:spAutoFit/>
+          </a:bodyPr>
+          <a:lstStyle/>
+          <a:p>
+            <a:pPr algn="r">
+              <a:spcAft>
+                <a:spcPts val="0"/>
+              </a:spcAft>
+              <a:defRPr sz="750" b="1">
+                <a:solidFill>
+                  <a:srgbClr val="4A5563"/>
+                </a:solidFill>
+                <a:latin typeface="Inter"/>
+              </a:defRPr>
+            </a:pPr>
+            <a:r>
+              <a:rPr>
+                <a:latin typeface="Inter"/>
+              </a:rPr>
+              <a:t>Not available</a:t>
+            </a:r>
+          </a:p>
+        </p:txBody>
+      </p:sp>
+      <p:sp>
+        <p:nvSpPr>
+          <p:cNvPr id="21" name="TextBox 20"/>
+          <p:cNvSpPr txBox="1"/>
+          <p:nvPr/>
+        </p:nvSpPr>
+        <p:spPr>
+          <a:xfrm>
+            <a:off x="2057400" y="3510788"/>
+            <a:ext cx="9491472" cy="256032"/>
+          </a:xfrm>
+          <a:prstGeom prst="rect">
+            <a:avLst/>
+          </a:prstGeom>
+          <a:noFill/>
+        </p:spPr>
+        <p:txBody>
+          <a:bodyPr wrap="none" lIns="9144" rIns="9144" tIns="9144" bIns="9144" anchor="t">
+            <a:spAutoFit/>
+          </a:bodyPr>
+          <a:lstStyle/>
+          <a:p>
+            <a:pPr algn="l">
+              <a:spcAft>
+                <a:spcPts val="0"/>
+              </a:spcAft>
+              <a:defRPr sz="950" b="1">
+                <a:solidFill>
+                  <a:srgbClr val="0D1117"/>
+                </a:solidFill>
+                <a:latin typeface="Inter"/>
+              </a:defRPr>
+            </a:pPr>
+            <a:r>
+              <a:rPr>
+                <a:latin typeface="Inter"/>
+              </a:rPr>
+              <a:t>Firm and fund events</a:t>
+            </a:r>
+          </a:p>
+        </p:txBody>
+      </p:sp>
+      <p:sp>
+        <p:nvSpPr>
+          <p:cNvPr id="22" name="TextBox 21"/>
+          <p:cNvSpPr txBox="1"/>
+          <p:nvPr/>
+        </p:nvSpPr>
+        <p:spPr>
+          <a:xfrm>
+            <a:off x="2057400" y="3775964"/>
+            <a:ext cx="9491472" cy="477733"/>
+          </a:xfrm>
+          <a:prstGeom prst="rect">
+            <a:avLst/>
+          </a:prstGeom>
+          <a:noFill/>
+        </p:spPr>
+        <p:txBody>
+          <a:bodyPr wrap="none" lIns="9144" rIns="9144" tIns="9144" bIns="9144" anchor="t">
+            <a:spAutoFit/>
+          </a:bodyPr>
+          <a:lstStyle/>
+          <a:p>
+            <a:pPr algn="l">
+              <a:spcAft>
+                <a:spcPts val="0"/>
+              </a:spcAft>
+              <a:defRPr sz="850" b="0">
+                <a:solidFill>
+                  <a:srgbClr val="4A5563"/>
+                </a:solidFill>
+                <a:latin typeface="Inter"/>
+              </a:defRPr>
+            </a:pPr>
+            <a:r>
+              <a:rPr>
+                <a:latin typeface="Inter"/>
+              </a:rPr>
+              <a:t>Event publication is not yet available in the reviewed evidence [S2].</a:t>
+            </a:r>
+          </a:p>
+        </p:txBody>
+      </p:sp>
+      <p:sp>
+        <p:nvSpPr>
+          <p:cNvPr id="23" name="Rectangle 22"/>
+          <p:cNvSpPr/>
+          <p:nvPr/>
+        </p:nvSpPr>
+        <p:spPr>
+          <a:xfrm>
+            <a:off x="640080" y="4575810"/>
+            <a:ext cx="10908792" cy="685800"/>
           </a:xfrm>
           <a:prstGeom prst="rect">
             <a:avLst/>
@@ -6825,14 +7803,196 @@
       </p:sp>
       <p:sp>
         <p:nvSpPr>
-          <p:cNvPr id="10" name="Rectangle 9"/>
+          <p:cNvPr id="24" name="Rectangle 23"/>
           <p:cNvSpPr/>
           <p:nvPr/>
         </p:nvSpPr>
         <p:spPr>
           <a:xfrm>
-            <a:off x="640080" y="1325880"/>
-            <a:ext cx="54864" cy="1340548"/>
+            <a:off x="640080" y="4575810"/>
+            <a:ext cx="54864" cy="685800"/>
+          </a:xfrm>
+          <a:prstGeom prst="rect">
+            <a:avLst/>
+          </a:prstGeom>
+          <a:solidFill>
+            <a:srgbClr val="0D1117"/>
+          </a:solidFill>
+          <a:ln>
+            <a:solidFill>
+              <a:srgbClr val="0D1117"/>
+            </a:solidFill>
+          </a:ln>
+        </p:spPr>
+        <p:style>
+          <a:lnRef idx="1">
+            <a:schemeClr val="accent1"/>
+          </a:lnRef>
+          <a:fillRef idx="3">
+            <a:schemeClr val="accent1"/>
+          </a:fillRef>
+          <a:effectRef idx="2">
+            <a:schemeClr val="accent1"/>
+          </a:effectRef>
+          <a:fontRef idx="minor">
+            <a:schemeClr val="lt1"/>
+          </a:fontRef>
+        </p:style>
+        <p:txBody>
+          <a:bodyPr rtlCol="0" anchor="ctr"/>
+          <a:lstStyle/>
+          <a:p>
+            <a:pPr algn="ctr">
+              <a:defRPr>
+                <a:latin typeface="Inter"/>
+              </a:defRPr>
+            </a:pPr>
+          </a:p>
+        </p:txBody>
+      </p:sp>
+      <p:sp>
+        <p:nvSpPr>
+          <p:cNvPr id="25" name="TextBox 24"/>
+          <p:cNvSpPr txBox="1"/>
+          <p:nvPr/>
+        </p:nvSpPr>
+        <p:spPr>
+          <a:xfrm>
+            <a:off x="804671" y="4685538"/>
+            <a:ext cx="10616184" cy="228600"/>
+          </a:xfrm>
+          <a:prstGeom prst="rect">
+            <a:avLst/>
+          </a:prstGeom>
+          <a:noFill/>
+        </p:spPr>
+        <p:txBody>
+          <a:bodyPr wrap="none" lIns="9144" rIns="9144" tIns="9144" bIns="9144" anchor="t">
+            <a:spAutoFit/>
+          </a:bodyPr>
+          <a:lstStyle/>
+          <a:p>
+            <a:pPr algn="l">
+              <a:spcAft>
+                <a:spcPts val="0"/>
+              </a:spcAft>
+              <a:defRPr sz="1000" b="1">
+                <a:solidFill>
+                  <a:srgbClr val="0D1117"/>
+                </a:solidFill>
+                <a:latin typeface="Inter"/>
+              </a:defRPr>
+            </a:pPr>
+            <a:r>
+              <a:rPr>
+                <a:latin typeface="Inter"/>
+              </a:rPr>
+              <a:t>Not available</a:t>
+            </a:r>
+          </a:p>
+        </p:txBody>
+      </p:sp>
+      <p:sp>
+        <p:nvSpPr>
+          <p:cNvPr id="26" name="TextBox 25"/>
+          <p:cNvSpPr txBox="1"/>
+          <p:nvPr/>
+        </p:nvSpPr>
+        <p:spPr>
+          <a:xfrm>
+            <a:off x="804671" y="4969001"/>
+            <a:ext cx="10616184" cy="228600"/>
+          </a:xfrm>
+          <a:prstGeom prst="rect">
+            <a:avLst/>
+          </a:prstGeom>
+          <a:noFill/>
+        </p:spPr>
+        <p:txBody>
+          <a:bodyPr wrap="none" lIns="9144" rIns="9144" tIns="9144" bIns="9144" anchor="t">
+            <a:spAutoFit/>
+          </a:bodyPr>
+          <a:lstStyle/>
+          <a:p>
+            <a:pPr algn="l">
+              <a:spcAft>
+                <a:spcPts val="0"/>
+              </a:spcAft>
+              <a:defRPr sz="950" b="0">
+                <a:solidFill>
+                  <a:srgbClr val="4A5563"/>
+                </a:solidFill>
+                <a:latin typeface="Inter"/>
+              </a:defRPr>
+            </a:pPr>
+            <a:r>
+              <a:rPr>
+                <a:latin typeface="Inter"/>
+              </a:rPr>
+              <a:t>Not available — monitoring details were not included in the reviewed evidence [S2].</a:t>
+            </a:r>
+          </a:p>
+        </p:txBody>
+      </p:sp>
+      <p:sp>
+        <p:nvSpPr>
+          <p:cNvPr id="27" name="Rectangle 26"/>
+          <p:cNvSpPr/>
+          <p:nvPr/>
+        </p:nvSpPr>
+        <p:spPr>
+          <a:xfrm>
+            <a:off x="640080" y="5371338"/>
+            <a:ext cx="10908792" cy="846582"/>
+          </a:xfrm>
+          <a:prstGeom prst="rect">
+            <a:avLst/>
+          </a:prstGeom>
+          <a:solidFill>
+            <a:srgbClr val="F5F7F9"/>
+          </a:solidFill>
+          <a:ln>
+            <a:solidFill>
+              <a:srgbClr val="E3E7EC"/>
+            </a:solidFill>
+          </a:ln>
+        </p:spPr>
+        <p:style>
+          <a:lnRef idx="1">
+            <a:schemeClr val="accent1"/>
+          </a:lnRef>
+          <a:fillRef idx="3">
+            <a:schemeClr val="accent1"/>
+          </a:fillRef>
+          <a:effectRef idx="2">
+            <a:schemeClr val="accent1"/>
+          </a:effectRef>
+          <a:fontRef idx="minor">
+            <a:schemeClr val="lt1"/>
+          </a:fontRef>
+        </p:style>
+        <p:txBody>
+          <a:bodyPr rtlCol="0" anchor="ctr"/>
+          <a:lstStyle/>
+          <a:p>
+            <a:pPr algn="ctr">
+              <a:defRPr>
+                <a:latin typeface="Inter"/>
+              </a:defRPr>
+            </a:pPr>
+          </a:p>
+        </p:txBody>
+      </p:sp>
+      <p:sp>
+        <p:nvSpPr>
+          <p:cNvPr id="28" name="Rectangle 27"/>
+          <p:cNvSpPr/>
+          <p:nvPr/>
+        </p:nvSpPr>
+        <p:spPr>
+          <a:xfrm>
+            <a:off x="640080" y="5371338"/>
+            <a:ext cx="54864" cy="846582"/>
           </a:xfrm>
           <a:prstGeom prst="rect">
             <a:avLst/>
@@ -6874,13 +8034,13 @@
       </p:sp>
       <p:sp>
         <p:nvSpPr>
-          <p:cNvPr id="11" name="TextBox 10"/>
+          <p:cNvPr id="29" name="TextBox 28"/>
           <p:cNvSpPr txBox="1"/>
           <p:nvPr/>
         </p:nvSpPr>
         <p:spPr>
           <a:xfrm>
-            <a:off x="804671" y="1435607"/>
+            <a:off x="804671" y="5481066"/>
             <a:ext cx="10616184" cy="228600"/>
           </a:xfrm>
           <a:prstGeom prst="rect">
@@ -6909,21 +8069,21 @@
               <a:rPr>
                 <a:latin typeface="Inter"/>
               </a:rPr>
-              <a:t>Holding rows unavailable</a:t>
-            </a:r>
-          </a:p>
-        </p:txBody>
-      </p:sp>
-      <p:sp>
-        <p:nvSpPr>
-          <p:cNvPr id="12" name="TextBox 11"/>
+              <a:t>Analysis — Event coverage limits the monitoring conclusion</a:t>
+            </a:r>
+          </a:p>
+        </p:txBody>
+      </p:sp>
+      <p:sp>
+        <p:nvSpPr>
+          <p:cNvPr id="30" name="TextBox 29"/>
           <p:cNvSpPr txBox="1"/>
           <p:nvPr/>
         </p:nvSpPr>
         <p:spPr>
           <a:xfrm>
-            <a:off x="804671" y="1719072"/>
-            <a:ext cx="10616184" cy="855916"/>
+            <a:off x="804671" y="5764530"/>
+            <a:ext cx="10616184" cy="361950"/>
           </a:xfrm>
           <a:prstGeom prst="rect">
             <a:avLst/>
@@ -6951,378 +8111,14 @@
               <a:rPr>
                 <a:latin typeface="Inter"/>
               </a:rPr>
-              <a:t>Not available — the governed Form 13F snapshot is present, but its holding rows are unavailable [S3].</a:t>
-            </a:r>
-          </a:p>
-        </p:txBody>
-      </p:sp>
-      <p:sp>
-        <p:nvSpPr>
-          <p:cNvPr id="13" name="Rectangle 12"/>
-          <p:cNvSpPr/>
-          <p:nvPr/>
-        </p:nvSpPr>
-        <p:spPr>
-          <a:xfrm>
-            <a:off x="640080" y="2776156"/>
-            <a:ext cx="10908792" cy="1340548"/>
-          </a:xfrm>
-          <a:prstGeom prst="rect">
-            <a:avLst/>
-          </a:prstGeom>
-          <a:solidFill>
-            <a:srgbClr val="F5F7F9"/>
-          </a:solidFill>
-          <a:ln>
-            <a:solidFill>
-              <a:srgbClr val="E3E7EC"/>
-            </a:solidFill>
-          </a:ln>
-        </p:spPr>
-        <p:style>
-          <a:lnRef idx="1">
-            <a:schemeClr val="accent1"/>
-          </a:lnRef>
-          <a:fillRef idx="3">
-            <a:schemeClr val="accent1"/>
-          </a:fillRef>
-          <a:effectRef idx="2">
-            <a:schemeClr val="accent1"/>
-          </a:effectRef>
-          <a:fontRef idx="minor">
-            <a:schemeClr val="lt1"/>
-          </a:fontRef>
-        </p:style>
-        <p:txBody>
-          <a:bodyPr rtlCol="0" anchor="ctr"/>
-          <a:lstStyle/>
-          <a:p>
-            <a:pPr algn="ctr">
-              <a:defRPr>
-                <a:latin typeface="Inter"/>
-              </a:defRPr>
-            </a:pPr>
-          </a:p>
-        </p:txBody>
-      </p:sp>
-      <p:sp>
-        <p:nvSpPr>
-          <p:cNvPr id="14" name="Rectangle 13"/>
-          <p:cNvSpPr/>
-          <p:nvPr/>
-        </p:nvSpPr>
-        <p:spPr>
-          <a:xfrm>
-            <a:off x="640080" y="2776156"/>
-            <a:ext cx="54864" cy="1340548"/>
-          </a:xfrm>
-          <a:prstGeom prst="rect">
-            <a:avLst/>
-          </a:prstGeom>
-          <a:solidFill>
-            <a:srgbClr val="0D1117"/>
-          </a:solidFill>
-          <a:ln>
-            <a:solidFill>
-              <a:srgbClr val="0D1117"/>
-            </a:solidFill>
-          </a:ln>
-        </p:spPr>
-        <p:style>
-          <a:lnRef idx="1">
-            <a:schemeClr val="accent1"/>
-          </a:lnRef>
-          <a:fillRef idx="3">
-            <a:schemeClr val="accent1"/>
-          </a:fillRef>
-          <a:effectRef idx="2">
-            <a:schemeClr val="accent1"/>
-          </a:effectRef>
-          <a:fontRef idx="minor">
-            <a:schemeClr val="lt1"/>
-          </a:fontRef>
-        </p:style>
-        <p:txBody>
-          <a:bodyPr rtlCol="0" anchor="ctr"/>
-          <a:lstStyle/>
-          <a:p>
-            <a:pPr algn="ctr">
-              <a:defRPr>
-                <a:latin typeface="Inter"/>
-              </a:defRPr>
-            </a:pPr>
-          </a:p>
-        </p:txBody>
-      </p:sp>
-      <p:sp>
-        <p:nvSpPr>
-          <p:cNvPr id="15" name="TextBox 14"/>
-          <p:cNvSpPr txBox="1"/>
-          <p:nvPr/>
-        </p:nvSpPr>
-        <p:spPr>
-          <a:xfrm>
-            <a:off x="804671" y="2885884"/>
-            <a:ext cx="10616184" cy="228600"/>
-          </a:xfrm>
-          <a:prstGeom prst="rect">
-            <a:avLst/>
-          </a:prstGeom>
-          <a:noFill/>
-        </p:spPr>
-        <p:txBody>
-          <a:bodyPr wrap="none" lIns="9144" rIns="9144" tIns="9144" bIns="9144" anchor="t">
-            <a:spAutoFit/>
-          </a:bodyPr>
-          <a:lstStyle/>
-          <a:p>
-            <a:pPr algn="l">
-              <a:spcAft>
-                <a:spcPts val="0"/>
-              </a:spcAft>
-              <a:defRPr sz="1000" b="1">
-                <a:solidFill>
-                  <a:srgbClr val="0D1117"/>
-                </a:solidFill>
-                <a:latin typeface="Inter"/>
-              </a:defRPr>
-            </a:pPr>
-            <a:r>
-              <a:rPr>
-                <a:latin typeface="Inter"/>
-              </a:rPr>
-              <a:t>Not available</a:t>
-            </a:r>
-          </a:p>
-        </p:txBody>
-      </p:sp>
-      <p:sp>
-        <p:nvSpPr>
-          <p:cNvPr id="16" name="TextBox 15"/>
-          <p:cNvSpPr txBox="1"/>
-          <p:nvPr/>
-        </p:nvSpPr>
-        <p:spPr>
-          <a:xfrm>
-            <a:off x="804671" y="3169348"/>
-            <a:ext cx="10616184" cy="855916"/>
-          </a:xfrm>
-          <a:prstGeom prst="rect">
-            <a:avLst/>
-          </a:prstGeom>
-          <a:noFill/>
-        </p:spPr>
-        <p:txBody>
-          <a:bodyPr wrap="none" lIns="9144" rIns="9144" tIns="9144" bIns="9144" anchor="t">
-            <a:spAutoFit/>
-          </a:bodyPr>
-          <a:lstStyle/>
-          <a:p>
-            <a:pPr algn="l">
-              <a:spcAft>
-                <a:spcPts val="0"/>
-              </a:spcAft>
-              <a:defRPr sz="950" b="0">
-                <a:solidFill>
-                  <a:srgbClr val="4A5563"/>
-                </a:solidFill>
-                <a:latin typeface="Inter"/>
-              </a:defRPr>
-            </a:pPr>
-            <a:r>
-              <a:rPr>
-                <a:latin typeface="Inter"/>
-              </a:rPr>
-              <a:t>Not available — holding rows were not included in the reviewed evidence [S3].</a:t>
-            </a:r>
-          </a:p>
-        </p:txBody>
-      </p:sp>
-      <p:sp>
-        <p:nvSpPr>
-          <p:cNvPr id="17" name="Rectangle 16"/>
-          <p:cNvSpPr/>
-          <p:nvPr/>
-        </p:nvSpPr>
-        <p:spPr>
-          <a:xfrm>
-            <a:off x="640080" y="4226432"/>
-            <a:ext cx="10908792" cy="1991487"/>
-          </a:xfrm>
-          <a:prstGeom prst="rect">
-            <a:avLst/>
-          </a:prstGeom>
-          <a:solidFill>
-            <a:srgbClr val="F5F7F9"/>
-          </a:solidFill>
-          <a:ln>
-            <a:solidFill>
-              <a:srgbClr val="E3E7EC"/>
-            </a:solidFill>
-          </a:ln>
-        </p:spPr>
-        <p:style>
-          <a:lnRef idx="1">
-            <a:schemeClr val="accent1"/>
-          </a:lnRef>
-          <a:fillRef idx="3">
-            <a:schemeClr val="accent1"/>
-          </a:fillRef>
-          <a:effectRef idx="2">
-            <a:schemeClr val="accent1"/>
-          </a:effectRef>
-          <a:fontRef idx="minor">
-            <a:schemeClr val="lt1"/>
-          </a:fontRef>
-        </p:style>
-        <p:txBody>
-          <a:bodyPr rtlCol="0" anchor="ctr"/>
-          <a:lstStyle/>
-          <a:p>
-            <a:pPr algn="ctr">
-              <a:defRPr>
-                <a:latin typeface="Inter"/>
-              </a:defRPr>
-            </a:pPr>
-          </a:p>
-        </p:txBody>
-      </p:sp>
-      <p:sp>
-        <p:nvSpPr>
-          <p:cNvPr id="18" name="Rectangle 17"/>
-          <p:cNvSpPr/>
-          <p:nvPr/>
-        </p:nvSpPr>
-        <p:spPr>
-          <a:xfrm>
-            <a:off x="640080" y="4226432"/>
-            <a:ext cx="54864" cy="1991487"/>
-          </a:xfrm>
-          <a:prstGeom prst="rect">
-            <a:avLst/>
-          </a:prstGeom>
-          <a:solidFill>
-            <a:srgbClr val="0D1117"/>
-          </a:solidFill>
-          <a:ln>
-            <a:solidFill>
-              <a:srgbClr val="0D1117"/>
-            </a:solidFill>
-          </a:ln>
-        </p:spPr>
-        <p:style>
-          <a:lnRef idx="1">
-            <a:schemeClr val="accent1"/>
-          </a:lnRef>
-          <a:fillRef idx="3">
-            <a:schemeClr val="accent1"/>
-          </a:fillRef>
-          <a:effectRef idx="2">
-            <a:schemeClr val="accent1"/>
-          </a:effectRef>
-          <a:fontRef idx="minor">
-            <a:schemeClr val="lt1"/>
-          </a:fontRef>
-        </p:style>
-        <p:txBody>
-          <a:bodyPr rtlCol="0" anchor="ctr"/>
-          <a:lstStyle/>
-          <a:p>
-            <a:pPr algn="ctr">
-              <a:defRPr>
-                <a:latin typeface="Inter"/>
-              </a:defRPr>
-            </a:pPr>
-          </a:p>
-        </p:txBody>
-      </p:sp>
-      <p:sp>
-        <p:nvSpPr>
-          <p:cNvPr id="19" name="TextBox 18"/>
-          <p:cNvSpPr txBox="1"/>
-          <p:nvPr/>
-        </p:nvSpPr>
-        <p:spPr>
-          <a:xfrm>
-            <a:off x="804671" y="4336160"/>
-            <a:ext cx="10616184" cy="228600"/>
-          </a:xfrm>
-          <a:prstGeom prst="rect">
-            <a:avLst/>
-          </a:prstGeom>
-          <a:noFill/>
-        </p:spPr>
-        <p:txBody>
-          <a:bodyPr wrap="none" lIns="9144" rIns="9144" tIns="9144" bIns="9144" anchor="t">
-            <a:spAutoFit/>
-          </a:bodyPr>
-          <a:lstStyle/>
-          <a:p>
-            <a:pPr algn="l">
-              <a:spcAft>
-                <a:spcPts val="0"/>
-              </a:spcAft>
-              <a:defRPr sz="1000" b="1">
-                <a:solidFill>
-                  <a:srgbClr val="0D1117"/>
-                </a:solidFill>
-                <a:latin typeface="Inter"/>
-              </a:defRPr>
-            </a:pPr>
-            <a:r>
-              <a:rPr>
-                <a:latin typeface="Inter"/>
-              </a:rPr>
-              <a:t>Analysis — Holdings evidence remains partial</a:t>
-            </a:r>
-          </a:p>
-        </p:txBody>
-      </p:sp>
-      <p:sp>
-        <p:nvSpPr>
-          <p:cNvPr id="20" name="TextBox 19"/>
-          <p:cNvSpPr txBox="1"/>
-          <p:nvPr/>
-        </p:nvSpPr>
-        <p:spPr>
-          <a:xfrm>
-            <a:off x="804671" y="4619624"/>
-            <a:ext cx="10616184" cy="1506855"/>
-          </a:xfrm>
-          <a:prstGeom prst="rect">
-            <a:avLst/>
-          </a:prstGeom>
-          <a:noFill/>
-        </p:spPr>
-        <p:txBody>
-          <a:bodyPr wrap="none" lIns="9144" rIns="9144" tIns="9144" bIns="9144" anchor="t">
-            <a:spAutoFit/>
-          </a:bodyPr>
-          <a:lstStyle/>
-          <a:p>
-            <a:pPr algn="l">
-              <a:spcAft>
-                <a:spcPts val="0"/>
-              </a:spcAft>
-              <a:defRPr sz="950" b="0">
-                <a:solidFill>
-                  <a:srgbClr val="4A5563"/>
-                </a:solidFill>
-                <a:latin typeface="Inter"/>
-              </a:defRPr>
-            </a:pPr>
-            <a:r>
-              <a:rPr>
-                <a:latin typeface="Inter"/>
-              </a:rPr>
-              <a:t>Observation: One Form 13F snapshot exists, but its holding rows are unavailable [S3]. Why it matters: Concentration cannot be interpreted from the summary alone. Uncertainty: Form 13F coverage…</a:t>
-            </a:r>
-          </a:p>
-        </p:txBody>
-      </p:sp>
-      <p:sp>
-        <p:nvSpPr>
-          <p:cNvPr id="21" name="Rectangle 20"/>
+              <a:t>Observation: Three filing dates are known, but firm and fund events are unavailable [S1] [S2] [S3]. Why it matters: A quiet timeline cannot be inferred from missing publication…</a:t>
+            </a:r>
+          </a:p>
+        </p:txBody>
+      </p:sp>
+      <p:sp>
+        <p:nvSpPr>
+          <p:cNvPr id="31" name="Rectangle 30"/>
           <p:cNvSpPr/>
           <p:nvPr/>
         </p:nvSpPr>
@@ -7371,7 +8167,7 @@
       </p:sp>
       <p:sp>
         <p:nvSpPr>
-          <p:cNvPr id="22" name="TextBox 21"/>
+          <p:cNvPr id="32" name="TextBox 31"/>
           <p:cNvSpPr txBox="1"/>
           <p:nvPr/>
         </p:nvSpPr>
@@ -7406,14 +8202,14 @@
               <a:rPr>
                 <a:latin typeface="Inter"/>
               </a:rPr>
-              <a:t>Sources: S3</a:t>
-            </a:r>
-          </a:p>
-        </p:txBody>
-      </p:sp>
-      <p:sp>
-        <p:nvSpPr>
-          <p:cNvPr id="23" name="TextBox 22"/>
+              <a:t>Sources: S1 · S2 · S3</a:t>
+            </a:r>
+          </a:p>
+        </p:txBody>
+      </p:sp>
+      <p:sp>
+        <p:nvSpPr>
+          <p:cNvPr id="33" name="TextBox 32"/>
           <p:cNvSpPr txBox="1"/>
           <p:nvPr/>
         </p:nvSpPr>
@@ -7455,7 +8251,7 @@
       </p:sp>
       <p:sp>
         <p:nvSpPr>
-          <p:cNvPr id="24" name="TextBox 23"/>
+          <p:cNvPr id="34" name="TextBox 33"/>
           <p:cNvSpPr txBox="1"/>
           <p:nvPr/>
         </p:nvSpPr>
@@ -7570,48 +8366,6 @@
         </p:nvSpPr>
         <p:spPr>
           <a:xfrm>
-            <a:off x="640080" y="329184"/>
-            <a:ext cx="5303520" cy="182880"/>
-          </a:xfrm>
-          <a:prstGeom prst="rect">
-            <a:avLst/>
-          </a:prstGeom>
-          <a:noFill/>
-        </p:spPr>
-        <p:txBody>
-          <a:bodyPr wrap="none" lIns="9144" rIns="9144" tIns="9144" bIns="9144" anchor="t">
-            <a:spAutoFit/>
-          </a:bodyPr>
-          <a:lstStyle/>
-          <a:p>
-            <a:pPr algn="l">
-              <a:spcAft>
-                <a:spcPts val="0"/>
-              </a:spcAft>
-              <a:defRPr sz="750" b="1">
-                <a:solidFill>
-                  <a:srgbClr val="4F6B00"/>
-                </a:solidFill>
-                <a:latin typeface="Inter"/>
-              </a:defRPr>
-            </a:pPr>
-            <a:r>
-              <a:rPr>
-                <a:latin typeface="Inter"/>
-              </a:rPr>
-              <a:t>OPEN EVIDENCE GAPS DEFINE THE NEXT DILIGENCE WORK</a:t>
-            </a:r>
-          </a:p>
-        </p:txBody>
-      </p:sp>
-      <p:sp>
-        <p:nvSpPr>
-          <p:cNvPr id="4" name="TextBox 3"/>
-          <p:cNvSpPr txBox="1"/>
-          <p:nvPr/>
-        </p:nvSpPr>
-        <p:spPr>
-          <a:xfrm>
             <a:off x="5897880" y="310896"/>
             <a:ext cx="4800600" cy="256032"/>
           </a:xfrm>
@@ -7648,7 +8402,7 @@
       </p:sp>
       <p:sp>
         <p:nvSpPr>
-          <p:cNvPr id="5" name="TextBox 4"/>
+          <p:cNvPr id="4" name="TextBox 3"/>
           <p:cNvSpPr txBox="1"/>
           <p:nvPr/>
         </p:nvSpPr>
@@ -7683,14 +8437,14 @@
               <a:rPr>
                 <a:latin typeface="Inter"/>
               </a:rPr>
-              <a:t>Monitoring, findings &amp; DDQ</a:t>
-            </a:r>
-          </a:p>
-        </p:txBody>
-      </p:sp>
-      <p:sp>
-        <p:nvSpPr>
-          <p:cNvPr id="6" name="Rectangle 5"/>
+              <a:t>Follow-up questions &amp; open items</a:t>
+            </a:r>
+          </a:p>
+        </p:txBody>
+      </p:sp>
+      <p:sp>
+        <p:nvSpPr>
+          <p:cNvPr id="5" name="Rectangle 4"/>
           <p:cNvSpPr/>
           <p:nvPr/>
         </p:nvSpPr>
@@ -7739,7 +8493,7 @@
       </p:sp>
       <p:sp>
         <p:nvSpPr>
-          <p:cNvPr id="7" name="Rectangle 6"/>
+          <p:cNvPr id="6" name="Rectangle 5"/>
           <p:cNvSpPr/>
           <p:nvPr/>
         </p:nvSpPr>
@@ -7788,7 +8542,7 @@
       </p:sp>
       <p:sp>
         <p:nvSpPr>
-          <p:cNvPr id="8" name="TextBox 7"/>
+          <p:cNvPr id="7" name="TextBox 6"/>
           <p:cNvSpPr txBox="1"/>
           <p:nvPr/>
         </p:nvSpPr>
@@ -7823,21 +8577,119 @@
               <a:rPr>
                 <a:latin typeface="Inter"/>
               </a:rPr>
-              <a:t>07</a:t>
-            </a:r>
-          </a:p>
-        </p:txBody>
-      </p:sp>
-      <p:sp>
-        <p:nvSpPr>
-          <p:cNvPr id="9" name="TextBox 8"/>
+              <a:t>08</a:t>
+            </a:r>
+          </a:p>
+        </p:txBody>
+      </p:sp>
+      <p:sp>
+        <p:nvSpPr>
+          <p:cNvPr id="8" name="Rectangle 7"/>
+          <p:cNvSpPr/>
+          <p:nvPr/>
+        </p:nvSpPr>
+        <p:spPr>
+          <a:xfrm>
+            <a:off x="640080" y="1325880"/>
+            <a:ext cx="10908792" cy="4892039"/>
+          </a:xfrm>
+          <a:prstGeom prst="rect">
+            <a:avLst/>
+          </a:prstGeom>
+          <a:solidFill>
+            <a:srgbClr val="F5F7F9"/>
+          </a:solidFill>
+          <a:ln>
+            <a:solidFill>
+              <a:srgbClr val="E3E7EC"/>
+            </a:solidFill>
+          </a:ln>
+        </p:spPr>
+        <p:style>
+          <a:lnRef idx="1">
+            <a:schemeClr val="accent1"/>
+          </a:lnRef>
+          <a:fillRef idx="3">
+            <a:schemeClr val="accent1"/>
+          </a:fillRef>
+          <a:effectRef idx="2">
+            <a:schemeClr val="accent1"/>
+          </a:effectRef>
+          <a:fontRef idx="minor">
+            <a:schemeClr val="lt1"/>
+          </a:fontRef>
+        </p:style>
+        <p:txBody>
+          <a:bodyPr rtlCol="0" anchor="ctr"/>
+          <a:lstStyle/>
+          <a:p>
+            <a:pPr algn="ctr">
+              <a:defRPr>
+                <a:latin typeface="Inter"/>
+              </a:defRPr>
+            </a:pPr>
+          </a:p>
+        </p:txBody>
+      </p:sp>
+      <p:sp>
+        <p:nvSpPr>
+          <p:cNvPr id="9" name="Rectangle 8"/>
+          <p:cNvSpPr/>
+          <p:nvPr/>
+        </p:nvSpPr>
+        <p:spPr>
+          <a:xfrm>
+            <a:off x="640080" y="1325880"/>
+            <a:ext cx="54864" cy="4892039"/>
+          </a:xfrm>
+          <a:prstGeom prst="rect">
+            <a:avLst/>
+          </a:prstGeom>
+          <a:solidFill>
+            <a:srgbClr val="0D1117"/>
+          </a:solidFill>
+          <a:ln>
+            <a:solidFill>
+              <a:srgbClr val="0D1117"/>
+            </a:solidFill>
+          </a:ln>
+        </p:spPr>
+        <p:style>
+          <a:lnRef idx="1">
+            <a:schemeClr val="accent1"/>
+          </a:lnRef>
+          <a:fillRef idx="3">
+            <a:schemeClr val="accent1"/>
+          </a:fillRef>
+          <a:effectRef idx="2">
+            <a:schemeClr val="accent1"/>
+          </a:effectRef>
+          <a:fontRef idx="minor">
+            <a:schemeClr val="lt1"/>
+          </a:fontRef>
+        </p:style>
+        <p:txBody>
+          <a:bodyPr rtlCol="0" anchor="ctr"/>
+          <a:lstStyle/>
+          <a:p>
+            <a:pPr algn="ctr">
+              <a:defRPr>
+                <a:latin typeface="Inter"/>
+              </a:defRPr>
+            </a:pPr>
+          </a:p>
+        </p:txBody>
+      </p:sp>
+      <p:sp>
+        <p:nvSpPr>
+          <p:cNvPr id="10" name="TextBox 9"/>
           <p:cNvSpPr txBox="1"/>
           <p:nvPr/>
         </p:nvSpPr>
         <p:spPr>
           <a:xfrm>
-            <a:off x="640080" y="1325880"/>
-            <a:ext cx="10908792" cy="201168"/>
+            <a:off x="804671" y="1435607"/>
+            <a:ext cx="10616184" cy="228600"/>
           </a:xfrm>
           <a:prstGeom prst="rect">
             <a:avLst/>
@@ -7854,7 +8706,49 @@
               <a:spcAft>
                 <a:spcPts val="0"/>
               </a:spcAft>
-              <a:defRPr sz="720" b="1">
+              <a:defRPr sz="1000" b="1">
+                <a:solidFill>
+                  <a:srgbClr val="0D1117"/>
+                </a:solidFill>
+                <a:latin typeface="Inter"/>
+              </a:defRPr>
+            </a:pPr>
+            <a:r>
+              <a:rPr>
+                <a:latin typeface="Inter"/>
+              </a:rPr>
+              <a:t>Not available</a:t>
+            </a:r>
+          </a:p>
+        </p:txBody>
+      </p:sp>
+      <p:sp>
+        <p:nvSpPr>
+          <p:cNvPr id="11" name="TextBox 10"/>
+          <p:cNvSpPr txBox="1"/>
+          <p:nvPr/>
+        </p:nvSpPr>
+        <p:spPr>
+          <a:xfrm>
+            <a:off x="804671" y="1719072"/>
+            <a:ext cx="10616184" cy="4407407"/>
+          </a:xfrm>
+          <a:prstGeom prst="rect">
+            <a:avLst/>
+          </a:prstGeom>
+          <a:noFill/>
+        </p:spPr>
+        <p:txBody>
+          <a:bodyPr wrap="none" lIns="9144" rIns="9144" tIns="9144" bIns="9144" anchor="t">
+            <a:spAutoFit/>
+          </a:bodyPr>
+          <a:lstStyle/>
+          <a:p>
+            <a:pPr algn="l">
+              <a:spcAft>
+                <a:spcPts val="0"/>
+              </a:spcAft>
+              <a:defRPr sz="950" b="0">
                 <a:solidFill>
                   <a:srgbClr val="4A5563"/>
                 </a:solidFill>
@@ -7865,21 +8759,21 @@
               <a:rPr>
                 <a:latin typeface="Inter"/>
               </a:rPr>
-              <a:t>GOVERNED EVENT TIMELINE</a:t>
-            </a:r>
-          </a:p>
-        </p:txBody>
-      </p:sp>
-      <p:sp>
-        <p:nvSpPr>
-          <p:cNvPr id="10" name="Rectangle 9"/>
+              <a:t>Not available — no follow-up questions are included in this review [S1].</a:t>
+            </a:r>
+          </a:p>
+        </p:txBody>
+      </p:sp>
+      <p:sp>
+        <p:nvSpPr>
+          <p:cNvPr id="12" name="Rectangle 11"/>
           <p:cNvSpPr/>
           <p:nvPr/>
         </p:nvSpPr>
         <p:spPr>
           <a:xfrm>
-            <a:off x="1874519" y="1673352"/>
-            <a:ext cx="22860" cy="4507992"/>
+            <a:off x="640080" y="6446520"/>
+            <a:ext cx="10908792" cy="9144"/>
           </a:xfrm>
           <a:prstGeom prst="rect">
             <a:avLst/>
@@ -7921,581 +8815,7 @@
       </p:sp>
       <p:sp>
         <p:nvSpPr>
-          <p:cNvPr id="11" name="Oval 10"/>
-          <p:cNvSpPr/>
-          <p:nvPr/>
-        </p:nvSpPr>
-        <p:spPr>
-          <a:xfrm>
-            <a:off x="1824228" y="1837944"/>
-            <a:ext cx="128016" cy="128016"/>
-          </a:xfrm>
-          <a:prstGeom prst="ellipse">
-            <a:avLst/>
-          </a:prstGeom>
-          <a:solidFill>
-            <a:srgbClr val="0D1117"/>
-          </a:solidFill>
-          <a:ln>
-            <a:solidFill>
-              <a:srgbClr val="FFFFFF"/>
-            </a:solidFill>
-          </a:ln>
-        </p:spPr>
-        <p:style>
-          <a:lnRef idx="1">
-            <a:schemeClr val="accent1"/>
-          </a:lnRef>
-          <a:fillRef idx="3">
-            <a:schemeClr val="accent1"/>
-          </a:fillRef>
-          <a:effectRef idx="2">
-            <a:schemeClr val="accent1"/>
-          </a:effectRef>
-          <a:fontRef idx="minor">
-            <a:schemeClr val="lt1"/>
-          </a:fontRef>
-        </p:style>
-        <p:txBody>
-          <a:bodyPr rtlCol="0" anchor="ctr"/>
-          <a:lstStyle/>
-          <a:p>
-            <a:pPr algn="ctr">
-              <a:defRPr>
-                <a:latin typeface="Inter"/>
-              </a:defRPr>
-            </a:pPr>
-          </a:p>
-        </p:txBody>
-      </p:sp>
-      <p:sp>
-        <p:nvSpPr>
-          <p:cNvPr id="12" name="TextBox 11"/>
-          <p:cNvSpPr txBox="1"/>
-          <p:nvPr/>
-        </p:nvSpPr>
-        <p:spPr>
-          <a:xfrm>
-            <a:off x="640080" y="1673352"/>
-            <a:ext cx="1106424" cy="274320"/>
-          </a:xfrm>
-          <a:prstGeom prst="rect">
-            <a:avLst/>
-          </a:prstGeom>
-          <a:noFill/>
-        </p:spPr>
-        <p:txBody>
-          <a:bodyPr wrap="none" lIns="9144" rIns="9144" tIns="9144" bIns="9144" anchor="t">
-            <a:spAutoFit/>
-          </a:bodyPr>
-          <a:lstStyle/>
-          <a:p>
-            <a:pPr algn="r">
-              <a:spcAft>
-                <a:spcPts val="0"/>
-              </a:spcAft>
-              <a:defRPr sz="750" b="1">
-                <a:solidFill>
-                  <a:srgbClr val="4A5563"/>
-                </a:solidFill>
-                <a:latin typeface="Inter"/>
-              </a:defRPr>
-            </a:pPr>
-            <a:r>
-              <a:rPr>
-                <a:latin typeface="Inter"/>
-              </a:rPr>
-              <a:t>2026-08-14</a:t>
-            </a:r>
-          </a:p>
-        </p:txBody>
-      </p:sp>
-      <p:sp>
-        <p:nvSpPr>
           <p:cNvPr id="13" name="TextBox 12"/>
-          <p:cNvSpPr txBox="1"/>
-          <p:nvPr/>
-        </p:nvSpPr>
-        <p:spPr>
-          <a:xfrm>
-            <a:off x="2057400" y="1673352"/>
-            <a:ext cx="9491472" cy="256032"/>
-          </a:xfrm>
-          <a:prstGeom prst="rect">
-            <a:avLst/>
-          </a:prstGeom>
-          <a:noFill/>
-        </p:spPr>
-        <p:txBody>
-          <a:bodyPr wrap="none" lIns="9144" rIns="9144" tIns="9144" bIns="9144" anchor="t">
-            <a:spAutoFit/>
-          </a:bodyPr>
-          <a:lstStyle/>
-          <a:p>
-            <a:pPr algn="l">
-              <a:spcAft>
-                <a:spcPts val="0"/>
-              </a:spcAft>
-              <a:defRPr sz="950" b="1">
-                <a:solidFill>
-                  <a:srgbClr val="0D1117"/>
-                </a:solidFill>
-                <a:latin typeface="Inter"/>
-              </a:defRPr>
-            </a:pPr>
-            <a:r>
-              <a:rPr>
-                <a:latin typeface="Inter"/>
-              </a:rPr>
-              <a:t>Form 13F snapshot</a:t>
-            </a:r>
-          </a:p>
-        </p:txBody>
-      </p:sp>
-      <p:sp>
-        <p:nvSpPr>
-          <p:cNvPr id="14" name="TextBox 13"/>
-          <p:cNvSpPr txBox="1"/>
-          <p:nvPr/>
-        </p:nvSpPr>
-        <p:spPr>
-          <a:xfrm>
-            <a:off x="2057400" y="1938528"/>
-            <a:ext cx="9491472" cy="781385"/>
-          </a:xfrm>
-          <a:prstGeom prst="rect">
-            <a:avLst/>
-          </a:prstGeom>
-          <a:noFill/>
-        </p:spPr>
-        <p:txBody>
-          <a:bodyPr wrap="none" lIns="9144" rIns="9144" tIns="9144" bIns="9144" anchor="t">
-            <a:spAutoFit/>
-          </a:bodyPr>
-          <a:lstStyle/>
-          <a:p>
-            <a:pPr algn="l">
-              <a:spcAft>
-                <a:spcPts val="0"/>
-              </a:spcAft>
-              <a:defRPr sz="850" b="0">
-                <a:solidFill>
-                  <a:srgbClr val="4A5563"/>
-                </a:solidFill>
-                <a:latin typeface="Inter"/>
-              </a:defRPr>
-            </a:pPr>
-            <a:r>
-              <a:rPr>
-                <a:latin typeface="Inter"/>
-              </a:rPr>
-              <a:t>Latest available lagged holdings evidence [S3].</a:t>
-            </a:r>
-          </a:p>
-        </p:txBody>
-      </p:sp>
-      <p:sp>
-        <p:nvSpPr>
-          <p:cNvPr id="15" name="Oval 14"/>
-          <p:cNvSpPr/>
-          <p:nvPr/>
-        </p:nvSpPr>
-        <p:spPr>
-          <a:xfrm>
-            <a:off x="1824228" y="3340608"/>
-            <a:ext cx="128016" cy="128016"/>
-          </a:xfrm>
-          <a:prstGeom prst="ellipse">
-            <a:avLst/>
-          </a:prstGeom>
-          <a:solidFill>
-            <a:srgbClr val="C6F432"/>
-          </a:solidFill>
-          <a:ln>
-            <a:solidFill>
-              <a:srgbClr val="FFFFFF"/>
-            </a:solidFill>
-          </a:ln>
-        </p:spPr>
-        <p:style>
-          <a:lnRef idx="1">
-            <a:schemeClr val="accent1"/>
-          </a:lnRef>
-          <a:fillRef idx="3">
-            <a:schemeClr val="accent1"/>
-          </a:fillRef>
-          <a:effectRef idx="2">
-            <a:schemeClr val="accent1"/>
-          </a:effectRef>
-          <a:fontRef idx="minor">
-            <a:schemeClr val="lt1"/>
-          </a:fontRef>
-        </p:style>
-        <p:txBody>
-          <a:bodyPr rtlCol="0" anchor="ctr"/>
-          <a:lstStyle/>
-          <a:p>
-            <a:pPr algn="ctr">
-              <a:defRPr>
-                <a:latin typeface="Inter"/>
-              </a:defRPr>
-            </a:pPr>
-          </a:p>
-        </p:txBody>
-      </p:sp>
-      <p:sp>
-        <p:nvSpPr>
-          <p:cNvPr id="16" name="TextBox 15"/>
-          <p:cNvSpPr txBox="1"/>
-          <p:nvPr/>
-        </p:nvSpPr>
-        <p:spPr>
-          <a:xfrm>
-            <a:off x="640080" y="3176016"/>
-            <a:ext cx="1106424" cy="274320"/>
-          </a:xfrm>
-          <a:prstGeom prst="rect">
-            <a:avLst/>
-          </a:prstGeom>
-          <a:noFill/>
-        </p:spPr>
-        <p:txBody>
-          <a:bodyPr wrap="none" lIns="9144" rIns="9144" tIns="9144" bIns="9144" anchor="t">
-            <a:spAutoFit/>
-          </a:bodyPr>
-          <a:lstStyle/>
-          <a:p>
-            <a:pPr algn="r">
-              <a:spcAft>
-                <a:spcPts val="0"/>
-              </a:spcAft>
-              <a:defRPr sz="750" b="1">
-                <a:solidFill>
-                  <a:srgbClr val="4A5563"/>
-                </a:solidFill>
-                <a:latin typeface="Inter"/>
-              </a:defRPr>
-            </a:pPr>
-            <a:r>
-              <a:rPr>
-                <a:latin typeface="Inter"/>
-              </a:rPr>
-              <a:t>2026-10-01</a:t>
-            </a:r>
-          </a:p>
-        </p:txBody>
-      </p:sp>
-      <p:sp>
-        <p:nvSpPr>
-          <p:cNvPr id="17" name="TextBox 16"/>
-          <p:cNvSpPr txBox="1"/>
-          <p:nvPr/>
-        </p:nvSpPr>
-        <p:spPr>
-          <a:xfrm>
-            <a:off x="2057400" y="3176016"/>
-            <a:ext cx="9491472" cy="256032"/>
-          </a:xfrm>
-          <a:prstGeom prst="rect">
-            <a:avLst/>
-          </a:prstGeom>
-          <a:noFill/>
-        </p:spPr>
-        <p:txBody>
-          <a:bodyPr wrap="none" lIns="9144" rIns="9144" tIns="9144" bIns="9144" anchor="t">
-            <a:spAutoFit/>
-          </a:bodyPr>
-          <a:lstStyle/>
-          <a:p>
-            <a:pPr algn="l">
-              <a:spcAft>
-                <a:spcPts val="0"/>
-              </a:spcAft>
-              <a:defRPr sz="950" b="1">
-                <a:solidFill>
-                  <a:srgbClr val="0D1117"/>
-                </a:solidFill>
-                <a:latin typeface="Inter"/>
-              </a:defRPr>
-            </a:pPr>
-            <a:r>
-              <a:rPr>
-                <a:latin typeface="Inter"/>
-              </a:rPr>
-              <a:t>Form ADV profile</a:t>
-            </a:r>
-          </a:p>
-        </p:txBody>
-      </p:sp>
-      <p:sp>
-        <p:nvSpPr>
-          <p:cNvPr id="18" name="TextBox 17"/>
-          <p:cNvSpPr txBox="1"/>
-          <p:nvPr/>
-        </p:nvSpPr>
-        <p:spPr>
-          <a:xfrm>
-            <a:off x="2057400" y="3441192"/>
-            <a:ext cx="9491472" cy="781385"/>
-          </a:xfrm>
-          <a:prstGeom prst="rect">
-            <a:avLst/>
-          </a:prstGeom>
-          <a:noFill/>
-        </p:spPr>
-        <p:txBody>
-          <a:bodyPr wrap="none" lIns="9144" rIns="9144" tIns="9144" bIns="9144" anchor="t">
-            <a:spAutoFit/>
-          </a:bodyPr>
-          <a:lstStyle/>
-          <a:p>
-            <a:pPr algn="l">
-              <a:spcAft>
-                <a:spcPts val="0"/>
-              </a:spcAft>
-              <a:defRPr sz="850" b="0">
-                <a:solidFill>
-                  <a:srgbClr val="4A5563"/>
-                </a:solidFill>
-                <a:latin typeface="Inter"/>
-              </a:defRPr>
-            </a:pPr>
-            <a:r>
-              <a:rPr>
-                <a:latin typeface="Inter"/>
-              </a:rPr>
-              <a:t>Latest validated adviser filing evidence [S1].</a:t>
-            </a:r>
-          </a:p>
-        </p:txBody>
-      </p:sp>
-      <p:sp>
-        <p:nvSpPr>
-          <p:cNvPr id="19" name="Oval 18"/>
-          <p:cNvSpPr/>
-          <p:nvPr/>
-        </p:nvSpPr>
-        <p:spPr>
-          <a:xfrm>
-            <a:off x="1824228" y="4843272"/>
-            <a:ext cx="128016" cy="128016"/>
-          </a:xfrm>
-          <a:prstGeom prst="ellipse">
-            <a:avLst/>
-          </a:prstGeom>
-          <a:solidFill>
-            <a:srgbClr val="F2A93B"/>
-          </a:solidFill>
-          <a:ln>
-            <a:solidFill>
-              <a:srgbClr val="FFFFFF"/>
-            </a:solidFill>
-          </a:ln>
-        </p:spPr>
-        <p:style>
-          <a:lnRef idx="1">
-            <a:schemeClr val="accent1"/>
-          </a:lnRef>
-          <a:fillRef idx="3">
-            <a:schemeClr val="accent1"/>
-          </a:fillRef>
-          <a:effectRef idx="2">
-            <a:schemeClr val="accent1"/>
-          </a:effectRef>
-          <a:fontRef idx="minor">
-            <a:schemeClr val="lt1"/>
-          </a:fontRef>
-        </p:style>
-        <p:txBody>
-          <a:bodyPr rtlCol="0" anchor="ctr"/>
-          <a:lstStyle/>
-          <a:p>
-            <a:pPr algn="ctr">
-              <a:defRPr>
-                <a:latin typeface="Inter"/>
-              </a:defRPr>
-            </a:pPr>
-          </a:p>
-        </p:txBody>
-      </p:sp>
-      <p:sp>
-        <p:nvSpPr>
-          <p:cNvPr id="20" name="TextBox 19"/>
-          <p:cNvSpPr txBox="1"/>
-          <p:nvPr/>
-        </p:nvSpPr>
-        <p:spPr>
-          <a:xfrm>
-            <a:off x="640080" y="4678680"/>
-            <a:ext cx="1106424" cy="274320"/>
-          </a:xfrm>
-          <a:prstGeom prst="rect">
-            <a:avLst/>
-          </a:prstGeom>
-          <a:noFill/>
-        </p:spPr>
-        <p:txBody>
-          <a:bodyPr wrap="none" lIns="9144" rIns="9144" tIns="9144" bIns="9144" anchor="t">
-            <a:spAutoFit/>
-          </a:bodyPr>
-          <a:lstStyle/>
-          <a:p>
-            <a:pPr algn="r">
-              <a:spcAft>
-                <a:spcPts val="0"/>
-              </a:spcAft>
-              <a:defRPr sz="750" b="1">
-                <a:solidFill>
-                  <a:srgbClr val="4A5563"/>
-                </a:solidFill>
-                <a:latin typeface="Inter"/>
-              </a:defRPr>
-            </a:pPr>
-            <a:r>
-              <a:rPr>
-                <a:latin typeface="Inter"/>
-              </a:rPr>
-              <a:t>Not available</a:t>
-            </a:r>
-          </a:p>
-        </p:txBody>
-      </p:sp>
-      <p:sp>
-        <p:nvSpPr>
-          <p:cNvPr id="21" name="TextBox 20"/>
-          <p:cNvSpPr txBox="1"/>
-          <p:nvPr/>
-        </p:nvSpPr>
-        <p:spPr>
-          <a:xfrm>
-            <a:off x="2057400" y="4678680"/>
-            <a:ext cx="9491472" cy="256032"/>
-          </a:xfrm>
-          <a:prstGeom prst="rect">
-            <a:avLst/>
-          </a:prstGeom>
-          <a:noFill/>
-        </p:spPr>
-        <p:txBody>
-          <a:bodyPr wrap="none" lIns="9144" rIns="9144" tIns="9144" bIns="9144" anchor="t">
-            <a:spAutoFit/>
-          </a:bodyPr>
-          <a:lstStyle/>
-          <a:p>
-            <a:pPr algn="l">
-              <a:spcAft>
-                <a:spcPts val="0"/>
-              </a:spcAft>
-              <a:defRPr sz="950" b="1">
-                <a:solidFill>
-                  <a:srgbClr val="0D1117"/>
-                </a:solidFill>
-                <a:latin typeface="Inter"/>
-              </a:defRPr>
-            </a:pPr>
-            <a:r>
-              <a:rPr>
-                <a:latin typeface="Inter"/>
-              </a:rPr>
-              <a:t>Firm and fund events</a:t>
-            </a:r>
-          </a:p>
-        </p:txBody>
-      </p:sp>
-      <p:sp>
-        <p:nvSpPr>
-          <p:cNvPr id="22" name="TextBox 21"/>
-          <p:cNvSpPr txBox="1"/>
-          <p:nvPr/>
-        </p:nvSpPr>
-        <p:spPr>
-          <a:xfrm>
-            <a:off x="2057400" y="4943856"/>
-            <a:ext cx="9491472" cy="781385"/>
-          </a:xfrm>
-          <a:prstGeom prst="rect">
-            <a:avLst/>
-          </a:prstGeom>
-          <a:noFill/>
-        </p:spPr>
-        <p:txBody>
-          <a:bodyPr wrap="none" lIns="9144" rIns="9144" tIns="9144" bIns="9144" anchor="t">
-            <a:spAutoFit/>
-          </a:bodyPr>
-          <a:lstStyle/>
-          <a:p>
-            <a:pPr algn="l">
-              <a:spcAft>
-                <a:spcPts val="0"/>
-              </a:spcAft>
-              <a:defRPr sz="850" b="0">
-                <a:solidFill>
-                  <a:srgbClr val="4A5563"/>
-                </a:solidFill>
-                <a:latin typeface="Inter"/>
-              </a:defRPr>
-            </a:pPr>
-            <a:r>
-              <a:rPr>
-                <a:latin typeface="Inter"/>
-              </a:rPr>
-              <a:t>Event publication is not yet available in the reviewed evidence [S2].</a:t>
-            </a:r>
-          </a:p>
-        </p:txBody>
-      </p:sp>
-      <p:sp>
-        <p:nvSpPr>
-          <p:cNvPr id="23" name="Rectangle 22"/>
-          <p:cNvSpPr/>
-          <p:nvPr/>
-        </p:nvSpPr>
-        <p:spPr>
-          <a:xfrm>
-            <a:off x="640080" y="6446520"/>
-            <a:ext cx="10908792" cy="9144"/>
-          </a:xfrm>
-          <a:prstGeom prst="rect">
-            <a:avLst/>
-          </a:prstGeom>
-          <a:solidFill>
-            <a:srgbClr val="E3E7EC"/>
-          </a:solidFill>
-          <a:ln>
-            <a:solidFill>
-              <a:srgbClr val="E3E7EC"/>
-            </a:solidFill>
-          </a:ln>
-        </p:spPr>
-        <p:style>
-          <a:lnRef idx="1">
-            <a:schemeClr val="accent1"/>
-          </a:lnRef>
-          <a:fillRef idx="3">
-            <a:schemeClr val="accent1"/>
-          </a:fillRef>
-          <a:effectRef idx="2">
-            <a:schemeClr val="accent1"/>
-          </a:effectRef>
-          <a:fontRef idx="minor">
-            <a:schemeClr val="lt1"/>
-          </a:fontRef>
-        </p:style>
-        <p:txBody>
-          <a:bodyPr rtlCol="0" anchor="ctr"/>
-          <a:lstStyle/>
-          <a:p>
-            <a:pPr algn="ctr">
-              <a:defRPr>
-                <a:latin typeface="Inter"/>
-              </a:defRPr>
-            </a:pPr>
-          </a:p>
-        </p:txBody>
-      </p:sp>
-      <p:sp>
-        <p:nvSpPr>
-          <p:cNvPr id="24" name="TextBox 23"/>
           <p:cNvSpPr txBox="1"/>
           <p:nvPr/>
         </p:nvSpPr>
@@ -8530,14 +8850,14 @@
               <a:rPr>
                 <a:latin typeface="Inter"/>
               </a:rPr>
-              <a:t>Sources: S1 · S2 · S3</a:t>
-            </a:r>
-          </a:p>
-        </p:txBody>
-      </p:sp>
-      <p:sp>
-        <p:nvSpPr>
-          <p:cNvPr id="25" name="TextBox 24"/>
+              <a:t>Sources: S1</a:t>
+            </a:r>
+          </a:p>
+        </p:txBody>
+      </p:sp>
+      <p:sp>
+        <p:nvSpPr>
+          <p:cNvPr id="14" name="TextBox 13"/>
           <p:cNvSpPr txBox="1"/>
           <p:nvPr/>
         </p:nvSpPr>
@@ -8579,7 +8899,7 @@
       </p:sp>
       <p:sp>
         <p:nvSpPr>
-          <p:cNvPr id="26" name="TextBox 25"/>
+          <p:cNvPr id="15" name="TextBox 14"/>
           <p:cNvSpPr txBox="1"/>
           <p:nvPr/>
         </p:nvSpPr>
@@ -8694,48 +9014,6 @@
         </p:nvSpPr>
         <p:spPr>
           <a:xfrm>
-            <a:off x="640080" y="329184"/>
-            <a:ext cx="5303520" cy="182880"/>
-          </a:xfrm>
-          <a:prstGeom prst="rect">
-            <a:avLst/>
-          </a:prstGeom>
-          <a:noFill/>
-        </p:spPr>
-        <p:txBody>
-          <a:bodyPr wrap="none" lIns="9144" rIns="9144" tIns="9144" bIns="9144" anchor="t">
-            <a:spAutoFit/>
-          </a:bodyPr>
-          <a:lstStyle/>
-          <a:p>
-            <a:pPr algn="l">
-              <a:spcAft>
-                <a:spcPts val="0"/>
-              </a:spcAft>
-              <a:defRPr sz="750" b="1">
-                <a:solidFill>
-                  <a:srgbClr val="4F6B00"/>
-                </a:solidFill>
-                <a:latin typeface="Inter"/>
-              </a:defRPr>
-            </a:pPr>
-            <a:r>
-              <a:rPr>
-                <a:latin typeface="Inter"/>
-              </a:rPr>
-              <a:t>OPEN EVIDENCE GAPS DEFINE THE NEXT DILIGENCE WORK</a:t>
-            </a:r>
-          </a:p>
-        </p:txBody>
-      </p:sp>
-      <p:sp>
-        <p:nvSpPr>
-          <p:cNvPr id="4" name="TextBox 3"/>
-          <p:cNvSpPr txBox="1"/>
-          <p:nvPr/>
-        </p:nvSpPr>
-        <p:spPr>
-          <a:xfrm>
             <a:off x="5897880" y="310896"/>
             <a:ext cx="4800600" cy="256032"/>
           </a:xfrm>
@@ -8772,7 +9050,7 @@
       </p:sp>
       <p:sp>
         <p:nvSpPr>
-          <p:cNvPr id="5" name="TextBox 4"/>
+          <p:cNvPr id="4" name="TextBox 3"/>
           <p:cNvSpPr txBox="1"/>
           <p:nvPr/>
         </p:nvSpPr>
@@ -8807,14 +9085,14 @@
               <a:rPr>
                 <a:latin typeface="Inter"/>
               </a:rPr>
-              <a:t>Monitoring, findings &amp; DDQ — continued</a:t>
-            </a:r>
-          </a:p>
-        </p:txBody>
-      </p:sp>
-      <p:sp>
-        <p:nvSpPr>
-          <p:cNvPr id="6" name="Rectangle 5"/>
+              <a:t>Appendix — Sources and methods</a:t>
+            </a:r>
+          </a:p>
+        </p:txBody>
+      </p:sp>
+      <p:sp>
+        <p:nvSpPr>
+          <p:cNvPr id="5" name="Rectangle 4"/>
           <p:cNvSpPr/>
           <p:nvPr/>
         </p:nvSpPr>
@@ -8863,1484 +9141,6 @@
       </p:sp>
       <p:sp>
         <p:nvSpPr>
-          <p:cNvPr id="7" name="Rectangle 6"/>
-          <p:cNvSpPr/>
-          <p:nvPr/>
-        </p:nvSpPr>
-        <p:spPr>
-          <a:xfrm>
-            <a:off x="11018520" y="502920"/>
-            <a:ext cx="530352" cy="393192"/>
-          </a:xfrm>
-          <a:prstGeom prst="rect">
-            <a:avLst/>
-          </a:prstGeom>
-          <a:solidFill>
-            <a:srgbClr val="C6F432"/>
-          </a:solidFill>
-          <a:ln>
-            <a:solidFill>
-              <a:srgbClr val="C6F432"/>
-            </a:solidFill>
-          </a:ln>
-        </p:spPr>
-        <p:style>
-          <a:lnRef idx="1">
-            <a:schemeClr val="accent1"/>
-          </a:lnRef>
-          <a:fillRef idx="3">
-            <a:schemeClr val="accent1"/>
-          </a:fillRef>
-          <a:effectRef idx="2">
-            <a:schemeClr val="accent1"/>
-          </a:effectRef>
-          <a:fontRef idx="minor">
-            <a:schemeClr val="lt1"/>
-          </a:fontRef>
-        </p:style>
-        <p:txBody>
-          <a:bodyPr rtlCol="0" anchor="ctr"/>
-          <a:lstStyle/>
-          <a:p>
-            <a:pPr algn="ctr">
-              <a:defRPr>
-                <a:latin typeface="Inter"/>
-              </a:defRPr>
-            </a:pPr>
-          </a:p>
-        </p:txBody>
-      </p:sp>
-      <p:sp>
-        <p:nvSpPr>
-          <p:cNvPr id="8" name="TextBox 7"/>
-          <p:cNvSpPr txBox="1"/>
-          <p:nvPr/>
-        </p:nvSpPr>
-        <p:spPr>
-          <a:xfrm>
-            <a:off x="11045952" y="557784"/>
-            <a:ext cx="475488" cy="182880"/>
-          </a:xfrm>
-          <a:prstGeom prst="rect">
-            <a:avLst/>
-          </a:prstGeom>
-          <a:noFill/>
-        </p:spPr>
-        <p:txBody>
-          <a:bodyPr wrap="none" lIns="9144" rIns="9144" tIns="9144" bIns="9144" anchor="t">
-            <a:spAutoFit/>
-          </a:bodyPr>
-          <a:lstStyle/>
-          <a:p>
-            <a:pPr algn="ctr">
-              <a:spcAft>
-                <a:spcPts val="0"/>
-              </a:spcAft>
-              <a:defRPr sz="1000" b="1">
-                <a:solidFill>
-                  <a:srgbClr val="0D1117"/>
-                </a:solidFill>
-                <a:latin typeface="Inter"/>
-              </a:defRPr>
-            </a:pPr>
-            <a:r>
-              <a:rPr>
-                <a:latin typeface="Inter"/>
-              </a:rPr>
-              <a:t>07</a:t>
-            </a:r>
-          </a:p>
-        </p:txBody>
-      </p:sp>
-      <p:sp>
-        <p:nvSpPr>
-          <p:cNvPr id="9" name="Rectangle 8"/>
-          <p:cNvSpPr/>
-          <p:nvPr/>
-        </p:nvSpPr>
-        <p:spPr>
-          <a:xfrm>
-            <a:off x="640080" y="1325880"/>
-            <a:ext cx="10908792" cy="1798771"/>
-          </a:xfrm>
-          <a:prstGeom prst="rect">
-            <a:avLst/>
-          </a:prstGeom>
-          <a:solidFill>
-            <a:srgbClr val="F5F7F9"/>
-          </a:solidFill>
-          <a:ln>
-            <a:solidFill>
-              <a:srgbClr val="E3E7EC"/>
-            </a:solidFill>
-          </a:ln>
-        </p:spPr>
-        <p:style>
-          <a:lnRef idx="1">
-            <a:schemeClr val="accent1"/>
-          </a:lnRef>
-          <a:fillRef idx="3">
-            <a:schemeClr val="accent1"/>
-          </a:fillRef>
-          <a:effectRef idx="2">
-            <a:schemeClr val="accent1"/>
-          </a:effectRef>
-          <a:fontRef idx="minor">
-            <a:schemeClr val="lt1"/>
-          </a:fontRef>
-        </p:style>
-        <p:txBody>
-          <a:bodyPr rtlCol="0" anchor="ctr"/>
-          <a:lstStyle/>
-          <a:p>
-            <a:pPr algn="ctr">
-              <a:defRPr>
-                <a:latin typeface="Inter"/>
-              </a:defRPr>
-            </a:pPr>
-          </a:p>
-        </p:txBody>
-      </p:sp>
-      <p:sp>
-        <p:nvSpPr>
-          <p:cNvPr id="10" name="Rectangle 9"/>
-          <p:cNvSpPr/>
-          <p:nvPr/>
-        </p:nvSpPr>
-        <p:spPr>
-          <a:xfrm>
-            <a:off x="640080" y="1325880"/>
-            <a:ext cx="54864" cy="1798771"/>
-          </a:xfrm>
-          <a:prstGeom prst="rect">
-            <a:avLst/>
-          </a:prstGeom>
-          <a:solidFill>
-            <a:srgbClr val="0D1117"/>
-          </a:solidFill>
-          <a:ln>
-            <a:solidFill>
-              <a:srgbClr val="0D1117"/>
-            </a:solidFill>
-          </a:ln>
-        </p:spPr>
-        <p:style>
-          <a:lnRef idx="1">
-            <a:schemeClr val="accent1"/>
-          </a:lnRef>
-          <a:fillRef idx="3">
-            <a:schemeClr val="accent1"/>
-          </a:fillRef>
-          <a:effectRef idx="2">
-            <a:schemeClr val="accent1"/>
-          </a:effectRef>
-          <a:fontRef idx="minor">
-            <a:schemeClr val="lt1"/>
-          </a:fontRef>
-        </p:style>
-        <p:txBody>
-          <a:bodyPr rtlCol="0" anchor="ctr"/>
-          <a:lstStyle/>
-          <a:p>
-            <a:pPr algn="ctr">
-              <a:defRPr>
-                <a:latin typeface="Inter"/>
-              </a:defRPr>
-            </a:pPr>
-          </a:p>
-        </p:txBody>
-      </p:sp>
-      <p:sp>
-        <p:nvSpPr>
-          <p:cNvPr id="11" name="TextBox 10"/>
-          <p:cNvSpPr txBox="1"/>
-          <p:nvPr/>
-        </p:nvSpPr>
-        <p:spPr>
-          <a:xfrm>
-            <a:off x="804671" y="1435607"/>
-            <a:ext cx="10616184" cy="228600"/>
-          </a:xfrm>
-          <a:prstGeom prst="rect">
-            <a:avLst/>
-          </a:prstGeom>
-          <a:noFill/>
-        </p:spPr>
-        <p:txBody>
-          <a:bodyPr wrap="none" lIns="9144" rIns="9144" tIns="9144" bIns="9144" anchor="t">
-            <a:spAutoFit/>
-          </a:bodyPr>
-          <a:lstStyle/>
-          <a:p>
-            <a:pPr algn="l">
-              <a:spcAft>
-                <a:spcPts val="0"/>
-              </a:spcAft>
-              <a:defRPr sz="1000" b="1">
-                <a:solidFill>
-                  <a:srgbClr val="0D1117"/>
-                </a:solidFill>
-                <a:latin typeface="Inter"/>
-              </a:defRPr>
-            </a:pPr>
-            <a:r>
-              <a:rPr>
-                <a:latin typeface="Inter"/>
-              </a:rPr>
-              <a:t>Not available</a:t>
-            </a:r>
-          </a:p>
-        </p:txBody>
-      </p:sp>
-      <p:sp>
-        <p:nvSpPr>
-          <p:cNvPr id="12" name="TextBox 11"/>
-          <p:cNvSpPr txBox="1"/>
-          <p:nvPr/>
-        </p:nvSpPr>
-        <p:spPr>
-          <a:xfrm>
-            <a:off x="804671" y="1719072"/>
-            <a:ext cx="10616184" cy="1314139"/>
-          </a:xfrm>
-          <a:prstGeom prst="rect">
-            <a:avLst/>
-          </a:prstGeom>
-          <a:noFill/>
-        </p:spPr>
-        <p:txBody>
-          <a:bodyPr wrap="none" lIns="9144" rIns="9144" tIns="9144" bIns="9144" anchor="t">
-            <a:spAutoFit/>
-          </a:bodyPr>
-          <a:lstStyle/>
-          <a:p>
-            <a:pPr algn="l">
-              <a:spcAft>
-                <a:spcPts val="0"/>
-              </a:spcAft>
-              <a:defRPr sz="950" b="0">
-                <a:solidFill>
-                  <a:srgbClr val="4A5563"/>
-                </a:solidFill>
-                <a:latin typeface="Inter"/>
-              </a:defRPr>
-            </a:pPr>
-            <a:r>
-              <a:rPr>
-                <a:latin typeface="Inter"/>
-              </a:rPr>
-              <a:t>Not available — monitoring details were not included in the reviewed evidence [S2].</a:t>
-            </a:r>
-          </a:p>
-        </p:txBody>
-      </p:sp>
-      <p:sp>
-        <p:nvSpPr>
-          <p:cNvPr id="13" name="Rectangle 12"/>
-          <p:cNvSpPr/>
-          <p:nvPr/>
-        </p:nvSpPr>
-        <p:spPr>
-          <a:xfrm>
-            <a:off x="640080" y="3234379"/>
-            <a:ext cx="10908792" cy="2983540"/>
-          </a:xfrm>
-          <a:prstGeom prst="rect">
-            <a:avLst/>
-          </a:prstGeom>
-          <a:solidFill>
-            <a:srgbClr val="F5F7F9"/>
-          </a:solidFill>
-          <a:ln>
-            <a:solidFill>
-              <a:srgbClr val="E3E7EC"/>
-            </a:solidFill>
-          </a:ln>
-        </p:spPr>
-        <p:style>
-          <a:lnRef idx="1">
-            <a:schemeClr val="accent1"/>
-          </a:lnRef>
-          <a:fillRef idx="3">
-            <a:schemeClr val="accent1"/>
-          </a:fillRef>
-          <a:effectRef idx="2">
-            <a:schemeClr val="accent1"/>
-          </a:effectRef>
-          <a:fontRef idx="minor">
-            <a:schemeClr val="lt1"/>
-          </a:fontRef>
-        </p:style>
-        <p:txBody>
-          <a:bodyPr rtlCol="0" anchor="ctr"/>
-          <a:lstStyle/>
-          <a:p>
-            <a:pPr algn="ctr">
-              <a:defRPr>
-                <a:latin typeface="Inter"/>
-              </a:defRPr>
-            </a:pPr>
-          </a:p>
-        </p:txBody>
-      </p:sp>
-      <p:sp>
-        <p:nvSpPr>
-          <p:cNvPr id="14" name="Rectangle 13"/>
-          <p:cNvSpPr/>
-          <p:nvPr/>
-        </p:nvSpPr>
-        <p:spPr>
-          <a:xfrm>
-            <a:off x="640080" y="3234379"/>
-            <a:ext cx="54864" cy="2983540"/>
-          </a:xfrm>
-          <a:prstGeom prst="rect">
-            <a:avLst/>
-          </a:prstGeom>
-          <a:solidFill>
-            <a:srgbClr val="F2A93B"/>
-          </a:solidFill>
-          <a:ln>
-            <a:solidFill>
-              <a:srgbClr val="F2A93B"/>
-            </a:solidFill>
-          </a:ln>
-        </p:spPr>
-        <p:style>
-          <a:lnRef idx="1">
-            <a:schemeClr val="accent1"/>
-          </a:lnRef>
-          <a:fillRef idx="3">
-            <a:schemeClr val="accent1"/>
-          </a:fillRef>
-          <a:effectRef idx="2">
-            <a:schemeClr val="accent1"/>
-          </a:effectRef>
-          <a:fontRef idx="minor">
-            <a:schemeClr val="lt1"/>
-          </a:fontRef>
-        </p:style>
-        <p:txBody>
-          <a:bodyPr rtlCol="0" anchor="ctr"/>
-          <a:lstStyle/>
-          <a:p>
-            <a:pPr algn="ctr">
-              <a:defRPr>
-                <a:latin typeface="Inter"/>
-              </a:defRPr>
-            </a:pPr>
-          </a:p>
-        </p:txBody>
-      </p:sp>
-      <p:sp>
-        <p:nvSpPr>
-          <p:cNvPr id="15" name="TextBox 14"/>
-          <p:cNvSpPr txBox="1"/>
-          <p:nvPr/>
-        </p:nvSpPr>
-        <p:spPr>
-          <a:xfrm>
-            <a:off x="804671" y="3344107"/>
-            <a:ext cx="10616184" cy="228600"/>
-          </a:xfrm>
-          <a:prstGeom prst="rect">
-            <a:avLst/>
-          </a:prstGeom>
-          <a:noFill/>
-        </p:spPr>
-        <p:txBody>
-          <a:bodyPr wrap="none" lIns="9144" rIns="9144" tIns="9144" bIns="9144" anchor="t">
-            <a:spAutoFit/>
-          </a:bodyPr>
-          <a:lstStyle/>
-          <a:p>
-            <a:pPr algn="l">
-              <a:spcAft>
-                <a:spcPts val="0"/>
-              </a:spcAft>
-              <a:defRPr sz="1000" b="1">
-                <a:solidFill>
-                  <a:srgbClr val="0D1117"/>
-                </a:solidFill>
-                <a:latin typeface="Inter"/>
-              </a:defRPr>
-            </a:pPr>
-            <a:r>
-              <a:rPr>
-                <a:latin typeface="Inter"/>
-              </a:rPr>
-              <a:t>Analysis — Event coverage limits the monitoring conclusion</a:t>
-            </a:r>
-          </a:p>
-        </p:txBody>
-      </p:sp>
-      <p:sp>
-        <p:nvSpPr>
-          <p:cNvPr id="16" name="TextBox 15"/>
-          <p:cNvSpPr txBox="1"/>
-          <p:nvPr/>
-        </p:nvSpPr>
-        <p:spPr>
-          <a:xfrm>
-            <a:off x="804671" y="3627571"/>
-            <a:ext cx="10616184" cy="2498908"/>
-          </a:xfrm>
-          <a:prstGeom prst="rect">
-            <a:avLst/>
-          </a:prstGeom>
-          <a:noFill/>
-        </p:spPr>
-        <p:txBody>
-          <a:bodyPr wrap="none" lIns="9144" rIns="9144" tIns="9144" bIns="9144" anchor="t">
-            <a:spAutoFit/>
-          </a:bodyPr>
-          <a:lstStyle/>
-          <a:p>
-            <a:pPr algn="l">
-              <a:spcAft>
-                <a:spcPts val="0"/>
-              </a:spcAft>
-              <a:defRPr sz="950" b="0">
-                <a:solidFill>
-                  <a:srgbClr val="4A5563"/>
-                </a:solidFill>
-                <a:latin typeface="Inter"/>
-              </a:defRPr>
-            </a:pPr>
-            <a:r>
-              <a:rPr>
-                <a:latin typeface="Inter"/>
-              </a:rPr>
-              <a:t>Observation: Three filing dates are known, but firm and fund events are unavailable [S1] [S2] [S3]. Why it matters: A quiet timeline cannot be inferred from missing publication…</a:t>
-            </a:r>
-          </a:p>
-        </p:txBody>
-      </p:sp>
-      <p:sp>
-        <p:nvSpPr>
-          <p:cNvPr id="17" name="Rectangle 16"/>
-          <p:cNvSpPr/>
-          <p:nvPr/>
-        </p:nvSpPr>
-        <p:spPr>
-          <a:xfrm>
-            <a:off x="640080" y="6446520"/>
-            <a:ext cx="10908792" cy="9144"/>
-          </a:xfrm>
-          <a:prstGeom prst="rect">
-            <a:avLst/>
-          </a:prstGeom>
-          <a:solidFill>
-            <a:srgbClr val="E3E7EC"/>
-          </a:solidFill>
-          <a:ln>
-            <a:solidFill>
-              <a:srgbClr val="E3E7EC"/>
-            </a:solidFill>
-          </a:ln>
-        </p:spPr>
-        <p:style>
-          <a:lnRef idx="1">
-            <a:schemeClr val="accent1"/>
-          </a:lnRef>
-          <a:fillRef idx="3">
-            <a:schemeClr val="accent1"/>
-          </a:fillRef>
-          <a:effectRef idx="2">
-            <a:schemeClr val="accent1"/>
-          </a:effectRef>
-          <a:fontRef idx="minor">
-            <a:schemeClr val="lt1"/>
-          </a:fontRef>
-        </p:style>
-        <p:txBody>
-          <a:bodyPr rtlCol="0" anchor="ctr"/>
-          <a:lstStyle/>
-          <a:p>
-            <a:pPr algn="ctr">
-              <a:defRPr>
-                <a:latin typeface="Inter"/>
-              </a:defRPr>
-            </a:pPr>
-          </a:p>
-        </p:txBody>
-      </p:sp>
-      <p:sp>
-        <p:nvSpPr>
-          <p:cNvPr id="18" name="TextBox 17"/>
-          <p:cNvSpPr txBox="1"/>
-          <p:nvPr/>
-        </p:nvSpPr>
-        <p:spPr>
-          <a:xfrm>
-            <a:off x="640080" y="6501384"/>
-            <a:ext cx="4297680" cy="146304"/>
-          </a:xfrm>
-          <a:prstGeom prst="rect">
-            <a:avLst/>
-          </a:prstGeom>
-          <a:noFill/>
-        </p:spPr>
-        <p:txBody>
-          <a:bodyPr wrap="none" lIns="9144" rIns="9144" tIns="9144" bIns="9144" anchor="t">
-            <a:spAutoFit/>
-          </a:bodyPr>
-          <a:lstStyle/>
-          <a:p>
-            <a:pPr algn="l">
-              <a:spcAft>
-                <a:spcPts val="0"/>
-              </a:spcAft>
-              <a:defRPr sz="650" b="0">
-                <a:solidFill>
-                  <a:srgbClr val="8A94A1"/>
-                </a:solidFill>
-                <a:latin typeface="Inter"/>
-              </a:defRPr>
-            </a:pPr>
-            <a:r>
-              <a:rPr>
-                <a:latin typeface="Inter"/>
-              </a:rPr>
-              <a:t>Sources: S1 · S2 · S3</a:t>
-            </a:r>
-          </a:p>
-        </p:txBody>
-      </p:sp>
-      <p:sp>
-        <p:nvSpPr>
-          <p:cNvPr id="19" name="TextBox 18"/>
-          <p:cNvSpPr txBox="1"/>
-          <p:nvPr/>
-        </p:nvSpPr>
-        <p:spPr>
-          <a:xfrm>
-            <a:off x="4480560" y="6501384"/>
-            <a:ext cx="5303520" cy="146304"/>
-          </a:xfrm>
-          <a:prstGeom prst="rect">
-            <a:avLst/>
-          </a:prstGeom>
-          <a:noFill/>
-        </p:spPr>
-        <p:txBody>
-          <a:bodyPr wrap="none" lIns="9144" rIns="9144" tIns="9144" bIns="9144" anchor="t">
-            <a:spAutoFit/>
-          </a:bodyPr>
-          <a:lstStyle/>
-          <a:p>
-            <a:pPr algn="ctr">
-              <a:spcAft>
-                <a:spcPts val="0"/>
-              </a:spcAft>
-              <a:defRPr sz="650" b="0">
-                <a:solidFill>
-                  <a:srgbClr val="8A94A1"/>
-                </a:solidFill>
-                <a:latin typeface="Inter"/>
-              </a:defRPr>
-            </a:pPr>
-            <a:r>
-              <a:rPr>
-                <a:latin typeface="Inter"/>
-              </a:rPr>
-              <a:t>Confidential — operational due diligence review · Data as of 2026-10-01 (Form ADV); 2026-08-14 (Form 13F)</a:t>
-            </a:r>
-          </a:p>
-        </p:txBody>
-      </p:sp>
-      <p:sp>
-        <p:nvSpPr>
-          <p:cNvPr id="20" name="TextBox 19"/>
-          <p:cNvSpPr txBox="1"/>
-          <p:nvPr/>
-        </p:nvSpPr>
-        <p:spPr>
-          <a:xfrm>
-            <a:off x="10287000" y="6501384"/>
-            <a:ext cx="1261872" cy="146304"/>
-          </a:xfrm>
-          <a:prstGeom prst="rect">
-            <a:avLst/>
-          </a:prstGeom>
-          <a:noFill/>
-        </p:spPr>
-        <p:txBody>
-          <a:bodyPr wrap="none" lIns="9144" rIns="9144" tIns="9144" bIns="9144" anchor="t">
-            <a:spAutoFit/>
-          </a:bodyPr>
-          <a:lstStyle/>
-          <a:p>
-            <a:pPr algn="r">
-              <a:spcAft>
-                <a:spcPts val="0"/>
-              </a:spcAft>
-              <a:defRPr sz="650" b="0">
-                <a:solidFill>
-                  <a:srgbClr val="8A94A1"/>
-                </a:solidFill>
-                <a:latin typeface="Inter"/>
-              </a:defRPr>
-            </a:pPr>
-            <a:r>
-              <a:rPr>
-                <a:latin typeface="Inter"/>
-              </a:rPr>
-              <a:t>14</a:t>
-            </a:r>
-          </a:p>
-        </p:txBody>
-      </p:sp>
-    </p:spTree>
-  </p:cSld>
-  <p:clrMapOvr>
-    <a:masterClrMapping/>
-  </p:clrMapOvr>
-</p:sld>
-</file>
-
-<file path=ppt/slides/slide15.xml><?xml version="1.0" encoding="utf-8"?>
-<p:sld xmlns:a="http://schemas.openxmlformats.org/drawingml/2006/main" xmlns:p="http://schemas.openxmlformats.org/presentationml/2006/main" xmlns:r="http://schemas.openxmlformats.org/officeDocument/2006/relationships">
-  <p:cSld>
-    <p:spTree>
-      <p:nvGrpSpPr>
-        <p:cNvPr id="1" name=""/>
-        <p:cNvGrpSpPr/>
-        <p:nvPr/>
-      </p:nvGrpSpPr>
-      <p:grpSpPr/>
-      <p:sp>
-        <p:nvSpPr>
-          <p:cNvPr id="2" name="Rectangle 1"/>
-          <p:cNvSpPr/>
-          <p:nvPr/>
-        </p:nvSpPr>
-        <p:spPr>
-          <a:xfrm>
-            <a:off x="0" y="0"/>
-            <a:ext cx="12191695" cy="6858000"/>
-          </a:xfrm>
-          <a:prstGeom prst="rect">
-            <a:avLst/>
-          </a:prstGeom>
-          <a:solidFill>
-            <a:srgbClr val="FFFFFF"/>
-          </a:solidFill>
-          <a:ln>
-            <a:solidFill>
-              <a:srgbClr val="FFFFFF"/>
-            </a:solidFill>
-          </a:ln>
-        </p:spPr>
-        <p:style>
-          <a:lnRef idx="1">
-            <a:schemeClr val="accent1"/>
-          </a:lnRef>
-          <a:fillRef idx="3">
-            <a:schemeClr val="accent1"/>
-          </a:fillRef>
-          <a:effectRef idx="2">
-            <a:schemeClr val="accent1"/>
-          </a:effectRef>
-          <a:fontRef idx="minor">
-            <a:schemeClr val="lt1"/>
-          </a:fontRef>
-        </p:style>
-        <p:txBody>
-          <a:bodyPr rtlCol="0" anchor="ctr"/>
-          <a:lstStyle/>
-          <a:p>
-            <a:pPr algn="ctr">
-              <a:defRPr>
-                <a:latin typeface="Inter"/>
-              </a:defRPr>
-            </a:pPr>
-          </a:p>
-        </p:txBody>
-      </p:sp>
-      <p:sp>
-        <p:nvSpPr>
-          <p:cNvPr id="3" name="TextBox 2"/>
-          <p:cNvSpPr txBox="1"/>
-          <p:nvPr/>
-        </p:nvSpPr>
-        <p:spPr>
-          <a:xfrm>
-            <a:off x="5897880" y="310896"/>
-            <a:ext cx="4800600" cy="256032"/>
-          </a:xfrm>
-          <a:prstGeom prst="rect">
-            <a:avLst/>
-          </a:prstGeom>
-          <a:noFill/>
-        </p:spPr>
-        <p:txBody>
-          <a:bodyPr wrap="none" lIns="9144" rIns="9144" tIns="9144" bIns="9144" anchor="t">
-            <a:spAutoFit/>
-          </a:bodyPr>
-          <a:lstStyle/>
-          <a:p>
-            <a:pPr algn="r">
-              <a:spcAft>
-                <a:spcPts val="0"/>
-              </a:spcAft>
-              <a:defRPr sz="680" b="1">
-                <a:solidFill>
-                  <a:srgbClr val="4F6B00"/>
-                </a:solidFill>
-                <a:latin typeface="Inter"/>
-              </a:defRPr>
-            </a:pPr>
-            <a:r>
-              <a:rPr>
-                <a:latin typeface="Inter"/>
-              </a:rPr>
-              <a:t>Illustrative, Gradient Maintained — demo data, not the client's holdings or managers</a:t>
-            </a:r>
-          </a:p>
-        </p:txBody>
-      </p:sp>
-      <p:sp>
-        <p:nvSpPr>
-          <p:cNvPr id="4" name="TextBox 3"/>
-          <p:cNvSpPr txBox="1"/>
-          <p:nvPr/>
-        </p:nvSpPr>
-        <p:spPr>
-          <a:xfrm>
-            <a:off x="640080" y="566928"/>
-            <a:ext cx="10058400" cy="530352"/>
-          </a:xfrm>
-          <a:prstGeom prst="rect">
-            <a:avLst/>
-          </a:prstGeom>
-          <a:noFill/>
-        </p:spPr>
-        <p:txBody>
-          <a:bodyPr wrap="none" lIns="9144" rIns="9144" tIns="9144" bIns="9144" anchor="t">
-            <a:spAutoFit/>
-          </a:bodyPr>
-          <a:lstStyle/>
-          <a:p>
-            <a:pPr algn="l">
-              <a:spcAft>
-                <a:spcPts val="0"/>
-              </a:spcAft>
-              <a:defRPr sz="2300" b="1">
-                <a:solidFill>
-                  <a:srgbClr val="0D1117"/>
-                </a:solidFill>
-                <a:latin typeface="Inter"/>
-              </a:defRPr>
-            </a:pPr>
-            <a:r>
-              <a:rPr>
-                <a:latin typeface="Inter"/>
-              </a:rPr>
-              <a:t>Follow-up questions &amp; open items</a:t>
-            </a:r>
-          </a:p>
-        </p:txBody>
-      </p:sp>
-      <p:sp>
-        <p:nvSpPr>
-          <p:cNvPr id="5" name="Rectangle 4"/>
-          <p:cNvSpPr/>
-          <p:nvPr/>
-        </p:nvSpPr>
-        <p:spPr>
-          <a:xfrm>
-            <a:off x="640080" y="1115568"/>
-            <a:ext cx="10908792" cy="18288"/>
-          </a:xfrm>
-          <a:prstGeom prst="rect">
-            <a:avLst/>
-          </a:prstGeom>
-          <a:solidFill>
-            <a:srgbClr val="0D1117"/>
-          </a:solidFill>
-          <a:ln>
-            <a:solidFill>
-              <a:srgbClr val="0D1117"/>
-            </a:solidFill>
-          </a:ln>
-        </p:spPr>
-        <p:style>
-          <a:lnRef idx="1">
-            <a:schemeClr val="accent1"/>
-          </a:lnRef>
-          <a:fillRef idx="3">
-            <a:schemeClr val="accent1"/>
-          </a:fillRef>
-          <a:effectRef idx="2">
-            <a:schemeClr val="accent1"/>
-          </a:effectRef>
-          <a:fontRef idx="minor">
-            <a:schemeClr val="lt1"/>
-          </a:fontRef>
-        </p:style>
-        <p:txBody>
-          <a:bodyPr rtlCol="0" anchor="ctr"/>
-          <a:lstStyle/>
-          <a:p>
-            <a:pPr algn="ctr">
-              <a:defRPr>
-                <a:latin typeface="Inter"/>
-              </a:defRPr>
-            </a:pPr>
-          </a:p>
-        </p:txBody>
-      </p:sp>
-      <p:sp>
-        <p:nvSpPr>
-          <p:cNvPr id="6" name="Rectangle 5"/>
-          <p:cNvSpPr/>
-          <p:nvPr/>
-        </p:nvSpPr>
-        <p:spPr>
-          <a:xfrm>
-            <a:off x="11018520" y="502920"/>
-            <a:ext cx="530352" cy="393192"/>
-          </a:xfrm>
-          <a:prstGeom prst="rect">
-            <a:avLst/>
-          </a:prstGeom>
-          <a:solidFill>
-            <a:srgbClr val="C6F432"/>
-          </a:solidFill>
-          <a:ln>
-            <a:solidFill>
-              <a:srgbClr val="C6F432"/>
-            </a:solidFill>
-          </a:ln>
-        </p:spPr>
-        <p:style>
-          <a:lnRef idx="1">
-            <a:schemeClr val="accent1"/>
-          </a:lnRef>
-          <a:fillRef idx="3">
-            <a:schemeClr val="accent1"/>
-          </a:fillRef>
-          <a:effectRef idx="2">
-            <a:schemeClr val="accent1"/>
-          </a:effectRef>
-          <a:fontRef idx="minor">
-            <a:schemeClr val="lt1"/>
-          </a:fontRef>
-        </p:style>
-        <p:txBody>
-          <a:bodyPr rtlCol="0" anchor="ctr"/>
-          <a:lstStyle/>
-          <a:p>
-            <a:pPr algn="ctr">
-              <a:defRPr>
-                <a:latin typeface="Inter"/>
-              </a:defRPr>
-            </a:pPr>
-          </a:p>
-        </p:txBody>
-      </p:sp>
-      <p:sp>
-        <p:nvSpPr>
-          <p:cNvPr id="7" name="TextBox 6"/>
-          <p:cNvSpPr txBox="1"/>
-          <p:nvPr/>
-        </p:nvSpPr>
-        <p:spPr>
-          <a:xfrm>
-            <a:off x="11045952" y="557784"/>
-            <a:ext cx="475488" cy="182880"/>
-          </a:xfrm>
-          <a:prstGeom prst="rect">
-            <a:avLst/>
-          </a:prstGeom>
-          <a:noFill/>
-        </p:spPr>
-        <p:txBody>
-          <a:bodyPr wrap="none" lIns="9144" rIns="9144" tIns="9144" bIns="9144" anchor="t">
-            <a:spAutoFit/>
-          </a:bodyPr>
-          <a:lstStyle/>
-          <a:p>
-            <a:pPr algn="ctr">
-              <a:spcAft>
-                <a:spcPts val="0"/>
-              </a:spcAft>
-              <a:defRPr sz="1000" b="1">
-                <a:solidFill>
-                  <a:srgbClr val="0D1117"/>
-                </a:solidFill>
-                <a:latin typeface="Inter"/>
-              </a:defRPr>
-            </a:pPr>
-            <a:r>
-              <a:rPr>
-                <a:latin typeface="Inter"/>
-              </a:rPr>
-              <a:t>08</a:t>
-            </a:r>
-          </a:p>
-        </p:txBody>
-      </p:sp>
-      <p:sp>
-        <p:nvSpPr>
-          <p:cNvPr id="8" name="Rectangle 7"/>
-          <p:cNvSpPr/>
-          <p:nvPr/>
-        </p:nvSpPr>
-        <p:spPr>
-          <a:xfrm>
-            <a:off x="640080" y="1325880"/>
-            <a:ext cx="10908792" cy="4892040"/>
-          </a:xfrm>
-          <a:prstGeom prst="rect">
-            <a:avLst/>
-          </a:prstGeom>
-          <a:solidFill>
-            <a:srgbClr val="F5F7F9"/>
-          </a:solidFill>
-          <a:ln>
-            <a:solidFill>
-              <a:srgbClr val="E3E7EC"/>
-            </a:solidFill>
-          </a:ln>
-        </p:spPr>
-        <p:style>
-          <a:lnRef idx="1">
-            <a:schemeClr val="accent1"/>
-          </a:lnRef>
-          <a:fillRef idx="3">
-            <a:schemeClr val="accent1"/>
-          </a:fillRef>
-          <a:effectRef idx="2">
-            <a:schemeClr val="accent1"/>
-          </a:effectRef>
-          <a:fontRef idx="minor">
-            <a:schemeClr val="lt1"/>
-          </a:fontRef>
-        </p:style>
-        <p:txBody>
-          <a:bodyPr rtlCol="0" anchor="ctr"/>
-          <a:lstStyle/>
-          <a:p>
-            <a:pPr algn="ctr">
-              <a:defRPr>
-                <a:latin typeface="Inter"/>
-              </a:defRPr>
-            </a:pPr>
-          </a:p>
-        </p:txBody>
-      </p:sp>
-      <p:sp>
-        <p:nvSpPr>
-          <p:cNvPr id="9" name="Rectangle 8"/>
-          <p:cNvSpPr/>
-          <p:nvPr/>
-        </p:nvSpPr>
-        <p:spPr>
-          <a:xfrm>
-            <a:off x="640080" y="1325880"/>
-            <a:ext cx="54864" cy="4892040"/>
-          </a:xfrm>
-          <a:prstGeom prst="rect">
-            <a:avLst/>
-          </a:prstGeom>
-          <a:solidFill>
-            <a:srgbClr val="0D1117"/>
-          </a:solidFill>
-          <a:ln>
-            <a:solidFill>
-              <a:srgbClr val="0D1117"/>
-            </a:solidFill>
-          </a:ln>
-        </p:spPr>
-        <p:style>
-          <a:lnRef idx="1">
-            <a:schemeClr val="accent1"/>
-          </a:lnRef>
-          <a:fillRef idx="3">
-            <a:schemeClr val="accent1"/>
-          </a:fillRef>
-          <a:effectRef idx="2">
-            <a:schemeClr val="accent1"/>
-          </a:effectRef>
-          <a:fontRef idx="minor">
-            <a:schemeClr val="lt1"/>
-          </a:fontRef>
-        </p:style>
-        <p:txBody>
-          <a:bodyPr rtlCol="0" anchor="ctr"/>
-          <a:lstStyle/>
-          <a:p>
-            <a:pPr algn="ctr">
-              <a:defRPr>
-                <a:latin typeface="Inter"/>
-              </a:defRPr>
-            </a:pPr>
-          </a:p>
-        </p:txBody>
-      </p:sp>
-      <p:sp>
-        <p:nvSpPr>
-          <p:cNvPr id="10" name="TextBox 9"/>
-          <p:cNvSpPr txBox="1"/>
-          <p:nvPr/>
-        </p:nvSpPr>
-        <p:spPr>
-          <a:xfrm>
-            <a:off x="804671" y="1435607"/>
-            <a:ext cx="10616184" cy="228600"/>
-          </a:xfrm>
-          <a:prstGeom prst="rect">
-            <a:avLst/>
-          </a:prstGeom>
-          <a:noFill/>
-        </p:spPr>
-        <p:txBody>
-          <a:bodyPr wrap="none" lIns="9144" rIns="9144" tIns="9144" bIns="9144" anchor="t">
-            <a:spAutoFit/>
-          </a:bodyPr>
-          <a:lstStyle/>
-          <a:p>
-            <a:pPr algn="l">
-              <a:spcAft>
-                <a:spcPts val="0"/>
-              </a:spcAft>
-              <a:defRPr sz="1000" b="1">
-                <a:solidFill>
-                  <a:srgbClr val="0D1117"/>
-                </a:solidFill>
-                <a:latin typeface="Inter"/>
-              </a:defRPr>
-            </a:pPr>
-            <a:r>
-              <a:rPr>
-                <a:latin typeface="Inter"/>
-              </a:rPr>
-              <a:t>Not available</a:t>
-            </a:r>
-          </a:p>
-        </p:txBody>
-      </p:sp>
-      <p:sp>
-        <p:nvSpPr>
-          <p:cNvPr id="11" name="TextBox 10"/>
-          <p:cNvSpPr txBox="1"/>
-          <p:nvPr/>
-        </p:nvSpPr>
-        <p:spPr>
-          <a:xfrm>
-            <a:off x="804671" y="1719072"/>
-            <a:ext cx="10616184" cy="4407408"/>
-          </a:xfrm>
-          <a:prstGeom prst="rect">
-            <a:avLst/>
-          </a:prstGeom>
-          <a:noFill/>
-        </p:spPr>
-        <p:txBody>
-          <a:bodyPr wrap="none" lIns="9144" rIns="9144" tIns="9144" bIns="9144" anchor="t">
-            <a:spAutoFit/>
-          </a:bodyPr>
-          <a:lstStyle/>
-          <a:p>
-            <a:pPr algn="l">
-              <a:spcAft>
-                <a:spcPts val="0"/>
-              </a:spcAft>
-              <a:defRPr sz="950" b="0">
-                <a:solidFill>
-                  <a:srgbClr val="4A5563"/>
-                </a:solidFill>
-                <a:latin typeface="Inter"/>
-              </a:defRPr>
-            </a:pPr>
-            <a:r>
-              <a:rPr>
-                <a:latin typeface="Inter"/>
-              </a:rPr>
-              <a:t>Not available — no follow-up questions are included in this review [S1].</a:t>
-            </a:r>
-          </a:p>
-        </p:txBody>
-      </p:sp>
-      <p:sp>
-        <p:nvSpPr>
-          <p:cNvPr id="12" name="Rectangle 11"/>
-          <p:cNvSpPr/>
-          <p:nvPr/>
-        </p:nvSpPr>
-        <p:spPr>
-          <a:xfrm>
-            <a:off x="640080" y="6446520"/>
-            <a:ext cx="10908792" cy="9144"/>
-          </a:xfrm>
-          <a:prstGeom prst="rect">
-            <a:avLst/>
-          </a:prstGeom>
-          <a:solidFill>
-            <a:srgbClr val="E3E7EC"/>
-          </a:solidFill>
-          <a:ln>
-            <a:solidFill>
-              <a:srgbClr val="E3E7EC"/>
-            </a:solidFill>
-          </a:ln>
-        </p:spPr>
-        <p:style>
-          <a:lnRef idx="1">
-            <a:schemeClr val="accent1"/>
-          </a:lnRef>
-          <a:fillRef idx="3">
-            <a:schemeClr val="accent1"/>
-          </a:fillRef>
-          <a:effectRef idx="2">
-            <a:schemeClr val="accent1"/>
-          </a:effectRef>
-          <a:fontRef idx="minor">
-            <a:schemeClr val="lt1"/>
-          </a:fontRef>
-        </p:style>
-        <p:txBody>
-          <a:bodyPr rtlCol="0" anchor="ctr"/>
-          <a:lstStyle/>
-          <a:p>
-            <a:pPr algn="ctr">
-              <a:defRPr>
-                <a:latin typeface="Inter"/>
-              </a:defRPr>
-            </a:pPr>
-          </a:p>
-        </p:txBody>
-      </p:sp>
-      <p:sp>
-        <p:nvSpPr>
-          <p:cNvPr id="13" name="TextBox 12"/>
-          <p:cNvSpPr txBox="1"/>
-          <p:nvPr/>
-        </p:nvSpPr>
-        <p:spPr>
-          <a:xfrm>
-            <a:off x="640080" y="6501384"/>
-            <a:ext cx="4297680" cy="146304"/>
-          </a:xfrm>
-          <a:prstGeom prst="rect">
-            <a:avLst/>
-          </a:prstGeom>
-          <a:noFill/>
-        </p:spPr>
-        <p:txBody>
-          <a:bodyPr wrap="none" lIns="9144" rIns="9144" tIns="9144" bIns="9144" anchor="t">
-            <a:spAutoFit/>
-          </a:bodyPr>
-          <a:lstStyle/>
-          <a:p>
-            <a:pPr algn="l">
-              <a:spcAft>
-                <a:spcPts val="0"/>
-              </a:spcAft>
-              <a:defRPr sz="650" b="0">
-                <a:solidFill>
-                  <a:srgbClr val="8A94A1"/>
-                </a:solidFill>
-                <a:latin typeface="Inter"/>
-              </a:defRPr>
-            </a:pPr>
-            <a:r>
-              <a:rPr>
-                <a:latin typeface="Inter"/>
-              </a:rPr>
-              <a:t>Sources: S1</a:t>
-            </a:r>
-          </a:p>
-        </p:txBody>
-      </p:sp>
-      <p:sp>
-        <p:nvSpPr>
-          <p:cNvPr id="14" name="TextBox 13"/>
-          <p:cNvSpPr txBox="1"/>
-          <p:nvPr/>
-        </p:nvSpPr>
-        <p:spPr>
-          <a:xfrm>
-            <a:off x="4480560" y="6501384"/>
-            <a:ext cx="5303520" cy="146304"/>
-          </a:xfrm>
-          <a:prstGeom prst="rect">
-            <a:avLst/>
-          </a:prstGeom>
-          <a:noFill/>
-        </p:spPr>
-        <p:txBody>
-          <a:bodyPr wrap="none" lIns="9144" rIns="9144" tIns="9144" bIns="9144" anchor="t">
-            <a:spAutoFit/>
-          </a:bodyPr>
-          <a:lstStyle/>
-          <a:p>
-            <a:pPr algn="ctr">
-              <a:spcAft>
-                <a:spcPts val="0"/>
-              </a:spcAft>
-              <a:defRPr sz="650" b="0">
-                <a:solidFill>
-                  <a:srgbClr val="8A94A1"/>
-                </a:solidFill>
-                <a:latin typeface="Inter"/>
-              </a:defRPr>
-            </a:pPr>
-            <a:r>
-              <a:rPr>
-                <a:latin typeface="Inter"/>
-              </a:rPr>
-              <a:t>Confidential — operational due diligence review · Data as of 2026-10-01 (Form ADV); 2026-08-14 (Form 13F)</a:t>
-            </a:r>
-          </a:p>
-        </p:txBody>
-      </p:sp>
-      <p:sp>
-        <p:nvSpPr>
-          <p:cNvPr id="15" name="TextBox 14"/>
-          <p:cNvSpPr txBox="1"/>
-          <p:nvPr/>
-        </p:nvSpPr>
-        <p:spPr>
-          <a:xfrm>
-            <a:off x="10287000" y="6501384"/>
-            <a:ext cx="1261872" cy="146304"/>
-          </a:xfrm>
-          <a:prstGeom prst="rect">
-            <a:avLst/>
-          </a:prstGeom>
-          <a:noFill/>
-        </p:spPr>
-        <p:txBody>
-          <a:bodyPr wrap="none" lIns="9144" rIns="9144" tIns="9144" bIns="9144" anchor="t">
-            <a:spAutoFit/>
-          </a:bodyPr>
-          <a:lstStyle/>
-          <a:p>
-            <a:pPr algn="r">
-              <a:spcAft>
-                <a:spcPts val="0"/>
-              </a:spcAft>
-              <a:defRPr sz="650" b="0">
-                <a:solidFill>
-                  <a:srgbClr val="8A94A1"/>
-                </a:solidFill>
-                <a:latin typeface="Inter"/>
-              </a:defRPr>
-            </a:pPr>
-            <a:r>
-              <a:rPr>
-                <a:latin typeface="Inter"/>
-              </a:rPr>
-              <a:t>15</a:t>
-            </a:r>
-          </a:p>
-        </p:txBody>
-      </p:sp>
-    </p:spTree>
-  </p:cSld>
-  <p:clrMapOvr>
-    <a:masterClrMapping/>
-  </p:clrMapOvr>
-</p:sld>
-</file>
-
-<file path=ppt/slides/slide16.xml><?xml version="1.0" encoding="utf-8"?>
-<p:sld xmlns:a="http://schemas.openxmlformats.org/drawingml/2006/main" xmlns:p="http://schemas.openxmlformats.org/presentationml/2006/main" xmlns:r="http://schemas.openxmlformats.org/officeDocument/2006/relationships">
-  <p:cSld>
-    <p:spTree>
-      <p:nvGrpSpPr>
-        <p:cNvPr id="1" name=""/>
-        <p:cNvGrpSpPr/>
-        <p:nvPr/>
-      </p:nvGrpSpPr>
-      <p:grpSpPr/>
-      <p:sp>
-        <p:nvSpPr>
-          <p:cNvPr id="2" name="Rectangle 1"/>
-          <p:cNvSpPr/>
-          <p:nvPr/>
-        </p:nvSpPr>
-        <p:spPr>
-          <a:xfrm>
-            <a:off x="0" y="0"/>
-            <a:ext cx="12191695" cy="6858000"/>
-          </a:xfrm>
-          <a:prstGeom prst="rect">
-            <a:avLst/>
-          </a:prstGeom>
-          <a:solidFill>
-            <a:srgbClr val="FFFFFF"/>
-          </a:solidFill>
-          <a:ln>
-            <a:solidFill>
-              <a:srgbClr val="FFFFFF"/>
-            </a:solidFill>
-          </a:ln>
-        </p:spPr>
-        <p:style>
-          <a:lnRef idx="1">
-            <a:schemeClr val="accent1"/>
-          </a:lnRef>
-          <a:fillRef idx="3">
-            <a:schemeClr val="accent1"/>
-          </a:fillRef>
-          <a:effectRef idx="2">
-            <a:schemeClr val="accent1"/>
-          </a:effectRef>
-          <a:fontRef idx="minor">
-            <a:schemeClr val="lt1"/>
-          </a:fontRef>
-        </p:style>
-        <p:txBody>
-          <a:bodyPr rtlCol="0" anchor="ctr"/>
-          <a:lstStyle/>
-          <a:p>
-            <a:pPr algn="ctr">
-              <a:defRPr>
-                <a:latin typeface="Inter"/>
-              </a:defRPr>
-            </a:pPr>
-          </a:p>
-        </p:txBody>
-      </p:sp>
-      <p:sp>
-        <p:nvSpPr>
-          <p:cNvPr id="3" name="TextBox 2"/>
-          <p:cNvSpPr txBox="1"/>
-          <p:nvPr/>
-        </p:nvSpPr>
-        <p:spPr>
-          <a:xfrm>
-            <a:off x="5897880" y="310896"/>
-            <a:ext cx="4800600" cy="256032"/>
-          </a:xfrm>
-          <a:prstGeom prst="rect">
-            <a:avLst/>
-          </a:prstGeom>
-          <a:noFill/>
-        </p:spPr>
-        <p:txBody>
-          <a:bodyPr wrap="none" lIns="9144" rIns="9144" tIns="9144" bIns="9144" anchor="t">
-            <a:spAutoFit/>
-          </a:bodyPr>
-          <a:lstStyle/>
-          <a:p>
-            <a:pPr algn="r">
-              <a:spcAft>
-                <a:spcPts val="0"/>
-              </a:spcAft>
-              <a:defRPr sz="680" b="1">
-                <a:solidFill>
-                  <a:srgbClr val="4F6B00"/>
-                </a:solidFill>
-                <a:latin typeface="Inter"/>
-              </a:defRPr>
-            </a:pPr>
-            <a:r>
-              <a:rPr>
-                <a:latin typeface="Inter"/>
-              </a:rPr>
-              <a:t>Illustrative, Gradient Maintained — demo data, not the client's holdings or managers</a:t>
-            </a:r>
-          </a:p>
-        </p:txBody>
-      </p:sp>
-      <p:sp>
-        <p:nvSpPr>
-          <p:cNvPr id="4" name="TextBox 3"/>
-          <p:cNvSpPr txBox="1"/>
-          <p:nvPr/>
-        </p:nvSpPr>
-        <p:spPr>
-          <a:xfrm>
-            <a:off x="640080" y="566928"/>
-            <a:ext cx="10058400" cy="530352"/>
-          </a:xfrm>
-          <a:prstGeom prst="rect">
-            <a:avLst/>
-          </a:prstGeom>
-          <a:noFill/>
-        </p:spPr>
-        <p:txBody>
-          <a:bodyPr wrap="none" lIns="9144" rIns="9144" tIns="9144" bIns="9144" anchor="t">
-            <a:spAutoFit/>
-          </a:bodyPr>
-          <a:lstStyle/>
-          <a:p>
-            <a:pPr algn="l">
-              <a:spcAft>
-                <a:spcPts val="0"/>
-              </a:spcAft>
-              <a:defRPr sz="2300" b="1">
-                <a:solidFill>
-                  <a:srgbClr val="0D1117"/>
-                </a:solidFill>
-                <a:latin typeface="Inter"/>
-              </a:defRPr>
-            </a:pPr>
-            <a:r>
-              <a:rPr>
-                <a:latin typeface="Inter"/>
-              </a:rPr>
-              <a:t>Appendix — Sources and methods</a:t>
-            </a:r>
-          </a:p>
-        </p:txBody>
-      </p:sp>
-      <p:sp>
-        <p:nvSpPr>
-          <p:cNvPr id="5" name="Rectangle 4"/>
-          <p:cNvSpPr/>
-          <p:nvPr/>
-        </p:nvSpPr>
-        <p:spPr>
-          <a:xfrm>
-            <a:off x="640080" y="1115568"/>
-            <a:ext cx="10908792" cy="18288"/>
-          </a:xfrm>
-          <a:prstGeom prst="rect">
-            <a:avLst/>
-          </a:prstGeom>
-          <a:solidFill>
-            <a:srgbClr val="0D1117"/>
-          </a:solidFill>
-          <a:ln>
-            <a:solidFill>
-              <a:srgbClr val="0D1117"/>
-            </a:solidFill>
-          </a:ln>
-        </p:spPr>
-        <p:style>
-          <a:lnRef idx="1">
-            <a:schemeClr val="accent1"/>
-          </a:lnRef>
-          <a:fillRef idx="3">
-            <a:schemeClr val="accent1"/>
-          </a:fillRef>
-          <a:effectRef idx="2">
-            <a:schemeClr val="accent1"/>
-          </a:effectRef>
-          <a:fontRef idx="minor">
-            <a:schemeClr val="lt1"/>
-          </a:fontRef>
-        </p:style>
-        <p:txBody>
-          <a:bodyPr rtlCol="0" anchor="ctr"/>
-          <a:lstStyle/>
-          <a:p>
-            <a:pPr algn="ctr">
-              <a:defRPr>
-                <a:latin typeface="Inter"/>
-              </a:defRPr>
-            </a:pPr>
-          </a:p>
-        </p:txBody>
-      </p:sp>
-      <p:sp>
-        <p:nvSpPr>
           <p:cNvPr id="6" name="Rectangle 5"/>
           <p:cNvSpPr/>
           <p:nvPr/>
@@ -10482,7 +9282,7 @@
         </p:nvGraphicFramePr>
         <p:xfrm>
           <a:off x="640080" y="1600200"/>
-          <a:ext cx="10908792" cy="1841866"/>
+          <a:ext cx="10908792" cy="1981304"/>
         </p:xfrm>
         <a:graphic>
           <a:graphicData uri="http://schemas.openxmlformats.org/drawingml/2006/table">
@@ -10501,7 +9301,7 @@
                 <a:gridCol w="1112139"/>
                 <a:gridCol w="1112139"/>
               </a:tblGrid>
-              <a:tr h="460466">
+              <a:tr h="495326">
                 <a:tc>
                   <a:txBody>
                     <a:bodyPr/>
@@ -10746,7 +9546,7 @@
                   </a:tcPr>
                 </a:tc>
               </a:tr>
-              <a:tr h="460466">
+              <a:tr h="495326">
                 <a:tc>
                   <a:txBody>
                     <a:bodyPr/>
@@ -10991,7 +9791,7 @@
                   </a:tcPr>
                 </a:tc>
               </a:tr>
-              <a:tr h="460466">
+              <a:tr h="495326">
                 <a:tc>
                   <a:txBody>
                     <a:bodyPr/>
@@ -11236,7 +10036,7 @@
                   </a:tcPr>
                 </a:tc>
               </a:tr>
-              <a:tr h="460468">
+              <a:tr h="495326">
                 <a:tc>
                   <a:txBody>
                     <a:bodyPr/>
@@ -11493,7 +10293,7 @@
         </p:nvSpPr>
         <p:spPr>
           <a:xfrm>
-            <a:off x="640080" y="3460354"/>
+            <a:off x="640080" y="3599792"/>
             <a:ext cx="10908792" cy="164592"/>
           </a:xfrm>
           <a:prstGeom prst="rect">
@@ -11535,8 +10335,8 @@
         </p:nvSpPr>
         <p:spPr>
           <a:xfrm>
-            <a:off x="640080" y="3752962"/>
-            <a:ext cx="10908792" cy="2464957"/>
+            <a:off x="640080" y="3892400"/>
+            <a:ext cx="10908792" cy="2325519"/>
           </a:xfrm>
           <a:prstGeom prst="rect">
             <a:avLst/>
@@ -11777,7 +10577,7 @@
               <a:rPr>
                 <a:latin typeface="Inter"/>
               </a:rPr>
-              <a:t>16</a:t>
+              <a:t>14</a:t>
             </a:r>
           </a:p>
         </p:txBody>
@@ -12124,7 +10924,7 @@
         <p:spPr>
           <a:xfrm>
             <a:off x="640080" y="1325880"/>
-            <a:ext cx="10908792" cy="2342356"/>
+            <a:ext cx="10908792" cy="2034909"/>
           </a:xfrm>
           <a:prstGeom prst="rect">
             <a:avLst/>
@@ -12173,7 +10973,7 @@
         <p:spPr>
           <a:xfrm>
             <a:off x="640080" y="1325880"/>
-            <a:ext cx="54864" cy="2342356"/>
+            <a:ext cx="54864" cy="2034909"/>
           </a:xfrm>
           <a:prstGeom prst="rect">
             <a:avLst/>
@@ -12264,7 +11064,7 @@
         <p:spPr>
           <a:xfrm>
             <a:off x="804671" y="1719072"/>
-            <a:ext cx="10616184" cy="1857724"/>
+            <a:ext cx="10616184" cy="1550277"/>
           </a:xfrm>
           <a:prstGeom prst="rect">
             <a:avLst/>
@@ -12305,8 +11105,8 @@
         </p:nvSpPr>
         <p:spPr>
           <a:xfrm>
-            <a:off x="640080" y="3777964"/>
-            <a:ext cx="2644902" cy="2439955"/>
+            <a:off x="640080" y="3470517"/>
+            <a:ext cx="2644902" cy="2747402"/>
           </a:xfrm>
           <a:prstGeom prst="rect">
             <a:avLst/>
@@ -12354,7 +11154,7 @@
         </p:nvSpPr>
         <p:spPr>
           <a:xfrm>
-            <a:off x="640080" y="3777964"/>
+            <a:off x="640080" y="3470517"/>
             <a:ext cx="2644902" cy="45720"/>
           </a:xfrm>
           <a:prstGeom prst="rect">
@@ -12403,7 +11203,7 @@
         </p:nvSpPr>
         <p:spPr>
           <a:xfrm>
-            <a:off x="749808" y="3905980"/>
+            <a:off x="749808" y="3598533"/>
             <a:ext cx="2425446" cy="201168"/>
           </a:xfrm>
           <a:prstGeom prst="rect">
@@ -12445,7 +11245,7 @@
         </p:nvSpPr>
         <p:spPr>
           <a:xfrm>
-            <a:off x="749808" y="4162012"/>
+            <a:off x="749808" y="3854565"/>
             <a:ext cx="2425446" cy="475488"/>
           </a:xfrm>
           <a:prstGeom prst="rect">
@@ -12487,7 +11287,7 @@
         </p:nvSpPr>
         <p:spPr>
           <a:xfrm>
-            <a:off x="749808" y="5888735"/>
+            <a:off x="749808" y="5888736"/>
             <a:ext cx="2425446" cy="228600"/>
           </a:xfrm>
           <a:prstGeom prst="rect">
@@ -12529,8 +11329,8 @@
         </p:nvSpPr>
         <p:spPr>
           <a:xfrm>
-            <a:off x="3394710" y="3777964"/>
-            <a:ext cx="2644902" cy="2439955"/>
+            <a:off x="3394710" y="3470517"/>
+            <a:ext cx="2644902" cy="2747402"/>
           </a:xfrm>
           <a:prstGeom prst="rect">
             <a:avLst/>
@@ -12578,7 +11378,7 @@
         </p:nvSpPr>
         <p:spPr>
           <a:xfrm>
-            <a:off x="3394710" y="3777964"/>
+            <a:off x="3394710" y="3470517"/>
             <a:ext cx="2644902" cy="45720"/>
           </a:xfrm>
           <a:prstGeom prst="rect">
@@ -12627,7 +11427,7 @@
         </p:nvSpPr>
         <p:spPr>
           <a:xfrm>
-            <a:off x="3504438" y="3905980"/>
+            <a:off x="3504438" y="3598533"/>
             <a:ext cx="2425446" cy="201168"/>
           </a:xfrm>
           <a:prstGeom prst="rect">
@@ -12669,7 +11469,7 @@
         </p:nvSpPr>
         <p:spPr>
           <a:xfrm>
-            <a:off x="3504438" y="4162012"/>
+            <a:off x="3504438" y="3854565"/>
             <a:ext cx="2425446" cy="475488"/>
           </a:xfrm>
           <a:prstGeom prst="rect">
@@ -12711,7 +11511,7 @@
         </p:nvSpPr>
         <p:spPr>
           <a:xfrm>
-            <a:off x="3504438" y="5888735"/>
+            <a:off x="3504438" y="5888736"/>
             <a:ext cx="2425446" cy="228600"/>
           </a:xfrm>
           <a:prstGeom prst="rect">
@@ -12753,8 +11553,8 @@
         </p:nvSpPr>
         <p:spPr>
           <a:xfrm>
-            <a:off x="6149340" y="3777964"/>
-            <a:ext cx="2644902" cy="2439955"/>
+            <a:off x="6149340" y="3470517"/>
+            <a:ext cx="2644902" cy="2747402"/>
           </a:xfrm>
           <a:prstGeom prst="rect">
             <a:avLst/>
@@ -12802,7 +11602,7 @@
         </p:nvSpPr>
         <p:spPr>
           <a:xfrm>
-            <a:off x="6149340" y="3777964"/>
+            <a:off x="6149340" y="3470517"/>
             <a:ext cx="2644902" cy="45720"/>
           </a:xfrm>
           <a:prstGeom prst="rect">
@@ -12851,7 +11651,7 @@
         </p:nvSpPr>
         <p:spPr>
           <a:xfrm>
-            <a:off x="6259068" y="3905980"/>
+            <a:off x="6259068" y="3598533"/>
             <a:ext cx="2425446" cy="201168"/>
           </a:xfrm>
           <a:prstGeom prst="rect">
@@ -12893,7 +11693,7 @@
         </p:nvSpPr>
         <p:spPr>
           <a:xfrm>
-            <a:off x="6259068" y="4162012"/>
+            <a:off x="6259068" y="3854565"/>
             <a:ext cx="2425446" cy="475488"/>
           </a:xfrm>
           <a:prstGeom prst="rect">
@@ -12935,7 +11735,7 @@
         </p:nvSpPr>
         <p:spPr>
           <a:xfrm>
-            <a:off x="6259068" y="5888735"/>
+            <a:off x="6259068" y="5888736"/>
             <a:ext cx="2425446" cy="228600"/>
           </a:xfrm>
           <a:prstGeom prst="rect">
@@ -12977,8 +11777,8 @@
         </p:nvSpPr>
         <p:spPr>
           <a:xfrm>
-            <a:off x="8903970" y="3777964"/>
-            <a:ext cx="2644902" cy="2439955"/>
+            <a:off x="8903970" y="3470517"/>
+            <a:ext cx="2644902" cy="2747402"/>
           </a:xfrm>
           <a:prstGeom prst="rect">
             <a:avLst/>
@@ -13026,7 +11826,7 @@
         </p:nvSpPr>
         <p:spPr>
           <a:xfrm>
-            <a:off x="8903970" y="3777964"/>
+            <a:off x="8903970" y="3470517"/>
             <a:ext cx="2644902" cy="45720"/>
           </a:xfrm>
           <a:prstGeom prst="rect">
@@ -13075,7 +11875,7 @@
         </p:nvSpPr>
         <p:spPr>
           <a:xfrm>
-            <a:off x="9013698" y="3905980"/>
+            <a:off x="9013698" y="3598533"/>
             <a:ext cx="2425446" cy="201168"/>
           </a:xfrm>
           <a:prstGeom prst="rect">
@@ -13117,7 +11917,7 @@
         </p:nvSpPr>
         <p:spPr>
           <a:xfrm>
-            <a:off x="9013698" y="4162012"/>
+            <a:off x="9013698" y="3854565"/>
             <a:ext cx="2425446" cy="475488"/>
           </a:xfrm>
           <a:prstGeom prst="rect">
@@ -13159,7 +11959,7 @@
         </p:nvSpPr>
         <p:spPr>
           <a:xfrm>
-            <a:off x="9013698" y="5888735"/>
+            <a:off x="9013698" y="5888736"/>
             <a:ext cx="2425446" cy="228600"/>
           </a:xfrm>
           <a:prstGeom prst="rect">
@@ -13753,7 +12553,7 @@
         </p:nvGraphicFramePr>
         <p:xfrm>
           <a:off x="640080" y="1600200"/>
-          <a:ext cx="10908792" cy="2957582"/>
+          <a:ext cx="10908792" cy="2402913"/>
         </p:xfrm>
         <a:graphic>
           <a:graphicData uri="http://schemas.openxmlformats.org/drawingml/2006/table">
@@ -13766,7 +12566,7 @@
                 <a:gridCol w="4448556"/>
                 <a:gridCol w="4448556"/>
               </a:tblGrid>
-              <a:tr h="591516">
+              <a:tr h="480582">
                 <a:tc>
                   <a:txBody>
                     <a:bodyPr/>
@@ -13849,7 +12649,7 @@
                   </a:tcPr>
                 </a:tc>
               </a:tr>
-              <a:tr h="591516">
+              <a:tr h="480582">
                 <a:tc>
                   <a:txBody>
                     <a:bodyPr/>
@@ -13932,7 +12732,7 @@
                   </a:tcPr>
                 </a:tc>
               </a:tr>
-              <a:tr h="591516">
+              <a:tr h="480582">
                 <a:tc>
                   <a:txBody>
                     <a:bodyPr/>
@@ -14015,7 +12815,7 @@
                   </a:tcPr>
                 </a:tc>
               </a:tr>
-              <a:tr h="591516">
+              <a:tr h="480582">
                 <a:tc>
                   <a:txBody>
                     <a:bodyPr/>
@@ -14098,7 +12898,7 @@
                   </a:tcPr>
                 </a:tc>
               </a:tr>
-              <a:tr h="591518">
+              <a:tr h="480585">
                 <a:tc>
                   <a:txBody>
                     <a:bodyPr/>
@@ -14193,8 +12993,8 @@
         </p:nvSpPr>
         <p:spPr>
           <a:xfrm>
-            <a:off x="640080" y="4667510"/>
-            <a:ext cx="10908792" cy="1550409"/>
+            <a:off x="640080" y="4112841"/>
+            <a:ext cx="10908792" cy="1094015"/>
           </a:xfrm>
           <a:prstGeom prst="rect">
             <a:avLst/>
@@ -14242,8 +13042,8 @@
         </p:nvSpPr>
         <p:spPr>
           <a:xfrm>
-            <a:off x="640080" y="4667510"/>
-            <a:ext cx="54864" cy="1550409"/>
+            <a:off x="640080" y="4112841"/>
+            <a:ext cx="54864" cy="1094015"/>
           </a:xfrm>
           <a:prstGeom prst="rect">
             <a:avLst/>
@@ -14291,7 +13091,7 @@
         </p:nvSpPr>
         <p:spPr>
           <a:xfrm>
-            <a:off x="804671" y="4777238"/>
+            <a:off x="804671" y="4222569"/>
             <a:ext cx="10616184" cy="228600"/>
           </a:xfrm>
           <a:prstGeom prst="rect">
@@ -14333,8 +13133,8 @@
         </p:nvSpPr>
         <p:spPr>
           <a:xfrm>
-            <a:off x="804671" y="5060702"/>
-            <a:ext cx="10616184" cy="1065777"/>
+            <a:off x="804671" y="4506033"/>
+            <a:ext cx="10616184" cy="609383"/>
           </a:xfrm>
           <a:prstGeom prst="rect">
             <a:avLst/>
@@ -14370,6 +13170,188 @@
       <p:sp>
         <p:nvSpPr>
           <p:cNvPr id="15" name="Rectangle 14"/>
+          <p:cNvSpPr/>
+          <p:nvPr/>
+        </p:nvSpPr>
+        <p:spPr>
+          <a:xfrm>
+            <a:off x="640080" y="5316584"/>
+            <a:ext cx="10908792" cy="901335"/>
+          </a:xfrm>
+          <a:prstGeom prst="rect">
+            <a:avLst/>
+          </a:prstGeom>
+          <a:solidFill>
+            <a:srgbClr val="F5F7F9"/>
+          </a:solidFill>
+          <a:ln>
+            <a:solidFill>
+              <a:srgbClr val="E3E7EC"/>
+            </a:solidFill>
+          </a:ln>
+        </p:spPr>
+        <p:style>
+          <a:lnRef idx="1">
+            <a:schemeClr val="accent1"/>
+          </a:lnRef>
+          <a:fillRef idx="3">
+            <a:schemeClr val="accent1"/>
+          </a:fillRef>
+          <a:effectRef idx="2">
+            <a:schemeClr val="accent1"/>
+          </a:effectRef>
+          <a:fontRef idx="minor">
+            <a:schemeClr val="lt1"/>
+          </a:fontRef>
+        </p:style>
+        <p:txBody>
+          <a:bodyPr rtlCol="0" anchor="ctr"/>
+          <a:lstStyle/>
+          <a:p>
+            <a:pPr algn="ctr">
+              <a:defRPr>
+                <a:latin typeface="Inter"/>
+              </a:defRPr>
+            </a:pPr>
+          </a:p>
+        </p:txBody>
+      </p:sp>
+      <p:sp>
+        <p:nvSpPr>
+          <p:cNvPr id="16" name="Rectangle 15"/>
+          <p:cNvSpPr/>
+          <p:nvPr/>
+        </p:nvSpPr>
+        <p:spPr>
+          <a:xfrm>
+            <a:off x="640080" y="5316584"/>
+            <a:ext cx="54864" cy="901335"/>
+          </a:xfrm>
+          <a:prstGeom prst="rect">
+            <a:avLst/>
+          </a:prstGeom>
+          <a:solidFill>
+            <a:srgbClr val="0D1117"/>
+          </a:solidFill>
+          <a:ln>
+            <a:solidFill>
+              <a:srgbClr val="0D1117"/>
+            </a:solidFill>
+          </a:ln>
+        </p:spPr>
+        <p:style>
+          <a:lnRef idx="1">
+            <a:schemeClr val="accent1"/>
+          </a:lnRef>
+          <a:fillRef idx="3">
+            <a:schemeClr val="accent1"/>
+          </a:fillRef>
+          <a:effectRef idx="2">
+            <a:schemeClr val="accent1"/>
+          </a:effectRef>
+          <a:fontRef idx="minor">
+            <a:schemeClr val="lt1"/>
+          </a:fontRef>
+        </p:style>
+        <p:txBody>
+          <a:bodyPr rtlCol="0" anchor="ctr"/>
+          <a:lstStyle/>
+          <a:p>
+            <a:pPr algn="ctr">
+              <a:defRPr>
+                <a:latin typeface="Inter"/>
+              </a:defRPr>
+            </a:pPr>
+          </a:p>
+        </p:txBody>
+      </p:sp>
+      <p:sp>
+        <p:nvSpPr>
+          <p:cNvPr id="17" name="TextBox 16"/>
+          <p:cNvSpPr txBox="1"/>
+          <p:nvPr/>
+        </p:nvSpPr>
+        <p:spPr>
+          <a:xfrm>
+            <a:off x="804671" y="5426312"/>
+            <a:ext cx="10616184" cy="228600"/>
+          </a:xfrm>
+          <a:prstGeom prst="rect">
+            <a:avLst/>
+          </a:prstGeom>
+          <a:noFill/>
+        </p:spPr>
+        <p:txBody>
+          <a:bodyPr wrap="none" lIns="9144" rIns="9144" tIns="9144" bIns="9144" anchor="t">
+            <a:spAutoFit/>
+          </a:bodyPr>
+          <a:lstStyle/>
+          <a:p>
+            <a:pPr algn="l">
+              <a:spcAft>
+                <a:spcPts val="0"/>
+              </a:spcAft>
+              <a:defRPr sz="1000" b="1">
+                <a:solidFill>
+                  <a:srgbClr val="0D1117"/>
+                </a:solidFill>
+                <a:latin typeface="Inter"/>
+              </a:defRPr>
+            </a:pPr>
+            <a:r>
+              <a:rPr>
+                <a:latin typeface="Inter"/>
+              </a:rPr>
+              <a:t>Key judgment — primary measure</a:t>
+            </a:r>
+          </a:p>
+        </p:txBody>
+      </p:sp>
+      <p:sp>
+        <p:nvSpPr>
+          <p:cNvPr id="18" name="TextBox 17"/>
+          <p:cNvSpPr txBox="1"/>
+          <p:nvPr/>
+        </p:nvSpPr>
+        <p:spPr>
+          <a:xfrm>
+            <a:off x="804671" y="5709776"/>
+            <a:ext cx="10616184" cy="416703"/>
+          </a:xfrm>
+          <a:prstGeom prst="rect">
+            <a:avLst/>
+          </a:prstGeom>
+          <a:noFill/>
+        </p:spPr>
+        <p:txBody>
+          <a:bodyPr wrap="none" lIns="9144" rIns="9144" tIns="9144" bIns="9144" anchor="t">
+            <a:spAutoFit/>
+          </a:bodyPr>
+          <a:lstStyle/>
+          <a:p>
+            <a:pPr algn="l">
+              <a:spcAft>
+                <a:spcPts val="0"/>
+              </a:spcAft>
+              <a:defRPr sz="950" b="0">
+                <a:solidFill>
+                  <a:srgbClr val="4A5563"/>
+                </a:solidFill>
+                <a:latin typeface="Inter"/>
+              </a:defRPr>
+            </a:pPr>
+            <a:r>
+              <a:rPr>
+                <a:latin typeface="Inter"/>
+              </a:rPr>
+              <a:t>Observation: Regulatory AUM is $12.4B in the review evidence [S2]. Why it matters: This measure establishes the baseline for comparing later governed results. Uncertainty: The source basis may omit newer observations outside the reviewed evidence. What would change the view: A refreshed source report showing a change above 1%.</a:t>
+            </a:r>
+          </a:p>
+        </p:txBody>
+      </p:sp>
+      <p:sp>
+        <p:nvSpPr>
+          <p:cNvPr id="19" name="Rectangle 18"/>
           <p:cNvSpPr/>
           <p:nvPr/>
         </p:nvSpPr>
@@ -14418,7 +13400,7 @@
       </p:sp>
       <p:sp>
         <p:nvSpPr>
-          <p:cNvPr id="16" name="TextBox 15"/>
+          <p:cNvPr id="20" name="TextBox 19"/>
           <p:cNvSpPr txBox="1"/>
           <p:nvPr/>
         </p:nvSpPr>
@@ -14460,7 +13442,7 @@
       </p:sp>
       <p:sp>
         <p:nvSpPr>
-          <p:cNvPr id="17" name="TextBox 16"/>
+          <p:cNvPr id="21" name="TextBox 20"/>
           <p:cNvSpPr txBox="1"/>
           <p:nvPr/>
         </p:nvSpPr>
@@ -14502,7 +13484,7 @@
       </p:sp>
       <p:sp>
         <p:nvSpPr>
-          <p:cNvPr id="18" name="TextBox 17"/>
+          <p:cNvPr id="22" name="TextBox 21"/>
           <p:cNvSpPr txBox="1"/>
           <p:nvPr/>
         </p:nvSpPr>
@@ -14884,7 +13866,7 @@
         <p:spPr>
           <a:xfrm>
             <a:off x="640080" y="1325880"/>
-            <a:ext cx="10908792" cy="2373068"/>
+            <a:ext cx="10908792" cy="4892040"/>
           </a:xfrm>
           <a:prstGeom prst="rect">
             <a:avLst/>
@@ -14933,7 +13915,7 @@
         <p:spPr>
           <a:xfrm>
             <a:off x="640080" y="1325880"/>
-            <a:ext cx="54864" cy="2373068"/>
+            <a:ext cx="54864" cy="4892040"/>
           </a:xfrm>
           <a:prstGeom prst="rect">
             <a:avLst/>
@@ -15010,7 +13992,7 @@
               <a:rPr>
                 <a:latin typeface="Inter"/>
               </a:rPr>
-              <a:t>Key judgment — primary measure</a:t>
+              <a:t>Key judgment — monitoring priority</a:t>
             </a:r>
           </a:p>
         </p:txBody>
@@ -15024,7 +14006,7 @@
         <p:spPr>
           <a:xfrm>
             <a:off x="804671" y="1719072"/>
-            <a:ext cx="10616184" cy="1888436"/>
+            <a:ext cx="10616184" cy="4407408"/>
           </a:xfrm>
           <a:prstGeom prst="rect">
             <a:avLst/>
@@ -15052,7 +14034,7 @@
               <a:rPr>
                 <a:latin typeface="Inter"/>
               </a:rPr>
-              <a:t>Observation: Regulatory AUM is $12.4B in the review evidence [S2]. Why it matters: This measure establishes the baseline for comparing later governed results. Uncertainty: The source basis may omit newer observations outside the reviewed evidence. What would change the view: A refreshed source report showing a change above 1%.</a:t>
+              <a:t>Observation: Composite is 32.4 in the review evidence [S3]. Why it matters: This result determines which item receives priority in the next monitoring cycle. Uncertainty: Supporting coverage may omit later filings or corroborating detail. What would change the view: A new filing or report that resolves the item or changes it by 1%.</a:t>
             </a:r>
           </a:p>
         </p:txBody>
@@ -15060,188 +14042,6 @@
       <p:sp>
         <p:nvSpPr>
           <p:cNvPr id="13" name="Rectangle 12"/>
-          <p:cNvSpPr/>
-          <p:nvPr/>
-        </p:nvSpPr>
-        <p:spPr>
-          <a:xfrm>
-            <a:off x="640080" y="3808676"/>
-            <a:ext cx="10908792" cy="2409243"/>
-          </a:xfrm>
-          <a:prstGeom prst="rect">
-            <a:avLst/>
-          </a:prstGeom>
-          <a:solidFill>
-            <a:srgbClr val="F5F7F9"/>
-          </a:solidFill>
-          <a:ln>
-            <a:solidFill>
-              <a:srgbClr val="E3E7EC"/>
-            </a:solidFill>
-          </a:ln>
-        </p:spPr>
-        <p:style>
-          <a:lnRef idx="1">
-            <a:schemeClr val="accent1"/>
-          </a:lnRef>
-          <a:fillRef idx="3">
-            <a:schemeClr val="accent1"/>
-          </a:fillRef>
-          <a:effectRef idx="2">
-            <a:schemeClr val="accent1"/>
-          </a:effectRef>
-          <a:fontRef idx="minor">
-            <a:schemeClr val="lt1"/>
-          </a:fontRef>
-        </p:style>
-        <p:txBody>
-          <a:bodyPr rtlCol="0" anchor="ctr"/>
-          <a:lstStyle/>
-          <a:p>
-            <a:pPr algn="ctr">
-              <a:defRPr>
-                <a:latin typeface="Inter"/>
-              </a:defRPr>
-            </a:pPr>
-          </a:p>
-        </p:txBody>
-      </p:sp>
-      <p:sp>
-        <p:nvSpPr>
-          <p:cNvPr id="14" name="Rectangle 13"/>
-          <p:cNvSpPr/>
-          <p:nvPr/>
-        </p:nvSpPr>
-        <p:spPr>
-          <a:xfrm>
-            <a:off x="640080" y="3808676"/>
-            <a:ext cx="54864" cy="2409243"/>
-          </a:xfrm>
-          <a:prstGeom prst="rect">
-            <a:avLst/>
-          </a:prstGeom>
-          <a:solidFill>
-            <a:srgbClr val="0D1117"/>
-          </a:solidFill>
-          <a:ln>
-            <a:solidFill>
-              <a:srgbClr val="0D1117"/>
-            </a:solidFill>
-          </a:ln>
-        </p:spPr>
-        <p:style>
-          <a:lnRef idx="1">
-            <a:schemeClr val="accent1"/>
-          </a:lnRef>
-          <a:fillRef idx="3">
-            <a:schemeClr val="accent1"/>
-          </a:fillRef>
-          <a:effectRef idx="2">
-            <a:schemeClr val="accent1"/>
-          </a:effectRef>
-          <a:fontRef idx="minor">
-            <a:schemeClr val="lt1"/>
-          </a:fontRef>
-        </p:style>
-        <p:txBody>
-          <a:bodyPr rtlCol="0" anchor="ctr"/>
-          <a:lstStyle/>
-          <a:p>
-            <a:pPr algn="ctr">
-              <a:defRPr>
-                <a:latin typeface="Inter"/>
-              </a:defRPr>
-            </a:pPr>
-          </a:p>
-        </p:txBody>
-      </p:sp>
-      <p:sp>
-        <p:nvSpPr>
-          <p:cNvPr id="15" name="TextBox 14"/>
-          <p:cNvSpPr txBox="1"/>
-          <p:nvPr/>
-        </p:nvSpPr>
-        <p:spPr>
-          <a:xfrm>
-            <a:off x="804671" y="3918404"/>
-            <a:ext cx="10616184" cy="228600"/>
-          </a:xfrm>
-          <a:prstGeom prst="rect">
-            <a:avLst/>
-          </a:prstGeom>
-          <a:noFill/>
-        </p:spPr>
-        <p:txBody>
-          <a:bodyPr wrap="none" lIns="9144" rIns="9144" tIns="9144" bIns="9144" anchor="t">
-            <a:spAutoFit/>
-          </a:bodyPr>
-          <a:lstStyle/>
-          <a:p>
-            <a:pPr algn="l">
-              <a:spcAft>
-                <a:spcPts val="0"/>
-              </a:spcAft>
-              <a:defRPr sz="1000" b="1">
-                <a:solidFill>
-                  <a:srgbClr val="0D1117"/>
-                </a:solidFill>
-                <a:latin typeface="Inter"/>
-              </a:defRPr>
-            </a:pPr>
-            <a:r>
-              <a:rPr>
-                <a:latin typeface="Inter"/>
-              </a:rPr>
-              <a:t>Key judgment — monitoring priority</a:t>
-            </a:r>
-          </a:p>
-        </p:txBody>
-      </p:sp>
-      <p:sp>
-        <p:nvSpPr>
-          <p:cNvPr id="16" name="TextBox 15"/>
-          <p:cNvSpPr txBox="1"/>
-          <p:nvPr/>
-        </p:nvSpPr>
-        <p:spPr>
-          <a:xfrm>
-            <a:off x="804671" y="4201868"/>
-            <a:ext cx="10616184" cy="1924611"/>
-          </a:xfrm>
-          <a:prstGeom prst="rect">
-            <a:avLst/>
-          </a:prstGeom>
-          <a:noFill/>
-        </p:spPr>
-        <p:txBody>
-          <a:bodyPr wrap="none" lIns="9144" rIns="9144" tIns="9144" bIns="9144" anchor="t">
-            <a:spAutoFit/>
-          </a:bodyPr>
-          <a:lstStyle/>
-          <a:p>
-            <a:pPr algn="l">
-              <a:spcAft>
-                <a:spcPts val="0"/>
-              </a:spcAft>
-              <a:defRPr sz="950" b="0">
-                <a:solidFill>
-                  <a:srgbClr val="4A5563"/>
-                </a:solidFill>
-                <a:latin typeface="Inter"/>
-              </a:defRPr>
-            </a:pPr>
-            <a:r>
-              <a:rPr>
-                <a:latin typeface="Inter"/>
-              </a:rPr>
-              <a:t>Observation: Composite is 32.4 in the review evidence [S3]. Why it matters: This result determines which item receives priority in the next monitoring cycle. Uncertainty: Supporting coverage may omit later filings or corroborating detail. What would change the view: A new filing or report that resolves the item or changes it by 1%.</a:t>
-            </a:r>
-          </a:p>
-        </p:txBody>
-      </p:sp>
-      <p:sp>
-        <p:nvSpPr>
-          <p:cNvPr id="17" name="Rectangle 16"/>
           <p:cNvSpPr/>
           <p:nvPr/>
         </p:nvSpPr>
@@ -15290,7 +14090,7 @@
       </p:sp>
       <p:sp>
         <p:nvSpPr>
-          <p:cNvPr id="18" name="TextBox 17"/>
+          <p:cNvPr id="14" name="TextBox 13"/>
           <p:cNvSpPr txBox="1"/>
           <p:nvPr/>
         </p:nvSpPr>
@@ -15325,14 +14125,14 @@
               <a:rPr>
                 <a:latin typeface="Inter"/>
               </a:rPr>
-              <a:t>Sources: S2 · S3</a:t>
-            </a:r>
-          </a:p>
-        </p:txBody>
-      </p:sp>
-      <p:sp>
-        <p:nvSpPr>
-          <p:cNvPr id="19" name="TextBox 18"/>
+              <a:t>Sources: S3</a:t>
+            </a:r>
+          </a:p>
+        </p:txBody>
+      </p:sp>
+      <p:sp>
+        <p:nvSpPr>
+          <p:cNvPr id="15" name="TextBox 14"/>
           <p:cNvSpPr txBox="1"/>
           <p:nvPr/>
         </p:nvSpPr>
@@ -15374,7 +14174,7 @@
       </p:sp>
       <p:sp>
         <p:nvSpPr>
-          <p:cNvPr id="20" name="TextBox 19"/>
+          <p:cNvPr id="16" name="TextBox 15"/>
           <p:cNvSpPr txBox="1"/>
           <p:nvPr/>
         </p:nvSpPr>
@@ -18759,7 +17559,7 @@
         <p:spPr>
           <a:xfrm>
             <a:off x="640080" y="1325880"/>
-            <a:ext cx="10908792" cy="1365024"/>
+            <a:ext cx="10908792" cy="1557527"/>
           </a:xfrm>
           <a:prstGeom prst="rect">
             <a:avLst/>
@@ -18808,7 +17608,7 @@
         <p:spPr>
           <a:xfrm>
             <a:off x="640080" y="1325880"/>
-            <a:ext cx="54864" cy="1365024"/>
+            <a:ext cx="54864" cy="1557527"/>
           </a:xfrm>
           <a:prstGeom prst="rect">
             <a:avLst/>
@@ -18899,7 +17699,7 @@
         <p:spPr>
           <a:xfrm>
             <a:off x="804671" y="1719072"/>
-            <a:ext cx="10616184" cy="880392"/>
+            <a:ext cx="10616184" cy="1072895"/>
           </a:xfrm>
           <a:prstGeom prst="rect">
             <a:avLst/>
@@ -18940,8 +17740,8 @@
         </p:nvSpPr>
         <p:spPr>
           <a:xfrm>
-            <a:off x="640080" y="2800632"/>
-            <a:ext cx="10908792" cy="1365024"/>
+            <a:off x="640080" y="2993136"/>
+            <a:ext cx="10908792" cy="1557527"/>
           </a:xfrm>
           <a:prstGeom prst="rect">
             <a:avLst/>
@@ -18989,8 +17789,8 @@
         </p:nvSpPr>
         <p:spPr>
           <a:xfrm>
-            <a:off x="640080" y="2800632"/>
-            <a:ext cx="54864" cy="1365024"/>
+            <a:off x="640080" y="2993136"/>
+            <a:ext cx="54864" cy="1557527"/>
           </a:xfrm>
           <a:prstGeom prst="rect">
             <a:avLst/>
@@ -19038,7 +17838,7 @@
         </p:nvSpPr>
         <p:spPr>
           <a:xfrm>
-            <a:off x="804671" y="2910360"/>
+            <a:off x="804671" y="3102864"/>
             <a:ext cx="10616184" cy="228600"/>
           </a:xfrm>
           <a:prstGeom prst="rect">
@@ -19080,8 +17880,8 @@
         </p:nvSpPr>
         <p:spPr>
           <a:xfrm>
-            <a:off x="804671" y="3193824"/>
-            <a:ext cx="10616184" cy="880392"/>
+            <a:off x="804671" y="3386328"/>
+            <a:ext cx="10616184" cy="1072895"/>
           </a:xfrm>
           <a:prstGeom prst="rect">
             <a:avLst/>
@@ -19122,8 +17922,8 @@
         </p:nvSpPr>
         <p:spPr>
           <a:xfrm>
-            <a:off x="640080" y="4275385"/>
-            <a:ext cx="10908792" cy="1942534"/>
+            <a:off x="640080" y="4660392"/>
+            <a:ext cx="10908792" cy="1557527"/>
           </a:xfrm>
           <a:prstGeom prst="rect">
             <a:avLst/>
@@ -19171,8 +17971,8 @@
         </p:nvSpPr>
         <p:spPr>
           <a:xfrm>
-            <a:off x="640080" y="4275385"/>
-            <a:ext cx="54864" cy="1942534"/>
+            <a:off x="640080" y="4660392"/>
+            <a:ext cx="54864" cy="1557527"/>
           </a:xfrm>
           <a:prstGeom prst="rect">
             <a:avLst/>
@@ -19220,7 +18020,7 @@
         </p:nvSpPr>
         <p:spPr>
           <a:xfrm>
-            <a:off x="804671" y="4385113"/>
+            <a:off x="804671" y="4770120"/>
             <a:ext cx="10616184" cy="228600"/>
           </a:xfrm>
           <a:prstGeom prst="rect">
@@ -19262,8 +18062,8 @@
         </p:nvSpPr>
         <p:spPr>
           <a:xfrm>
-            <a:off x="804671" y="4668577"/>
-            <a:ext cx="10616184" cy="1457902"/>
+            <a:off x="804671" y="5053584"/>
+            <a:ext cx="10616184" cy="1072896"/>
           </a:xfrm>
           <a:prstGeom prst="rect">
             <a:avLst/>
@@ -19814,7 +18614,7 @@
         </p:nvGraphicFramePr>
         <p:xfrm>
           <a:off x="640080" y="1325880"/>
-          <a:ext cx="10908792" cy="4892040"/>
+          <a:ext cx="10908792" cy="3935729"/>
         </p:xfrm>
         <a:graphic>
           <a:graphicData uri="http://schemas.openxmlformats.org/drawingml/2006/chart">
@@ -19825,6 +18625,188 @@
       <p:sp>
         <p:nvSpPr>
           <p:cNvPr id="10" name="Rectangle 9"/>
+          <p:cNvSpPr/>
+          <p:nvPr/>
+        </p:nvSpPr>
+        <p:spPr>
+          <a:xfrm>
+            <a:off x="640080" y="5371338"/>
+            <a:ext cx="10908792" cy="846582"/>
+          </a:xfrm>
+          <a:prstGeom prst="rect">
+            <a:avLst/>
+          </a:prstGeom>
+          <a:solidFill>
+            <a:srgbClr val="F5F7F9"/>
+          </a:solidFill>
+          <a:ln>
+            <a:solidFill>
+              <a:srgbClr val="E3E7EC"/>
+            </a:solidFill>
+          </a:ln>
+        </p:spPr>
+        <p:style>
+          <a:lnRef idx="1">
+            <a:schemeClr val="accent1"/>
+          </a:lnRef>
+          <a:fillRef idx="3">
+            <a:schemeClr val="accent1"/>
+          </a:fillRef>
+          <a:effectRef idx="2">
+            <a:schemeClr val="accent1"/>
+          </a:effectRef>
+          <a:fontRef idx="minor">
+            <a:schemeClr val="lt1"/>
+          </a:fontRef>
+        </p:style>
+        <p:txBody>
+          <a:bodyPr rtlCol="0" anchor="ctr"/>
+          <a:lstStyle/>
+          <a:p>
+            <a:pPr algn="ctr">
+              <a:defRPr>
+                <a:latin typeface="Inter"/>
+              </a:defRPr>
+            </a:pPr>
+          </a:p>
+        </p:txBody>
+      </p:sp>
+      <p:sp>
+        <p:nvSpPr>
+          <p:cNvPr id="11" name="Rectangle 10"/>
+          <p:cNvSpPr/>
+          <p:nvPr/>
+        </p:nvSpPr>
+        <p:spPr>
+          <a:xfrm>
+            <a:off x="640080" y="5371338"/>
+            <a:ext cx="54864" cy="846582"/>
+          </a:xfrm>
+          <a:prstGeom prst="rect">
+            <a:avLst/>
+          </a:prstGeom>
+          <a:solidFill>
+            <a:srgbClr val="F2A93B"/>
+          </a:solidFill>
+          <a:ln>
+            <a:solidFill>
+              <a:srgbClr val="F2A93B"/>
+            </a:solidFill>
+          </a:ln>
+        </p:spPr>
+        <p:style>
+          <a:lnRef idx="1">
+            <a:schemeClr val="accent1"/>
+          </a:lnRef>
+          <a:fillRef idx="3">
+            <a:schemeClr val="accent1"/>
+          </a:fillRef>
+          <a:effectRef idx="2">
+            <a:schemeClr val="accent1"/>
+          </a:effectRef>
+          <a:fontRef idx="minor">
+            <a:schemeClr val="lt1"/>
+          </a:fontRef>
+        </p:style>
+        <p:txBody>
+          <a:bodyPr rtlCol="0" anchor="ctr"/>
+          <a:lstStyle/>
+          <a:p>
+            <a:pPr algn="ctr">
+              <a:defRPr>
+                <a:latin typeface="Inter"/>
+              </a:defRPr>
+            </a:pPr>
+          </a:p>
+        </p:txBody>
+      </p:sp>
+      <p:sp>
+        <p:nvSpPr>
+          <p:cNvPr id="12" name="TextBox 11"/>
+          <p:cNvSpPr txBox="1"/>
+          <p:nvPr/>
+        </p:nvSpPr>
+        <p:spPr>
+          <a:xfrm>
+            <a:off x="804671" y="5481066"/>
+            <a:ext cx="10616184" cy="228600"/>
+          </a:xfrm>
+          <a:prstGeom prst="rect">
+            <a:avLst/>
+          </a:prstGeom>
+          <a:noFill/>
+        </p:spPr>
+        <p:txBody>
+          <a:bodyPr wrap="none" lIns="9144" rIns="9144" tIns="9144" bIns="9144" anchor="t">
+            <a:spAutoFit/>
+          </a:bodyPr>
+          <a:lstStyle/>
+          <a:p>
+            <a:pPr algn="l">
+              <a:spcAft>
+                <a:spcPts val="0"/>
+              </a:spcAft>
+              <a:defRPr sz="1000" b="1">
+                <a:solidFill>
+                  <a:srgbClr val="0D1117"/>
+                </a:solidFill>
+                <a:latin typeface="Inter"/>
+              </a:defRPr>
+            </a:pPr>
+            <a:r>
+              <a:rPr>
+                <a:latin typeface="Inter"/>
+              </a:rPr>
+              <a:t>Analysis — Percentiles do not close gaps</a:t>
+            </a:r>
+          </a:p>
+        </p:txBody>
+      </p:sp>
+      <p:sp>
+        <p:nvSpPr>
+          <p:cNvPr id="13" name="TextBox 12"/>
+          <p:cNvSpPr txBox="1"/>
+          <p:nvPr/>
+        </p:nvSpPr>
+        <p:spPr>
+          <a:xfrm>
+            <a:off x="804671" y="5764530"/>
+            <a:ext cx="10616184" cy="361950"/>
+          </a:xfrm>
+          <a:prstGeom prst="rect">
+            <a:avLst/>
+          </a:prstGeom>
+          <a:noFill/>
+        </p:spPr>
+        <p:txBody>
+          <a:bodyPr wrap="none" lIns="9144" rIns="9144" tIns="9144" bIns="9144" anchor="t">
+            <a:spAutoFit/>
+          </a:bodyPr>
+          <a:lstStyle/>
+          <a:p>
+            <a:pPr algn="l">
+              <a:spcAft>
+                <a:spcPts val="0"/>
+              </a:spcAft>
+              <a:defRPr sz="950" b="0">
+                <a:solidFill>
+                  <a:srgbClr val="4A5563"/>
+                </a:solidFill>
+                <a:latin typeface="Inter"/>
+              </a:defRPr>
+            </a:pPr>
+            <a:r>
+              <a:rPr>
+                <a:latin typeface="Inter"/>
+              </a:rPr>
+              <a:t>Observation: No pillar reaches the 75th percentile, while events remain unavailable [S1]. Why it matters: Moderate peer positioning does not override unresolved findings. Uncertainty: Gradient-selected cohort coverage may…</a:t>
+            </a:r>
+          </a:p>
+        </p:txBody>
+      </p:sp>
+      <p:sp>
+        <p:nvSpPr>
+          <p:cNvPr id="14" name="Rectangle 13"/>
           <p:cNvSpPr/>
           <p:nvPr/>
         </p:nvSpPr>
@@ -19873,7 +18855,7 @@
       </p:sp>
       <p:sp>
         <p:nvSpPr>
-          <p:cNvPr id="11" name="TextBox 10"/>
+          <p:cNvPr id="15" name="TextBox 14"/>
           <p:cNvSpPr txBox="1"/>
           <p:nvPr/>
         </p:nvSpPr>
@@ -19915,7 +18897,7 @@
       </p:sp>
       <p:sp>
         <p:nvSpPr>
-          <p:cNvPr id="12" name="TextBox 11"/>
+          <p:cNvPr id="16" name="TextBox 15"/>
           <p:cNvSpPr txBox="1"/>
           <p:nvPr/>
         </p:nvSpPr>
@@ -19957,7 +18939,7 @@
       </p:sp>
       <p:sp>
         <p:nvSpPr>
-          <p:cNvPr id="13" name="TextBox 12"/>
+          <p:cNvPr id="17" name="TextBox 16"/>
           <p:cNvSpPr txBox="1"/>
           <p:nvPr/>
         </p:nvSpPr>

--- a/plugins/gradient-cio/assets/examples/gradient-odd-report.pptx
+++ b/plugins/gradient-cio/assets/examples/gradient-odd-report.pptx
@@ -4354,224 +4354,7 @@
       </p:sp>
       <p:sp>
         <p:nvSpPr>
-          <p:cNvPr id="17" name="Rectangle 16"/>
-          <p:cNvSpPr/>
-          <p:nvPr/>
-        </p:nvSpPr>
-        <p:spPr>
-          <a:xfrm>
-            <a:off x="685800" y="5687568"/>
-            <a:ext cx="3337560" cy="530352"/>
-          </a:xfrm>
-          <a:prstGeom prst="rect">
-            <a:avLst/>
-          </a:prstGeom>
-          <a:solidFill>
-            <a:srgbClr val="C6F432"/>
-          </a:solidFill>
-          <a:ln>
-            <a:solidFill>
-              <a:srgbClr val="C6F432"/>
-            </a:solidFill>
-          </a:ln>
-        </p:spPr>
-        <p:style>
-          <a:lnRef idx="1">
-            <a:schemeClr val="accent1"/>
-          </a:lnRef>
-          <a:fillRef idx="3">
-            <a:schemeClr val="accent1"/>
-          </a:fillRef>
-          <a:effectRef idx="2">
-            <a:schemeClr val="accent1"/>
-          </a:effectRef>
-          <a:fontRef idx="minor">
-            <a:schemeClr val="lt1"/>
-          </a:fontRef>
-        </p:style>
-        <p:txBody>
-          <a:bodyPr rtlCol="0" anchor="ctr"/>
-          <a:lstStyle/>
-          <a:p>
-            <a:pPr algn="ctr">
-              <a:defRPr>
-                <a:latin typeface="Inter"/>
-              </a:defRPr>
-            </a:pPr>
-          </a:p>
-        </p:txBody>
-      </p:sp>
-      <p:sp>
-        <p:nvSpPr>
-          <p:cNvPr id="18" name="TextBox 17"/>
-          <p:cNvSpPr txBox="1"/>
-          <p:nvPr/>
-        </p:nvSpPr>
-        <p:spPr>
-          <a:xfrm>
-            <a:off x="822960" y="5760720"/>
-            <a:ext cx="3063240" cy="128016"/>
-          </a:xfrm>
-          <a:prstGeom prst="rect">
-            <a:avLst/>
-          </a:prstGeom>
-          <a:noFill/>
-        </p:spPr>
-        <p:txBody>
-          <a:bodyPr wrap="none" lIns="9144" rIns="9144" tIns="9144" bIns="9144" anchor="t">
-            <a:spAutoFit/>
-          </a:bodyPr>
-          <a:lstStyle/>
-          <a:p>
-            <a:pPr algn="l">
-              <a:spcAft>
-                <a:spcPts val="0"/>
-              </a:spcAft>
-              <a:defRPr sz="620" b="1">
-                <a:solidFill>
-                  <a:srgbClr val="0D1117"/>
-                </a:solidFill>
-                <a:latin typeface="Inter"/>
-              </a:defRPr>
-            </a:pPr>
-            <a:r>
-              <a:rPr>
-                <a:latin typeface="Inter"/>
-              </a:rPr>
-              <a:t>OVERALL VIEW</a:t>
-            </a:r>
-          </a:p>
-        </p:txBody>
-      </p:sp>
-      <p:sp>
-        <p:nvSpPr>
-          <p:cNvPr id="19" name="TextBox 18"/>
-          <p:cNvSpPr txBox="1"/>
-          <p:nvPr/>
-        </p:nvSpPr>
-        <p:spPr>
-          <a:xfrm>
-            <a:off x="822960" y="5916168"/>
-            <a:ext cx="3063240" cy="182880"/>
-          </a:xfrm>
-          <a:prstGeom prst="rect">
-            <a:avLst/>
-          </a:prstGeom>
-          <a:noFill/>
-        </p:spPr>
-        <p:txBody>
-          <a:bodyPr wrap="none" lIns="9144" rIns="9144" tIns="9144" bIns="9144" anchor="t">
-            <a:spAutoFit/>
-          </a:bodyPr>
-          <a:lstStyle/>
-          <a:p>
-            <a:pPr algn="l">
-              <a:spcAft>
-                <a:spcPts val="0"/>
-              </a:spcAft>
-              <a:defRPr sz="900" b="1">
-                <a:solidFill>
-                  <a:srgbClr val="0D1117"/>
-                </a:solidFill>
-                <a:latin typeface="Inter"/>
-              </a:defRPr>
-            </a:pPr>
-            <a:r>
-              <a:rPr>
-                <a:latin typeface="Inter"/>
-              </a:rPr>
-              <a:t>No flags identified</a:t>
-            </a:r>
-          </a:p>
-        </p:txBody>
-      </p:sp>
-      <p:sp>
-        <p:nvSpPr>
-          <p:cNvPr id="20" name="TextBox 19"/>
-          <p:cNvSpPr txBox="1"/>
-          <p:nvPr/>
-        </p:nvSpPr>
-        <p:spPr>
-          <a:xfrm>
-            <a:off x="4297680" y="5733288"/>
-            <a:ext cx="3108960" cy="164592"/>
-          </a:xfrm>
-          <a:prstGeom prst="rect">
-            <a:avLst/>
-          </a:prstGeom>
-          <a:noFill/>
-        </p:spPr>
-        <p:txBody>
-          <a:bodyPr wrap="none" lIns="9144" rIns="9144" tIns="9144" bIns="9144" anchor="t">
-            <a:spAutoFit/>
-          </a:bodyPr>
-          <a:lstStyle/>
-          <a:p>
-            <a:pPr algn="l">
-              <a:spcAft>
-                <a:spcPts val="0"/>
-              </a:spcAft>
-              <a:defRPr sz="650" b="1">
-                <a:solidFill>
-                  <a:srgbClr val="8A94A1"/>
-                </a:solidFill>
-                <a:latin typeface="Inter"/>
-              </a:defRPr>
-            </a:pPr>
-            <a:r>
-              <a:rPr>
-                <a:latin typeface="Inter"/>
-              </a:rPr>
-              <a:t>SCOPE REVIEWED</a:t>
-            </a:r>
-          </a:p>
-        </p:txBody>
-      </p:sp>
-      <p:sp>
-        <p:nvSpPr>
-          <p:cNvPr id="21" name="TextBox 20"/>
-          <p:cNvSpPr txBox="1"/>
-          <p:nvPr/>
-        </p:nvSpPr>
-        <p:spPr>
-          <a:xfrm>
-            <a:off x="4297680" y="5934456"/>
-            <a:ext cx="3108960" cy="201168"/>
-          </a:xfrm>
-          <a:prstGeom prst="rect">
-            <a:avLst/>
-          </a:prstGeom>
-          <a:noFill/>
-        </p:spPr>
-        <p:txBody>
-          <a:bodyPr wrap="none" lIns="9144" rIns="9144" tIns="9144" bIns="9144" anchor="t">
-            <a:spAutoFit/>
-          </a:bodyPr>
-          <a:lstStyle/>
-          <a:p>
-            <a:pPr algn="l">
-              <a:spcAft>
-                <a:spcPts val="0"/>
-              </a:spcAft>
-              <a:defRPr sz="800" b="1">
-                <a:solidFill>
-                  <a:srgbClr val="FFFFFF"/>
-                </a:solidFill>
-                <a:latin typeface="Inter"/>
-              </a:defRPr>
-            </a:pPr>
-            <a:r>
-              <a:rPr>
-                <a:latin typeface="Inter"/>
-              </a:rPr>
-              <a:t>5 of 7 · Partial</a:t>
-            </a:r>
-          </a:p>
-        </p:txBody>
-      </p:sp>
-      <p:sp>
-        <p:nvSpPr>
-          <p:cNvPr id="22" name="TextBox 21"/>
+          <p:cNvPr id="17" name="TextBox 16"/>
           <p:cNvSpPr txBox="1"/>
           <p:nvPr/>
         </p:nvSpPr>
@@ -4613,7 +4396,7 @@
       </p:sp>
       <p:sp>
         <p:nvSpPr>
-          <p:cNvPr id="23" name="TextBox 22"/>
+          <p:cNvPr id="18" name="TextBox 17"/>
           <p:cNvSpPr txBox="1"/>
           <p:nvPr/>
         </p:nvSpPr>
@@ -4655,7 +4438,7 @@
       </p:sp>
       <p:sp>
         <p:nvSpPr>
-          <p:cNvPr id="24" name="TextBox 23"/>
+          <p:cNvPr id="19" name="TextBox 18"/>
           <p:cNvSpPr txBox="1"/>
           <p:nvPr/>
         </p:nvSpPr>
@@ -4771,7 +4554,7 @@
         <p:spPr>
           <a:xfrm>
             <a:off x="640080" y="329184"/>
-            <a:ext cx="5303520" cy="182880"/>
+            <a:ext cx="9875520" cy="182880"/>
           </a:xfrm>
           <a:prstGeom prst="rect">
             <a:avLst/>
@@ -4812,48 +4595,6 @@
         </p:nvSpPr>
         <p:spPr>
           <a:xfrm>
-            <a:off x="5897880" y="310896"/>
-            <a:ext cx="4800600" cy="256032"/>
-          </a:xfrm>
-          <a:prstGeom prst="rect">
-            <a:avLst/>
-          </a:prstGeom>
-          <a:noFill/>
-        </p:spPr>
-        <p:txBody>
-          <a:bodyPr wrap="none" lIns="9144" rIns="9144" tIns="9144" bIns="9144" anchor="t">
-            <a:spAutoFit/>
-          </a:bodyPr>
-          <a:lstStyle/>
-          <a:p>
-            <a:pPr algn="r">
-              <a:spcAft>
-                <a:spcPts val="0"/>
-              </a:spcAft>
-              <a:defRPr sz="680" b="1">
-                <a:solidFill>
-                  <a:srgbClr val="4F6B00"/>
-                </a:solidFill>
-                <a:latin typeface="Inter"/>
-              </a:defRPr>
-            </a:pPr>
-            <a:r>
-              <a:rPr>
-                <a:latin typeface="Inter"/>
-              </a:rPr>
-              <a:t>Illustrative, Gradient Maintained — demo data, not the client's holdings or managers</a:t>
-            </a:r>
-          </a:p>
-        </p:txBody>
-      </p:sp>
-      <p:sp>
-        <p:nvSpPr>
-          <p:cNvPr id="5" name="TextBox 4"/>
-          <p:cNvSpPr txBox="1"/>
-          <p:nvPr/>
-        </p:nvSpPr>
-        <p:spPr>
-          <a:xfrm>
             <a:off x="640080" y="566928"/>
             <a:ext cx="10058400" cy="530352"/>
           </a:xfrm>
@@ -4890,7 +4631,7 @@
       </p:sp>
       <p:sp>
         <p:nvSpPr>
-          <p:cNvPr id="6" name="Rectangle 5"/>
+          <p:cNvPr id="5" name="Rectangle 4"/>
           <p:cNvSpPr/>
           <p:nvPr/>
         </p:nvSpPr>
@@ -4939,7 +4680,7 @@
       </p:sp>
       <p:sp>
         <p:nvSpPr>
-          <p:cNvPr id="7" name="Rectangle 6"/>
+          <p:cNvPr id="6" name="Rectangle 5"/>
           <p:cNvSpPr/>
           <p:nvPr/>
         </p:nvSpPr>
@@ -4988,7 +4729,7 @@
       </p:sp>
       <p:sp>
         <p:nvSpPr>
-          <p:cNvPr id="8" name="TextBox 7"/>
+          <p:cNvPr id="7" name="TextBox 6"/>
           <p:cNvSpPr txBox="1"/>
           <p:nvPr/>
         </p:nvSpPr>
@@ -5030,7 +4771,7 @@
       </p:sp>
       <p:sp>
         <p:nvSpPr>
-          <p:cNvPr id="9" name="Rectangle 8"/>
+          <p:cNvPr id="8" name="Rectangle 7"/>
           <p:cNvSpPr/>
           <p:nvPr/>
         </p:nvSpPr>
@@ -5079,7 +4820,7 @@
       </p:sp>
       <p:sp>
         <p:nvSpPr>
-          <p:cNvPr id="10" name="Rectangle 9"/>
+          <p:cNvPr id="9" name="Rectangle 8"/>
           <p:cNvSpPr/>
           <p:nvPr/>
         </p:nvSpPr>
@@ -5128,7 +4869,7 @@
       </p:sp>
       <p:sp>
         <p:nvSpPr>
-          <p:cNvPr id="11" name="TextBox 10"/>
+          <p:cNvPr id="10" name="TextBox 9"/>
           <p:cNvSpPr txBox="1"/>
           <p:nvPr/>
         </p:nvSpPr>
@@ -5170,7 +4911,7 @@
       </p:sp>
       <p:sp>
         <p:nvSpPr>
-          <p:cNvPr id="12" name="TextBox 11"/>
+          <p:cNvPr id="11" name="TextBox 10"/>
           <p:cNvSpPr txBox="1"/>
           <p:nvPr/>
         </p:nvSpPr>
@@ -5212,7 +4953,7 @@
       </p:sp>
       <p:sp>
         <p:nvSpPr>
-          <p:cNvPr id="13" name="Rectangle 12"/>
+          <p:cNvPr id="12" name="Rectangle 11"/>
           <p:cNvSpPr/>
           <p:nvPr/>
         </p:nvSpPr>
@@ -5261,7 +5002,7 @@
       </p:sp>
       <p:sp>
         <p:nvSpPr>
-          <p:cNvPr id="14" name="Rectangle 13"/>
+          <p:cNvPr id="13" name="Rectangle 12"/>
           <p:cNvSpPr/>
           <p:nvPr/>
         </p:nvSpPr>
@@ -5310,7 +5051,7 @@
       </p:sp>
       <p:sp>
         <p:nvSpPr>
-          <p:cNvPr id="15" name="TextBox 14"/>
+          <p:cNvPr id="14" name="TextBox 13"/>
           <p:cNvSpPr txBox="1"/>
           <p:nvPr/>
         </p:nvSpPr>
@@ -5352,7 +5093,7 @@
       </p:sp>
       <p:sp>
         <p:nvSpPr>
-          <p:cNvPr id="16" name="TextBox 15"/>
+          <p:cNvPr id="15" name="TextBox 14"/>
           <p:cNvSpPr txBox="1"/>
           <p:nvPr/>
         </p:nvSpPr>
@@ -5387,14 +5128,14 @@
               <a:rPr>
                 <a:latin typeface="Inter"/>
               </a:rPr>
-              <a:t>Not available — fund-operations detail was not included in the reviewed evidence [S1].</a:t>
-            </a:r>
-          </a:p>
-        </p:txBody>
-      </p:sp>
-      <p:sp>
-        <p:nvSpPr>
-          <p:cNvPr id="17" name="Rectangle 16"/>
+              <a:t>Fund-operations detail was not included in the reviewed evidence [S1].</a:t>
+            </a:r>
+          </a:p>
+        </p:txBody>
+      </p:sp>
+      <p:sp>
+        <p:nvSpPr>
+          <p:cNvPr id="16" name="Rectangle 15"/>
           <p:cNvSpPr/>
           <p:nvPr/>
         </p:nvSpPr>
@@ -5443,7 +5184,7 @@
       </p:sp>
       <p:sp>
         <p:nvSpPr>
-          <p:cNvPr id="18" name="Rectangle 17"/>
+          <p:cNvPr id="17" name="Rectangle 16"/>
           <p:cNvSpPr/>
           <p:nvPr/>
         </p:nvSpPr>
@@ -5492,7 +5233,7 @@
       </p:sp>
       <p:sp>
         <p:nvSpPr>
-          <p:cNvPr id="19" name="TextBox 18"/>
+          <p:cNvPr id="18" name="TextBox 17"/>
           <p:cNvSpPr txBox="1"/>
           <p:nvPr/>
         </p:nvSpPr>
@@ -5534,7 +5275,7 @@
       </p:sp>
       <p:sp>
         <p:nvSpPr>
-          <p:cNvPr id="20" name="TextBox 19"/>
+          <p:cNvPr id="19" name="TextBox 18"/>
           <p:cNvSpPr txBox="1"/>
           <p:nvPr/>
         </p:nvSpPr>
@@ -5576,7 +5317,7 @@
       </p:sp>
       <p:sp>
         <p:nvSpPr>
-          <p:cNvPr id="21" name="Rectangle 20"/>
+          <p:cNvPr id="20" name="Rectangle 19"/>
           <p:cNvSpPr/>
           <p:nvPr/>
         </p:nvSpPr>
@@ -5625,7 +5366,7 @@
       </p:sp>
       <p:sp>
         <p:nvSpPr>
-          <p:cNvPr id="22" name="TextBox 21"/>
+          <p:cNvPr id="21" name="TextBox 20"/>
           <p:cNvSpPr txBox="1"/>
           <p:nvPr/>
         </p:nvSpPr>
@@ -5667,7 +5408,7 @@
       </p:sp>
       <p:sp>
         <p:nvSpPr>
-          <p:cNvPr id="23" name="TextBox 22"/>
+          <p:cNvPr id="22" name="TextBox 21"/>
           <p:cNvSpPr txBox="1"/>
           <p:nvPr/>
         </p:nvSpPr>
@@ -5709,7 +5450,7 @@
       </p:sp>
       <p:sp>
         <p:nvSpPr>
-          <p:cNvPr id="24" name="TextBox 23"/>
+          <p:cNvPr id="23" name="TextBox 22"/>
           <p:cNvSpPr txBox="1"/>
           <p:nvPr/>
         </p:nvSpPr>
@@ -5825,7 +5566,7 @@
         <p:spPr>
           <a:xfrm>
             <a:off x="640080" y="329184"/>
-            <a:ext cx="5303520" cy="182880"/>
+            <a:ext cx="9875520" cy="182880"/>
           </a:xfrm>
           <a:prstGeom prst="rect">
             <a:avLst/>
@@ -5866,48 +5607,6 @@
         </p:nvSpPr>
         <p:spPr>
           <a:xfrm>
-            <a:off x="5897880" y="310896"/>
-            <a:ext cx="4800600" cy="256032"/>
-          </a:xfrm>
-          <a:prstGeom prst="rect">
-            <a:avLst/>
-          </a:prstGeom>
-          <a:noFill/>
-        </p:spPr>
-        <p:txBody>
-          <a:bodyPr wrap="none" lIns="9144" rIns="9144" tIns="9144" bIns="9144" anchor="t">
-            <a:spAutoFit/>
-          </a:bodyPr>
-          <a:lstStyle/>
-          <a:p>
-            <a:pPr algn="r">
-              <a:spcAft>
-                <a:spcPts val="0"/>
-              </a:spcAft>
-              <a:defRPr sz="680" b="1">
-                <a:solidFill>
-                  <a:srgbClr val="4F6B00"/>
-                </a:solidFill>
-                <a:latin typeface="Inter"/>
-              </a:defRPr>
-            </a:pPr>
-            <a:r>
-              <a:rPr>
-                <a:latin typeface="Inter"/>
-              </a:rPr>
-              <a:t>Illustrative, Gradient Maintained — demo data, not the client's holdings or managers</a:t>
-            </a:r>
-          </a:p>
-        </p:txBody>
-      </p:sp>
-      <p:sp>
-        <p:nvSpPr>
-          <p:cNvPr id="5" name="TextBox 4"/>
-          <p:cNvSpPr txBox="1"/>
-          <p:nvPr/>
-        </p:nvSpPr>
-        <p:spPr>
-          <a:xfrm>
             <a:off x="640080" y="566928"/>
             <a:ext cx="10058400" cy="530352"/>
           </a:xfrm>
@@ -5944,7 +5643,7 @@
       </p:sp>
       <p:sp>
         <p:nvSpPr>
-          <p:cNvPr id="6" name="Rectangle 5"/>
+          <p:cNvPr id="5" name="Rectangle 4"/>
           <p:cNvSpPr/>
           <p:nvPr/>
         </p:nvSpPr>
@@ -5993,7 +5692,7 @@
       </p:sp>
       <p:sp>
         <p:nvSpPr>
-          <p:cNvPr id="7" name="Rectangle 6"/>
+          <p:cNvPr id="6" name="Rectangle 5"/>
           <p:cNvSpPr/>
           <p:nvPr/>
         </p:nvSpPr>
@@ -6042,7 +5741,7 @@
       </p:sp>
       <p:sp>
         <p:nvSpPr>
-          <p:cNvPr id="8" name="TextBox 7"/>
+          <p:cNvPr id="7" name="TextBox 6"/>
           <p:cNvSpPr txBox="1"/>
           <p:nvPr/>
         </p:nvSpPr>
@@ -6084,7 +5783,7 @@
       </p:sp>
       <p:sp>
         <p:nvSpPr>
-          <p:cNvPr id="9" name="Rectangle 8"/>
+          <p:cNvPr id="8" name="Rectangle 7"/>
           <p:cNvSpPr/>
           <p:nvPr/>
         </p:nvSpPr>
@@ -6133,7 +5832,7 @@
       </p:sp>
       <p:sp>
         <p:nvSpPr>
-          <p:cNvPr id="10" name="Rectangle 9"/>
+          <p:cNvPr id="9" name="Rectangle 8"/>
           <p:cNvSpPr/>
           <p:nvPr/>
         </p:nvSpPr>
@@ -6182,7 +5881,7 @@
       </p:sp>
       <p:sp>
         <p:nvSpPr>
-          <p:cNvPr id="11" name="TextBox 10"/>
+          <p:cNvPr id="10" name="TextBox 9"/>
           <p:cNvSpPr txBox="1"/>
           <p:nvPr/>
         </p:nvSpPr>
@@ -6224,7 +5923,7 @@
       </p:sp>
       <p:sp>
         <p:nvSpPr>
-          <p:cNvPr id="12" name="TextBox 11"/>
+          <p:cNvPr id="11" name="TextBox 10"/>
           <p:cNvSpPr txBox="1"/>
           <p:nvPr/>
         </p:nvSpPr>
@@ -6266,7 +5965,7 @@
       </p:sp>
       <p:sp>
         <p:nvSpPr>
-          <p:cNvPr id="13" name="Rectangle 12"/>
+          <p:cNvPr id="12" name="Rectangle 11"/>
           <p:cNvSpPr/>
           <p:nvPr/>
         </p:nvSpPr>
@@ -6315,7 +6014,7 @@
       </p:sp>
       <p:sp>
         <p:nvSpPr>
-          <p:cNvPr id="14" name="Rectangle 13"/>
+          <p:cNvPr id="13" name="Rectangle 12"/>
           <p:cNvSpPr/>
           <p:nvPr/>
         </p:nvSpPr>
@@ -6364,7 +6063,7 @@
       </p:sp>
       <p:sp>
         <p:nvSpPr>
-          <p:cNvPr id="15" name="TextBox 14"/>
+          <p:cNvPr id="14" name="TextBox 13"/>
           <p:cNvSpPr txBox="1"/>
           <p:nvPr/>
         </p:nvSpPr>
@@ -6406,7 +6105,7 @@
       </p:sp>
       <p:sp>
         <p:nvSpPr>
-          <p:cNvPr id="16" name="TextBox 15"/>
+          <p:cNvPr id="15" name="TextBox 14"/>
           <p:cNvSpPr txBox="1"/>
           <p:nvPr/>
         </p:nvSpPr>
@@ -6441,14 +6140,14 @@
               <a:rPr>
                 <a:latin typeface="Inter"/>
               </a:rPr>
-              <a:t>Not available — holding rows were not included in the reviewed evidence [S3].</a:t>
-            </a:r>
-          </a:p>
-        </p:txBody>
-      </p:sp>
-      <p:sp>
-        <p:nvSpPr>
-          <p:cNvPr id="17" name="Rectangle 16"/>
+              <a:t>Holding rows were not included in the reviewed evidence [S3].</a:t>
+            </a:r>
+          </a:p>
+        </p:txBody>
+      </p:sp>
+      <p:sp>
+        <p:nvSpPr>
+          <p:cNvPr id="16" name="Rectangle 15"/>
           <p:cNvSpPr/>
           <p:nvPr/>
         </p:nvSpPr>
@@ -6497,7 +6196,7 @@
       </p:sp>
       <p:sp>
         <p:nvSpPr>
-          <p:cNvPr id="18" name="Rectangle 17"/>
+          <p:cNvPr id="17" name="Rectangle 16"/>
           <p:cNvSpPr/>
           <p:nvPr/>
         </p:nvSpPr>
@@ -6546,7 +6245,7 @@
       </p:sp>
       <p:sp>
         <p:nvSpPr>
-          <p:cNvPr id="19" name="TextBox 18"/>
+          <p:cNvPr id="18" name="TextBox 17"/>
           <p:cNvSpPr txBox="1"/>
           <p:nvPr/>
         </p:nvSpPr>
@@ -6588,7 +6287,7 @@
       </p:sp>
       <p:sp>
         <p:nvSpPr>
-          <p:cNvPr id="20" name="TextBox 19"/>
+          <p:cNvPr id="19" name="TextBox 18"/>
           <p:cNvSpPr txBox="1"/>
           <p:nvPr/>
         </p:nvSpPr>
@@ -6630,7 +6329,7 @@
       </p:sp>
       <p:sp>
         <p:nvSpPr>
-          <p:cNvPr id="21" name="Rectangle 20"/>
+          <p:cNvPr id="20" name="Rectangle 19"/>
           <p:cNvSpPr/>
           <p:nvPr/>
         </p:nvSpPr>
@@ -6679,7 +6378,7 @@
       </p:sp>
       <p:sp>
         <p:nvSpPr>
-          <p:cNvPr id="22" name="TextBox 21"/>
+          <p:cNvPr id="21" name="TextBox 20"/>
           <p:cNvSpPr txBox="1"/>
           <p:nvPr/>
         </p:nvSpPr>
@@ -6721,7 +6420,7 @@
       </p:sp>
       <p:sp>
         <p:nvSpPr>
-          <p:cNvPr id="23" name="TextBox 22"/>
+          <p:cNvPr id="22" name="TextBox 21"/>
           <p:cNvSpPr txBox="1"/>
           <p:nvPr/>
         </p:nvSpPr>
@@ -6763,7 +6462,7 @@
       </p:sp>
       <p:sp>
         <p:nvSpPr>
-          <p:cNvPr id="24" name="TextBox 23"/>
+          <p:cNvPr id="23" name="TextBox 22"/>
           <p:cNvSpPr txBox="1"/>
           <p:nvPr/>
         </p:nvSpPr>
@@ -6879,7 +6578,7 @@
         <p:spPr>
           <a:xfrm>
             <a:off x="640080" y="329184"/>
-            <a:ext cx="5303520" cy="182880"/>
+            <a:ext cx="9875520" cy="182880"/>
           </a:xfrm>
           <a:prstGeom prst="rect">
             <a:avLst/>
@@ -6920,48 +6619,6 @@
         </p:nvSpPr>
         <p:spPr>
           <a:xfrm>
-            <a:off x="5897880" y="310896"/>
-            <a:ext cx="4800600" cy="256032"/>
-          </a:xfrm>
-          <a:prstGeom prst="rect">
-            <a:avLst/>
-          </a:prstGeom>
-          <a:noFill/>
-        </p:spPr>
-        <p:txBody>
-          <a:bodyPr wrap="none" lIns="9144" rIns="9144" tIns="9144" bIns="9144" anchor="t">
-            <a:spAutoFit/>
-          </a:bodyPr>
-          <a:lstStyle/>
-          <a:p>
-            <a:pPr algn="r">
-              <a:spcAft>
-                <a:spcPts val="0"/>
-              </a:spcAft>
-              <a:defRPr sz="680" b="1">
-                <a:solidFill>
-                  <a:srgbClr val="4F6B00"/>
-                </a:solidFill>
-                <a:latin typeface="Inter"/>
-              </a:defRPr>
-            </a:pPr>
-            <a:r>
-              <a:rPr>
-                <a:latin typeface="Inter"/>
-              </a:rPr>
-              <a:t>Illustrative, Gradient Maintained — demo data, not the client's holdings or managers</a:t>
-            </a:r>
-          </a:p>
-        </p:txBody>
-      </p:sp>
-      <p:sp>
-        <p:nvSpPr>
-          <p:cNvPr id="5" name="TextBox 4"/>
-          <p:cNvSpPr txBox="1"/>
-          <p:nvPr/>
-        </p:nvSpPr>
-        <p:spPr>
-          <a:xfrm>
             <a:off x="640080" y="566928"/>
             <a:ext cx="10058400" cy="530352"/>
           </a:xfrm>
@@ -6998,7 +6655,7 @@
       </p:sp>
       <p:sp>
         <p:nvSpPr>
-          <p:cNvPr id="6" name="Rectangle 5"/>
+          <p:cNvPr id="5" name="Rectangle 4"/>
           <p:cNvSpPr/>
           <p:nvPr/>
         </p:nvSpPr>
@@ -7047,7 +6704,7 @@
       </p:sp>
       <p:sp>
         <p:nvSpPr>
-          <p:cNvPr id="7" name="Rectangle 6"/>
+          <p:cNvPr id="6" name="Rectangle 5"/>
           <p:cNvSpPr/>
           <p:nvPr/>
         </p:nvSpPr>
@@ -7096,7 +6753,7 @@
       </p:sp>
       <p:sp>
         <p:nvSpPr>
-          <p:cNvPr id="8" name="TextBox 7"/>
+          <p:cNvPr id="7" name="TextBox 6"/>
           <p:cNvSpPr txBox="1"/>
           <p:nvPr/>
         </p:nvSpPr>
@@ -7138,7 +6795,7 @@
       </p:sp>
       <p:sp>
         <p:nvSpPr>
-          <p:cNvPr id="9" name="TextBox 8"/>
+          <p:cNvPr id="8" name="TextBox 7"/>
           <p:cNvSpPr txBox="1"/>
           <p:nvPr/>
         </p:nvSpPr>
@@ -7180,7 +6837,7 @@
       </p:sp>
       <p:sp>
         <p:nvSpPr>
-          <p:cNvPr id="10" name="Rectangle 9"/>
+          <p:cNvPr id="9" name="Rectangle 8"/>
           <p:cNvSpPr/>
           <p:nvPr/>
         </p:nvSpPr>
@@ -7229,7 +6886,7 @@
       </p:sp>
       <p:sp>
         <p:nvSpPr>
-          <p:cNvPr id="11" name="Oval 10"/>
+          <p:cNvPr id="10" name="Oval 9"/>
           <p:cNvSpPr/>
           <p:nvPr/>
         </p:nvSpPr>
@@ -7278,7 +6935,7 @@
       </p:sp>
       <p:sp>
         <p:nvSpPr>
-          <p:cNvPr id="12" name="TextBox 11"/>
+          <p:cNvPr id="11" name="TextBox 10"/>
           <p:cNvSpPr txBox="1"/>
           <p:nvPr/>
         </p:nvSpPr>
@@ -7320,7 +6977,7 @@
       </p:sp>
       <p:sp>
         <p:nvSpPr>
-          <p:cNvPr id="13" name="TextBox 12"/>
+          <p:cNvPr id="12" name="TextBox 11"/>
           <p:cNvSpPr txBox="1"/>
           <p:nvPr/>
         </p:nvSpPr>
@@ -7362,7 +7019,7 @@
       </p:sp>
       <p:sp>
         <p:nvSpPr>
-          <p:cNvPr id="14" name="TextBox 13"/>
+          <p:cNvPr id="13" name="TextBox 12"/>
           <p:cNvSpPr txBox="1"/>
           <p:nvPr/>
         </p:nvSpPr>
@@ -7404,7 +7061,7 @@
       </p:sp>
       <p:sp>
         <p:nvSpPr>
-          <p:cNvPr id="15" name="Oval 14"/>
+          <p:cNvPr id="14" name="Oval 13"/>
           <p:cNvSpPr/>
           <p:nvPr/>
         </p:nvSpPr>
@@ -7453,7 +7110,7 @@
       </p:sp>
       <p:sp>
         <p:nvSpPr>
-          <p:cNvPr id="16" name="TextBox 15"/>
+          <p:cNvPr id="15" name="TextBox 14"/>
           <p:cNvSpPr txBox="1"/>
           <p:nvPr/>
         </p:nvSpPr>
@@ -7495,7 +7152,7 @@
       </p:sp>
       <p:sp>
         <p:nvSpPr>
-          <p:cNvPr id="17" name="TextBox 16"/>
+          <p:cNvPr id="16" name="TextBox 15"/>
           <p:cNvSpPr txBox="1"/>
           <p:nvPr/>
         </p:nvSpPr>
@@ -7537,7 +7194,7 @@
       </p:sp>
       <p:sp>
         <p:nvSpPr>
-          <p:cNvPr id="18" name="TextBox 17"/>
+          <p:cNvPr id="17" name="TextBox 16"/>
           <p:cNvSpPr txBox="1"/>
           <p:nvPr/>
         </p:nvSpPr>
@@ -7579,7 +7236,7 @@
       </p:sp>
       <p:sp>
         <p:nvSpPr>
-          <p:cNvPr id="19" name="Oval 18"/>
+          <p:cNvPr id="18" name="Oval 17"/>
           <p:cNvSpPr/>
           <p:nvPr/>
         </p:nvSpPr>
@@ -7628,7 +7285,7 @@
       </p:sp>
       <p:sp>
         <p:nvSpPr>
-          <p:cNvPr id="20" name="TextBox 19"/>
+          <p:cNvPr id="19" name="TextBox 18"/>
           <p:cNvSpPr txBox="1"/>
           <p:nvPr/>
         </p:nvSpPr>
@@ -7670,7 +7327,7 @@
       </p:sp>
       <p:sp>
         <p:nvSpPr>
-          <p:cNvPr id="21" name="TextBox 20"/>
+          <p:cNvPr id="20" name="TextBox 19"/>
           <p:cNvSpPr txBox="1"/>
           <p:nvPr/>
         </p:nvSpPr>
@@ -7712,7 +7369,7 @@
       </p:sp>
       <p:sp>
         <p:nvSpPr>
-          <p:cNvPr id="22" name="TextBox 21"/>
+          <p:cNvPr id="21" name="TextBox 20"/>
           <p:cNvSpPr txBox="1"/>
           <p:nvPr/>
         </p:nvSpPr>
@@ -7754,7 +7411,7 @@
       </p:sp>
       <p:sp>
         <p:nvSpPr>
-          <p:cNvPr id="23" name="Rectangle 22"/>
+          <p:cNvPr id="22" name="Rectangle 21"/>
           <p:cNvSpPr/>
           <p:nvPr/>
         </p:nvSpPr>
@@ -7803,7 +7460,7 @@
       </p:sp>
       <p:sp>
         <p:nvSpPr>
-          <p:cNvPr id="24" name="Rectangle 23"/>
+          <p:cNvPr id="23" name="Rectangle 22"/>
           <p:cNvSpPr/>
           <p:nvPr/>
         </p:nvSpPr>
@@ -7852,7 +7509,7 @@
       </p:sp>
       <p:sp>
         <p:nvSpPr>
-          <p:cNvPr id="25" name="TextBox 24"/>
+          <p:cNvPr id="24" name="TextBox 23"/>
           <p:cNvSpPr txBox="1"/>
           <p:nvPr/>
         </p:nvSpPr>
@@ -7894,7 +7551,7 @@
       </p:sp>
       <p:sp>
         <p:nvSpPr>
-          <p:cNvPr id="26" name="TextBox 25"/>
+          <p:cNvPr id="25" name="TextBox 24"/>
           <p:cNvSpPr txBox="1"/>
           <p:nvPr/>
         </p:nvSpPr>
@@ -7929,14 +7586,14 @@
               <a:rPr>
                 <a:latin typeface="Inter"/>
               </a:rPr>
-              <a:t>Not available — monitoring details were not included in the reviewed evidence [S2].</a:t>
-            </a:r>
-          </a:p>
-        </p:txBody>
-      </p:sp>
-      <p:sp>
-        <p:nvSpPr>
-          <p:cNvPr id="27" name="Rectangle 26"/>
+              <a:t>Monitoring details were not included in the reviewed evidence [S2].</a:t>
+            </a:r>
+          </a:p>
+        </p:txBody>
+      </p:sp>
+      <p:sp>
+        <p:nvSpPr>
+          <p:cNvPr id="26" name="Rectangle 25"/>
           <p:cNvSpPr/>
           <p:nvPr/>
         </p:nvSpPr>
@@ -7985,7 +7642,7 @@
       </p:sp>
       <p:sp>
         <p:nvSpPr>
-          <p:cNvPr id="28" name="Rectangle 27"/>
+          <p:cNvPr id="27" name="Rectangle 26"/>
           <p:cNvSpPr/>
           <p:nvPr/>
         </p:nvSpPr>
@@ -8034,7 +7691,7 @@
       </p:sp>
       <p:sp>
         <p:nvSpPr>
-          <p:cNvPr id="29" name="TextBox 28"/>
+          <p:cNvPr id="28" name="TextBox 27"/>
           <p:cNvSpPr txBox="1"/>
           <p:nvPr/>
         </p:nvSpPr>
@@ -8076,7 +7733,7 @@
       </p:sp>
       <p:sp>
         <p:nvSpPr>
-          <p:cNvPr id="30" name="TextBox 29"/>
+          <p:cNvPr id="29" name="TextBox 28"/>
           <p:cNvSpPr txBox="1"/>
           <p:nvPr/>
         </p:nvSpPr>
@@ -8118,7 +7775,7 @@
       </p:sp>
       <p:sp>
         <p:nvSpPr>
-          <p:cNvPr id="31" name="Rectangle 30"/>
+          <p:cNvPr id="30" name="Rectangle 29"/>
           <p:cNvSpPr/>
           <p:nvPr/>
         </p:nvSpPr>
@@ -8167,7 +7824,7 @@
       </p:sp>
       <p:sp>
         <p:nvSpPr>
-          <p:cNvPr id="32" name="TextBox 31"/>
+          <p:cNvPr id="31" name="TextBox 30"/>
           <p:cNvSpPr txBox="1"/>
           <p:nvPr/>
         </p:nvSpPr>
@@ -8209,7 +7866,7 @@
       </p:sp>
       <p:sp>
         <p:nvSpPr>
-          <p:cNvPr id="33" name="TextBox 32"/>
+          <p:cNvPr id="32" name="TextBox 31"/>
           <p:cNvSpPr txBox="1"/>
           <p:nvPr/>
         </p:nvSpPr>
@@ -8251,7 +7908,7 @@
       </p:sp>
       <p:sp>
         <p:nvSpPr>
-          <p:cNvPr id="34" name="TextBox 33"/>
+          <p:cNvPr id="33" name="TextBox 32"/>
           <p:cNvSpPr txBox="1"/>
           <p:nvPr/>
         </p:nvSpPr>
@@ -8366,48 +8023,6 @@
         </p:nvSpPr>
         <p:spPr>
           <a:xfrm>
-            <a:off x="5897880" y="310896"/>
-            <a:ext cx="4800600" cy="256032"/>
-          </a:xfrm>
-          <a:prstGeom prst="rect">
-            <a:avLst/>
-          </a:prstGeom>
-          <a:noFill/>
-        </p:spPr>
-        <p:txBody>
-          <a:bodyPr wrap="none" lIns="9144" rIns="9144" tIns="9144" bIns="9144" anchor="t">
-            <a:spAutoFit/>
-          </a:bodyPr>
-          <a:lstStyle/>
-          <a:p>
-            <a:pPr algn="r">
-              <a:spcAft>
-                <a:spcPts val="0"/>
-              </a:spcAft>
-              <a:defRPr sz="680" b="1">
-                <a:solidFill>
-                  <a:srgbClr val="4F6B00"/>
-                </a:solidFill>
-                <a:latin typeface="Inter"/>
-              </a:defRPr>
-            </a:pPr>
-            <a:r>
-              <a:rPr>
-                <a:latin typeface="Inter"/>
-              </a:rPr>
-              <a:t>Illustrative, Gradient Maintained — demo data, not the client's holdings or managers</a:t>
-            </a:r>
-          </a:p>
-        </p:txBody>
-      </p:sp>
-      <p:sp>
-        <p:nvSpPr>
-          <p:cNvPr id="4" name="TextBox 3"/>
-          <p:cNvSpPr txBox="1"/>
-          <p:nvPr/>
-        </p:nvSpPr>
-        <p:spPr>
-          <a:xfrm>
             <a:off x="640080" y="566928"/>
             <a:ext cx="10058400" cy="530352"/>
           </a:xfrm>
@@ -8444,7 +8059,7 @@
       </p:sp>
       <p:sp>
         <p:nvSpPr>
-          <p:cNvPr id="5" name="Rectangle 4"/>
+          <p:cNvPr id="4" name="Rectangle 3"/>
           <p:cNvSpPr/>
           <p:nvPr/>
         </p:nvSpPr>
@@ -8493,7 +8108,7 @@
       </p:sp>
       <p:sp>
         <p:nvSpPr>
-          <p:cNvPr id="6" name="Rectangle 5"/>
+          <p:cNvPr id="5" name="Rectangle 4"/>
           <p:cNvSpPr/>
           <p:nvPr/>
         </p:nvSpPr>
@@ -8542,7 +8157,7 @@
       </p:sp>
       <p:sp>
         <p:nvSpPr>
-          <p:cNvPr id="7" name="TextBox 6"/>
+          <p:cNvPr id="6" name="TextBox 5"/>
           <p:cNvSpPr txBox="1"/>
           <p:nvPr/>
         </p:nvSpPr>
@@ -8584,7 +8199,7 @@
       </p:sp>
       <p:sp>
         <p:nvSpPr>
-          <p:cNvPr id="8" name="Rectangle 7"/>
+          <p:cNvPr id="7" name="Rectangle 6"/>
           <p:cNvSpPr/>
           <p:nvPr/>
         </p:nvSpPr>
@@ -8633,7 +8248,7 @@
       </p:sp>
       <p:sp>
         <p:nvSpPr>
-          <p:cNvPr id="9" name="Rectangle 8"/>
+          <p:cNvPr id="8" name="Rectangle 7"/>
           <p:cNvSpPr/>
           <p:nvPr/>
         </p:nvSpPr>
@@ -8682,7 +8297,7 @@
       </p:sp>
       <p:sp>
         <p:nvSpPr>
-          <p:cNvPr id="10" name="TextBox 9"/>
+          <p:cNvPr id="9" name="TextBox 8"/>
           <p:cNvSpPr txBox="1"/>
           <p:nvPr/>
         </p:nvSpPr>
@@ -8724,7 +8339,7 @@
       </p:sp>
       <p:sp>
         <p:nvSpPr>
-          <p:cNvPr id="11" name="TextBox 10"/>
+          <p:cNvPr id="10" name="TextBox 9"/>
           <p:cNvSpPr txBox="1"/>
           <p:nvPr/>
         </p:nvSpPr>
@@ -8759,14 +8374,14 @@
               <a:rPr>
                 <a:latin typeface="Inter"/>
               </a:rPr>
-              <a:t>Not available — no follow-up questions are included in this review [S1].</a:t>
-            </a:r>
-          </a:p>
-        </p:txBody>
-      </p:sp>
-      <p:sp>
-        <p:nvSpPr>
-          <p:cNvPr id="12" name="Rectangle 11"/>
+              <a:t>No follow-up questions are included in this review [S1].</a:t>
+            </a:r>
+          </a:p>
+        </p:txBody>
+      </p:sp>
+      <p:sp>
+        <p:nvSpPr>
+          <p:cNvPr id="11" name="Rectangle 10"/>
           <p:cNvSpPr/>
           <p:nvPr/>
         </p:nvSpPr>
@@ -8815,7 +8430,7 @@
       </p:sp>
       <p:sp>
         <p:nvSpPr>
-          <p:cNvPr id="13" name="TextBox 12"/>
+          <p:cNvPr id="12" name="TextBox 11"/>
           <p:cNvSpPr txBox="1"/>
           <p:nvPr/>
         </p:nvSpPr>
@@ -8857,7 +8472,7 @@
       </p:sp>
       <p:sp>
         <p:nvSpPr>
-          <p:cNvPr id="14" name="TextBox 13"/>
+          <p:cNvPr id="13" name="TextBox 12"/>
           <p:cNvSpPr txBox="1"/>
           <p:nvPr/>
         </p:nvSpPr>
@@ -8899,7 +8514,7 @@
       </p:sp>
       <p:sp>
         <p:nvSpPr>
-          <p:cNvPr id="15" name="TextBox 14"/>
+          <p:cNvPr id="14" name="TextBox 13"/>
           <p:cNvSpPr txBox="1"/>
           <p:nvPr/>
         </p:nvSpPr>
@@ -9014,48 +8629,6 @@
         </p:nvSpPr>
         <p:spPr>
           <a:xfrm>
-            <a:off x="5897880" y="310896"/>
-            <a:ext cx="4800600" cy="256032"/>
-          </a:xfrm>
-          <a:prstGeom prst="rect">
-            <a:avLst/>
-          </a:prstGeom>
-          <a:noFill/>
-        </p:spPr>
-        <p:txBody>
-          <a:bodyPr wrap="none" lIns="9144" rIns="9144" tIns="9144" bIns="9144" anchor="t">
-            <a:spAutoFit/>
-          </a:bodyPr>
-          <a:lstStyle/>
-          <a:p>
-            <a:pPr algn="r">
-              <a:spcAft>
-                <a:spcPts val="0"/>
-              </a:spcAft>
-              <a:defRPr sz="680" b="1">
-                <a:solidFill>
-                  <a:srgbClr val="4F6B00"/>
-                </a:solidFill>
-                <a:latin typeface="Inter"/>
-              </a:defRPr>
-            </a:pPr>
-            <a:r>
-              <a:rPr>
-                <a:latin typeface="Inter"/>
-              </a:rPr>
-              <a:t>Illustrative, Gradient Maintained — demo data, not the client's holdings or managers</a:t>
-            </a:r>
-          </a:p>
-        </p:txBody>
-      </p:sp>
-      <p:sp>
-        <p:nvSpPr>
-          <p:cNvPr id="4" name="TextBox 3"/>
-          <p:cNvSpPr txBox="1"/>
-          <p:nvPr/>
-        </p:nvSpPr>
-        <p:spPr>
-          <a:xfrm>
             <a:off x="640080" y="566928"/>
             <a:ext cx="10058400" cy="530352"/>
           </a:xfrm>
@@ -9092,7 +8665,7 @@
       </p:sp>
       <p:sp>
         <p:nvSpPr>
-          <p:cNvPr id="5" name="Rectangle 4"/>
+          <p:cNvPr id="4" name="Rectangle 3"/>
           <p:cNvSpPr/>
           <p:nvPr/>
         </p:nvSpPr>
@@ -9141,7 +8714,7 @@
       </p:sp>
       <p:sp>
         <p:nvSpPr>
-          <p:cNvPr id="6" name="Rectangle 5"/>
+          <p:cNvPr id="5" name="Rectangle 4"/>
           <p:cNvSpPr/>
           <p:nvPr/>
         </p:nvSpPr>
@@ -9190,7 +8763,7 @@
       </p:sp>
       <p:sp>
         <p:nvSpPr>
-          <p:cNvPr id="7" name="TextBox 6"/>
+          <p:cNvPr id="6" name="TextBox 5"/>
           <p:cNvSpPr txBox="1"/>
           <p:nvPr/>
         </p:nvSpPr>
@@ -9232,7 +8805,7 @@
       </p:sp>
       <p:sp>
         <p:nvSpPr>
-          <p:cNvPr id="8" name="TextBox 7"/>
+          <p:cNvPr id="7" name="TextBox 6"/>
           <p:cNvSpPr txBox="1"/>
           <p:nvPr/>
         </p:nvSpPr>
@@ -9274,7 +8847,7 @@
       </p:sp>
       <p:graphicFrame>
         <p:nvGraphicFramePr>
-          <p:cNvPr id="9" name="Table 8"/>
+          <p:cNvPr id="8" name="Table 7"/>
           <p:cNvGraphicFramePr>
             <a:graphicFrameLocks noGrp="1"/>
           </p:cNvGraphicFramePr>
@@ -9282,7 +8855,7 @@
         </p:nvGraphicFramePr>
         <p:xfrm>
           <a:off x="640080" y="1600200"/>
-          <a:ext cx="10908792" cy="1981304"/>
+          <a:ext cx="10908792" cy="1110283"/>
         </p:xfrm>
         <a:graphic>
           <a:graphicData uri="http://schemas.openxmlformats.org/drawingml/2006/table">
@@ -9292,16 +8865,12 @@
               </a:tblPr>
               <a:tblGrid>
                 <a:gridCol w="2011680"/>
-                <a:gridCol w="1112139"/>
-                <a:gridCol w="1112139"/>
-                <a:gridCol w="1112139"/>
-                <a:gridCol w="1112139"/>
-                <a:gridCol w="1112139"/>
-                <a:gridCol w="1112139"/>
-                <a:gridCol w="1112139"/>
-                <a:gridCol w="1112139"/>
+                <a:gridCol w="2224278"/>
+                <a:gridCol w="2224278"/>
+                <a:gridCol w="2224278"/>
+                <a:gridCol w="2224278"/>
               </a:tblGrid>
-              <a:tr h="495326">
+              <a:tr h="277570">
                 <a:tc>
                   <a:txBody>
                     <a:bodyPr/>
@@ -9373,61 +8942,7 @@
                         <a:rPr>
                           <a:latin typeface="Inter"/>
                         </a:rPr>
-                        <a:t>Basis</a:t>
-                      </a:r>
-                    </a:p>
-                  </a:txBody>
-                  <a:tcPr marL="54864" marR="54864" marT="27432" marB="27432" anchor="ctr">
-                    <a:solidFill>
-                      <a:srgbClr val="0D1117"/>
-                    </a:solidFill>
-                  </a:tcPr>
-                </a:tc>
-                <a:tc>
-                  <a:txBody>
-                    <a:bodyPr/>
-                    <a:lstStyle/>
-                    <a:p>
-                      <a:pPr>
-                        <a:defRPr sz="750" b="1">
-                          <a:solidFill>
-                            <a:srgbClr val="FFFFFF"/>
-                          </a:solidFill>
-                          <a:latin typeface="Inter"/>
-                        </a:defRPr>
-                      </a:pPr>
-                      <a:r>
-                        <a:rPr>
-                          <a:latin typeface="Inter"/>
-                        </a:rPr>
-                        <a:t>Tool / view</a:t>
-                      </a:r>
-                    </a:p>
-                  </a:txBody>
-                  <a:tcPr marL="54864" marR="54864" marT="27432" marB="27432" anchor="ctr">
-                    <a:solidFill>
-                      <a:srgbClr val="0D1117"/>
-                    </a:solidFill>
-                  </a:tcPr>
-                </a:tc>
-                <a:tc>
-                  <a:txBody>
-                    <a:bodyPr/>
-                    <a:lstStyle/>
-                    <a:p>
-                      <a:pPr>
-                        <a:defRPr sz="750" b="1">
-                          <a:solidFill>
-                            <a:srgbClr val="FFFFFF"/>
-                          </a:solidFill>
-                          <a:latin typeface="Inter"/>
-                        </a:defRPr>
-                      </a:pPr>
-                      <a:r>
-                        <a:rPr>
-                          <a:latin typeface="Inter"/>
-                        </a:rPr>
-                        <a:t>Key parameters</a:t>
+                        <a:t>Source</a:t>
                       </a:r>
                     </a:p>
                   </a:txBody>
@@ -9481,7 +8996,7 @@
                         <a:rPr>
                           <a:latin typeface="Inter"/>
                         </a:rPr>
-                        <a:t>Data scope</a:t>
+                        <a:t>Check</a:t>
                       </a:r>
                     </a:p>
                   </a:txBody>
@@ -9491,6 +9006,529 @@
                     </a:solidFill>
                   </a:tcPr>
                 </a:tc>
+              </a:tr>
+              <a:tr h="277570">
+                <a:tc>
+                  <a:txBody>
+                    <a:bodyPr/>
+                    <a:lstStyle/>
+                    <a:p>
+                      <a:pPr>
+                        <a:defRPr sz="720" b="1">
+                          <a:solidFill>
+                            <a:srgbClr val="0D1117"/>
+                          </a:solidFill>
+                          <a:latin typeface="Inter"/>
+                        </a:defRPr>
+                      </a:pPr>
+                      <a:r>
+                        <a:rPr>
+                          <a:latin typeface="Inter"/>
+                        </a:rPr>
+                        <a:t>S1</a:t>
+                      </a:r>
+                    </a:p>
+                  </a:txBody>
+                  <a:tcPr marL="54864" marR="54864" marT="27432" marB="27432" anchor="ctr">
+                    <a:solidFill>
+                      <a:srgbClr val="FFFFFF"/>
+                    </a:solidFill>
+                  </a:tcPr>
+                </a:tc>
+                <a:tc>
+                  <a:txBody>
+                    <a:bodyPr/>
+                    <a:lstStyle/>
+                    <a:p>
+                      <a:pPr>
+                        <a:defRPr sz="720" b="0">
+                          <a:solidFill>
+                            <a:srgbClr val="0D1117"/>
+                          </a:solidFill>
+                          <a:latin typeface="Inter"/>
+                        </a:defRPr>
+                      </a:pPr>
+                      <a:r>
+                        <a:rPr>
+                          <a:latin typeface="Inter"/>
+                        </a:rPr>
+                        <a:t>Form ADV profile</a:t>
+                      </a:r>
+                    </a:p>
+                  </a:txBody>
+                  <a:tcPr marL="54864" marR="54864" marT="27432" marB="27432" anchor="ctr">
+                    <a:solidFill>
+                      <a:srgbClr val="FFFFFF"/>
+                    </a:solidFill>
+                  </a:tcPr>
+                </a:tc>
+                <a:tc>
+                  <a:txBody>
+                    <a:bodyPr/>
+                    <a:lstStyle/>
+                    <a:p>
+                      <a:pPr>
+                        <a:defRPr sz="720" b="0">
+                          <a:solidFill>
+                            <a:srgbClr val="0D1117"/>
+                          </a:solidFill>
+                          <a:latin typeface="Inter"/>
+                        </a:defRPr>
+                      </a:pPr>
+                      <a:r>
+                        <a:rPr>
+                          <a:latin typeface="Inter"/>
+                        </a:rPr>
+                        <a:t>get_manager_odd_profile</a:t>
+                      </a:r>
+                    </a:p>
+                  </a:txBody>
+                  <a:tcPr marL="54864" marR="54864" marT="27432" marB="27432" anchor="ctr">
+                    <a:solidFill>
+                      <a:srgbClr val="FFFFFF"/>
+                    </a:solidFill>
+                  </a:tcPr>
+                </a:tc>
+                <a:tc>
+                  <a:txBody>
+                    <a:bodyPr/>
+                    <a:lstStyle/>
+                    <a:p>
+                      <a:pPr>
+                        <a:defRPr sz="720" b="0">
+                          <a:solidFill>
+                            <a:srgbClr val="0D1117"/>
+                          </a:solidFill>
+                          <a:latin typeface="Inter"/>
+                        </a:defRPr>
+                      </a:pPr>
+                      <a:r>
+                        <a:rPr>
+                          <a:latin typeface="Inter"/>
+                        </a:rPr>
+                        <a:t>2026-10-01</a:t>
+                      </a:r>
+                    </a:p>
+                  </a:txBody>
+                  <a:tcPr marL="54864" marR="54864" marT="27432" marB="27432" anchor="ctr">
+                    <a:solidFill>
+                      <a:srgbClr val="FFFFFF"/>
+                    </a:solidFill>
+                  </a:tcPr>
+                </a:tc>
+                <a:tc>
+                  <a:txBody>
+                    <a:bodyPr/>
+                    <a:lstStyle/>
+                    <a:p>
+                      <a:pPr>
+                        <a:defRPr sz="720" b="1">
+                          <a:solidFill>
+                            <a:srgbClr val="9AA5B1"/>
+                          </a:solidFill>
+                          <a:latin typeface="Inter"/>
+                        </a:defRPr>
+                      </a:pPr>
+                      <a:r>
+                        <a:rPr>
+                          <a:latin typeface="Inter"/>
+                        </a:rPr>
+                        <a:t>● Not checked</a:t>
+                      </a:r>
+                    </a:p>
+                  </a:txBody>
+                  <a:tcPr marL="54864" marR="54864" marT="27432" marB="27432" anchor="ctr">
+                    <a:solidFill>
+                      <a:srgbClr val="F5F7F9"/>
+                    </a:solidFill>
+                  </a:tcPr>
+                </a:tc>
+              </a:tr>
+              <a:tr h="277570">
+                <a:tc>
+                  <a:txBody>
+                    <a:bodyPr/>
+                    <a:lstStyle/>
+                    <a:p>
+                      <a:pPr>
+                        <a:defRPr sz="720" b="1">
+                          <a:solidFill>
+                            <a:srgbClr val="0D1117"/>
+                          </a:solidFill>
+                          <a:latin typeface="Inter"/>
+                        </a:defRPr>
+                      </a:pPr>
+                      <a:r>
+                        <a:rPr>
+                          <a:latin typeface="Inter"/>
+                        </a:rPr>
+                        <a:t>S2</a:t>
+                      </a:r>
+                    </a:p>
+                  </a:txBody>
+                  <a:tcPr marL="54864" marR="54864" marT="27432" marB="27432" anchor="ctr">
+                    <a:solidFill>
+                      <a:srgbClr val="F5F7F9"/>
+                    </a:solidFill>
+                  </a:tcPr>
+                </a:tc>
+                <a:tc>
+                  <a:txBody>
+                    <a:bodyPr/>
+                    <a:lstStyle/>
+                    <a:p>
+                      <a:pPr>
+                        <a:defRPr sz="720" b="0">
+                          <a:solidFill>
+                            <a:srgbClr val="0D1117"/>
+                          </a:solidFill>
+                          <a:latin typeface="Inter"/>
+                        </a:defRPr>
+                      </a:pPr>
+                      <a:r>
+                        <a:rPr>
+                          <a:latin typeface="Inter"/>
+                        </a:rPr>
+                        <a:t>Manager Monitor</a:t>
+                      </a:r>
+                    </a:p>
+                  </a:txBody>
+                  <a:tcPr marL="54864" marR="54864" marT="27432" marB="27432" anchor="ctr">
+                    <a:solidFill>
+                      <a:srgbClr val="F5F7F9"/>
+                    </a:solidFill>
+                  </a:tcPr>
+                </a:tc>
+                <a:tc>
+                  <a:txBody>
+                    <a:bodyPr/>
+                    <a:lstStyle/>
+                    <a:p>
+                      <a:pPr>
+                        <a:defRPr sz="720" b="0">
+                          <a:solidFill>
+                            <a:srgbClr val="0D1117"/>
+                          </a:solidFill>
+                          <a:latin typeface="Inter"/>
+                        </a:defRPr>
+                      </a:pPr>
+                      <a:r>
+                        <a:rPr>
+                          <a:latin typeface="Inter"/>
+                        </a:rPr>
+                        <a:t>get_manager_monitor_evidence</a:t>
+                      </a:r>
+                    </a:p>
+                  </a:txBody>
+                  <a:tcPr marL="54864" marR="54864" marT="27432" marB="27432" anchor="ctr">
+                    <a:solidFill>
+                      <a:srgbClr val="F5F7F9"/>
+                    </a:solidFill>
+                  </a:tcPr>
+                </a:tc>
+                <a:tc>
+                  <a:txBody>
+                    <a:bodyPr/>
+                    <a:lstStyle/>
+                    <a:p>
+                      <a:pPr>
+                        <a:defRPr sz="720" b="0">
+                          <a:solidFill>
+                            <a:srgbClr val="0D1117"/>
+                          </a:solidFill>
+                          <a:latin typeface="Inter"/>
+                        </a:defRPr>
+                      </a:pPr>
+                      <a:r>
+                        <a:rPr>
+                          <a:latin typeface="Inter"/>
+                        </a:rPr>
+                        <a:t>2026-10-01</a:t>
+                      </a:r>
+                    </a:p>
+                  </a:txBody>
+                  <a:tcPr marL="54864" marR="54864" marT="27432" marB="27432" anchor="ctr">
+                    <a:solidFill>
+                      <a:srgbClr val="F5F7F9"/>
+                    </a:solidFill>
+                  </a:tcPr>
+                </a:tc>
+                <a:tc>
+                  <a:txBody>
+                    <a:bodyPr/>
+                    <a:lstStyle/>
+                    <a:p>
+                      <a:pPr>
+                        <a:defRPr sz="720" b="1">
+                          <a:solidFill>
+                            <a:srgbClr val="C6F432"/>
+                          </a:solidFill>
+                          <a:latin typeface="Inter"/>
+                        </a:defRPr>
+                      </a:pPr>
+                      <a:r>
+                        <a:rPr>
+                          <a:latin typeface="Inter"/>
+                        </a:rPr>
+                        <a:t>● Passed</a:t>
+                      </a:r>
+                    </a:p>
+                  </a:txBody>
+                  <a:tcPr marL="54864" marR="54864" marT="27432" marB="27432" anchor="ctr">
+                    <a:solidFill>
+                      <a:srgbClr val="F5F7F9"/>
+                    </a:solidFill>
+                  </a:tcPr>
+                </a:tc>
+              </a:tr>
+              <a:tr h="277573">
+                <a:tc>
+                  <a:txBody>
+                    <a:bodyPr/>
+                    <a:lstStyle/>
+                    <a:p>
+                      <a:pPr>
+                        <a:defRPr sz="720" b="1">
+                          <a:solidFill>
+                            <a:srgbClr val="0D1117"/>
+                          </a:solidFill>
+                          <a:latin typeface="Inter"/>
+                        </a:defRPr>
+                      </a:pPr>
+                      <a:r>
+                        <a:rPr>
+                          <a:latin typeface="Inter"/>
+                        </a:rPr>
+                        <a:t>S3</a:t>
+                      </a:r>
+                    </a:p>
+                  </a:txBody>
+                  <a:tcPr marL="54864" marR="54864" marT="27432" marB="27432" anchor="ctr">
+                    <a:solidFill>
+                      <a:srgbClr val="FFFFFF"/>
+                    </a:solidFill>
+                  </a:tcPr>
+                </a:tc>
+                <a:tc>
+                  <a:txBody>
+                    <a:bodyPr/>
+                    <a:lstStyle/>
+                    <a:p>
+                      <a:pPr>
+                        <a:defRPr sz="720" b="0">
+                          <a:solidFill>
+                            <a:srgbClr val="0D1117"/>
+                          </a:solidFill>
+                          <a:latin typeface="Inter"/>
+                        </a:defRPr>
+                      </a:pPr>
+                      <a:r>
+                        <a:rPr>
+                          <a:latin typeface="Inter"/>
+                        </a:rPr>
+                        <a:t>Form 13F snapshot</a:t>
+                      </a:r>
+                    </a:p>
+                  </a:txBody>
+                  <a:tcPr marL="54864" marR="54864" marT="27432" marB="27432" anchor="ctr">
+                    <a:solidFill>
+                      <a:srgbClr val="FFFFFF"/>
+                    </a:solidFill>
+                  </a:tcPr>
+                </a:tc>
+                <a:tc>
+                  <a:txBody>
+                    <a:bodyPr/>
+                    <a:lstStyle/>
+                    <a:p>
+                      <a:pPr>
+                        <a:defRPr sz="720" b="0">
+                          <a:solidFill>
+                            <a:srgbClr val="0D1117"/>
+                          </a:solidFill>
+                          <a:latin typeface="Inter"/>
+                        </a:defRPr>
+                      </a:pPr>
+                      <a:r>
+                        <a:rPr>
+                          <a:latin typeface="Inter"/>
+                        </a:rPr>
+                        <a:t>get_firm_13f_portfolio_review</a:t>
+                      </a:r>
+                    </a:p>
+                  </a:txBody>
+                  <a:tcPr marL="54864" marR="54864" marT="27432" marB="27432" anchor="ctr">
+                    <a:solidFill>
+                      <a:srgbClr val="FFFFFF"/>
+                    </a:solidFill>
+                  </a:tcPr>
+                </a:tc>
+                <a:tc>
+                  <a:txBody>
+                    <a:bodyPr/>
+                    <a:lstStyle/>
+                    <a:p>
+                      <a:pPr>
+                        <a:defRPr sz="720" b="0">
+                          <a:solidFill>
+                            <a:srgbClr val="0D1117"/>
+                          </a:solidFill>
+                          <a:latin typeface="Inter"/>
+                        </a:defRPr>
+                      </a:pPr>
+                      <a:r>
+                        <a:rPr>
+                          <a:latin typeface="Inter"/>
+                        </a:rPr>
+                        <a:t>2026-08-14</a:t>
+                      </a:r>
+                    </a:p>
+                  </a:txBody>
+                  <a:tcPr marL="54864" marR="54864" marT="27432" marB="27432" anchor="ctr">
+                    <a:solidFill>
+                      <a:srgbClr val="FFFFFF"/>
+                    </a:solidFill>
+                  </a:tcPr>
+                </a:tc>
+                <a:tc>
+                  <a:txBody>
+                    <a:bodyPr/>
+                    <a:lstStyle/>
+                    <a:p>
+                      <a:pPr>
+                        <a:defRPr sz="720" b="1">
+                          <a:solidFill>
+                            <a:srgbClr val="C6F432"/>
+                          </a:solidFill>
+                          <a:latin typeface="Inter"/>
+                        </a:defRPr>
+                      </a:pPr>
+                      <a:r>
+                        <a:rPr>
+                          <a:latin typeface="Inter"/>
+                        </a:rPr>
+                        <a:t>● Passed</a:t>
+                      </a:r>
+                    </a:p>
+                  </a:txBody>
+                  <a:tcPr marL="54864" marR="54864" marT="27432" marB="27432" anchor="ctr">
+                    <a:solidFill>
+                      <a:srgbClr val="F5F7F9"/>
+                    </a:solidFill>
+                  </a:tcPr>
+                </a:tc>
+              </a:tr>
+            </a:tbl>
+          </a:graphicData>
+        </a:graphic>
+      </p:graphicFrame>
+      <p:sp>
+        <p:nvSpPr>
+          <p:cNvPr id="9" name="TextBox 8"/>
+          <p:cNvSpPr txBox="1"/>
+          <p:nvPr/>
+        </p:nvSpPr>
+        <p:spPr>
+          <a:xfrm>
+            <a:off x="640080" y="2728771"/>
+            <a:ext cx="10908792" cy="164592"/>
+          </a:xfrm>
+          <a:prstGeom prst="rect">
+            <a:avLst/>
+          </a:prstGeom>
+          <a:noFill/>
+        </p:spPr>
+        <p:txBody>
+          <a:bodyPr wrap="none" lIns="9144" rIns="9144" tIns="9144" bIns="9144" anchor="t">
+            <a:spAutoFit/>
+          </a:bodyPr>
+          <a:lstStyle/>
+          <a:p>
+            <a:pPr algn="l">
+              <a:spcAft>
+                <a:spcPts val="0"/>
+              </a:spcAft>
+              <a:defRPr sz="680" b="0">
+                <a:solidFill>
+                  <a:srgbClr val="8A94A1"/>
+                </a:solidFill>
+                <a:latin typeface="Inter"/>
+              </a:defRPr>
+            </a:pPr>
+            <a:r>
+              <a:rPr>
+                <a:latin typeface="Inter"/>
+              </a:rPr>
+              <a:t>Illustrative, Gradient Maintained — demo data, not the client's holdings or managers. All organizations, portfolios, managers and results in this public example are illustrative.</a:t>
+            </a:r>
+          </a:p>
+        </p:txBody>
+      </p:sp>
+      <p:sp>
+        <p:nvSpPr>
+          <p:cNvPr id="10" name="TextBox 9"/>
+          <p:cNvSpPr txBox="1"/>
+          <p:nvPr/>
+        </p:nvSpPr>
+        <p:spPr>
+          <a:xfrm>
+            <a:off x="640080" y="3021379"/>
+            <a:ext cx="10908792" cy="201168"/>
+          </a:xfrm>
+          <a:prstGeom prst="rect">
+            <a:avLst/>
+          </a:prstGeom>
+          <a:noFill/>
+        </p:spPr>
+        <p:txBody>
+          <a:bodyPr wrap="none" lIns="9144" rIns="9144" tIns="9144" bIns="9144" anchor="t">
+            <a:spAutoFit/>
+          </a:bodyPr>
+          <a:lstStyle/>
+          <a:p>
+            <a:pPr algn="l">
+              <a:spcAft>
+                <a:spcPts val="0"/>
+              </a:spcAft>
+              <a:defRPr sz="720" b="1">
+                <a:solidFill>
+                  <a:srgbClr val="4A5563"/>
+                </a:solidFill>
+                <a:latin typeface="Inter"/>
+              </a:defRPr>
+            </a:pPr>
+            <a:r>
+              <a:rPr>
+                <a:latin typeface="Inter"/>
+              </a:rPr>
+              <a:t>SOURCE AUDIT TRAIL</a:t>
+            </a:r>
+          </a:p>
+        </p:txBody>
+      </p:sp>
+      <p:graphicFrame>
+        <p:nvGraphicFramePr>
+          <p:cNvPr id="11" name="Table 10"/>
+          <p:cNvGraphicFramePr>
+            <a:graphicFrameLocks noGrp="1"/>
+          </p:cNvGraphicFramePr>
+          <p:nvPr/>
+        </p:nvGraphicFramePr>
+        <p:xfrm>
+          <a:off x="640080" y="3295699"/>
+          <a:ext cx="10908792" cy="1110283"/>
+        </p:xfrm>
+        <a:graphic>
+          <a:graphicData uri="http://schemas.openxmlformats.org/drawingml/2006/table">
+            <a:tbl>
+              <a:tblPr firstRow="1" bandRow="1">
+                <a:tableStyleId>{5C22544A-7EE6-4342-B048-85BDC9FD1C3A}</a:tableStyleId>
+              </a:tblPr>
+              <a:tblGrid>
+                <a:gridCol w="2011680"/>
+                <a:gridCol w="8897112"/>
+              </a:tblGrid>
+              <a:tr h="277570">
                 <a:tc>
                   <a:txBody>
                     <a:bodyPr/>
@@ -9508,7 +9546,7 @@
                         <a:rPr>
                           <a:latin typeface="Inter"/>
                         </a:rPr>
-                        <a:t>Validation</a:t>
+                        <a:t>Tag</a:t>
                       </a:r>
                     </a:p>
                   </a:txBody>
@@ -9546,14 +9584,14 @@
                   </a:tcPr>
                 </a:tc>
               </a:tr>
-              <a:tr h="495326">
+              <a:tr h="277570">
                 <a:tc>
                   <a:txBody>
                     <a:bodyPr/>
                     <a:lstStyle/>
                     <a:p>
                       <a:pPr>
-                        <a:defRPr sz="650" b="1">
+                        <a:defRPr sz="800" b="1">
                           <a:solidFill>
                             <a:srgbClr val="0D1117"/>
                           </a:solidFill>
@@ -9580,196 +9618,7 @@
                     <a:lstStyle/>
                     <a:p>
                       <a:pPr>
-                        <a:defRPr sz="650" b="0">
-                          <a:solidFill>
-                            <a:srgbClr val="0D1117"/>
-                          </a:solidFill>
-                          <a:latin typeface="Inter"/>
-                        </a:defRPr>
-                      </a:pPr>
-                      <a:r>
-                        <a:rPr>
-                          <a:latin typeface="Inter"/>
-                        </a:rPr>
-                        <a:t>Form ADV profile</a:t>
-                      </a:r>
-                    </a:p>
-                  </a:txBody>
-                  <a:tcPr marL="54864" marR="54864" marT="27432" marB="27432" anchor="ctr">
-                    <a:solidFill>
-                      <a:srgbClr val="FFFFFF"/>
-                    </a:solidFill>
-                  </a:tcPr>
-                </a:tc>
-                <a:tc>
-                  <a:txBody>
-                    <a:bodyPr/>
-                    <a:lstStyle/>
-                    <a:p>
-                      <a:pPr>
-                        <a:defRPr sz="650" b="0">
-                          <a:solidFill>
-                            <a:srgbClr val="0D1117"/>
-                          </a:solidFill>
-                          <a:latin typeface="Inter"/>
-                        </a:defRPr>
-                      </a:pPr>
-                      <a:r>
-                        <a:rPr>
-                          <a:latin typeface="Inter"/>
-                        </a:rPr>
-                        <a:t>gradient_tool</a:t>
-                      </a:r>
-                    </a:p>
-                  </a:txBody>
-                  <a:tcPr marL="54864" marR="54864" marT="27432" marB="27432" anchor="ctr">
-                    <a:solidFill>
-                      <a:srgbClr val="FFFFFF"/>
-                    </a:solidFill>
-                  </a:tcPr>
-                </a:tc>
-                <a:tc>
-                  <a:txBody>
-                    <a:bodyPr/>
-                    <a:lstStyle/>
-                    <a:p>
-                      <a:pPr>
-                        <a:defRPr sz="650" b="0">
-                          <a:solidFill>
-                            <a:srgbClr val="0D1117"/>
-                          </a:solidFill>
-                          <a:latin typeface="Inter"/>
-                        </a:defRPr>
-                      </a:pPr>
-                      <a:r>
-                        <a:rPr>
-                          <a:latin typeface="Inter"/>
-                        </a:rPr>
-                        <a:t>get_manager_odd_profile</a:t>
-                      </a:r>
-                    </a:p>
-                  </a:txBody>
-                  <a:tcPr marL="54864" marR="54864" marT="27432" marB="27432" anchor="ctr">
-                    <a:solidFill>
-                      <a:srgbClr val="FFFFFF"/>
-                    </a:solidFill>
-                  </a:tcPr>
-                </a:tc>
-                <a:tc>
-                  <a:txBody>
-                    <a:bodyPr/>
-                    <a:lstStyle/>
-                    <a:p>
-                      <a:pPr>
-                        <a:defRPr sz="650" b="0">
-                          <a:solidFill>
-                            <a:srgbClr val="0D1117"/>
-                          </a:solidFill>
-                          <a:latin typeface="Inter"/>
-                        </a:defRPr>
-                      </a:pPr>
-                      <a:r>
-                        <a:rPr>
-                          <a:latin typeface="Inter"/>
-                        </a:rPr>
-                        <a:t>illustrative sample</a:t>
-                      </a:r>
-                    </a:p>
-                  </a:txBody>
-                  <a:tcPr marL="54864" marR="54864" marT="27432" marB="27432" anchor="ctr">
-                    <a:solidFill>
-                      <a:srgbClr val="FFFFFF"/>
-                    </a:solidFill>
-                  </a:tcPr>
-                </a:tc>
-                <a:tc>
-                  <a:txBody>
-                    <a:bodyPr/>
-                    <a:lstStyle/>
-                    <a:p>
-                      <a:pPr>
-                        <a:defRPr sz="650" b="0">
-                          <a:solidFill>
-                            <a:srgbClr val="0D1117"/>
-                          </a:solidFill>
-                          <a:latin typeface="Inter"/>
-                        </a:defRPr>
-                      </a:pPr>
-                      <a:r>
-                        <a:rPr>
-                          <a:latin typeface="Inter"/>
-                        </a:rPr>
-                        <a:t>2026-10-01</a:t>
-                      </a:r>
-                    </a:p>
-                  </a:txBody>
-                  <a:tcPr marL="54864" marR="54864" marT="27432" marB="27432" anchor="ctr">
-                    <a:solidFill>
-                      <a:srgbClr val="FFFFFF"/>
-                    </a:solidFill>
-                  </a:tcPr>
-                </a:tc>
-                <a:tc>
-                  <a:txBody>
-                    <a:bodyPr/>
-                    <a:lstStyle/>
-                    <a:p>
-                      <a:pPr>
-                        <a:defRPr sz="650" b="0">
-                          <a:solidFill>
-                            <a:srgbClr val="0D1117"/>
-                          </a:solidFill>
-                          <a:latin typeface="Inter"/>
-                        </a:defRPr>
-                      </a:pPr>
-                      <a:r>
-                        <a:rPr>
-                          <a:latin typeface="Inter"/>
-                        </a:rPr>
-                        <a:t>Gradient-governed review evidence</a:t>
-                      </a:r>
-                    </a:p>
-                  </a:txBody>
-                  <a:tcPr marL="54864" marR="54864" marT="27432" marB="27432" anchor="ctr">
-                    <a:solidFill>
-                      <a:srgbClr val="FFFFFF"/>
-                    </a:solidFill>
-                  </a:tcPr>
-                </a:tc>
-                <a:tc>
-                  <a:txBody>
-                    <a:bodyPr/>
-                    <a:lstStyle/>
-                    <a:p>
-                      <a:pPr>
-                        <a:defRPr sz="650" b="0">
-                          <a:solidFill>
-                            <a:srgbClr val="0D1117"/>
-                          </a:solidFill>
-                          <a:latin typeface="Inter"/>
-                        </a:defRPr>
-                      </a:pPr>
-                      <a:r>
-                        <a:rPr>
-                          <a:latin typeface="Inter"/>
-                        </a:rPr>
-                        <a:t>{'chip': 'not_run', 'status': 'not_run'}</a:t>
-                      </a:r>
-                    </a:p>
-                  </a:txBody>
-                  <a:tcPr marL="54864" marR="54864" marT="27432" marB="27432" anchor="ctr">
-                    <a:solidFill>
-                      <a:srgbClr val="FFFFFF"/>
-                    </a:solidFill>
-                  </a:tcPr>
-                </a:tc>
-                <a:tc>
-                  <a:txBody>
-                    <a:bodyPr/>
-                    <a:lstStyle/>
-                    <a:p>
-                      <a:pPr>
-                        <a:defRPr sz="650" b="0">
+                        <a:defRPr sz="800" b="0">
                           <a:solidFill>
                             <a:srgbClr val="0D1117"/>
                           </a:solidFill>
@@ -9791,14 +9640,14 @@
                   </a:tcPr>
                 </a:tc>
               </a:tr>
-              <a:tr h="495326">
+              <a:tr h="277570">
                 <a:tc>
                   <a:txBody>
                     <a:bodyPr/>
                     <a:lstStyle/>
                     <a:p>
                       <a:pPr>
-                        <a:defRPr sz="650" b="1">
+                        <a:defRPr sz="800" b="1">
                           <a:solidFill>
                             <a:srgbClr val="0D1117"/>
                           </a:solidFill>
@@ -9825,196 +9674,7 @@
                     <a:lstStyle/>
                     <a:p>
                       <a:pPr>
-                        <a:defRPr sz="650" b="0">
-                          <a:solidFill>
-                            <a:srgbClr val="0D1117"/>
-                          </a:solidFill>
-                          <a:latin typeface="Inter"/>
-                        </a:defRPr>
-                      </a:pPr>
-                      <a:r>
-                        <a:rPr>
-                          <a:latin typeface="Inter"/>
-                        </a:rPr>
-                        <a:t>Manager Monitor</a:t>
-                      </a:r>
-                    </a:p>
-                  </a:txBody>
-                  <a:tcPr marL="54864" marR="54864" marT="27432" marB="27432" anchor="ctr">
-                    <a:solidFill>
-                      <a:srgbClr val="F5F7F9"/>
-                    </a:solidFill>
-                  </a:tcPr>
-                </a:tc>
-                <a:tc>
-                  <a:txBody>
-                    <a:bodyPr/>
-                    <a:lstStyle/>
-                    <a:p>
-                      <a:pPr>
-                        <a:defRPr sz="650" b="0">
-                          <a:solidFill>
-                            <a:srgbClr val="0D1117"/>
-                          </a:solidFill>
-                          <a:latin typeface="Inter"/>
-                        </a:defRPr>
-                      </a:pPr>
-                      <a:r>
-                        <a:rPr>
-                          <a:latin typeface="Inter"/>
-                        </a:rPr>
-                        <a:t>gradient_tool</a:t>
-                      </a:r>
-                    </a:p>
-                  </a:txBody>
-                  <a:tcPr marL="54864" marR="54864" marT="27432" marB="27432" anchor="ctr">
-                    <a:solidFill>
-                      <a:srgbClr val="F5F7F9"/>
-                    </a:solidFill>
-                  </a:tcPr>
-                </a:tc>
-                <a:tc>
-                  <a:txBody>
-                    <a:bodyPr/>
-                    <a:lstStyle/>
-                    <a:p>
-                      <a:pPr>
-                        <a:defRPr sz="650" b="0">
-                          <a:solidFill>
-                            <a:srgbClr val="0D1117"/>
-                          </a:solidFill>
-                          <a:latin typeface="Inter"/>
-                        </a:defRPr>
-                      </a:pPr>
-                      <a:r>
-                        <a:rPr>
-                          <a:latin typeface="Inter"/>
-                        </a:rPr>
-                        <a:t>get_manager_monitor_evidence</a:t>
-                      </a:r>
-                    </a:p>
-                  </a:txBody>
-                  <a:tcPr marL="54864" marR="54864" marT="27432" marB="27432" anchor="ctr">
-                    <a:solidFill>
-                      <a:srgbClr val="F5F7F9"/>
-                    </a:solidFill>
-                  </a:tcPr>
-                </a:tc>
-                <a:tc>
-                  <a:txBody>
-                    <a:bodyPr/>
-                    <a:lstStyle/>
-                    <a:p>
-                      <a:pPr>
-                        <a:defRPr sz="650" b="0">
-                          <a:solidFill>
-                            <a:srgbClr val="0D1117"/>
-                          </a:solidFill>
-                          <a:latin typeface="Inter"/>
-                        </a:defRPr>
-                      </a:pPr>
-                      <a:r>
-                        <a:rPr>
-                          <a:latin typeface="Inter"/>
-                        </a:rPr>
-                        <a:t>illustrative sample</a:t>
-                      </a:r>
-                    </a:p>
-                  </a:txBody>
-                  <a:tcPr marL="54864" marR="54864" marT="27432" marB="27432" anchor="ctr">
-                    <a:solidFill>
-                      <a:srgbClr val="F5F7F9"/>
-                    </a:solidFill>
-                  </a:tcPr>
-                </a:tc>
-                <a:tc>
-                  <a:txBody>
-                    <a:bodyPr/>
-                    <a:lstStyle/>
-                    <a:p>
-                      <a:pPr>
-                        <a:defRPr sz="650" b="0">
-                          <a:solidFill>
-                            <a:srgbClr val="0D1117"/>
-                          </a:solidFill>
-                          <a:latin typeface="Inter"/>
-                        </a:defRPr>
-                      </a:pPr>
-                      <a:r>
-                        <a:rPr>
-                          <a:latin typeface="Inter"/>
-                        </a:rPr>
-                        <a:t>2026-10-01</a:t>
-                      </a:r>
-                    </a:p>
-                  </a:txBody>
-                  <a:tcPr marL="54864" marR="54864" marT="27432" marB="27432" anchor="ctr">
-                    <a:solidFill>
-                      <a:srgbClr val="F5F7F9"/>
-                    </a:solidFill>
-                  </a:tcPr>
-                </a:tc>
-                <a:tc>
-                  <a:txBody>
-                    <a:bodyPr/>
-                    <a:lstStyle/>
-                    <a:p>
-                      <a:pPr>
-                        <a:defRPr sz="650" b="0">
-                          <a:solidFill>
-                            <a:srgbClr val="0D1117"/>
-                          </a:solidFill>
-                          <a:latin typeface="Inter"/>
-                        </a:defRPr>
-                      </a:pPr>
-                      <a:r>
-                        <a:rPr>
-                          <a:latin typeface="Inter"/>
-                        </a:rPr>
-                        <a:t>Gradient-governed review evidence</a:t>
-                      </a:r>
-                    </a:p>
-                  </a:txBody>
-                  <a:tcPr marL="54864" marR="54864" marT="27432" marB="27432" anchor="ctr">
-                    <a:solidFill>
-                      <a:srgbClr val="F5F7F9"/>
-                    </a:solidFill>
-                  </a:tcPr>
-                </a:tc>
-                <a:tc>
-                  <a:txBody>
-                    <a:bodyPr/>
-                    <a:lstStyle/>
-                    <a:p>
-                      <a:pPr>
-                        <a:defRPr sz="650" b="0">
-                          <a:solidFill>
-                            <a:srgbClr val="0D1117"/>
-                          </a:solidFill>
-                          <a:latin typeface="Inter"/>
-                        </a:defRPr>
-                      </a:pPr>
-                      <a:r>
-                        <a:rPr>
-                          <a:latin typeface="Inter"/>
-                        </a:rPr>
-                        <a:t>{'chip': 'passed', 'status': 'passed'}</a:t>
-                      </a:r>
-                    </a:p>
-                  </a:txBody>
-                  <a:tcPr marL="54864" marR="54864" marT="27432" marB="27432" anchor="ctr">
-                    <a:solidFill>
-                      <a:srgbClr val="F5F7F9"/>
-                    </a:solidFill>
-                  </a:tcPr>
-                </a:tc>
-                <a:tc>
-                  <a:txBody>
-                    <a:bodyPr/>
-                    <a:lstStyle/>
-                    <a:p>
-                      <a:pPr>
-                        <a:defRPr sz="650" b="0">
+                        <a:defRPr sz="800" b="0">
                           <a:solidFill>
                             <a:srgbClr val="0D1117"/>
                           </a:solidFill>
@@ -10036,14 +9696,14 @@
                   </a:tcPr>
                 </a:tc>
               </a:tr>
-              <a:tr h="495326">
+              <a:tr h="277573">
                 <a:tc>
                   <a:txBody>
                     <a:bodyPr/>
                     <a:lstStyle/>
                     <a:p>
                       <a:pPr>
-                        <a:defRPr sz="650" b="1">
+                        <a:defRPr sz="800" b="1">
                           <a:solidFill>
                             <a:srgbClr val="0D1117"/>
                           </a:solidFill>
@@ -10070,196 +9730,7 @@
                     <a:lstStyle/>
                     <a:p>
                       <a:pPr>
-                        <a:defRPr sz="650" b="0">
-                          <a:solidFill>
-                            <a:srgbClr val="0D1117"/>
-                          </a:solidFill>
-                          <a:latin typeface="Inter"/>
-                        </a:defRPr>
-                      </a:pPr>
-                      <a:r>
-                        <a:rPr>
-                          <a:latin typeface="Inter"/>
-                        </a:rPr>
-                        <a:t>Form 13F snapshot</a:t>
-                      </a:r>
-                    </a:p>
-                  </a:txBody>
-                  <a:tcPr marL="54864" marR="54864" marT="27432" marB="27432" anchor="ctr">
-                    <a:solidFill>
-                      <a:srgbClr val="FFFFFF"/>
-                    </a:solidFill>
-                  </a:tcPr>
-                </a:tc>
-                <a:tc>
-                  <a:txBody>
-                    <a:bodyPr/>
-                    <a:lstStyle/>
-                    <a:p>
-                      <a:pPr>
-                        <a:defRPr sz="650" b="0">
-                          <a:solidFill>
-                            <a:srgbClr val="0D1117"/>
-                          </a:solidFill>
-                          <a:latin typeface="Inter"/>
-                        </a:defRPr>
-                      </a:pPr>
-                      <a:r>
-                        <a:rPr>
-                          <a:latin typeface="Inter"/>
-                        </a:rPr>
-                        <a:t>gradient_tool</a:t>
-                      </a:r>
-                    </a:p>
-                  </a:txBody>
-                  <a:tcPr marL="54864" marR="54864" marT="27432" marB="27432" anchor="ctr">
-                    <a:solidFill>
-                      <a:srgbClr val="FFFFFF"/>
-                    </a:solidFill>
-                  </a:tcPr>
-                </a:tc>
-                <a:tc>
-                  <a:txBody>
-                    <a:bodyPr/>
-                    <a:lstStyle/>
-                    <a:p>
-                      <a:pPr>
-                        <a:defRPr sz="650" b="0">
-                          <a:solidFill>
-                            <a:srgbClr val="0D1117"/>
-                          </a:solidFill>
-                          <a:latin typeface="Inter"/>
-                        </a:defRPr>
-                      </a:pPr>
-                      <a:r>
-                        <a:rPr>
-                          <a:latin typeface="Inter"/>
-                        </a:rPr>
-                        <a:t>get_firm_13f_portfolio_review</a:t>
-                      </a:r>
-                    </a:p>
-                  </a:txBody>
-                  <a:tcPr marL="54864" marR="54864" marT="27432" marB="27432" anchor="ctr">
-                    <a:solidFill>
-                      <a:srgbClr val="FFFFFF"/>
-                    </a:solidFill>
-                  </a:tcPr>
-                </a:tc>
-                <a:tc>
-                  <a:txBody>
-                    <a:bodyPr/>
-                    <a:lstStyle/>
-                    <a:p>
-                      <a:pPr>
-                        <a:defRPr sz="650" b="0">
-                          <a:solidFill>
-                            <a:srgbClr val="0D1117"/>
-                          </a:solidFill>
-                          <a:latin typeface="Inter"/>
-                        </a:defRPr>
-                      </a:pPr>
-                      <a:r>
-                        <a:rPr>
-                          <a:latin typeface="Inter"/>
-                        </a:rPr>
-                        <a:t>illustrative sample</a:t>
-                      </a:r>
-                    </a:p>
-                  </a:txBody>
-                  <a:tcPr marL="54864" marR="54864" marT="27432" marB="27432" anchor="ctr">
-                    <a:solidFill>
-                      <a:srgbClr val="FFFFFF"/>
-                    </a:solidFill>
-                  </a:tcPr>
-                </a:tc>
-                <a:tc>
-                  <a:txBody>
-                    <a:bodyPr/>
-                    <a:lstStyle/>
-                    <a:p>
-                      <a:pPr>
-                        <a:defRPr sz="650" b="0">
-                          <a:solidFill>
-                            <a:srgbClr val="0D1117"/>
-                          </a:solidFill>
-                          <a:latin typeface="Inter"/>
-                        </a:defRPr>
-                      </a:pPr>
-                      <a:r>
-                        <a:rPr>
-                          <a:latin typeface="Inter"/>
-                        </a:rPr>
-                        <a:t>2026-08-14</a:t>
-                      </a:r>
-                    </a:p>
-                  </a:txBody>
-                  <a:tcPr marL="54864" marR="54864" marT="27432" marB="27432" anchor="ctr">
-                    <a:solidFill>
-                      <a:srgbClr val="FFFFFF"/>
-                    </a:solidFill>
-                  </a:tcPr>
-                </a:tc>
-                <a:tc>
-                  <a:txBody>
-                    <a:bodyPr/>
-                    <a:lstStyle/>
-                    <a:p>
-                      <a:pPr>
-                        <a:defRPr sz="650" b="0">
-                          <a:solidFill>
-                            <a:srgbClr val="0D1117"/>
-                          </a:solidFill>
-                          <a:latin typeface="Inter"/>
-                        </a:defRPr>
-                      </a:pPr>
-                      <a:r>
-                        <a:rPr>
-                          <a:latin typeface="Inter"/>
-                        </a:rPr>
-                        <a:t>Gradient-governed review evidence</a:t>
-                      </a:r>
-                    </a:p>
-                  </a:txBody>
-                  <a:tcPr marL="54864" marR="54864" marT="27432" marB="27432" anchor="ctr">
-                    <a:solidFill>
-                      <a:srgbClr val="FFFFFF"/>
-                    </a:solidFill>
-                  </a:tcPr>
-                </a:tc>
-                <a:tc>
-                  <a:txBody>
-                    <a:bodyPr/>
-                    <a:lstStyle/>
-                    <a:p>
-                      <a:pPr>
-                        <a:defRPr sz="650" b="0">
-                          <a:solidFill>
-                            <a:srgbClr val="0D1117"/>
-                          </a:solidFill>
-                          <a:latin typeface="Inter"/>
-                        </a:defRPr>
-                      </a:pPr>
-                      <a:r>
-                        <a:rPr>
-                          <a:latin typeface="Inter"/>
-                        </a:rPr>
-                        <a:t>{'chip': 'passed', 'status': 'passed'}</a:t>
-                      </a:r>
-                    </a:p>
-                  </a:txBody>
-                  <a:tcPr marL="54864" marR="54864" marT="27432" marB="27432" anchor="ctr">
-                    <a:solidFill>
-                      <a:srgbClr val="FFFFFF"/>
-                    </a:solidFill>
-                  </a:tcPr>
-                </a:tc>
-                <a:tc>
-                  <a:txBody>
-                    <a:bodyPr/>
-                    <a:lstStyle/>
-                    <a:p>
-                      <a:pPr>
-                        <a:defRPr sz="650" b="0">
+                        <a:defRPr sz="800" b="0">
                           <a:solidFill>
                             <a:srgbClr val="0D1117"/>
                           </a:solidFill>
@@ -10287,13 +9758,13 @@
       </p:graphicFrame>
       <p:sp>
         <p:nvSpPr>
-          <p:cNvPr id="10" name="TextBox 9"/>
+          <p:cNvPr id="12" name="TextBox 11"/>
           <p:cNvSpPr txBox="1"/>
           <p:nvPr/>
         </p:nvSpPr>
         <p:spPr>
           <a:xfrm>
-            <a:off x="640080" y="3599792"/>
+            <a:off x="640080" y="4424271"/>
             <a:ext cx="10908792" cy="164592"/>
           </a:xfrm>
           <a:prstGeom prst="rect">
@@ -10322,21 +9793,21 @@
               <a:rPr>
                 <a:latin typeface="Inter"/>
               </a:rPr>
-              <a:t>Illustrative, Gradient Maintained — demo data, not the client's holdings or managers. All organizations, portfolios, managers and results in this public example are illustrative.</a:t>
-            </a:r>
-          </a:p>
-        </p:txBody>
-      </p:sp>
-      <p:sp>
-        <p:nvSpPr>
-          <p:cNvPr id="11" name="TextBox 10"/>
+              <a:t>Data scope for every source: Illustrative sample data. Each digest is the SHA-256 fingerprint of the exact data the report used.</a:t>
+            </a:r>
+          </a:p>
+        </p:txBody>
+      </p:sp>
+      <p:sp>
+        <p:nvSpPr>
+          <p:cNvPr id="13" name="TextBox 12"/>
           <p:cNvSpPr txBox="1"/>
           <p:nvPr/>
         </p:nvSpPr>
         <p:spPr>
           <a:xfrm>
-            <a:off x="640080" y="3892400"/>
-            <a:ext cx="10908792" cy="2325519"/>
+            <a:off x="640080" y="4716879"/>
+            <a:ext cx="10908792" cy="1501040"/>
           </a:xfrm>
           <a:prstGeom prst="rect">
             <a:avLst/>
@@ -10409,7 +9880,7 @@
       </p:sp>
       <p:sp>
         <p:nvSpPr>
-          <p:cNvPr id="12" name="Rectangle 11"/>
+          <p:cNvPr id="14" name="Rectangle 13"/>
           <p:cNvSpPr/>
           <p:nvPr/>
         </p:nvSpPr>
@@ -10458,7 +9929,7 @@
       </p:sp>
       <p:sp>
         <p:nvSpPr>
-          <p:cNvPr id="13" name="TextBox 12"/>
+          <p:cNvPr id="15" name="TextBox 14"/>
           <p:cNvSpPr txBox="1"/>
           <p:nvPr/>
         </p:nvSpPr>
@@ -10500,7 +9971,7 @@
       </p:sp>
       <p:sp>
         <p:nvSpPr>
-          <p:cNvPr id="14" name="TextBox 13"/>
+          <p:cNvPr id="16" name="TextBox 15"/>
           <p:cNvSpPr txBox="1"/>
           <p:nvPr/>
         </p:nvSpPr>
@@ -10542,7 +10013,7 @@
       </p:sp>
       <p:sp>
         <p:nvSpPr>
-          <p:cNvPr id="15" name="TextBox 14"/>
+          <p:cNvPr id="17" name="TextBox 16"/>
           <p:cNvSpPr txBox="1"/>
           <p:nvPr/>
         </p:nvSpPr>
@@ -10658,7 +10129,7 @@
         <p:spPr>
           <a:xfrm>
             <a:off x="640080" y="329184"/>
-            <a:ext cx="5303520" cy="182880"/>
+            <a:ext cx="9875520" cy="182880"/>
           </a:xfrm>
           <a:prstGeom prst="rect">
             <a:avLst/>
@@ -10699,48 +10170,6 @@
         </p:nvSpPr>
         <p:spPr>
           <a:xfrm>
-            <a:off x="5897880" y="310896"/>
-            <a:ext cx="4800600" cy="256032"/>
-          </a:xfrm>
-          <a:prstGeom prst="rect">
-            <a:avLst/>
-          </a:prstGeom>
-          <a:noFill/>
-        </p:spPr>
-        <p:txBody>
-          <a:bodyPr wrap="none" lIns="9144" rIns="9144" tIns="9144" bIns="9144" anchor="t">
-            <a:spAutoFit/>
-          </a:bodyPr>
-          <a:lstStyle/>
-          <a:p>
-            <a:pPr algn="r">
-              <a:spcAft>
-                <a:spcPts val="0"/>
-              </a:spcAft>
-              <a:defRPr sz="680" b="1">
-                <a:solidFill>
-                  <a:srgbClr val="4F6B00"/>
-                </a:solidFill>
-                <a:latin typeface="Inter"/>
-              </a:defRPr>
-            </a:pPr>
-            <a:r>
-              <a:rPr>
-                <a:latin typeface="Inter"/>
-              </a:rPr>
-              <a:t>Illustrative, Gradient Maintained — demo data, not the client's holdings or managers</a:t>
-            </a:r>
-          </a:p>
-        </p:txBody>
-      </p:sp>
-      <p:sp>
-        <p:nvSpPr>
-          <p:cNvPr id="5" name="TextBox 4"/>
-          <p:cNvSpPr txBox="1"/>
-          <p:nvPr/>
-        </p:nvSpPr>
-        <p:spPr>
-          <a:xfrm>
             <a:off x="640080" y="566928"/>
             <a:ext cx="10058400" cy="530352"/>
           </a:xfrm>
@@ -10777,7 +10206,7 @@
       </p:sp>
       <p:sp>
         <p:nvSpPr>
-          <p:cNvPr id="6" name="Rectangle 5"/>
+          <p:cNvPr id="5" name="Rectangle 4"/>
           <p:cNvSpPr/>
           <p:nvPr/>
         </p:nvSpPr>
@@ -10826,7 +10255,7 @@
       </p:sp>
       <p:sp>
         <p:nvSpPr>
-          <p:cNvPr id="7" name="Rectangle 6"/>
+          <p:cNvPr id="6" name="Rectangle 5"/>
           <p:cNvSpPr/>
           <p:nvPr/>
         </p:nvSpPr>
@@ -10875,7 +10304,7 @@
       </p:sp>
       <p:sp>
         <p:nvSpPr>
-          <p:cNvPr id="8" name="TextBox 7"/>
+          <p:cNvPr id="7" name="TextBox 6"/>
           <p:cNvSpPr txBox="1"/>
           <p:nvPr/>
         </p:nvSpPr>
@@ -10917,14 +10346,105 @@
       </p:sp>
       <p:sp>
         <p:nvSpPr>
-          <p:cNvPr id="9" name="Rectangle 8"/>
+          <p:cNvPr id="8" name="Rectangle 7"/>
           <p:cNvSpPr/>
           <p:nvPr/>
         </p:nvSpPr>
         <p:spPr>
           <a:xfrm>
-            <a:off x="640080" y="1325880"/>
-            <a:ext cx="10908792" cy="2034909"/>
+            <a:off x="640080" y="1399032"/>
+            <a:ext cx="73152" cy="1109837"/>
+          </a:xfrm>
+          <a:prstGeom prst="rect">
+            <a:avLst/>
+          </a:prstGeom>
+          <a:solidFill>
+            <a:srgbClr val="C6F432"/>
+          </a:solidFill>
+          <a:ln>
+            <a:solidFill>
+              <a:srgbClr val="C6F432"/>
+            </a:solidFill>
+          </a:ln>
+        </p:spPr>
+        <p:style>
+          <a:lnRef idx="1">
+            <a:schemeClr val="accent1"/>
+          </a:lnRef>
+          <a:fillRef idx="3">
+            <a:schemeClr val="accent1"/>
+          </a:fillRef>
+          <a:effectRef idx="2">
+            <a:schemeClr val="accent1"/>
+          </a:effectRef>
+          <a:fontRef idx="minor">
+            <a:schemeClr val="lt1"/>
+          </a:fontRef>
+        </p:style>
+        <p:txBody>
+          <a:bodyPr rtlCol="0" anchor="ctr"/>
+          <a:lstStyle/>
+          <a:p>
+            <a:pPr algn="ctr">
+              <a:defRPr>
+                <a:latin typeface="Inter"/>
+              </a:defRPr>
+            </a:pPr>
+          </a:p>
+        </p:txBody>
+      </p:sp>
+      <p:sp>
+        <p:nvSpPr>
+          <p:cNvPr id="9" name="TextBox 8"/>
+          <p:cNvSpPr txBox="1"/>
+          <p:nvPr/>
+        </p:nvSpPr>
+        <p:spPr>
+          <a:xfrm>
+            <a:off x="896112" y="1371600"/>
+            <a:ext cx="10588752" cy="728561"/>
+          </a:xfrm>
+          <a:prstGeom prst="rect">
+            <a:avLst/>
+          </a:prstGeom>
+          <a:noFill/>
+        </p:spPr>
+        <p:txBody>
+          <a:bodyPr wrap="none" lIns="9144" rIns="9144" tIns="9144" bIns="9144" anchor="t">
+            <a:spAutoFit/>
+          </a:bodyPr>
+          <a:lstStyle/>
+          <a:p>
+            <a:pPr algn="l">
+              <a:spcAft>
+                <a:spcPts val="0"/>
+              </a:spcAft>
+              <a:defRPr sz="1800" b="1">
+                <a:solidFill>
+                  <a:srgbClr val="0D1117"/>
+                </a:solidFill>
+                <a:latin typeface="Inter"/>
+              </a:defRPr>
+            </a:pPr>
+            <a:r>
+              <a:rPr>
+                <a:latin typeface="Inter"/>
+              </a:rPr>
+              <a:t>No operational flags in the filings reviewed</a:t>
+            </a:r>
+          </a:p>
+        </p:txBody>
+      </p:sp>
+      <p:sp>
+        <p:nvSpPr>
+          <p:cNvPr id="10" name="Rectangle 9"/>
+          <p:cNvSpPr/>
+          <p:nvPr/>
+        </p:nvSpPr>
+        <p:spPr>
+          <a:xfrm>
+            <a:off x="640080" y="2691749"/>
+            <a:ext cx="10908792" cy="1453721"/>
           </a:xfrm>
           <a:prstGeom prst="rect">
             <a:avLst/>
@@ -10966,14 +10486,14 @@
       </p:sp>
       <p:sp>
         <p:nvSpPr>
-          <p:cNvPr id="10" name="Rectangle 9"/>
+          <p:cNvPr id="11" name="Rectangle 10"/>
           <p:cNvSpPr/>
           <p:nvPr/>
         </p:nvSpPr>
         <p:spPr>
           <a:xfrm>
-            <a:off x="640080" y="1325880"/>
-            <a:ext cx="54864" cy="2034909"/>
+            <a:off x="640080" y="2691749"/>
+            <a:ext cx="54864" cy="1453721"/>
           </a:xfrm>
           <a:prstGeom prst="rect">
             <a:avLst/>
@@ -11015,13 +10535,13 @@
       </p:sp>
       <p:sp>
         <p:nvSpPr>
-          <p:cNvPr id="11" name="TextBox 10"/>
+          <p:cNvPr id="12" name="TextBox 11"/>
           <p:cNvSpPr txBox="1"/>
           <p:nvPr/>
         </p:nvSpPr>
         <p:spPr>
           <a:xfrm>
-            <a:off x="804671" y="1435607"/>
+            <a:off x="804671" y="2801477"/>
             <a:ext cx="10616184" cy="228600"/>
           </a:xfrm>
           <a:prstGeom prst="rect">
@@ -11057,14 +10577,14 @@
       </p:sp>
       <p:sp>
         <p:nvSpPr>
-          <p:cNvPr id="12" name="TextBox 11"/>
+          <p:cNvPr id="13" name="TextBox 12"/>
           <p:cNvSpPr txBox="1"/>
           <p:nvPr/>
         </p:nvSpPr>
         <p:spPr>
           <a:xfrm>
-            <a:off x="804671" y="1719072"/>
-            <a:ext cx="10616184" cy="1550277"/>
+            <a:off x="804671" y="3084941"/>
+            <a:ext cx="10616184" cy="969089"/>
           </a:xfrm>
           <a:prstGeom prst="rect">
             <a:avLst/>
@@ -11099,14 +10619,14 @@
       </p:sp>
       <p:sp>
         <p:nvSpPr>
-          <p:cNvPr id="13" name="Rectangle 12"/>
+          <p:cNvPr id="14" name="Rectangle 13"/>
           <p:cNvSpPr/>
           <p:nvPr/>
         </p:nvSpPr>
         <p:spPr>
           <a:xfrm>
-            <a:off x="640080" y="3470517"/>
-            <a:ext cx="2644902" cy="2747402"/>
+            <a:off x="640080" y="4255199"/>
+            <a:ext cx="2644902" cy="1962720"/>
           </a:xfrm>
           <a:prstGeom prst="rect">
             <a:avLst/>
@@ -11148,13 +10668,13 @@
       </p:sp>
       <p:sp>
         <p:nvSpPr>
-          <p:cNvPr id="14" name="Rectangle 13"/>
+          <p:cNvPr id="15" name="Rectangle 14"/>
           <p:cNvSpPr/>
           <p:nvPr/>
         </p:nvSpPr>
         <p:spPr>
           <a:xfrm>
-            <a:off x="640080" y="3470517"/>
+            <a:off x="640080" y="4255199"/>
             <a:ext cx="2644902" cy="45720"/>
           </a:xfrm>
           <a:prstGeom prst="rect">
@@ -11197,13 +10717,13 @@
       </p:sp>
       <p:sp>
         <p:nvSpPr>
-          <p:cNvPr id="15" name="TextBox 14"/>
+          <p:cNvPr id="16" name="TextBox 15"/>
           <p:cNvSpPr txBox="1"/>
           <p:nvPr/>
         </p:nvSpPr>
         <p:spPr>
           <a:xfrm>
-            <a:off x="749808" y="3598533"/>
+            <a:off x="749808" y="4383215"/>
             <a:ext cx="2425446" cy="201168"/>
           </a:xfrm>
           <a:prstGeom prst="rect">
@@ -11239,13 +10759,13 @@
       </p:sp>
       <p:sp>
         <p:nvSpPr>
-          <p:cNvPr id="16" name="TextBox 15"/>
+          <p:cNvPr id="17" name="TextBox 16"/>
           <p:cNvSpPr txBox="1"/>
           <p:nvPr/>
         </p:nvSpPr>
         <p:spPr>
           <a:xfrm>
-            <a:off x="749808" y="3854565"/>
+            <a:off x="749808" y="4639247"/>
             <a:ext cx="2425446" cy="475488"/>
           </a:xfrm>
           <a:prstGeom prst="rect">
@@ -11281,7 +10801,7 @@
       </p:sp>
       <p:sp>
         <p:nvSpPr>
-          <p:cNvPr id="17" name="TextBox 16"/>
+          <p:cNvPr id="18" name="TextBox 17"/>
           <p:cNvSpPr txBox="1"/>
           <p:nvPr/>
         </p:nvSpPr>
@@ -11323,14 +10843,14 @@
       </p:sp>
       <p:sp>
         <p:nvSpPr>
-          <p:cNvPr id="18" name="Rectangle 17"/>
+          <p:cNvPr id="19" name="Rectangle 18"/>
           <p:cNvSpPr/>
           <p:nvPr/>
         </p:nvSpPr>
         <p:spPr>
           <a:xfrm>
-            <a:off x="3394710" y="3470517"/>
-            <a:ext cx="2644902" cy="2747402"/>
+            <a:off x="3394710" y="4255199"/>
+            <a:ext cx="2644902" cy="1962720"/>
           </a:xfrm>
           <a:prstGeom prst="rect">
             <a:avLst/>
@@ -11372,13 +10892,13 @@
       </p:sp>
       <p:sp>
         <p:nvSpPr>
-          <p:cNvPr id="19" name="Rectangle 18"/>
+          <p:cNvPr id="20" name="Rectangle 19"/>
           <p:cNvSpPr/>
           <p:nvPr/>
         </p:nvSpPr>
         <p:spPr>
           <a:xfrm>
-            <a:off x="3394710" y="3470517"/>
+            <a:off x="3394710" y="4255199"/>
             <a:ext cx="2644902" cy="45720"/>
           </a:xfrm>
           <a:prstGeom prst="rect">
@@ -11421,13 +10941,13 @@
       </p:sp>
       <p:sp>
         <p:nvSpPr>
-          <p:cNvPr id="20" name="TextBox 19"/>
+          <p:cNvPr id="21" name="TextBox 20"/>
           <p:cNvSpPr txBox="1"/>
           <p:nvPr/>
         </p:nvSpPr>
         <p:spPr>
           <a:xfrm>
-            <a:off x="3504438" y="3598533"/>
+            <a:off x="3504438" y="4383215"/>
             <a:ext cx="2425446" cy="201168"/>
           </a:xfrm>
           <a:prstGeom prst="rect">
@@ -11463,13 +10983,13 @@
       </p:sp>
       <p:sp>
         <p:nvSpPr>
-          <p:cNvPr id="21" name="TextBox 20"/>
+          <p:cNvPr id="22" name="TextBox 21"/>
           <p:cNvSpPr txBox="1"/>
           <p:nvPr/>
         </p:nvSpPr>
         <p:spPr>
           <a:xfrm>
-            <a:off x="3504438" y="3854565"/>
+            <a:off x="3504438" y="4639247"/>
             <a:ext cx="2425446" cy="475488"/>
           </a:xfrm>
           <a:prstGeom prst="rect">
@@ -11505,7 +11025,7 @@
       </p:sp>
       <p:sp>
         <p:nvSpPr>
-          <p:cNvPr id="22" name="TextBox 21"/>
+          <p:cNvPr id="23" name="TextBox 22"/>
           <p:cNvSpPr txBox="1"/>
           <p:nvPr/>
         </p:nvSpPr>
@@ -11547,14 +11067,14 @@
       </p:sp>
       <p:sp>
         <p:nvSpPr>
-          <p:cNvPr id="23" name="Rectangle 22"/>
+          <p:cNvPr id="24" name="Rectangle 23"/>
           <p:cNvSpPr/>
           <p:nvPr/>
         </p:nvSpPr>
         <p:spPr>
           <a:xfrm>
-            <a:off x="6149340" y="3470517"/>
-            <a:ext cx="2644902" cy="2747402"/>
+            <a:off x="6149340" y="4255199"/>
+            <a:ext cx="2644902" cy="1962720"/>
           </a:xfrm>
           <a:prstGeom prst="rect">
             <a:avLst/>
@@ -11596,13 +11116,13 @@
       </p:sp>
       <p:sp>
         <p:nvSpPr>
-          <p:cNvPr id="24" name="Rectangle 23"/>
+          <p:cNvPr id="25" name="Rectangle 24"/>
           <p:cNvSpPr/>
           <p:nvPr/>
         </p:nvSpPr>
         <p:spPr>
           <a:xfrm>
-            <a:off x="6149340" y="3470517"/>
+            <a:off x="6149340" y="4255199"/>
             <a:ext cx="2644902" cy="45720"/>
           </a:xfrm>
           <a:prstGeom prst="rect">
@@ -11645,13 +11165,13 @@
       </p:sp>
       <p:sp>
         <p:nvSpPr>
-          <p:cNvPr id="25" name="TextBox 24"/>
+          <p:cNvPr id="26" name="TextBox 25"/>
           <p:cNvSpPr txBox="1"/>
           <p:nvPr/>
         </p:nvSpPr>
         <p:spPr>
           <a:xfrm>
-            <a:off x="6259068" y="3598533"/>
+            <a:off x="6259068" y="4383215"/>
             <a:ext cx="2425446" cy="201168"/>
           </a:xfrm>
           <a:prstGeom prst="rect">
@@ -11687,13 +11207,13 @@
       </p:sp>
       <p:sp>
         <p:nvSpPr>
-          <p:cNvPr id="26" name="TextBox 25"/>
+          <p:cNvPr id="27" name="TextBox 26"/>
           <p:cNvSpPr txBox="1"/>
           <p:nvPr/>
         </p:nvSpPr>
         <p:spPr>
           <a:xfrm>
-            <a:off x="6259068" y="3854565"/>
+            <a:off x="6259068" y="4639247"/>
             <a:ext cx="2425446" cy="475488"/>
           </a:xfrm>
           <a:prstGeom prst="rect">
@@ -11729,7 +11249,7 @@
       </p:sp>
       <p:sp>
         <p:nvSpPr>
-          <p:cNvPr id="27" name="TextBox 26"/>
+          <p:cNvPr id="28" name="TextBox 27"/>
           <p:cNvSpPr txBox="1"/>
           <p:nvPr/>
         </p:nvSpPr>
@@ -11771,14 +11291,14 @@
       </p:sp>
       <p:sp>
         <p:nvSpPr>
-          <p:cNvPr id="28" name="Rectangle 27"/>
+          <p:cNvPr id="29" name="Rectangle 28"/>
           <p:cNvSpPr/>
           <p:nvPr/>
         </p:nvSpPr>
         <p:spPr>
           <a:xfrm>
-            <a:off x="8903970" y="3470517"/>
-            <a:ext cx="2644902" cy="2747402"/>
+            <a:off x="8903970" y="4255199"/>
+            <a:ext cx="2644902" cy="1962720"/>
           </a:xfrm>
           <a:prstGeom prst="rect">
             <a:avLst/>
@@ -11820,13 +11340,13 @@
       </p:sp>
       <p:sp>
         <p:nvSpPr>
-          <p:cNvPr id="29" name="Rectangle 28"/>
+          <p:cNvPr id="30" name="Rectangle 29"/>
           <p:cNvSpPr/>
           <p:nvPr/>
         </p:nvSpPr>
         <p:spPr>
           <a:xfrm>
-            <a:off x="8903970" y="3470517"/>
+            <a:off x="8903970" y="4255199"/>
             <a:ext cx="2644902" cy="45720"/>
           </a:xfrm>
           <a:prstGeom prst="rect">
@@ -11869,13 +11389,13 @@
       </p:sp>
       <p:sp>
         <p:nvSpPr>
-          <p:cNvPr id="30" name="TextBox 29"/>
+          <p:cNvPr id="31" name="TextBox 30"/>
           <p:cNvSpPr txBox="1"/>
           <p:nvPr/>
         </p:nvSpPr>
         <p:spPr>
           <a:xfrm>
-            <a:off x="9013698" y="3598533"/>
+            <a:off x="9013698" y="4383215"/>
             <a:ext cx="2425446" cy="201168"/>
           </a:xfrm>
           <a:prstGeom prst="rect">
@@ -11911,13 +11431,13 @@
       </p:sp>
       <p:sp>
         <p:nvSpPr>
-          <p:cNvPr id="31" name="TextBox 30"/>
+          <p:cNvPr id="32" name="TextBox 31"/>
           <p:cNvSpPr txBox="1"/>
           <p:nvPr/>
         </p:nvSpPr>
         <p:spPr>
           <a:xfrm>
-            <a:off x="9013698" y="3854565"/>
+            <a:off x="9013698" y="4639247"/>
             <a:ext cx="2425446" cy="475488"/>
           </a:xfrm>
           <a:prstGeom prst="rect">
@@ -11953,7 +11473,7 @@
       </p:sp>
       <p:sp>
         <p:nvSpPr>
-          <p:cNvPr id="32" name="TextBox 31"/>
+          <p:cNvPr id="33" name="TextBox 32"/>
           <p:cNvSpPr txBox="1"/>
           <p:nvPr/>
         </p:nvSpPr>
@@ -11995,7 +11515,7 @@
       </p:sp>
       <p:sp>
         <p:nvSpPr>
-          <p:cNvPr id="33" name="Rectangle 32"/>
+          <p:cNvPr id="34" name="Rectangle 33"/>
           <p:cNvSpPr/>
           <p:nvPr/>
         </p:nvSpPr>
@@ -12044,7 +11564,7 @@
       </p:sp>
       <p:sp>
         <p:nvSpPr>
-          <p:cNvPr id="34" name="TextBox 33"/>
+          <p:cNvPr id="35" name="TextBox 34"/>
           <p:cNvSpPr txBox="1"/>
           <p:nvPr/>
         </p:nvSpPr>
@@ -12086,7 +11606,7 @@
       </p:sp>
       <p:sp>
         <p:nvSpPr>
-          <p:cNvPr id="35" name="TextBox 34"/>
+          <p:cNvPr id="36" name="TextBox 35"/>
           <p:cNvSpPr txBox="1"/>
           <p:nvPr/>
         </p:nvSpPr>
@@ -12128,7 +11648,7 @@
       </p:sp>
       <p:sp>
         <p:nvSpPr>
-          <p:cNvPr id="36" name="TextBox 35"/>
+          <p:cNvPr id="37" name="TextBox 36"/>
           <p:cNvSpPr txBox="1"/>
           <p:nvPr/>
         </p:nvSpPr>
@@ -12244,7 +11764,7 @@
         <p:spPr>
           <a:xfrm>
             <a:off x="640080" y="329184"/>
-            <a:ext cx="5303520" cy="182880"/>
+            <a:ext cx="9875520" cy="182880"/>
           </a:xfrm>
           <a:prstGeom prst="rect">
             <a:avLst/>
@@ -12285,48 +11805,6 @@
         </p:nvSpPr>
         <p:spPr>
           <a:xfrm>
-            <a:off x="5897880" y="310896"/>
-            <a:ext cx="4800600" cy="256032"/>
-          </a:xfrm>
-          <a:prstGeom prst="rect">
-            <a:avLst/>
-          </a:prstGeom>
-          <a:noFill/>
-        </p:spPr>
-        <p:txBody>
-          <a:bodyPr wrap="none" lIns="9144" rIns="9144" tIns="9144" bIns="9144" anchor="t">
-            <a:spAutoFit/>
-          </a:bodyPr>
-          <a:lstStyle/>
-          <a:p>
-            <a:pPr algn="r">
-              <a:spcAft>
-                <a:spcPts val="0"/>
-              </a:spcAft>
-              <a:defRPr sz="680" b="1">
-                <a:solidFill>
-                  <a:srgbClr val="4F6B00"/>
-                </a:solidFill>
-                <a:latin typeface="Inter"/>
-              </a:defRPr>
-            </a:pPr>
-            <a:r>
-              <a:rPr>
-                <a:latin typeface="Inter"/>
-              </a:rPr>
-              <a:t>Illustrative, Gradient Maintained — demo data, not the client's holdings or managers</a:t>
-            </a:r>
-          </a:p>
-        </p:txBody>
-      </p:sp>
-      <p:sp>
-        <p:nvSpPr>
-          <p:cNvPr id="5" name="TextBox 4"/>
-          <p:cNvSpPr txBox="1"/>
-          <p:nvPr/>
-        </p:nvSpPr>
-        <p:spPr>
-          <a:xfrm>
             <a:off x="640080" y="566928"/>
             <a:ext cx="10058400" cy="530352"/>
           </a:xfrm>
@@ -12363,7 +11841,7 @@
       </p:sp>
       <p:sp>
         <p:nvSpPr>
-          <p:cNvPr id="6" name="Rectangle 5"/>
+          <p:cNvPr id="5" name="Rectangle 4"/>
           <p:cNvSpPr/>
           <p:nvPr/>
         </p:nvSpPr>
@@ -12412,7 +11890,7 @@
       </p:sp>
       <p:sp>
         <p:nvSpPr>
-          <p:cNvPr id="7" name="Rectangle 6"/>
+          <p:cNvPr id="6" name="Rectangle 5"/>
           <p:cNvSpPr/>
           <p:nvPr/>
         </p:nvSpPr>
@@ -12461,7 +11939,7 @@
       </p:sp>
       <p:sp>
         <p:nvSpPr>
-          <p:cNvPr id="8" name="TextBox 7"/>
+          <p:cNvPr id="7" name="TextBox 6"/>
           <p:cNvSpPr txBox="1"/>
           <p:nvPr/>
         </p:nvSpPr>
@@ -12503,7 +11981,7 @@
       </p:sp>
       <p:sp>
         <p:nvSpPr>
-          <p:cNvPr id="9" name="TextBox 8"/>
+          <p:cNvPr id="8" name="TextBox 7"/>
           <p:cNvSpPr txBox="1"/>
           <p:nvPr/>
         </p:nvSpPr>
@@ -12545,7 +12023,7 @@
       </p:sp>
       <p:graphicFrame>
         <p:nvGraphicFramePr>
-          <p:cNvPr id="10" name="Table 9"/>
+          <p:cNvPr id="9" name="Table 8"/>
           <p:cNvGraphicFramePr>
             <a:graphicFrameLocks noGrp="1"/>
           </p:cNvGraphicFramePr>
@@ -12553,7 +12031,7 @@
         </p:nvGraphicFramePr>
         <p:xfrm>
           <a:off x="640080" y="1600200"/>
-          <a:ext cx="10908792" cy="2402913"/>
+          <a:ext cx="10908792" cy="2518060"/>
         </p:xfrm>
         <a:graphic>
           <a:graphicData uri="http://schemas.openxmlformats.org/drawingml/2006/table">
@@ -12566,7 +12044,7 @@
                 <a:gridCol w="4448556"/>
                 <a:gridCol w="4448556"/>
               </a:tblGrid>
-              <a:tr h="480582">
+              <a:tr h="503612">
                 <a:tc>
                   <a:txBody>
                     <a:bodyPr/>
@@ -12649,7 +12127,7 @@
                   </a:tcPr>
                 </a:tc>
               </a:tr>
-              <a:tr h="480582">
+              <a:tr h="503612">
                 <a:tc>
                   <a:txBody>
                     <a:bodyPr/>
@@ -12694,7 +12172,7 @@
                         <a:rPr>
                           <a:latin typeface="Inter"/>
                         </a:rPr>
-                        <a:t>● available</a:t>
+                        <a:t>● Available</a:t>
                       </a:r>
                     </a:p>
                   </a:txBody>
@@ -12732,7 +12210,7 @@
                   </a:tcPr>
                 </a:tc>
               </a:tr>
-              <a:tr h="480582">
+              <a:tr h="503612">
                 <a:tc>
                   <a:txBody>
                     <a:bodyPr/>
@@ -12777,7 +12255,7 @@
                         <a:rPr>
                           <a:latin typeface="Inter"/>
                         </a:rPr>
-                        <a:t>● available</a:t>
+                        <a:t>● Available</a:t>
                       </a:r>
                     </a:p>
                   </a:txBody>
@@ -12815,7 +12293,7 @@
                   </a:tcPr>
                 </a:tc>
               </a:tr>
-              <a:tr h="480582">
+              <a:tr h="503612">
                 <a:tc>
                   <a:txBody>
                     <a:bodyPr/>
@@ -12860,7 +12338,7 @@
                         <a:rPr>
                           <a:latin typeface="Inter"/>
                         </a:rPr>
-                        <a:t>● unavailable</a:t>
+                        <a:t>● Not available</a:t>
                       </a:r>
                     </a:p>
                   </a:txBody>
@@ -12898,7 +12376,7 @@
                   </a:tcPr>
                 </a:tc>
               </a:tr>
-              <a:tr h="480585">
+              <a:tr h="503612">
                 <a:tc>
                   <a:txBody>
                     <a:bodyPr/>
@@ -12943,7 +12421,7 @@
                         <a:rPr>
                           <a:latin typeface="Inter"/>
                         </a:rPr>
-                        <a:t>● available</a:t>
+                        <a:t>● Available</a:t>
                       </a:r>
                     </a:p>
                   </a:txBody>
@@ -12987,14 +12465,14 @@
       </p:graphicFrame>
       <p:sp>
         <p:nvSpPr>
-          <p:cNvPr id="11" name="Rectangle 10"/>
+          <p:cNvPr id="10" name="Rectangle 9"/>
           <p:cNvSpPr/>
           <p:nvPr/>
         </p:nvSpPr>
         <p:spPr>
           <a:xfrm>
-            <a:off x="640080" y="4112841"/>
-            <a:ext cx="10908792" cy="1094015"/>
+            <a:off x="640080" y="4227988"/>
+            <a:ext cx="10908792" cy="940101"/>
           </a:xfrm>
           <a:prstGeom prst="rect">
             <a:avLst/>
@@ -13036,14 +12514,14 @@
       </p:sp>
       <p:sp>
         <p:nvSpPr>
-          <p:cNvPr id="12" name="Rectangle 11"/>
+          <p:cNvPr id="11" name="Rectangle 10"/>
           <p:cNvSpPr/>
           <p:nvPr/>
         </p:nvSpPr>
         <p:spPr>
           <a:xfrm>
-            <a:off x="640080" y="4112841"/>
-            <a:ext cx="54864" cy="1094015"/>
+            <a:off x="640080" y="4227988"/>
+            <a:ext cx="54864" cy="940101"/>
           </a:xfrm>
           <a:prstGeom prst="rect">
             <a:avLst/>
@@ -13085,13 +12563,13 @@
       </p:sp>
       <p:sp>
         <p:nvSpPr>
-          <p:cNvPr id="13" name="TextBox 12"/>
+          <p:cNvPr id="12" name="TextBox 11"/>
           <p:cNvSpPr txBox="1"/>
           <p:nvPr/>
         </p:nvSpPr>
         <p:spPr>
           <a:xfrm>
-            <a:off x="804671" y="4222569"/>
+            <a:off x="804671" y="4337716"/>
             <a:ext cx="10616184" cy="228600"/>
           </a:xfrm>
           <a:prstGeom prst="rect">
@@ -13120,21 +12598,21 @@
               <a:rPr>
                 <a:latin typeface="Inter"/>
               </a:rPr>
-              <a:t>Key judgment — headline signal</a:t>
-            </a:r>
-          </a:p>
-        </p:txBody>
-      </p:sp>
-      <p:sp>
-        <p:nvSpPr>
-          <p:cNvPr id="14" name="TextBox 13"/>
+              <a:t>Key judgment — Operational flags</a:t>
+            </a:r>
+          </a:p>
+        </p:txBody>
+      </p:sp>
+      <p:sp>
+        <p:nvSpPr>
+          <p:cNvPr id="13" name="TextBox 12"/>
           <p:cNvSpPr txBox="1"/>
           <p:nvPr/>
         </p:nvSpPr>
         <p:spPr>
           <a:xfrm>
-            <a:off x="804671" y="4506033"/>
-            <a:ext cx="10616184" cy="609383"/>
+            <a:off x="804671" y="4621180"/>
+            <a:ext cx="10616184" cy="455469"/>
           </a:xfrm>
           <a:prstGeom prst="rect">
             <a:avLst/>
@@ -13162,21 +12640,21 @@
               <a:rPr>
                 <a:latin typeface="Inter"/>
               </a:rPr>
-              <a:t>Observation: The sample report carries one clear headline signal [S1]. Why it matters: This signal focuses oversight on the report's most decision-relevant condition. Uncertainty: Evidence coverage may exclude newer or more detailed observations. What would change the view: A governed refresh showing a different signal or breached threshold.</a:t>
-            </a:r>
-          </a:p>
-        </p:txBody>
-      </p:sp>
-      <p:sp>
-        <p:nvSpPr>
-          <p:cNvPr id="15" name="Rectangle 14"/>
+              <a:t>Observation: The filings reviewed show no operational flags [S1]. Why it matters: Nothing in the regulatory record blocks the diligence from proceeding. Uncertainty: Areas the filings do not cover are listed under evidence coverage. What would change the view: Firm events or audit findings in those areas.</a:t>
+            </a:r>
+          </a:p>
+        </p:txBody>
+      </p:sp>
+      <p:sp>
+        <p:nvSpPr>
+          <p:cNvPr id="14" name="Rectangle 13"/>
           <p:cNvSpPr/>
           <p:nvPr/>
         </p:nvSpPr>
         <p:spPr>
           <a:xfrm>
-            <a:off x="640080" y="5316584"/>
-            <a:ext cx="10908792" cy="901335"/>
+            <a:off x="640080" y="5277818"/>
+            <a:ext cx="10908792" cy="940101"/>
           </a:xfrm>
           <a:prstGeom prst="rect">
             <a:avLst/>
@@ -13218,14 +12696,14 @@
       </p:sp>
       <p:sp>
         <p:nvSpPr>
-          <p:cNvPr id="16" name="Rectangle 15"/>
+          <p:cNvPr id="15" name="Rectangle 14"/>
           <p:cNvSpPr/>
           <p:nvPr/>
         </p:nvSpPr>
         <p:spPr>
           <a:xfrm>
-            <a:off x="640080" y="5316584"/>
-            <a:ext cx="54864" cy="901335"/>
+            <a:off x="640080" y="5277818"/>
+            <a:ext cx="54864" cy="940101"/>
           </a:xfrm>
           <a:prstGeom prst="rect">
             <a:avLst/>
@@ -13267,13 +12745,13 @@
       </p:sp>
       <p:sp>
         <p:nvSpPr>
-          <p:cNvPr id="17" name="TextBox 16"/>
+          <p:cNvPr id="16" name="TextBox 15"/>
           <p:cNvSpPr txBox="1"/>
           <p:nvPr/>
         </p:nvSpPr>
         <p:spPr>
           <a:xfrm>
-            <a:off x="804671" y="5426312"/>
+            <a:off x="804671" y="5387546"/>
             <a:ext cx="10616184" cy="228600"/>
           </a:xfrm>
           <a:prstGeom prst="rect">
@@ -13302,21 +12780,21 @@
               <a:rPr>
                 <a:latin typeface="Inter"/>
               </a:rPr>
-              <a:t>Key judgment — primary measure</a:t>
-            </a:r>
-          </a:p>
-        </p:txBody>
-      </p:sp>
-      <p:sp>
-        <p:nvSpPr>
-          <p:cNvPr id="18" name="TextBox 17"/>
+              <a:t>Key judgment — Firm scale</a:t>
+            </a:r>
+          </a:p>
+        </p:txBody>
+      </p:sp>
+      <p:sp>
+        <p:nvSpPr>
+          <p:cNvPr id="17" name="TextBox 16"/>
           <p:cNvSpPr txBox="1"/>
           <p:nvPr/>
         </p:nvSpPr>
         <p:spPr>
           <a:xfrm>
-            <a:off x="804671" y="5709776"/>
-            <a:ext cx="10616184" cy="416703"/>
+            <a:off x="804671" y="5671010"/>
+            <a:ext cx="10616184" cy="455469"/>
           </a:xfrm>
           <a:prstGeom prst="rect">
             <a:avLst/>
@@ -13344,14 +12822,14 @@
               <a:rPr>
                 <a:latin typeface="Inter"/>
               </a:rPr>
-              <a:t>Observation: Regulatory AUM is $12.4B in the review evidence [S2]. Why it matters: This measure establishes the baseline for comparing later governed results. Uncertainty: The source basis may omit newer observations outside the reviewed evidence. What would change the view: A refreshed source report showing a change above 1%.</a:t>
-            </a:r>
-          </a:p>
-        </p:txBody>
-      </p:sp>
-      <p:sp>
-        <p:nvSpPr>
-          <p:cNvPr id="19" name="Rectangle 18"/>
+              <a:t>Observation: The adviser reports $12.4B of regulatory assets under management [S2]. Why it matters: Scale supports the custody, audit and compliance infrastructure expected for the mandate. Uncertainty: The figure is as of the latest Form ADV. What would change the view: A material change in the next annual amendment.</a:t>
+            </a:r>
+          </a:p>
+        </p:txBody>
+      </p:sp>
+      <p:sp>
+        <p:nvSpPr>
+          <p:cNvPr id="18" name="Rectangle 17"/>
           <p:cNvSpPr/>
           <p:nvPr/>
         </p:nvSpPr>
@@ -13400,7 +12878,7 @@
       </p:sp>
       <p:sp>
         <p:nvSpPr>
-          <p:cNvPr id="20" name="TextBox 19"/>
+          <p:cNvPr id="19" name="TextBox 18"/>
           <p:cNvSpPr txBox="1"/>
           <p:nvPr/>
         </p:nvSpPr>
@@ -13442,7 +12920,7 @@
       </p:sp>
       <p:sp>
         <p:nvSpPr>
-          <p:cNvPr id="21" name="TextBox 20"/>
+          <p:cNvPr id="20" name="TextBox 19"/>
           <p:cNvSpPr txBox="1"/>
           <p:nvPr/>
         </p:nvSpPr>
@@ -13484,7 +12962,7 @@
       </p:sp>
       <p:sp>
         <p:nvSpPr>
-          <p:cNvPr id="22" name="TextBox 21"/>
+          <p:cNvPr id="21" name="TextBox 20"/>
           <p:cNvSpPr txBox="1"/>
           <p:nvPr/>
         </p:nvSpPr>
@@ -13600,7 +13078,7 @@
         <p:spPr>
           <a:xfrm>
             <a:off x="640080" y="329184"/>
-            <a:ext cx="5303520" cy="182880"/>
+            <a:ext cx="9875520" cy="182880"/>
           </a:xfrm>
           <a:prstGeom prst="rect">
             <a:avLst/>
@@ -13641,48 +13119,6 @@
         </p:nvSpPr>
         <p:spPr>
           <a:xfrm>
-            <a:off x="5897880" y="310896"/>
-            <a:ext cx="4800600" cy="256032"/>
-          </a:xfrm>
-          <a:prstGeom prst="rect">
-            <a:avLst/>
-          </a:prstGeom>
-          <a:noFill/>
-        </p:spPr>
-        <p:txBody>
-          <a:bodyPr wrap="none" lIns="9144" rIns="9144" tIns="9144" bIns="9144" anchor="t">
-            <a:spAutoFit/>
-          </a:bodyPr>
-          <a:lstStyle/>
-          <a:p>
-            <a:pPr algn="r">
-              <a:spcAft>
-                <a:spcPts val="0"/>
-              </a:spcAft>
-              <a:defRPr sz="680" b="1">
-                <a:solidFill>
-                  <a:srgbClr val="4F6B00"/>
-                </a:solidFill>
-                <a:latin typeface="Inter"/>
-              </a:defRPr>
-            </a:pPr>
-            <a:r>
-              <a:rPr>
-                <a:latin typeface="Inter"/>
-              </a:rPr>
-              <a:t>Illustrative, Gradient Maintained — demo data, not the client's holdings or managers</a:t>
-            </a:r>
-          </a:p>
-        </p:txBody>
-      </p:sp>
-      <p:sp>
-        <p:nvSpPr>
-          <p:cNvPr id="5" name="TextBox 4"/>
-          <p:cNvSpPr txBox="1"/>
-          <p:nvPr/>
-        </p:nvSpPr>
-        <p:spPr>
-          <a:xfrm>
             <a:off x="640080" y="566928"/>
             <a:ext cx="10058400" cy="530352"/>
           </a:xfrm>
@@ -13719,7 +13155,7 @@
       </p:sp>
       <p:sp>
         <p:nvSpPr>
-          <p:cNvPr id="6" name="Rectangle 5"/>
+          <p:cNvPr id="5" name="Rectangle 4"/>
           <p:cNvSpPr/>
           <p:nvPr/>
         </p:nvSpPr>
@@ -13768,7 +13204,7 @@
       </p:sp>
       <p:sp>
         <p:nvSpPr>
-          <p:cNvPr id="7" name="Rectangle 6"/>
+          <p:cNvPr id="6" name="Rectangle 5"/>
           <p:cNvSpPr/>
           <p:nvPr/>
         </p:nvSpPr>
@@ -13817,7 +13253,7 @@
       </p:sp>
       <p:sp>
         <p:nvSpPr>
-          <p:cNvPr id="8" name="TextBox 7"/>
+          <p:cNvPr id="7" name="TextBox 6"/>
           <p:cNvSpPr txBox="1"/>
           <p:nvPr/>
         </p:nvSpPr>
@@ -13859,7 +13295,7 @@
       </p:sp>
       <p:sp>
         <p:nvSpPr>
-          <p:cNvPr id="9" name="Rectangle 8"/>
+          <p:cNvPr id="8" name="Rectangle 7"/>
           <p:cNvSpPr/>
           <p:nvPr/>
         </p:nvSpPr>
@@ -13908,7 +13344,7 @@
       </p:sp>
       <p:sp>
         <p:nvSpPr>
-          <p:cNvPr id="10" name="Rectangle 9"/>
+          <p:cNvPr id="9" name="Rectangle 8"/>
           <p:cNvSpPr/>
           <p:nvPr/>
         </p:nvSpPr>
@@ -13957,7 +13393,7 @@
       </p:sp>
       <p:sp>
         <p:nvSpPr>
-          <p:cNvPr id="11" name="TextBox 10"/>
+          <p:cNvPr id="10" name="TextBox 9"/>
           <p:cNvSpPr txBox="1"/>
           <p:nvPr/>
         </p:nvSpPr>
@@ -13992,14 +13428,14 @@
               <a:rPr>
                 <a:latin typeface="Inter"/>
               </a:rPr>
-              <a:t>Key judgment — monitoring priority</a:t>
-            </a:r>
-          </a:p>
-        </p:txBody>
-      </p:sp>
-      <p:sp>
-        <p:nvSpPr>
-          <p:cNvPr id="12" name="TextBox 11"/>
+              <a:t>Key judgment — Operational score</a:t>
+            </a:r>
+          </a:p>
+        </p:txBody>
+      </p:sp>
+      <p:sp>
+        <p:nvSpPr>
+          <p:cNvPr id="11" name="TextBox 10"/>
           <p:cNvSpPr txBox="1"/>
           <p:nvPr/>
         </p:nvSpPr>
@@ -14034,14 +13470,14 @@
               <a:rPr>
                 <a:latin typeface="Inter"/>
               </a:rPr>
-              <a:t>Observation: Composite is 32.4 in the review evidence [S3]. Why it matters: This result determines which item receives priority in the next monitoring cycle. Uncertainty: Supporting coverage may omit later filings or corroborating detail. What would change the view: A new filing or report that resolves the item or changes it by 1%.</a:t>
-            </a:r>
-          </a:p>
-        </p:txBody>
-      </p:sp>
-      <p:sp>
-        <p:nvSpPr>
-          <p:cNvPr id="13" name="Rectangle 12"/>
+              <a:t>Observation: The composite operational score is 32.4 [S3]. Why it matters: It sets the baseline for the next review of this manager. Uncertainty: The score covers only the evidence areas returned. What would change the view: New firm events or filings that move the score.</a:t>
+            </a:r>
+          </a:p>
+        </p:txBody>
+      </p:sp>
+      <p:sp>
+        <p:nvSpPr>
+          <p:cNvPr id="12" name="Rectangle 11"/>
           <p:cNvSpPr/>
           <p:nvPr/>
         </p:nvSpPr>
@@ -14090,7 +13526,7 @@
       </p:sp>
       <p:sp>
         <p:nvSpPr>
-          <p:cNvPr id="14" name="TextBox 13"/>
+          <p:cNvPr id="13" name="TextBox 12"/>
           <p:cNvSpPr txBox="1"/>
           <p:nvPr/>
         </p:nvSpPr>
@@ -14132,7 +13568,7 @@
       </p:sp>
       <p:sp>
         <p:nvSpPr>
-          <p:cNvPr id="15" name="TextBox 14"/>
+          <p:cNvPr id="14" name="TextBox 13"/>
           <p:cNvSpPr txBox="1"/>
           <p:nvPr/>
         </p:nvSpPr>
@@ -14174,7 +13610,7 @@
       </p:sp>
       <p:sp>
         <p:nvSpPr>
-          <p:cNvPr id="16" name="TextBox 15"/>
+          <p:cNvPr id="15" name="TextBox 14"/>
           <p:cNvSpPr txBox="1"/>
           <p:nvPr/>
         </p:nvSpPr>
@@ -14290,7 +13726,7 @@
         <p:spPr>
           <a:xfrm>
             <a:off x="640080" y="329184"/>
-            <a:ext cx="5303520" cy="182880"/>
+            <a:ext cx="9875520" cy="182880"/>
           </a:xfrm>
           <a:prstGeom prst="rect">
             <a:avLst/>
@@ -14331,48 +13767,6 @@
         </p:nvSpPr>
         <p:spPr>
           <a:xfrm>
-            <a:off x="5897880" y="310896"/>
-            <a:ext cx="4800600" cy="256032"/>
-          </a:xfrm>
-          <a:prstGeom prst="rect">
-            <a:avLst/>
-          </a:prstGeom>
-          <a:noFill/>
-        </p:spPr>
-        <p:txBody>
-          <a:bodyPr wrap="none" lIns="9144" rIns="9144" tIns="9144" bIns="9144" anchor="t">
-            <a:spAutoFit/>
-          </a:bodyPr>
-          <a:lstStyle/>
-          <a:p>
-            <a:pPr algn="r">
-              <a:spcAft>
-                <a:spcPts val="0"/>
-              </a:spcAft>
-              <a:defRPr sz="680" b="1">
-                <a:solidFill>
-                  <a:srgbClr val="4F6B00"/>
-                </a:solidFill>
-                <a:latin typeface="Inter"/>
-              </a:defRPr>
-            </a:pPr>
-            <a:r>
-              <a:rPr>
-                <a:latin typeface="Inter"/>
-              </a:rPr>
-              <a:t>Illustrative, Gradient Maintained — demo data, not the client's holdings or managers</a:t>
-            </a:r>
-          </a:p>
-        </p:txBody>
-      </p:sp>
-      <p:sp>
-        <p:nvSpPr>
-          <p:cNvPr id="5" name="TextBox 4"/>
-          <p:cNvSpPr txBox="1"/>
-          <p:nvPr/>
-        </p:nvSpPr>
-        <p:spPr>
-          <a:xfrm>
             <a:off x="640080" y="566928"/>
             <a:ext cx="10058400" cy="530352"/>
           </a:xfrm>
@@ -14409,7 +13803,7 @@
       </p:sp>
       <p:sp>
         <p:nvSpPr>
-          <p:cNvPr id="6" name="Rectangle 5"/>
+          <p:cNvPr id="5" name="Rectangle 4"/>
           <p:cNvSpPr/>
           <p:nvPr/>
         </p:nvSpPr>
@@ -14458,7 +13852,7 @@
       </p:sp>
       <p:sp>
         <p:nvSpPr>
-          <p:cNvPr id="7" name="Rectangle 6"/>
+          <p:cNvPr id="6" name="Rectangle 5"/>
           <p:cNvSpPr/>
           <p:nvPr/>
         </p:nvSpPr>
@@ -14507,7 +13901,7 @@
       </p:sp>
       <p:sp>
         <p:nvSpPr>
-          <p:cNvPr id="8" name="TextBox 7"/>
+          <p:cNvPr id="7" name="TextBox 6"/>
           <p:cNvSpPr txBox="1"/>
           <p:nvPr/>
         </p:nvSpPr>
@@ -14549,7 +13943,7 @@
       </p:sp>
       <p:sp>
         <p:nvSpPr>
-          <p:cNvPr id="9" name="Rectangle 8"/>
+          <p:cNvPr id="8" name="Rectangle 7"/>
           <p:cNvSpPr/>
           <p:nvPr/>
         </p:nvSpPr>
@@ -14598,7 +13992,7 @@
       </p:sp>
       <p:sp>
         <p:nvSpPr>
-          <p:cNvPr id="10" name="Rectangle 9"/>
+          <p:cNvPr id="9" name="Rectangle 8"/>
           <p:cNvSpPr/>
           <p:nvPr/>
         </p:nvSpPr>
@@ -14647,7 +14041,7 @@
       </p:sp>
       <p:sp>
         <p:nvSpPr>
-          <p:cNvPr id="11" name="TextBox 10"/>
+          <p:cNvPr id="10" name="TextBox 9"/>
           <p:cNvSpPr txBox="1"/>
           <p:nvPr/>
         </p:nvSpPr>
@@ -14689,7 +14083,7 @@
       </p:sp>
       <p:sp>
         <p:nvSpPr>
-          <p:cNvPr id="12" name="TextBox 11"/>
+          <p:cNvPr id="11" name="TextBox 10"/>
           <p:cNvSpPr txBox="1"/>
           <p:nvPr/>
         </p:nvSpPr>
@@ -14731,7 +14125,7 @@
       </p:sp>
       <p:sp>
         <p:nvSpPr>
-          <p:cNvPr id="13" name="TextBox 12"/>
+          <p:cNvPr id="12" name="TextBox 11"/>
           <p:cNvSpPr txBox="1"/>
           <p:nvPr/>
         </p:nvSpPr>
@@ -14773,7 +14167,7 @@
       </p:sp>
       <p:sp>
         <p:nvSpPr>
-          <p:cNvPr id="14" name="Rectangle 13"/>
+          <p:cNvPr id="13" name="Rectangle 12"/>
           <p:cNvSpPr/>
           <p:nvPr/>
         </p:nvSpPr>
@@ -14822,7 +14216,7 @@
       </p:sp>
       <p:sp>
         <p:nvSpPr>
-          <p:cNvPr id="15" name="Rectangle 14"/>
+          <p:cNvPr id="14" name="Rectangle 13"/>
           <p:cNvSpPr/>
           <p:nvPr/>
         </p:nvSpPr>
@@ -14871,7 +14265,7 @@
       </p:sp>
       <p:sp>
         <p:nvSpPr>
-          <p:cNvPr id="16" name="TextBox 15"/>
+          <p:cNvPr id="15" name="TextBox 14"/>
           <p:cNvSpPr txBox="1"/>
           <p:nvPr/>
         </p:nvSpPr>
@@ -14913,7 +14307,7 @@
       </p:sp>
       <p:sp>
         <p:nvSpPr>
-          <p:cNvPr id="17" name="TextBox 16"/>
+          <p:cNvPr id="16" name="TextBox 15"/>
           <p:cNvSpPr txBox="1"/>
           <p:nvPr/>
         </p:nvSpPr>
@@ -14955,7 +14349,7 @@
       </p:sp>
       <p:sp>
         <p:nvSpPr>
-          <p:cNvPr id="18" name="TextBox 17"/>
+          <p:cNvPr id="17" name="TextBox 16"/>
           <p:cNvSpPr txBox="1"/>
           <p:nvPr/>
         </p:nvSpPr>
@@ -14997,7 +14391,7 @@
       </p:sp>
       <p:sp>
         <p:nvSpPr>
-          <p:cNvPr id="19" name="Rectangle 18"/>
+          <p:cNvPr id="18" name="Rectangle 17"/>
           <p:cNvSpPr/>
           <p:nvPr/>
         </p:nvSpPr>
@@ -15046,7 +14440,7 @@
       </p:sp>
       <p:sp>
         <p:nvSpPr>
-          <p:cNvPr id="20" name="Rectangle 19"/>
+          <p:cNvPr id="19" name="Rectangle 18"/>
           <p:cNvSpPr/>
           <p:nvPr/>
         </p:nvSpPr>
@@ -15095,7 +14489,7 @@
       </p:sp>
       <p:sp>
         <p:nvSpPr>
-          <p:cNvPr id="21" name="TextBox 20"/>
+          <p:cNvPr id="20" name="TextBox 19"/>
           <p:cNvSpPr txBox="1"/>
           <p:nvPr/>
         </p:nvSpPr>
@@ -15137,7 +14531,7 @@
       </p:sp>
       <p:sp>
         <p:nvSpPr>
-          <p:cNvPr id="22" name="TextBox 21"/>
+          <p:cNvPr id="21" name="TextBox 20"/>
           <p:cNvSpPr txBox="1"/>
           <p:nvPr/>
         </p:nvSpPr>
@@ -15179,7 +14573,7 @@
       </p:sp>
       <p:sp>
         <p:nvSpPr>
-          <p:cNvPr id="23" name="TextBox 22"/>
+          <p:cNvPr id="22" name="TextBox 21"/>
           <p:cNvSpPr txBox="1"/>
           <p:nvPr/>
         </p:nvSpPr>
@@ -15221,7 +14615,7 @@
       </p:sp>
       <p:sp>
         <p:nvSpPr>
-          <p:cNvPr id="24" name="Rectangle 23"/>
+          <p:cNvPr id="23" name="Rectangle 22"/>
           <p:cNvSpPr/>
           <p:nvPr/>
         </p:nvSpPr>
@@ -15270,7 +14664,7 @@
       </p:sp>
       <p:sp>
         <p:nvSpPr>
-          <p:cNvPr id="25" name="Rectangle 24"/>
+          <p:cNvPr id="24" name="Rectangle 23"/>
           <p:cNvSpPr/>
           <p:nvPr/>
         </p:nvSpPr>
@@ -15319,7 +14713,7 @@
       </p:sp>
       <p:sp>
         <p:nvSpPr>
-          <p:cNvPr id="26" name="TextBox 25"/>
+          <p:cNvPr id="25" name="TextBox 24"/>
           <p:cNvSpPr txBox="1"/>
           <p:nvPr/>
         </p:nvSpPr>
@@ -15361,7 +14755,7 @@
       </p:sp>
       <p:sp>
         <p:nvSpPr>
-          <p:cNvPr id="27" name="TextBox 26"/>
+          <p:cNvPr id="26" name="TextBox 25"/>
           <p:cNvSpPr txBox="1"/>
           <p:nvPr/>
         </p:nvSpPr>
@@ -15403,7 +14797,7 @@
       </p:sp>
       <p:sp>
         <p:nvSpPr>
-          <p:cNvPr id="28" name="TextBox 27"/>
+          <p:cNvPr id="27" name="TextBox 26"/>
           <p:cNvSpPr txBox="1"/>
           <p:nvPr/>
         </p:nvSpPr>
@@ -15445,7 +14839,7 @@
       </p:sp>
       <p:sp>
         <p:nvSpPr>
-          <p:cNvPr id="29" name="Rectangle 28"/>
+          <p:cNvPr id="28" name="Rectangle 27"/>
           <p:cNvSpPr/>
           <p:nvPr/>
         </p:nvSpPr>
@@ -15494,7 +14888,7 @@
       </p:sp>
       <p:sp>
         <p:nvSpPr>
-          <p:cNvPr id="30" name="TextBox 29"/>
+          <p:cNvPr id="29" name="TextBox 28"/>
           <p:cNvSpPr txBox="1"/>
           <p:nvPr/>
         </p:nvSpPr>
@@ -15536,7 +14930,7 @@
       </p:sp>
       <p:sp>
         <p:nvSpPr>
-          <p:cNvPr id="31" name="TextBox 30"/>
+          <p:cNvPr id="30" name="TextBox 29"/>
           <p:cNvSpPr txBox="1"/>
           <p:nvPr/>
         </p:nvSpPr>
@@ -15578,7 +14972,7 @@
       </p:sp>
       <p:sp>
         <p:nvSpPr>
-          <p:cNvPr id="32" name="TextBox 31"/>
+          <p:cNvPr id="31" name="TextBox 30"/>
           <p:cNvSpPr txBox="1"/>
           <p:nvPr/>
         </p:nvSpPr>
@@ -15694,7 +15088,7 @@
         <p:spPr>
           <a:xfrm>
             <a:off x="640080" y="329184"/>
-            <a:ext cx="5303520" cy="182880"/>
+            <a:ext cx="9875520" cy="182880"/>
           </a:xfrm>
           <a:prstGeom prst="rect">
             <a:avLst/>
@@ -15735,48 +15129,6 @@
         </p:nvSpPr>
         <p:spPr>
           <a:xfrm>
-            <a:off x="5897880" y="310896"/>
-            <a:ext cx="4800600" cy="256032"/>
-          </a:xfrm>
-          <a:prstGeom prst="rect">
-            <a:avLst/>
-          </a:prstGeom>
-          <a:noFill/>
-        </p:spPr>
-        <p:txBody>
-          <a:bodyPr wrap="none" lIns="9144" rIns="9144" tIns="9144" bIns="9144" anchor="t">
-            <a:spAutoFit/>
-          </a:bodyPr>
-          <a:lstStyle/>
-          <a:p>
-            <a:pPr algn="r">
-              <a:spcAft>
-                <a:spcPts val="0"/>
-              </a:spcAft>
-              <a:defRPr sz="680" b="1">
-                <a:solidFill>
-                  <a:srgbClr val="4F6B00"/>
-                </a:solidFill>
-                <a:latin typeface="Inter"/>
-              </a:defRPr>
-            </a:pPr>
-            <a:r>
-              <a:rPr>
-                <a:latin typeface="Inter"/>
-              </a:rPr>
-              <a:t>Illustrative, Gradient Maintained — demo data, not the client's holdings or managers</a:t>
-            </a:r>
-          </a:p>
-        </p:txBody>
-      </p:sp>
-      <p:sp>
-        <p:nvSpPr>
-          <p:cNvPr id="5" name="TextBox 4"/>
-          <p:cNvSpPr txBox="1"/>
-          <p:nvPr/>
-        </p:nvSpPr>
-        <p:spPr>
-          <a:xfrm>
             <a:off x="640080" y="566928"/>
             <a:ext cx="10058400" cy="530352"/>
           </a:xfrm>
@@ -15813,7 +15165,7 @@
       </p:sp>
       <p:sp>
         <p:nvSpPr>
-          <p:cNvPr id="6" name="Rectangle 5"/>
+          <p:cNvPr id="5" name="Rectangle 4"/>
           <p:cNvSpPr/>
           <p:nvPr/>
         </p:nvSpPr>
@@ -15862,7 +15214,7 @@
       </p:sp>
       <p:sp>
         <p:nvSpPr>
-          <p:cNvPr id="7" name="Rectangle 6"/>
+          <p:cNvPr id="6" name="Rectangle 5"/>
           <p:cNvSpPr/>
           <p:nvPr/>
         </p:nvSpPr>
@@ -15911,7 +15263,7 @@
       </p:sp>
       <p:sp>
         <p:nvSpPr>
-          <p:cNvPr id="8" name="TextBox 7"/>
+          <p:cNvPr id="7" name="TextBox 6"/>
           <p:cNvSpPr txBox="1"/>
           <p:nvPr/>
         </p:nvSpPr>
@@ -15953,7 +15305,7 @@
       </p:sp>
       <p:sp>
         <p:nvSpPr>
-          <p:cNvPr id="9" name="TextBox 8"/>
+          <p:cNvPr id="8" name="TextBox 7"/>
           <p:cNvSpPr txBox="1"/>
           <p:nvPr/>
         </p:nvSpPr>
@@ -15995,7 +15347,7 @@
       </p:sp>
       <p:graphicFrame>
         <p:nvGraphicFramePr>
-          <p:cNvPr id="10" name="Table 9"/>
+          <p:cNvPr id="9" name="Table 8"/>
           <p:cNvGraphicFramePr>
             <a:graphicFrameLocks noGrp="1"/>
           </p:cNvGraphicFramePr>
@@ -16245,7 +15597,7 @@
       </p:graphicFrame>
       <p:sp>
         <p:nvSpPr>
-          <p:cNvPr id="11" name="Rectangle 10"/>
+          <p:cNvPr id="10" name="Rectangle 9"/>
           <p:cNvSpPr/>
           <p:nvPr/>
         </p:nvSpPr>
@@ -16294,7 +15646,7 @@
       </p:sp>
       <p:sp>
         <p:nvSpPr>
-          <p:cNvPr id="12" name="TextBox 11"/>
+          <p:cNvPr id="11" name="TextBox 10"/>
           <p:cNvSpPr txBox="1"/>
           <p:nvPr/>
         </p:nvSpPr>
@@ -16336,7 +15688,7 @@
       </p:sp>
       <p:graphicFrame>
         <p:nvGraphicFramePr>
-          <p:cNvPr id="13" name="Chart 12"/>
+          <p:cNvPr id="12" name="Chart 11"/>
           <p:cNvGraphicFramePr>
             <a:graphicFrameLocks noGrp="1"/>
           </p:cNvGraphicFramePr>
@@ -16354,7 +15706,7 @@
       </p:graphicFrame>
       <p:sp>
         <p:nvSpPr>
-          <p:cNvPr id="14" name="Rectangle 13"/>
+          <p:cNvPr id="13" name="Rectangle 12"/>
           <p:cNvSpPr/>
           <p:nvPr/>
         </p:nvSpPr>
@@ -16403,7 +15755,7 @@
       </p:sp>
       <p:sp>
         <p:nvSpPr>
-          <p:cNvPr id="15" name="TextBox 14"/>
+          <p:cNvPr id="14" name="TextBox 13"/>
           <p:cNvSpPr txBox="1"/>
           <p:nvPr/>
         </p:nvSpPr>
@@ -16445,7 +15797,7 @@
       </p:sp>
       <p:sp>
         <p:nvSpPr>
-          <p:cNvPr id="16" name="TextBox 15"/>
+          <p:cNvPr id="15" name="TextBox 14"/>
           <p:cNvSpPr txBox="1"/>
           <p:nvPr/>
         </p:nvSpPr>
@@ -16487,7 +15839,7 @@
       </p:sp>
       <p:sp>
         <p:nvSpPr>
-          <p:cNvPr id="17" name="TextBox 16"/>
+          <p:cNvPr id="16" name="TextBox 15"/>
           <p:cNvSpPr txBox="1"/>
           <p:nvPr/>
         </p:nvSpPr>
@@ -16603,7 +15955,7 @@
         <p:spPr>
           <a:xfrm>
             <a:off x="640080" y="329184"/>
-            <a:ext cx="5303520" cy="182880"/>
+            <a:ext cx="9875520" cy="182880"/>
           </a:xfrm>
           <a:prstGeom prst="rect">
             <a:avLst/>
@@ -16644,48 +15996,6 @@
         </p:nvSpPr>
         <p:spPr>
           <a:xfrm>
-            <a:off x="5897880" y="310896"/>
-            <a:ext cx="4800600" cy="256032"/>
-          </a:xfrm>
-          <a:prstGeom prst="rect">
-            <a:avLst/>
-          </a:prstGeom>
-          <a:noFill/>
-        </p:spPr>
-        <p:txBody>
-          <a:bodyPr wrap="none" lIns="9144" rIns="9144" tIns="9144" bIns="9144" anchor="t">
-            <a:spAutoFit/>
-          </a:bodyPr>
-          <a:lstStyle/>
-          <a:p>
-            <a:pPr algn="r">
-              <a:spcAft>
-                <a:spcPts val="0"/>
-              </a:spcAft>
-              <a:defRPr sz="680" b="1">
-                <a:solidFill>
-                  <a:srgbClr val="4F6B00"/>
-                </a:solidFill>
-                <a:latin typeface="Inter"/>
-              </a:defRPr>
-            </a:pPr>
-            <a:r>
-              <a:rPr>
-                <a:latin typeface="Inter"/>
-              </a:rPr>
-              <a:t>Illustrative, Gradient Maintained — demo data, not the client's holdings or managers</a:t>
-            </a:r>
-          </a:p>
-        </p:txBody>
-      </p:sp>
-      <p:sp>
-        <p:nvSpPr>
-          <p:cNvPr id="5" name="TextBox 4"/>
-          <p:cNvSpPr txBox="1"/>
-          <p:nvPr/>
-        </p:nvSpPr>
-        <p:spPr>
-          <a:xfrm>
             <a:off x="640080" y="566928"/>
             <a:ext cx="10058400" cy="530352"/>
           </a:xfrm>
@@ -16722,7 +16032,7 @@
       </p:sp>
       <p:sp>
         <p:nvSpPr>
-          <p:cNvPr id="6" name="Rectangle 5"/>
+          <p:cNvPr id="5" name="Rectangle 4"/>
           <p:cNvSpPr/>
           <p:nvPr/>
         </p:nvSpPr>
@@ -16771,7 +16081,7 @@
       </p:sp>
       <p:sp>
         <p:nvSpPr>
-          <p:cNvPr id="7" name="Rectangle 6"/>
+          <p:cNvPr id="6" name="Rectangle 5"/>
           <p:cNvSpPr/>
           <p:nvPr/>
         </p:nvSpPr>
@@ -16820,7 +16130,7 @@
       </p:sp>
       <p:sp>
         <p:nvSpPr>
-          <p:cNvPr id="8" name="TextBox 7"/>
+          <p:cNvPr id="7" name="TextBox 6"/>
           <p:cNvSpPr txBox="1"/>
           <p:nvPr/>
         </p:nvSpPr>
@@ -16862,7 +16172,7 @@
       </p:sp>
       <p:sp>
         <p:nvSpPr>
-          <p:cNvPr id="9" name="Rectangle 8"/>
+          <p:cNvPr id="8" name="Rectangle 7"/>
           <p:cNvSpPr/>
           <p:nvPr/>
         </p:nvSpPr>
@@ -16911,7 +16221,7 @@
       </p:sp>
       <p:sp>
         <p:nvSpPr>
-          <p:cNvPr id="10" name="Rectangle 9"/>
+          <p:cNvPr id="9" name="Rectangle 8"/>
           <p:cNvSpPr/>
           <p:nvPr/>
         </p:nvSpPr>
@@ -16960,7 +16270,7 @@
       </p:sp>
       <p:sp>
         <p:nvSpPr>
-          <p:cNvPr id="11" name="TextBox 10"/>
+          <p:cNvPr id="10" name="TextBox 9"/>
           <p:cNvSpPr txBox="1"/>
           <p:nvPr/>
         </p:nvSpPr>
@@ -17002,7 +16312,7 @@
       </p:sp>
       <p:sp>
         <p:nvSpPr>
-          <p:cNvPr id="12" name="TextBox 11"/>
+          <p:cNvPr id="11" name="TextBox 10"/>
           <p:cNvSpPr txBox="1"/>
           <p:nvPr/>
         </p:nvSpPr>
@@ -17044,7 +16354,7 @@
       </p:sp>
       <p:sp>
         <p:nvSpPr>
-          <p:cNvPr id="13" name="Rectangle 12"/>
+          <p:cNvPr id="12" name="Rectangle 11"/>
           <p:cNvSpPr/>
           <p:nvPr/>
         </p:nvSpPr>
@@ -17093,7 +16403,7 @@
       </p:sp>
       <p:sp>
         <p:nvSpPr>
-          <p:cNvPr id="14" name="TextBox 13"/>
+          <p:cNvPr id="13" name="TextBox 12"/>
           <p:cNvSpPr txBox="1"/>
           <p:nvPr/>
         </p:nvSpPr>
@@ -17135,7 +16445,7 @@
       </p:sp>
       <p:sp>
         <p:nvSpPr>
-          <p:cNvPr id="15" name="TextBox 14"/>
+          <p:cNvPr id="14" name="TextBox 13"/>
           <p:cNvSpPr txBox="1"/>
           <p:nvPr/>
         </p:nvSpPr>
@@ -17177,7 +16487,7 @@
       </p:sp>
       <p:sp>
         <p:nvSpPr>
-          <p:cNvPr id="16" name="TextBox 15"/>
+          <p:cNvPr id="15" name="TextBox 14"/>
           <p:cNvSpPr txBox="1"/>
           <p:nvPr/>
         </p:nvSpPr>
@@ -17293,7 +16603,7 @@
         <p:spPr>
           <a:xfrm>
             <a:off x="640080" y="329184"/>
-            <a:ext cx="5303520" cy="182880"/>
+            <a:ext cx="9875520" cy="182880"/>
           </a:xfrm>
           <a:prstGeom prst="rect">
             <a:avLst/>
@@ -17334,48 +16644,6 @@
         </p:nvSpPr>
         <p:spPr>
           <a:xfrm>
-            <a:off x="5897880" y="310896"/>
-            <a:ext cx="4800600" cy="256032"/>
-          </a:xfrm>
-          <a:prstGeom prst="rect">
-            <a:avLst/>
-          </a:prstGeom>
-          <a:noFill/>
-        </p:spPr>
-        <p:txBody>
-          <a:bodyPr wrap="none" lIns="9144" rIns="9144" tIns="9144" bIns="9144" anchor="t">
-            <a:spAutoFit/>
-          </a:bodyPr>
-          <a:lstStyle/>
-          <a:p>
-            <a:pPr algn="r">
-              <a:spcAft>
-                <a:spcPts val="0"/>
-              </a:spcAft>
-              <a:defRPr sz="680" b="1">
-                <a:solidFill>
-                  <a:srgbClr val="4F6B00"/>
-                </a:solidFill>
-                <a:latin typeface="Inter"/>
-              </a:defRPr>
-            </a:pPr>
-            <a:r>
-              <a:rPr>
-                <a:latin typeface="Inter"/>
-              </a:rPr>
-              <a:t>Illustrative, Gradient Maintained — demo data, not the client's holdings or managers</a:t>
-            </a:r>
-          </a:p>
-        </p:txBody>
-      </p:sp>
-      <p:sp>
-        <p:nvSpPr>
-          <p:cNvPr id="5" name="TextBox 4"/>
-          <p:cNvSpPr txBox="1"/>
-          <p:nvPr/>
-        </p:nvSpPr>
-        <p:spPr>
-          <a:xfrm>
             <a:off x="640080" y="566928"/>
             <a:ext cx="10058400" cy="530352"/>
           </a:xfrm>
@@ -17412,7 +16680,7 @@
       </p:sp>
       <p:sp>
         <p:nvSpPr>
-          <p:cNvPr id="6" name="Rectangle 5"/>
+          <p:cNvPr id="5" name="Rectangle 4"/>
           <p:cNvSpPr/>
           <p:nvPr/>
         </p:nvSpPr>
@@ -17461,7 +16729,7 @@
       </p:sp>
       <p:sp>
         <p:nvSpPr>
-          <p:cNvPr id="7" name="Rectangle 6"/>
+          <p:cNvPr id="6" name="Rectangle 5"/>
           <p:cNvSpPr/>
           <p:nvPr/>
         </p:nvSpPr>
@@ -17510,7 +16778,7 @@
       </p:sp>
       <p:sp>
         <p:nvSpPr>
-          <p:cNvPr id="8" name="TextBox 7"/>
+          <p:cNvPr id="7" name="TextBox 6"/>
           <p:cNvSpPr txBox="1"/>
           <p:nvPr/>
         </p:nvSpPr>
@@ -17552,7 +16820,7 @@
       </p:sp>
       <p:sp>
         <p:nvSpPr>
-          <p:cNvPr id="9" name="Rectangle 8"/>
+          <p:cNvPr id="8" name="Rectangle 7"/>
           <p:cNvSpPr/>
           <p:nvPr/>
         </p:nvSpPr>
@@ -17601,7 +16869,7 @@
       </p:sp>
       <p:sp>
         <p:nvSpPr>
-          <p:cNvPr id="10" name="Rectangle 9"/>
+          <p:cNvPr id="9" name="Rectangle 8"/>
           <p:cNvSpPr/>
           <p:nvPr/>
         </p:nvSpPr>
@@ -17650,7 +16918,7 @@
       </p:sp>
       <p:sp>
         <p:nvSpPr>
-          <p:cNvPr id="11" name="TextBox 10"/>
+          <p:cNvPr id="10" name="TextBox 9"/>
           <p:cNvSpPr txBox="1"/>
           <p:nvPr/>
         </p:nvSpPr>
@@ -17692,7 +16960,7 @@
       </p:sp>
       <p:sp>
         <p:nvSpPr>
-          <p:cNvPr id="12" name="TextBox 11"/>
+          <p:cNvPr id="11" name="TextBox 10"/>
           <p:cNvSpPr txBox="1"/>
           <p:nvPr/>
         </p:nvSpPr>
@@ -17734,7 +17002,7 @@
       </p:sp>
       <p:sp>
         <p:nvSpPr>
-          <p:cNvPr id="13" name="Rectangle 12"/>
+          <p:cNvPr id="12" name="Rectangle 11"/>
           <p:cNvSpPr/>
           <p:nvPr/>
         </p:nvSpPr>
@@ -17783,7 +17051,7 @@
       </p:sp>
       <p:sp>
         <p:nvSpPr>
-          <p:cNvPr id="14" name="Rectangle 13"/>
+          <p:cNvPr id="13" name="Rectangle 12"/>
           <p:cNvSpPr/>
           <p:nvPr/>
         </p:nvSpPr>
@@ -17832,7 +17100,7 @@
       </p:sp>
       <p:sp>
         <p:nvSpPr>
-          <p:cNvPr id="15" name="TextBox 14"/>
+          <p:cNvPr id="14" name="TextBox 13"/>
           <p:cNvSpPr txBox="1"/>
           <p:nvPr/>
         </p:nvSpPr>
@@ -17874,7 +17142,7 @@
       </p:sp>
       <p:sp>
         <p:nvSpPr>
-          <p:cNvPr id="16" name="TextBox 15"/>
+          <p:cNvPr id="15" name="TextBox 14"/>
           <p:cNvSpPr txBox="1"/>
           <p:nvPr/>
         </p:nvSpPr>
@@ -17909,14 +17177,14 @@
               <a:rPr>
                 <a:latin typeface="Inter"/>
               </a:rPr>
-              <a:t>Not available — regulatory detail was not included in the reviewed evidence [S1].</a:t>
-            </a:r>
-          </a:p>
-        </p:txBody>
-      </p:sp>
-      <p:sp>
-        <p:nvSpPr>
-          <p:cNvPr id="17" name="Rectangle 16"/>
+              <a:t>Regulatory detail was not included in the reviewed evidence [S1].</a:t>
+            </a:r>
+          </a:p>
+        </p:txBody>
+      </p:sp>
+      <p:sp>
+        <p:nvSpPr>
+          <p:cNvPr id="16" name="Rectangle 15"/>
           <p:cNvSpPr/>
           <p:nvPr/>
         </p:nvSpPr>
@@ -17965,7 +17233,7 @@
       </p:sp>
       <p:sp>
         <p:nvSpPr>
-          <p:cNvPr id="18" name="Rectangle 17"/>
+          <p:cNvPr id="17" name="Rectangle 16"/>
           <p:cNvSpPr/>
           <p:nvPr/>
         </p:nvSpPr>
@@ -18014,7 +17282,7 @@
       </p:sp>
       <p:sp>
         <p:nvSpPr>
-          <p:cNvPr id="19" name="TextBox 18"/>
+          <p:cNvPr id="18" name="TextBox 17"/>
           <p:cNvSpPr txBox="1"/>
           <p:nvPr/>
         </p:nvSpPr>
@@ -18056,7 +17324,7 @@
       </p:sp>
       <p:sp>
         <p:nvSpPr>
-          <p:cNvPr id="20" name="TextBox 19"/>
+          <p:cNvPr id="19" name="TextBox 18"/>
           <p:cNvSpPr txBox="1"/>
           <p:nvPr/>
         </p:nvSpPr>
@@ -18098,7 +17366,7 @@
       </p:sp>
       <p:sp>
         <p:nvSpPr>
-          <p:cNvPr id="21" name="Rectangle 20"/>
+          <p:cNvPr id="20" name="Rectangle 19"/>
           <p:cNvSpPr/>
           <p:nvPr/>
         </p:nvSpPr>
@@ -18147,7 +17415,7 @@
       </p:sp>
       <p:sp>
         <p:nvSpPr>
-          <p:cNvPr id="22" name="TextBox 21"/>
+          <p:cNvPr id="21" name="TextBox 20"/>
           <p:cNvSpPr txBox="1"/>
           <p:nvPr/>
         </p:nvSpPr>
@@ -18189,7 +17457,7 @@
       </p:sp>
       <p:sp>
         <p:nvSpPr>
-          <p:cNvPr id="23" name="TextBox 22"/>
+          <p:cNvPr id="22" name="TextBox 21"/>
           <p:cNvSpPr txBox="1"/>
           <p:nvPr/>
         </p:nvSpPr>
@@ -18231,7 +17499,7 @@
       </p:sp>
       <p:sp>
         <p:nvSpPr>
-          <p:cNvPr id="24" name="TextBox 23"/>
+          <p:cNvPr id="23" name="TextBox 22"/>
           <p:cNvSpPr txBox="1"/>
           <p:nvPr/>
         </p:nvSpPr>
@@ -18347,7 +17615,7 @@
         <p:spPr>
           <a:xfrm>
             <a:off x="640080" y="329184"/>
-            <a:ext cx="5303520" cy="182880"/>
+            <a:ext cx="9875520" cy="182880"/>
           </a:xfrm>
           <a:prstGeom prst="rect">
             <a:avLst/>
@@ -18388,48 +17656,6 @@
         </p:nvSpPr>
         <p:spPr>
           <a:xfrm>
-            <a:off x="5897880" y="310896"/>
-            <a:ext cx="4800600" cy="256032"/>
-          </a:xfrm>
-          <a:prstGeom prst="rect">
-            <a:avLst/>
-          </a:prstGeom>
-          <a:noFill/>
-        </p:spPr>
-        <p:txBody>
-          <a:bodyPr wrap="none" lIns="9144" rIns="9144" tIns="9144" bIns="9144" anchor="t">
-            <a:spAutoFit/>
-          </a:bodyPr>
-          <a:lstStyle/>
-          <a:p>
-            <a:pPr algn="r">
-              <a:spcAft>
-                <a:spcPts val="0"/>
-              </a:spcAft>
-              <a:defRPr sz="680" b="1">
-                <a:solidFill>
-                  <a:srgbClr val="4F6B00"/>
-                </a:solidFill>
-                <a:latin typeface="Inter"/>
-              </a:defRPr>
-            </a:pPr>
-            <a:r>
-              <a:rPr>
-                <a:latin typeface="Inter"/>
-              </a:rPr>
-              <a:t>Illustrative, Gradient Maintained — demo data, not the client's holdings or managers</a:t>
-            </a:r>
-          </a:p>
-        </p:txBody>
-      </p:sp>
-      <p:sp>
-        <p:nvSpPr>
-          <p:cNvPr id="5" name="TextBox 4"/>
-          <p:cNvSpPr txBox="1"/>
-          <p:nvPr/>
-        </p:nvSpPr>
-        <p:spPr>
-          <a:xfrm>
             <a:off x="640080" y="566928"/>
             <a:ext cx="10058400" cy="530352"/>
           </a:xfrm>
@@ -18466,7 +17692,7 @@
       </p:sp>
       <p:sp>
         <p:nvSpPr>
-          <p:cNvPr id="6" name="Rectangle 5"/>
+          <p:cNvPr id="5" name="Rectangle 4"/>
           <p:cNvSpPr/>
           <p:nvPr/>
         </p:nvSpPr>
@@ -18515,7 +17741,7 @@
       </p:sp>
       <p:sp>
         <p:nvSpPr>
-          <p:cNvPr id="7" name="Rectangle 6"/>
+          <p:cNvPr id="6" name="Rectangle 5"/>
           <p:cNvSpPr/>
           <p:nvPr/>
         </p:nvSpPr>
@@ -18564,7 +17790,7 @@
       </p:sp>
       <p:sp>
         <p:nvSpPr>
-          <p:cNvPr id="8" name="TextBox 7"/>
+          <p:cNvPr id="7" name="TextBox 6"/>
           <p:cNvSpPr txBox="1"/>
           <p:nvPr/>
         </p:nvSpPr>
@@ -18606,7 +17832,7 @@
       </p:sp>
       <p:graphicFrame>
         <p:nvGraphicFramePr>
-          <p:cNvPr id="9" name="Chart 8"/>
+          <p:cNvPr id="8" name="Chart 7"/>
           <p:cNvGraphicFramePr>
             <a:graphicFrameLocks noGrp="1"/>
           </p:cNvGraphicFramePr>
@@ -18624,7 +17850,7 @@
       </p:graphicFrame>
       <p:sp>
         <p:nvSpPr>
-          <p:cNvPr id="10" name="Rectangle 9"/>
+          <p:cNvPr id="9" name="Rectangle 8"/>
           <p:cNvSpPr/>
           <p:nvPr/>
         </p:nvSpPr>
@@ -18673,7 +17899,7 @@
       </p:sp>
       <p:sp>
         <p:nvSpPr>
-          <p:cNvPr id="11" name="Rectangle 10"/>
+          <p:cNvPr id="10" name="Rectangle 9"/>
           <p:cNvSpPr/>
           <p:nvPr/>
         </p:nvSpPr>
@@ -18722,7 +17948,7 @@
       </p:sp>
       <p:sp>
         <p:nvSpPr>
-          <p:cNvPr id="12" name="TextBox 11"/>
+          <p:cNvPr id="11" name="TextBox 10"/>
           <p:cNvSpPr txBox="1"/>
           <p:nvPr/>
         </p:nvSpPr>
@@ -18764,7 +17990,7 @@
       </p:sp>
       <p:sp>
         <p:nvSpPr>
-          <p:cNvPr id="13" name="TextBox 12"/>
+          <p:cNvPr id="12" name="TextBox 11"/>
           <p:cNvSpPr txBox="1"/>
           <p:nvPr/>
         </p:nvSpPr>
@@ -18806,7 +18032,7 @@
       </p:sp>
       <p:sp>
         <p:nvSpPr>
-          <p:cNvPr id="14" name="Rectangle 13"/>
+          <p:cNvPr id="13" name="Rectangle 12"/>
           <p:cNvSpPr/>
           <p:nvPr/>
         </p:nvSpPr>
@@ -18855,7 +18081,7 @@
       </p:sp>
       <p:sp>
         <p:nvSpPr>
-          <p:cNvPr id="15" name="TextBox 14"/>
+          <p:cNvPr id="14" name="TextBox 13"/>
           <p:cNvSpPr txBox="1"/>
           <p:nvPr/>
         </p:nvSpPr>
@@ -18897,7 +18123,7 @@
       </p:sp>
       <p:sp>
         <p:nvSpPr>
-          <p:cNvPr id="16" name="TextBox 15"/>
+          <p:cNvPr id="15" name="TextBox 14"/>
           <p:cNvSpPr txBox="1"/>
           <p:nvPr/>
         </p:nvSpPr>
@@ -18939,7 +18165,7 @@
       </p:sp>
       <p:sp>
         <p:nvSpPr>
-          <p:cNvPr id="17" name="TextBox 16"/>
+          <p:cNvPr id="16" name="TextBox 15"/>
           <p:cNvSpPr txBox="1"/>
           <p:nvPr/>
         </p:nvSpPr>
